--- a/Presentation/IoMT_IDS_Presentation.pptx
+++ b/Presentation/IoMT_IDS_Presentation.pptx
@@ -5,7 +5,7 @@
     <p:sldMasterId id="2147483648" r:id="rId1"/>
   </p:sldMasterIdLst>
   <p:notesMasterIdLst>
-    <p:notesMasterId r:id="rId14"/>
+    <p:notesMasterId r:id="rId13"/>
   </p:notesMasterIdLst>
   <p:sldIdLst>
     <p:sldId id="256" r:id="rId2"/>
@@ -15,11 +15,10 @@
     <p:sldId id="271" r:id="rId6"/>
     <p:sldId id="268" r:id="rId7"/>
     <p:sldId id="261" r:id="rId8"/>
-    <p:sldId id="262" r:id="rId9"/>
-    <p:sldId id="263" r:id="rId10"/>
-    <p:sldId id="264" r:id="rId11"/>
-    <p:sldId id="265" r:id="rId12"/>
-    <p:sldId id="266" r:id="rId13"/>
+    <p:sldId id="263" r:id="rId9"/>
+    <p:sldId id="264" r:id="rId10"/>
+    <p:sldId id="265" r:id="rId11"/>
+    <p:sldId id="266" r:id="rId12"/>
   </p:sldIdLst>
   <p:sldSz cx="9144000" cy="6858000" type="screen4x3"/>
   <p:notesSz cx="6858000" cy="9144000"/>
@@ -140,7 +139,7 @@
 <file path=ppt/revisionInfo.xml><?xml version="1.0" encoding="utf-8"?>
 <p1510:revInfo xmlns:a="http://schemas.openxmlformats.org/drawingml/2006/main" xmlns:r="http://schemas.openxmlformats.org/officeDocument/2006/relationships" xmlns:p1510="http://schemas.microsoft.com/office/powerpoint/2015/10/main">
   <p1510:revLst>
-    <p1510:client id="{7BF04AB4-6846-4849-A1B8-6A167A3B7532}" v="271" dt="2026-03-18T22:08:55.508"/>
+    <p1510:client id="{7BF04AB4-6846-4849-A1B8-6A167A3B7532}" v="395" dt="2026-03-19T15:25:41.810"/>
   </p1510:revLst>
 </p1510:revInfo>
 </file>
@@ -150,7 +149,7 @@
   <pc:docChgLst>
     <pc:chgData name="耀泉 马" userId="19e30af8d5659de2" providerId="LiveId" clId="{C3594856-CEDA-5129-B2AF-7962E3CA4CA3}"/>
     <pc:docChg chg="undo custSel addSld delSld modSld sldOrd">
-      <pc:chgData name="耀泉 马" userId="19e30af8d5659de2" providerId="LiveId" clId="{C3594856-CEDA-5129-B2AF-7962E3CA4CA3}" dt="2026-03-18T22:09:36.506" v="2891" actId="2696"/>
+      <pc:chgData name="耀泉 马" userId="19e30af8d5659de2" providerId="LiveId" clId="{C3594856-CEDA-5129-B2AF-7962E3CA4CA3}" dt="2026-03-19T15:43:19.766" v="3032" actId="20577"/>
       <pc:docMkLst>
         <pc:docMk/>
       </pc:docMkLst>
@@ -231,22 +230,6 @@
           <pc:docMk/>
           <pc:sldMk cId="0" sldId="257"/>
         </pc:sldMkLst>
-        <pc:spChg chg="mod">
-          <ac:chgData name="耀泉 马" userId="19e30af8d5659de2" providerId="LiveId" clId="{C3594856-CEDA-5129-B2AF-7962E3CA4CA3}" dt="2026-03-17T20:49:03.171" v="54" actId="26606"/>
-          <ac:spMkLst>
-            <pc:docMk/>
-            <pc:sldMk cId="0" sldId="257"/>
-            <ac:spMk id="2" creationId="{00000000-0000-0000-0000-000000000000}"/>
-          </ac:spMkLst>
-        </pc:spChg>
-        <pc:spChg chg="del">
-          <ac:chgData name="耀泉 马" userId="19e30af8d5659de2" providerId="LiveId" clId="{C3594856-CEDA-5129-B2AF-7962E3CA4CA3}" dt="2026-03-17T20:49:03.171" v="54" actId="26606"/>
-          <ac:spMkLst>
-            <pc:docMk/>
-            <pc:sldMk cId="0" sldId="257"/>
-            <ac:spMk id="3" creationId="{00000000-0000-0000-0000-000000000000}"/>
-          </ac:spMkLst>
-        </pc:spChg>
         <pc:spChg chg="add del mod">
           <ac:chgData name="耀泉 马" userId="19e30af8d5659de2" providerId="LiveId" clId="{C3594856-CEDA-5129-B2AF-7962E3CA4CA3}" dt="2026-03-18T19:28:19.056" v="1599" actId="478"/>
           <ac:spMkLst>
@@ -261,38 +244,6 @@
             <pc:docMk/>
             <pc:sldMk cId="0" sldId="257"/>
             <ac:spMk id="6" creationId="{624F9F52-2DCC-4B10-9313-D03274AF554E}"/>
-          </ac:spMkLst>
-        </pc:spChg>
-        <pc:spChg chg="add">
-          <ac:chgData name="耀泉 马" userId="19e30af8d5659de2" providerId="LiveId" clId="{C3594856-CEDA-5129-B2AF-7962E3CA4CA3}" dt="2026-03-17T20:49:03.171" v="54" actId="26606"/>
-          <ac:spMkLst>
-            <pc:docMk/>
-            <pc:sldMk cId="0" sldId="257"/>
-            <ac:spMk id="9" creationId="{BACC6370-2D7E-4714-9D71-7542949D7D5D}"/>
-          </ac:spMkLst>
-        </pc:spChg>
-        <pc:spChg chg="add">
-          <ac:chgData name="耀泉 马" userId="19e30af8d5659de2" providerId="LiveId" clId="{C3594856-CEDA-5129-B2AF-7962E3CA4CA3}" dt="2026-03-17T20:49:03.171" v="54" actId="26606"/>
-          <ac:spMkLst>
-            <pc:docMk/>
-            <pc:sldMk cId="0" sldId="257"/>
-            <ac:spMk id="11" creationId="{F68B3F68-107C-434F-AA38-110D5EA91B85}"/>
-          </ac:spMkLst>
-        </pc:spChg>
-        <pc:spChg chg="add">
-          <ac:chgData name="耀泉 马" userId="19e30af8d5659de2" providerId="LiveId" clId="{C3594856-CEDA-5129-B2AF-7962E3CA4CA3}" dt="2026-03-17T20:49:03.171" v="54" actId="26606"/>
-          <ac:spMkLst>
-            <pc:docMk/>
-            <pc:sldMk cId="0" sldId="257"/>
-            <ac:spMk id="13" creationId="{AAD0DBB9-1A4B-4391-81D4-CB19F9AB918A}"/>
-          </ac:spMkLst>
-        </pc:spChg>
-        <pc:spChg chg="add">
-          <ac:chgData name="耀泉 马" userId="19e30af8d5659de2" providerId="LiveId" clId="{C3594856-CEDA-5129-B2AF-7962E3CA4CA3}" dt="2026-03-17T20:49:03.171" v="54" actId="26606"/>
-          <ac:spMkLst>
-            <pc:docMk/>
-            <pc:sldMk cId="0" sldId="257"/>
-            <ac:spMk id="15" creationId="{063BBA22-50EA-4C4D-BE05-F1CE4E63AA56}"/>
           </ac:spMkLst>
         </pc:spChg>
         <pc:spChg chg="add mod">
@@ -406,14 +357,6 @@
             <ac:spMk id="2" creationId="{00000000-0000-0000-0000-000000000000}"/>
           </ac:spMkLst>
         </pc:spChg>
-        <pc:spChg chg="del">
-          <ac:chgData name="耀泉 马" userId="19e30af8d5659de2" providerId="LiveId" clId="{C3594856-CEDA-5129-B2AF-7962E3CA4CA3}" dt="2026-03-17T20:49:47.708" v="55" actId="26606"/>
-          <ac:spMkLst>
-            <pc:docMk/>
-            <pc:sldMk cId="0" sldId="258"/>
-            <ac:spMk id="3" creationId="{00000000-0000-0000-0000-000000000000}"/>
-          </ac:spMkLst>
-        </pc:spChg>
         <pc:spChg chg="add">
           <ac:chgData name="耀泉 马" userId="19e30af8d5659de2" providerId="LiveId" clId="{C3594856-CEDA-5129-B2AF-7962E3CA4CA3}" dt="2026-03-17T20:49:47.708" v="55" actId="26606"/>
           <ac:spMkLst>
@@ -472,7 +415,7 @@
         </pc:graphicFrameChg>
       </pc:sldChg>
       <pc:sldChg chg="addSp delSp modSp mod setBg">
-        <pc:chgData name="耀泉 马" userId="19e30af8d5659de2" providerId="LiveId" clId="{C3594856-CEDA-5129-B2AF-7962E3CA4CA3}" dt="2026-03-18T09:45:43.142" v="256" actId="20577"/>
+        <pc:chgData name="耀泉 马" userId="19e30af8d5659de2" providerId="LiveId" clId="{C3594856-CEDA-5129-B2AF-7962E3CA4CA3}" dt="2026-03-19T15:14:05.952" v="3011" actId="20577"/>
         <pc:sldMkLst>
           <pc:docMk/>
           <pc:sldMk cId="0" sldId="259"/>
@@ -485,14 +428,6 @@
             <ac:spMk id="2" creationId="{00000000-0000-0000-0000-000000000000}"/>
           </ac:spMkLst>
         </pc:spChg>
-        <pc:spChg chg="del">
-          <ac:chgData name="耀泉 马" userId="19e30af8d5659de2" providerId="LiveId" clId="{C3594856-CEDA-5129-B2AF-7962E3CA4CA3}" dt="2026-03-17T20:49:58.716" v="56" actId="26606"/>
-          <ac:spMkLst>
-            <pc:docMk/>
-            <pc:sldMk cId="0" sldId="259"/>
-            <ac:spMk id="3" creationId="{00000000-0000-0000-0000-000000000000}"/>
-          </ac:spMkLst>
-        </pc:spChg>
         <pc:spChg chg="add">
           <ac:chgData name="耀泉 马" userId="19e30af8d5659de2" providerId="LiveId" clId="{C3594856-CEDA-5129-B2AF-7962E3CA4CA3}" dt="2026-03-17T20:49:58.716" v="56" actId="26606"/>
           <ac:spMkLst>
@@ -542,7 +477,7 @@
           </ac:spMkLst>
         </pc:spChg>
         <pc:graphicFrameChg chg="add mod">
-          <ac:chgData name="耀泉 马" userId="19e30af8d5659de2" providerId="LiveId" clId="{C3594856-CEDA-5129-B2AF-7962E3CA4CA3}" dt="2026-03-18T09:45:43.142" v="256" actId="20577"/>
+          <ac:chgData name="耀泉 马" userId="19e30af8d5659de2" providerId="LiveId" clId="{C3594856-CEDA-5129-B2AF-7962E3CA4CA3}" dt="2026-03-19T15:14:05.952" v="3011" actId="20577"/>
           <ac:graphicFrameMkLst>
             <pc:docMk/>
             <pc:sldMk cId="0" sldId="259"/>
@@ -734,13 +669,13 @@
         </pc:picChg>
       </pc:sldChg>
       <pc:sldChg chg="addSp delSp modSp mod ord">
-        <pc:chgData name="耀泉 马" userId="19e30af8d5659de2" providerId="LiveId" clId="{C3594856-CEDA-5129-B2AF-7962E3CA4CA3}" dt="2026-03-18T22:09:26.524" v="2890" actId="1076"/>
+        <pc:chgData name="耀泉 马" userId="19e30af8d5659de2" providerId="LiveId" clId="{C3594856-CEDA-5129-B2AF-7962E3CA4CA3}" dt="2026-03-19T15:43:19.766" v="3032" actId="20577"/>
         <pc:sldMkLst>
           <pc:docMk/>
           <pc:sldMk cId="0" sldId="261"/>
         </pc:sldMkLst>
         <pc:spChg chg="mod">
-          <ac:chgData name="耀泉 马" userId="19e30af8d5659de2" providerId="LiveId" clId="{C3594856-CEDA-5129-B2AF-7962E3CA4CA3}" dt="2026-03-18T22:09:26.524" v="2890" actId="1076"/>
+          <ac:chgData name="耀泉 马" userId="19e30af8d5659de2" providerId="LiveId" clId="{C3594856-CEDA-5129-B2AF-7962E3CA4CA3}" dt="2026-03-19T15:43:19.766" v="3032" actId="20577"/>
           <ac:spMkLst>
             <pc:docMk/>
             <pc:sldMk cId="0" sldId="261"/>
@@ -780,17 +715,39 @@
           </ac:picMkLst>
         </pc:picChg>
       </pc:sldChg>
-      <pc:sldChg chg="modSp mod">
-        <pc:chgData name="耀泉 马" userId="19e30af8d5659de2" providerId="LiveId" clId="{C3594856-CEDA-5129-B2AF-7962E3CA4CA3}" dt="2026-03-17T20:52:22.569" v="130" actId="20577"/>
+      <pc:sldChg chg="modSp del mod">
+        <pc:chgData name="耀泉 马" userId="19e30af8d5659de2" providerId="LiveId" clId="{C3594856-CEDA-5129-B2AF-7962E3CA4CA3}" dt="2026-03-19T15:19:45.238" v="3014" actId="2696"/>
         <pc:sldMkLst>
           <pc:docMk/>
           <pc:sldMk cId="0" sldId="262"/>
         </pc:sldMkLst>
+      </pc:sldChg>
+      <pc:sldChg chg="modSp mod">
+        <pc:chgData name="耀泉 马" userId="19e30af8d5659de2" providerId="LiveId" clId="{C3594856-CEDA-5129-B2AF-7962E3CA4CA3}" dt="2026-03-19T15:16:36.398" v="3013" actId="20577"/>
+        <pc:sldMkLst>
+          <pc:docMk/>
+          <pc:sldMk cId="0" sldId="263"/>
+        </pc:sldMkLst>
         <pc:spChg chg="mod">
-          <ac:chgData name="耀泉 马" userId="19e30af8d5659de2" providerId="LiveId" clId="{C3594856-CEDA-5129-B2AF-7962E3CA4CA3}" dt="2026-03-17T20:52:22.569" v="130" actId="20577"/>
+          <ac:chgData name="耀泉 马" userId="19e30af8d5659de2" providerId="LiveId" clId="{C3594856-CEDA-5129-B2AF-7962E3CA4CA3}" dt="2026-03-19T15:16:36.398" v="3013" actId="20577"/>
           <ac:spMkLst>
             <pc:docMk/>
-            <pc:sldMk cId="0" sldId="262"/>
+            <pc:sldMk cId="0" sldId="263"/>
+            <ac:spMk id="3" creationId="{00000000-0000-0000-0000-000000000000}"/>
+          </ac:spMkLst>
+        </pc:spChg>
+      </pc:sldChg>
+      <pc:sldChg chg="modSp mod">
+        <pc:chgData name="耀泉 马" userId="19e30af8d5659de2" providerId="LiveId" clId="{C3594856-CEDA-5129-B2AF-7962E3CA4CA3}" dt="2026-03-19T15:25:41.900" v="3029" actId="27636"/>
+        <pc:sldMkLst>
+          <pc:docMk/>
+          <pc:sldMk cId="0" sldId="265"/>
+        </pc:sldMkLst>
+        <pc:spChg chg="mod">
+          <ac:chgData name="耀泉 马" userId="19e30af8d5659de2" providerId="LiveId" clId="{C3594856-CEDA-5129-B2AF-7962E3CA4CA3}" dt="2026-03-19T15:25:41.900" v="3029" actId="27636"/>
+          <ac:spMkLst>
+            <pc:docMk/>
+            <pc:sldMk cId="0" sldId="265"/>
             <ac:spMk id="3" creationId="{00000000-0000-0000-0000-000000000000}"/>
           </ac:spMkLst>
         </pc:spChg>
@@ -7090,7 +7047,7 @@
         <a:lstStyle/>
         <a:p>
           <a:r>
-            <a:rPr lang="en-US"/>
+            <a:rPr lang="en-US" dirty="0"/>
             <a:t>IDS types: Signature-based, ML/DL-based</a:t>
           </a:r>
         </a:p>
@@ -7126,7 +7083,7 @@
         <a:lstStyle/>
         <a:p>
           <a:r>
-            <a:rPr lang="en-US"/>
+            <a:rPr lang="en-US" dirty="0"/>
             <a:t>Deployment: Edge-based, Cloud-based, Hybrid</a:t>
           </a:r>
         </a:p>
@@ -7162,7 +7119,7 @@
         <a:lstStyle/>
         <a:p>
           <a:r>
-            <a:rPr lang="en-US"/>
+            <a:rPr lang="en-US" dirty="0"/>
             <a:t>Existing methods: Lightweight ML, Federated Learning, Split Learning</a:t>
           </a:r>
         </a:p>
@@ -7198,8 +7155,16 @@
         <a:lstStyle/>
         <a:p>
           <a:r>
-            <a:rPr lang="en-US"/>
-            <a:t>Limitations: Accuracy vs Deployability trade-off</a:t>
+            <a:rPr lang="en-US" dirty="0"/>
+            <a:t>Limitations: Accuracy vs </a:t>
+          </a:r>
+          <a:r>
+            <a:rPr lang="en-US" dirty="0" err="1"/>
+            <a:t>Deployability</a:t>
+          </a:r>
+          <a:r>
+            <a:rPr lang="en-US" dirty="0"/>
+            <a:t> trade-off</a:t>
           </a:r>
         </a:p>
       </dgm:t>
@@ -7370,9 +7335,14 @@
         <a:lstStyle/>
         <a:p>
           <a:r>
-            <a:rPr lang="en-US" dirty="0"/>
-            <a:t>Existing IDS: too simple or too complex</a:t>
+            <a:rPr lang="en-GB" dirty="0"/>
+            <a:t>Edge IDS: </a:t>
           </a:r>
+          <a:r>
+            <a:rPr lang="en-GB" b="1" dirty="0"/>
+            <a:t>simple ML and Federated Learning</a:t>
+          </a:r>
+          <a:endParaRPr lang="en-US" dirty="0"/>
         </a:p>
       </dgm:t>
     </dgm:pt>
@@ -7445,6 +7415,19 @@
             <a:rPr lang="en-US" dirty="0"/>
             <a:t>Evaluate Feature Selection, PCA, Autoencoder</a:t>
           </a:r>
+          <a:r>
+            <a:rPr lang="en-US" altLang="zh-CN" dirty="0"/>
+            <a:t>,</a:t>
+          </a:r>
+          <a:r>
+            <a:rPr lang="zh-CN" altLang="en-US" dirty="0"/>
+            <a:t> </a:t>
+          </a:r>
+          <a:r>
+            <a:rPr lang="en-US" altLang="zh-CN" dirty="0" err="1"/>
+            <a:t>ResNext</a:t>
+          </a:r>
+          <a:endParaRPr lang="en-US" dirty="0"/>
         </a:p>
       </dgm:t>
     </dgm:pt>
@@ -8455,7 +8438,7 @@
             <a:buNone/>
           </a:pPr>
           <a:r>
-            <a:rPr lang="en-US" sz="2600" kern="1200"/>
+            <a:rPr lang="en-US" sz="2600" kern="1200" dirty="0"/>
             <a:t>IDS types: Signature-based, ML/DL-based</a:t>
           </a:r>
         </a:p>
@@ -8549,7 +8532,7 @@
             <a:buNone/>
           </a:pPr>
           <a:r>
-            <a:rPr lang="en-US" sz="2600" kern="1200"/>
+            <a:rPr lang="en-US" sz="2600" kern="1200" dirty="0"/>
             <a:t>Deployment: Edge-based, Cloud-based, Hybrid</a:t>
           </a:r>
         </a:p>
@@ -8643,7 +8626,7 @@
             <a:buNone/>
           </a:pPr>
           <a:r>
-            <a:rPr lang="en-US" sz="2600" kern="1200"/>
+            <a:rPr lang="en-US" sz="2600" kern="1200" dirty="0"/>
             <a:t>Existing methods: Lightweight ML, Federated Learning, Split Learning</a:t>
           </a:r>
         </a:p>
@@ -8737,8 +8720,16 @@
             <a:buNone/>
           </a:pPr>
           <a:r>
-            <a:rPr lang="en-US" sz="2600" kern="1200"/>
-            <a:t>Limitations: Accuracy vs Deployability trade-off</a:t>
+            <a:rPr lang="en-US" sz="2600" kern="1200" dirty="0"/>
+            <a:t>Limitations: Accuracy vs </a:t>
+          </a:r>
+          <a:r>
+            <a:rPr lang="en-US" sz="2600" kern="1200" dirty="0" err="1"/>
+            <a:t>Deployability</a:t>
+          </a:r>
+          <a:r>
+            <a:rPr lang="en-US" sz="2600" kern="1200" dirty="0"/>
+            <a:t> trade-off</a:t>
           </a:r>
         </a:p>
       </dsp:txBody>
@@ -9017,9 +9008,14 @@
             <a:buNone/>
           </a:pPr>
           <a:r>
-            <a:rPr lang="en-US" sz="3000" kern="1200" dirty="0"/>
-            <a:t>Existing IDS: too simple or too complex</a:t>
+            <a:rPr lang="en-GB" sz="3000" kern="1200" dirty="0"/>
+            <a:t>Edge IDS: </a:t>
           </a:r>
+          <a:r>
+            <a:rPr lang="en-GB" sz="3000" b="1" kern="1200" dirty="0"/>
+            <a:t>simple ML and Federated Learning</a:t>
+          </a:r>
+          <a:endParaRPr lang="en-US" sz="3000" kern="1200" dirty="0"/>
         </a:p>
       </dsp:txBody>
       <dsp:txXfrm>
@@ -9288,6 +9284,19 @@
             <a:rPr lang="en-US" sz="3000" kern="1200" dirty="0"/>
             <a:t>Evaluate Feature Selection, PCA, Autoencoder</a:t>
           </a:r>
+          <a:r>
+            <a:rPr lang="en-US" altLang="zh-CN" sz="3000" kern="1200" dirty="0"/>
+            <a:t>,</a:t>
+          </a:r>
+          <a:r>
+            <a:rPr lang="zh-CN" altLang="en-US" sz="3000" kern="1200" dirty="0"/>
+            <a:t> </a:t>
+          </a:r>
+          <a:r>
+            <a:rPr lang="en-US" altLang="zh-CN" sz="3000" kern="1200" dirty="0" err="1"/>
+            <a:t>ResNext</a:t>
+          </a:r>
+          <a:endParaRPr lang="en-US" sz="3000" kern="1200" dirty="0"/>
         </a:p>
       </dsp:txBody>
       <dsp:txXfrm>
@@ -13442,7 +13451,7 @@
           <a:p>
             <a:fld id="{26149304-4996-5048-AF8D-AE7FCF302DAE}" type="datetimeFigureOut">
               <a:rPr lang="en-US" smtClean="0"/>
-              <a:t>3/18/26</a:t>
+              <a:t>3/19/26</a:t>
             </a:fld>
             <a:endParaRPr lang="en-US"/>
           </a:p>
@@ -14057,7 +14066,7 @@
           <a:p>
             <a:fld id="{5BCAD085-E8A6-8845-BD4E-CB4CCA059FC4}" type="datetimeFigureOut">
               <a:rPr lang="en-US" smtClean="0"/>
-              <a:t>3/18/26</a:t>
+              <a:t>3/19/26</a:t>
             </a:fld>
             <a:endParaRPr lang="en-US"/>
           </a:p>
@@ -14225,7 +14234,7 @@
           <a:p>
             <a:fld id="{5BCAD085-E8A6-8845-BD4E-CB4CCA059FC4}" type="datetimeFigureOut">
               <a:rPr lang="en-US" smtClean="0"/>
-              <a:t>3/18/26</a:t>
+              <a:t>3/19/26</a:t>
             </a:fld>
             <a:endParaRPr lang="en-US"/>
           </a:p>
@@ -14403,7 +14412,7 @@
           <a:p>
             <a:fld id="{5BCAD085-E8A6-8845-BD4E-CB4CCA059FC4}" type="datetimeFigureOut">
               <a:rPr lang="en-US" smtClean="0"/>
-              <a:t>3/18/26</a:t>
+              <a:t>3/19/26</a:t>
             </a:fld>
             <a:endParaRPr lang="en-US"/>
           </a:p>
@@ -14571,7 +14580,7 @@
           <a:p>
             <a:fld id="{5BCAD085-E8A6-8845-BD4E-CB4CCA059FC4}" type="datetimeFigureOut">
               <a:rPr lang="en-US" smtClean="0"/>
-              <a:t>3/18/26</a:t>
+              <a:t>3/19/26</a:t>
             </a:fld>
             <a:endParaRPr lang="en-US"/>
           </a:p>
@@ -14816,7 +14825,7 @@
           <a:p>
             <a:fld id="{5BCAD085-E8A6-8845-BD4E-CB4CCA059FC4}" type="datetimeFigureOut">
               <a:rPr lang="en-US" smtClean="0"/>
-              <a:t>3/18/26</a:t>
+              <a:t>3/19/26</a:t>
             </a:fld>
             <a:endParaRPr lang="en-US"/>
           </a:p>
@@ -15101,7 +15110,7 @@
           <a:p>
             <a:fld id="{5BCAD085-E8A6-8845-BD4E-CB4CCA059FC4}" type="datetimeFigureOut">
               <a:rPr lang="en-US" smtClean="0"/>
-              <a:t>3/18/26</a:t>
+              <a:t>3/19/26</a:t>
             </a:fld>
             <a:endParaRPr lang="en-US"/>
           </a:p>
@@ -15520,7 +15529,7 @@
           <a:p>
             <a:fld id="{5BCAD085-E8A6-8845-BD4E-CB4CCA059FC4}" type="datetimeFigureOut">
               <a:rPr lang="en-US" smtClean="0"/>
-              <a:t>3/18/26</a:t>
+              <a:t>3/19/26</a:t>
             </a:fld>
             <a:endParaRPr lang="en-US"/>
           </a:p>
@@ -15637,7 +15646,7 @@
           <a:p>
             <a:fld id="{5BCAD085-E8A6-8845-BD4E-CB4CCA059FC4}" type="datetimeFigureOut">
               <a:rPr lang="en-US" smtClean="0"/>
-              <a:t>3/18/26</a:t>
+              <a:t>3/19/26</a:t>
             </a:fld>
             <a:endParaRPr lang="en-US"/>
           </a:p>
@@ -15732,7 +15741,7 @@
           <a:p>
             <a:fld id="{5BCAD085-E8A6-8845-BD4E-CB4CCA059FC4}" type="datetimeFigureOut">
               <a:rPr lang="en-US" smtClean="0"/>
-              <a:t>3/18/26</a:t>
+              <a:t>3/19/26</a:t>
             </a:fld>
             <a:endParaRPr lang="en-US"/>
           </a:p>
@@ -16007,7 +16016,7 @@
           <a:p>
             <a:fld id="{5BCAD085-E8A6-8845-BD4E-CB4CCA059FC4}" type="datetimeFigureOut">
               <a:rPr lang="en-US" smtClean="0"/>
-              <a:t>3/18/26</a:t>
+              <a:t>3/19/26</a:t>
             </a:fld>
             <a:endParaRPr lang="en-US"/>
           </a:p>
@@ -16259,7 +16268,7 @@
           <a:p>
             <a:fld id="{5BCAD085-E8A6-8845-BD4E-CB4CCA059FC4}" type="datetimeFigureOut">
               <a:rPr lang="en-US" smtClean="0"/>
-              <a:t>3/18/26</a:t>
+              <a:t>3/19/26</a:t>
             </a:fld>
             <a:endParaRPr lang="en-US"/>
           </a:p>
@@ -16470,7 +16479,7 @@
           <a:p>
             <a:fld id="{5BCAD085-E8A6-8845-BD4E-CB4CCA059FC4}" type="datetimeFigureOut">
               <a:rPr lang="en-US" smtClean="0"/>
-              <a:t>3/18/26</a:t>
+              <a:t>3/19/26</a:t>
             </a:fld>
             <a:endParaRPr lang="en-US"/>
           </a:p>
@@ -17511,83 +17520,6 @@
           <a:lstStyle/>
           <a:p>
             <a:r>
-              <a:t>Results: Resource &amp; Efficiency</a:t>
-            </a:r>
-          </a:p>
-        </p:txBody>
-      </p:sp>
-      <p:sp>
-        <p:nvSpPr>
-          <p:cNvPr id="3" name="Content Placeholder 2"/>
-          <p:cNvSpPr>
-            <a:spLocks noGrp="1"/>
-          </p:cNvSpPr>
-          <p:nvPr>
-            <p:ph idx="1"/>
-          </p:nvPr>
-        </p:nvSpPr>
-        <p:spPr/>
-        <p:txBody>
-          <a:bodyPr/>
-          <a:lstStyle/>
-          <a:p>
-            <a:r>
-              <a:t>CPU and memory usage comparison</a:t>
-            </a:r>
-          </a:p>
-          <a:p>
-            <a:r>
-              <a:t>Processing time analysis</a:t>
-            </a:r>
-          </a:p>
-          <a:p>
-            <a:r>
-              <a:t>Identify most efficient method for edge</a:t>
-            </a:r>
-          </a:p>
-        </p:txBody>
-      </p:sp>
-    </p:spTree>
-  </p:cSld>
-  <p:clrMapOvr>
-    <a:masterClrMapping/>
-  </p:clrMapOvr>
-</p:sld>
-</file>
-
-<file path=ppt/slides/slide11.xml><?xml version="1.0" encoding="utf-8"?>
-<p:sld xmlns:a="http://schemas.openxmlformats.org/drawingml/2006/main" xmlns:r="http://schemas.openxmlformats.org/officeDocument/2006/relationships" xmlns:p="http://schemas.openxmlformats.org/presentationml/2006/main">
-  <p:cSld>
-    <p:spTree>
-      <p:nvGrpSpPr>
-        <p:cNvPr id="1" name=""/>
-        <p:cNvGrpSpPr/>
-        <p:nvPr/>
-      </p:nvGrpSpPr>
-      <p:grpSpPr>
-        <a:xfrm>
-          <a:off x="0" y="0"/>
-          <a:ext cx="0" cy="0"/>
-          <a:chOff x="0" y="0"/>
-          <a:chExt cx="0" cy="0"/>
-        </a:xfrm>
-      </p:grpSpPr>
-      <p:sp>
-        <p:nvSpPr>
-          <p:cNvPr id="2" name="Title 1"/>
-          <p:cNvSpPr>
-            <a:spLocks noGrp="1"/>
-          </p:cNvSpPr>
-          <p:nvPr>
-            <p:ph type="title"/>
-          </p:nvPr>
-        </p:nvSpPr>
-        <p:spPr/>
-        <p:txBody>
-          <a:bodyPr/>
-          <a:lstStyle/>
-          <a:p>
-            <a:r>
               <a:t>Conclusion</a:t>
             </a:r>
           </a:p>
@@ -17605,31 +17537,91 @@
         </p:nvSpPr>
         <p:spPr/>
         <p:txBody>
-          <a:bodyPr/>
+          <a:bodyPr>
+            <a:normAutofit fontScale="70000" lnSpcReduction="20000"/>
+          </a:bodyPr>
           <a:lstStyle/>
           <a:p>
             <a:r>
-              <a:rPr dirty="0"/>
-              <a:t>IDS is essential for IoMT edge security</a:t>
+              <a:rPr lang="en-GB" dirty="0"/>
+              <a:t>Feature reduction techniques, including PCA, </a:t>
+            </a:r>
+            <a:r>
+              <a:rPr lang="en-GB" dirty="0" err="1"/>
+              <a:t>AutoEncoder</a:t>
+            </a:r>
+            <a:r>
+              <a:rPr lang="en-GB" dirty="0"/>
+              <a:t>, and </a:t>
+            </a:r>
+            <a:r>
+              <a:rPr lang="en-GB" dirty="0" err="1"/>
+              <a:t>ResNeXt</a:t>
+            </a:r>
+            <a:r>
+              <a:rPr lang="en-GB" dirty="0"/>
+              <a:t>, generally lead to a decrease in model performance, particularly in terms of accuracy and F1 score.</a:t>
             </a:r>
           </a:p>
           <a:p>
             <a:r>
-              <a:rPr dirty="0"/>
-              <a:t>Resource constraints impact deployment</a:t>
+              <a:rPr lang="en-GB" dirty="0"/>
+              <a:t>If</a:t>
+            </a:r>
+            <a:r>
+              <a:rPr lang="zh-CN" altLang="en-US" dirty="0"/>
+              <a:t> </a:t>
+            </a:r>
+            <a:r>
+              <a:rPr lang="en-GB" dirty="0"/>
+              <a:t>a certain degree of performance degradation is acceptable, more aggressive dimensionality reduction can be applied to significantly reduce feature size and computational cost.</a:t>
             </a:r>
           </a:p>
           <a:p>
             <a:r>
-              <a:rPr dirty="0"/>
-              <a:t>Trade-off between accuracy and efficiency</a:t>
+              <a:rPr lang="en-GB" dirty="0" err="1"/>
+              <a:t>ResNeXt</a:t>
+            </a:r>
+            <a:r>
+              <a:rPr lang="en-GB" dirty="0"/>
+              <a:t> introduces high CPU overhead when applied to low-dimensional flow-level data, without improving accuracy or F1 score, making it unsuitable for deployment on edge devices. In contrast, PCA and </a:t>
+            </a:r>
+            <a:r>
+              <a:rPr lang="en-GB" dirty="0" err="1"/>
+              <a:t>AutoEncoder</a:t>
+            </a:r>
+            <a:r>
+              <a:rPr lang="en-GB" dirty="0"/>
+              <a:t> show no significant resource bottlenecks and are more suitable for edge-based IDS.</a:t>
             </a:r>
           </a:p>
           <a:p>
             <a:r>
-              <a:rPr dirty="0"/>
-              <a:t>Efficient feature reduction is critical</a:t>
+              <a:rPr lang="en-GB" dirty="0"/>
+              <a:t>Feature reduction reduces performance but improves efficiency; PCA and </a:t>
             </a:r>
+            <a:r>
+              <a:rPr lang="en-GB" dirty="0" err="1"/>
+              <a:t>AutoEncoder</a:t>
+            </a:r>
+            <a:r>
+              <a:rPr lang="en-GB" dirty="0"/>
+              <a:t> are edge-friendly, while </a:t>
+            </a:r>
+            <a:r>
+              <a:rPr lang="en-GB" dirty="0" err="1"/>
+              <a:t>ResNeXt</a:t>
+            </a:r>
+            <a:r>
+              <a:rPr lang="en-GB" dirty="0"/>
+              <a:t> is computationally expensive and ineffective for low-dimensional data.</a:t>
+            </a:r>
+          </a:p>
+          <a:p>
+            <a:endParaRPr lang="en-GB" dirty="0"/>
+          </a:p>
+          <a:p>
+            <a:endParaRPr lang="en-GB" dirty="0"/>
           </a:p>
         </p:txBody>
       </p:sp>
@@ -17641,7 +17633,7 @@
 </p:sld>
 </file>
 
-<file path=ppt/slides/slide12.xml><?xml version="1.0" encoding="utf-8"?>
+<file path=ppt/slides/slide11.xml><?xml version="1.0" encoding="utf-8"?>
 <p:sld xmlns:a="http://schemas.openxmlformats.org/drawingml/2006/main" xmlns:r="http://schemas.openxmlformats.org/officeDocument/2006/relationships" xmlns:p="http://schemas.openxmlformats.org/presentationml/2006/main">
   <p:cSld>
     <p:spTree>
@@ -19408,7 +19400,7 @@
             <p:ph idx="1"/>
             <p:extLst>
               <p:ext uri="{D42A27DB-BD31-4B8C-83A1-F6EECF244321}">
-                <p14:modId xmlns:p14="http://schemas.microsoft.com/office/powerpoint/2010/main" val="3654781277"/>
+                <p14:modId xmlns:p14="http://schemas.microsoft.com/office/powerpoint/2010/main" val="3681699800"/>
               </p:ext>
             </p:extLst>
           </p:nvPr>
@@ -33747,8 +33739,16 @@
               <a:t>Methodology: </a:t>
             </a:r>
             <a:r>
-              <a:rPr lang="en-GB" sz="2800" dirty="0" err="1"/>
-              <a:t>DataSet</a:t>
+              <a:rPr lang="en-GB" sz="2800" dirty="0"/>
+              <a:t>Data</a:t>
+            </a:r>
+            <a:r>
+              <a:rPr lang="en-US" altLang="zh-CN" sz="2800" dirty="0"/>
+              <a:t>s</a:t>
+            </a:r>
+            <a:r>
+              <a:rPr lang="en-GB" sz="2800" dirty="0"/>
+              <a:t>et</a:t>
             </a:r>
             <a:r>
               <a:rPr lang="zh-CN" altLang="en-US" sz="2800" dirty="0"/>
@@ -34061,7 +34061,7 @@
           <a:lstStyle/>
           <a:p>
             <a:r>
-              <a:t>Methodology: Evaluation Design</a:t>
+              <a:t>Results: Detection Performance</a:t>
             </a:r>
           </a:p>
         </p:txBody>
@@ -34082,36 +34082,20 @@
           <a:lstStyle/>
           <a:p>
             <a:r>
-              <a:rPr dirty="0"/>
-              <a:t>Detection: Accuracy, </a:t>
-            </a:r>
-            <a:r>
-              <a:rPr lang="en-US" dirty="0"/>
-              <a:t>F1 score</a:t>
-            </a:r>
-            <a:endParaRPr dirty="0"/>
-          </a:p>
-          <a:p>
-            <a:r>
-              <a:rPr dirty="0"/>
-              <a:t>Resource usage: CPU, Memory</a:t>
-            </a:r>
-            <a:r>
-              <a:rPr lang="en-US" dirty="0"/>
-              <a:t>, Network Traffic</a:t>
-            </a:r>
-            <a:endParaRPr dirty="0"/>
-          </a:p>
-          <a:p>
-            <a:r>
-              <a:rPr dirty="0"/>
-              <a:t>Efficiency: Processing time, Throughput</a:t>
+              <a:rPr lang="en-GB" dirty="0"/>
+              <a:t>Compare FS, PCA, Autoencoder</a:t>
             </a:r>
           </a:p>
           <a:p>
             <a:r>
-              <a:rPr dirty="0"/>
-              <a:t>Test under edge-like constraints</a:t>
+              <a:rPr lang="en-GB" dirty="0"/>
+              <a:t>Accuracy / Precision / Recall results</a:t>
+            </a:r>
+          </a:p>
+          <a:p>
+            <a:r>
+              <a:rPr lang="en-GB" dirty="0"/>
+              <a:t>Performance differences observed</a:t>
             </a:r>
           </a:p>
         </p:txBody>
@@ -34157,7 +34141,7 @@
           <a:lstStyle/>
           <a:p>
             <a:r>
-              <a:t>Results: Detection Performance</a:t>
+              <a:t>Results: Resource &amp; Efficiency</a:t>
             </a:r>
           </a:p>
         </p:txBody>
@@ -34178,17 +34162,17 @@
           <a:lstStyle/>
           <a:p>
             <a:r>
-              <a:t>Compare FS, PCA, Autoencoder</a:t>
+              <a:t>CPU and memory usage comparison</a:t>
             </a:r>
           </a:p>
           <a:p>
             <a:r>
-              <a:t>Accuracy / Precision / Recall results</a:t>
+              <a:t>Processing time analysis</a:t>
             </a:r>
           </a:p>
           <a:p>
             <a:r>
-              <a:t>Performance differences observed</a:t>
+              <a:t>Identify most efficient method for edge</a:t>
             </a:r>
           </a:p>
         </p:txBody>

--- a/Presentation/IoMT_IDS_Presentation.pptx
+++ b/Presentation/IoMT_IDS_Presentation.pptx
@@ -15,8 +15,8 @@
     <p:sldId id="271" r:id="rId6"/>
     <p:sldId id="268" r:id="rId7"/>
     <p:sldId id="261" r:id="rId8"/>
-    <p:sldId id="263" r:id="rId9"/>
-    <p:sldId id="264" r:id="rId10"/>
+    <p:sldId id="272" r:id="rId9"/>
+    <p:sldId id="263" r:id="rId10"/>
     <p:sldId id="265" r:id="rId11"/>
     <p:sldId id="266" r:id="rId12"/>
   </p:sldIdLst>
@@ -139,7 +139,7 @@
 <file path=ppt/revisionInfo.xml><?xml version="1.0" encoding="utf-8"?>
 <p1510:revInfo xmlns:a="http://schemas.openxmlformats.org/drawingml/2006/main" xmlns:r="http://schemas.openxmlformats.org/officeDocument/2006/relationships" xmlns:p1510="http://schemas.microsoft.com/office/powerpoint/2015/10/main">
   <p1510:revLst>
-    <p1510:client id="{7BF04AB4-6846-4849-A1B8-6A167A3B7532}" v="395" dt="2026-03-19T15:25:41.810"/>
+    <p1510:client id="{7BF04AB4-6846-4849-A1B8-6A167A3B7532}" v="439" dt="2026-03-21T18:34:36.950"/>
   </p1510:revLst>
 </p1510:revInfo>
 </file>
@@ -149,7 +149,7 @@
   <pc:docChgLst>
     <pc:chgData name="耀泉 马" userId="19e30af8d5659de2" providerId="LiveId" clId="{C3594856-CEDA-5129-B2AF-7962E3CA4CA3}"/>
     <pc:docChg chg="undo custSel addSld delSld modSld sldOrd">
-      <pc:chgData name="耀泉 马" userId="19e30af8d5659de2" providerId="LiveId" clId="{C3594856-CEDA-5129-B2AF-7962E3CA4CA3}" dt="2026-03-19T15:43:19.766" v="3032" actId="20577"/>
+      <pc:chgData name="耀泉 马" userId="19e30af8d5659de2" providerId="LiveId" clId="{C3594856-CEDA-5129-B2AF-7962E3CA4CA3}" dt="2026-03-21T18:35:33.059" v="3525" actId="1037"/>
       <pc:docMkLst>
         <pc:docMk/>
       </pc:docMkLst>
@@ -223,125 +223,6 @@
             <ac:spMk id="18" creationId="{C29501E6-A978-4A61-9689-9085AF97A53A}"/>
           </ac:spMkLst>
         </pc:spChg>
-      </pc:sldChg>
-      <pc:sldChg chg="addSp delSp modSp del mod ord setBg">
-        <pc:chgData name="耀泉 马" userId="19e30af8d5659de2" providerId="LiveId" clId="{C3594856-CEDA-5129-B2AF-7962E3CA4CA3}" dt="2026-03-18T19:29:20.130" v="1605" actId="2696"/>
-        <pc:sldMkLst>
-          <pc:docMk/>
-          <pc:sldMk cId="0" sldId="257"/>
-        </pc:sldMkLst>
-        <pc:spChg chg="add del mod">
-          <ac:chgData name="耀泉 马" userId="19e30af8d5659de2" providerId="LiveId" clId="{C3594856-CEDA-5129-B2AF-7962E3CA4CA3}" dt="2026-03-18T19:28:19.056" v="1599" actId="478"/>
-          <ac:spMkLst>
-            <pc:docMk/>
-            <pc:sldMk cId="0" sldId="257"/>
-            <ac:spMk id="4" creationId="{34F03AE4-C676-D067-6189-45E739A11186}"/>
-          </ac:spMkLst>
-        </pc:spChg>
-        <pc:spChg chg="add mod">
-          <ac:chgData name="耀泉 马" userId="19e30af8d5659de2" providerId="LiveId" clId="{C3594856-CEDA-5129-B2AF-7962E3CA4CA3}" dt="2026-03-18T19:28:02.034" v="1595" actId="1076"/>
-          <ac:spMkLst>
-            <pc:docMk/>
-            <pc:sldMk cId="0" sldId="257"/>
-            <ac:spMk id="6" creationId="{624F9F52-2DCC-4B10-9313-D03274AF554E}"/>
-          </ac:spMkLst>
-        </pc:spChg>
-        <pc:spChg chg="add mod">
-          <ac:chgData name="耀泉 马" userId="19e30af8d5659de2" providerId="LiveId" clId="{C3594856-CEDA-5129-B2AF-7962E3CA4CA3}" dt="2026-03-18T19:28:02.034" v="1595" actId="1076"/>
-          <ac:spMkLst>
-            <pc:docMk/>
-            <pc:sldMk cId="0" sldId="257"/>
-            <ac:spMk id="17" creationId="{7B0CDB45-4503-DE1A-D747-ACFC3D4C8564}"/>
-          </ac:spMkLst>
-        </pc:spChg>
-        <pc:spChg chg="add mod">
-          <ac:chgData name="耀泉 马" userId="19e30af8d5659de2" providerId="LiveId" clId="{C3594856-CEDA-5129-B2AF-7962E3CA4CA3}" dt="2026-03-18T19:28:02.034" v="1595" actId="1076"/>
-          <ac:spMkLst>
-            <pc:docMk/>
-            <pc:sldMk cId="0" sldId="257"/>
-            <ac:spMk id="18" creationId="{A00F5E6E-36EF-79E2-2F3D-0FFFD99251E2}"/>
-          </ac:spMkLst>
-        </pc:spChg>
-        <pc:spChg chg="add mod">
-          <ac:chgData name="耀泉 马" userId="19e30af8d5659de2" providerId="LiveId" clId="{C3594856-CEDA-5129-B2AF-7962E3CA4CA3}" dt="2026-03-18T19:28:02.034" v="1595" actId="1076"/>
-          <ac:spMkLst>
-            <pc:docMk/>
-            <pc:sldMk cId="0" sldId="257"/>
-            <ac:spMk id="19" creationId="{C5F86EF3-E12B-54F3-953F-46EB5C94A89F}"/>
-          </ac:spMkLst>
-        </pc:spChg>
-        <pc:spChg chg="add mod">
-          <ac:chgData name="耀泉 马" userId="19e30af8d5659de2" providerId="LiveId" clId="{C3594856-CEDA-5129-B2AF-7962E3CA4CA3}" dt="2026-03-18T19:28:02.034" v="1595" actId="1076"/>
-          <ac:spMkLst>
-            <pc:docMk/>
-            <pc:sldMk cId="0" sldId="257"/>
-            <ac:spMk id="23" creationId="{024704A1-5949-82E6-9CF0-5453C72D00DB}"/>
-          </ac:spMkLst>
-        </pc:spChg>
-        <pc:spChg chg="add mod">
-          <ac:chgData name="耀泉 马" userId="19e30af8d5659de2" providerId="LiveId" clId="{C3594856-CEDA-5129-B2AF-7962E3CA4CA3}" dt="2026-03-18T19:28:02.034" v="1595" actId="1076"/>
-          <ac:spMkLst>
-            <pc:docMk/>
-            <pc:sldMk cId="0" sldId="257"/>
-            <ac:spMk id="30" creationId="{F5FF2AD6-DF06-11DF-63C4-56BA1DBE5D81}"/>
-          </ac:spMkLst>
-        </pc:spChg>
-        <pc:spChg chg="add mod">
-          <ac:chgData name="耀泉 马" userId="19e30af8d5659de2" providerId="LiveId" clId="{C3594856-CEDA-5129-B2AF-7962E3CA4CA3}" dt="2026-03-18T19:28:02.034" v="1595" actId="1076"/>
-          <ac:spMkLst>
-            <pc:docMk/>
-            <pc:sldMk cId="0" sldId="257"/>
-            <ac:spMk id="31" creationId="{7FAA5C9A-2C08-AE83-3A51-0D05F34525DC}"/>
-          </ac:spMkLst>
-        </pc:spChg>
-        <pc:spChg chg="add mod">
-          <ac:chgData name="耀泉 马" userId="19e30af8d5659de2" providerId="LiveId" clId="{C3594856-CEDA-5129-B2AF-7962E3CA4CA3}" dt="2026-03-18T19:28:02.034" v="1595" actId="1076"/>
-          <ac:spMkLst>
-            <pc:docMk/>
-            <pc:sldMk cId="0" sldId="257"/>
-            <ac:spMk id="32" creationId="{7F3F5488-3A15-8CC8-AA18-9F7D9A76B0B6}"/>
-          </ac:spMkLst>
-        </pc:spChg>
-        <pc:spChg chg="add mod">
-          <ac:chgData name="耀泉 马" userId="19e30af8d5659de2" providerId="LiveId" clId="{C3594856-CEDA-5129-B2AF-7962E3CA4CA3}" dt="2026-03-18T19:28:02.034" v="1595" actId="1076"/>
-          <ac:spMkLst>
-            <pc:docMk/>
-            <pc:sldMk cId="0" sldId="257"/>
-            <ac:spMk id="43" creationId="{19FCE592-265A-3025-7A71-D299118D5711}"/>
-          </ac:spMkLst>
-        </pc:spChg>
-        <pc:spChg chg="add mod">
-          <ac:chgData name="耀泉 马" userId="19e30af8d5659de2" providerId="LiveId" clId="{C3594856-CEDA-5129-B2AF-7962E3CA4CA3}" dt="2026-03-18T19:28:02.034" v="1595" actId="1076"/>
-          <ac:spMkLst>
-            <pc:docMk/>
-            <pc:sldMk cId="0" sldId="257"/>
-            <ac:spMk id="48" creationId="{A899C541-6DB1-E7B9-6164-FE83B9F9D096}"/>
-          </ac:spMkLst>
-        </pc:spChg>
-        <pc:spChg chg="add del mod">
-          <ac:chgData name="耀泉 马" userId="19e30af8d5659de2" providerId="LiveId" clId="{C3594856-CEDA-5129-B2AF-7962E3CA4CA3}" dt="2026-03-18T19:28:13.316" v="1598"/>
-          <ac:spMkLst>
-            <pc:docMk/>
-            <pc:sldMk cId="0" sldId="257"/>
-            <ac:spMk id="51" creationId="{131859C4-A155-0845-07BF-956F3334FA08}"/>
-          </ac:spMkLst>
-        </pc:spChg>
-        <pc:spChg chg="add mod">
-          <ac:chgData name="耀泉 马" userId="19e30af8d5659de2" providerId="LiveId" clId="{C3594856-CEDA-5129-B2AF-7962E3CA4CA3}" dt="2026-03-18T19:28:29.939" v="1601" actId="1076"/>
-          <ac:spMkLst>
-            <pc:docMk/>
-            <pc:sldMk cId="0" sldId="257"/>
-            <ac:spMk id="52" creationId="{16D1068E-5888-59D6-5112-E3E5F3566780}"/>
-          </ac:spMkLst>
-        </pc:spChg>
-        <pc:graphicFrameChg chg="add del">
-          <ac:chgData name="耀泉 马" userId="19e30af8d5659de2" providerId="LiveId" clId="{C3594856-CEDA-5129-B2AF-7962E3CA4CA3}" dt="2026-03-18T19:27:57.752" v="1593" actId="478"/>
-          <ac:graphicFrameMkLst>
-            <pc:docMk/>
-            <pc:sldMk cId="0" sldId="257"/>
-            <ac:graphicFrameMk id="5" creationId="{3B7016F6-0E5B-EAC6-A639-A3667DF5EA4B}"/>
-          </ac:graphicFrameMkLst>
-        </pc:graphicFrameChg>
       </pc:sldChg>
       <pc:sldChg chg="addSp delSp modSp mod setBg">
         <pc:chgData name="耀泉 马" userId="19e30af8d5659de2" providerId="LiveId" clId="{C3594856-CEDA-5129-B2AF-7962E3CA4CA3}" dt="2026-03-17T20:49:47.708" v="55" actId="26606"/>
@@ -485,191 +366,8 @@
           </ac:graphicFrameMkLst>
         </pc:graphicFrameChg>
       </pc:sldChg>
-      <pc:sldChg chg="addSp delSp modSp del mod">
-        <pc:chgData name="耀泉 马" userId="19e30af8d5659de2" providerId="LiveId" clId="{C3594856-CEDA-5129-B2AF-7962E3CA4CA3}" dt="2026-03-18T22:09:08.238" v="2889" actId="2696"/>
-        <pc:sldMkLst>
-          <pc:docMk/>
-          <pc:sldMk cId="0" sldId="260"/>
-        </pc:sldMkLst>
-        <pc:spChg chg="del mod">
-          <ac:chgData name="耀泉 马" userId="19e30af8d5659de2" providerId="LiveId" clId="{C3594856-CEDA-5129-B2AF-7962E3CA4CA3}" dt="2026-03-18T20:09:31.749" v="1707" actId="478"/>
-          <ac:spMkLst>
-            <pc:docMk/>
-            <pc:sldMk cId="0" sldId="260"/>
-            <ac:spMk id="3" creationId="{00000000-0000-0000-0000-000000000000}"/>
-          </ac:spMkLst>
-        </pc:spChg>
-        <pc:spChg chg="add del">
-          <ac:chgData name="耀泉 马" userId="19e30af8d5659de2" providerId="LiveId" clId="{C3594856-CEDA-5129-B2AF-7962E3CA4CA3}" dt="2026-03-18T20:14:53.172" v="1712" actId="22"/>
-          <ac:spMkLst>
-            <pc:docMk/>
-            <pc:sldMk cId="0" sldId="260"/>
-            <ac:spMk id="6" creationId="{064113D7-84E3-E5C9-75F9-A87B5683ACA6}"/>
-          </ac:spMkLst>
-        </pc:spChg>
-        <pc:spChg chg="add mod">
-          <ac:chgData name="耀泉 马" userId="19e30af8d5659de2" providerId="LiveId" clId="{C3594856-CEDA-5129-B2AF-7962E3CA4CA3}" dt="2026-03-18T20:35:15.059" v="1750" actId="14100"/>
-          <ac:spMkLst>
-            <pc:docMk/>
-            <pc:sldMk cId="0" sldId="260"/>
-            <ac:spMk id="18" creationId="{09CF6BF8-7ACA-0C3D-60A5-1EE1BDCBA8CE}"/>
-          </ac:spMkLst>
-        </pc:spChg>
-        <pc:spChg chg="add mod">
-          <ac:chgData name="耀泉 马" userId="19e30af8d5659de2" providerId="LiveId" clId="{C3594856-CEDA-5129-B2AF-7962E3CA4CA3}" dt="2026-03-18T20:36:06.097" v="1759" actId="207"/>
-          <ac:spMkLst>
-            <pc:docMk/>
-            <pc:sldMk cId="0" sldId="260"/>
-            <ac:spMk id="22" creationId="{5137330E-E2A6-5FC4-E0F2-DBB976129A52}"/>
-          </ac:spMkLst>
-        </pc:spChg>
-        <pc:spChg chg="add mod">
-          <ac:chgData name="耀泉 马" userId="19e30af8d5659de2" providerId="LiveId" clId="{C3594856-CEDA-5129-B2AF-7962E3CA4CA3}" dt="2026-03-18T20:36:20.060" v="1766" actId="167"/>
-          <ac:spMkLst>
-            <pc:docMk/>
-            <pc:sldMk cId="0" sldId="260"/>
-            <ac:spMk id="23" creationId="{269EA5FD-CF12-0577-DE2E-7B477AC28FCC}"/>
-          </ac:spMkLst>
-        </pc:spChg>
-        <pc:spChg chg="add mod">
-          <ac:chgData name="耀泉 马" userId="19e30af8d5659de2" providerId="LiveId" clId="{C3594856-CEDA-5129-B2AF-7962E3CA4CA3}" dt="2026-03-18T20:36:13.980" v="1763" actId="1076"/>
-          <ac:spMkLst>
-            <pc:docMk/>
-            <pc:sldMk cId="0" sldId="260"/>
-            <ac:spMk id="24" creationId="{B3044895-25DA-7A2D-4B7D-145FB7186D82}"/>
-          </ac:spMkLst>
-        </pc:spChg>
-        <pc:spChg chg="add mod">
-          <ac:chgData name="耀泉 马" userId="19e30af8d5659de2" providerId="LiveId" clId="{C3594856-CEDA-5129-B2AF-7962E3CA4CA3}" dt="2026-03-18T20:36:16.940" v="1765" actId="1076"/>
-          <ac:spMkLst>
-            <pc:docMk/>
-            <pc:sldMk cId="0" sldId="260"/>
-            <ac:spMk id="25" creationId="{0C768DCF-C205-6D99-473E-1BE73B369330}"/>
-          </ac:spMkLst>
-        </pc:spChg>
-        <pc:picChg chg="add mod">
-          <ac:chgData name="耀泉 马" userId="19e30af8d5659de2" providerId="LiveId" clId="{C3594856-CEDA-5129-B2AF-7962E3CA4CA3}" dt="2026-03-18T20:34:58.787" v="1745" actId="14100"/>
-          <ac:picMkLst>
-            <pc:docMk/>
-            <pc:sldMk cId="0" sldId="260"/>
-            <ac:picMk id="4" creationId="{1EF5C4EA-395C-89B4-D7D4-6CC63D6B6576}"/>
-          </ac:picMkLst>
-        </pc:picChg>
-        <pc:picChg chg="add mod">
-          <ac:chgData name="耀泉 马" userId="19e30af8d5659de2" providerId="LiveId" clId="{C3594856-CEDA-5129-B2AF-7962E3CA4CA3}" dt="2026-03-18T20:34:58.787" v="1745" actId="14100"/>
-          <ac:picMkLst>
-            <pc:docMk/>
-            <pc:sldMk cId="0" sldId="260"/>
-            <ac:picMk id="7" creationId="{04FCFADC-02BA-0C08-16F2-018E15ACAD31}"/>
-          </ac:picMkLst>
-        </pc:picChg>
-        <pc:picChg chg="add mod">
-          <ac:chgData name="耀泉 马" userId="19e30af8d5659de2" providerId="LiveId" clId="{C3594856-CEDA-5129-B2AF-7962E3CA4CA3}" dt="2026-03-18T20:34:58.787" v="1745" actId="14100"/>
-          <ac:picMkLst>
-            <pc:docMk/>
-            <pc:sldMk cId="0" sldId="260"/>
-            <ac:picMk id="8" creationId="{9F19BFC6-D258-D5D5-5EFA-69A773F2B6C9}"/>
-          </ac:picMkLst>
-        </pc:picChg>
-        <pc:picChg chg="add mod">
-          <ac:chgData name="耀泉 马" userId="19e30af8d5659de2" providerId="LiveId" clId="{C3594856-CEDA-5129-B2AF-7962E3CA4CA3}" dt="2026-03-18T20:35:00.872" v="1746" actId="1076"/>
-          <ac:picMkLst>
-            <pc:docMk/>
-            <pc:sldMk cId="0" sldId="260"/>
-            <ac:picMk id="9" creationId="{05622C90-FE6B-A7D8-15B1-D3759B597F48}"/>
-          </ac:picMkLst>
-        </pc:picChg>
-        <pc:picChg chg="add mod">
-          <ac:chgData name="耀泉 马" userId="19e30af8d5659de2" providerId="LiveId" clId="{C3594856-CEDA-5129-B2AF-7962E3CA4CA3}" dt="2026-03-18T20:35:00.872" v="1746" actId="1076"/>
-          <ac:picMkLst>
-            <pc:docMk/>
-            <pc:sldMk cId="0" sldId="260"/>
-            <ac:picMk id="10" creationId="{FA8B9BF6-FDCA-F547-0F1A-ECC31964A316}"/>
-          </ac:picMkLst>
-        </pc:picChg>
-        <pc:picChg chg="add mod">
-          <ac:chgData name="耀泉 马" userId="19e30af8d5659de2" providerId="LiveId" clId="{C3594856-CEDA-5129-B2AF-7962E3CA4CA3}" dt="2026-03-18T20:35:00.872" v="1746" actId="1076"/>
-          <ac:picMkLst>
-            <pc:docMk/>
-            <pc:sldMk cId="0" sldId="260"/>
-            <ac:picMk id="11" creationId="{704A7568-1A8E-F1B7-CABC-A538DCA05B5D}"/>
-          </ac:picMkLst>
-        </pc:picChg>
-        <pc:picChg chg="add mod">
-          <ac:chgData name="耀泉 马" userId="19e30af8d5659de2" providerId="LiveId" clId="{C3594856-CEDA-5129-B2AF-7962E3CA4CA3}" dt="2026-03-18T20:32:53.514" v="1730" actId="14100"/>
-          <ac:picMkLst>
-            <pc:docMk/>
-            <pc:sldMk cId="0" sldId="260"/>
-            <ac:picMk id="12" creationId="{31B02665-BA1F-F92D-A8AD-E35928E8B850}"/>
-          </ac:picMkLst>
-        </pc:picChg>
-        <pc:picChg chg="add mod">
-          <ac:chgData name="耀泉 马" userId="19e30af8d5659de2" providerId="LiveId" clId="{C3594856-CEDA-5129-B2AF-7962E3CA4CA3}" dt="2026-03-18T20:32:53.514" v="1730" actId="14100"/>
-          <ac:picMkLst>
-            <pc:docMk/>
-            <pc:sldMk cId="0" sldId="260"/>
-            <ac:picMk id="13" creationId="{9C99CEA7-F21B-379A-0ABB-87722B376E9F}"/>
-          </ac:picMkLst>
-        </pc:picChg>
-        <pc:picChg chg="add mod">
-          <ac:chgData name="耀泉 马" userId="19e30af8d5659de2" providerId="LiveId" clId="{C3594856-CEDA-5129-B2AF-7962E3CA4CA3}" dt="2026-03-18T20:32:53.514" v="1730" actId="14100"/>
-          <ac:picMkLst>
-            <pc:docMk/>
-            <pc:sldMk cId="0" sldId="260"/>
-            <ac:picMk id="14" creationId="{A7AB54BB-D40E-3E8C-7DC2-3F6FED1FD533}"/>
-          </ac:picMkLst>
-        </pc:picChg>
-        <pc:picChg chg="add del mod">
-          <ac:chgData name="耀泉 马" userId="19e30af8d5659de2" providerId="LiveId" clId="{C3594856-CEDA-5129-B2AF-7962E3CA4CA3}" dt="2026-03-18T20:35:01.343" v="1747" actId="478"/>
-          <ac:picMkLst>
-            <pc:docMk/>
-            <pc:sldMk cId="0" sldId="260"/>
-            <ac:picMk id="15" creationId="{9884D1D8-561C-2311-CCAC-8437919B4BD0}"/>
-          </ac:picMkLst>
-        </pc:picChg>
-        <pc:picChg chg="add del mod">
-          <ac:chgData name="耀泉 马" userId="19e30af8d5659de2" providerId="LiveId" clId="{C3594856-CEDA-5129-B2AF-7962E3CA4CA3}" dt="2026-03-18T20:35:01.343" v="1747" actId="478"/>
-          <ac:picMkLst>
-            <pc:docMk/>
-            <pc:sldMk cId="0" sldId="260"/>
-            <ac:picMk id="16" creationId="{BB33ED05-8336-5C1F-070B-0C10CA75B0B8}"/>
-          </ac:picMkLst>
-        </pc:picChg>
-        <pc:picChg chg="add del mod">
-          <ac:chgData name="耀泉 马" userId="19e30af8d5659de2" providerId="LiveId" clId="{C3594856-CEDA-5129-B2AF-7962E3CA4CA3}" dt="2026-03-18T20:35:01.343" v="1747" actId="478"/>
-          <ac:picMkLst>
-            <pc:docMk/>
-            <pc:sldMk cId="0" sldId="260"/>
-            <ac:picMk id="17" creationId="{23C65092-DEAD-627B-D8D1-1551C88AD34A}"/>
-          </ac:picMkLst>
-        </pc:picChg>
-        <pc:picChg chg="add mod">
-          <ac:chgData name="耀泉 马" userId="19e30af8d5659de2" providerId="LiveId" clId="{C3594856-CEDA-5129-B2AF-7962E3CA4CA3}" dt="2026-03-18T20:35:20.449" v="1752" actId="1076"/>
-          <ac:picMkLst>
-            <pc:docMk/>
-            <pc:sldMk cId="0" sldId="260"/>
-            <ac:picMk id="19" creationId="{842D71F5-0EDF-98DD-4F3A-F478BF2F8BD5}"/>
-          </ac:picMkLst>
-        </pc:picChg>
-        <pc:picChg chg="add mod">
-          <ac:chgData name="耀泉 马" userId="19e30af8d5659de2" providerId="LiveId" clId="{C3594856-CEDA-5129-B2AF-7962E3CA4CA3}" dt="2026-03-18T20:35:20.449" v="1752" actId="1076"/>
-          <ac:picMkLst>
-            <pc:docMk/>
-            <pc:sldMk cId="0" sldId="260"/>
-            <ac:picMk id="20" creationId="{BC65654B-6B0F-6663-EEDC-783379CDF352}"/>
-          </ac:picMkLst>
-        </pc:picChg>
-        <pc:picChg chg="add mod">
-          <ac:chgData name="耀泉 马" userId="19e30af8d5659de2" providerId="LiveId" clId="{C3594856-CEDA-5129-B2AF-7962E3CA4CA3}" dt="2026-03-18T20:35:20.449" v="1752" actId="1076"/>
-          <ac:picMkLst>
-            <pc:docMk/>
-            <pc:sldMk cId="0" sldId="260"/>
-            <ac:picMk id="21" creationId="{1071ACCC-D418-F9E5-99A3-355BE4802F7A}"/>
-          </ac:picMkLst>
-        </pc:picChg>
-      </pc:sldChg>
-      <pc:sldChg chg="addSp delSp modSp mod ord">
-        <pc:chgData name="耀泉 马" userId="19e30af8d5659de2" providerId="LiveId" clId="{C3594856-CEDA-5129-B2AF-7962E3CA4CA3}" dt="2026-03-19T15:43:19.766" v="3032" actId="20577"/>
+      <pc:sldChg chg="addSp delSp modSp mod ord modNotesTx">
+        <pc:chgData name="耀泉 马" userId="19e30af8d5659de2" providerId="LiveId" clId="{C3594856-CEDA-5129-B2AF-7962E3CA4CA3}" dt="2026-03-21T18:23:43.642" v="3382" actId="313"/>
         <pc:sldMkLst>
           <pc:docMk/>
           <pc:sldMk cId="0" sldId="261"/>
@@ -683,7 +381,7 @@
           </ac:spMkLst>
         </pc:spChg>
         <pc:spChg chg="mod">
-          <ac:chgData name="耀泉 马" userId="19e30af8d5659de2" providerId="LiveId" clId="{C3594856-CEDA-5129-B2AF-7962E3CA4CA3}" dt="2026-03-18T18:04:23.909" v="1347" actId="27636"/>
+          <ac:chgData name="耀泉 马" userId="19e30af8d5659de2" providerId="LiveId" clId="{C3594856-CEDA-5129-B2AF-7962E3CA4CA3}" dt="2026-03-21T18:23:43.642" v="3382" actId="313"/>
           <ac:spMkLst>
             <pc:docMk/>
             <pc:sldMk cId="0" sldId="261"/>
@@ -691,21 +389,21 @@
           </ac:spMkLst>
         </pc:spChg>
         <pc:spChg chg="add mod">
-          <ac:chgData name="耀泉 马" userId="19e30af8d5659de2" providerId="LiveId" clId="{C3594856-CEDA-5129-B2AF-7962E3CA4CA3}" dt="2026-03-18T19:15:59.619" v="1437" actId="1076"/>
+          <ac:chgData name="耀泉 马" userId="19e30af8d5659de2" providerId="LiveId" clId="{C3594856-CEDA-5129-B2AF-7962E3CA4CA3}" dt="2026-03-21T17:29:09.431" v="3262" actId="20577"/>
           <ac:spMkLst>
             <pc:docMk/>
             <pc:sldMk cId="0" sldId="261"/>
             <ac:spMk id="6" creationId="{8687E6AD-521E-D1E7-35AD-BF4BAC06AF84}"/>
           </ac:spMkLst>
         </pc:spChg>
-        <pc:graphicFrameChg chg="add del mod">
-          <ac:chgData name="耀泉 马" userId="19e30af8d5659de2" providerId="LiveId" clId="{C3594856-CEDA-5129-B2AF-7962E3CA4CA3}" dt="2026-03-18T18:03:00.180" v="1321" actId="478"/>
-          <ac:graphicFrameMkLst>
+        <pc:spChg chg="add del mod">
+          <ac:chgData name="耀泉 马" userId="19e30af8d5659de2" providerId="LiveId" clId="{C3594856-CEDA-5129-B2AF-7962E3CA4CA3}" dt="2026-03-21T16:11:40.978" v="3050" actId="478"/>
+          <ac:spMkLst>
             <pc:docMk/>
             <pc:sldMk cId="0" sldId="261"/>
-            <ac:graphicFrameMk id="4" creationId="{E51F540D-5F2B-2BC9-C3CF-EE237C6E5C4E}"/>
-          </ac:graphicFrameMkLst>
-        </pc:graphicFrameChg>
+            <ac:spMk id="7" creationId="{ACE08B36-5C37-248F-54D3-888A2C0F96B2}"/>
+          </ac:spMkLst>
+        </pc:spChg>
         <pc:picChg chg="add mod">
           <ac:chgData name="耀泉 马" userId="19e30af8d5659de2" providerId="LiveId" clId="{C3594856-CEDA-5129-B2AF-7962E3CA4CA3}" dt="2026-03-18T18:03:14.533" v="1328" actId="1036"/>
           <ac:picMkLst>
@@ -714,13 +412,6 @@
             <ac:picMk id="5" creationId="{E171E68C-4B0B-70CC-471A-67E4CA14063A}"/>
           </ac:picMkLst>
         </pc:picChg>
-      </pc:sldChg>
-      <pc:sldChg chg="modSp del mod">
-        <pc:chgData name="耀泉 马" userId="19e30af8d5659de2" providerId="LiveId" clId="{C3594856-CEDA-5129-B2AF-7962E3CA4CA3}" dt="2026-03-19T15:19:45.238" v="3014" actId="2696"/>
-        <pc:sldMkLst>
-          <pc:docMk/>
-          <pc:sldMk cId="0" sldId="262"/>
-        </pc:sldMkLst>
       </pc:sldChg>
       <pc:sldChg chg="modSp mod">
         <pc:chgData name="耀泉 马" userId="19e30af8d5659de2" providerId="LiveId" clId="{C3594856-CEDA-5129-B2AF-7962E3CA4CA3}" dt="2026-03-19T15:16:36.398" v="3013" actId="20577"/>
@@ -733,6 +424,21 @@
           <ac:spMkLst>
             <pc:docMk/>
             <pc:sldMk cId="0" sldId="263"/>
+            <ac:spMk id="3" creationId="{00000000-0000-0000-0000-000000000000}"/>
+          </ac:spMkLst>
+        </pc:spChg>
+      </pc:sldChg>
+      <pc:sldChg chg="modSp del mod">
+        <pc:chgData name="耀泉 马" userId="19e30af8d5659de2" providerId="LiveId" clId="{C3594856-CEDA-5129-B2AF-7962E3CA4CA3}" dt="2026-03-21T16:21:59.799" v="3128" actId="2696"/>
+        <pc:sldMkLst>
+          <pc:docMk/>
+          <pc:sldMk cId="0" sldId="264"/>
+        </pc:sldMkLst>
+        <pc:spChg chg="mod">
+          <ac:chgData name="耀泉 马" userId="19e30af8d5659de2" providerId="LiveId" clId="{C3594856-CEDA-5129-B2AF-7962E3CA4CA3}" dt="2026-03-21T13:58:05.230" v="3036" actId="20577"/>
+          <ac:spMkLst>
+            <pc:docMk/>
+            <pc:sldMk cId="0" sldId="264"/>
             <ac:spMk id="3" creationId="{00000000-0000-0000-0000-000000000000}"/>
           </ac:spMkLst>
         </pc:spChg>
@@ -752,15 +458,8 @@
           </ac:spMkLst>
         </pc:spChg>
       </pc:sldChg>
-      <pc:sldChg chg="add del">
-        <pc:chgData name="耀泉 马" userId="19e30af8d5659de2" providerId="LiveId" clId="{C3594856-CEDA-5129-B2AF-7962E3CA4CA3}" dt="2026-03-18T22:09:36.506" v="2891" actId="2696"/>
-        <pc:sldMkLst>
-          <pc:docMk/>
-          <pc:sldMk cId="3435373810" sldId="267"/>
-        </pc:sldMkLst>
-      </pc:sldChg>
       <pc:sldChg chg="addSp delSp modSp add mod modAnim">
-        <pc:chgData name="耀泉 马" userId="19e30af8d5659de2" providerId="LiveId" clId="{C3594856-CEDA-5129-B2AF-7962E3CA4CA3}" dt="2026-03-18T20:54:12.708" v="1919" actId="164"/>
+        <pc:chgData name="耀泉 马" userId="19e30af8d5659de2" providerId="LiveId" clId="{C3594856-CEDA-5129-B2AF-7962E3CA4CA3}" dt="2026-03-21T17:49:38.641" v="3335" actId="692"/>
         <pc:sldMkLst>
           <pc:docMk/>
           <pc:sldMk cId="814386939" sldId="268"/>
@@ -771,14 +470,6 @@
             <pc:docMk/>
             <pc:sldMk cId="814386939" sldId="268"/>
             <ac:spMk id="2" creationId="{27A7649C-399B-A7D8-23B6-9103D9339C31}"/>
-          </ac:spMkLst>
-        </pc:spChg>
-        <pc:spChg chg="del mod">
-          <ac:chgData name="耀泉 马" userId="19e30af8d5659de2" providerId="LiveId" clId="{C3594856-CEDA-5129-B2AF-7962E3CA4CA3}" dt="2026-03-18T09:49:07.670" v="261" actId="478"/>
-          <ac:spMkLst>
-            <pc:docMk/>
-            <pc:sldMk cId="814386939" sldId="268"/>
-            <ac:spMk id="3" creationId="{3B6C065F-AEC6-AA37-9C93-548A3F6B5129}"/>
           </ac:spMkLst>
         </pc:spChg>
         <pc:spChg chg="add mod">
@@ -805,14 +496,6 @@
             <ac:spMk id="5" creationId="{1770629D-73C8-A0CD-A17F-762F9D35451E}"/>
           </ac:spMkLst>
         </pc:spChg>
-        <pc:spChg chg="add del mod">
-          <ac:chgData name="耀泉 马" userId="19e30af8d5659de2" providerId="LiveId" clId="{C3594856-CEDA-5129-B2AF-7962E3CA4CA3}" dt="2026-03-18T09:49:39.335" v="277" actId="478"/>
-          <ac:spMkLst>
-            <pc:docMk/>
-            <pc:sldMk cId="814386939" sldId="268"/>
-            <ac:spMk id="5" creationId="{65DB1934-7F91-2779-0B9B-C8605AA51B86}"/>
-          </ac:spMkLst>
-        </pc:spChg>
         <pc:spChg chg="add mod">
           <ac:chgData name="耀泉 马" userId="19e30af8d5659de2" providerId="LiveId" clId="{C3594856-CEDA-5129-B2AF-7962E3CA4CA3}" dt="2026-03-18T19:45:05.423" v="1699" actId="207"/>
           <ac:spMkLst>
@@ -837,20 +520,12 @@
             <ac:spMk id="9" creationId="{16727677-89B0-8CFD-39B7-288A3FDBB57D}"/>
           </ac:spMkLst>
         </pc:spChg>
-        <pc:spChg chg="add del mod">
-          <ac:chgData name="耀泉 马" userId="19e30af8d5659de2" providerId="LiveId" clId="{C3594856-CEDA-5129-B2AF-7962E3CA4CA3}" dt="2026-03-18T09:51:23.002" v="332" actId="11529"/>
+        <pc:spChg chg="add mod">
+          <ac:chgData name="耀泉 马" userId="19e30af8d5659de2" providerId="LiveId" clId="{C3594856-CEDA-5129-B2AF-7962E3CA4CA3}" dt="2026-03-21T17:47:51.353" v="3304" actId="1035"/>
           <ac:spMkLst>
             <pc:docMk/>
             <pc:sldMk cId="814386939" sldId="268"/>
-            <ac:spMk id="11" creationId="{0D1FB86A-4012-5106-91F5-7ABEA075EA15}"/>
-          </ac:spMkLst>
-        </pc:spChg>
-        <pc:spChg chg="add del mod">
-          <ac:chgData name="耀泉 马" userId="19e30af8d5659de2" providerId="LiveId" clId="{C3594856-CEDA-5129-B2AF-7962E3CA4CA3}" dt="2026-03-18T19:40:01.643" v="1646" actId="478"/>
-          <ac:spMkLst>
-            <pc:docMk/>
-            <pc:sldMk cId="814386939" sldId="268"/>
-            <ac:spMk id="11" creationId="{2A88BB78-25F8-AE46-C9C7-6A35FADE0426}"/>
+            <ac:spMk id="11" creationId="{3F65E67E-0C4B-E7A7-C2AA-F6ADC83D50A6}"/>
           </ac:spMkLst>
         </pc:spChg>
         <pc:spChg chg="add mod">
@@ -859,22 +534,6 @@
             <pc:docMk/>
             <pc:sldMk cId="814386939" sldId="268"/>
             <ac:spMk id="12" creationId="{705DE116-2B12-7A1F-1998-18F0A82996FE}"/>
-          </ac:spMkLst>
-        </pc:spChg>
-        <pc:spChg chg="add mod">
-          <ac:chgData name="耀泉 马" userId="19e30af8d5659de2" providerId="LiveId" clId="{C3594856-CEDA-5129-B2AF-7962E3CA4CA3}" dt="2026-03-18T09:51:20.329" v="326" actId="1076"/>
-          <ac:spMkLst>
-            <pc:docMk/>
-            <pc:sldMk cId="814386939" sldId="268"/>
-            <ac:spMk id="12" creationId="{E2096966-97E8-7C57-0674-3213DBD98DAF}"/>
-          </ac:spMkLst>
-        </pc:spChg>
-        <pc:spChg chg="add del mod">
-          <ac:chgData name="耀泉 马" userId="19e30af8d5659de2" providerId="LiveId" clId="{C3594856-CEDA-5129-B2AF-7962E3CA4CA3}" dt="2026-03-18T09:59:47.407" v="489" actId="478"/>
-          <ac:spMkLst>
-            <pc:docMk/>
-            <pc:sldMk cId="814386939" sldId="268"/>
-            <ac:spMk id="13" creationId="{30A8FA0B-EEE3-EAB9-5FAF-06084DF88C6C}"/>
           </ac:spMkLst>
         </pc:spChg>
         <pc:spChg chg="add mod">
@@ -974,6 +633,22 @@
           </ac:spMkLst>
         </pc:spChg>
         <pc:spChg chg="add mod">
+          <ac:chgData name="耀泉 马" userId="19e30af8d5659de2" providerId="LiveId" clId="{C3594856-CEDA-5129-B2AF-7962E3CA4CA3}" dt="2026-03-21T17:47:54.640" v="3311" actId="1035"/>
+          <ac:spMkLst>
+            <pc:docMk/>
+            <pc:sldMk cId="814386939" sldId="268"/>
+            <ac:spMk id="26" creationId="{5A3B2090-F6B4-3581-F8A8-F52D53D6F34F}"/>
+          </ac:spMkLst>
+        </pc:spChg>
+        <pc:spChg chg="add mod">
+          <ac:chgData name="耀泉 马" userId="19e30af8d5659de2" providerId="LiveId" clId="{C3594856-CEDA-5129-B2AF-7962E3CA4CA3}" dt="2026-03-21T17:48:14.248" v="3322" actId="1038"/>
+          <ac:spMkLst>
+            <pc:docMk/>
+            <pc:sldMk cId="814386939" sldId="268"/>
+            <ac:spMk id="27" creationId="{50D3E9FE-7775-2CFB-20E3-5ECAA03D6AA4}"/>
+          </ac:spMkLst>
+        </pc:spChg>
+        <pc:spChg chg="add mod">
           <ac:chgData name="耀泉 马" userId="19e30af8d5659de2" providerId="LiveId" clId="{C3594856-CEDA-5129-B2AF-7962E3CA4CA3}" dt="2026-03-18T20:53:25.957" v="1906" actId="1076"/>
           <ac:spMkLst>
             <pc:docMk/>
@@ -982,23 +657,31 @@
           </ac:spMkLst>
         </pc:spChg>
         <pc:spChg chg="add mod">
-          <ac:chgData name="耀泉 马" userId="19e30af8d5659de2" providerId="LiveId" clId="{C3594856-CEDA-5129-B2AF-7962E3CA4CA3}" dt="2026-03-18T13:19:40.148" v="726" actId="14100"/>
+          <ac:chgData name="耀泉 马" userId="19e30af8d5659de2" providerId="LiveId" clId="{C3594856-CEDA-5129-B2AF-7962E3CA4CA3}" dt="2026-03-21T17:49:06.675" v="3333" actId="20577"/>
+          <ac:spMkLst>
+            <pc:docMk/>
+            <pc:sldMk cId="814386939" sldId="268"/>
+            <ac:spMk id="30" creationId="{35A90ADA-4ED2-EA0D-C51B-D9962D708F97}"/>
+          </ac:spMkLst>
+        </pc:spChg>
+        <pc:spChg chg="add mod">
+          <ac:chgData name="耀泉 马" userId="19e30af8d5659de2" providerId="LiveId" clId="{C3594856-CEDA-5129-B2AF-7962E3CA4CA3}" dt="2026-03-21T17:44:57.870" v="3271" actId="1037"/>
           <ac:spMkLst>
             <pc:docMk/>
             <pc:sldMk cId="814386939" sldId="268"/>
             <ac:spMk id="31" creationId="{4C4BE4F8-8409-9639-A500-F83409FCFFA7}"/>
           </ac:spMkLst>
         </pc:spChg>
-        <pc:spChg chg="add del mod">
-          <ac:chgData name="耀泉 马" userId="19e30af8d5659de2" providerId="LiveId" clId="{C3594856-CEDA-5129-B2AF-7962E3CA4CA3}" dt="2026-03-18T10:00:42.289" v="547"/>
+        <pc:spChg chg="add mod">
+          <ac:chgData name="耀泉 马" userId="19e30af8d5659de2" providerId="LiveId" clId="{C3594856-CEDA-5129-B2AF-7962E3CA4CA3}" dt="2026-03-21T17:48:51.651" v="3326"/>
           <ac:spMkLst>
             <pc:docMk/>
             <pc:sldMk cId="814386939" sldId="268"/>
-            <ac:spMk id="33" creationId="{F66F6175-39CE-8A11-F742-1AFA1585D95A}"/>
+            <ac:spMk id="33" creationId="{B8F9C0DF-9C3A-1217-442A-C22496842740}"/>
           </ac:spMkLst>
         </pc:spChg>
         <pc:spChg chg="add mod">
-          <ac:chgData name="耀泉 马" userId="19e30af8d5659de2" providerId="LiveId" clId="{C3594856-CEDA-5129-B2AF-7962E3CA4CA3}" dt="2026-03-18T13:36:46.476" v="1072" actId="1037"/>
+          <ac:chgData name="耀泉 马" userId="19e30af8d5659de2" providerId="LiveId" clId="{C3594856-CEDA-5129-B2AF-7962E3CA4CA3}" dt="2026-03-21T17:44:57.870" v="3271" actId="1037"/>
           <ac:spMkLst>
             <pc:docMk/>
             <pc:sldMk cId="814386939" sldId="268"/>
@@ -1006,7 +689,7 @@
           </ac:spMkLst>
         </pc:spChg>
         <pc:spChg chg="add mod">
-          <ac:chgData name="耀泉 马" userId="19e30af8d5659de2" providerId="LiveId" clId="{C3594856-CEDA-5129-B2AF-7962E3CA4CA3}" dt="2026-03-18T13:36:46.476" v="1072" actId="1037"/>
+          <ac:chgData name="耀泉 马" userId="19e30af8d5659de2" providerId="LiveId" clId="{C3594856-CEDA-5129-B2AF-7962E3CA4CA3}" dt="2026-03-21T17:44:57.870" v="3271" actId="1037"/>
           <ac:spMkLst>
             <pc:docMk/>
             <pc:sldMk cId="814386939" sldId="268"/>
@@ -1014,7 +697,7 @@
           </ac:spMkLst>
         </pc:spChg>
         <pc:spChg chg="add mod">
-          <ac:chgData name="耀泉 马" userId="19e30af8d5659de2" providerId="LiveId" clId="{C3594856-CEDA-5129-B2AF-7962E3CA4CA3}" dt="2026-03-18T13:36:46.476" v="1072" actId="1037"/>
+          <ac:chgData name="耀泉 马" userId="19e30af8d5659de2" providerId="LiveId" clId="{C3594856-CEDA-5129-B2AF-7962E3CA4CA3}" dt="2026-03-21T17:44:57.870" v="3271" actId="1037"/>
           <ac:spMkLst>
             <pc:docMk/>
             <pc:sldMk cId="814386939" sldId="268"/>
@@ -1022,7 +705,7 @@
           </ac:spMkLst>
         </pc:spChg>
         <pc:spChg chg="add mod">
-          <ac:chgData name="耀泉 马" userId="19e30af8d5659de2" providerId="LiveId" clId="{C3594856-CEDA-5129-B2AF-7962E3CA4CA3}" dt="2026-03-18T13:36:46.476" v="1072" actId="1037"/>
+          <ac:chgData name="耀泉 马" userId="19e30af8d5659de2" providerId="LiveId" clId="{C3594856-CEDA-5129-B2AF-7962E3CA4CA3}" dt="2026-03-21T17:44:57.870" v="3271" actId="1037"/>
           <ac:spMkLst>
             <pc:docMk/>
             <pc:sldMk cId="814386939" sldId="268"/>
@@ -1030,23 +713,15 @@
           </ac:spMkLst>
         </pc:spChg>
         <pc:spChg chg="add mod">
-          <ac:chgData name="耀泉 马" userId="19e30af8d5659de2" providerId="LiveId" clId="{C3594856-CEDA-5129-B2AF-7962E3CA4CA3}" dt="2026-03-18T13:20:14.238" v="743" actId="1035"/>
+          <ac:chgData name="耀泉 马" userId="19e30af8d5659de2" providerId="LiveId" clId="{C3594856-CEDA-5129-B2AF-7962E3CA4CA3}" dt="2026-03-21T17:44:57.870" v="3271" actId="1037"/>
           <ac:spMkLst>
             <pc:docMk/>
             <pc:sldMk cId="814386939" sldId="268"/>
             <ac:spMk id="38" creationId="{CB2106DB-534B-A3C8-74B6-F9ADB9D133FF}"/>
           </ac:spMkLst>
         </pc:spChg>
-        <pc:spChg chg="add del">
-          <ac:chgData name="耀泉 马" userId="19e30af8d5659de2" providerId="LiveId" clId="{C3594856-CEDA-5129-B2AF-7962E3CA4CA3}" dt="2026-03-18T10:02:24.218" v="599" actId="11529"/>
-          <ac:spMkLst>
-            <pc:docMk/>
-            <pc:sldMk cId="814386939" sldId="268"/>
-            <ac:spMk id="39" creationId="{96827D78-502C-B575-E667-C13CD107C9C9}"/>
-          </ac:spMkLst>
-        </pc:spChg>
         <pc:spChg chg="add mod">
-          <ac:chgData name="耀泉 马" userId="19e30af8d5659de2" providerId="LiveId" clId="{C3594856-CEDA-5129-B2AF-7962E3CA4CA3}" dt="2026-03-18T13:36:46.476" v="1072" actId="1037"/>
+          <ac:chgData name="耀泉 马" userId="19e30af8d5659de2" providerId="LiveId" clId="{C3594856-CEDA-5129-B2AF-7962E3CA4CA3}" dt="2026-03-21T17:44:57.870" v="3271" actId="1037"/>
           <ac:spMkLst>
             <pc:docMk/>
             <pc:sldMk cId="814386939" sldId="268"/>
@@ -1054,31 +729,15 @@
           </ac:spMkLst>
         </pc:spChg>
         <pc:spChg chg="add mod">
-          <ac:chgData name="耀泉 马" userId="19e30af8d5659de2" providerId="LiveId" clId="{C3594856-CEDA-5129-B2AF-7962E3CA4CA3}" dt="2026-03-18T13:36:46.476" v="1072" actId="1037"/>
+          <ac:chgData name="耀泉 马" userId="19e30af8d5659de2" providerId="LiveId" clId="{C3594856-CEDA-5129-B2AF-7962E3CA4CA3}" dt="2026-03-21T17:44:57.870" v="3271" actId="1037"/>
           <ac:spMkLst>
             <pc:docMk/>
             <pc:sldMk cId="814386939" sldId="268"/>
             <ac:spMk id="41" creationId="{E8ACCC30-8847-DDF5-0E99-0273CCFD743E}"/>
           </ac:spMkLst>
         </pc:spChg>
-        <pc:spChg chg="add del mod">
-          <ac:chgData name="耀泉 马" userId="19e30af8d5659de2" providerId="LiveId" clId="{C3594856-CEDA-5129-B2AF-7962E3CA4CA3}" dt="2026-03-18T13:16:36.604" v="682"/>
-          <ac:spMkLst>
-            <pc:docMk/>
-            <pc:sldMk cId="814386939" sldId="268"/>
-            <ac:spMk id="42" creationId="{9BE8185D-A2B1-D178-7BF4-F4AC74A8EE03}"/>
-          </ac:spMkLst>
-        </pc:spChg>
-        <pc:spChg chg="add del">
-          <ac:chgData name="耀泉 马" userId="19e30af8d5659de2" providerId="LiveId" clId="{C3594856-CEDA-5129-B2AF-7962E3CA4CA3}" dt="2026-03-18T13:16:40.303" v="684" actId="22"/>
-          <ac:spMkLst>
-            <pc:docMk/>
-            <pc:sldMk cId="814386939" sldId="268"/>
-            <ac:spMk id="44" creationId="{3675DDC1-3D43-52F4-6E30-F33C03BA4F0B}"/>
-          </ac:spMkLst>
-        </pc:spChg>
         <pc:spChg chg="add mod">
-          <ac:chgData name="耀泉 马" userId="19e30af8d5659de2" providerId="LiveId" clId="{C3594856-CEDA-5129-B2AF-7962E3CA4CA3}" dt="2026-03-18T13:36:46.476" v="1072" actId="1037"/>
+          <ac:chgData name="耀泉 马" userId="19e30af8d5659de2" providerId="LiveId" clId="{C3594856-CEDA-5129-B2AF-7962E3CA4CA3}" dt="2026-03-21T17:44:57.870" v="3271" actId="1037"/>
           <ac:spMkLst>
             <pc:docMk/>
             <pc:sldMk cId="814386939" sldId="268"/>
@@ -1101,22 +760,6 @@
             <ac:spMk id="52" creationId="{8B8FC5B0-A1F5-D5BD-3910-5A2F09AEB404}"/>
           </ac:spMkLst>
         </pc:spChg>
-        <pc:spChg chg="add del mod">
-          <ac:chgData name="耀泉 马" userId="19e30af8d5659de2" providerId="LiveId" clId="{C3594856-CEDA-5129-B2AF-7962E3CA4CA3}" dt="2026-03-18T13:25:51.480" v="873" actId="478"/>
-          <ac:spMkLst>
-            <pc:docMk/>
-            <pc:sldMk cId="814386939" sldId="268"/>
-            <ac:spMk id="53" creationId="{34C11876-F099-6BA1-28B9-644C6E1709E7}"/>
-          </ac:spMkLst>
-        </pc:spChg>
-        <pc:spChg chg="add del mod">
-          <ac:chgData name="耀泉 马" userId="19e30af8d5659de2" providerId="LiveId" clId="{C3594856-CEDA-5129-B2AF-7962E3CA4CA3}" dt="2026-03-18T13:24:32.773" v="859"/>
-          <ac:spMkLst>
-            <pc:docMk/>
-            <pc:sldMk cId="814386939" sldId="268"/>
-            <ac:spMk id="54" creationId="{0FB2DA32-45B6-D872-4BA1-D29E6B9322C7}"/>
-          </ac:spMkLst>
-        </pc:spChg>
         <pc:spChg chg="add mod">
           <ac:chgData name="耀泉 马" userId="19e30af8d5659de2" providerId="LiveId" clId="{C3594856-CEDA-5129-B2AF-7962E3CA4CA3}" dt="2026-03-18T13:38:33.485" v="1128" actId="692"/>
           <ac:spMkLst>
@@ -1133,28 +776,12 @@
             <ac:spMk id="58" creationId="{6EE0CBBE-B553-FAB0-5A8E-9FFE28521536}"/>
           </ac:spMkLst>
         </pc:spChg>
-        <pc:spChg chg="add del mod">
-          <ac:chgData name="耀泉 马" userId="19e30af8d5659de2" providerId="LiveId" clId="{C3594856-CEDA-5129-B2AF-7962E3CA4CA3}" dt="2026-03-18T13:25:49.071" v="872"/>
-          <ac:spMkLst>
-            <pc:docMk/>
-            <pc:sldMk cId="814386939" sldId="268"/>
-            <ac:spMk id="60" creationId="{A4596D31-71FF-AE6C-76FD-EBEA1A605128}"/>
-          </ac:spMkLst>
-        </pc:spChg>
         <pc:spChg chg="add mod">
           <ac:chgData name="耀泉 马" userId="19e30af8d5659de2" providerId="LiveId" clId="{C3594856-CEDA-5129-B2AF-7962E3CA4CA3}" dt="2026-03-18T19:45:10.065" v="1700" actId="207"/>
           <ac:spMkLst>
             <pc:docMk/>
             <pc:sldMk cId="814386939" sldId="268"/>
             <ac:spMk id="61" creationId="{EF3E311E-249D-8AE8-40EB-C4B8841E7274}"/>
-          </ac:spMkLst>
-        </pc:spChg>
-        <pc:spChg chg="add del mod">
-          <ac:chgData name="耀泉 马" userId="19e30af8d5659de2" providerId="LiveId" clId="{C3594856-CEDA-5129-B2AF-7962E3CA4CA3}" dt="2026-03-18T13:31:17.213" v="951" actId="478"/>
-          <ac:spMkLst>
-            <pc:docMk/>
-            <pc:sldMk cId="814386939" sldId="268"/>
-            <ac:spMk id="67" creationId="{926A75FB-D7F0-450B-9A77-67F7122CC3FD}"/>
           </ac:spMkLst>
         </pc:spChg>
         <pc:spChg chg="add mod">
@@ -1237,22 +864,6 @@
             <ac:spMk id="79" creationId="{40FEA40F-045D-3818-232F-1989D72E2D17}"/>
           </ac:spMkLst>
         </pc:spChg>
-        <pc:spChg chg="add mod">
-          <ac:chgData name="耀泉 马" userId="19e30af8d5659de2" providerId="LiveId" clId="{C3594856-CEDA-5129-B2AF-7962E3CA4CA3}" dt="2026-03-18T20:52:37.829" v="1895"/>
-          <ac:spMkLst>
-            <pc:docMk/>
-            <pc:sldMk cId="814386939" sldId="268"/>
-            <ac:spMk id="95" creationId="{21502362-6DDB-9CF8-DB0A-E70030AD82C1}"/>
-          </ac:spMkLst>
-        </pc:spChg>
-        <pc:spChg chg="add mod">
-          <ac:chgData name="耀泉 马" userId="19e30af8d5659de2" providerId="LiveId" clId="{C3594856-CEDA-5129-B2AF-7962E3CA4CA3}" dt="2026-03-18T20:53:47.241" v="1914"/>
-          <ac:spMkLst>
-            <pc:docMk/>
-            <pc:sldMk cId="814386939" sldId="268"/>
-            <ac:spMk id="112" creationId="{A6655321-B637-4813-4F8F-92E8D9E4F0DE}"/>
-          </ac:spMkLst>
-        </pc:spChg>
         <pc:grpChg chg="add mod">
           <ac:chgData name="耀泉 马" userId="19e30af8d5659de2" providerId="LiveId" clId="{C3594856-CEDA-5129-B2AF-7962E3CA4CA3}" dt="2026-03-18T20:54:12.708" v="1919" actId="164"/>
           <ac:grpSpMkLst>
@@ -1269,56 +880,8 @@
             <ac:picMk id="10" creationId="{96811831-89C9-59F0-2294-9692BCB60E51}"/>
           </ac:picMkLst>
         </pc:picChg>
-        <pc:picChg chg="add del mod">
-          <ac:chgData name="耀泉 马" userId="19e30af8d5659de2" providerId="LiveId" clId="{C3594856-CEDA-5129-B2AF-7962E3CA4CA3}" dt="2026-03-18T09:56:55.837" v="426" actId="478"/>
-          <ac:picMkLst>
-            <pc:docMk/>
-            <pc:sldMk cId="814386939" sldId="268"/>
-            <ac:picMk id="22" creationId="{EA62D1D5-EC56-1886-25E7-5FB9910816C1}"/>
-          </ac:picMkLst>
-        </pc:picChg>
-        <pc:picChg chg="add del mod">
-          <ac:chgData name="耀泉 马" userId="19e30af8d5659de2" providerId="LiveId" clId="{C3594856-CEDA-5129-B2AF-7962E3CA4CA3}" dt="2026-03-18T09:57:16.830" v="433" actId="478"/>
-          <ac:picMkLst>
-            <pc:docMk/>
-            <pc:sldMk cId="814386939" sldId="268"/>
-            <ac:picMk id="23" creationId="{797F9282-2611-F80D-71C3-BC73D71407F6}"/>
-          </ac:picMkLst>
-        </pc:picChg>
         <pc:picChg chg="add mod">
-          <ac:chgData name="耀泉 马" userId="19e30af8d5659de2" providerId="LiveId" clId="{C3594856-CEDA-5129-B2AF-7962E3CA4CA3}" dt="2026-03-18T09:57:36.480" v="436" actId="688"/>
-          <ac:picMkLst>
-            <pc:docMk/>
-            <pc:sldMk cId="814386939" sldId="268"/>
-            <ac:picMk id="25" creationId="{04B9246A-1503-7220-14F8-FE90BB638B84}"/>
-          </ac:picMkLst>
-        </pc:picChg>
-        <pc:picChg chg="add">
-          <ac:chgData name="耀泉 马" userId="19e30af8d5659de2" providerId="LiveId" clId="{C3594856-CEDA-5129-B2AF-7962E3CA4CA3}" dt="2026-03-18T09:57:47.568" v="437"/>
-          <ac:picMkLst>
-            <pc:docMk/>
-            <pc:sldMk cId="814386939" sldId="268"/>
-            <ac:picMk id="26" creationId="{E7C5ED85-9530-8321-3613-99AFEFE3921E}"/>
-          </ac:picMkLst>
-        </pc:picChg>
-        <pc:picChg chg="add del mod">
-          <ac:chgData name="耀泉 马" userId="19e30af8d5659de2" providerId="LiveId" clId="{C3594856-CEDA-5129-B2AF-7962E3CA4CA3}" dt="2026-03-18T20:46:22.162" v="1809" actId="478"/>
-          <ac:picMkLst>
-            <pc:docMk/>
-            <pc:sldMk cId="814386939" sldId="268"/>
-            <ac:picMk id="27" creationId="{F1913094-1467-B0FB-C16D-F4CB38A12599}"/>
-          </ac:picMkLst>
-        </pc:picChg>
-        <pc:picChg chg="add del mod">
-          <ac:chgData name="耀泉 马" userId="19e30af8d5659de2" providerId="LiveId" clId="{C3594856-CEDA-5129-B2AF-7962E3CA4CA3}" dt="2026-03-18T13:19:01.230" v="722" actId="478"/>
-          <ac:picMkLst>
-            <pc:docMk/>
-            <pc:sldMk cId="814386939" sldId="268"/>
-            <ac:picMk id="46" creationId="{B8C75CE7-6A15-0468-6132-5EAD5EFCC67E}"/>
-          </ac:picMkLst>
-        </pc:picChg>
-        <pc:picChg chg="add mod">
-          <ac:chgData name="耀泉 马" userId="19e30af8d5659de2" providerId="LiveId" clId="{C3594856-CEDA-5129-B2AF-7962E3CA4CA3}" dt="2026-03-18T13:20:30.397" v="782" actId="1036"/>
+          <ac:chgData name="耀泉 马" userId="19e30af8d5659de2" providerId="LiveId" clId="{C3594856-CEDA-5129-B2AF-7962E3CA4CA3}" dt="2026-03-21T17:44:57.870" v="3271" actId="1037"/>
           <ac:picMkLst>
             <pc:docMk/>
             <pc:sldMk cId="814386939" sldId="268"/>
@@ -1347,14 +910,6 @@
             <pc:docMk/>
             <pc:sldMk cId="814386939" sldId="268"/>
             <ac:cxnSpMk id="8" creationId="{FB96A4DD-1145-4C3E-1DBD-CC982FF21C79}"/>
-          </ac:cxnSpMkLst>
-        </pc:cxnChg>
-        <pc:cxnChg chg="add del mod">
-          <ac:chgData name="耀泉 马" userId="19e30af8d5659de2" providerId="LiveId" clId="{C3594856-CEDA-5129-B2AF-7962E3CA4CA3}" dt="2026-03-18T09:51:24.707" v="333" actId="478"/>
-          <ac:cxnSpMkLst>
-            <pc:docMk/>
-            <pc:sldMk cId="814386939" sldId="268"/>
-            <ac:cxnSpMk id="10" creationId="{8DEBF24D-E0C7-FACD-5262-03978EEAEF42}"/>
           </ac:cxnSpMkLst>
         </pc:cxnChg>
         <pc:cxnChg chg="add mod">
@@ -1395,6 +950,14 @@
             <pc:docMk/>
             <pc:sldMk cId="814386939" sldId="268"/>
             <ac:cxnSpMk id="43" creationId="{F65AD1BA-1D61-77BB-3072-54FC94A052AE}"/>
+          </ac:cxnSpMkLst>
+        </pc:cxnChg>
+        <pc:cxnChg chg="add mod">
+          <ac:chgData name="耀泉 马" userId="19e30af8d5659de2" providerId="LiveId" clId="{C3594856-CEDA-5129-B2AF-7962E3CA4CA3}" dt="2026-03-21T17:49:38.641" v="3335" actId="692"/>
+          <ac:cxnSpMkLst>
+            <pc:docMk/>
+            <pc:sldMk cId="814386939" sldId="268"/>
+            <ac:cxnSpMk id="44" creationId="{AB8106FF-636B-AB03-E5F0-D78D50008D2F}"/>
           </ac:cxnSpMkLst>
         </pc:cxnChg>
         <pc:cxnChg chg="add mod">
@@ -1542,291 +1105,6 @@
           </ac:cxnSpMkLst>
         </pc:cxnChg>
       </pc:sldChg>
-      <pc:sldChg chg="addSp delSp modSp add del mod setBg delDesignElem">
-        <pc:chgData name="耀泉 马" userId="19e30af8d5659de2" providerId="LiveId" clId="{C3594856-CEDA-5129-B2AF-7962E3CA4CA3}" dt="2026-03-18T19:27:27.392" v="1591" actId="2696"/>
-        <pc:sldMkLst>
-          <pc:docMk/>
-          <pc:sldMk cId="1174935033" sldId="269"/>
-        </pc:sldMkLst>
-        <pc:spChg chg="mod">
-          <ac:chgData name="耀泉 马" userId="19e30af8d5659de2" providerId="LiveId" clId="{C3594856-CEDA-5129-B2AF-7962E3CA4CA3}" dt="2026-03-18T19:27:20.466" v="1588" actId="26606"/>
-          <ac:spMkLst>
-            <pc:docMk/>
-            <pc:sldMk cId="1174935033" sldId="269"/>
-            <ac:spMk id="2" creationId="{B3228853-27D2-E3F9-38B6-82ACEA74EABE}"/>
-          </ac:spMkLst>
-        </pc:spChg>
-        <pc:spChg chg="add del mod">
-          <ac:chgData name="耀泉 马" userId="19e30af8d5659de2" providerId="LiveId" clId="{C3594856-CEDA-5129-B2AF-7962E3CA4CA3}" dt="2026-03-18T19:27:18.385" v="1586" actId="478"/>
-          <ac:spMkLst>
-            <pc:docMk/>
-            <pc:sldMk cId="1174935033" sldId="269"/>
-            <ac:spMk id="4" creationId="{C40ADEA8-33A8-68E3-107F-C597A5366CD1}"/>
-          </ac:spMkLst>
-        </pc:spChg>
-        <pc:spChg chg="add del">
-          <ac:chgData name="耀泉 马" userId="19e30af8d5659de2" providerId="LiveId" clId="{C3594856-CEDA-5129-B2AF-7962E3CA4CA3}" dt="2026-03-18T19:27:20.466" v="1588" actId="26606"/>
-          <ac:spMkLst>
-            <pc:docMk/>
-            <pc:sldMk cId="1174935033" sldId="269"/>
-            <ac:spMk id="7" creationId="{BACC6370-2D7E-4714-9D71-7542949D7D5D}"/>
-          </ac:spMkLst>
-        </pc:spChg>
-        <pc:spChg chg="add del">
-          <ac:chgData name="耀泉 马" userId="19e30af8d5659de2" providerId="LiveId" clId="{C3594856-CEDA-5129-B2AF-7962E3CA4CA3}" dt="2026-03-18T19:27:20.466" v="1588" actId="26606"/>
-          <ac:spMkLst>
-            <pc:docMk/>
-            <pc:sldMk cId="1174935033" sldId="269"/>
-            <ac:spMk id="8" creationId="{F68B3F68-107C-434F-AA38-110D5EA91B85}"/>
-          </ac:spMkLst>
-        </pc:spChg>
-        <pc:spChg chg="del">
-          <ac:chgData name="耀泉 马" userId="19e30af8d5659de2" providerId="LiveId" clId="{C3594856-CEDA-5129-B2AF-7962E3CA4CA3}" dt="2026-03-18T19:26:03.538" v="1575"/>
-          <ac:spMkLst>
-            <pc:docMk/>
-            <pc:sldMk cId="1174935033" sldId="269"/>
-            <ac:spMk id="9" creationId="{D04B9A61-838A-DEE9-FD85-20769A46346E}"/>
-          </ac:spMkLst>
-        </pc:spChg>
-        <pc:spChg chg="add del">
-          <ac:chgData name="耀泉 马" userId="19e30af8d5659de2" providerId="LiveId" clId="{C3594856-CEDA-5129-B2AF-7962E3CA4CA3}" dt="2026-03-18T19:26:34.722" v="1579" actId="26606"/>
-          <ac:spMkLst>
-            <pc:docMk/>
-            <pc:sldMk cId="1174935033" sldId="269"/>
-            <ac:spMk id="10" creationId="{BACC6370-2D7E-4714-9D71-7542949D7D5D}"/>
-          </ac:spMkLst>
-        </pc:spChg>
-        <pc:spChg chg="del">
-          <ac:chgData name="耀泉 马" userId="19e30af8d5659de2" providerId="LiveId" clId="{C3594856-CEDA-5129-B2AF-7962E3CA4CA3}" dt="2026-03-18T19:26:03.538" v="1575"/>
-          <ac:spMkLst>
-            <pc:docMk/>
-            <pc:sldMk cId="1174935033" sldId="269"/>
-            <ac:spMk id="11" creationId="{271C36E2-AC58-6431-4031-4F4B37CC3944}"/>
-          </ac:spMkLst>
-        </pc:spChg>
-        <pc:spChg chg="add del">
-          <ac:chgData name="耀泉 马" userId="19e30af8d5659de2" providerId="LiveId" clId="{C3594856-CEDA-5129-B2AF-7962E3CA4CA3}" dt="2026-03-18T19:26:34.722" v="1579" actId="26606"/>
-          <ac:spMkLst>
-            <pc:docMk/>
-            <pc:sldMk cId="1174935033" sldId="269"/>
-            <ac:spMk id="12" creationId="{F68B3F68-107C-434F-AA38-110D5EA91B85}"/>
-          </ac:spMkLst>
-        </pc:spChg>
-        <pc:spChg chg="del">
-          <ac:chgData name="耀泉 马" userId="19e30af8d5659de2" providerId="LiveId" clId="{C3594856-CEDA-5129-B2AF-7962E3CA4CA3}" dt="2026-03-18T19:26:03.538" v="1575"/>
-          <ac:spMkLst>
-            <pc:docMk/>
-            <pc:sldMk cId="1174935033" sldId="269"/>
-            <ac:spMk id="13" creationId="{2A104312-7A55-B8EE-4B22-D8B04C9CE9BC}"/>
-          </ac:spMkLst>
-        </pc:spChg>
-        <pc:spChg chg="add del">
-          <ac:chgData name="耀泉 马" userId="19e30af8d5659de2" providerId="LiveId" clId="{C3594856-CEDA-5129-B2AF-7962E3CA4CA3}" dt="2026-03-18T19:26:34.722" v="1579" actId="26606"/>
-          <ac:spMkLst>
-            <pc:docMk/>
-            <pc:sldMk cId="1174935033" sldId="269"/>
-            <ac:spMk id="14" creationId="{AAD0DBB9-1A4B-4391-81D4-CB19F9AB918A}"/>
-          </ac:spMkLst>
-        </pc:spChg>
-        <pc:spChg chg="del">
-          <ac:chgData name="耀泉 马" userId="19e30af8d5659de2" providerId="LiveId" clId="{C3594856-CEDA-5129-B2AF-7962E3CA4CA3}" dt="2026-03-18T19:26:03.538" v="1575"/>
-          <ac:spMkLst>
-            <pc:docMk/>
-            <pc:sldMk cId="1174935033" sldId="269"/>
-            <ac:spMk id="15" creationId="{517CCF13-0AC7-FDA0-4D76-C4446EA9CE1A}"/>
-          </ac:spMkLst>
-        </pc:spChg>
-        <pc:spChg chg="add del">
-          <ac:chgData name="耀泉 马" userId="19e30af8d5659de2" providerId="LiveId" clId="{C3594856-CEDA-5129-B2AF-7962E3CA4CA3}" dt="2026-03-18T19:26:34.722" v="1579" actId="26606"/>
-          <ac:spMkLst>
-            <pc:docMk/>
-            <pc:sldMk cId="1174935033" sldId="269"/>
-            <ac:spMk id="16" creationId="{063BBA22-50EA-4C4D-BE05-F1CE4E63AA56}"/>
-          </ac:spMkLst>
-        </pc:spChg>
-        <pc:spChg chg="add del">
-          <ac:chgData name="耀泉 马" userId="19e30af8d5659de2" providerId="LiveId" clId="{C3594856-CEDA-5129-B2AF-7962E3CA4CA3}" dt="2026-03-18T19:27:20.466" v="1588" actId="26606"/>
-          <ac:spMkLst>
-            <pc:docMk/>
-            <pc:sldMk cId="1174935033" sldId="269"/>
-            <ac:spMk id="17" creationId="{AAD0DBB9-1A4B-4391-81D4-CB19F9AB918A}"/>
-          </ac:spMkLst>
-        </pc:spChg>
-        <pc:spChg chg="add del">
-          <ac:chgData name="耀泉 马" userId="19e30af8d5659de2" providerId="LiveId" clId="{C3594856-CEDA-5129-B2AF-7962E3CA4CA3}" dt="2026-03-18T19:27:20.466" v="1588" actId="26606"/>
-          <ac:spMkLst>
-            <pc:docMk/>
-            <pc:sldMk cId="1174935033" sldId="269"/>
-            <ac:spMk id="18" creationId="{063BBA22-50EA-4C4D-BE05-F1CE4E63AA56}"/>
-          </ac:spMkLst>
-        </pc:spChg>
-        <pc:spChg chg="add mod">
-          <ac:chgData name="耀泉 马" userId="19e30af8d5659de2" providerId="LiveId" clId="{C3594856-CEDA-5129-B2AF-7962E3CA4CA3}" dt="2026-03-18T19:27:08.661" v="1585"/>
-          <ac:spMkLst>
-            <pc:docMk/>
-            <pc:sldMk cId="1174935033" sldId="269"/>
-            <ac:spMk id="19" creationId="{68EBF0FA-4BAD-B30A-A99A-51AE748A7751}"/>
-          </ac:spMkLst>
-        </pc:spChg>
-        <pc:spChg chg="add mod">
-          <ac:chgData name="耀泉 马" userId="19e30af8d5659de2" providerId="LiveId" clId="{C3594856-CEDA-5129-B2AF-7962E3CA4CA3}" dt="2026-03-18T19:27:08.661" v="1585"/>
-          <ac:spMkLst>
-            <pc:docMk/>
-            <pc:sldMk cId="1174935033" sldId="269"/>
-            <ac:spMk id="20" creationId="{60C9D649-D5CC-7841-1B06-5D58E325CBEF}"/>
-          </ac:spMkLst>
-        </pc:spChg>
-        <pc:spChg chg="add mod">
-          <ac:chgData name="耀泉 马" userId="19e30af8d5659de2" providerId="LiveId" clId="{C3594856-CEDA-5129-B2AF-7962E3CA4CA3}" dt="2026-03-18T19:27:08.661" v="1585"/>
-          <ac:spMkLst>
-            <pc:docMk/>
-            <pc:sldMk cId="1174935033" sldId="269"/>
-            <ac:spMk id="27" creationId="{0D58B7A6-CD75-B03A-DCD6-10E2E2142838}"/>
-          </ac:spMkLst>
-        </pc:spChg>
-        <pc:spChg chg="add mod">
-          <ac:chgData name="耀泉 马" userId="19e30af8d5659de2" providerId="LiveId" clId="{C3594856-CEDA-5129-B2AF-7962E3CA4CA3}" dt="2026-03-18T19:27:08.661" v="1585"/>
-          <ac:spMkLst>
-            <pc:docMk/>
-            <pc:sldMk cId="1174935033" sldId="269"/>
-            <ac:spMk id="28" creationId="{8243A4B0-D00A-BA47-7EB5-2886A1AA6BED}"/>
-          </ac:spMkLst>
-        </pc:spChg>
-        <pc:spChg chg="add mod">
-          <ac:chgData name="耀泉 马" userId="19e30af8d5659de2" providerId="LiveId" clId="{C3594856-CEDA-5129-B2AF-7962E3CA4CA3}" dt="2026-03-18T19:27:08.661" v="1585"/>
-          <ac:spMkLst>
-            <pc:docMk/>
-            <pc:sldMk cId="1174935033" sldId="269"/>
-            <ac:spMk id="29" creationId="{CA89A2AA-92FB-5F05-B86F-C0C8AEFB356D}"/>
-          </ac:spMkLst>
-        </pc:spChg>
-        <pc:spChg chg="add mod">
-          <ac:chgData name="耀泉 马" userId="19e30af8d5659de2" providerId="LiveId" clId="{C3594856-CEDA-5129-B2AF-7962E3CA4CA3}" dt="2026-03-18T19:27:08.661" v="1585"/>
-          <ac:spMkLst>
-            <pc:docMk/>
-            <pc:sldMk cId="1174935033" sldId="269"/>
-            <ac:spMk id="34" creationId="{5F8E3DE2-44E3-4888-7781-47B2193DE7F9}"/>
-          </ac:spMkLst>
-        </pc:spChg>
-        <pc:spChg chg="add mod">
-          <ac:chgData name="耀泉 马" userId="19e30af8d5659de2" providerId="LiveId" clId="{C3594856-CEDA-5129-B2AF-7962E3CA4CA3}" dt="2026-03-18T19:27:08.661" v="1585"/>
-          <ac:spMkLst>
-            <pc:docMk/>
-            <pc:sldMk cId="1174935033" sldId="269"/>
-            <ac:spMk id="36" creationId="{B6D252BF-DF9B-928A-8BFB-68E4DE617F33}"/>
-          </ac:spMkLst>
-        </pc:spChg>
-        <pc:spChg chg="add mod">
-          <ac:chgData name="耀泉 马" userId="19e30af8d5659de2" providerId="LiveId" clId="{C3594856-CEDA-5129-B2AF-7962E3CA4CA3}" dt="2026-03-18T19:27:08.661" v="1585"/>
-          <ac:spMkLst>
-            <pc:docMk/>
-            <pc:sldMk cId="1174935033" sldId="269"/>
-            <ac:spMk id="41" creationId="{D5E58071-3729-DC70-98F9-223A5EF85392}"/>
-          </ac:spMkLst>
-        </pc:spChg>
-        <pc:spChg chg="add mod">
-          <ac:chgData name="耀泉 马" userId="19e30af8d5659de2" providerId="LiveId" clId="{C3594856-CEDA-5129-B2AF-7962E3CA4CA3}" dt="2026-03-18T19:27:08.661" v="1585"/>
-          <ac:spMkLst>
-            <pc:docMk/>
-            <pc:sldMk cId="1174935033" sldId="269"/>
-            <ac:spMk id="44" creationId="{559E5629-8B55-FB50-53CB-3D134AC3BF6E}"/>
-          </ac:spMkLst>
-        </pc:spChg>
-        <pc:spChg chg="add mod">
-          <ac:chgData name="耀泉 马" userId="19e30af8d5659de2" providerId="LiveId" clId="{C3594856-CEDA-5129-B2AF-7962E3CA4CA3}" dt="2026-03-18T19:27:08.661" v="1585"/>
-          <ac:spMkLst>
-            <pc:docMk/>
-            <pc:sldMk cId="1174935033" sldId="269"/>
-            <ac:spMk id="48" creationId="{EBEA160F-4505-CF37-9D8F-37A52197A930}"/>
-          </ac:spMkLst>
-        </pc:spChg>
-        <pc:graphicFrameChg chg="add del mod modGraphic">
-          <ac:chgData name="耀泉 马" userId="19e30af8d5659de2" providerId="LiveId" clId="{C3594856-CEDA-5129-B2AF-7962E3CA4CA3}" dt="2026-03-18T19:27:20.466" v="1588" actId="26606"/>
-          <ac:graphicFrameMkLst>
-            <pc:docMk/>
-            <pc:sldMk cId="1174935033" sldId="269"/>
-            <ac:graphicFrameMk id="5" creationId="{1B936183-121C-67E0-1299-E835A331C309}"/>
-          </ac:graphicFrameMkLst>
-        </pc:graphicFrameChg>
-      </pc:sldChg>
-      <pc:sldChg chg="addSp delSp add del setBg delDesignElem">
-        <pc:chgData name="耀泉 马" userId="19e30af8d5659de2" providerId="LiveId" clId="{C3594856-CEDA-5129-B2AF-7962E3CA4CA3}" dt="2026-03-18T19:25:56.581" v="1573"/>
-        <pc:sldMkLst>
-          <pc:docMk/>
-          <pc:sldMk cId="2502493570" sldId="269"/>
-        </pc:sldMkLst>
-        <pc:spChg chg="add del">
-          <ac:chgData name="耀泉 马" userId="19e30af8d5659de2" providerId="LiveId" clId="{C3594856-CEDA-5129-B2AF-7962E3CA4CA3}" dt="2026-03-18T19:25:56.581" v="1573"/>
-          <ac:spMkLst>
-            <pc:docMk/>
-            <pc:sldMk cId="2502493570" sldId="269"/>
-            <ac:spMk id="9" creationId="{109588BC-24AF-8E08-C813-A482DF0BE847}"/>
-          </ac:spMkLst>
-        </pc:spChg>
-        <pc:spChg chg="add del">
-          <ac:chgData name="耀泉 马" userId="19e30af8d5659de2" providerId="LiveId" clId="{C3594856-CEDA-5129-B2AF-7962E3CA4CA3}" dt="2026-03-18T19:25:56.581" v="1573"/>
-          <ac:spMkLst>
-            <pc:docMk/>
-            <pc:sldMk cId="2502493570" sldId="269"/>
-            <ac:spMk id="11" creationId="{9020DC82-C595-4B37-9BA7-E4C85F6BEF52}"/>
-          </ac:spMkLst>
-        </pc:spChg>
-        <pc:spChg chg="add del">
-          <ac:chgData name="耀泉 马" userId="19e30af8d5659de2" providerId="LiveId" clId="{C3594856-CEDA-5129-B2AF-7962E3CA4CA3}" dt="2026-03-18T19:25:56.581" v="1573"/>
-          <ac:spMkLst>
-            <pc:docMk/>
-            <pc:sldMk cId="2502493570" sldId="269"/>
-            <ac:spMk id="13" creationId="{6B46F1E1-63E7-D460-3157-B46527C4240E}"/>
-          </ac:spMkLst>
-        </pc:spChg>
-        <pc:spChg chg="add del">
-          <ac:chgData name="耀泉 马" userId="19e30af8d5659de2" providerId="LiveId" clId="{C3594856-CEDA-5129-B2AF-7962E3CA4CA3}" dt="2026-03-18T19:25:56.581" v="1573"/>
-          <ac:spMkLst>
-            <pc:docMk/>
-            <pc:sldMk cId="2502493570" sldId="269"/>
-            <ac:spMk id="15" creationId="{F3AB05B1-9AFF-DD99-1071-DD7486788885}"/>
-          </ac:spMkLst>
-        </pc:spChg>
-      </pc:sldChg>
-      <pc:sldChg chg="addSp delSp add del setBg delDesignElem">
-        <pc:chgData name="耀泉 马" userId="19e30af8d5659de2" providerId="LiveId" clId="{C3594856-CEDA-5129-B2AF-7962E3CA4CA3}" dt="2026-03-18T19:25:47.595" v="1570"/>
-        <pc:sldMkLst>
-          <pc:docMk/>
-          <pc:sldMk cId="3434641110" sldId="269"/>
-        </pc:sldMkLst>
-        <pc:spChg chg="add del">
-          <ac:chgData name="耀泉 马" userId="19e30af8d5659de2" providerId="LiveId" clId="{C3594856-CEDA-5129-B2AF-7962E3CA4CA3}" dt="2026-03-18T19:25:47.595" v="1570"/>
-          <ac:spMkLst>
-            <pc:docMk/>
-            <pc:sldMk cId="3434641110" sldId="269"/>
-            <ac:spMk id="9" creationId="{321B5957-44E8-3761-795A-99D73241D90A}"/>
-          </ac:spMkLst>
-        </pc:spChg>
-        <pc:spChg chg="add del">
-          <ac:chgData name="耀泉 马" userId="19e30af8d5659de2" providerId="LiveId" clId="{C3594856-CEDA-5129-B2AF-7962E3CA4CA3}" dt="2026-03-18T19:25:47.595" v="1570"/>
-          <ac:spMkLst>
-            <pc:docMk/>
-            <pc:sldMk cId="3434641110" sldId="269"/>
-            <ac:spMk id="11" creationId="{1333C1D5-03F8-3C26-5573-1D54F699CB5B}"/>
-          </ac:spMkLst>
-        </pc:spChg>
-        <pc:spChg chg="add del">
-          <ac:chgData name="耀泉 马" userId="19e30af8d5659de2" providerId="LiveId" clId="{C3594856-CEDA-5129-B2AF-7962E3CA4CA3}" dt="2026-03-18T19:25:47.595" v="1570"/>
-          <ac:spMkLst>
-            <pc:docMk/>
-            <pc:sldMk cId="3434641110" sldId="269"/>
-            <ac:spMk id="13" creationId="{E604B423-E5C4-6676-C63D-5FFB53963047}"/>
-          </ac:spMkLst>
-        </pc:spChg>
-        <pc:spChg chg="add del">
-          <ac:chgData name="耀泉 马" userId="19e30af8d5659de2" providerId="LiveId" clId="{C3594856-CEDA-5129-B2AF-7962E3CA4CA3}" dt="2026-03-18T19:25:47.595" v="1570"/>
-          <ac:spMkLst>
-            <pc:docMk/>
-            <pc:sldMk cId="3434641110" sldId="269"/>
-            <ac:spMk id="15" creationId="{67BF0473-20E3-579F-D168-4482923972F9}"/>
-          </ac:spMkLst>
-        </pc:spChg>
-      </pc:sldChg>
       <pc:sldChg chg="addSp delSp modSp add mod setBg delDesignElem">
         <pc:chgData name="耀泉 马" userId="19e30af8d5659de2" providerId="LiveId" clId="{C3594856-CEDA-5129-B2AF-7962E3CA4CA3}" dt="2026-03-18T19:28:40.004" v="1602" actId="26606"/>
         <pc:sldMkLst>
@@ -1839,70 +1117,6 @@
             <pc:docMk/>
             <pc:sldMk cId="3009339318" sldId="270"/>
             <ac:spMk id="2" creationId="{8C2E78B4-A90C-BC7A-E23E-EE76AD962353}"/>
-          </ac:spMkLst>
-        </pc:spChg>
-        <pc:spChg chg="del">
-          <ac:chgData name="耀泉 马" userId="19e30af8d5659de2" providerId="LiveId" clId="{C3594856-CEDA-5129-B2AF-7962E3CA4CA3}" dt="2026-03-18T19:27:25.853" v="1590"/>
-          <ac:spMkLst>
-            <pc:docMk/>
-            <pc:sldMk cId="3009339318" sldId="270"/>
-            <ac:spMk id="9" creationId="{2C86D385-68A4-854A-C736-BE49B22FE8DB}"/>
-          </ac:spMkLst>
-        </pc:spChg>
-        <pc:spChg chg="add del">
-          <ac:chgData name="耀泉 马" userId="19e30af8d5659de2" providerId="LiveId" clId="{C3594856-CEDA-5129-B2AF-7962E3CA4CA3}" dt="2026-03-18T19:28:40.004" v="1602" actId="26606"/>
-          <ac:spMkLst>
-            <pc:docMk/>
-            <pc:sldMk cId="3009339318" sldId="270"/>
-            <ac:spMk id="10" creationId="{BACC6370-2D7E-4714-9D71-7542949D7D5D}"/>
-          </ac:spMkLst>
-        </pc:spChg>
-        <pc:spChg chg="del">
-          <ac:chgData name="耀泉 马" userId="19e30af8d5659de2" providerId="LiveId" clId="{C3594856-CEDA-5129-B2AF-7962E3CA4CA3}" dt="2026-03-18T19:27:25.853" v="1590"/>
-          <ac:spMkLst>
-            <pc:docMk/>
-            <pc:sldMk cId="3009339318" sldId="270"/>
-            <ac:spMk id="11" creationId="{4187D256-7E35-7638-4C5E-56E82C41B5FC}"/>
-          </ac:spMkLst>
-        </pc:spChg>
-        <pc:spChg chg="add del">
-          <ac:chgData name="耀泉 马" userId="19e30af8d5659de2" providerId="LiveId" clId="{C3594856-CEDA-5129-B2AF-7962E3CA4CA3}" dt="2026-03-18T19:28:40.004" v="1602" actId="26606"/>
-          <ac:spMkLst>
-            <pc:docMk/>
-            <pc:sldMk cId="3009339318" sldId="270"/>
-            <ac:spMk id="12" creationId="{F68B3F68-107C-434F-AA38-110D5EA91B85}"/>
-          </ac:spMkLst>
-        </pc:spChg>
-        <pc:spChg chg="del">
-          <ac:chgData name="耀泉 马" userId="19e30af8d5659de2" providerId="LiveId" clId="{C3594856-CEDA-5129-B2AF-7962E3CA4CA3}" dt="2026-03-18T19:27:25.853" v="1590"/>
-          <ac:spMkLst>
-            <pc:docMk/>
-            <pc:sldMk cId="3009339318" sldId="270"/>
-            <ac:spMk id="13" creationId="{F87C3068-D958-ED1A-3721-E3EC32830CB3}"/>
-          </ac:spMkLst>
-        </pc:spChg>
-        <pc:spChg chg="add del">
-          <ac:chgData name="耀泉 马" userId="19e30af8d5659de2" providerId="LiveId" clId="{C3594856-CEDA-5129-B2AF-7962E3CA4CA3}" dt="2026-03-18T19:28:40.004" v="1602" actId="26606"/>
-          <ac:spMkLst>
-            <pc:docMk/>
-            <pc:sldMk cId="3009339318" sldId="270"/>
-            <ac:spMk id="14" creationId="{AAD0DBB9-1A4B-4391-81D4-CB19F9AB918A}"/>
-          </ac:spMkLst>
-        </pc:spChg>
-        <pc:spChg chg="del">
-          <ac:chgData name="耀泉 马" userId="19e30af8d5659de2" providerId="LiveId" clId="{C3594856-CEDA-5129-B2AF-7962E3CA4CA3}" dt="2026-03-18T19:27:25.853" v="1590"/>
-          <ac:spMkLst>
-            <pc:docMk/>
-            <pc:sldMk cId="3009339318" sldId="270"/>
-            <ac:spMk id="15" creationId="{047CAB64-4D0F-4256-A9A4-3D3771A91135}"/>
-          </ac:spMkLst>
-        </pc:spChg>
-        <pc:spChg chg="add del">
-          <ac:chgData name="耀泉 马" userId="19e30af8d5659de2" providerId="LiveId" clId="{C3594856-CEDA-5129-B2AF-7962E3CA4CA3}" dt="2026-03-18T19:28:40.004" v="1602" actId="26606"/>
-          <ac:spMkLst>
-            <pc:docMk/>
-            <pc:sldMk cId="3009339318" sldId="270"/>
-            <ac:spMk id="16" creationId="{063BBA22-50EA-4C4D-BE05-F1CE4E63AA56}"/>
           </ac:spMkLst>
         </pc:spChg>
         <pc:spChg chg="add">
@@ -1960,14 +1174,6 @@
             <ac:spMk id="2" creationId="{793227C8-30AE-AE14-CC4F-B01D4565D7EB}"/>
           </ac:spMkLst>
         </pc:spChg>
-        <pc:spChg chg="add del mod">
-          <ac:chgData name="耀泉 马" userId="19e30af8d5659de2" providerId="LiveId" clId="{C3594856-CEDA-5129-B2AF-7962E3CA4CA3}" dt="2026-03-18T21:06:34.538" v="2015" actId="478"/>
-          <ac:spMkLst>
-            <pc:docMk/>
-            <pc:sldMk cId="2133037477" sldId="271"/>
-            <ac:spMk id="3" creationId="{6B884530-A012-6BE3-EEEF-DCAC633F3E2E}"/>
-          </ac:spMkLst>
-        </pc:spChg>
         <pc:spChg chg="add mod">
           <ac:chgData name="耀泉 马" userId="19e30af8d5659de2" providerId="LiveId" clId="{C3594856-CEDA-5129-B2AF-7962E3CA4CA3}" dt="2026-03-18T22:04:01.402" v="2735" actId="1076"/>
           <ac:spMkLst>
@@ -1976,796 +1182,12 @@
             <ac:spMk id="5" creationId="{D32C7F81-0E01-BE85-B655-0A52F328F077}"/>
           </ac:spMkLst>
         </pc:spChg>
-        <pc:spChg chg="add del mod">
-          <ac:chgData name="耀泉 马" userId="19e30af8d5659de2" providerId="LiveId" clId="{C3594856-CEDA-5129-B2AF-7962E3CA4CA3}" dt="2026-03-18T20:45:52.064" v="1805" actId="478"/>
-          <ac:spMkLst>
-            <pc:docMk/>
-            <pc:sldMk cId="2133037477" sldId="271"/>
-            <ac:spMk id="6" creationId="{E16FC2BC-2FC0-680B-49E1-7A2F6646E7CC}"/>
-          </ac:spMkLst>
-        </pc:spChg>
-        <pc:spChg chg="add del mod">
-          <ac:chgData name="耀泉 马" userId="19e30af8d5659de2" providerId="LiveId" clId="{C3594856-CEDA-5129-B2AF-7962E3CA4CA3}" dt="2026-03-18T20:45:52.064" v="1805" actId="478"/>
-          <ac:spMkLst>
-            <pc:docMk/>
-            <pc:sldMk cId="2133037477" sldId="271"/>
-            <ac:spMk id="12" creationId="{913CC400-F6B1-04DC-C83B-2CC46855598C}"/>
-          </ac:spMkLst>
-        </pc:spChg>
-        <pc:spChg chg="add del mod">
-          <ac:chgData name="耀泉 马" userId="19e30af8d5659de2" providerId="LiveId" clId="{C3594856-CEDA-5129-B2AF-7962E3CA4CA3}" dt="2026-03-18T20:45:52.064" v="1805" actId="478"/>
-          <ac:spMkLst>
-            <pc:docMk/>
-            <pc:sldMk cId="2133037477" sldId="271"/>
-            <ac:spMk id="13" creationId="{D7259047-A11E-6F8C-AEAD-F3C266BB40F9}"/>
-          </ac:spMkLst>
-        </pc:spChg>
-        <pc:spChg chg="add del mod">
-          <ac:chgData name="耀泉 马" userId="19e30af8d5659de2" providerId="LiveId" clId="{C3594856-CEDA-5129-B2AF-7962E3CA4CA3}" dt="2026-03-18T20:45:52.064" v="1805" actId="478"/>
-          <ac:spMkLst>
-            <pc:docMk/>
-            <pc:sldMk cId="2133037477" sldId="271"/>
-            <ac:spMk id="14" creationId="{EF80E442-79C5-CA53-BAF5-1B15D1EE0111}"/>
-          </ac:spMkLst>
-        </pc:spChg>
         <pc:spChg chg="mod">
           <ac:chgData name="耀泉 马" userId="19e30af8d5659de2" providerId="LiveId" clId="{C3594856-CEDA-5129-B2AF-7962E3CA4CA3}" dt="2026-03-18T22:04:01.402" v="2735" actId="1076"/>
           <ac:spMkLst>
             <pc:docMk/>
             <pc:sldMk cId="2133037477" sldId="271"/>
             <ac:spMk id="18" creationId="{1A56E461-F94A-FDCA-AF97-907A28BF8144}"/>
-          </ac:spMkLst>
-        </pc:spChg>
-        <pc:spChg chg="del mod">
-          <ac:chgData name="耀泉 马" userId="19e30af8d5659de2" providerId="LiveId" clId="{C3594856-CEDA-5129-B2AF-7962E3CA4CA3}" dt="2026-03-18T21:05:41.019" v="1990" actId="478"/>
-          <ac:spMkLst>
-            <pc:docMk/>
-            <pc:sldMk cId="2133037477" sldId="271"/>
-            <ac:spMk id="22" creationId="{E8DF062A-4C4B-8FE2-9F5C-0B72F207CFA0}"/>
-          </ac:spMkLst>
-        </pc:spChg>
-        <pc:spChg chg="del mod">
-          <ac:chgData name="耀泉 马" userId="19e30af8d5659de2" providerId="LiveId" clId="{C3594856-CEDA-5129-B2AF-7962E3CA4CA3}" dt="2026-03-18T21:05:41.019" v="1990" actId="478"/>
-          <ac:spMkLst>
-            <pc:docMk/>
-            <pc:sldMk cId="2133037477" sldId="271"/>
-            <ac:spMk id="23" creationId="{FCB805A5-CC01-2A6D-C2EE-39E71A4F65E3}"/>
-          </ac:spMkLst>
-        </pc:spChg>
-        <pc:spChg chg="del mod">
-          <ac:chgData name="耀泉 马" userId="19e30af8d5659de2" providerId="LiveId" clId="{C3594856-CEDA-5129-B2AF-7962E3CA4CA3}" dt="2026-03-18T21:08:32.582" v="2129" actId="478"/>
-          <ac:spMkLst>
-            <pc:docMk/>
-            <pc:sldMk cId="2133037477" sldId="271"/>
-            <ac:spMk id="24" creationId="{81ACFC4C-7955-1DE7-8BA6-4ACC659984ED}"/>
-          </ac:spMkLst>
-        </pc:spChg>
-        <pc:spChg chg="del">
-          <ac:chgData name="耀泉 马" userId="19e30af8d5659de2" providerId="LiveId" clId="{C3594856-CEDA-5129-B2AF-7962E3CA4CA3}" dt="2026-03-18T20:39:13.086" v="1778" actId="478"/>
-          <ac:spMkLst>
-            <pc:docMk/>
-            <pc:sldMk cId="2133037477" sldId="271"/>
-            <ac:spMk id="25" creationId="{BAB411B6-85D9-5565-5F69-14E99020E530}"/>
-          </ac:spMkLst>
-        </pc:spChg>
-        <pc:spChg chg="add del mod">
-          <ac:chgData name="耀泉 马" userId="19e30af8d5659de2" providerId="LiveId" clId="{C3594856-CEDA-5129-B2AF-7962E3CA4CA3}" dt="2026-03-18T20:45:52.064" v="1805" actId="478"/>
-          <ac:spMkLst>
-            <pc:docMk/>
-            <pc:sldMk cId="2133037477" sldId="271"/>
-            <ac:spMk id="26" creationId="{9B2FDC48-64E6-E6B7-28CE-DA5FC68A72F3}"/>
-          </ac:spMkLst>
-        </pc:spChg>
-        <pc:spChg chg="add del mod">
-          <ac:chgData name="耀泉 马" userId="19e30af8d5659de2" providerId="LiveId" clId="{C3594856-CEDA-5129-B2AF-7962E3CA4CA3}" dt="2026-03-18T20:45:52.064" v="1805" actId="478"/>
-          <ac:spMkLst>
-            <pc:docMk/>
-            <pc:sldMk cId="2133037477" sldId="271"/>
-            <ac:spMk id="27" creationId="{F64BCDEC-0BF7-DA26-E538-19D9EDB849FE}"/>
-          </ac:spMkLst>
-        </pc:spChg>
-        <pc:spChg chg="add del mod">
-          <ac:chgData name="耀泉 马" userId="19e30af8d5659de2" providerId="LiveId" clId="{C3594856-CEDA-5129-B2AF-7962E3CA4CA3}" dt="2026-03-18T20:45:52.064" v="1805" actId="478"/>
-          <ac:spMkLst>
-            <pc:docMk/>
-            <pc:sldMk cId="2133037477" sldId="271"/>
-            <ac:spMk id="28" creationId="{A7B696C9-F01A-BF74-B263-68D4559FB7D7}"/>
-          </ac:spMkLst>
-        </pc:spChg>
-        <pc:spChg chg="mod topLvl">
-          <ac:chgData name="耀泉 马" userId="19e30af8d5659de2" providerId="LiveId" clId="{C3594856-CEDA-5129-B2AF-7962E3CA4CA3}" dt="2026-03-18T20:57:57.401" v="1934" actId="164"/>
-          <ac:spMkLst>
-            <pc:docMk/>
-            <pc:sldMk cId="2133037477" sldId="271"/>
-            <ac:spMk id="32" creationId="{A1C2C480-E5D0-8415-1451-6C1879851587}"/>
-          </ac:spMkLst>
-        </pc:spChg>
-        <pc:spChg chg="mod topLvl">
-          <ac:chgData name="耀泉 马" userId="19e30af8d5659de2" providerId="LiveId" clId="{C3594856-CEDA-5129-B2AF-7962E3CA4CA3}" dt="2026-03-18T20:57:57.401" v="1934" actId="164"/>
-          <ac:spMkLst>
-            <pc:docMk/>
-            <pc:sldMk cId="2133037477" sldId="271"/>
-            <ac:spMk id="33" creationId="{F74B64E4-8343-79E9-2D9F-AE83682E0CDE}"/>
-          </ac:spMkLst>
-        </pc:spChg>
-        <pc:spChg chg="mod topLvl">
-          <ac:chgData name="耀泉 马" userId="19e30af8d5659de2" providerId="LiveId" clId="{C3594856-CEDA-5129-B2AF-7962E3CA4CA3}" dt="2026-03-18T20:57:57.401" v="1934" actId="164"/>
-          <ac:spMkLst>
-            <pc:docMk/>
-            <pc:sldMk cId="2133037477" sldId="271"/>
-            <ac:spMk id="34" creationId="{3946E06C-A436-E5C7-A22E-3D3C4BED1BFF}"/>
-          </ac:spMkLst>
-        </pc:spChg>
-        <pc:spChg chg="mod topLvl">
-          <ac:chgData name="耀泉 马" userId="19e30af8d5659de2" providerId="LiveId" clId="{C3594856-CEDA-5129-B2AF-7962E3CA4CA3}" dt="2026-03-18T20:57:57.401" v="1934" actId="164"/>
-          <ac:spMkLst>
-            <pc:docMk/>
-            <pc:sldMk cId="2133037477" sldId="271"/>
-            <ac:spMk id="35" creationId="{064A6FAC-E855-7D80-98F4-80B91A651593}"/>
-          </ac:spMkLst>
-        </pc:spChg>
-        <pc:spChg chg="mod topLvl">
-          <ac:chgData name="耀泉 马" userId="19e30af8d5659de2" providerId="LiveId" clId="{C3594856-CEDA-5129-B2AF-7962E3CA4CA3}" dt="2026-03-18T20:57:57.401" v="1934" actId="164"/>
-          <ac:spMkLst>
-            <pc:docMk/>
-            <pc:sldMk cId="2133037477" sldId="271"/>
-            <ac:spMk id="36" creationId="{33E3837B-0BD1-59EB-F0B7-1A41CE53AD7E}"/>
-          </ac:spMkLst>
-        </pc:spChg>
-        <pc:spChg chg="mod topLvl">
-          <ac:chgData name="耀泉 马" userId="19e30af8d5659de2" providerId="LiveId" clId="{C3594856-CEDA-5129-B2AF-7962E3CA4CA3}" dt="2026-03-18T20:57:57.401" v="1934" actId="164"/>
-          <ac:spMkLst>
-            <pc:docMk/>
-            <pc:sldMk cId="2133037477" sldId="271"/>
-            <ac:spMk id="37" creationId="{68C81E0E-8BB6-7AB8-0096-EB9CC0F4F3B3}"/>
-          </ac:spMkLst>
-        </pc:spChg>
-        <pc:spChg chg="mod topLvl">
-          <ac:chgData name="耀泉 马" userId="19e30af8d5659de2" providerId="LiveId" clId="{C3594856-CEDA-5129-B2AF-7962E3CA4CA3}" dt="2026-03-18T20:57:57.401" v="1934" actId="164"/>
-          <ac:spMkLst>
-            <pc:docMk/>
-            <pc:sldMk cId="2133037477" sldId="271"/>
-            <ac:spMk id="38" creationId="{AA039481-E933-4E08-5060-CE6517A4F864}"/>
-          </ac:spMkLst>
-        </pc:spChg>
-        <pc:spChg chg="mod topLvl">
-          <ac:chgData name="耀泉 马" userId="19e30af8d5659de2" providerId="LiveId" clId="{C3594856-CEDA-5129-B2AF-7962E3CA4CA3}" dt="2026-03-18T20:57:57.401" v="1934" actId="164"/>
-          <ac:spMkLst>
-            <pc:docMk/>
-            <pc:sldMk cId="2133037477" sldId="271"/>
-            <ac:spMk id="39" creationId="{AD4A718F-25AD-B853-338B-6E8473693D13}"/>
-          </ac:spMkLst>
-        </pc:spChg>
-        <pc:spChg chg="mod topLvl">
-          <ac:chgData name="耀泉 马" userId="19e30af8d5659de2" providerId="LiveId" clId="{C3594856-CEDA-5129-B2AF-7962E3CA4CA3}" dt="2026-03-18T20:57:57.401" v="1934" actId="164"/>
-          <ac:spMkLst>
-            <pc:docMk/>
-            <pc:sldMk cId="2133037477" sldId="271"/>
-            <ac:spMk id="40" creationId="{57B2F463-2072-03BF-4549-72CD984650CC}"/>
-          </ac:spMkLst>
-        </pc:spChg>
-        <pc:spChg chg="mod">
-          <ac:chgData name="耀泉 马" userId="19e30af8d5659de2" providerId="LiveId" clId="{C3594856-CEDA-5129-B2AF-7962E3CA4CA3}" dt="2026-03-18T20:57:59.589" v="1935"/>
-          <ac:spMkLst>
-            <pc:docMk/>
-            <pc:sldMk cId="2133037477" sldId="271"/>
-            <ac:spMk id="61" creationId="{D487794A-2A26-D8F6-1FF6-E6AC161C62FF}"/>
-          </ac:spMkLst>
-        </pc:spChg>
-        <pc:spChg chg="mod">
-          <ac:chgData name="耀泉 马" userId="19e30af8d5659de2" providerId="LiveId" clId="{C3594856-CEDA-5129-B2AF-7962E3CA4CA3}" dt="2026-03-18T20:57:59.589" v="1935"/>
-          <ac:spMkLst>
-            <pc:docMk/>
-            <pc:sldMk cId="2133037477" sldId="271"/>
-            <ac:spMk id="62" creationId="{8FF53670-C96F-983B-AFA0-014464DDB92E}"/>
-          </ac:spMkLst>
-        </pc:spChg>
-        <pc:spChg chg="mod">
-          <ac:chgData name="耀泉 马" userId="19e30af8d5659de2" providerId="LiveId" clId="{C3594856-CEDA-5129-B2AF-7962E3CA4CA3}" dt="2026-03-18T20:57:59.589" v="1935"/>
-          <ac:spMkLst>
-            <pc:docMk/>
-            <pc:sldMk cId="2133037477" sldId="271"/>
-            <ac:spMk id="63" creationId="{C0EC9197-B3B0-76FE-571B-9EB1093E2FDA}"/>
-          </ac:spMkLst>
-        </pc:spChg>
-        <pc:spChg chg="mod">
-          <ac:chgData name="耀泉 马" userId="19e30af8d5659de2" providerId="LiveId" clId="{C3594856-CEDA-5129-B2AF-7962E3CA4CA3}" dt="2026-03-18T20:57:59.589" v="1935"/>
-          <ac:spMkLst>
-            <pc:docMk/>
-            <pc:sldMk cId="2133037477" sldId="271"/>
-            <ac:spMk id="64" creationId="{29157C25-F3ED-A96C-DFC2-70E7A8F1EECF}"/>
-          </ac:spMkLst>
-        </pc:spChg>
-        <pc:spChg chg="mod">
-          <ac:chgData name="耀泉 马" userId="19e30af8d5659de2" providerId="LiveId" clId="{C3594856-CEDA-5129-B2AF-7962E3CA4CA3}" dt="2026-03-18T20:57:59.589" v="1935"/>
-          <ac:spMkLst>
-            <pc:docMk/>
-            <pc:sldMk cId="2133037477" sldId="271"/>
-            <ac:spMk id="65" creationId="{489CB3B0-2A83-B824-53BF-40F9DBC0F95F}"/>
-          </ac:spMkLst>
-        </pc:spChg>
-        <pc:spChg chg="mod">
-          <ac:chgData name="耀泉 马" userId="19e30af8d5659de2" providerId="LiveId" clId="{C3594856-CEDA-5129-B2AF-7962E3CA4CA3}" dt="2026-03-18T20:57:59.589" v="1935"/>
-          <ac:spMkLst>
-            <pc:docMk/>
-            <pc:sldMk cId="2133037477" sldId="271"/>
-            <ac:spMk id="66" creationId="{AB8FEC23-34D2-C10E-2587-F47BF10588DF}"/>
-          </ac:spMkLst>
-        </pc:spChg>
-        <pc:spChg chg="mod">
-          <ac:chgData name="耀泉 马" userId="19e30af8d5659de2" providerId="LiveId" clId="{C3594856-CEDA-5129-B2AF-7962E3CA4CA3}" dt="2026-03-18T20:57:59.589" v="1935"/>
-          <ac:spMkLst>
-            <pc:docMk/>
-            <pc:sldMk cId="2133037477" sldId="271"/>
-            <ac:spMk id="67" creationId="{D1AB76C8-F0EA-E7D5-109E-61C3C50DAD39}"/>
-          </ac:spMkLst>
-        </pc:spChg>
-        <pc:spChg chg="mod">
-          <ac:chgData name="耀泉 马" userId="19e30af8d5659de2" providerId="LiveId" clId="{C3594856-CEDA-5129-B2AF-7962E3CA4CA3}" dt="2026-03-18T20:57:59.589" v="1935"/>
-          <ac:spMkLst>
-            <pc:docMk/>
-            <pc:sldMk cId="2133037477" sldId="271"/>
-            <ac:spMk id="68" creationId="{9517FA86-4166-1EEA-0C3D-38F4A21336BE}"/>
-          </ac:spMkLst>
-        </pc:spChg>
-        <pc:spChg chg="mod">
-          <ac:chgData name="耀泉 马" userId="19e30af8d5659de2" providerId="LiveId" clId="{C3594856-CEDA-5129-B2AF-7962E3CA4CA3}" dt="2026-03-18T20:57:59.589" v="1935"/>
-          <ac:spMkLst>
-            <pc:docMk/>
-            <pc:sldMk cId="2133037477" sldId="271"/>
-            <ac:spMk id="69" creationId="{FFA7E881-725B-16E7-DB30-4BA1D061661F}"/>
-          </ac:spMkLst>
-        </pc:spChg>
-        <pc:spChg chg="mod">
-          <ac:chgData name="耀泉 马" userId="19e30af8d5659de2" providerId="LiveId" clId="{C3594856-CEDA-5129-B2AF-7962E3CA4CA3}" dt="2026-03-18T20:58:03.714" v="1937"/>
-          <ac:spMkLst>
-            <pc:docMk/>
-            <pc:sldMk cId="2133037477" sldId="271"/>
-            <ac:spMk id="89" creationId="{C13FDFF1-2961-2B40-656E-719B089CB438}"/>
-          </ac:spMkLst>
-        </pc:spChg>
-        <pc:spChg chg="mod">
-          <ac:chgData name="耀泉 马" userId="19e30af8d5659de2" providerId="LiveId" clId="{C3594856-CEDA-5129-B2AF-7962E3CA4CA3}" dt="2026-03-18T20:58:03.714" v="1937"/>
-          <ac:spMkLst>
-            <pc:docMk/>
-            <pc:sldMk cId="2133037477" sldId="271"/>
-            <ac:spMk id="90" creationId="{6912EF85-4C29-2104-D2C3-679D31F8E83D}"/>
-          </ac:spMkLst>
-        </pc:spChg>
-        <pc:spChg chg="mod">
-          <ac:chgData name="耀泉 马" userId="19e30af8d5659de2" providerId="LiveId" clId="{C3594856-CEDA-5129-B2AF-7962E3CA4CA3}" dt="2026-03-18T20:58:03.714" v="1937"/>
-          <ac:spMkLst>
-            <pc:docMk/>
-            <pc:sldMk cId="2133037477" sldId="271"/>
-            <ac:spMk id="91" creationId="{F8DEC585-8FE7-4FD9-050F-A69481EDE5D2}"/>
-          </ac:spMkLst>
-        </pc:spChg>
-        <pc:spChg chg="mod">
-          <ac:chgData name="耀泉 马" userId="19e30af8d5659de2" providerId="LiveId" clId="{C3594856-CEDA-5129-B2AF-7962E3CA4CA3}" dt="2026-03-18T20:58:03.714" v="1937"/>
-          <ac:spMkLst>
-            <pc:docMk/>
-            <pc:sldMk cId="2133037477" sldId="271"/>
-            <ac:spMk id="92" creationId="{A22EB846-6CD4-3F4A-5CCF-3ACB43C37559}"/>
-          </ac:spMkLst>
-        </pc:spChg>
-        <pc:spChg chg="mod">
-          <ac:chgData name="耀泉 马" userId="19e30af8d5659de2" providerId="LiveId" clId="{C3594856-CEDA-5129-B2AF-7962E3CA4CA3}" dt="2026-03-18T20:58:03.714" v="1937"/>
-          <ac:spMkLst>
-            <pc:docMk/>
-            <pc:sldMk cId="2133037477" sldId="271"/>
-            <ac:spMk id="93" creationId="{EC1FFC9B-48F7-FA62-0CE4-9044576CF157}"/>
-          </ac:spMkLst>
-        </pc:spChg>
-        <pc:spChg chg="mod">
-          <ac:chgData name="耀泉 马" userId="19e30af8d5659de2" providerId="LiveId" clId="{C3594856-CEDA-5129-B2AF-7962E3CA4CA3}" dt="2026-03-18T20:58:03.714" v="1937"/>
-          <ac:spMkLst>
-            <pc:docMk/>
-            <pc:sldMk cId="2133037477" sldId="271"/>
-            <ac:spMk id="94" creationId="{FFC408DB-4DE1-E680-5511-98F17C7C3E94}"/>
-          </ac:spMkLst>
-        </pc:spChg>
-        <pc:spChg chg="mod">
-          <ac:chgData name="耀泉 马" userId="19e30af8d5659de2" providerId="LiveId" clId="{C3594856-CEDA-5129-B2AF-7962E3CA4CA3}" dt="2026-03-18T20:58:03.714" v="1937"/>
-          <ac:spMkLst>
-            <pc:docMk/>
-            <pc:sldMk cId="2133037477" sldId="271"/>
-            <ac:spMk id="95" creationId="{FEAC06AA-4903-CBD7-FA41-300D92FCAA9F}"/>
-          </ac:spMkLst>
-        </pc:spChg>
-        <pc:spChg chg="mod">
-          <ac:chgData name="耀泉 马" userId="19e30af8d5659de2" providerId="LiveId" clId="{C3594856-CEDA-5129-B2AF-7962E3CA4CA3}" dt="2026-03-18T20:58:03.714" v="1937"/>
-          <ac:spMkLst>
-            <pc:docMk/>
-            <pc:sldMk cId="2133037477" sldId="271"/>
-            <ac:spMk id="96" creationId="{CCD9C8F2-23D2-CB3A-21C8-F8BFA349F21E}"/>
-          </ac:spMkLst>
-        </pc:spChg>
-        <pc:spChg chg="mod">
-          <ac:chgData name="耀泉 马" userId="19e30af8d5659de2" providerId="LiveId" clId="{C3594856-CEDA-5129-B2AF-7962E3CA4CA3}" dt="2026-03-18T20:58:03.714" v="1937"/>
-          <ac:spMkLst>
-            <pc:docMk/>
-            <pc:sldMk cId="2133037477" sldId="271"/>
-            <ac:spMk id="97" creationId="{AB6B0899-FDA0-5F46-3A56-3556347C712E}"/>
-          </ac:spMkLst>
-        </pc:spChg>
-        <pc:spChg chg="mod">
-          <ac:chgData name="耀泉 马" userId="19e30af8d5659de2" providerId="LiveId" clId="{C3594856-CEDA-5129-B2AF-7962E3CA4CA3}" dt="2026-03-18T20:58:08.079" v="1939"/>
-          <ac:spMkLst>
-            <pc:docMk/>
-            <pc:sldMk cId="2133037477" sldId="271"/>
-            <ac:spMk id="117" creationId="{2CB15EDA-8BC7-EA32-C115-6532C23137DB}"/>
-          </ac:spMkLst>
-        </pc:spChg>
-        <pc:spChg chg="mod">
-          <ac:chgData name="耀泉 马" userId="19e30af8d5659de2" providerId="LiveId" clId="{C3594856-CEDA-5129-B2AF-7962E3CA4CA3}" dt="2026-03-18T20:58:08.079" v="1939"/>
-          <ac:spMkLst>
-            <pc:docMk/>
-            <pc:sldMk cId="2133037477" sldId="271"/>
-            <ac:spMk id="118" creationId="{A0DE4343-4B2B-5598-D6CD-EC77F6621C30}"/>
-          </ac:spMkLst>
-        </pc:spChg>
-        <pc:spChg chg="mod">
-          <ac:chgData name="耀泉 马" userId="19e30af8d5659de2" providerId="LiveId" clId="{C3594856-CEDA-5129-B2AF-7962E3CA4CA3}" dt="2026-03-18T20:58:08.079" v="1939"/>
-          <ac:spMkLst>
-            <pc:docMk/>
-            <pc:sldMk cId="2133037477" sldId="271"/>
-            <ac:spMk id="119" creationId="{59F6D39D-E4ED-EAC7-684F-1E729B516CA3}"/>
-          </ac:spMkLst>
-        </pc:spChg>
-        <pc:spChg chg="mod">
-          <ac:chgData name="耀泉 马" userId="19e30af8d5659de2" providerId="LiveId" clId="{C3594856-CEDA-5129-B2AF-7962E3CA4CA3}" dt="2026-03-18T20:58:08.079" v="1939"/>
-          <ac:spMkLst>
-            <pc:docMk/>
-            <pc:sldMk cId="2133037477" sldId="271"/>
-            <ac:spMk id="120" creationId="{26E57DB1-E71A-1295-116F-FCFD003A5766}"/>
-          </ac:spMkLst>
-        </pc:spChg>
-        <pc:spChg chg="mod">
-          <ac:chgData name="耀泉 马" userId="19e30af8d5659de2" providerId="LiveId" clId="{C3594856-CEDA-5129-B2AF-7962E3CA4CA3}" dt="2026-03-18T20:58:08.079" v="1939"/>
-          <ac:spMkLst>
-            <pc:docMk/>
-            <pc:sldMk cId="2133037477" sldId="271"/>
-            <ac:spMk id="121" creationId="{A7BB913B-4C43-7AA8-389E-CF54DE28BE8C}"/>
-          </ac:spMkLst>
-        </pc:spChg>
-        <pc:spChg chg="mod">
-          <ac:chgData name="耀泉 马" userId="19e30af8d5659de2" providerId="LiveId" clId="{C3594856-CEDA-5129-B2AF-7962E3CA4CA3}" dt="2026-03-18T20:58:08.079" v="1939"/>
-          <ac:spMkLst>
-            <pc:docMk/>
-            <pc:sldMk cId="2133037477" sldId="271"/>
-            <ac:spMk id="122" creationId="{FAB76BBF-6D07-8FB6-17A2-1B36B42B07CF}"/>
-          </ac:spMkLst>
-        </pc:spChg>
-        <pc:spChg chg="mod">
-          <ac:chgData name="耀泉 马" userId="19e30af8d5659de2" providerId="LiveId" clId="{C3594856-CEDA-5129-B2AF-7962E3CA4CA3}" dt="2026-03-18T20:58:08.079" v="1939"/>
-          <ac:spMkLst>
-            <pc:docMk/>
-            <pc:sldMk cId="2133037477" sldId="271"/>
-            <ac:spMk id="123" creationId="{AADCE95F-7721-8766-D9BB-26B9251E301E}"/>
-          </ac:spMkLst>
-        </pc:spChg>
-        <pc:spChg chg="mod">
-          <ac:chgData name="耀泉 马" userId="19e30af8d5659de2" providerId="LiveId" clId="{C3594856-CEDA-5129-B2AF-7962E3CA4CA3}" dt="2026-03-18T20:58:08.079" v="1939"/>
-          <ac:spMkLst>
-            <pc:docMk/>
-            <pc:sldMk cId="2133037477" sldId="271"/>
-            <ac:spMk id="124" creationId="{8F4C66CD-B133-63E8-B791-DAE86A41AF3E}"/>
-          </ac:spMkLst>
-        </pc:spChg>
-        <pc:spChg chg="mod">
-          <ac:chgData name="耀泉 马" userId="19e30af8d5659de2" providerId="LiveId" clId="{C3594856-CEDA-5129-B2AF-7962E3CA4CA3}" dt="2026-03-18T20:58:08.079" v="1939"/>
-          <ac:spMkLst>
-            <pc:docMk/>
-            <pc:sldMk cId="2133037477" sldId="271"/>
-            <ac:spMk id="125" creationId="{D60021DE-4488-FD0C-7B3B-38B9C4857793}"/>
-          </ac:spMkLst>
-        </pc:spChg>
-        <pc:spChg chg="mod topLvl">
-          <ac:chgData name="耀泉 马" userId="19e30af8d5659de2" providerId="LiveId" clId="{C3594856-CEDA-5129-B2AF-7962E3CA4CA3}" dt="2026-03-18T21:04:13.579" v="1972" actId="164"/>
-          <ac:spMkLst>
-            <pc:docMk/>
-            <pc:sldMk cId="2133037477" sldId="271"/>
-            <ac:spMk id="145" creationId="{2C424A41-B5A4-59E5-4211-67F18CA41E30}"/>
-          </ac:spMkLst>
-        </pc:spChg>
-        <pc:spChg chg="mod topLvl">
-          <ac:chgData name="耀泉 马" userId="19e30af8d5659de2" providerId="LiveId" clId="{C3594856-CEDA-5129-B2AF-7962E3CA4CA3}" dt="2026-03-18T21:04:13.579" v="1972" actId="164"/>
-          <ac:spMkLst>
-            <pc:docMk/>
-            <pc:sldMk cId="2133037477" sldId="271"/>
-            <ac:spMk id="146" creationId="{BB45AB6F-3E5D-60C2-CC56-F2A2D7F915BC}"/>
-          </ac:spMkLst>
-        </pc:spChg>
-        <pc:spChg chg="mod topLvl">
-          <ac:chgData name="耀泉 马" userId="19e30af8d5659de2" providerId="LiveId" clId="{C3594856-CEDA-5129-B2AF-7962E3CA4CA3}" dt="2026-03-18T21:04:13.579" v="1972" actId="164"/>
-          <ac:spMkLst>
-            <pc:docMk/>
-            <pc:sldMk cId="2133037477" sldId="271"/>
-            <ac:spMk id="147" creationId="{28E6CCEB-50D9-7A86-BD0E-2E0142B016A0}"/>
-          </ac:spMkLst>
-        </pc:spChg>
-        <pc:spChg chg="del mod topLvl">
-          <ac:chgData name="耀泉 马" userId="19e30af8d5659de2" providerId="LiveId" clId="{C3594856-CEDA-5129-B2AF-7962E3CA4CA3}" dt="2026-03-18T21:02:08.099" v="1947" actId="478"/>
-          <ac:spMkLst>
-            <pc:docMk/>
-            <pc:sldMk cId="2133037477" sldId="271"/>
-            <ac:spMk id="148" creationId="{8CE6CE0D-6B65-6591-3344-C843BCDA6E90}"/>
-          </ac:spMkLst>
-        </pc:spChg>
-        <pc:spChg chg="mod topLvl">
-          <ac:chgData name="耀泉 马" userId="19e30af8d5659de2" providerId="LiveId" clId="{C3594856-CEDA-5129-B2AF-7962E3CA4CA3}" dt="2026-03-18T21:02:03.778" v="1946" actId="165"/>
-          <ac:spMkLst>
-            <pc:docMk/>
-            <pc:sldMk cId="2133037477" sldId="271"/>
-            <ac:spMk id="149" creationId="{EC540658-2831-8CE8-55E5-E8FACA8D9750}"/>
-          </ac:spMkLst>
-        </pc:spChg>
-        <pc:spChg chg="del mod topLvl">
-          <ac:chgData name="耀泉 马" userId="19e30af8d5659de2" providerId="LiveId" clId="{C3594856-CEDA-5129-B2AF-7962E3CA4CA3}" dt="2026-03-18T21:02:08.099" v="1947" actId="478"/>
-          <ac:spMkLst>
-            <pc:docMk/>
-            <pc:sldMk cId="2133037477" sldId="271"/>
-            <ac:spMk id="150" creationId="{EBF9A8D0-189A-3317-449C-1903B488D9A4}"/>
-          </ac:spMkLst>
-        </pc:spChg>
-        <pc:spChg chg="del mod topLvl">
-          <ac:chgData name="耀泉 马" userId="19e30af8d5659de2" providerId="LiveId" clId="{C3594856-CEDA-5129-B2AF-7962E3CA4CA3}" dt="2026-03-18T21:02:08.099" v="1947" actId="478"/>
-          <ac:spMkLst>
-            <pc:docMk/>
-            <pc:sldMk cId="2133037477" sldId="271"/>
-            <ac:spMk id="151" creationId="{E7B855AC-B1BF-AB0C-0869-C20B2FA9E176}"/>
-          </ac:spMkLst>
-        </pc:spChg>
-        <pc:spChg chg="del mod topLvl">
-          <ac:chgData name="耀泉 马" userId="19e30af8d5659de2" providerId="LiveId" clId="{C3594856-CEDA-5129-B2AF-7962E3CA4CA3}" dt="2026-03-18T21:02:08.099" v="1947" actId="478"/>
-          <ac:spMkLst>
-            <pc:docMk/>
-            <pc:sldMk cId="2133037477" sldId="271"/>
-            <ac:spMk id="152" creationId="{96F6AAE1-DC7C-A432-C3EE-B4EFC2F6EAFF}"/>
-          </ac:spMkLst>
-        </pc:spChg>
-        <pc:spChg chg="del mod topLvl">
-          <ac:chgData name="耀泉 马" userId="19e30af8d5659de2" providerId="LiveId" clId="{C3594856-CEDA-5129-B2AF-7962E3CA4CA3}" dt="2026-03-18T21:02:08.099" v="1947" actId="478"/>
-          <ac:spMkLst>
-            <pc:docMk/>
-            <pc:sldMk cId="2133037477" sldId="271"/>
-            <ac:spMk id="153" creationId="{54B6D426-52A6-6E56-C501-DDEF95417DCD}"/>
-          </ac:spMkLst>
-        </pc:spChg>
-        <pc:spChg chg="add mod">
-          <ac:chgData name="耀泉 马" userId="19e30af8d5659de2" providerId="LiveId" clId="{C3594856-CEDA-5129-B2AF-7962E3CA4CA3}" dt="2026-03-18T21:04:13.579" v="1972" actId="164"/>
-          <ac:spMkLst>
-            <pc:docMk/>
-            <pc:sldMk cId="2133037477" sldId="271"/>
-            <ac:spMk id="171" creationId="{C17FEE24-0126-118E-3494-7797BBEA22AC}"/>
-          </ac:spMkLst>
-        </pc:spChg>
-        <pc:spChg chg="add mod">
-          <ac:chgData name="耀泉 马" userId="19e30af8d5659de2" providerId="LiveId" clId="{C3594856-CEDA-5129-B2AF-7962E3CA4CA3}" dt="2026-03-18T21:04:13.579" v="1972" actId="164"/>
-          <ac:spMkLst>
-            <pc:docMk/>
-            <pc:sldMk cId="2133037477" sldId="271"/>
-            <ac:spMk id="172" creationId="{48A5E1AA-6997-A8D2-6D0A-D1CF8722B672}"/>
-          </ac:spMkLst>
-        </pc:spChg>
-        <pc:spChg chg="add mod">
-          <ac:chgData name="耀泉 马" userId="19e30af8d5659de2" providerId="LiveId" clId="{C3594856-CEDA-5129-B2AF-7962E3CA4CA3}" dt="2026-03-18T21:04:13.579" v="1972" actId="164"/>
-          <ac:spMkLst>
-            <pc:docMk/>
-            <pc:sldMk cId="2133037477" sldId="271"/>
-            <ac:spMk id="173" creationId="{66775504-875D-A790-3E2C-933F3A2C90E7}"/>
-          </ac:spMkLst>
-        </pc:spChg>
-        <pc:spChg chg="add mod">
-          <ac:chgData name="耀泉 马" userId="19e30af8d5659de2" providerId="LiveId" clId="{C3594856-CEDA-5129-B2AF-7962E3CA4CA3}" dt="2026-03-18T21:04:13.579" v="1972" actId="164"/>
-          <ac:spMkLst>
-            <pc:docMk/>
-            <pc:sldMk cId="2133037477" sldId="271"/>
-            <ac:spMk id="174" creationId="{5CD50038-1B51-A8E4-8BC6-7945EAF13FC9}"/>
-          </ac:spMkLst>
-        </pc:spChg>
-        <pc:spChg chg="add mod">
-          <ac:chgData name="耀泉 马" userId="19e30af8d5659de2" providerId="LiveId" clId="{C3594856-CEDA-5129-B2AF-7962E3CA4CA3}" dt="2026-03-18T21:02:17.863" v="1951" actId="1076"/>
-          <ac:spMkLst>
-            <pc:docMk/>
-            <pc:sldMk cId="2133037477" sldId="271"/>
-            <ac:spMk id="175" creationId="{419A2BB6-AE19-2166-2D91-2CB126A4EA03}"/>
-          </ac:spMkLst>
-        </pc:spChg>
-        <pc:spChg chg="add mod">
-          <ac:chgData name="耀泉 马" userId="19e30af8d5659de2" providerId="LiveId" clId="{C3594856-CEDA-5129-B2AF-7962E3CA4CA3}" dt="2026-03-18T21:02:17.863" v="1951" actId="1076"/>
-          <ac:spMkLst>
-            <pc:docMk/>
-            <pc:sldMk cId="2133037477" sldId="271"/>
-            <ac:spMk id="176" creationId="{4C054DB8-5080-11DE-E95E-2FAF3CFE87C4}"/>
-          </ac:spMkLst>
-        </pc:spChg>
-        <pc:spChg chg="add mod">
-          <ac:chgData name="耀泉 马" userId="19e30af8d5659de2" providerId="LiveId" clId="{C3594856-CEDA-5129-B2AF-7962E3CA4CA3}" dt="2026-03-18T21:03:51.061" v="1970" actId="207"/>
-          <ac:spMkLst>
-            <pc:docMk/>
-            <pc:sldMk cId="2133037477" sldId="271"/>
-            <ac:spMk id="177" creationId="{03AACAE0-FEE4-515C-B5F5-D1BFB2EDBE8B}"/>
-          </ac:spMkLst>
-        </pc:spChg>
-        <pc:spChg chg="add mod">
-          <ac:chgData name="耀泉 马" userId="19e30af8d5659de2" providerId="LiveId" clId="{C3594856-CEDA-5129-B2AF-7962E3CA4CA3}" dt="2026-03-18T21:02:17.863" v="1951" actId="1076"/>
-          <ac:spMkLst>
-            <pc:docMk/>
-            <pc:sldMk cId="2133037477" sldId="271"/>
-            <ac:spMk id="178" creationId="{11BFE4C7-0CA6-79F7-7808-DEB3A345E6E8}"/>
-          </ac:spMkLst>
-        </pc:spChg>
-        <pc:spChg chg="add mod">
-          <ac:chgData name="耀泉 马" userId="19e30af8d5659de2" providerId="LiveId" clId="{C3594856-CEDA-5129-B2AF-7962E3CA4CA3}" dt="2026-03-18T21:04:13.579" v="1972" actId="164"/>
-          <ac:spMkLst>
-            <pc:docMk/>
-            <pc:sldMk cId="2133037477" sldId="271"/>
-            <ac:spMk id="179" creationId="{6606714C-9F8D-465F-1443-570B0E06E994}"/>
-          </ac:spMkLst>
-        </pc:spChg>
-        <pc:spChg chg="add mod">
-          <ac:chgData name="耀泉 马" userId="19e30af8d5659de2" providerId="LiveId" clId="{C3594856-CEDA-5129-B2AF-7962E3CA4CA3}" dt="2026-03-18T21:02:40.255" v="1957"/>
-          <ac:spMkLst>
-            <pc:docMk/>
-            <pc:sldMk cId="2133037477" sldId="271"/>
-            <ac:spMk id="180" creationId="{0935AD60-D931-F5C8-56CF-2FBCA82775E1}"/>
-          </ac:spMkLst>
-        </pc:spChg>
-        <pc:spChg chg="add mod">
-          <ac:chgData name="耀泉 马" userId="19e30af8d5659de2" providerId="LiveId" clId="{C3594856-CEDA-5129-B2AF-7962E3CA4CA3}" dt="2026-03-18T21:04:13.579" v="1972" actId="164"/>
-          <ac:spMkLst>
-            <pc:docMk/>
-            <pc:sldMk cId="2133037477" sldId="271"/>
-            <ac:spMk id="181" creationId="{023FA5AD-C913-ADE1-1389-CDF6C429B93E}"/>
-          </ac:spMkLst>
-        </pc:spChg>
-        <pc:spChg chg="add mod">
-          <ac:chgData name="耀泉 马" userId="19e30af8d5659de2" providerId="LiveId" clId="{C3594856-CEDA-5129-B2AF-7962E3CA4CA3}" dt="2026-03-18T21:04:13.579" v="1972" actId="164"/>
-          <ac:spMkLst>
-            <pc:docMk/>
-            <pc:sldMk cId="2133037477" sldId="271"/>
-            <ac:spMk id="182" creationId="{F9F51D2B-DDD3-CABD-F8EF-912A0D390520}"/>
-          </ac:spMkLst>
-        </pc:spChg>
-        <pc:spChg chg="mod">
-          <ac:chgData name="耀泉 马" userId="19e30af8d5659de2" providerId="LiveId" clId="{C3594856-CEDA-5129-B2AF-7962E3CA4CA3}" dt="2026-03-18T21:04:15.897" v="1973"/>
-          <ac:spMkLst>
-            <pc:docMk/>
-            <pc:sldMk cId="2133037477" sldId="271"/>
-            <ac:spMk id="185" creationId="{4B2B1846-2AAA-9FBE-3543-007FB3CABB7F}"/>
-          </ac:spMkLst>
-        </pc:spChg>
-        <pc:spChg chg="mod">
-          <ac:chgData name="耀泉 马" userId="19e30af8d5659de2" providerId="LiveId" clId="{C3594856-CEDA-5129-B2AF-7962E3CA4CA3}" dt="2026-03-18T21:04:15.897" v="1973"/>
-          <ac:spMkLst>
-            <pc:docMk/>
-            <pc:sldMk cId="2133037477" sldId="271"/>
-            <ac:spMk id="186" creationId="{67921742-581B-9920-5EBD-6C761F65C85E}"/>
-          </ac:spMkLst>
-        </pc:spChg>
-        <pc:spChg chg="mod">
-          <ac:chgData name="耀泉 马" userId="19e30af8d5659de2" providerId="LiveId" clId="{C3594856-CEDA-5129-B2AF-7962E3CA4CA3}" dt="2026-03-18T21:04:15.897" v="1973"/>
-          <ac:spMkLst>
-            <pc:docMk/>
-            <pc:sldMk cId="2133037477" sldId="271"/>
-            <ac:spMk id="187" creationId="{AC5A7725-D8BF-7BA5-FD79-BE87EC290E75}"/>
-          </ac:spMkLst>
-        </pc:spChg>
-        <pc:spChg chg="mod">
-          <ac:chgData name="耀泉 马" userId="19e30af8d5659de2" providerId="LiveId" clId="{C3594856-CEDA-5129-B2AF-7962E3CA4CA3}" dt="2026-03-18T21:04:15.897" v="1973"/>
-          <ac:spMkLst>
-            <pc:docMk/>
-            <pc:sldMk cId="2133037477" sldId="271"/>
-            <ac:spMk id="188" creationId="{50FC9733-554E-D95F-D21A-B7767304AADC}"/>
-          </ac:spMkLst>
-        </pc:spChg>
-        <pc:spChg chg="mod">
-          <ac:chgData name="耀泉 马" userId="19e30af8d5659de2" providerId="LiveId" clId="{C3594856-CEDA-5129-B2AF-7962E3CA4CA3}" dt="2026-03-18T21:04:15.897" v="1973"/>
-          <ac:spMkLst>
-            <pc:docMk/>
-            <pc:sldMk cId="2133037477" sldId="271"/>
-            <ac:spMk id="189" creationId="{481C477F-D7C2-D7C6-D7F7-19C23AE00574}"/>
-          </ac:spMkLst>
-        </pc:spChg>
-        <pc:spChg chg="mod">
-          <ac:chgData name="耀泉 马" userId="19e30af8d5659de2" providerId="LiveId" clId="{C3594856-CEDA-5129-B2AF-7962E3CA4CA3}" dt="2026-03-18T21:04:15.897" v="1973"/>
-          <ac:spMkLst>
-            <pc:docMk/>
-            <pc:sldMk cId="2133037477" sldId="271"/>
-            <ac:spMk id="190" creationId="{2A28E5D2-559B-E958-1949-D03A783AE926}"/>
-          </ac:spMkLst>
-        </pc:spChg>
-        <pc:spChg chg="mod">
-          <ac:chgData name="耀泉 马" userId="19e30af8d5659de2" providerId="LiveId" clId="{C3594856-CEDA-5129-B2AF-7962E3CA4CA3}" dt="2026-03-18T21:04:15.897" v="1973"/>
-          <ac:spMkLst>
-            <pc:docMk/>
-            <pc:sldMk cId="2133037477" sldId="271"/>
-            <ac:spMk id="191" creationId="{2D42C451-81FA-D887-F375-B0687E6E1F40}"/>
-          </ac:spMkLst>
-        </pc:spChg>
-        <pc:spChg chg="mod">
-          <ac:chgData name="耀泉 马" userId="19e30af8d5659de2" providerId="LiveId" clId="{C3594856-CEDA-5129-B2AF-7962E3CA4CA3}" dt="2026-03-18T21:04:15.897" v="1973"/>
-          <ac:spMkLst>
-            <pc:docMk/>
-            <pc:sldMk cId="2133037477" sldId="271"/>
-            <ac:spMk id="192" creationId="{AD069E79-2180-3B12-3F03-FE0BF0AF64E9}"/>
-          </ac:spMkLst>
-        </pc:spChg>
-        <pc:spChg chg="mod">
-          <ac:chgData name="耀泉 马" userId="19e30af8d5659de2" providerId="LiveId" clId="{C3594856-CEDA-5129-B2AF-7962E3CA4CA3}" dt="2026-03-18T21:04:15.897" v="1973"/>
-          <ac:spMkLst>
-            <pc:docMk/>
-            <pc:sldMk cId="2133037477" sldId="271"/>
-            <ac:spMk id="195" creationId="{2278E88D-ABB4-7A23-AD9D-B9102F413906}"/>
-          </ac:spMkLst>
-        </pc:spChg>
-        <pc:spChg chg="mod">
-          <ac:chgData name="耀泉 马" userId="19e30af8d5659de2" providerId="LiveId" clId="{C3594856-CEDA-5129-B2AF-7962E3CA4CA3}" dt="2026-03-18T21:04:15.897" v="1973"/>
-          <ac:spMkLst>
-            <pc:docMk/>
-            <pc:sldMk cId="2133037477" sldId="271"/>
-            <ac:spMk id="196" creationId="{39098910-9215-3DD4-290F-BC5FDC88EA95}"/>
-          </ac:spMkLst>
-        </pc:spChg>
-        <pc:spChg chg="mod">
-          <ac:chgData name="耀泉 马" userId="19e30af8d5659de2" providerId="LiveId" clId="{C3594856-CEDA-5129-B2AF-7962E3CA4CA3}" dt="2026-03-18T21:04:47.278" v="1979"/>
-          <ac:spMkLst>
-            <pc:docMk/>
-            <pc:sldMk cId="2133037477" sldId="271"/>
-            <ac:spMk id="201" creationId="{3FAC6992-CE20-7057-F593-97BD709FF86E}"/>
-          </ac:spMkLst>
-        </pc:spChg>
-        <pc:spChg chg="mod">
-          <ac:chgData name="耀泉 马" userId="19e30af8d5659de2" providerId="LiveId" clId="{C3594856-CEDA-5129-B2AF-7962E3CA4CA3}" dt="2026-03-18T21:04:47.278" v="1979"/>
-          <ac:spMkLst>
-            <pc:docMk/>
-            <pc:sldMk cId="2133037477" sldId="271"/>
-            <ac:spMk id="204" creationId="{797BB541-62A8-6883-FB08-F6A9A4B800E4}"/>
-          </ac:spMkLst>
-        </pc:spChg>
-        <pc:spChg chg="mod">
-          <ac:chgData name="耀泉 马" userId="19e30af8d5659de2" providerId="LiveId" clId="{C3594856-CEDA-5129-B2AF-7962E3CA4CA3}" dt="2026-03-18T21:04:47.278" v="1979"/>
-          <ac:spMkLst>
-            <pc:docMk/>
-            <pc:sldMk cId="2133037477" sldId="271"/>
-            <ac:spMk id="205" creationId="{39A6B8C9-0F62-FA3D-6EEC-80AD4D2F79D2}"/>
-          </ac:spMkLst>
-        </pc:spChg>
-        <pc:spChg chg="mod">
-          <ac:chgData name="耀泉 马" userId="19e30af8d5659de2" providerId="LiveId" clId="{C3594856-CEDA-5129-B2AF-7962E3CA4CA3}" dt="2026-03-18T21:04:47.278" v="1979"/>
-          <ac:spMkLst>
-            <pc:docMk/>
-            <pc:sldMk cId="2133037477" sldId="271"/>
-            <ac:spMk id="206" creationId="{6090B52C-4613-6B6B-2BED-110D85A17855}"/>
-          </ac:spMkLst>
-        </pc:spChg>
-        <pc:spChg chg="mod">
-          <ac:chgData name="耀泉 马" userId="19e30af8d5659de2" providerId="LiveId" clId="{C3594856-CEDA-5129-B2AF-7962E3CA4CA3}" dt="2026-03-18T21:04:47.278" v="1979"/>
-          <ac:spMkLst>
-            <pc:docMk/>
-            <pc:sldMk cId="2133037477" sldId="271"/>
-            <ac:spMk id="207" creationId="{8F8DEEE0-51C8-CF1C-FE24-456A4420FAD1}"/>
-          </ac:spMkLst>
-        </pc:spChg>
-        <pc:spChg chg="mod">
-          <ac:chgData name="耀泉 马" userId="19e30af8d5659de2" providerId="LiveId" clId="{C3594856-CEDA-5129-B2AF-7962E3CA4CA3}" dt="2026-03-18T21:04:47.278" v="1979"/>
-          <ac:spMkLst>
-            <pc:docMk/>
-            <pc:sldMk cId="2133037477" sldId="271"/>
-            <ac:spMk id="208" creationId="{FA5104AF-4732-3281-6290-91A9A55B7779}"/>
-          </ac:spMkLst>
-        </pc:spChg>
-        <pc:spChg chg="mod">
-          <ac:chgData name="耀泉 马" userId="19e30af8d5659de2" providerId="LiveId" clId="{C3594856-CEDA-5129-B2AF-7962E3CA4CA3}" dt="2026-03-18T21:04:47.278" v="1979"/>
-          <ac:spMkLst>
-            <pc:docMk/>
-            <pc:sldMk cId="2133037477" sldId="271"/>
-            <ac:spMk id="210" creationId="{87F2E74B-E235-9E20-FB12-176B8862ED5C}"/>
-          </ac:spMkLst>
-        </pc:spChg>
-        <pc:spChg chg="mod">
-          <ac:chgData name="耀泉 马" userId="19e30af8d5659de2" providerId="LiveId" clId="{C3594856-CEDA-5129-B2AF-7962E3CA4CA3}" dt="2026-03-18T21:04:47.278" v="1979"/>
-          <ac:spMkLst>
-            <pc:docMk/>
-            <pc:sldMk cId="2133037477" sldId="271"/>
-            <ac:spMk id="212" creationId="{9609132B-2233-AFD6-F531-11B3CC5DFDD2}"/>
-          </ac:spMkLst>
-        </pc:spChg>
-        <pc:spChg chg="mod">
-          <ac:chgData name="耀泉 马" userId="19e30af8d5659de2" providerId="LiveId" clId="{C3594856-CEDA-5129-B2AF-7962E3CA4CA3}" dt="2026-03-18T21:04:47.278" v="1979"/>
-          <ac:spMkLst>
-            <pc:docMk/>
-            <pc:sldMk cId="2133037477" sldId="271"/>
-            <ac:spMk id="213" creationId="{34AA9B1F-2C89-F6BA-E599-F926EA8596F3}"/>
-          </ac:spMkLst>
-        </pc:spChg>
-        <pc:spChg chg="mod">
-          <ac:chgData name="耀泉 马" userId="19e30af8d5659de2" providerId="LiveId" clId="{C3594856-CEDA-5129-B2AF-7962E3CA4CA3}" dt="2026-03-18T21:04:47.278" v="1979"/>
-          <ac:spMkLst>
-            <pc:docMk/>
-            <pc:sldMk cId="2133037477" sldId="271"/>
-            <ac:spMk id="214" creationId="{57AF4B3C-D9D9-51DE-E539-FE04136601F8}"/>
-          </ac:spMkLst>
-        </pc:spChg>
-        <pc:spChg chg="mod">
-          <ac:chgData name="耀泉 马" userId="19e30af8d5659de2" providerId="LiveId" clId="{C3594856-CEDA-5129-B2AF-7962E3CA4CA3}" dt="2026-03-18T21:04:51.624" v="1981"/>
-          <ac:spMkLst>
-            <pc:docMk/>
-            <pc:sldMk cId="2133037477" sldId="271"/>
-            <ac:spMk id="218" creationId="{27EF85E8-9C61-736D-649B-DE3FCF3516A4}"/>
-          </ac:spMkLst>
-        </pc:spChg>
-        <pc:spChg chg="mod">
-          <ac:chgData name="耀泉 马" userId="19e30af8d5659de2" providerId="LiveId" clId="{C3594856-CEDA-5129-B2AF-7962E3CA4CA3}" dt="2026-03-18T21:04:51.624" v="1981"/>
-          <ac:spMkLst>
-            <pc:docMk/>
-            <pc:sldMk cId="2133037477" sldId="271"/>
-            <ac:spMk id="219" creationId="{44F43233-5F04-6569-EE7E-B66BA3DDF59B}"/>
-          </ac:spMkLst>
-        </pc:spChg>
-        <pc:spChg chg="mod">
-          <ac:chgData name="耀泉 马" userId="19e30af8d5659de2" providerId="LiveId" clId="{C3594856-CEDA-5129-B2AF-7962E3CA4CA3}" dt="2026-03-18T21:04:51.624" v="1981"/>
-          <ac:spMkLst>
-            <pc:docMk/>
-            <pc:sldMk cId="2133037477" sldId="271"/>
-            <ac:spMk id="220" creationId="{AD21A837-29D2-6ACE-0828-5FDFC790D7D3}"/>
-          </ac:spMkLst>
-        </pc:spChg>
-        <pc:spChg chg="mod">
-          <ac:chgData name="耀泉 马" userId="19e30af8d5659de2" providerId="LiveId" clId="{C3594856-CEDA-5129-B2AF-7962E3CA4CA3}" dt="2026-03-18T21:04:51.624" v="1981"/>
-          <ac:spMkLst>
-            <pc:docMk/>
-            <pc:sldMk cId="2133037477" sldId="271"/>
-            <ac:spMk id="222" creationId="{D122C9F1-4F63-008C-F098-96DC7AAEFA0F}"/>
-          </ac:spMkLst>
-        </pc:spChg>
-        <pc:spChg chg="mod">
-          <ac:chgData name="耀泉 马" userId="19e30af8d5659de2" providerId="LiveId" clId="{C3594856-CEDA-5129-B2AF-7962E3CA4CA3}" dt="2026-03-18T21:04:51.624" v="1981"/>
-          <ac:spMkLst>
-            <pc:docMk/>
-            <pc:sldMk cId="2133037477" sldId="271"/>
-            <ac:spMk id="223" creationId="{F7485946-6E10-ED7C-8E83-0F8A416C7D65}"/>
-          </ac:spMkLst>
-        </pc:spChg>
-        <pc:spChg chg="mod">
-          <ac:chgData name="耀泉 马" userId="19e30af8d5659de2" providerId="LiveId" clId="{C3594856-CEDA-5129-B2AF-7962E3CA4CA3}" dt="2026-03-18T21:04:51.624" v="1981"/>
-          <ac:spMkLst>
-            <pc:docMk/>
-            <pc:sldMk cId="2133037477" sldId="271"/>
-            <ac:spMk id="225" creationId="{82F648F2-3217-9EA1-EA59-3DBF3FE4C9DB}"/>
-          </ac:spMkLst>
-        </pc:spChg>
-        <pc:spChg chg="mod">
-          <ac:chgData name="耀泉 马" userId="19e30af8d5659de2" providerId="LiveId" clId="{C3594856-CEDA-5129-B2AF-7962E3CA4CA3}" dt="2026-03-18T21:04:51.624" v="1981"/>
-          <ac:spMkLst>
-            <pc:docMk/>
-            <pc:sldMk cId="2133037477" sldId="271"/>
-            <ac:spMk id="228" creationId="{602D5BFC-FE16-6D7C-F347-4CE0A58F76A5}"/>
-          </ac:spMkLst>
-        </pc:spChg>
-        <pc:spChg chg="mod">
-          <ac:chgData name="耀泉 马" userId="19e30af8d5659de2" providerId="LiveId" clId="{C3594856-CEDA-5129-B2AF-7962E3CA4CA3}" dt="2026-03-18T21:04:51.624" v="1981"/>
-          <ac:spMkLst>
-            <pc:docMk/>
-            <pc:sldMk cId="2133037477" sldId="271"/>
-            <ac:spMk id="229" creationId="{8420FAD8-37D1-1724-CB0C-ECE58DEE1C50}"/>
-          </ac:spMkLst>
-        </pc:spChg>
-        <pc:spChg chg="mod">
-          <ac:chgData name="耀泉 马" userId="19e30af8d5659de2" providerId="LiveId" clId="{C3594856-CEDA-5129-B2AF-7962E3CA4CA3}" dt="2026-03-18T21:04:51.624" v="1981"/>
-          <ac:spMkLst>
-            <pc:docMk/>
-            <pc:sldMk cId="2133037477" sldId="271"/>
-            <ac:spMk id="230" creationId="{91F77C1F-CDB1-F481-02E4-F5AB31AB2A98}"/>
-          </ac:spMkLst>
-        </pc:spChg>
-        <pc:spChg chg="mod">
-          <ac:chgData name="耀泉 马" userId="19e30af8d5659de2" providerId="LiveId" clId="{C3594856-CEDA-5129-B2AF-7962E3CA4CA3}" dt="2026-03-18T21:04:51.624" v="1981"/>
-          <ac:spMkLst>
-            <pc:docMk/>
-            <pc:sldMk cId="2133037477" sldId="271"/>
-            <ac:spMk id="231" creationId="{315EB99B-9699-6BB3-C1CB-82585B1EE9C8}"/>
           </ac:spMkLst>
         </pc:spChg>
         <pc:spChg chg="mod">
@@ -2854,86 +1276,6 @@
             <pc:docMk/>
             <pc:sldMk cId="2133037477" sldId="271"/>
             <ac:spMk id="277" creationId="{8FDFB96E-B251-02EC-0EF2-0FFD9FFAAB69}"/>
-          </ac:spMkLst>
-        </pc:spChg>
-        <pc:spChg chg="add del mod">
-          <ac:chgData name="耀泉 马" userId="19e30af8d5659de2" providerId="LiveId" clId="{C3594856-CEDA-5129-B2AF-7962E3CA4CA3}" dt="2026-03-18T21:08:32.582" v="2129" actId="478"/>
-          <ac:spMkLst>
-            <pc:docMk/>
-            <pc:sldMk cId="2133037477" sldId="271"/>
-            <ac:spMk id="280" creationId="{2C3B6B8B-6F1E-9252-8794-261311A583E5}"/>
-          </ac:spMkLst>
-        </pc:spChg>
-        <pc:spChg chg="mod">
-          <ac:chgData name="耀泉 马" userId="19e30af8d5659de2" providerId="LiveId" clId="{C3594856-CEDA-5129-B2AF-7962E3CA4CA3}" dt="2026-03-18T21:06:37.427" v="2016"/>
-          <ac:spMkLst>
-            <pc:docMk/>
-            <pc:sldMk cId="2133037477" sldId="271"/>
-            <ac:spMk id="291" creationId="{F783B87B-DF4D-DE65-761C-9CB223F51FA6}"/>
-          </ac:spMkLst>
-        </pc:spChg>
-        <pc:spChg chg="mod">
-          <ac:chgData name="耀泉 马" userId="19e30af8d5659de2" providerId="LiveId" clId="{C3594856-CEDA-5129-B2AF-7962E3CA4CA3}" dt="2026-03-18T21:06:37.427" v="2016"/>
-          <ac:spMkLst>
-            <pc:docMk/>
-            <pc:sldMk cId="2133037477" sldId="271"/>
-            <ac:spMk id="292" creationId="{D348F702-7CEF-FC88-5EE6-EAF3A92BEC4F}"/>
-          </ac:spMkLst>
-        </pc:spChg>
-        <pc:spChg chg="mod">
-          <ac:chgData name="耀泉 马" userId="19e30af8d5659de2" providerId="LiveId" clId="{C3594856-CEDA-5129-B2AF-7962E3CA4CA3}" dt="2026-03-18T21:06:37.427" v="2016"/>
-          <ac:spMkLst>
-            <pc:docMk/>
-            <pc:sldMk cId="2133037477" sldId="271"/>
-            <ac:spMk id="293" creationId="{A66D1B02-6415-3D6F-DDDE-FDE0FBB796EE}"/>
-          </ac:spMkLst>
-        </pc:spChg>
-        <pc:spChg chg="mod">
-          <ac:chgData name="耀泉 马" userId="19e30af8d5659de2" providerId="LiveId" clId="{C3594856-CEDA-5129-B2AF-7962E3CA4CA3}" dt="2026-03-18T21:06:37.427" v="2016"/>
-          <ac:spMkLst>
-            <pc:docMk/>
-            <pc:sldMk cId="2133037477" sldId="271"/>
-            <ac:spMk id="294" creationId="{B40523D7-C3CD-D79C-2CD9-5AC907CD1616}"/>
-          </ac:spMkLst>
-        </pc:spChg>
-        <pc:spChg chg="mod">
-          <ac:chgData name="耀泉 马" userId="19e30af8d5659de2" providerId="LiveId" clId="{C3594856-CEDA-5129-B2AF-7962E3CA4CA3}" dt="2026-03-18T21:06:37.427" v="2016"/>
-          <ac:spMkLst>
-            <pc:docMk/>
-            <pc:sldMk cId="2133037477" sldId="271"/>
-            <ac:spMk id="314" creationId="{5948FEF2-AC8B-E0FE-E74C-03B5F3141A4B}"/>
-          </ac:spMkLst>
-        </pc:spChg>
-        <pc:spChg chg="mod">
-          <ac:chgData name="耀泉 马" userId="19e30af8d5659de2" providerId="LiveId" clId="{C3594856-CEDA-5129-B2AF-7962E3CA4CA3}" dt="2026-03-18T21:06:37.427" v="2016"/>
-          <ac:spMkLst>
-            <pc:docMk/>
-            <pc:sldMk cId="2133037477" sldId="271"/>
-            <ac:spMk id="319" creationId="{006E62A1-8583-812D-DFF7-C2B67DA92755}"/>
-          </ac:spMkLst>
-        </pc:spChg>
-        <pc:spChg chg="mod">
-          <ac:chgData name="耀泉 马" userId="19e30af8d5659de2" providerId="LiveId" clId="{C3594856-CEDA-5129-B2AF-7962E3CA4CA3}" dt="2026-03-18T21:06:37.427" v="2016"/>
-          <ac:spMkLst>
-            <pc:docMk/>
-            <pc:sldMk cId="2133037477" sldId="271"/>
-            <ac:spMk id="320" creationId="{4AB83B77-A6B7-FC45-DD48-5E6C24FB3DBD}"/>
-          </ac:spMkLst>
-        </pc:spChg>
-        <pc:spChg chg="mod">
-          <ac:chgData name="耀泉 马" userId="19e30af8d5659de2" providerId="LiveId" clId="{C3594856-CEDA-5129-B2AF-7962E3CA4CA3}" dt="2026-03-18T21:06:37.427" v="2016"/>
-          <ac:spMkLst>
-            <pc:docMk/>
-            <pc:sldMk cId="2133037477" sldId="271"/>
-            <ac:spMk id="323" creationId="{A693559D-D8DA-50B1-6956-593CF1F0B962}"/>
-          </ac:spMkLst>
-        </pc:spChg>
-        <pc:spChg chg="mod">
-          <ac:chgData name="耀泉 马" userId="19e30af8d5659de2" providerId="LiveId" clId="{C3594856-CEDA-5129-B2AF-7962E3CA4CA3}" dt="2026-03-18T21:06:37.427" v="2016"/>
-          <ac:spMkLst>
-            <pc:docMk/>
-            <pc:sldMk cId="2133037477" sldId="271"/>
-            <ac:spMk id="327" creationId="{9BA2E9DC-822E-D4B7-5AA8-BF0AAB1EC9C5}"/>
           </ac:spMkLst>
         </pc:spChg>
         <pc:spChg chg="add mod">
@@ -3288,14 +1630,6 @@
             <ac:spMk id="488" creationId="{662D9809-041F-1077-A55A-7B455C6BA6C8}"/>
           </ac:spMkLst>
         </pc:spChg>
-        <pc:spChg chg="add del mod">
-          <ac:chgData name="耀泉 马" userId="19e30af8d5659de2" providerId="LiveId" clId="{C3594856-CEDA-5129-B2AF-7962E3CA4CA3}" dt="2026-03-18T21:32:54.301" v="2306" actId="478"/>
-          <ac:spMkLst>
-            <pc:docMk/>
-            <pc:sldMk cId="2133037477" sldId="271"/>
-            <ac:spMk id="495" creationId="{ECAE5C2D-D8D8-81C5-D333-0DF22552E73C}"/>
-          </ac:spMkLst>
-        </pc:spChg>
         <pc:spChg chg="add mod">
           <ac:chgData name="耀泉 马" userId="19e30af8d5659de2" providerId="LiveId" clId="{C3594856-CEDA-5129-B2AF-7962E3CA4CA3}" dt="2026-03-18T22:00:54.158" v="2651" actId="164"/>
           <ac:spMkLst>
@@ -3424,86 +1758,6 @@
             <ac:spMk id="566" creationId="{C6AC29B0-9C07-2CDF-FA35-0A9DD19A9C1D}"/>
           </ac:spMkLst>
         </pc:spChg>
-        <pc:grpChg chg="add del mod">
-          <ac:chgData name="耀泉 马" userId="19e30af8d5659de2" providerId="LiveId" clId="{C3594856-CEDA-5129-B2AF-7962E3CA4CA3}" dt="2026-03-18T20:56:09.995" v="1928" actId="165"/>
-          <ac:grpSpMkLst>
-            <pc:docMk/>
-            <pc:sldMk cId="2133037477" sldId="271"/>
-            <ac:grpSpMk id="30" creationId="{FA1C6001-8AB7-7692-22CB-A6DD3624980C}"/>
-          </ac:grpSpMkLst>
-        </pc:grpChg>
-        <pc:grpChg chg="add del mod">
-          <ac:chgData name="耀泉 马" userId="19e30af8d5659de2" providerId="LiveId" clId="{C3594856-CEDA-5129-B2AF-7962E3CA4CA3}" dt="2026-03-18T21:05:41.019" v="1990" actId="478"/>
-          <ac:grpSpMkLst>
-            <pc:docMk/>
-            <pc:sldMk cId="2133037477" sldId="271"/>
-            <ac:grpSpMk id="58" creationId="{FC6B4B6E-3516-2FBC-6E6B-98B0D1E80025}"/>
-          </ac:grpSpMkLst>
-        </pc:grpChg>
-        <pc:grpChg chg="add del mod">
-          <ac:chgData name="耀泉 马" userId="19e30af8d5659de2" providerId="LiveId" clId="{C3594856-CEDA-5129-B2AF-7962E3CA4CA3}" dt="2026-03-18T21:05:41.019" v="1990" actId="478"/>
-          <ac:grpSpMkLst>
-            <pc:docMk/>
-            <pc:sldMk cId="2133037477" sldId="271"/>
-            <ac:grpSpMk id="59" creationId="{8D987A28-10DF-255C-33B8-1D538B06BA45}"/>
-          </ac:grpSpMkLst>
-        </pc:grpChg>
-        <pc:grpChg chg="add del mod">
-          <ac:chgData name="耀泉 马" userId="19e30af8d5659de2" providerId="LiveId" clId="{C3594856-CEDA-5129-B2AF-7962E3CA4CA3}" dt="2026-03-18T21:08:32.582" v="2129" actId="478"/>
-          <ac:grpSpMkLst>
-            <pc:docMk/>
-            <pc:sldMk cId="2133037477" sldId="271"/>
-            <ac:grpSpMk id="87" creationId="{475FFEB0-5E99-695A-1D25-ABE65F61C8E6}"/>
-          </ac:grpSpMkLst>
-        </pc:grpChg>
-        <pc:grpChg chg="add del mod">
-          <ac:chgData name="耀泉 马" userId="19e30af8d5659de2" providerId="LiveId" clId="{C3594856-CEDA-5129-B2AF-7962E3CA4CA3}" dt="2026-03-18T21:06:34.538" v="2015" actId="478"/>
-          <ac:grpSpMkLst>
-            <pc:docMk/>
-            <pc:sldMk cId="2133037477" sldId="271"/>
-            <ac:grpSpMk id="115" creationId="{1CB47332-AC4E-B292-DF04-EE3EE597556D}"/>
-          </ac:grpSpMkLst>
-        </pc:grpChg>
-        <pc:grpChg chg="add del mod">
-          <ac:chgData name="耀泉 马" userId="19e30af8d5659de2" providerId="LiveId" clId="{C3594856-CEDA-5129-B2AF-7962E3CA4CA3}" dt="2026-03-18T21:02:03.778" v="1946" actId="165"/>
-          <ac:grpSpMkLst>
-            <pc:docMk/>
-            <pc:sldMk cId="2133037477" sldId="271"/>
-            <ac:grpSpMk id="143" creationId="{E555D816-BD8A-6442-97AC-223A615FB774}"/>
-          </ac:grpSpMkLst>
-        </pc:grpChg>
-        <pc:grpChg chg="mod">
-          <ac:chgData name="耀泉 马" userId="19e30af8d5659de2" providerId="LiveId" clId="{C3594856-CEDA-5129-B2AF-7962E3CA4CA3}" dt="2026-03-18T21:04:45.824" v="1978" actId="1076"/>
-          <ac:grpSpMkLst>
-            <pc:docMk/>
-            <pc:sldMk cId="2133037477" sldId="271"/>
-            <ac:grpSpMk id="183" creationId="{11FD308C-9611-F303-E27E-BF5F27EAA662}"/>
-          </ac:grpSpMkLst>
-        </pc:grpChg>
-        <pc:grpChg chg="mod">
-          <ac:chgData name="耀泉 马" userId="19e30af8d5659de2" providerId="LiveId" clId="{C3594856-CEDA-5129-B2AF-7962E3CA4CA3}" dt="2026-03-18T21:04:25.420" v="1976" actId="1038"/>
-          <ac:grpSpMkLst>
-            <pc:docMk/>
-            <pc:sldMk cId="2133037477" sldId="271"/>
-            <ac:grpSpMk id="184" creationId="{F52E1A0F-17E4-F771-5E6E-3EE9E23A6E81}"/>
-          </ac:grpSpMkLst>
-        </pc:grpChg>
-        <pc:grpChg chg="mod">
-          <ac:chgData name="耀泉 马" userId="19e30af8d5659de2" providerId="LiveId" clId="{C3594856-CEDA-5129-B2AF-7962E3CA4CA3}" dt="2026-03-18T21:05:23.866" v="1984" actId="1076"/>
-          <ac:grpSpMkLst>
-            <pc:docMk/>
-            <pc:sldMk cId="2133037477" sldId="271"/>
-            <ac:grpSpMk id="200" creationId="{2815A369-6BBA-598C-D006-A92E2683E38C}"/>
-          </ac:grpSpMkLst>
-        </pc:grpChg>
-        <pc:grpChg chg="del mod">
-          <ac:chgData name="耀泉 马" userId="19e30af8d5659de2" providerId="LiveId" clId="{C3594856-CEDA-5129-B2AF-7962E3CA4CA3}" dt="2026-03-18T21:06:34.538" v="2015" actId="478"/>
-          <ac:grpSpMkLst>
-            <pc:docMk/>
-            <pc:sldMk cId="2133037477" sldId="271"/>
-            <ac:grpSpMk id="216" creationId="{EC2DFAD6-5B37-BA8D-21B5-C033165FE2FE}"/>
-          </ac:grpSpMkLst>
-        </pc:grpChg>
         <pc:grpChg chg="mod">
           <ac:chgData name="耀泉 马" userId="19e30af8d5659de2" providerId="LiveId" clId="{C3594856-CEDA-5129-B2AF-7962E3CA4CA3}" dt="2026-03-18T21:05:58.347" v="2008" actId="167"/>
           <ac:grpSpMkLst>
@@ -3518,22 +1772,6 @@
             <pc:docMk/>
             <pc:sldMk cId="2133037477" sldId="271"/>
             <ac:grpSpMk id="264" creationId="{A6818306-EA68-4DAC-E5D0-9E03CD29D4CE}"/>
-          </ac:grpSpMkLst>
-        </pc:grpChg>
-        <pc:grpChg chg="del mod">
-          <ac:chgData name="耀泉 马" userId="19e30af8d5659de2" providerId="LiveId" clId="{C3594856-CEDA-5129-B2AF-7962E3CA4CA3}" dt="2026-03-18T21:08:32.582" v="2129" actId="478"/>
-          <ac:grpSpMkLst>
-            <pc:docMk/>
-            <pc:sldMk cId="2133037477" sldId="271"/>
-            <ac:grpSpMk id="284" creationId="{0E3A7CC2-2CE0-FABB-9D01-2A8093E2337D}"/>
-          </ac:grpSpMkLst>
-        </pc:grpChg>
-        <pc:grpChg chg="mod">
-          <ac:chgData name="耀泉 马" userId="19e30af8d5659de2" providerId="LiveId" clId="{C3594856-CEDA-5129-B2AF-7962E3CA4CA3}" dt="2026-03-18T21:06:44.252" v="2018" actId="167"/>
-          <ac:grpSpMkLst>
-            <pc:docMk/>
-            <pc:sldMk cId="2133037477" sldId="271"/>
-            <ac:grpSpMk id="312" creationId="{EE7489B1-9346-DAEA-17EB-D07719B66C13}"/>
           </ac:grpSpMkLst>
         </pc:grpChg>
         <pc:grpChg chg="mod">
@@ -3624,124 +1862,12 @@
             <ac:grpSpMk id="555" creationId="{7D9A83F2-55D2-C718-E229-B788BD6DB0BD}"/>
           </ac:grpSpMkLst>
         </pc:grpChg>
-        <pc:picChg chg="del">
-          <ac:chgData name="耀泉 马" userId="19e30af8d5659de2" providerId="LiveId" clId="{C3594856-CEDA-5129-B2AF-7962E3CA4CA3}" dt="2026-03-18T21:05:41.019" v="1990" actId="478"/>
-          <ac:picMkLst>
-            <pc:docMk/>
-            <pc:sldMk cId="2133037477" sldId="271"/>
-            <ac:picMk id="4" creationId="{5D6E6DF8-208F-032C-2541-7691EE2B77FD}"/>
-          </ac:picMkLst>
-        </pc:picChg>
-        <pc:picChg chg="del">
-          <ac:chgData name="耀泉 马" userId="19e30af8d5659de2" providerId="LiveId" clId="{C3594856-CEDA-5129-B2AF-7962E3CA4CA3}" dt="2026-03-18T21:05:41.019" v="1990" actId="478"/>
-          <ac:picMkLst>
-            <pc:docMk/>
-            <pc:sldMk cId="2133037477" sldId="271"/>
-            <ac:picMk id="7" creationId="{32BBFCA8-086F-42E0-76F8-FDC8918CDE50}"/>
-          </ac:picMkLst>
-        </pc:picChg>
-        <pc:picChg chg="del">
-          <ac:chgData name="耀泉 马" userId="19e30af8d5659de2" providerId="LiveId" clId="{C3594856-CEDA-5129-B2AF-7962E3CA4CA3}" dt="2026-03-18T21:05:41.019" v="1990" actId="478"/>
-          <ac:picMkLst>
-            <pc:docMk/>
-            <pc:sldMk cId="2133037477" sldId="271"/>
-            <ac:picMk id="8" creationId="{1C1450F0-5C58-F90C-A02F-91C7278617A1}"/>
-          </ac:picMkLst>
-        </pc:picChg>
-        <pc:picChg chg="del">
-          <ac:chgData name="耀泉 马" userId="19e30af8d5659de2" providerId="LiveId" clId="{C3594856-CEDA-5129-B2AF-7962E3CA4CA3}" dt="2026-03-18T21:05:41.019" v="1990" actId="478"/>
-          <ac:picMkLst>
-            <pc:docMk/>
-            <pc:sldMk cId="2133037477" sldId="271"/>
-            <ac:picMk id="9" creationId="{5AEF9EC2-D9D9-CB93-7BCC-7436D0B63ED3}"/>
-          </ac:picMkLst>
-        </pc:picChg>
-        <pc:picChg chg="del">
-          <ac:chgData name="耀泉 马" userId="19e30af8d5659de2" providerId="LiveId" clId="{C3594856-CEDA-5129-B2AF-7962E3CA4CA3}" dt="2026-03-18T21:05:41.019" v="1990" actId="478"/>
-          <ac:picMkLst>
-            <pc:docMk/>
-            <pc:sldMk cId="2133037477" sldId="271"/>
-            <ac:picMk id="10" creationId="{13322392-C4DA-C15F-CD9A-AAE79AB5917B}"/>
-          </ac:picMkLst>
-        </pc:picChg>
-        <pc:picChg chg="del">
-          <ac:chgData name="耀泉 马" userId="19e30af8d5659de2" providerId="LiveId" clId="{C3594856-CEDA-5129-B2AF-7962E3CA4CA3}" dt="2026-03-18T21:05:41.019" v="1990" actId="478"/>
-          <ac:picMkLst>
-            <pc:docMk/>
-            <pc:sldMk cId="2133037477" sldId="271"/>
-            <ac:picMk id="11" creationId="{5411C6B4-3102-9470-DA97-19B206ED6288}"/>
-          </ac:picMkLst>
-        </pc:picChg>
-        <pc:picChg chg="del mod">
-          <ac:chgData name="耀泉 马" userId="19e30af8d5659de2" providerId="LiveId" clId="{C3594856-CEDA-5129-B2AF-7962E3CA4CA3}" dt="2026-03-18T21:08:32.582" v="2129" actId="478"/>
-          <ac:picMkLst>
-            <pc:docMk/>
-            <pc:sldMk cId="2133037477" sldId="271"/>
-            <ac:picMk id="15" creationId="{58FC0645-603A-3608-C520-28175AF3A333}"/>
-          </ac:picMkLst>
-        </pc:picChg>
-        <pc:picChg chg="del mod">
-          <ac:chgData name="耀泉 马" userId="19e30af8d5659de2" providerId="LiveId" clId="{C3594856-CEDA-5129-B2AF-7962E3CA4CA3}" dt="2026-03-18T21:08:32.582" v="2129" actId="478"/>
-          <ac:picMkLst>
-            <pc:docMk/>
-            <pc:sldMk cId="2133037477" sldId="271"/>
-            <ac:picMk id="16" creationId="{8E2080F0-456D-7151-89EA-F3EF93191728}"/>
-          </ac:picMkLst>
-        </pc:picChg>
-        <pc:picChg chg="del mod">
-          <ac:chgData name="耀泉 马" userId="19e30af8d5659de2" providerId="LiveId" clId="{C3594856-CEDA-5129-B2AF-7962E3CA4CA3}" dt="2026-03-18T21:08:32.582" v="2129" actId="478"/>
-          <ac:picMkLst>
-            <pc:docMk/>
-            <pc:sldMk cId="2133037477" sldId="271"/>
-            <ac:picMk id="17" creationId="{C9661C5E-7020-F1EF-9A06-A549D42563AD}"/>
-          </ac:picMkLst>
-        </pc:picChg>
-        <pc:picChg chg="del">
-          <ac:chgData name="耀泉 马" userId="19e30af8d5659de2" providerId="LiveId" clId="{C3594856-CEDA-5129-B2AF-7962E3CA4CA3}" dt="2026-03-18T21:06:34.538" v="2015" actId="478"/>
-          <ac:picMkLst>
-            <pc:docMk/>
-            <pc:sldMk cId="2133037477" sldId="271"/>
-            <ac:picMk id="19" creationId="{D7AE2EFD-8689-A838-797C-55C4C96300D1}"/>
-          </ac:picMkLst>
-        </pc:picChg>
-        <pc:picChg chg="del">
-          <ac:chgData name="耀泉 马" userId="19e30af8d5659de2" providerId="LiveId" clId="{C3594856-CEDA-5129-B2AF-7962E3CA4CA3}" dt="2026-03-18T21:06:34.538" v="2015" actId="478"/>
-          <ac:picMkLst>
-            <pc:docMk/>
-            <pc:sldMk cId="2133037477" sldId="271"/>
-            <ac:picMk id="20" creationId="{5D9C9A29-94ED-137D-2E0A-93DC5CDB6F69}"/>
-          </ac:picMkLst>
-        </pc:picChg>
-        <pc:picChg chg="del">
-          <ac:chgData name="耀泉 马" userId="19e30af8d5659de2" providerId="LiveId" clId="{C3594856-CEDA-5129-B2AF-7962E3CA4CA3}" dt="2026-03-18T21:06:34.538" v="2015" actId="478"/>
-          <ac:picMkLst>
-            <pc:docMk/>
-            <pc:sldMk cId="2133037477" sldId="271"/>
-            <ac:picMk id="21" creationId="{695C0822-307E-ECE4-5EAB-0D579E28F4BA}"/>
-          </ac:picMkLst>
-        </pc:picChg>
-        <pc:picChg chg="add mod">
-          <ac:chgData name="耀泉 马" userId="19e30af8d5659de2" providerId="LiveId" clId="{C3594856-CEDA-5129-B2AF-7962E3CA4CA3}" dt="2026-03-18T20:46:06.476" v="1808" actId="1076"/>
-          <ac:picMkLst>
-            <pc:docMk/>
-            <pc:sldMk cId="2133037477" sldId="271"/>
-            <ac:picMk id="29" creationId="{7700C1EE-419F-AD1A-A005-15D5C85A5949}"/>
-          </ac:picMkLst>
-        </pc:picChg>
         <pc:picChg chg="mod">
           <ac:chgData name="耀泉 马" userId="19e30af8d5659de2" providerId="LiveId" clId="{C3594856-CEDA-5129-B2AF-7962E3CA4CA3}" dt="2026-03-18T21:05:58.347" v="2008" actId="167"/>
           <ac:picMkLst>
             <pc:docMk/>
             <pc:sldMk cId="2133037477" sldId="271"/>
             <ac:picMk id="233" creationId="{2FA09888-AC3E-3B7C-F934-3E82CD51E038}"/>
-          </ac:picMkLst>
-        </pc:picChg>
-        <pc:picChg chg="del mod">
-          <ac:chgData name="耀泉 马" userId="19e30af8d5659de2" providerId="LiveId" clId="{C3594856-CEDA-5129-B2AF-7962E3CA4CA3}" dt="2026-03-18T22:08:23.450" v="2869" actId="478"/>
-          <ac:picMkLst>
-            <pc:docMk/>
-            <pc:sldMk cId="2133037477" sldId="271"/>
-            <ac:picMk id="234" creationId="{72FAF756-57F4-6369-1C09-CB46F4E9C3A3}"/>
           </ac:picMkLst>
         </pc:picChg>
         <pc:picChg chg="mod">
@@ -3752,44 +1878,12 @@
             <ac:picMk id="235" creationId="{4DF830D0-6E9C-A16E-0FB4-17D1D36CD718}"/>
           </ac:picMkLst>
         </pc:picChg>
-        <pc:picChg chg="del mod">
-          <ac:chgData name="耀泉 马" userId="19e30af8d5659de2" providerId="LiveId" clId="{C3594856-CEDA-5129-B2AF-7962E3CA4CA3}" dt="2026-03-18T21:08:32.582" v="2129" actId="478"/>
-          <ac:picMkLst>
-            <pc:docMk/>
-            <pc:sldMk cId="2133037477" sldId="271"/>
-            <ac:picMk id="281" creationId="{9B59A056-6781-7565-1959-0B0AD9713C23}"/>
-          </ac:picMkLst>
-        </pc:picChg>
-        <pc:picChg chg="del mod">
-          <ac:chgData name="耀泉 马" userId="19e30af8d5659de2" providerId="LiveId" clId="{C3594856-CEDA-5129-B2AF-7962E3CA4CA3}" dt="2026-03-18T21:08:32.582" v="2129" actId="478"/>
-          <ac:picMkLst>
-            <pc:docMk/>
-            <pc:sldMk cId="2133037477" sldId="271"/>
-            <ac:picMk id="282" creationId="{08ACF86F-6C4E-D9F7-50A9-B4C9074020A9}"/>
-          </ac:picMkLst>
-        </pc:picChg>
-        <pc:picChg chg="del mod">
-          <ac:chgData name="耀泉 马" userId="19e30af8d5659de2" providerId="LiveId" clId="{C3594856-CEDA-5129-B2AF-7962E3CA4CA3}" dt="2026-03-18T21:08:32.582" v="2129" actId="478"/>
-          <ac:picMkLst>
-            <pc:docMk/>
-            <pc:sldMk cId="2133037477" sldId="271"/>
-            <ac:picMk id="283" creationId="{60689186-9C7F-872F-039C-0DA698AD73D7}"/>
-          </ac:picMkLst>
-        </pc:picChg>
         <pc:picChg chg="mod">
           <ac:chgData name="耀泉 马" userId="19e30af8d5659de2" providerId="LiveId" clId="{C3594856-CEDA-5129-B2AF-7962E3CA4CA3}" dt="2026-03-18T21:08:57.097" v="2135" actId="167"/>
           <ac:picMkLst>
             <pc:docMk/>
             <pc:sldMk cId="2133037477" sldId="271"/>
             <ac:picMk id="331" creationId="{CDC0019F-6184-BD59-074C-F343B788D1D8}"/>
-          </ac:picMkLst>
-        </pc:picChg>
-        <pc:picChg chg="del mod">
-          <ac:chgData name="耀泉 马" userId="19e30af8d5659de2" providerId="LiveId" clId="{C3594856-CEDA-5129-B2AF-7962E3CA4CA3}" dt="2026-03-18T22:08:35.261" v="2877" actId="478"/>
-          <ac:picMkLst>
-            <pc:docMk/>
-            <pc:sldMk cId="2133037477" sldId="271"/>
-            <ac:picMk id="332" creationId="{6E4E4AD5-35A1-A1CE-F7AC-9D7DEAB02B53}"/>
           </ac:picMkLst>
         </pc:picChg>
         <pc:picChg chg="mod">
@@ -3808,14 +1902,6 @@
             <ac:picMk id="381" creationId="{B6EF110F-A988-61CB-E366-FC87738F0738}"/>
           </ac:picMkLst>
         </pc:picChg>
-        <pc:picChg chg="del mod">
-          <ac:chgData name="耀泉 马" userId="19e30af8d5659de2" providerId="LiveId" clId="{C3594856-CEDA-5129-B2AF-7962E3CA4CA3}" dt="2026-03-18T22:08:43.987" v="2882" actId="478"/>
-          <ac:picMkLst>
-            <pc:docMk/>
-            <pc:sldMk cId="2133037477" sldId="271"/>
-            <ac:picMk id="382" creationId="{D3C3FCFD-95C6-95DE-5F0A-A6C4F4889664}"/>
-          </ac:picMkLst>
-        </pc:picChg>
         <pc:picChg chg="mod">
           <ac:chgData name="耀泉 马" userId="19e30af8d5659de2" providerId="LiveId" clId="{C3594856-CEDA-5129-B2AF-7962E3CA4CA3}" dt="2026-03-18T21:09:09.283" v="2140" actId="167"/>
           <ac:picMkLst>
@@ -3832,44 +1918,12 @@
             <ac:picMk id="431" creationId="{00253C87-CF44-20E8-8EF7-A388A61A9A5B}"/>
           </ac:picMkLst>
         </pc:picChg>
-        <pc:picChg chg="del mod">
-          <ac:chgData name="耀泉 马" userId="19e30af8d5659de2" providerId="LiveId" clId="{C3594856-CEDA-5129-B2AF-7962E3CA4CA3}" dt="2026-03-18T22:08:55.116" v="2886" actId="478"/>
-          <ac:picMkLst>
-            <pc:docMk/>
-            <pc:sldMk cId="2133037477" sldId="271"/>
-            <ac:picMk id="432" creationId="{45B3CE1A-9FAF-49C6-1375-AA6C60FD28FE}"/>
-          </ac:picMkLst>
-        </pc:picChg>
         <pc:picChg chg="mod">
           <ac:chgData name="耀泉 马" userId="19e30af8d5659de2" providerId="LiveId" clId="{C3594856-CEDA-5129-B2AF-7962E3CA4CA3}" dt="2026-03-18T21:09:41.797" v="2149" actId="167"/>
           <ac:picMkLst>
             <pc:docMk/>
             <pc:sldMk cId="2133037477" sldId="271"/>
             <ac:picMk id="433" creationId="{13AB4931-BF98-02A2-2348-1997C88267B0}"/>
-          </ac:picMkLst>
-        </pc:picChg>
-        <pc:picChg chg="add del mod">
-          <ac:chgData name="耀泉 马" userId="19e30af8d5659de2" providerId="LiveId" clId="{C3594856-CEDA-5129-B2AF-7962E3CA4CA3}" dt="2026-03-18T21:19:38.981" v="2172" actId="478"/>
-          <ac:picMkLst>
-            <pc:docMk/>
-            <pc:sldMk cId="2133037477" sldId="271"/>
-            <ac:picMk id="481" creationId="{41A954BC-BF1A-5C8D-D8A4-7740E2D838BD}"/>
-          </ac:picMkLst>
-        </pc:picChg>
-        <pc:picChg chg="add del mod">
-          <ac:chgData name="耀泉 马" userId="19e30af8d5659de2" providerId="LiveId" clId="{C3594856-CEDA-5129-B2AF-7962E3CA4CA3}" dt="2026-03-18T21:20:12.841" v="2178" actId="478"/>
-          <ac:picMkLst>
-            <pc:docMk/>
-            <pc:sldMk cId="2133037477" sldId="271"/>
-            <ac:picMk id="482" creationId="{2A2206D2-6126-5282-545C-5AFC8EF1A7E0}"/>
-          </ac:picMkLst>
-        </pc:picChg>
-        <pc:picChg chg="add del mod">
-          <ac:chgData name="耀泉 马" userId="19e30af8d5659de2" providerId="LiveId" clId="{C3594856-CEDA-5129-B2AF-7962E3CA4CA3}" dt="2026-03-18T21:26:09.660" v="2273" actId="478"/>
-          <ac:picMkLst>
-            <pc:docMk/>
-            <pc:sldMk cId="2133037477" sldId="271"/>
-            <ac:picMk id="483" creationId="{992204A2-683C-7D1B-D70A-BC38D7D579F6}"/>
           </ac:picMkLst>
         </pc:picChg>
         <pc:picChg chg="add mod">
@@ -3912,38 +1966,6 @@
             <ac:picMk id="491" creationId="{F9B18140-8245-DCD7-384E-DB6DB50ADDB3}"/>
           </ac:picMkLst>
         </pc:picChg>
-        <pc:picChg chg="add del mod">
-          <ac:chgData name="耀泉 马" userId="19e30af8d5659de2" providerId="LiveId" clId="{C3594856-CEDA-5129-B2AF-7962E3CA4CA3}" dt="2026-03-18T21:29:00.224" v="2282" actId="478"/>
-          <ac:picMkLst>
-            <pc:docMk/>
-            <pc:sldMk cId="2133037477" sldId="271"/>
-            <ac:picMk id="492" creationId="{B960D875-2859-B488-FCE6-BABF6016FC54}"/>
-          </ac:picMkLst>
-        </pc:picChg>
-        <pc:picChg chg="add del">
-          <ac:chgData name="耀泉 马" userId="19e30af8d5659de2" providerId="LiveId" clId="{C3594856-CEDA-5129-B2AF-7962E3CA4CA3}" dt="2026-03-18T21:29:06.918" v="2284" actId="478"/>
-          <ac:picMkLst>
-            <pc:docMk/>
-            <pc:sldMk cId="2133037477" sldId="271"/>
-            <ac:picMk id="493" creationId="{400E07A7-5463-3311-9815-D8C2A5D5389A}"/>
-          </ac:picMkLst>
-        </pc:picChg>
-        <pc:picChg chg="add del mod">
-          <ac:chgData name="耀泉 马" userId="19e30af8d5659de2" providerId="LiveId" clId="{C3594856-CEDA-5129-B2AF-7962E3CA4CA3}" dt="2026-03-18T21:30:58.772" v="2292" actId="478"/>
-          <ac:picMkLst>
-            <pc:docMk/>
-            <pc:sldMk cId="2133037477" sldId="271"/>
-            <ac:picMk id="494" creationId="{1FA18706-4CAF-A8FD-F177-E0A183B84AC1}"/>
-          </ac:picMkLst>
-        </pc:picChg>
-        <pc:picChg chg="add del">
-          <ac:chgData name="耀泉 马" userId="19e30af8d5659de2" providerId="LiveId" clId="{C3594856-CEDA-5129-B2AF-7962E3CA4CA3}" dt="2026-03-18T21:33:15.486" v="2308" actId="478"/>
-          <ac:picMkLst>
-            <pc:docMk/>
-            <pc:sldMk cId="2133037477" sldId="271"/>
-            <ac:picMk id="496" creationId="{A3D41B14-E887-D7B4-394D-AAB736417D06}"/>
-          </ac:picMkLst>
-        </pc:picChg>
         <pc:picChg chg="add mod">
           <ac:chgData name="耀泉 马" userId="19e30af8d5659de2" providerId="LiveId" clId="{C3594856-CEDA-5129-B2AF-7962E3CA4CA3}" dt="2026-03-18T22:04:52.093" v="2748" actId="1076"/>
           <ac:picMkLst>
@@ -3966,14 +1988,6 @@
             <pc:docMk/>
             <pc:sldMk cId="2133037477" sldId="271"/>
             <ac:picMk id="499" creationId="{AED2AA6F-8413-6F77-F0DA-9FF1B127549E}"/>
-          </ac:picMkLst>
-        </pc:picChg>
-        <pc:picChg chg="add del mod">
-          <ac:chgData name="耀泉 马" userId="19e30af8d5659de2" providerId="LiveId" clId="{C3594856-CEDA-5129-B2AF-7962E3CA4CA3}" dt="2026-03-18T21:37:47.717" v="2335" actId="478"/>
-          <ac:picMkLst>
-            <pc:docMk/>
-            <pc:sldMk cId="2133037477" sldId="271"/>
-            <ac:picMk id="500" creationId="{E558A0F9-48FA-6F7F-2144-ED403DDD460C}"/>
           </ac:picMkLst>
         </pc:picChg>
         <pc:picChg chg="add mod">
@@ -4000,30 +2014,6 @@
             <ac:picMk id="505" creationId="{5BB980D7-B2D4-3DF9-C615-F9D33C7B45B2}"/>
           </ac:picMkLst>
         </pc:picChg>
-        <pc:picChg chg="add del mod">
-          <ac:chgData name="耀泉 马" userId="19e30af8d5659de2" providerId="LiveId" clId="{C3594856-CEDA-5129-B2AF-7962E3CA4CA3}" dt="2026-03-18T21:56:32.600" v="2625" actId="21"/>
-          <ac:picMkLst>
-            <pc:docMk/>
-            <pc:sldMk cId="2133037477" sldId="271"/>
-            <ac:picMk id="542" creationId="{86AD839F-1684-CFBE-4EB7-D614675474A6}"/>
-          </ac:picMkLst>
-        </pc:picChg>
-        <pc:picChg chg="add del mod">
-          <ac:chgData name="耀泉 马" userId="19e30af8d5659de2" providerId="LiveId" clId="{C3594856-CEDA-5129-B2AF-7962E3CA4CA3}" dt="2026-03-18T21:57:37.272" v="2628" actId="478"/>
-          <ac:picMkLst>
-            <pc:docMk/>
-            <pc:sldMk cId="2133037477" sldId="271"/>
-            <ac:picMk id="543" creationId="{DE7E0077-4957-F0FB-8046-0DBCDAF4C4EC}"/>
-          </ac:picMkLst>
-        </pc:picChg>
-        <pc:picChg chg="add del mod">
-          <ac:chgData name="耀泉 马" userId="19e30af8d5659de2" providerId="LiveId" clId="{C3594856-CEDA-5129-B2AF-7962E3CA4CA3}" dt="2026-03-18T21:58:31.696" v="2631" actId="478"/>
-          <ac:picMkLst>
-            <pc:docMk/>
-            <pc:sldMk cId="2133037477" sldId="271"/>
-            <ac:picMk id="544" creationId="{594733CF-9D7B-1055-81D8-F92121AA52B3}"/>
-          </ac:picMkLst>
-        </pc:picChg>
         <pc:picChg chg="add mod">
           <ac:chgData name="耀泉 马" userId="19e30af8d5659de2" providerId="LiveId" clId="{C3594856-CEDA-5129-B2AF-7962E3CA4CA3}" dt="2026-03-18T22:06:23.310" v="2825" actId="1076"/>
           <ac:picMkLst>
@@ -4038,14 +2028,6 @@
             <pc:docMk/>
             <pc:sldMk cId="2133037477" sldId="271"/>
             <ac:picMk id="567" creationId="{EF1830C7-89C7-C849-A04A-C3E794550CE9}"/>
-          </ac:picMkLst>
-        </pc:picChg>
-        <pc:picChg chg="add del">
-          <ac:chgData name="耀泉 马" userId="19e30af8d5659de2" providerId="LiveId" clId="{C3594856-CEDA-5129-B2AF-7962E3CA4CA3}" dt="2026-03-18T22:08:37.081" v="2879" actId="478"/>
-          <ac:picMkLst>
-            <pc:docMk/>
-            <pc:sldMk cId="2133037477" sldId="271"/>
-            <ac:picMk id="568" creationId="{7A2B32EB-0FD3-F66A-BEA8-D625CB8FC46E}"/>
           </ac:picMkLst>
         </pc:picChg>
         <pc:picChg chg="add mod">
@@ -4072,78 +2054,6 @@
             <ac:picMk id="571" creationId="{7D461BD1-BEE4-31AC-A99D-54070E13DA17}"/>
           </ac:picMkLst>
         </pc:picChg>
-        <pc:cxnChg chg="mod">
-          <ac:chgData name="耀泉 马" userId="19e30af8d5659de2" providerId="LiveId" clId="{C3594856-CEDA-5129-B2AF-7962E3CA4CA3}" dt="2026-03-18T21:06:34.538" v="2015" actId="478"/>
-          <ac:cxnSpMkLst>
-            <pc:docMk/>
-            <pc:sldMk cId="2133037477" sldId="271"/>
-            <ac:cxnSpMk id="129" creationId="{06BAE1F3-2689-8035-EF78-18992F05725C}"/>
-          </ac:cxnSpMkLst>
-        </pc:cxnChg>
-        <pc:cxnChg chg="mod">
-          <ac:chgData name="耀泉 马" userId="19e30af8d5659de2" providerId="LiveId" clId="{C3594856-CEDA-5129-B2AF-7962E3CA4CA3}" dt="2026-03-18T21:06:34.538" v="2015" actId="478"/>
-          <ac:cxnSpMkLst>
-            <pc:docMk/>
-            <pc:sldMk cId="2133037477" sldId="271"/>
-            <ac:cxnSpMk id="135" creationId="{64B84686-6CDC-C6A2-7A9B-4527ED94DEA7}"/>
-          </ac:cxnSpMkLst>
-        </pc:cxnChg>
-        <pc:cxnChg chg="mod">
-          <ac:chgData name="耀泉 马" userId="19e30af8d5659de2" providerId="LiveId" clId="{C3594856-CEDA-5129-B2AF-7962E3CA4CA3}" dt="2026-03-18T21:06:34.538" v="2015" actId="478"/>
-          <ac:cxnSpMkLst>
-            <pc:docMk/>
-            <pc:sldMk cId="2133037477" sldId="271"/>
-            <ac:cxnSpMk id="136" creationId="{901CC0D4-B654-83CE-0D5A-B9A87690A9BB}"/>
-          </ac:cxnSpMkLst>
-        </pc:cxnChg>
-        <pc:cxnChg chg="mod">
-          <ac:chgData name="耀泉 马" userId="19e30af8d5659de2" providerId="LiveId" clId="{C3594856-CEDA-5129-B2AF-7962E3CA4CA3}" dt="2026-03-18T21:06:34.538" v="2015" actId="478"/>
-          <ac:cxnSpMkLst>
-            <pc:docMk/>
-            <pc:sldMk cId="2133037477" sldId="271"/>
-            <ac:cxnSpMk id="140" creationId="{EAE1B8E9-D7E1-C95B-A03D-3F09192B915A}"/>
-          </ac:cxnSpMkLst>
-        </pc:cxnChg>
-        <pc:cxnChg chg="del mod">
-          <ac:chgData name="耀泉 马" userId="19e30af8d5659de2" providerId="LiveId" clId="{C3594856-CEDA-5129-B2AF-7962E3CA4CA3}" dt="2026-03-18T21:02:08.099" v="1947" actId="478"/>
-          <ac:cxnSpMkLst>
-            <pc:docMk/>
-            <pc:sldMk cId="2133037477" sldId="271"/>
-            <ac:cxnSpMk id="155" creationId="{AEE00D2C-C35A-0D6F-A9A2-3F11FE62D02B}"/>
-          </ac:cxnSpMkLst>
-        </pc:cxnChg>
-        <pc:cxnChg chg="del mod">
-          <ac:chgData name="耀泉 马" userId="19e30af8d5659de2" providerId="LiveId" clId="{C3594856-CEDA-5129-B2AF-7962E3CA4CA3}" dt="2026-03-18T21:02:08.099" v="1947" actId="478"/>
-          <ac:cxnSpMkLst>
-            <pc:docMk/>
-            <pc:sldMk cId="2133037477" sldId="271"/>
-            <ac:cxnSpMk id="156" creationId="{26373078-96FE-2A9E-9C43-4561FA1616B6}"/>
-          </ac:cxnSpMkLst>
-        </pc:cxnChg>
-        <pc:cxnChg chg="del mod">
-          <ac:chgData name="耀泉 马" userId="19e30af8d5659de2" providerId="LiveId" clId="{C3594856-CEDA-5129-B2AF-7962E3CA4CA3}" dt="2026-03-18T21:02:08.099" v="1947" actId="478"/>
-          <ac:cxnSpMkLst>
-            <pc:docMk/>
-            <pc:sldMk cId="2133037477" sldId="271"/>
-            <ac:cxnSpMk id="159" creationId="{701BABBD-AC88-DB76-FF64-E803F85D6B14}"/>
-          </ac:cxnSpMkLst>
-        </pc:cxnChg>
-        <pc:cxnChg chg="del mod">
-          <ac:chgData name="耀泉 马" userId="19e30af8d5659de2" providerId="LiveId" clId="{C3594856-CEDA-5129-B2AF-7962E3CA4CA3}" dt="2026-03-18T21:02:08.099" v="1947" actId="478"/>
-          <ac:cxnSpMkLst>
-            <pc:docMk/>
-            <pc:sldMk cId="2133037477" sldId="271"/>
-            <ac:cxnSpMk id="162" creationId="{C45F1F00-9016-7B6E-39E7-E176CBC9B5E8}"/>
-          </ac:cxnSpMkLst>
-        </pc:cxnChg>
-        <pc:cxnChg chg="del mod">
-          <ac:chgData name="耀泉 马" userId="19e30af8d5659de2" providerId="LiveId" clId="{C3594856-CEDA-5129-B2AF-7962E3CA4CA3}" dt="2026-03-18T21:02:08.099" v="1947" actId="478"/>
-          <ac:cxnSpMkLst>
-            <pc:docMk/>
-            <pc:sldMk cId="2133037477" sldId="271"/>
-            <ac:cxnSpMk id="167" creationId="{5E382425-A8BD-4942-C425-974DB65A15B6}"/>
-          </ac:cxnSpMkLst>
-        </pc:cxnChg>
         <pc:cxnChg chg="add mod">
           <ac:chgData name="耀泉 马" userId="19e30af8d5659de2" providerId="LiveId" clId="{C3594856-CEDA-5129-B2AF-7962E3CA4CA3}" dt="2026-03-18T22:04:10.327" v="2737" actId="14100"/>
           <ac:cxnSpMkLst>
@@ -4208,12 +2118,59 @@
             <ac:cxnSpMk id="532" creationId="{2CC5E84D-832D-95D9-FEF4-FB0F2ABCC6F4}"/>
           </ac:cxnSpMkLst>
         </pc:cxnChg>
-        <pc:cxnChg chg="add del mod">
-          <ac:chgData name="耀泉 马" userId="19e30af8d5659de2" providerId="LiveId" clId="{C3594856-CEDA-5129-B2AF-7962E3CA4CA3}" dt="2026-03-18T21:59:54.589" v="2645" actId="478"/>
+      </pc:sldChg>
+      <pc:sldChg chg="addSp delSp modSp add mod">
+        <pc:chgData name="耀泉 马" userId="19e30af8d5659de2" providerId="LiveId" clId="{C3594856-CEDA-5129-B2AF-7962E3CA4CA3}" dt="2026-03-21T18:35:33.059" v="3525" actId="1037"/>
+        <pc:sldMkLst>
+          <pc:docMk/>
+          <pc:sldMk cId="684900568" sldId="272"/>
+        </pc:sldMkLst>
+        <pc:spChg chg="del mod">
+          <ac:chgData name="耀泉 马" userId="19e30af8d5659de2" providerId="LiveId" clId="{C3594856-CEDA-5129-B2AF-7962E3CA4CA3}" dt="2026-03-21T16:11:51.929" v="3055" actId="478"/>
+          <ac:spMkLst>
+            <pc:docMk/>
+            <pc:sldMk cId="684900568" sldId="272"/>
+            <ac:spMk id="3" creationId="{9F7D9FD7-6584-8BC7-9633-FB4F14DE9D60}"/>
+          </ac:spMkLst>
+        </pc:spChg>
+        <pc:spChg chg="add mod">
+          <ac:chgData name="耀泉 马" userId="19e30af8d5659de2" providerId="LiveId" clId="{C3594856-CEDA-5129-B2AF-7962E3CA4CA3}" dt="2026-03-21T18:35:33.059" v="3525" actId="1037"/>
+          <ac:spMkLst>
+            <pc:docMk/>
+            <pc:sldMk cId="684900568" sldId="272"/>
+            <ac:spMk id="4" creationId="{4A46B1AD-DCA5-D506-A98C-72B83CB0B721}"/>
+          </ac:spMkLst>
+        </pc:spChg>
+        <pc:spChg chg="del mod">
+          <ac:chgData name="耀泉 马" userId="19e30af8d5659de2" providerId="LiveId" clId="{C3594856-CEDA-5129-B2AF-7962E3CA4CA3}" dt="2026-03-21T16:11:54.251" v="3057"/>
+          <ac:spMkLst>
+            <pc:docMk/>
+            <pc:sldMk cId="684900568" sldId="272"/>
+            <ac:spMk id="6" creationId="{97739623-186C-FA06-00A2-18FADFCD9D94}"/>
+          </ac:spMkLst>
+        </pc:spChg>
+        <pc:spChg chg="mod">
+          <ac:chgData name="耀泉 马" userId="19e30af8d5659de2" providerId="LiveId" clId="{C3594856-CEDA-5129-B2AF-7962E3CA4CA3}" dt="2026-03-21T18:35:30.386" v="3518" actId="1035"/>
+          <ac:spMkLst>
+            <pc:docMk/>
+            <pc:sldMk cId="684900568" sldId="272"/>
+            <ac:spMk id="7" creationId="{6C7FE30B-EC05-CC7E-DB7D-275D31A6649B}"/>
+          </ac:spMkLst>
+        </pc:spChg>
+        <pc:picChg chg="del">
+          <ac:chgData name="耀泉 马" userId="19e30af8d5659de2" providerId="LiveId" clId="{C3594856-CEDA-5129-B2AF-7962E3CA4CA3}" dt="2026-03-21T16:11:49.689" v="3054" actId="478"/>
+          <ac:picMkLst>
+            <pc:docMk/>
+            <pc:sldMk cId="684900568" sldId="272"/>
+            <ac:picMk id="5" creationId="{0B121C87-D645-CE82-0C28-A1648B1580C8}"/>
+          </ac:picMkLst>
+        </pc:picChg>
+        <pc:cxnChg chg="add mod">
+          <ac:chgData name="耀泉 马" userId="19e30af8d5659de2" providerId="LiveId" clId="{C3594856-CEDA-5129-B2AF-7962E3CA4CA3}" dt="2026-03-21T18:35:25.086" v="3509" actId="1035"/>
           <ac:cxnSpMkLst>
             <pc:docMk/>
-            <pc:sldMk cId="2133037477" sldId="271"/>
-            <ac:cxnSpMk id="548" creationId="{BE695A2C-1834-A24A-5E8E-2C4A096E99E7}"/>
+            <pc:sldMk cId="684900568" sldId="272"/>
+            <ac:cxnSpMk id="9" creationId="{107EBE3E-0E8D-DE9E-00AF-95D6517658CC}"/>
           </ac:cxnSpMkLst>
         </pc:cxnChg>
       </pc:sldChg>
@@ -6751,7 +4708,7 @@
         <a:bodyPr/>
         <a:lstStyle/>
         <a:p>
-          <a:endParaRPr lang="en-US"/>
+          <a:endParaRPr lang="en-US" dirty="0"/>
         </a:p>
       </dgm:t>
     </dgm:pt>
@@ -6787,7 +4744,7 @@
         <a:bodyPr/>
         <a:lstStyle/>
         <a:p>
-          <a:endParaRPr lang="en-US"/>
+          <a:endParaRPr lang="en-US" dirty="0"/>
         </a:p>
       </dgm:t>
     </dgm:pt>
@@ -6823,7 +4780,7 @@
         <a:bodyPr/>
         <a:lstStyle/>
         <a:p>
-          <a:endParaRPr lang="en-US"/>
+          <a:endParaRPr lang="en-US" dirty="0"/>
         </a:p>
       </dgm:t>
     </dgm:pt>
@@ -6859,7 +4816,7 @@
         <a:bodyPr/>
         <a:lstStyle/>
         <a:p>
-          <a:endParaRPr lang="en-US"/>
+          <a:endParaRPr lang="en-US" dirty="0"/>
         </a:p>
       </dgm:t>
     </dgm:pt>
@@ -7163,7 +5120,7 @@
             <a:t>Deployability</a:t>
           </a:r>
           <a:r>
-            <a:rPr lang="en-US" dirty="0"/>
+            <a:rPr lang="en-US"/>
             <a:t> trade-off</a:t>
           </a:r>
         </a:p>
@@ -7299,7 +5256,7 @@
         <a:lstStyle/>
         <a:p>
           <a:r>
-            <a:rPr lang="en-US" dirty="0"/>
+            <a:rPr lang="en-US"/>
             <a:t>Edge devices are resource-constrained</a:t>
           </a:r>
         </a:p>
@@ -7335,14 +5292,14 @@
         <a:lstStyle/>
         <a:p>
           <a:r>
-            <a:rPr lang="en-GB" dirty="0"/>
+            <a:rPr lang="en-GB"/>
             <a:t>Edge IDS: </a:t>
           </a:r>
           <a:r>
-            <a:rPr lang="en-GB" b="1" dirty="0"/>
+            <a:rPr lang="en-GB" b="1"/>
             <a:t>simple ML and Federated Learning</a:t>
           </a:r>
-          <a:endParaRPr lang="en-US" dirty="0"/>
+          <a:endParaRPr lang="en-US"/>
         </a:p>
       </dgm:t>
     </dgm:pt>
@@ -7376,7 +5333,7 @@
         <a:lstStyle/>
         <a:p>
           <a:r>
-            <a:rPr lang="en-US" dirty="0"/>
+            <a:rPr lang="en-US"/>
             <a:t>Lack of evaluation under realistic edge constraints</a:t>
           </a:r>
         </a:p>
@@ -7412,22 +5369,22 @@
         <a:lstStyle/>
         <a:p>
           <a:r>
-            <a:rPr lang="en-US" dirty="0"/>
+            <a:rPr lang="en-US"/>
             <a:t>Evaluate Feature Selection, PCA, Autoencoder</a:t>
           </a:r>
           <a:r>
-            <a:rPr lang="en-US" altLang="zh-CN" dirty="0"/>
+            <a:rPr lang="en-US" altLang="zh-CN"/>
             <a:t>,</a:t>
           </a:r>
           <a:r>
-            <a:rPr lang="zh-CN" altLang="en-US" dirty="0"/>
+            <a:rPr lang="zh-CN" altLang="en-US"/>
             <a:t> </a:t>
           </a:r>
           <a:r>
-            <a:rPr lang="en-US" altLang="zh-CN" dirty="0" err="1"/>
+            <a:rPr lang="en-US" altLang="zh-CN" err="1"/>
             <a:t>ResNext</a:t>
           </a:r>
-          <a:endParaRPr lang="en-US" dirty="0"/>
+          <a:endParaRPr lang="en-US"/>
         </a:p>
       </dgm:t>
     </dgm:pt>
@@ -7461,7 +5418,7 @@
         <a:lstStyle/>
         <a:p>
           <a:r>
-            <a:rPr lang="en-US" dirty="0"/>
+            <a:rPr lang="en-US"/>
             <a:t>Compare accuracy, resource usage, and efficiency</a:t>
           </a:r>
         </a:p>
@@ -7703,7 +5660,7 @@
             </a:spcAft>
             <a:buNone/>
           </a:pPr>
-          <a:endParaRPr lang="en-US" sz="500" kern="1200"/>
+          <a:endParaRPr lang="en-US" sz="500" kern="1200" dirty="0"/>
         </a:p>
       </dsp:txBody>
       <dsp:txXfrm>
@@ -7860,7 +5817,7 @@
             </a:spcAft>
             <a:buNone/>
           </a:pPr>
-          <a:endParaRPr lang="en-US" sz="500" kern="1200"/>
+          <a:endParaRPr lang="en-US" sz="500" kern="1200" dirty="0"/>
         </a:p>
       </dsp:txBody>
       <dsp:txXfrm>
@@ -8023,7 +5980,7 @@
             </a:spcAft>
             <a:buNone/>
           </a:pPr>
-          <a:endParaRPr lang="en-US" sz="500" kern="1200"/>
+          <a:endParaRPr lang="en-US" sz="500" kern="1200" dirty="0"/>
         </a:p>
       </dsp:txBody>
       <dsp:txXfrm>
@@ -8180,7 +6137,7 @@
             </a:spcAft>
             <a:buNone/>
           </a:pPr>
-          <a:endParaRPr lang="en-US" sz="500" kern="1200"/>
+          <a:endParaRPr lang="en-US" sz="500" kern="1200" dirty="0"/>
         </a:p>
       </dsp:txBody>
       <dsp:txXfrm>
@@ -8728,7 +6685,7 @@
             <a:t>Deployability</a:t>
           </a:r>
           <a:r>
-            <a:rPr lang="en-US" sz="2600" kern="1200" dirty="0"/>
+            <a:rPr lang="en-US" sz="2600" kern="1200"/>
             <a:t> trade-off</a:t>
           </a:r>
         </a:p>
@@ -8874,7 +6831,7 @@
             <a:buNone/>
           </a:pPr>
           <a:r>
-            <a:rPr lang="en-US" sz="3000" kern="1200" dirty="0"/>
+            <a:rPr lang="en-US" sz="3000" kern="1200"/>
             <a:t>Edge devices are resource-constrained</a:t>
           </a:r>
         </a:p>
@@ -9008,14 +6965,14 @@
             <a:buNone/>
           </a:pPr>
           <a:r>
-            <a:rPr lang="en-GB" sz="3000" kern="1200" dirty="0"/>
+            <a:rPr lang="en-GB" sz="3000" kern="1200"/>
             <a:t>Edge IDS: </a:t>
           </a:r>
           <a:r>
-            <a:rPr lang="en-GB" sz="3000" b="1" kern="1200" dirty="0"/>
+            <a:rPr lang="en-GB" sz="3000" b="1" kern="1200"/>
             <a:t>simple ML and Federated Learning</a:t>
           </a:r>
-          <a:endParaRPr lang="en-US" sz="3000" kern="1200" dirty="0"/>
+          <a:endParaRPr lang="en-US" sz="3000" kern="1200"/>
         </a:p>
       </dsp:txBody>
       <dsp:txXfrm>
@@ -9147,7 +7104,7 @@
             <a:buNone/>
           </a:pPr>
           <a:r>
-            <a:rPr lang="en-US" sz="3000" kern="1200" dirty="0"/>
+            <a:rPr lang="en-US" sz="3000" kern="1200"/>
             <a:t>Lack of evaluation under realistic edge constraints</a:t>
           </a:r>
         </a:p>
@@ -9281,22 +7238,22 @@
             <a:buNone/>
           </a:pPr>
           <a:r>
-            <a:rPr lang="en-US" sz="3000" kern="1200" dirty="0"/>
+            <a:rPr lang="en-US" sz="3000" kern="1200"/>
             <a:t>Evaluate Feature Selection, PCA, Autoencoder</a:t>
           </a:r>
           <a:r>
-            <a:rPr lang="en-US" altLang="zh-CN" sz="3000" kern="1200" dirty="0"/>
+            <a:rPr lang="en-US" altLang="zh-CN" sz="3000" kern="1200"/>
             <a:t>,</a:t>
           </a:r>
           <a:r>
-            <a:rPr lang="zh-CN" altLang="en-US" sz="3000" kern="1200" dirty="0"/>
+            <a:rPr lang="zh-CN" altLang="en-US" sz="3000" kern="1200"/>
             <a:t> </a:t>
           </a:r>
           <a:r>
-            <a:rPr lang="en-US" altLang="zh-CN" sz="3000" kern="1200" dirty="0" err="1"/>
+            <a:rPr lang="en-US" altLang="zh-CN" sz="3000" kern="1200" err="1"/>
             <a:t>ResNext</a:t>
           </a:r>
-          <a:endParaRPr lang="en-US" sz="3000" kern="1200" dirty="0"/>
+          <a:endParaRPr lang="en-US" sz="3000" kern="1200"/>
         </a:p>
       </dsp:txBody>
       <dsp:txXfrm>
@@ -9428,7 +7385,7 @@
             <a:buNone/>
           </a:pPr>
           <a:r>
-            <a:rPr lang="en-US" sz="3000" kern="1200" dirty="0"/>
+            <a:rPr lang="en-US" sz="3000" kern="1200"/>
             <a:t>Compare accuracy, resource usage, and efficiency</a:t>
           </a:r>
         </a:p>
@@ -13451,7 +11408,7 @@
           <a:p>
             <a:fld id="{26149304-4996-5048-AF8D-AE7FCF302DAE}" type="datetimeFigureOut">
               <a:rPr lang="en-US" smtClean="0"/>
-              <a:t>3/19/26</a:t>
+              <a:t>3/21/26</a:t>
             </a:fld>
             <a:endParaRPr lang="en-US"/>
           </a:p>
@@ -13763,7 +11720,7 @@
           <a:bodyPr/>
           <a:lstStyle/>
           <a:p>
-            <a:endParaRPr lang="en-US" dirty="0"/>
+            <a:endParaRPr lang="en-US"/>
           </a:p>
         </p:txBody>
       </p:sp>
@@ -13847,7 +11804,422 @@
           <a:bodyPr/>
           <a:lstStyle/>
           <a:p>
+            <a:r>
+              <a:rPr lang="en-GB" sz="1200" kern="1200" dirty="0">
+                <a:solidFill>
+                  <a:schemeClr val="tx1"/>
+                </a:solidFill>
+                <a:effectLst/>
+                <a:latin typeface="+mn-lt"/>
+                <a:ea typeface="+mn-ea"/>
+                <a:cs typeface="+mn-cs"/>
+              </a:rPr>
+              <a:t>In our implementation, we conduct experiments on an ARM platform to simulate a realistic edge environment. To ensure fairness and reflect real-world constraints, we do not use GPU acceleration or MPS, and all computations are performed on CPU.</a:t>
+            </a:r>
+          </a:p>
+          <a:p>
+            <a:r>
+              <a:rPr lang="en-GB" sz="1200" kern="1200" dirty="0">
+                <a:solidFill>
+                  <a:schemeClr val="tx1"/>
+                </a:solidFill>
+                <a:effectLst/>
+                <a:latin typeface="+mn-lt"/>
+                <a:ea typeface="+mn-ea"/>
+                <a:cs typeface="+mn-cs"/>
+              </a:rPr>
+              <a:t> </a:t>
+            </a:r>
+          </a:p>
+          <a:p>
+            <a:r>
+              <a:rPr lang="en-GB" sz="1200" kern="1200" dirty="0">
+                <a:solidFill>
+                  <a:schemeClr val="tx1"/>
+                </a:solidFill>
+                <a:effectLst/>
+                <a:latin typeface="+mn-lt"/>
+                <a:ea typeface="+mn-ea"/>
+                <a:cs typeface="+mn-cs"/>
+              </a:rPr>
+              <a:t>Since we evaluate a hybrid framework, we simulate both edge and cloud components.</a:t>
+            </a:r>
+          </a:p>
+          <a:p>
+            <a:r>
+              <a:rPr lang="en-GB" sz="1200" kern="1200" dirty="0">
+                <a:solidFill>
+                  <a:schemeClr val="tx1"/>
+                </a:solidFill>
+                <a:effectLst/>
+                <a:latin typeface="+mn-lt"/>
+                <a:ea typeface="+mn-ea"/>
+                <a:cs typeface="+mn-cs"/>
+              </a:rPr>
+              <a:t> </a:t>
+            </a:r>
+          </a:p>
+          <a:p>
+            <a:r>
+              <a:rPr lang="en-GB" sz="1200" kern="1200" dirty="0">
+                <a:solidFill>
+                  <a:schemeClr val="tx1"/>
+                </a:solidFill>
+                <a:effectLst/>
+                <a:latin typeface="+mn-lt"/>
+                <a:ea typeface="+mn-ea"/>
+                <a:cs typeface="+mn-cs"/>
+              </a:rPr>
+              <a:t>In the edge simulation, we first read data from the dataset, then apply feature scaling and feature selection to remove redundant or less informative features. After that, we perform feature extraction using methods such as PCA, </a:t>
+            </a:r>
+            <a:r>
+              <a:rPr lang="en-GB" sz="1200" kern="1200" dirty="0" err="1">
+                <a:solidFill>
+                  <a:schemeClr val="tx1"/>
+                </a:solidFill>
+                <a:effectLst/>
+                <a:latin typeface="+mn-lt"/>
+                <a:ea typeface="+mn-ea"/>
+                <a:cs typeface="+mn-cs"/>
+              </a:rPr>
+              <a:t>AutoEncoder</a:t>
+            </a:r>
+            <a:r>
+              <a:rPr lang="en-GB" sz="1200" kern="1200" dirty="0">
+                <a:solidFill>
+                  <a:schemeClr val="tx1"/>
+                </a:solidFill>
+                <a:effectLst/>
+                <a:latin typeface="+mn-lt"/>
+                <a:ea typeface="+mn-ea"/>
+                <a:cs typeface="+mn-cs"/>
+              </a:rPr>
+              <a:t>, or </a:t>
+            </a:r>
+            <a:r>
+              <a:rPr lang="en-GB" sz="1200" kern="1200" dirty="0" err="1">
+                <a:solidFill>
+                  <a:schemeClr val="tx1"/>
+                </a:solidFill>
+                <a:effectLst/>
+                <a:latin typeface="+mn-lt"/>
+                <a:ea typeface="+mn-ea"/>
+                <a:cs typeface="+mn-cs"/>
+              </a:rPr>
+              <a:t>ResNeXt</a:t>
+            </a:r>
+            <a:r>
+              <a:rPr lang="en-GB" sz="1200" kern="1200" dirty="0">
+                <a:solidFill>
+                  <a:schemeClr val="tx1"/>
+                </a:solidFill>
+                <a:effectLst/>
+                <a:latin typeface="+mn-lt"/>
+                <a:ea typeface="+mn-ea"/>
+                <a:cs typeface="+mn-cs"/>
+              </a:rPr>
+              <a:t>, and transmit the processed features to the cloud.</a:t>
+            </a:r>
+          </a:p>
+          <a:p>
+            <a:r>
+              <a:rPr lang="en-GB" sz="1200" kern="1200" dirty="0">
+                <a:solidFill>
+                  <a:schemeClr val="tx1"/>
+                </a:solidFill>
+                <a:effectLst/>
+                <a:latin typeface="+mn-lt"/>
+                <a:ea typeface="+mn-ea"/>
+                <a:cs typeface="+mn-cs"/>
+              </a:rPr>
+              <a:t> </a:t>
+            </a:r>
+          </a:p>
+          <a:p>
+            <a:r>
+              <a:rPr lang="en-GB" sz="1200" kern="1200" dirty="0">
+                <a:solidFill>
+                  <a:schemeClr val="tx1"/>
+                </a:solidFill>
+                <a:effectLst/>
+                <a:latin typeface="+mn-lt"/>
+                <a:ea typeface="+mn-ea"/>
+                <a:cs typeface="+mn-cs"/>
+              </a:rPr>
+              <a:t>On the cloud side, the received data is reshaped based on metadata and then split into training and testing datasets. The data is then fed into a classification model for training and evaluation.</a:t>
+            </a:r>
+          </a:p>
+          <a:p>
+            <a:r>
+              <a:rPr lang="en-GB" sz="1200" kern="1200" dirty="0">
+                <a:solidFill>
+                  <a:schemeClr val="tx1"/>
+                </a:solidFill>
+                <a:effectLst/>
+                <a:latin typeface="+mn-lt"/>
+                <a:ea typeface="+mn-ea"/>
+                <a:cs typeface="+mn-cs"/>
+              </a:rPr>
+              <a:t> </a:t>
+            </a:r>
+          </a:p>
+          <a:p>
+            <a:r>
+              <a:rPr lang="en-GB" sz="1200" kern="1200" dirty="0">
+                <a:solidFill>
+                  <a:schemeClr val="tx1"/>
+                </a:solidFill>
+                <a:effectLst/>
+                <a:latin typeface="+mn-lt"/>
+                <a:ea typeface="+mn-ea"/>
+                <a:cs typeface="+mn-cs"/>
+              </a:rPr>
+              <a:t>Finally, the classification results can be used to generate alerts or trigger defence strategies.</a:t>
+            </a:r>
+          </a:p>
+          <a:p>
+            <a:r>
+              <a:rPr lang="en-GB" sz="1200" kern="1200" dirty="0">
+                <a:solidFill>
+                  <a:schemeClr val="tx1"/>
+                </a:solidFill>
+                <a:effectLst/>
+                <a:latin typeface="+mn-lt"/>
+                <a:ea typeface="+mn-ea"/>
+                <a:cs typeface="+mn-cs"/>
+              </a:rPr>
+              <a:t> </a:t>
+            </a:r>
+          </a:p>
+          <a:p>
+            <a:r>
+              <a:rPr lang="en-GB" sz="1200" kern="1200" dirty="0">
+                <a:solidFill>
+                  <a:schemeClr val="tx1"/>
+                </a:solidFill>
+                <a:effectLst/>
+                <a:latin typeface="+mn-lt"/>
+                <a:ea typeface="+mn-ea"/>
+                <a:cs typeface="+mn-cs"/>
+              </a:rPr>
+              <a:t>During this process, we monitor and record CPU and memory usage at the edge during feature extraction, as well as network traffic. We also evaluate model performance using metrics such as accuracy and F1 score.</a:t>
+            </a:r>
+          </a:p>
+          <a:p>
+            <a:r>
+              <a:rPr lang="en-GB" sz="1200" kern="1200" dirty="0">
+                <a:solidFill>
+                  <a:schemeClr val="tx1"/>
+                </a:solidFill>
+                <a:effectLst/>
+                <a:latin typeface="+mn-lt"/>
+                <a:ea typeface="+mn-ea"/>
+                <a:cs typeface="+mn-cs"/>
+              </a:rPr>
+              <a:t> </a:t>
+            </a:r>
+          </a:p>
+          <a:p>
             <a:endParaRPr lang="en-US" dirty="0"/>
+          </a:p>
+        </p:txBody>
+      </p:sp>
+      <p:sp>
+        <p:nvSpPr>
+          <p:cNvPr id="4" name="Slide Number Placeholder 3"/>
+          <p:cNvSpPr>
+            <a:spLocks noGrp="1"/>
+          </p:cNvSpPr>
+          <p:nvPr>
+            <p:ph type="sldNum" sz="quarter" idx="5"/>
+          </p:nvPr>
+        </p:nvSpPr>
+        <p:spPr/>
+        <p:txBody>
+          <a:bodyPr/>
+          <a:lstStyle/>
+          <a:p>
+            <a:fld id="{EDEF46E4-EE54-564F-BFBC-E1DA32DE0BEF}" type="slidenum">
+              <a:rPr lang="en-US" smtClean="0"/>
+              <a:t>6</a:t>
+            </a:fld>
+            <a:endParaRPr lang="en-US"/>
+          </a:p>
+        </p:txBody>
+      </p:sp>
+    </p:spTree>
+    <p:extLst>
+      <p:ext uri="{BB962C8B-B14F-4D97-AF65-F5344CB8AC3E}">
+        <p14:creationId xmlns:p14="http://schemas.microsoft.com/office/powerpoint/2010/main" val="4168453704"/>
+      </p:ext>
+    </p:extLst>
+  </p:cSld>
+  <p:clrMapOvr>
+    <a:masterClrMapping/>
+  </p:clrMapOvr>
+</p:notes>
+</file>
+
+<file path=ppt/notesSlides/notesSlide3.xml><?xml version="1.0" encoding="utf-8"?>
+<p:notes xmlns:a="http://schemas.openxmlformats.org/drawingml/2006/main" xmlns:r="http://schemas.openxmlformats.org/officeDocument/2006/relationships" xmlns:p="http://schemas.openxmlformats.org/presentationml/2006/main">
+  <p:cSld>
+    <p:spTree>
+      <p:nvGrpSpPr>
+        <p:cNvPr id="1" name=""/>
+        <p:cNvGrpSpPr/>
+        <p:nvPr/>
+      </p:nvGrpSpPr>
+      <p:grpSpPr>
+        <a:xfrm>
+          <a:off x="0" y="0"/>
+          <a:ext cx="0" cy="0"/>
+          <a:chOff x="0" y="0"/>
+          <a:chExt cx="0" cy="0"/>
+        </a:xfrm>
+      </p:grpSpPr>
+      <p:sp>
+        <p:nvSpPr>
+          <p:cNvPr id="2" name="Slide Image Placeholder 1"/>
+          <p:cNvSpPr>
+            <a:spLocks noGrp="1" noRot="1" noChangeAspect="1"/>
+          </p:cNvSpPr>
+          <p:nvPr>
+            <p:ph type="sldImg"/>
+          </p:nvPr>
+        </p:nvSpPr>
+        <p:spPr/>
+      </p:sp>
+      <p:sp>
+        <p:nvSpPr>
+          <p:cNvPr id="3" name="Notes Placeholder 2"/>
+          <p:cNvSpPr>
+            <a:spLocks noGrp="1"/>
+          </p:cNvSpPr>
+          <p:nvPr>
+            <p:ph type="body" idx="1"/>
+          </p:nvPr>
+        </p:nvSpPr>
+        <p:spPr/>
+        <p:txBody>
+          <a:bodyPr/>
+          <a:lstStyle/>
+          <a:p>
+            <a:r>
+              <a:rPr lang="en-GB" sz="1200" kern="1200" dirty="0">
+                <a:solidFill>
+                  <a:schemeClr val="tx1"/>
+                </a:solidFill>
+                <a:effectLst/>
+                <a:latin typeface="+mn-lt"/>
+                <a:ea typeface="+mn-ea"/>
+                <a:cs typeface="+mn-cs"/>
+              </a:rPr>
+              <a:t>In terms of we use the Edge-</a:t>
+            </a:r>
+            <a:r>
+              <a:rPr lang="en-GB" sz="1200" kern="1200" dirty="0" err="1">
+                <a:solidFill>
+                  <a:schemeClr val="tx1"/>
+                </a:solidFill>
+                <a:effectLst/>
+                <a:latin typeface="+mn-lt"/>
+                <a:ea typeface="+mn-ea"/>
+                <a:cs typeface="+mn-cs"/>
+              </a:rPr>
+              <a:t>IIoTset</a:t>
+            </a:r>
+            <a:r>
+              <a:rPr lang="en-GB" sz="1200" kern="1200" dirty="0">
+                <a:solidFill>
+                  <a:schemeClr val="tx1"/>
+                </a:solidFill>
+                <a:effectLst/>
+                <a:latin typeface="+mn-lt"/>
+                <a:ea typeface="+mn-ea"/>
+                <a:cs typeface="+mn-cs"/>
+              </a:rPr>
+              <a:t> dataset, which is a recent dataset designed for edge-based IoT environments(publish in 2022). It contains realistic network traffic and includes labelled data for both normal and attack behaviours, making it suitable for evaluating intrusion detection systems. In addition, the data is provided at the flow level, which aligns well with our system design and reduces computational complexity.</a:t>
+            </a:r>
+          </a:p>
+          <a:p>
+            <a:r>
+              <a:rPr lang="en-GB" sz="1200" kern="1200" dirty="0">
+                <a:solidFill>
+                  <a:schemeClr val="tx1"/>
+                </a:solidFill>
+                <a:effectLst/>
+                <a:latin typeface="+mn-lt"/>
+                <a:ea typeface="+mn-ea"/>
+                <a:cs typeface="+mn-cs"/>
+              </a:rPr>
+              <a:t> </a:t>
+            </a:r>
+          </a:p>
+          <a:p>
+            <a:r>
+              <a:rPr lang="en-GB" sz="1200" kern="1200" dirty="0">
+                <a:solidFill>
+                  <a:schemeClr val="tx1"/>
+                </a:solidFill>
+                <a:effectLst/>
+                <a:latin typeface="+mn-lt"/>
+                <a:ea typeface="+mn-ea"/>
+                <a:cs typeface="+mn-cs"/>
+              </a:rPr>
+              <a:t>For feature reduction, we investigate several approaches. First, we apply feature selection methods based on feature value ranges and their importance for prediction, in order to remove redundant or less informative features. Then, we use PCA as a traditional dimensionality reduction technique to project the data into a lower-dimensional space. Finally, we explore deep learning-based methods, including </a:t>
+            </a:r>
+            <a:r>
+              <a:rPr lang="en-GB" sz="1200" kern="1200" dirty="0" err="1">
+                <a:solidFill>
+                  <a:schemeClr val="tx1"/>
+                </a:solidFill>
+                <a:effectLst/>
+                <a:latin typeface="+mn-lt"/>
+                <a:ea typeface="+mn-ea"/>
+                <a:cs typeface="+mn-cs"/>
+              </a:rPr>
+              <a:t>AutoEncoder</a:t>
+            </a:r>
+            <a:r>
+              <a:rPr lang="en-GB" sz="1200" kern="1200" dirty="0">
+                <a:solidFill>
+                  <a:schemeClr val="tx1"/>
+                </a:solidFill>
+                <a:effectLst/>
+                <a:latin typeface="+mn-lt"/>
+                <a:ea typeface="+mn-ea"/>
+                <a:cs typeface="+mn-cs"/>
+              </a:rPr>
+              <a:t> and ResNeXt1D, to learn more complex feature representations.</a:t>
+            </a:r>
+          </a:p>
+          <a:p>
+            <a:r>
+              <a:rPr lang="en-GB" sz="1200" kern="1200" dirty="0">
+                <a:solidFill>
+                  <a:schemeClr val="tx1"/>
+                </a:solidFill>
+                <a:effectLst/>
+                <a:latin typeface="+mn-lt"/>
+                <a:ea typeface="+mn-ea"/>
+                <a:cs typeface="+mn-cs"/>
+              </a:rPr>
+              <a:t> </a:t>
+            </a:r>
+          </a:p>
+          <a:p>
+            <a:r>
+              <a:rPr lang="en-GB" sz="1200" kern="1200" dirty="0">
+                <a:solidFill>
+                  <a:schemeClr val="tx1"/>
+                </a:solidFill>
+                <a:effectLst/>
+                <a:latin typeface="+mn-lt"/>
+                <a:ea typeface="+mn-ea"/>
+                <a:cs typeface="+mn-cs"/>
+              </a:rPr>
+              <a:t>The main objective is to reduce the number of features while preserving the most important information, so that we can improve efficiency without significantly reducing classification performance.</a:t>
+            </a:r>
           </a:p>
         </p:txBody>
       </p:sp>
@@ -13878,6 +12250,114 @@
     <p:extLst>
       <p:ext uri="{BB962C8B-B14F-4D97-AF65-F5344CB8AC3E}">
         <p14:creationId xmlns:p14="http://schemas.microsoft.com/office/powerpoint/2010/main" val="2714155137"/>
+      </p:ext>
+    </p:extLst>
+  </p:cSld>
+  <p:clrMapOvr>
+    <a:masterClrMapping/>
+  </p:clrMapOvr>
+</p:notes>
+</file>
+
+<file path=ppt/notesSlides/notesSlide4.xml><?xml version="1.0" encoding="utf-8"?>
+<p:notes xmlns:a="http://schemas.openxmlformats.org/drawingml/2006/main" xmlns:r="http://schemas.openxmlformats.org/officeDocument/2006/relationships" xmlns:p="http://schemas.openxmlformats.org/presentationml/2006/main">
+  <p:cSld>
+    <p:spTree>
+      <p:nvGrpSpPr>
+        <p:cNvPr id="1" name="">
+          <a:extLst>
+            <a:ext uri="{FF2B5EF4-FFF2-40B4-BE49-F238E27FC236}">
+              <a16:creationId xmlns:a16="http://schemas.microsoft.com/office/drawing/2014/main" id="{1C6611AA-0529-7173-644F-F9C62CA66541}"/>
+            </a:ext>
+          </a:extLst>
+        </p:cNvPr>
+        <p:cNvGrpSpPr/>
+        <p:nvPr/>
+      </p:nvGrpSpPr>
+      <p:grpSpPr>
+        <a:xfrm>
+          <a:off x="0" y="0"/>
+          <a:ext cx="0" cy="0"/>
+          <a:chOff x="0" y="0"/>
+          <a:chExt cx="0" cy="0"/>
+        </a:xfrm>
+      </p:grpSpPr>
+      <p:sp>
+        <p:nvSpPr>
+          <p:cNvPr id="2" name="Slide Image Placeholder 1">
+            <a:extLst>
+              <a:ext uri="{FF2B5EF4-FFF2-40B4-BE49-F238E27FC236}">
+                <a16:creationId xmlns:a16="http://schemas.microsoft.com/office/drawing/2014/main" id="{1B81CBEE-40A5-BC2B-F336-FB8EA665719F}"/>
+              </a:ext>
+            </a:extLst>
+          </p:cNvPr>
+          <p:cNvSpPr>
+            <a:spLocks noGrp="1" noRot="1" noChangeAspect="1"/>
+          </p:cNvSpPr>
+          <p:nvPr>
+            <p:ph type="sldImg"/>
+          </p:nvPr>
+        </p:nvSpPr>
+        <p:spPr/>
+      </p:sp>
+      <p:sp>
+        <p:nvSpPr>
+          <p:cNvPr id="3" name="Notes Placeholder 2">
+            <a:extLst>
+              <a:ext uri="{FF2B5EF4-FFF2-40B4-BE49-F238E27FC236}">
+                <a16:creationId xmlns:a16="http://schemas.microsoft.com/office/drawing/2014/main" id="{64689DE2-05BC-238F-E2CA-83DE9DCD37F7}"/>
+              </a:ext>
+            </a:extLst>
+          </p:cNvPr>
+          <p:cNvSpPr>
+            <a:spLocks noGrp="1"/>
+          </p:cNvSpPr>
+          <p:nvPr>
+            <p:ph type="body" idx="1"/>
+          </p:nvPr>
+        </p:nvSpPr>
+        <p:spPr/>
+        <p:txBody>
+          <a:bodyPr/>
+          <a:lstStyle/>
+          <a:p>
+            <a:endParaRPr lang="en-US"/>
+          </a:p>
+        </p:txBody>
+      </p:sp>
+      <p:sp>
+        <p:nvSpPr>
+          <p:cNvPr id="4" name="Slide Number Placeholder 3">
+            <a:extLst>
+              <a:ext uri="{FF2B5EF4-FFF2-40B4-BE49-F238E27FC236}">
+                <a16:creationId xmlns:a16="http://schemas.microsoft.com/office/drawing/2014/main" id="{FBAAF51D-9F1C-CA74-664A-84AC570F9696}"/>
+              </a:ext>
+            </a:extLst>
+          </p:cNvPr>
+          <p:cNvSpPr>
+            <a:spLocks noGrp="1"/>
+          </p:cNvSpPr>
+          <p:nvPr>
+            <p:ph type="sldNum" sz="quarter" idx="5"/>
+          </p:nvPr>
+        </p:nvSpPr>
+        <p:spPr/>
+        <p:txBody>
+          <a:bodyPr/>
+          <a:lstStyle/>
+          <a:p>
+            <a:fld id="{EDEF46E4-EE54-564F-BFBC-E1DA32DE0BEF}" type="slidenum">
+              <a:rPr lang="en-US" smtClean="0"/>
+              <a:t>8</a:t>
+            </a:fld>
+            <a:endParaRPr lang="en-US"/>
+          </a:p>
+        </p:txBody>
+      </p:sp>
+    </p:spTree>
+    <p:extLst>
+      <p:ext uri="{BB962C8B-B14F-4D97-AF65-F5344CB8AC3E}">
+        <p14:creationId xmlns:p14="http://schemas.microsoft.com/office/powerpoint/2010/main" val="1022987678"/>
       </p:ext>
     </p:extLst>
   </p:cSld>
@@ -14066,7 +12546,7 @@
           <a:p>
             <a:fld id="{5BCAD085-E8A6-8845-BD4E-CB4CCA059FC4}" type="datetimeFigureOut">
               <a:rPr lang="en-US" smtClean="0"/>
-              <a:t>3/19/26</a:t>
+              <a:t>3/21/26</a:t>
             </a:fld>
             <a:endParaRPr lang="en-US"/>
           </a:p>
@@ -14234,7 +12714,7 @@
           <a:p>
             <a:fld id="{5BCAD085-E8A6-8845-BD4E-CB4CCA059FC4}" type="datetimeFigureOut">
               <a:rPr lang="en-US" smtClean="0"/>
-              <a:t>3/19/26</a:t>
+              <a:t>3/21/26</a:t>
             </a:fld>
             <a:endParaRPr lang="en-US"/>
           </a:p>
@@ -14412,7 +12892,7 @@
           <a:p>
             <a:fld id="{5BCAD085-E8A6-8845-BD4E-CB4CCA059FC4}" type="datetimeFigureOut">
               <a:rPr lang="en-US" smtClean="0"/>
-              <a:t>3/19/26</a:t>
+              <a:t>3/21/26</a:t>
             </a:fld>
             <a:endParaRPr lang="en-US"/>
           </a:p>
@@ -14580,7 +13060,7 @@
           <a:p>
             <a:fld id="{5BCAD085-E8A6-8845-BD4E-CB4CCA059FC4}" type="datetimeFigureOut">
               <a:rPr lang="en-US" smtClean="0"/>
-              <a:t>3/19/26</a:t>
+              <a:t>3/21/26</a:t>
             </a:fld>
             <a:endParaRPr lang="en-US"/>
           </a:p>
@@ -14825,7 +13305,7 @@
           <a:p>
             <a:fld id="{5BCAD085-E8A6-8845-BD4E-CB4CCA059FC4}" type="datetimeFigureOut">
               <a:rPr lang="en-US" smtClean="0"/>
-              <a:t>3/19/26</a:t>
+              <a:t>3/21/26</a:t>
             </a:fld>
             <a:endParaRPr lang="en-US"/>
           </a:p>
@@ -15110,7 +13590,7 @@
           <a:p>
             <a:fld id="{5BCAD085-E8A6-8845-BD4E-CB4CCA059FC4}" type="datetimeFigureOut">
               <a:rPr lang="en-US" smtClean="0"/>
-              <a:t>3/19/26</a:t>
+              <a:t>3/21/26</a:t>
             </a:fld>
             <a:endParaRPr lang="en-US"/>
           </a:p>
@@ -15529,7 +14009,7 @@
           <a:p>
             <a:fld id="{5BCAD085-E8A6-8845-BD4E-CB4CCA059FC4}" type="datetimeFigureOut">
               <a:rPr lang="en-US" smtClean="0"/>
-              <a:t>3/19/26</a:t>
+              <a:t>3/21/26</a:t>
             </a:fld>
             <a:endParaRPr lang="en-US"/>
           </a:p>
@@ -15646,7 +14126,7 @@
           <a:p>
             <a:fld id="{5BCAD085-E8A6-8845-BD4E-CB4CCA059FC4}" type="datetimeFigureOut">
               <a:rPr lang="en-US" smtClean="0"/>
-              <a:t>3/19/26</a:t>
+              <a:t>3/21/26</a:t>
             </a:fld>
             <a:endParaRPr lang="en-US"/>
           </a:p>
@@ -15741,7 +14221,7 @@
           <a:p>
             <a:fld id="{5BCAD085-E8A6-8845-BD4E-CB4CCA059FC4}" type="datetimeFigureOut">
               <a:rPr lang="en-US" smtClean="0"/>
-              <a:t>3/19/26</a:t>
+              <a:t>3/21/26</a:t>
             </a:fld>
             <a:endParaRPr lang="en-US"/>
           </a:p>
@@ -16016,7 +14496,7 @@
           <a:p>
             <a:fld id="{5BCAD085-E8A6-8845-BD4E-CB4CCA059FC4}" type="datetimeFigureOut">
               <a:rPr lang="en-US" smtClean="0"/>
-              <a:t>3/19/26</a:t>
+              <a:t>3/21/26</a:t>
             </a:fld>
             <a:endParaRPr lang="en-US"/>
           </a:p>
@@ -16268,7 +14748,7 @@
           <a:p>
             <a:fld id="{5BCAD085-E8A6-8845-BD4E-CB4CCA059FC4}" type="datetimeFigureOut">
               <a:rPr lang="en-US" smtClean="0"/>
-              <a:t>3/19/26</a:t>
+              <a:t>3/21/26</a:t>
             </a:fld>
             <a:endParaRPr lang="en-US"/>
           </a:p>
@@ -16479,7 +14959,7 @@
           <a:p>
             <a:fld id="{5BCAD085-E8A6-8845-BD4E-CB4CCA059FC4}" type="datetimeFigureOut">
               <a:rPr lang="en-US" smtClean="0"/>
-              <a:t>3/19/26</a:t>
+              <a:t>3/21/26</a:t>
             </a:fld>
             <a:endParaRPr lang="en-US"/>
           </a:p>
@@ -16934,7 +15414,7 @@
           <a:lstStyle/>
           <a:p>
             <a:pPr algn="ctr"/>
-            <a:endParaRPr lang="en-US"/>
+            <a:endParaRPr lang="en-US" dirty="0"/>
           </a:p>
         </p:txBody>
       </p:sp>
@@ -17007,7 +15487,7 @@
           <a:lstStyle/>
           <a:p>
             <a:pPr algn="ctr"/>
-            <a:endParaRPr lang="en-US"/>
+            <a:endParaRPr lang="en-US" dirty="0"/>
           </a:p>
         </p:txBody>
       </p:sp>
@@ -17083,7 +15563,7 @@
           <a:lstStyle/>
           <a:p>
             <a:pPr algn="ctr"/>
-            <a:endParaRPr lang="en-US"/>
+            <a:endParaRPr lang="en-US" dirty="0"/>
           </a:p>
         </p:txBody>
       </p:sp>
@@ -17158,7 +15638,7 @@
           <a:lstStyle/>
           <a:p>
             <a:pPr algn="ctr"/>
-            <a:endParaRPr lang="en-US"/>
+            <a:endParaRPr lang="en-US" dirty="0"/>
           </a:p>
         </p:txBody>
       </p:sp>
@@ -17234,7 +15714,7 @@
           <a:lstStyle/>
           <a:p>
             <a:pPr algn="ctr"/>
-            <a:endParaRPr lang="en-US"/>
+            <a:endParaRPr lang="en-US" dirty="0"/>
           </a:p>
         </p:txBody>
       </p:sp>
@@ -17444,7 +15924,7 @@
               <a:t>Yaoquan</a:t>
             </a:r>
             <a:r>
-              <a:rPr lang="zh-CN" altLang="en-US" dirty="0"/>
+              <a:rPr lang="zh-CN" altLang="en-US"/>
               <a:t> </a:t>
             </a:r>
             <a:r>
@@ -17452,7 +15932,7 @@
               <a:t>Ma(25298835),</a:t>
             </a:r>
             <a:r>
-              <a:rPr lang="zh-CN" altLang="en-US" dirty="0"/>
+              <a:rPr lang="zh-CN" altLang="en-US"/>
               <a:t> </a:t>
             </a:r>
             <a:r>
@@ -17460,7 +15940,7 @@
               <a:t>Wang</a:t>
             </a:r>
             <a:r>
-              <a:rPr lang="zh-CN" altLang="en-US" dirty="0"/>
+              <a:rPr lang="zh-CN" altLang="en-US"/>
               <a:t> </a:t>
             </a:r>
             <a:r>
@@ -17543,85 +16023,85 @@
           <a:lstStyle/>
           <a:p>
             <a:r>
-              <a:rPr lang="en-GB" dirty="0"/>
+              <a:rPr lang="en-GB"/>
               <a:t>Feature reduction techniques, including PCA, </a:t>
             </a:r>
             <a:r>
-              <a:rPr lang="en-GB" dirty="0" err="1"/>
+              <a:rPr lang="en-GB" err="1"/>
               <a:t>AutoEncoder</a:t>
             </a:r>
             <a:r>
-              <a:rPr lang="en-GB" dirty="0"/>
+              <a:rPr lang="en-GB"/>
               <a:t>, and </a:t>
             </a:r>
             <a:r>
-              <a:rPr lang="en-GB" dirty="0" err="1"/>
+              <a:rPr lang="en-GB" err="1"/>
               <a:t>ResNeXt</a:t>
             </a:r>
             <a:r>
-              <a:rPr lang="en-GB" dirty="0"/>
+              <a:rPr lang="en-GB"/>
               <a:t>, generally lead to a decrease in model performance, particularly in terms of accuracy and F1 score.</a:t>
             </a:r>
           </a:p>
           <a:p>
             <a:r>
-              <a:rPr lang="en-GB" dirty="0"/>
+              <a:rPr lang="en-GB"/>
               <a:t>If</a:t>
             </a:r>
             <a:r>
-              <a:rPr lang="zh-CN" altLang="en-US" dirty="0"/>
+              <a:rPr lang="zh-CN" altLang="en-US"/>
               <a:t> </a:t>
             </a:r>
             <a:r>
-              <a:rPr lang="en-GB" dirty="0"/>
+              <a:rPr lang="en-GB"/>
               <a:t>a certain degree of performance degradation is acceptable, more aggressive dimensionality reduction can be applied to significantly reduce feature size and computational cost.</a:t>
             </a:r>
           </a:p>
           <a:p>
             <a:r>
-              <a:rPr lang="en-GB" dirty="0" err="1"/>
+              <a:rPr lang="en-GB" err="1"/>
               <a:t>ResNeXt</a:t>
             </a:r>
             <a:r>
-              <a:rPr lang="en-GB" dirty="0"/>
+              <a:rPr lang="en-GB"/>
               <a:t> introduces high CPU overhead when applied to low-dimensional flow-level data, without improving accuracy or F1 score, making it unsuitable for deployment on edge devices. In contrast, PCA and </a:t>
             </a:r>
             <a:r>
-              <a:rPr lang="en-GB" dirty="0" err="1"/>
+              <a:rPr lang="en-GB" err="1"/>
               <a:t>AutoEncoder</a:t>
             </a:r>
             <a:r>
-              <a:rPr lang="en-GB" dirty="0"/>
+              <a:rPr lang="en-GB"/>
               <a:t> show no significant resource bottlenecks and are more suitable for edge-based IDS.</a:t>
             </a:r>
           </a:p>
           <a:p>
             <a:r>
-              <a:rPr lang="en-GB" dirty="0"/>
+              <a:rPr lang="en-GB"/>
               <a:t>Feature reduction reduces performance but improves efficiency; PCA and </a:t>
             </a:r>
             <a:r>
-              <a:rPr lang="en-GB" dirty="0" err="1"/>
+              <a:rPr lang="en-GB" err="1"/>
               <a:t>AutoEncoder</a:t>
             </a:r>
             <a:r>
-              <a:rPr lang="en-GB" dirty="0"/>
+              <a:rPr lang="en-GB"/>
               <a:t> are edge-friendly, while </a:t>
             </a:r>
             <a:r>
-              <a:rPr lang="en-GB" dirty="0" err="1"/>
+              <a:rPr lang="en-GB" err="1"/>
               <a:t>ResNeXt</a:t>
             </a:r>
             <a:r>
-              <a:rPr lang="en-GB" dirty="0"/>
+              <a:rPr lang="en-GB"/>
               <a:t> is computationally expensive and ineffective for low-dimensional data.</a:t>
             </a:r>
           </a:p>
           <a:p>
-            <a:endParaRPr lang="en-GB" dirty="0"/>
+            <a:endParaRPr lang="en-GB"/>
           </a:p>
           <a:p>
-            <a:endParaRPr lang="en-GB" dirty="0"/>
+            <a:endParaRPr lang="en-GB"/>
           </a:p>
         </p:txBody>
       </p:sp>
@@ -17687,25 +16167,21 @@
           <a:lstStyle/>
           <a:p>
             <a:r>
-              <a:rPr dirty="0"/>
               <a:t>IoMT Security Papers</a:t>
             </a:r>
           </a:p>
           <a:p>
             <a:r>
-              <a:rPr dirty="0"/>
               <a:t>IDS and ML/DL Papers</a:t>
             </a:r>
           </a:p>
           <a:p>
             <a:r>
-              <a:rPr dirty="0"/>
               <a:t>Feature Reduction Techniques</a:t>
             </a:r>
           </a:p>
           <a:p>
             <a:r>
-              <a:rPr dirty="0"/>
               <a:t>Relevant academic sources</a:t>
             </a:r>
           </a:p>
@@ -17822,7 +16298,7 @@
           <a:lstStyle/>
           <a:p>
             <a:pPr algn="ctr"/>
-            <a:endParaRPr lang="en-US"/>
+            <a:endParaRPr lang="en-US" dirty="0"/>
           </a:p>
         </p:txBody>
       </p:sp>
@@ -17897,7 +16373,7 @@
           <a:lstStyle/>
           <a:p>
             <a:pPr algn="ctr"/>
-            <a:endParaRPr lang="en-US"/>
+            <a:endParaRPr lang="en-US" dirty="0"/>
           </a:p>
         </p:txBody>
       </p:sp>
@@ -17973,7 +16449,7 @@
           <a:lstStyle/>
           <a:p>
             <a:pPr algn="ctr"/>
-            <a:endParaRPr lang="en-US"/>
+            <a:endParaRPr lang="en-US" dirty="0"/>
           </a:p>
         </p:txBody>
       </p:sp>
@@ -18232,7 +16708,7 @@
           <a:lstStyle/>
           <a:p>
             <a:pPr algn="ctr"/>
-            <a:endParaRPr lang="en-US"/>
+            <a:endParaRPr lang="en-US" dirty="0"/>
           </a:p>
         </p:txBody>
       </p:sp>
@@ -18305,7 +16781,7 @@
           <a:lstStyle/>
           <a:p>
             <a:pPr algn="ctr"/>
-            <a:endParaRPr lang="en-US"/>
+            <a:endParaRPr lang="en-US" dirty="0"/>
           </a:p>
         </p:txBody>
       </p:sp>
@@ -18380,7 +16856,7 @@
           <a:lstStyle/>
           <a:p>
             <a:pPr algn="ctr"/>
-            <a:endParaRPr lang="en-US"/>
+            <a:endParaRPr lang="en-US" dirty="0"/>
           </a:p>
         </p:txBody>
       </p:sp>
@@ -18702,7 +17178,7 @@
           <a:lstStyle/>
           <a:p>
             <a:pPr algn="ctr"/>
-            <a:endParaRPr lang="en-US"/>
+            <a:endParaRPr lang="en-US" dirty="0"/>
           </a:p>
         </p:txBody>
       </p:sp>
@@ -19099,7 +17575,7 @@
           <a:lstStyle/>
           <a:p>
             <a:pPr algn="ctr"/>
-            <a:endParaRPr lang="en-US" dirty="0"/>
+            <a:endParaRPr lang="en-US"/>
           </a:p>
         </p:txBody>
       </p:sp>
@@ -19269,7 +17745,7 @@
           <a:lstStyle/>
           <a:p>
             <a:pPr algn="ctr"/>
-            <a:endParaRPr lang="en-US" dirty="0"/>
+            <a:endParaRPr lang="en-US"/>
           </a:p>
         </p:txBody>
       </p:sp>
@@ -19374,7 +17850,7 @@
           <a:p>
             <a:pPr algn="r"/>
             <a:r>
-              <a:rPr lang="en-GB" sz="3000" dirty="0">
+              <a:rPr lang="en-GB" sz="3000">
                 <a:solidFill>
                   <a:srgbClr val="FFFFFF"/>
                 </a:solidFill>
@@ -21560,18 +20036,18 @@
           <a:p>
             <a:pPr algn="ctr"/>
             <a:r>
-              <a:rPr lang="en-US" sz="800" dirty="0"/>
+              <a:rPr lang="en-US" sz="800"/>
               <a:t>Feature</a:t>
             </a:r>
             <a:r>
-              <a:rPr lang="zh-CN" altLang="en-US" sz="800" dirty="0"/>
+              <a:rPr lang="zh-CN" altLang="en-US" sz="800"/>
               <a:t> </a:t>
             </a:r>
             <a:r>
-              <a:rPr lang="en-US" altLang="zh-CN" sz="800" dirty="0"/>
+              <a:rPr lang="en-US" altLang="zh-CN" sz="800"/>
               <a:t>Selection</a:t>
             </a:r>
-            <a:endParaRPr lang="en-US" sz="800" dirty="0"/>
+            <a:endParaRPr lang="en-US" sz="800"/>
           </a:p>
         </p:txBody>
       </p:sp>
@@ -21605,18 +20081,18 @@
           <a:p>
             <a:pPr algn="ctr"/>
             <a:r>
-              <a:rPr lang="en-US" altLang="zh-CN" sz="800" dirty="0"/>
+              <a:rPr lang="en-US" altLang="zh-CN" sz="800"/>
               <a:t>Feature</a:t>
             </a:r>
             <a:r>
-              <a:rPr lang="zh-CN" altLang="en-US" sz="800" dirty="0"/>
+              <a:rPr lang="zh-CN" altLang="en-US" sz="800"/>
               <a:t> </a:t>
             </a:r>
             <a:r>
-              <a:rPr lang="en-US" altLang="zh-CN" sz="800" dirty="0"/>
+              <a:rPr lang="en-US" altLang="zh-CN" sz="800"/>
               <a:t>encoding</a:t>
             </a:r>
-            <a:endParaRPr lang="en-US" sz="800" dirty="0"/>
+            <a:endParaRPr lang="en-US" sz="800"/>
           </a:p>
         </p:txBody>
       </p:sp>
@@ -23702,18 +22178,18 @@
           <a:p>
             <a:pPr algn="ctr"/>
             <a:r>
-              <a:rPr lang="en-US" sz="800" dirty="0"/>
+              <a:rPr lang="en-US" sz="800"/>
               <a:t>Feature</a:t>
             </a:r>
             <a:r>
-              <a:rPr lang="zh-CN" altLang="en-US" sz="800" dirty="0"/>
+              <a:rPr lang="zh-CN" altLang="en-US" sz="800"/>
               <a:t> </a:t>
             </a:r>
             <a:r>
-              <a:rPr lang="en-US" altLang="zh-CN" sz="800" dirty="0"/>
+              <a:rPr lang="en-US" altLang="zh-CN" sz="800"/>
               <a:t>Selection</a:t>
             </a:r>
-            <a:endParaRPr lang="en-US" sz="800" dirty="0"/>
+            <a:endParaRPr lang="en-US" sz="800"/>
           </a:p>
         </p:txBody>
       </p:sp>
@@ -23747,18 +22223,18 @@
           <a:p>
             <a:pPr algn="ctr"/>
             <a:r>
-              <a:rPr lang="en-US" altLang="zh-CN" sz="800" dirty="0"/>
+              <a:rPr lang="en-US" altLang="zh-CN" sz="800"/>
               <a:t>Feature</a:t>
             </a:r>
             <a:r>
-              <a:rPr lang="zh-CN" altLang="en-US" sz="800" dirty="0"/>
+              <a:rPr lang="zh-CN" altLang="en-US" sz="800"/>
               <a:t> </a:t>
             </a:r>
             <a:r>
-              <a:rPr lang="en-US" altLang="zh-CN" sz="800" dirty="0"/>
+              <a:rPr lang="en-US" altLang="zh-CN" sz="800"/>
               <a:t>encoding</a:t>
             </a:r>
-            <a:endParaRPr lang="en-US" sz="800" dirty="0"/>
+            <a:endParaRPr lang="en-US" sz="800"/>
           </a:p>
         </p:txBody>
       </p:sp>
@@ -25844,18 +24320,18 @@
           <a:p>
             <a:pPr algn="ctr"/>
             <a:r>
-              <a:rPr lang="en-US" sz="800" dirty="0"/>
+              <a:rPr lang="en-US" sz="800"/>
               <a:t>Feature</a:t>
             </a:r>
             <a:r>
-              <a:rPr lang="zh-CN" altLang="en-US" sz="800" dirty="0"/>
+              <a:rPr lang="zh-CN" altLang="en-US" sz="800"/>
               <a:t> </a:t>
             </a:r>
             <a:r>
-              <a:rPr lang="en-US" altLang="zh-CN" sz="800" dirty="0"/>
+              <a:rPr lang="en-US" altLang="zh-CN" sz="800"/>
               <a:t>Selection</a:t>
             </a:r>
-            <a:endParaRPr lang="en-US" sz="800" dirty="0"/>
+            <a:endParaRPr lang="en-US" sz="800"/>
           </a:p>
         </p:txBody>
       </p:sp>
@@ -25889,18 +24365,18 @@
           <a:p>
             <a:pPr algn="ctr"/>
             <a:r>
-              <a:rPr lang="en-US" altLang="zh-CN" sz="800" dirty="0"/>
+              <a:rPr lang="en-US" altLang="zh-CN" sz="800"/>
               <a:t>Feature</a:t>
             </a:r>
             <a:r>
-              <a:rPr lang="zh-CN" altLang="en-US" sz="800" dirty="0"/>
+              <a:rPr lang="zh-CN" altLang="en-US" sz="800"/>
               <a:t> </a:t>
             </a:r>
             <a:r>
-              <a:rPr lang="en-US" altLang="zh-CN" sz="800" dirty="0"/>
+              <a:rPr lang="en-US" altLang="zh-CN" sz="800"/>
               <a:t>encoding</a:t>
             </a:r>
-            <a:endParaRPr lang="en-US" sz="800" dirty="0"/>
+            <a:endParaRPr lang="en-US" sz="800"/>
           </a:p>
         </p:txBody>
       </p:sp>
@@ -27985,7 +26461,7 @@
           <a:lstStyle/>
           <a:p>
             <a:r>
-              <a:rPr sz="3600" dirty="0"/>
+              <a:rPr sz="3600"/>
               <a:t>Methodology: System Overview</a:t>
             </a:r>
           </a:p>
@@ -28041,7 +26517,7 @@
           <a:p>
             <a:pPr algn="ctr"/>
             <a:r>
-              <a:rPr lang="en-US" dirty="0"/>
+              <a:rPr lang="en-US"/>
               <a:t>IoMT-Based Wearable Devices</a:t>
             </a:r>
           </a:p>
@@ -28097,7 +26573,7 @@
           <a:p>
             <a:pPr algn="ctr"/>
             <a:r>
-              <a:rPr lang="en-US" dirty="0"/>
+              <a:rPr lang="en-US"/>
               <a:t>Edge Computing layer</a:t>
             </a:r>
           </a:p>
@@ -28133,18 +26609,18 @@
           <a:p>
             <a:pPr algn="ctr"/>
             <a:r>
-              <a:rPr lang="en-US" sz="800" dirty="0"/>
+              <a:rPr lang="en-US" sz="800"/>
               <a:t>Feature</a:t>
             </a:r>
             <a:r>
-              <a:rPr lang="zh-CN" altLang="en-US" sz="800" dirty="0"/>
+              <a:rPr lang="zh-CN" altLang="en-US" sz="800"/>
               <a:t> </a:t>
             </a:r>
             <a:r>
-              <a:rPr lang="en-US" altLang="zh-CN" sz="800" dirty="0"/>
+              <a:rPr lang="en-US" altLang="zh-CN" sz="800"/>
               <a:t>Selection</a:t>
             </a:r>
-            <a:endParaRPr lang="en-US" sz="800" dirty="0"/>
+            <a:endParaRPr lang="en-US" sz="800"/>
           </a:p>
         </p:txBody>
       </p:sp>
@@ -28178,18 +26654,18 @@
           <a:p>
             <a:pPr algn="ctr"/>
             <a:r>
-              <a:rPr lang="en-US" altLang="zh-CN" sz="800" dirty="0"/>
+              <a:rPr lang="en-US" altLang="zh-CN" sz="800"/>
               <a:t>Feature</a:t>
             </a:r>
             <a:r>
-              <a:rPr lang="zh-CN" altLang="en-US" sz="800" dirty="0"/>
+              <a:rPr lang="zh-CN" altLang="en-US" sz="800"/>
               <a:t> </a:t>
             </a:r>
             <a:r>
-              <a:rPr lang="en-US" altLang="zh-CN" sz="800" dirty="0"/>
+              <a:rPr lang="en-US" altLang="zh-CN" sz="800"/>
               <a:t>encoding</a:t>
             </a:r>
-            <a:endParaRPr lang="en-US" sz="800" dirty="0"/>
+            <a:endParaRPr lang="en-US" sz="800"/>
           </a:p>
         </p:txBody>
       </p:sp>
@@ -28222,10 +26698,10 @@
           <a:lstStyle/>
           <a:p>
             <a:r>
-              <a:rPr lang="en-US" altLang="zh-CN" sz="2400" dirty="0"/>
+              <a:rPr lang="en-US" altLang="zh-CN" sz="2400"/>
               <a:t>…..</a:t>
             </a:r>
-            <a:endParaRPr lang="en-US" sz="2400" dirty="0"/>
+            <a:endParaRPr lang="en-US" sz="2400"/>
           </a:p>
         </p:txBody>
       </p:sp>
@@ -28460,26 +26936,26 @@
             <a:p>
               <a:pPr algn="ctr"/>
               <a:r>
-                <a:rPr lang="en-US" altLang="zh-CN" sz="1200" dirty="0"/>
+                <a:rPr lang="en-US" altLang="zh-CN" sz="1200"/>
                 <a:t>AI</a:t>
               </a:r>
               <a:r>
-                <a:rPr lang="zh-CN" altLang="en-US" sz="1200" dirty="0"/>
+                <a:rPr lang="zh-CN" altLang="en-US" sz="1200"/>
                 <a:t> </a:t>
               </a:r>
               <a:r>
-                <a:rPr lang="en-US" altLang="zh-CN" sz="1200" dirty="0"/>
+                <a:rPr lang="en-US" altLang="zh-CN" sz="1200"/>
                 <a:t>+</a:t>
               </a:r>
               <a:r>
-                <a:rPr lang="zh-CN" altLang="en-US" sz="1200" dirty="0"/>
+                <a:rPr lang="zh-CN" altLang="en-US" sz="1200"/>
                 <a:t> </a:t>
               </a:r>
               <a:r>
-                <a:rPr lang="en-US" altLang="zh-CN" sz="1200" dirty="0"/>
+                <a:rPr lang="en-US" altLang="zh-CN" sz="1200"/>
                 <a:t>IDS</a:t>
               </a:r>
-              <a:endParaRPr lang="en-US" sz="1200" dirty="0"/>
+              <a:endParaRPr lang="en-US" sz="1200"/>
             </a:p>
           </p:txBody>
         </p:sp>
@@ -28755,7 +27231,7 @@
               <a:p>
                 <a:pPr algn="ctr"/>
                 <a:r>
-                  <a:rPr lang="en-US" sz="1200" dirty="0"/>
+                  <a:rPr lang="en-US" sz="1200"/>
                   <a:t>Firewall</a:t>
                 </a:r>
               </a:p>
@@ -28791,18 +27267,18 @@
               <a:p>
                 <a:pPr algn="ctr"/>
                 <a:r>
-                  <a:rPr lang="en-US" sz="1200" dirty="0"/>
+                  <a:rPr lang="en-US" sz="1200"/>
                   <a:t>Load</a:t>
                 </a:r>
                 <a:r>
-                  <a:rPr lang="zh-CN" altLang="en-US" sz="1200" dirty="0"/>
+                  <a:rPr lang="zh-CN" altLang="en-US" sz="1200"/>
                   <a:t> </a:t>
                 </a:r>
                 <a:r>
-                  <a:rPr lang="en-US" altLang="zh-CN" sz="1200" dirty="0"/>
+                  <a:rPr lang="en-US" altLang="zh-CN" sz="1200"/>
                   <a:t>Balance</a:t>
                 </a:r>
-                <a:endParaRPr lang="en-US" sz="1200" dirty="0"/>
+                <a:endParaRPr lang="en-US" sz="1200"/>
               </a:p>
             </p:txBody>
           </p:sp>
@@ -28898,7 +27374,7 @@
           <a:p>
             <a:pPr algn="ctr"/>
             <a:r>
-              <a:rPr lang="en-US" sz="1200" dirty="0"/>
+              <a:rPr lang="en-US" sz="1200"/>
               <a:t>Storage</a:t>
             </a:r>
           </a:p>
@@ -28934,7 +27410,7 @@
           <a:p>
             <a:pPr algn="ctr"/>
             <a:r>
-              <a:rPr lang="en-US" sz="1200" dirty="0"/>
+              <a:rPr lang="en-US" sz="1200"/>
               <a:t>Servers</a:t>
             </a:r>
           </a:p>
@@ -28970,7 +27446,7 @@
           <a:p>
             <a:pPr algn="ctr"/>
             <a:r>
-              <a:rPr lang="en-US" sz="1200" dirty="0"/>
+              <a:rPr lang="en-US" sz="1200"/>
               <a:t>Network</a:t>
             </a:r>
           </a:p>
@@ -29171,7 +27647,7 @@
           <a:lstStyle/>
           <a:p>
             <a:r>
-              <a:rPr lang="en-US" sz="1400" dirty="0"/>
+              <a:rPr lang="en-US" sz="1400"/>
               <a:t>flow-level, logs, event </a:t>
             </a:r>
           </a:p>
@@ -29206,7 +27682,7 @@
           <a:lstStyle/>
           <a:p>
             <a:r>
-              <a:rPr lang="en-US" sz="1400" dirty="0"/>
+              <a:rPr lang="en-US" sz="1400"/>
               <a:t>medical sensitive data</a:t>
             </a:r>
           </a:p>
@@ -29478,7 +27954,7 @@
           <a:p>
             <a:pPr algn="ctr"/>
             <a:r>
-              <a:rPr lang="en-US" dirty="0"/>
+              <a:rPr lang="en-US"/>
               <a:t>Cloud layer</a:t>
             </a:r>
           </a:p>
@@ -29636,7 +28112,7 @@
           <a:lstStyle/>
           <a:p>
             <a:r>
-              <a:rPr lang="en-US" sz="1400" dirty="0"/>
+              <a:rPr lang="en-US" sz="1400"/>
               <a:t>Alter, Security policy</a:t>
             </a:r>
           </a:p>
@@ -29716,13 +28192,13 @@
           <a:lstStyle/>
           <a:p>
             <a:r>
-              <a:rPr lang="en-US" sz="1400" dirty="0"/>
+              <a:rPr lang="en-US" sz="1400"/>
               <a:t>Healthcare </a:t>
             </a:r>
           </a:p>
           <a:p>
             <a:r>
-              <a:rPr lang="en-US" sz="1400" dirty="0"/>
+              <a:rPr lang="en-US" sz="1400"/>
               <a:t>Professional</a:t>
             </a:r>
           </a:p>
@@ -29757,7 +28233,7 @@
           <a:lstStyle/>
           <a:p>
             <a:r>
-              <a:rPr lang="en-US" sz="1400" dirty="0"/>
+              <a:rPr lang="en-US" sz="1400"/>
               <a:t>Security Operator</a:t>
             </a:r>
           </a:p>
@@ -30125,7 +28601,7 @@
           <a:lstStyle/>
           <a:p>
             <a:pPr algn="ctr"/>
-            <a:endParaRPr lang="en-US" dirty="0"/>
+            <a:endParaRPr lang="en-US"/>
           </a:p>
         </p:txBody>
       </p:sp>
@@ -30206,14 +28682,14 @@
           <a:lstStyle/>
           <a:p>
             <a:r>
-              <a:rPr sz="3200" dirty="0"/>
+              <a:rPr sz="3200"/>
               <a:t>Methodology: </a:t>
             </a:r>
             <a:r>
-              <a:rPr lang="en-GB" sz="3200" dirty="0"/>
+              <a:rPr lang="en-GB" sz="3200"/>
               <a:t>Proposed Simulation Framework</a:t>
             </a:r>
-            <a:endParaRPr sz="3200" dirty="0"/>
+            <a:endParaRPr sz="3200"/>
           </a:p>
         </p:txBody>
       </p:sp>
@@ -30264,10 +28740,10 @@
           <a:p>
             <a:pPr algn="ctr"/>
             <a:r>
-              <a:rPr lang="en-US" dirty="0" err="1"/>
+              <a:rPr lang="en-US" err="1"/>
               <a:t>DataSet</a:t>
             </a:r>
-            <a:endParaRPr lang="en-US" dirty="0"/>
+            <a:endParaRPr lang="en-US"/>
           </a:p>
         </p:txBody>
       </p:sp>
@@ -30288,7 +28764,7 @@
         </p:nvCxnSpPr>
         <p:spPr>
           <a:xfrm>
-            <a:off x="1904288" y="5586074"/>
+            <a:off x="1803929" y="5586074"/>
             <a:ext cx="881742" cy="1460"/>
           </a:xfrm>
           <a:prstGeom prst="straightConnector1">
@@ -30358,7 +28834,7 @@
           <a:p>
             <a:pPr algn="ctr"/>
             <a:r>
-              <a:rPr lang="en-GB" sz="1200" dirty="0">
+              <a:rPr lang="en-GB" sz="1200">
                 <a:solidFill>
                   <a:schemeClr val="tx1"/>
                 </a:solidFill>
@@ -30366,7 +28842,7 @@
               <a:t>Feature</a:t>
             </a:r>
             <a:r>
-              <a:rPr lang="zh-CN" altLang="en-US" sz="1200" dirty="0">
+              <a:rPr lang="zh-CN" altLang="en-US" sz="1200">
                 <a:solidFill>
                   <a:schemeClr val="tx1"/>
                 </a:solidFill>
@@ -30374,14 +28850,14 @@
               <a:t> </a:t>
             </a:r>
             <a:r>
-              <a:rPr lang="en-US" altLang="zh-CN" sz="1200" dirty="0">
+              <a:rPr lang="en-US" altLang="zh-CN" sz="1200">
                 <a:solidFill>
                   <a:schemeClr val="tx1"/>
                 </a:solidFill>
               </a:rPr>
               <a:t>extraction</a:t>
             </a:r>
-            <a:endParaRPr lang="en-US" sz="1200" dirty="0">
+            <a:endParaRPr lang="en-US" sz="1200">
               <a:solidFill>
                 <a:schemeClr val="tx1"/>
               </a:solidFill>
@@ -30407,8 +28883,8 @@
         </p:nvCxnSpPr>
         <p:spPr>
           <a:xfrm flipV="1">
-            <a:off x="4601768" y="5583181"/>
-            <a:ext cx="581298" cy="4353"/>
+            <a:off x="4501409" y="5583181"/>
+            <a:ext cx="681657" cy="4353"/>
           </a:xfrm>
           <a:prstGeom prst="straightConnector1">
             <a:avLst/>
@@ -30461,22 +28937,22 @@
           <a:lstStyle/>
           <a:p>
             <a:r>
-              <a:rPr lang="en-US" sz="1200" dirty="0"/>
+              <a:rPr lang="en-US" sz="1200"/>
               <a:t>PCA, </a:t>
             </a:r>
             <a:r>
-              <a:rPr lang="en-US" sz="1200" dirty="0" err="1"/>
+              <a:rPr lang="en-US" sz="1200" err="1"/>
               <a:t>AutoEncoder</a:t>
             </a:r>
             <a:r>
-              <a:rPr lang="en-US" sz="1200" dirty="0"/>
+              <a:rPr lang="en-US" sz="1200"/>
               <a:t>, </a:t>
             </a:r>
             <a:r>
-              <a:rPr lang="en-US" sz="1200" dirty="0" err="1"/>
+              <a:rPr lang="en-US" sz="1200" err="1"/>
               <a:t>ResNeXt</a:t>
             </a:r>
-            <a:endParaRPr lang="en-US" sz="1200" dirty="0"/>
+            <a:endParaRPr lang="en-US" sz="1200"/>
           </a:p>
         </p:txBody>
       </p:sp>
@@ -30494,7 +28970,7 @@
         </p:nvSpPr>
         <p:spPr>
           <a:xfrm>
-            <a:off x="2786030" y="4729023"/>
+            <a:off x="2685671" y="4729023"/>
             <a:ext cx="1815738" cy="1717021"/>
           </a:xfrm>
           <a:prstGeom prst="roundRect">
@@ -30525,7 +29001,7 @@
           <a:p>
             <a:pPr algn="ctr"/>
             <a:r>
-              <a:rPr lang="en-US" sz="1200" dirty="0">
+              <a:rPr lang="en-US" sz="1200">
                 <a:solidFill>
                   <a:schemeClr val="tx1"/>
                 </a:solidFill>
@@ -30549,7 +29025,7 @@
         </p:nvSpPr>
         <p:spPr>
           <a:xfrm>
-            <a:off x="2897064" y="5130148"/>
+            <a:off x="2796705" y="5130148"/>
             <a:ext cx="243840" cy="200297"/>
           </a:xfrm>
           <a:prstGeom prst="ellipse">
@@ -30598,7 +29074,7 @@
         </p:nvSpPr>
         <p:spPr>
           <a:xfrm>
-            <a:off x="3214928" y="5130148"/>
+            <a:off x="3114569" y="5130148"/>
             <a:ext cx="243840" cy="200297"/>
           </a:xfrm>
           <a:prstGeom prst="ellipse">
@@ -30647,7 +29123,7 @@
         </p:nvSpPr>
         <p:spPr>
           <a:xfrm>
-            <a:off x="3558916" y="5130148"/>
+            <a:off x="3458557" y="5130148"/>
             <a:ext cx="243840" cy="200297"/>
           </a:xfrm>
           <a:prstGeom prst="ellipse">
@@ -30696,7 +29172,7 @@
         </p:nvSpPr>
         <p:spPr>
           <a:xfrm>
-            <a:off x="3909434" y="5130147"/>
+            <a:off x="3809075" y="5130147"/>
             <a:ext cx="243840" cy="200297"/>
           </a:xfrm>
           <a:prstGeom prst="ellipse">
@@ -30745,7 +29221,7 @@
         </p:nvSpPr>
         <p:spPr>
           <a:xfrm>
-            <a:off x="4240360" y="5130146"/>
+            <a:off x="4140001" y="5130146"/>
             <a:ext cx="243840" cy="200297"/>
           </a:xfrm>
           <a:prstGeom prst="ellipse">
@@ -30794,7 +29270,7 @@
         </p:nvSpPr>
         <p:spPr>
           <a:xfrm>
-            <a:off x="3169210" y="5051951"/>
+            <a:off x="3068851" y="5051951"/>
             <a:ext cx="341808" cy="374468"/>
           </a:xfrm>
           <a:prstGeom prst="mathMultiply">
@@ -30841,7 +29317,7 @@
         </p:nvSpPr>
         <p:spPr>
           <a:xfrm>
-            <a:off x="3863719" y="5059209"/>
+            <a:off x="3763360" y="5059209"/>
             <a:ext cx="341808" cy="374468"/>
           </a:xfrm>
           <a:prstGeom prst="mathMultiply">
@@ -30888,7 +29364,7 @@
         </p:nvSpPr>
         <p:spPr>
           <a:xfrm>
-            <a:off x="3086380" y="5392424"/>
+            <a:off x="2986021" y="5392424"/>
             <a:ext cx="1201419" cy="292388"/>
           </a:xfrm>
           <a:prstGeom prst="rect">
@@ -30903,24 +29379,24 @@
           <a:lstStyle/>
           <a:p>
             <a:r>
-              <a:rPr lang="en-US" sz="1300" dirty="0">
+              <a:rPr lang="en-US" sz="1300">
                 <a:ea typeface="SimSun" panose="02010600030101010101" pitchFamily="2" charset="-122"/>
               </a:rPr>
               <a:t>Feature</a:t>
             </a:r>
             <a:r>
-              <a:rPr lang="zh-CN" altLang="en-US" sz="1300" dirty="0">
+              <a:rPr lang="zh-CN" altLang="en-US" sz="1300">
                 <a:ea typeface="SimSun" panose="02010600030101010101" pitchFamily="2" charset="-122"/>
               </a:rPr>
               <a:t> </a:t>
             </a:r>
             <a:r>
-              <a:rPr lang="en-US" altLang="zh-CN" sz="1300" dirty="0">
+              <a:rPr lang="en-US" altLang="zh-CN" sz="1300">
                 <a:ea typeface="SimSun" panose="02010600030101010101" pitchFamily="2" charset="-122"/>
               </a:rPr>
               <a:t>scaling</a:t>
             </a:r>
-            <a:endParaRPr lang="en-US" sz="1300" dirty="0">
+            <a:endParaRPr lang="en-US" sz="1300">
               <a:ea typeface="SimSun" panose="02010600030101010101" pitchFamily="2" charset="-122"/>
             </a:endParaRPr>
           </a:p>
@@ -30941,14 +29417,14 @@
           <p:nvPr/>
         </p:nvPicPr>
         <p:blipFill>
-          <a:blip r:embed="rId2"/>
+          <a:blip r:embed="rId3"/>
           <a:stretch>
             <a:fillRect/>
           </a:stretch>
         </p:blipFill>
         <p:spPr>
           <a:xfrm>
-            <a:off x="2897064" y="5675867"/>
+            <a:off x="2796705" y="5675867"/>
             <a:ext cx="1610407" cy="635356"/>
           </a:xfrm>
           <a:prstGeom prst="rect">
@@ -31001,7 +29477,7 @@
           <a:p>
             <a:pPr algn="ctr"/>
             <a:r>
-              <a:rPr lang="en-US" sz="1200" dirty="0" err="1">
+              <a:rPr lang="en-US" sz="1200" err="1">
                 <a:solidFill>
                   <a:schemeClr val="tx1"/>
                 </a:solidFill>
@@ -31009,7 +29485,7 @@
               <a:t>Classifer</a:t>
             </a:r>
             <a:r>
-              <a:rPr lang="zh-CN" altLang="en-US" sz="1200" dirty="0">
+              <a:rPr lang="zh-CN" altLang="en-US" sz="1200">
                 <a:solidFill>
                   <a:schemeClr val="tx1"/>
                 </a:solidFill>
@@ -31017,14 +29493,14 @@
               <a:t>  </a:t>
             </a:r>
             <a:r>
-              <a:rPr lang="en-US" altLang="zh-CN" sz="1200" dirty="0">
+              <a:rPr lang="en-US" altLang="zh-CN" sz="1200">
                 <a:solidFill>
                   <a:schemeClr val="tx1"/>
                 </a:solidFill>
               </a:rPr>
               <a:t>Model</a:t>
             </a:r>
-            <a:endParaRPr lang="en-US" sz="1200" dirty="0">
+            <a:endParaRPr lang="en-US" sz="1200">
               <a:solidFill>
                 <a:schemeClr val="tx1"/>
               </a:solidFill>
@@ -31077,7 +29553,7 @@
           <a:p>
             <a:pPr algn="ctr"/>
             <a:r>
-              <a:rPr lang="en-US" altLang="zh-CN" sz="1200" dirty="0">
+              <a:rPr lang="en-US" altLang="zh-CN" sz="1200">
                 <a:solidFill>
                   <a:schemeClr val="tx1"/>
                 </a:solidFill>
@@ -31284,18 +29760,18 @@
           <a:p>
             <a:pPr algn="ctr"/>
             <a:r>
-              <a:rPr lang="en-US" altLang="zh-CN" sz="1600" dirty="0"/>
+              <a:rPr lang="en-US" altLang="zh-CN" sz="1600"/>
               <a:t>Classification</a:t>
             </a:r>
             <a:r>
-              <a:rPr lang="zh-CN" altLang="en-US" sz="1600" dirty="0"/>
+              <a:rPr lang="zh-CN" altLang="en-US" sz="1600"/>
               <a:t> </a:t>
             </a:r>
             <a:r>
-              <a:rPr lang="en-US" altLang="zh-CN" sz="1600" dirty="0"/>
+              <a:rPr lang="en-US" altLang="zh-CN" sz="1600"/>
               <a:t>result</a:t>
             </a:r>
-            <a:endParaRPr lang="en-US" sz="1600" dirty="0"/>
+            <a:endParaRPr lang="en-US" sz="1600"/>
           </a:p>
         </p:txBody>
       </p:sp>
@@ -31431,7 +29907,7 @@
           <a:p>
             <a:pPr algn="ctr"/>
             <a:r>
-              <a:rPr lang="en-US" altLang="zh-CN" sz="800" dirty="0">
+              <a:rPr lang="en-US" altLang="zh-CN" sz="800">
                 <a:ln w="0"/>
                 <a:solidFill>
                   <a:schemeClr val="tx1"/>
@@ -31446,7 +29922,7 @@
               </a:rPr>
               <a:t>attack</a:t>
             </a:r>
-            <a:endParaRPr lang="en-US" sz="800" dirty="0">
+            <a:endParaRPr lang="en-US" sz="800">
               <a:ln w="0"/>
               <a:solidFill>
                 <a:schemeClr val="tx1"/>
@@ -31512,7 +29988,7 @@
           <a:p>
             <a:pPr algn="ctr"/>
             <a:r>
-              <a:rPr lang="en-US" altLang="zh-CN" sz="800" dirty="0">
+              <a:rPr lang="en-US" altLang="zh-CN" sz="800">
                 <a:ln w="0"/>
                 <a:solidFill>
                   <a:schemeClr val="tx1"/>
@@ -31527,7 +30003,7 @@
               </a:rPr>
               <a:t>attack</a:t>
             </a:r>
-            <a:endParaRPr lang="en-US" sz="800" dirty="0">
+            <a:endParaRPr lang="en-US" sz="800">
               <a:ln w="0"/>
               <a:solidFill>
                 <a:schemeClr val="tx1"/>
@@ -31593,7 +30069,7 @@
           <a:p>
             <a:pPr algn="ctr"/>
             <a:r>
-              <a:rPr lang="en-US" altLang="zh-CN" sz="800" dirty="0">
+              <a:rPr lang="en-US" altLang="zh-CN" sz="800">
                 <a:ln w="0"/>
                 <a:solidFill>
                   <a:schemeClr val="tx1"/>
@@ -31608,7 +30084,7 @@
               </a:rPr>
               <a:t>attack</a:t>
             </a:r>
-            <a:endParaRPr lang="en-US" sz="800" dirty="0">
+            <a:endParaRPr lang="en-US" sz="800">
               <a:ln w="0"/>
               <a:solidFill>
                 <a:schemeClr val="tx1"/>
@@ -31674,7 +30150,7 @@
           <a:p>
             <a:pPr algn="ctr"/>
             <a:r>
-              <a:rPr lang="en-US" altLang="zh-CN" sz="800" dirty="0">
+              <a:rPr lang="en-US" altLang="zh-CN" sz="800">
                 <a:ln w="0"/>
                 <a:solidFill>
                   <a:schemeClr val="tx1"/>
@@ -31689,7 +30165,7 @@
               </a:rPr>
               <a:t>normal</a:t>
             </a:r>
-            <a:endParaRPr lang="en-US" sz="800" dirty="0">
+            <a:endParaRPr lang="en-US" sz="800">
               <a:ln w="0"/>
               <a:solidFill>
                 <a:schemeClr val="tx1"/>
@@ -31734,7 +30210,7 @@
           <a:lstStyle/>
           <a:p>
             <a:r>
-              <a:rPr lang="en-US" sz="1000" dirty="0"/>
+              <a:rPr lang="en-US" sz="1000"/>
               <a:t>Test</a:t>
             </a:r>
           </a:p>
@@ -31769,7 +30245,7 @@
           <a:lstStyle/>
           <a:p>
             <a:r>
-              <a:rPr lang="en-US" sz="1000" dirty="0"/>
+              <a:rPr lang="en-US" sz="1000"/>
               <a:t>Train</a:t>
             </a:r>
           </a:p>
@@ -31804,18 +30280,18 @@
           <a:lstStyle/>
           <a:p>
             <a:r>
-              <a:rPr lang="en-US" sz="1400" dirty="0"/>
+              <a:rPr lang="en-US" sz="1400"/>
               <a:t>Network</a:t>
             </a:r>
             <a:r>
-              <a:rPr lang="zh-CN" altLang="en-US" sz="1400" dirty="0"/>
+              <a:rPr lang="zh-CN" altLang="en-US" sz="1400"/>
               <a:t> </a:t>
             </a:r>
             <a:r>
-              <a:rPr lang="en-US" altLang="zh-CN" sz="1400" dirty="0"/>
+              <a:rPr lang="en-US" altLang="zh-CN" sz="1400"/>
               <a:t>traffic</a:t>
             </a:r>
-            <a:endParaRPr lang="en-US" sz="1400" dirty="0"/>
+            <a:endParaRPr lang="en-US" sz="1400"/>
           </a:p>
         </p:txBody>
       </p:sp>
@@ -31944,16 +30420,16 @@
           <a:lstStyle/>
           <a:p>
             <a:r>
-              <a:rPr lang="en-US" sz="1400" dirty="0"/>
+              <a:rPr lang="en-US" sz="1400"/>
               <a:t>CPU</a:t>
             </a:r>
           </a:p>
           <a:p>
-            <a:endParaRPr lang="en-US" sz="1400" dirty="0"/>
+            <a:endParaRPr lang="en-US" sz="1400"/>
           </a:p>
           <a:p>
             <a:r>
-              <a:rPr lang="en-US" sz="1400" dirty="0"/>
+              <a:rPr lang="en-US" sz="1400"/>
               <a:t>Memory</a:t>
             </a:r>
           </a:p>
@@ -31988,31 +30464,31 @@
           <a:lstStyle/>
           <a:p>
             <a:r>
-              <a:rPr lang="en-GB" sz="1400" dirty="0"/>
+              <a:rPr lang="en-GB" sz="1400"/>
               <a:t>Accuracy</a:t>
             </a:r>
           </a:p>
           <a:p>
-            <a:endParaRPr lang="en-GB" sz="1400" dirty="0"/>
+            <a:endParaRPr lang="en-GB" sz="1400"/>
           </a:p>
           <a:p>
             <a:r>
-              <a:rPr lang="en-GB" sz="1400" dirty="0"/>
+              <a:rPr lang="en-GB" sz="1400"/>
               <a:t>F</a:t>
             </a:r>
             <a:r>
-              <a:rPr lang="en-US" altLang="zh-CN" sz="1400" dirty="0"/>
+              <a:rPr lang="en-US" altLang="zh-CN" sz="1400"/>
               <a:t>1</a:t>
             </a:r>
             <a:r>
-              <a:rPr lang="zh-CN" altLang="en-US" sz="1400" dirty="0"/>
+              <a:rPr lang="zh-CN" altLang="en-US" sz="1400"/>
               <a:t> </a:t>
             </a:r>
             <a:r>
-              <a:rPr lang="en-US" altLang="zh-CN" sz="1400" dirty="0"/>
+              <a:rPr lang="en-US" altLang="zh-CN" sz="1400"/>
               <a:t>score</a:t>
             </a:r>
-            <a:endParaRPr lang="en-US" sz="1400" dirty="0"/>
+            <a:endParaRPr lang="en-US" sz="1400"/>
           </a:p>
         </p:txBody>
       </p:sp>
@@ -32031,7 +30507,7 @@
           <p:nvPr/>
         </p:nvPicPr>
         <p:blipFill>
-          <a:blip r:embed="rId3"/>
+          <a:blip r:embed="rId4"/>
           <a:stretch>
             <a:fillRect/>
           </a:stretch>
@@ -32061,7 +30537,7 @@
           <p:nvPr/>
         </p:nvPicPr>
         <p:blipFill>
-          <a:blip r:embed="rId4"/>
+          <a:blip r:embed="rId5"/>
           <a:stretch>
             <a:fillRect/>
           </a:stretch>
@@ -32153,18 +30629,18 @@
           <a:lstStyle/>
           <a:p>
             <a:r>
-              <a:rPr lang="en-US" dirty="0"/>
+              <a:rPr lang="en-US"/>
               <a:t>Edge</a:t>
             </a:r>
             <a:r>
-              <a:rPr lang="zh-CN" altLang="en-US" dirty="0"/>
+              <a:rPr lang="zh-CN" altLang="en-US"/>
               <a:t> </a:t>
             </a:r>
             <a:r>
-              <a:rPr lang="en-GB" dirty="0"/>
+              <a:rPr lang="en-GB"/>
               <a:t>Simulation</a:t>
             </a:r>
-            <a:endParaRPr lang="en-US" dirty="0"/>
+            <a:endParaRPr lang="en-US"/>
           </a:p>
         </p:txBody>
       </p:sp>
@@ -32197,7 +30673,7 @@
           <a:lstStyle/>
           <a:p>
             <a:r>
-              <a:rPr lang="en-GB" dirty="0"/>
+              <a:rPr lang="en-GB"/>
               <a:t>Cloud Simulation</a:t>
             </a:r>
           </a:p>
@@ -32218,7 +30694,7 @@
           <p:nvPr/>
         </p:nvPicPr>
         <p:blipFill>
-          <a:blip r:embed="rId5"/>
+          <a:blip r:embed="rId6"/>
           <a:stretch>
             <a:fillRect/>
           </a:stretch>
@@ -32356,7 +30832,7 @@
           <a:p>
             <a:pPr algn="ctr"/>
             <a:r>
-              <a:rPr lang="en-US" sz="1200" dirty="0">
+              <a:rPr lang="en-US" sz="1200">
                 <a:solidFill>
                   <a:schemeClr val="bg1"/>
                 </a:solidFill>
@@ -32413,7 +30889,7 @@
           <a:p>
             <a:pPr algn="ctr"/>
             <a:r>
-              <a:rPr lang="en-US" sz="1400" dirty="0"/>
+              <a:rPr lang="en-US" sz="1400"/>
               <a:t>Train</a:t>
             </a:r>
           </a:p>
@@ -33596,6 +32072,228 @@
           </p:style>
         </p:cxnSp>
       </p:grpSp>
+      <p:sp>
+        <p:nvSpPr>
+          <p:cNvPr id="11" name="TextBox 10">
+            <a:extLst>
+              <a:ext uri="{FF2B5EF4-FFF2-40B4-BE49-F238E27FC236}">
+                <a16:creationId xmlns:a16="http://schemas.microsoft.com/office/drawing/2014/main" id="{3F65E67E-0C4B-E7A7-C2AA-F6ADC83D50A6}"/>
+              </a:ext>
+            </a:extLst>
+          </p:cNvPr>
+          <p:cNvSpPr txBox="1"/>
+          <p:nvPr/>
+        </p:nvSpPr>
+        <p:spPr>
+          <a:xfrm>
+            <a:off x="2142249" y="5597628"/>
+            <a:ext cx="303718" cy="369332"/>
+          </a:xfrm>
+          <a:prstGeom prst="rect">
+            <a:avLst/>
+          </a:prstGeom>
+          <a:noFill/>
+        </p:spPr>
+        <p:txBody>
+          <a:bodyPr wrap="square" rtlCol="0">
+            <a:spAutoFit/>
+          </a:bodyPr>
+          <a:lstStyle/>
+          <a:p>
+            <a:r>
+              <a:rPr lang="en-US" altLang="zh-CN"/>
+              <a:t>1</a:t>
+            </a:r>
+            <a:endParaRPr lang="en-US"/>
+          </a:p>
+        </p:txBody>
+      </p:sp>
+      <p:sp>
+        <p:nvSpPr>
+          <p:cNvPr id="26" name="TextBox 25">
+            <a:extLst>
+              <a:ext uri="{FF2B5EF4-FFF2-40B4-BE49-F238E27FC236}">
+                <a16:creationId xmlns:a16="http://schemas.microsoft.com/office/drawing/2014/main" id="{5A3B2090-F6B4-3581-F8A8-F52D53D6F34F}"/>
+              </a:ext>
+            </a:extLst>
+          </p:cNvPr>
+          <p:cNvSpPr txBox="1"/>
+          <p:nvPr/>
+        </p:nvSpPr>
+        <p:spPr>
+          <a:xfrm>
+            <a:off x="4601431" y="5594113"/>
+            <a:ext cx="303718" cy="369332"/>
+          </a:xfrm>
+          <a:prstGeom prst="rect">
+            <a:avLst/>
+          </a:prstGeom>
+          <a:noFill/>
+        </p:spPr>
+        <p:txBody>
+          <a:bodyPr wrap="square" rtlCol="0">
+            <a:spAutoFit/>
+          </a:bodyPr>
+          <a:lstStyle/>
+          <a:p>
+            <a:r>
+              <a:rPr lang="en-US" altLang="zh-CN"/>
+              <a:t>2</a:t>
+            </a:r>
+            <a:endParaRPr lang="en-US"/>
+          </a:p>
+        </p:txBody>
+      </p:sp>
+      <p:sp>
+        <p:nvSpPr>
+          <p:cNvPr id="27" name="TextBox 26">
+            <a:extLst>
+              <a:ext uri="{FF2B5EF4-FFF2-40B4-BE49-F238E27FC236}">
+                <a16:creationId xmlns:a16="http://schemas.microsoft.com/office/drawing/2014/main" id="{50D3E9FE-7775-2CFB-20E3-5ECAA03D6AA4}"/>
+              </a:ext>
+            </a:extLst>
+          </p:cNvPr>
+          <p:cNvSpPr txBox="1"/>
+          <p:nvPr/>
+        </p:nvSpPr>
+        <p:spPr>
+          <a:xfrm>
+            <a:off x="1055426" y="3732918"/>
+            <a:ext cx="303718" cy="369332"/>
+          </a:xfrm>
+          <a:prstGeom prst="rect">
+            <a:avLst/>
+          </a:prstGeom>
+          <a:noFill/>
+        </p:spPr>
+        <p:txBody>
+          <a:bodyPr wrap="square" rtlCol="0">
+            <a:spAutoFit/>
+          </a:bodyPr>
+          <a:lstStyle/>
+          <a:p>
+            <a:r>
+              <a:rPr lang="en-US" altLang="zh-CN"/>
+              <a:t>3</a:t>
+            </a:r>
+            <a:endParaRPr lang="en-US"/>
+          </a:p>
+        </p:txBody>
+      </p:sp>
+      <p:sp>
+        <p:nvSpPr>
+          <p:cNvPr id="30" name="TextBox 29">
+            <a:extLst>
+              <a:ext uri="{FF2B5EF4-FFF2-40B4-BE49-F238E27FC236}">
+                <a16:creationId xmlns:a16="http://schemas.microsoft.com/office/drawing/2014/main" id="{35A90ADA-4ED2-EA0D-C51B-D9962D708F97}"/>
+              </a:ext>
+            </a:extLst>
+          </p:cNvPr>
+          <p:cNvSpPr txBox="1"/>
+          <p:nvPr/>
+        </p:nvSpPr>
+        <p:spPr>
+          <a:xfrm>
+            <a:off x="5110576" y="2805108"/>
+            <a:ext cx="303718" cy="369332"/>
+          </a:xfrm>
+          <a:prstGeom prst="rect">
+            <a:avLst/>
+          </a:prstGeom>
+          <a:noFill/>
+        </p:spPr>
+        <p:txBody>
+          <a:bodyPr wrap="square" rtlCol="0">
+            <a:spAutoFit/>
+          </a:bodyPr>
+          <a:lstStyle/>
+          <a:p>
+            <a:r>
+              <a:rPr lang="en-US" altLang="zh-CN"/>
+              <a:t>5</a:t>
+            </a:r>
+            <a:endParaRPr lang="en-US"/>
+          </a:p>
+        </p:txBody>
+      </p:sp>
+      <p:sp>
+        <p:nvSpPr>
+          <p:cNvPr id="33" name="TextBox 32">
+            <a:extLst>
+              <a:ext uri="{FF2B5EF4-FFF2-40B4-BE49-F238E27FC236}">
+                <a16:creationId xmlns:a16="http://schemas.microsoft.com/office/drawing/2014/main" id="{B8F9C0DF-9C3A-1217-442A-C22496842740}"/>
+              </a:ext>
+            </a:extLst>
+          </p:cNvPr>
+          <p:cNvSpPr txBox="1"/>
+          <p:nvPr/>
+        </p:nvSpPr>
+        <p:spPr>
+          <a:xfrm>
+            <a:off x="2597968" y="2531495"/>
+            <a:ext cx="303718" cy="369332"/>
+          </a:xfrm>
+          <a:prstGeom prst="rect">
+            <a:avLst/>
+          </a:prstGeom>
+          <a:noFill/>
+        </p:spPr>
+        <p:txBody>
+          <a:bodyPr wrap="square" rtlCol="0">
+            <a:spAutoFit/>
+          </a:bodyPr>
+          <a:lstStyle/>
+          <a:p>
+            <a:r>
+              <a:rPr lang="en-US" altLang="zh-CN"/>
+              <a:t>4</a:t>
+            </a:r>
+            <a:endParaRPr lang="en-US"/>
+          </a:p>
+        </p:txBody>
+      </p:sp>
+      <p:cxnSp>
+        <p:nvCxnSpPr>
+          <p:cNvPr id="44" name="Straight Arrow Connector 43">
+            <a:extLst>
+              <a:ext uri="{FF2B5EF4-FFF2-40B4-BE49-F238E27FC236}">
+                <a16:creationId xmlns:a16="http://schemas.microsoft.com/office/drawing/2014/main" id="{AB8106FF-636B-AB03-E5F0-D78D50008D2F}"/>
+              </a:ext>
+            </a:extLst>
+          </p:cNvPr>
+          <p:cNvCxnSpPr>
+            <a:stCxn id="61" idx="3"/>
+          </p:cNvCxnSpPr>
+          <p:nvPr/>
+        </p:nvCxnSpPr>
+        <p:spPr>
+          <a:xfrm>
+            <a:off x="6231722" y="3269569"/>
+            <a:ext cx="0" cy="1094642"/>
+          </a:xfrm>
+          <a:prstGeom prst="straightConnector1">
+            <a:avLst/>
+          </a:prstGeom>
+          <a:ln>
+            <a:prstDash val="lgDash"/>
+            <a:tailEnd type="triangle"/>
+          </a:ln>
+        </p:spPr>
+        <p:style>
+          <a:lnRef idx="2">
+            <a:schemeClr val="accent1"/>
+          </a:lnRef>
+          <a:fillRef idx="0">
+            <a:schemeClr val="accent1"/>
+          </a:fillRef>
+          <a:effectRef idx="1">
+            <a:schemeClr val="accent1"/>
+          </a:effectRef>
+          <a:fontRef idx="minor">
+            <a:schemeClr val="tx1"/>
+          </a:fontRef>
+        </p:style>
+      </p:cxnSp>
     </p:spTree>
     <p:extLst>
       <p:ext uri="{BB962C8B-B14F-4D97-AF65-F5344CB8AC3E}">
@@ -33735,46 +32433,46 @@
           <a:lstStyle/>
           <a:p>
             <a:r>
-              <a:rPr sz="2800" dirty="0"/>
+              <a:rPr sz="2800"/>
               <a:t>Methodology: </a:t>
             </a:r>
             <a:r>
-              <a:rPr lang="en-GB" sz="2800" dirty="0"/>
+              <a:rPr lang="en-GB" sz="2800"/>
               <a:t>Data</a:t>
             </a:r>
             <a:r>
-              <a:rPr lang="en-US" altLang="zh-CN" sz="2800" dirty="0"/>
+              <a:rPr lang="en-US" altLang="zh-CN" sz="2800"/>
               <a:t>s</a:t>
             </a:r>
             <a:r>
-              <a:rPr lang="en-GB" sz="2800" dirty="0"/>
+              <a:rPr lang="en-GB" sz="2800"/>
               <a:t>et</a:t>
             </a:r>
             <a:r>
-              <a:rPr lang="zh-CN" altLang="en-US" sz="2800" dirty="0"/>
+              <a:rPr lang="zh-CN" altLang="en-US" sz="2800"/>
               <a:t> </a:t>
             </a:r>
             <a:r>
-              <a:rPr lang="en-US" altLang="zh-CN" sz="2800" dirty="0"/>
+              <a:rPr lang="en-US" altLang="zh-CN" sz="2800"/>
               <a:t>&amp;</a:t>
             </a:r>
             <a:r>
-              <a:rPr lang="zh-CN" altLang="en-US" sz="2800" dirty="0"/>
+              <a:rPr lang="zh-CN" altLang="en-US" sz="2800"/>
               <a:t> </a:t>
             </a:r>
             <a:r>
-              <a:rPr lang="en-GB" sz="2800" dirty="0"/>
+              <a:rPr lang="en-GB" sz="2800"/>
               <a:t>Feature Reduction</a:t>
             </a:r>
             <a:r>
-              <a:rPr lang="zh-CN" altLang="en-US" sz="2800" dirty="0"/>
+              <a:rPr lang="zh-CN" altLang="en-US" sz="2800"/>
               <a:t> </a:t>
             </a:r>
             <a:r>
-              <a:rPr lang="en-US" altLang="zh-CN" sz="2800" dirty="0"/>
+              <a:rPr lang="en-US" altLang="zh-CN" sz="2800"/>
               <a:t>technique</a:t>
             </a:r>
-            <a:endParaRPr sz="2800" dirty="0"/>
+            <a:endParaRPr sz="2800"/>
           </a:p>
         </p:txBody>
       </p:sp>
@@ -33911,8 +32609,8 @@
         </p:nvSpPr>
         <p:spPr>
           <a:xfrm>
-            <a:off x="566057" y="4430486"/>
-            <a:ext cx="8262257" cy="2031325"/>
+            <a:off x="457200" y="4430486"/>
+            <a:ext cx="5137266" cy="2585323"/>
           </a:xfrm>
           <a:prstGeom prst="rect">
             <a:avLst/>
@@ -34001,6 +32699,10 @@
               <a:t>ResNeXt</a:t>
             </a:r>
             <a:r>
+              <a:rPr lang="en-US" altLang="zh-CN" dirty="0"/>
+              <a:t>1D</a:t>
+            </a:r>
+            <a:r>
               <a:rPr lang="en-GB" dirty="0"/>
               <a:t> (deep representation)</a:t>
             </a:r>
@@ -34029,6 +32731,463 @@
 </file>
 
 <file path=ppt/slides/slide8.xml><?xml version="1.0" encoding="utf-8"?>
+<p:sld xmlns:a="http://schemas.openxmlformats.org/drawingml/2006/main" xmlns:r="http://schemas.openxmlformats.org/officeDocument/2006/relationships" xmlns:p="http://schemas.openxmlformats.org/presentationml/2006/main">
+  <p:cSld>
+    <p:spTree>
+      <p:nvGrpSpPr>
+        <p:cNvPr id="1" name="">
+          <a:extLst>
+            <a:ext uri="{FF2B5EF4-FFF2-40B4-BE49-F238E27FC236}">
+              <a16:creationId xmlns:a16="http://schemas.microsoft.com/office/drawing/2014/main" id="{12F36BD2-2838-10E4-46A3-ACF0B24D4F67}"/>
+            </a:ext>
+          </a:extLst>
+        </p:cNvPr>
+        <p:cNvGrpSpPr/>
+        <p:nvPr/>
+      </p:nvGrpSpPr>
+      <p:grpSpPr>
+        <a:xfrm>
+          <a:off x="0" y="0"/>
+          <a:ext cx="0" cy="0"/>
+          <a:chOff x="0" y="0"/>
+          <a:chExt cx="0" cy="0"/>
+        </a:xfrm>
+      </p:grpSpPr>
+      <p:sp>
+        <p:nvSpPr>
+          <p:cNvPr id="2" name="Title 1">
+            <a:extLst>
+              <a:ext uri="{FF2B5EF4-FFF2-40B4-BE49-F238E27FC236}">
+                <a16:creationId xmlns:a16="http://schemas.microsoft.com/office/drawing/2014/main" id="{BA6DA214-7C1F-B658-94C5-E81F9C6EE8F1}"/>
+              </a:ext>
+            </a:extLst>
+          </p:cNvPr>
+          <p:cNvSpPr>
+            <a:spLocks noGrp="1"/>
+          </p:cNvSpPr>
+          <p:nvPr>
+            <p:ph type="title"/>
+          </p:nvPr>
+        </p:nvSpPr>
+        <p:spPr>
+          <a:xfrm>
+            <a:off x="394677" y="0"/>
+            <a:ext cx="8229600" cy="1143000"/>
+          </a:xfrm>
+        </p:spPr>
+        <p:txBody>
+          <a:bodyPr>
+            <a:normAutofit/>
+          </a:bodyPr>
+          <a:lstStyle/>
+          <a:p>
+            <a:r>
+              <a:rPr sz="2800" dirty="0"/>
+              <a:t>Methodology: </a:t>
+            </a:r>
+            <a:r>
+              <a:rPr lang="en-GB" sz="2800" dirty="0"/>
+              <a:t>Data</a:t>
+            </a:r>
+            <a:r>
+              <a:rPr lang="en-US" altLang="zh-CN" sz="2800" dirty="0"/>
+              <a:t>s</a:t>
+            </a:r>
+            <a:r>
+              <a:rPr lang="en-GB" sz="2800" dirty="0"/>
+              <a:t>et</a:t>
+            </a:r>
+            <a:r>
+              <a:rPr lang="zh-CN" altLang="en-US" sz="2800" dirty="0"/>
+              <a:t> </a:t>
+            </a:r>
+            <a:r>
+              <a:rPr lang="en-US" altLang="zh-CN" sz="2800" dirty="0"/>
+              <a:t>&amp;</a:t>
+            </a:r>
+            <a:r>
+              <a:rPr lang="zh-CN" altLang="en-US" sz="2800" dirty="0"/>
+              <a:t> </a:t>
+            </a:r>
+            <a:r>
+              <a:rPr lang="en-GB" sz="2800" dirty="0"/>
+              <a:t>Feature Reduction</a:t>
+            </a:r>
+            <a:r>
+              <a:rPr lang="zh-CN" altLang="en-US" sz="2800" dirty="0"/>
+              <a:t> </a:t>
+            </a:r>
+            <a:r>
+              <a:rPr lang="en-US" altLang="zh-CN" sz="2800" dirty="0"/>
+              <a:t>technique</a:t>
+            </a:r>
+            <a:endParaRPr sz="2800" dirty="0"/>
+          </a:p>
+        </p:txBody>
+      </p:sp>
+      <p:sp>
+        <p:nvSpPr>
+          <p:cNvPr id="7" name="TextBox 6">
+            <a:extLst>
+              <a:ext uri="{FF2B5EF4-FFF2-40B4-BE49-F238E27FC236}">
+                <a16:creationId xmlns:a16="http://schemas.microsoft.com/office/drawing/2014/main" id="{6C7FE30B-EC05-CC7E-DB7D-275D31A6649B}"/>
+              </a:ext>
+            </a:extLst>
+          </p:cNvPr>
+          <p:cNvSpPr txBox="1"/>
+          <p:nvPr/>
+        </p:nvSpPr>
+        <p:spPr>
+          <a:xfrm>
+            <a:off x="4979324" y="1030172"/>
+            <a:ext cx="3944565" cy="6001643"/>
+          </a:xfrm>
+          <a:prstGeom prst="rect">
+            <a:avLst/>
+          </a:prstGeom>
+          <a:noFill/>
+        </p:spPr>
+        <p:txBody>
+          <a:bodyPr wrap="square">
+            <a:spAutoFit/>
+          </a:bodyPr>
+          <a:lstStyle/>
+          <a:p>
+            <a:r>
+              <a:rPr lang="en-GB" sz="1600" dirty="0" err="1"/>
+              <a:t>ResNeXt</a:t>
+            </a:r>
+            <a:r>
+              <a:rPr lang="en-US" altLang="zh-CN" sz="1600" dirty="0"/>
+              <a:t>1D</a:t>
+            </a:r>
+            <a:r>
+              <a:rPr lang="zh-CN" altLang="en-US" sz="1600" dirty="0"/>
+              <a:t> </a:t>
+            </a:r>
+            <a:r>
+              <a:rPr lang="en-GB" sz="1600" dirty="0"/>
+              <a:t>Feature Extraction</a:t>
+            </a:r>
+          </a:p>
+          <a:p>
+            <a:r>
+              <a:rPr lang="en-GB" sz="1600" dirty="0"/>
+              <a:t>Reshape input</a:t>
+            </a:r>
+          </a:p>
+          <a:p>
+            <a:r>
+              <a:rPr lang="en-GB" sz="1600" dirty="0"/>
+              <a:t>    Transform X from [N, D] to [N, 1, D]</a:t>
+            </a:r>
+          </a:p>
+          <a:p>
+            <a:endParaRPr lang="en-GB" sz="1600" dirty="0"/>
+          </a:p>
+          <a:p>
+            <a:r>
+              <a:rPr lang="en-GB" sz="1600" dirty="0"/>
+              <a:t>    Pass batch through stem layer</a:t>
+            </a:r>
+          </a:p>
+          <a:p>
+            <a:r>
+              <a:rPr lang="en-GB" sz="1600" dirty="0"/>
+              <a:t>        - Conv1D(1 → 64, kernel=4, stride=2, padding=3)</a:t>
+            </a:r>
+          </a:p>
+          <a:p>
+            <a:r>
+              <a:rPr lang="en-GB" sz="1600" dirty="0"/>
+              <a:t>        - BatchNorm1D</a:t>
+            </a:r>
+          </a:p>
+          <a:p>
+            <a:r>
+              <a:rPr lang="en-GB" sz="1600" dirty="0"/>
+              <a:t>        - </a:t>
+            </a:r>
+            <a:r>
+              <a:rPr lang="en-GB" sz="1600" dirty="0" err="1"/>
+              <a:t>ReLU</a:t>
+            </a:r>
+            <a:endParaRPr lang="en-GB" sz="1600" dirty="0"/>
+          </a:p>
+          <a:p>
+            <a:r>
+              <a:rPr lang="en-GB" sz="1600" dirty="0"/>
+              <a:t>        - MaxPool1D(kernel=3, stride=2, padding=1)</a:t>
+            </a:r>
+          </a:p>
+          <a:p>
+            <a:endParaRPr lang="en-GB" sz="1600" dirty="0"/>
+          </a:p>
+          <a:p>
+            <a:r>
+              <a:rPr lang="en-GB" sz="1600" dirty="0"/>
+              <a:t>    Pass through Layer 1 and Layer 2</a:t>
+            </a:r>
+          </a:p>
+          <a:p>
+            <a:r>
+              <a:rPr lang="en-GB" sz="1600" dirty="0"/>
+              <a:t>        - ResNeXt1D Block</a:t>
+            </a:r>
+          </a:p>
+          <a:p>
+            <a:r>
+              <a:rPr lang="en-GB" sz="1600" dirty="0"/>
+              <a:t>        - ResNeXt1D Block</a:t>
+            </a:r>
+          </a:p>
+          <a:p>
+            <a:endParaRPr lang="en-GB" sz="1600" dirty="0"/>
+          </a:p>
+          <a:p>
+            <a:r>
+              <a:rPr lang="en-GB" sz="1600" dirty="0"/>
+              <a:t>    Pass through head</a:t>
+            </a:r>
+          </a:p>
+          <a:p>
+            <a:r>
+              <a:rPr lang="en-GB" sz="1600" dirty="0"/>
+              <a:t>        - Adaptive Average Pooling</a:t>
+            </a:r>
+          </a:p>
+          <a:p>
+            <a:r>
+              <a:rPr lang="en-GB" sz="1600" dirty="0"/>
+              <a:t>        - Flatten</a:t>
+            </a:r>
+          </a:p>
+          <a:p>
+            <a:r>
+              <a:rPr lang="en-GB" sz="1600" dirty="0"/>
+              <a:t>        - Linear layer to </a:t>
+            </a:r>
+            <a:r>
+              <a:rPr lang="en-GB" sz="1600" dirty="0" err="1"/>
+              <a:t>embedding_dim</a:t>
+            </a:r>
+            <a:endParaRPr lang="en-GB" sz="1600" dirty="0"/>
+          </a:p>
+          <a:p>
+            <a:endParaRPr lang="en-GB" sz="1600" dirty="0"/>
+          </a:p>
+          <a:p>
+            <a:r>
+              <a:rPr lang="en-GB" sz="1600" dirty="0"/>
+              <a:t>Output: Embedding matrix Z (n × </a:t>
+            </a:r>
+            <a:r>
+              <a:rPr lang="en-GB" sz="1600" dirty="0" err="1"/>
+              <a:t>embedding_dim</a:t>
+            </a:r>
+            <a:r>
+              <a:rPr lang="en-GB" sz="1600" dirty="0"/>
+              <a:t>)</a:t>
+            </a:r>
+          </a:p>
+          <a:p>
+            <a:endParaRPr lang="en-GB" sz="1600" dirty="0"/>
+          </a:p>
+        </p:txBody>
+      </p:sp>
+      <p:sp>
+        <p:nvSpPr>
+          <p:cNvPr id="4" name="TextBox 3">
+            <a:extLst>
+              <a:ext uri="{FF2B5EF4-FFF2-40B4-BE49-F238E27FC236}">
+                <a16:creationId xmlns:a16="http://schemas.microsoft.com/office/drawing/2014/main" id="{4A46B1AD-DCA5-D506-A98C-72B83CB0B721}"/>
+              </a:ext>
+            </a:extLst>
+          </p:cNvPr>
+          <p:cNvSpPr txBox="1"/>
+          <p:nvPr/>
+        </p:nvSpPr>
+        <p:spPr>
+          <a:xfrm>
+            <a:off x="361224" y="1085927"/>
+            <a:ext cx="4177323" cy="4524315"/>
+          </a:xfrm>
+          <a:prstGeom prst="rect">
+            <a:avLst/>
+          </a:prstGeom>
+          <a:noFill/>
+        </p:spPr>
+        <p:txBody>
+          <a:bodyPr wrap="square">
+            <a:spAutoFit/>
+          </a:bodyPr>
+          <a:lstStyle/>
+          <a:p>
+            <a:r>
+              <a:rPr lang="en-GB" dirty="0" err="1"/>
+              <a:t>AutoEncoder</a:t>
+            </a:r>
+            <a:r>
+              <a:rPr lang="en-GB" dirty="0"/>
+              <a:t> Feature Extraction</a:t>
+            </a:r>
+          </a:p>
+          <a:p>
+            <a:endParaRPr lang="en-GB" dirty="0"/>
+          </a:p>
+          <a:p>
+            <a:r>
+              <a:rPr lang="en-GB" dirty="0"/>
+              <a:t>Input: Flow-level data X (n × d)</a:t>
+            </a:r>
+          </a:p>
+          <a:p>
+            <a:endParaRPr lang="en-GB" dirty="0"/>
+          </a:p>
+          <a:p>
+            <a:r>
+              <a:rPr lang="en-GB" dirty="0"/>
+              <a:t>Pass X through the encoder</a:t>
+            </a:r>
+          </a:p>
+          <a:p>
+            <a:r>
+              <a:rPr lang="en-GB" dirty="0"/>
+              <a:t>   - Linear (36-&gt;64)</a:t>
+            </a:r>
+          </a:p>
+          <a:p>
+            <a:r>
+              <a:rPr lang="en-GB" dirty="0"/>
+              <a:t>   - </a:t>
+            </a:r>
+            <a:r>
+              <a:rPr lang="en-GB" dirty="0" err="1"/>
+              <a:t>ReLU</a:t>
+            </a:r>
+            <a:r>
+              <a:rPr lang="en-GB" dirty="0"/>
+              <a:t> </a:t>
+            </a:r>
+          </a:p>
+          <a:p>
+            <a:r>
+              <a:rPr lang="en-GB" dirty="0"/>
+              <a:t>   - Linear (64-&gt;32) </a:t>
+            </a:r>
+          </a:p>
+          <a:p>
+            <a:r>
+              <a:rPr lang="en-GB" dirty="0"/>
+              <a:t>   - </a:t>
+            </a:r>
+            <a:r>
+              <a:rPr lang="en-GB" dirty="0" err="1"/>
+              <a:t>ReLU</a:t>
+            </a:r>
+            <a:r>
+              <a:rPr lang="en-GB" dirty="0"/>
+              <a:t> </a:t>
+            </a:r>
+          </a:p>
+          <a:p>
+            <a:r>
+              <a:rPr lang="en-GB" dirty="0"/>
+              <a:t>   </a:t>
+            </a:r>
+          </a:p>
+          <a:p>
+            <a:r>
+              <a:rPr lang="en-GB" dirty="0"/>
+              <a:t>   Encode X into low-dimensional latent vectors</a:t>
+            </a:r>
+          </a:p>
+          <a:p>
+            <a:r>
+              <a:rPr lang="en-GB" dirty="0"/>
+              <a:t> - Linear (32 -&gt; </a:t>
+            </a:r>
+            <a:r>
+              <a:rPr lang="en-GB" dirty="0" err="1"/>
+              <a:t>embedding_dim</a:t>
+            </a:r>
+            <a:r>
+              <a:rPr lang="en-GB" dirty="0"/>
+              <a:t>)</a:t>
+            </a:r>
+          </a:p>
+          <a:p>
+            <a:endParaRPr lang="en-GB" dirty="0"/>
+          </a:p>
+          <a:p>
+            <a:r>
+              <a:rPr lang="en-GB" dirty="0"/>
+              <a:t>Output: Embedding matrix Z (n × </a:t>
+            </a:r>
+            <a:r>
+              <a:rPr lang="en-GB" dirty="0" err="1"/>
+              <a:t>embedding_dim</a:t>
+            </a:r>
+            <a:r>
+              <a:rPr lang="en-GB" dirty="0"/>
+              <a:t>)</a:t>
+            </a:r>
+          </a:p>
+        </p:txBody>
+      </p:sp>
+      <p:cxnSp>
+        <p:nvCxnSpPr>
+          <p:cNvPr id="9" name="Straight Connector 8">
+            <a:extLst>
+              <a:ext uri="{FF2B5EF4-FFF2-40B4-BE49-F238E27FC236}">
+                <a16:creationId xmlns:a16="http://schemas.microsoft.com/office/drawing/2014/main" id="{107EBE3E-0E8D-DE9E-00AF-95D6517658CC}"/>
+              </a:ext>
+            </a:extLst>
+          </p:cNvPr>
+          <p:cNvCxnSpPr/>
+          <p:nvPr/>
+        </p:nvCxnSpPr>
+        <p:spPr>
+          <a:xfrm>
+            <a:off x="4360127" y="1052474"/>
+            <a:ext cx="0" cy="5727469"/>
+          </a:xfrm>
+          <a:prstGeom prst="line">
+            <a:avLst/>
+          </a:prstGeom>
+          <a:ln>
+            <a:prstDash val="lgDash"/>
+          </a:ln>
+        </p:spPr>
+        <p:style>
+          <a:lnRef idx="2">
+            <a:schemeClr val="accent1"/>
+          </a:lnRef>
+          <a:fillRef idx="0">
+            <a:schemeClr val="accent1"/>
+          </a:fillRef>
+          <a:effectRef idx="1">
+            <a:schemeClr val="accent1"/>
+          </a:effectRef>
+          <a:fontRef idx="minor">
+            <a:schemeClr val="tx1"/>
+          </a:fontRef>
+        </p:style>
+      </p:cxnSp>
+    </p:spTree>
+    <p:extLst>
+      <p:ext uri="{BB962C8B-B14F-4D97-AF65-F5344CB8AC3E}">
+        <p14:creationId xmlns:p14="http://schemas.microsoft.com/office/powerpoint/2010/main" val="684900568"/>
+      </p:ext>
+    </p:extLst>
+  </p:cSld>
+  <p:clrMapOvr>
+    <a:masterClrMapping/>
+  </p:clrMapOvr>
+</p:sld>
+</file>
+
+<file path=ppt/slides/slide9.xml><?xml version="1.0" encoding="utf-8"?>
 <p:sld xmlns:a="http://schemas.openxmlformats.org/drawingml/2006/main" xmlns:r="http://schemas.openxmlformats.org/officeDocument/2006/relationships" xmlns:p="http://schemas.openxmlformats.org/presentationml/2006/main">
   <p:cSld>
     <p:spTree>
@@ -34082,97 +33241,20 @@
           <a:lstStyle/>
           <a:p>
             <a:r>
-              <a:rPr lang="en-GB" dirty="0"/>
+              <a:rPr lang="en-GB"/>
               <a:t>Compare FS, PCA, Autoencoder</a:t>
             </a:r>
           </a:p>
           <a:p>
             <a:r>
-              <a:rPr lang="en-GB" dirty="0"/>
+              <a:rPr lang="en-GB"/>
               <a:t>Accuracy / Precision / Recall results</a:t>
             </a:r>
           </a:p>
           <a:p>
             <a:r>
-              <a:rPr lang="en-GB" dirty="0"/>
+              <a:rPr lang="en-GB"/>
               <a:t>Performance differences observed</a:t>
-            </a:r>
-          </a:p>
-        </p:txBody>
-      </p:sp>
-    </p:spTree>
-  </p:cSld>
-  <p:clrMapOvr>
-    <a:masterClrMapping/>
-  </p:clrMapOvr>
-</p:sld>
-</file>
-
-<file path=ppt/slides/slide9.xml><?xml version="1.0" encoding="utf-8"?>
-<p:sld xmlns:a="http://schemas.openxmlformats.org/drawingml/2006/main" xmlns:r="http://schemas.openxmlformats.org/officeDocument/2006/relationships" xmlns:p="http://schemas.openxmlformats.org/presentationml/2006/main">
-  <p:cSld>
-    <p:spTree>
-      <p:nvGrpSpPr>
-        <p:cNvPr id="1" name=""/>
-        <p:cNvGrpSpPr/>
-        <p:nvPr/>
-      </p:nvGrpSpPr>
-      <p:grpSpPr>
-        <a:xfrm>
-          <a:off x="0" y="0"/>
-          <a:ext cx="0" cy="0"/>
-          <a:chOff x="0" y="0"/>
-          <a:chExt cx="0" cy="0"/>
-        </a:xfrm>
-      </p:grpSpPr>
-      <p:sp>
-        <p:nvSpPr>
-          <p:cNvPr id="2" name="Title 1"/>
-          <p:cNvSpPr>
-            <a:spLocks noGrp="1"/>
-          </p:cNvSpPr>
-          <p:nvPr>
-            <p:ph type="title"/>
-          </p:nvPr>
-        </p:nvSpPr>
-        <p:spPr/>
-        <p:txBody>
-          <a:bodyPr/>
-          <a:lstStyle/>
-          <a:p>
-            <a:r>
-              <a:t>Results: Resource &amp; Efficiency</a:t>
-            </a:r>
-          </a:p>
-        </p:txBody>
-      </p:sp>
-      <p:sp>
-        <p:nvSpPr>
-          <p:cNvPr id="3" name="Content Placeholder 2"/>
-          <p:cNvSpPr>
-            <a:spLocks noGrp="1"/>
-          </p:cNvSpPr>
-          <p:nvPr>
-            <p:ph idx="1"/>
-          </p:nvPr>
-        </p:nvSpPr>
-        <p:spPr/>
-        <p:txBody>
-          <a:bodyPr/>
-          <a:lstStyle/>
-          <a:p>
-            <a:r>
-              <a:t>CPU and memory usage comparison</a:t>
-            </a:r>
-          </a:p>
-          <a:p>
-            <a:r>
-              <a:t>Processing time analysis</a:t>
-            </a:r>
-          </a:p>
-          <a:p>
-            <a:r>
-              <a:t>Identify most efficient method for edge</a:t>
             </a:r>
           </a:p>
         </p:txBody>

--- a/Presentation/IoMT_IDS_Presentation.pptx
+++ b/Presentation/IoMT_IDS_Presentation.pptx
@@ -5,7 +5,7 @@
     <p:sldMasterId id="2147483648" r:id="rId1"/>
   </p:sldMasterIdLst>
   <p:notesMasterIdLst>
-    <p:notesMasterId r:id="rId13"/>
+    <p:notesMasterId r:id="rId15"/>
   </p:notesMasterIdLst>
   <p:sldIdLst>
     <p:sldId id="256" r:id="rId2"/>
@@ -17,8 +17,10 @@
     <p:sldId id="261" r:id="rId8"/>
     <p:sldId id="272" r:id="rId9"/>
     <p:sldId id="263" r:id="rId10"/>
-    <p:sldId id="265" r:id="rId11"/>
-    <p:sldId id="266" r:id="rId12"/>
+    <p:sldId id="273" r:id="rId11"/>
+    <p:sldId id="274" r:id="rId12"/>
+    <p:sldId id="265" r:id="rId13"/>
+    <p:sldId id="266" r:id="rId14"/>
   </p:sldIdLst>
   <p:sldSz cx="9144000" cy="6858000" type="screen4x3"/>
   <p:notesSz cx="6858000" cy="9144000"/>
@@ -139,7 +141,7 @@
 <file path=ppt/revisionInfo.xml><?xml version="1.0" encoding="utf-8"?>
 <p1510:revInfo xmlns:a="http://schemas.openxmlformats.org/drawingml/2006/main" xmlns:r="http://schemas.openxmlformats.org/officeDocument/2006/relationships" xmlns:p1510="http://schemas.microsoft.com/office/powerpoint/2015/10/main">
   <p1510:revLst>
-    <p1510:client id="{7BF04AB4-6846-4849-A1B8-6A167A3B7532}" v="439" dt="2026-03-21T18:34:36.950"/>
+    <p1510:client id="{7BF04AB4-6846-4849-A1B8-6A167A3B7532}" v="450" dt="2026-03-21T20:43:58.717"/>
   </p1510:revLst>
 </p1510:revInfo>
 </file>
@@ -149,7 +151,7 @@
   <pc:docChgLst>
     <pc:chgData name="耀泉 马" userId="19e30af8d5659de2" providerId="LiveId" clId="{C3594856-CEDA-5129-B2AF-7962E3CA4CA3}"/>
     <pc:docChg chg="undo custSel addSld delSld modSld sldOrd">
-      <pc:chgData name="耀泉 马" userId="19e30af8d5659de2" providerId="LiveId" clId="{C3594856-CEDA-5129-B2AF-7962E3CA4CA3}" dt="2026-03-21T18:35:33.059" v="3525" actId="1037"/>
+      <pc:chgData name="耀泉 马" userId="19e30af8d5659de2" providerId="LiveId" clId="{C3594856-CEDA-5129-B2AF-7962E3CA4CA3}" dt="2026-03-21T20:43:58.717" v="3569" actId="20577"/>
       <pc:docMkLst>
         <pc:docMk/>
       </pc:docMkLst>
@@ -367,7 +369,7 @@
         </pc:graphicFrameChg>
       </pc:sldChg>
       <pc:sldChg chg="addSp delSp modSp mod ord modNotesTx">
-        <pc:chgData name="耀泉 马" userId="19e30af8d5659de2" providerId="LiveId" clId="{C3594856-CEDA-5129-B2AF-7962E3CA4CA3}" dt="2026-03-21T18:23:43.642" v="3382" actId="313"/>
+        <pc:chgData name="耀泉 马" userId="19e30af8d5659de2" providerId="LiveId" clId="{C3594856-CEDA-5129-B2AF-7962E3CA4CA3}" dt="2026-03-21T20:36:25.152" v="3542" actId="20577"/>
         <pc:sldMkLst>
           <pc:docMk/>
           <pc:sldMk cId="0" sldId="261"/>
@@ -389,7 +391,7 @@
           </ac:spMkLst>
         </pc:spChg>
         <pc:spChg chg="add mod">
-          <ac:chgData name="耀泉 马" userId="19e30af8d5659de2" providerId="LiveId" clId="{C3594856-CEDA-5129-B2AF-7962E3CA4CA3}" dt="2026-03-21T17:29:09.431" v="3262" actId="20577"/>
+          <ac:chgData name="耀泉 马" userId="19e30af8d5659de2" providerId="LiveId" clId="{C3594856-CEDA-5129-B2AF-7962E3CA4CA3}" dt="2026-03-21T20:36:25.152" v="3542" actId="20577"/>
           <ac:spMkLst>
             <pc:docMk/>
             <pc:sldMk cId="0" sldId="261"/>
@@ -413,20 +415,44 @@
           </ac:picMkLst>
         </pc:picChg>
       </pc:sldChg>
-      <pc:sldChg chg="modSp mod">
-        <pc:chgData name="耀泉 马" userId="19e30af8d5659de2" providerId="LiveId" clId="{C3594856-CEDA-5129-B2AF-7962E3CA4CA3}" dt="2026-03-19T15:16:36.398" v="3013" actId="20577"/>
+      <pc:sldChg chg="addSp delSp modSp mod setBg">
+        <pc:chgData name="耀泉 马" userId="19e30af8d5659de2" providerId="LiveId" clId="{C3594856-CEDA-5129-B2AF-7962E3CA4CA3}" dt="2026-03-21T20:43:40.961" v="3562" actId="1076"/>
         <pc:sldMkLst>
           <pc:docMk/>
           <pc:sldMk cId="0" sldId="263"/>
         </pc:sldMkLst>
         <pc:spChg chg="mod">
-          <ac:chgData name="耀泉 马" userId="19e30af8d5659de2" providerId="LiveId" clId="{C3594856-CEDA-5129-B2AF-7962E3CA4CA3}" dt="2026-03-19T15:16:36.398" v="3013" actId="20577"/>
+          <ac:chgData name="耀泉 马" userId="19e30af8d5659de2" providerId="LiveId" clId="{C3594856-CEDA-5129-B2AF-7962E3CA4CA3}" dt="2026-03-21T20:36:00.261" v="3532" actId="26606"/>
+          <ac:spMkLst>
+            <pc:docMk/>
+            <pc:sldMk cId="0" sldId="263"/>
+            <ac:spMk id="2" creationId="{00000000-0000-0000-0000-000000000000}"/>
+          </ac:spMkLst>
+        </pc:spChg>
+        <pc:spChg chg="del mod">
+          <ac:chgData name="耀泉 马" userId="19e30af8d5659de2" providerId="LiveId" clId="{C3594856-CEDA-5129-B2AF-7962E3CA4CA3}" dt="2026-03-21T20:35:51.651" v="3528" actId="478"/>
           <ac:spMkLst>
             <pc:docMk/>
             <pc:sldMk cId="0" sldId="263"/>
             <ac:spMk id="3" creationId="{00000000-0000-0000-0000-000000000000}"/>
           </ac:spMkLst>
         </pc:spChg>
+        <pc:spChg chg="add">
+          <ac:chgData name="耀泉 马" userId="19e30af8d5659de2" providerId="LiveId" clId="{C3594856-CEDA-5129-B2AF-7962E3CA4CA3}" dt="2026-03-21T20:36:00.261" v="3532" actId="26606"/>
+          <ac:spMkLst>
+            <pc:docMk/>
+            <pc:sldMk cId="0" sldId="263"/>
+            <ac:spMk id="9" creationId="{A4AC5506-6312-4701-8D3C-40187889A947}"/>
+          </ac:spMkLst>
+        </pc:spChg>
+        <pc:picChg chg="add mod">
+          <ac:chgData name="耀泉 马" userId="19e30af8d5659de2" providerId="LiveId" clId="{C3594856-CEDA-5129-B2AF-7962E3CA4CA3}" dt="2026-03-21T20:43:40.961" v="3562" actId="1076"/>
+          <ac:picMkLst>
+            <pc:docMk/>
+            <pc:sldMk cId="0" sldId="263"/>
+            <ac:picMk id="4" creationId="{DAA2CFB1-11FC-6602-E404-BCF9B9E77477}"/>
+          </ac:picMkLst>
+        </pc:picChg>
       </pc:sldChg>
       <pc:sldChg chg="modSp del mod">
         <pc:chgData name="耀泉 马" userId="19e30af8d5659de2" providerId="LiveId" clId="{C3594856-CEDA-5129-B2AF-7962E3CA4CA3}" dt="2026-03-21T16:21:59.799" v="3128" actId="2696"/>
@@ -443,20 +469,60 @@
           </ac:spMkLst>
         </pc:spChg>
       </pc:sldChg>
-      <pc:sldChg chg="modSp mod">
-        <pc:chgData name="耀泉 马" userId="19e30af8d5659de2" providerId="LiveId" clId="{C3594856-CEDA-5129-B2AF-7962E3CA4CA3}" dt="2026-03-19T15:25:41.900" v="3029" actId="27636"/>
+      <pc:sldChg chg="addSp delSp modSp mod setBg">
+        <pc:chgData name="耀泉 马" userId="19e30af8d5659de2" providerId="LiveId" clId="{C3594856-CEDA-5129-B2AF-7962E3CA4CA3}" dt="2026-03-21T20:43:58.717" v="3569" actId="20577"/>
         <pc:sldMkLst>
           <pc:docMk/>
           <pc:sldMk cId="0" sldId="265"/>
         </pc:sldMkLst>
         <pc:spChg chg="mod">
-          <ac:chgData name="耀泉 马" userId="19e30af8d5659de2" providerId="LiveId" clId="{C3594856-CEDA-5129-B2AF-7962E3CA4CA3}" dt="2026-03-19T15:25:41.900" v="3029" actId="27636"/>
+          <ac:chgData name="耀泉 马" userId="19e30af8d5659de2" providerId="LiveId" clId="{C3594856-CEDA-5129-B2AF-7962E3CA4CA3}" dt="2026-03-21T20:43:51.197" v="3563" actId="26606"/>
+          <ac:spMkLst>
+            <pc:docMk/>
+            <pc:sldMk cId="0" sldId="265"/>
+            <ac:spMk id="2" creationId="{00000000-0000-0000-0000-000000000000}"/>
+          </ac:spMkLst>
+        </pc:spChg>
+        <pc:spChg chg="del mod">
+          <ac:chgData name="耀泉 马" userId="19e30af8d5659de2" providerId="LiveId" clId="{C3594856-CEDA-5129-B2AF-7962E3CA4CA3}" dt="2026-03-21T20:43:51.197" v="3563" actId="26606"/>
           <ac:spMkLst>
             <pc:docMk/>
             <pc:sldMk cId="0" sldId="265"/>
             <ac:spMk id="3" creationId="{00000000-0000-0000-0000-000000000000}"/>
           </ac:spMkLst>
         </pc:spChg>
+        <pc:spChg chg="add">
+          <ac:chgData name="耀泉 马" userId="19e30af8d5659de2" providerId="LiveId" clId="{C3594856-CEDA-5129-B2AF-7962E3CA4CA3}" dt="2026-03-21T20:43:51.197" v="3563" actId="26606"/>
+          <ac:spMkLst>
+            <pc:docMk/>
+            <pc:sldMk cId="0" sldId="265"/>
+            <ac:spMk id="9" creationId="{53B021B3-DE93-4AB7-8A18-CF5F1CED88B8}"/>
+          </ac:spMkLst>
+        </pc:spChg>
+        <pc:spChg chg="add">
+          <ac:chgData name="耀泉 马" userId="19e30af8d5659de2" providerId="LiveId" clId="{C3594856-CEDA-5129-B2AF-7962E3CA4CA3}" dt="2026-03-21T20:43:51.197" v="3563" actId="26606"/>
+          <ac:spMkLst>
+            <pc:docMk/>
+            <pc:sldMk cId="0" sldId="265"/>
+            <ac:spMk id="11" creationId="{52D502E5-F6B4-4D58-B4AE-FC466FF15EE8}"/>
+          </ac:spMkLst>
+        </pc:spChg>
+        <pc:spChg chg="add">
+          <ac:chgData name="耀泉 马" userId="19e30af8d5659de2" providerId="LiveId" clId="{C3594856-CEDA-5129-B2AF-7962E3CA4CA3}" dt="2026-03-21T20:43:51.197" v="3563" actId="26606"/>
+          <ac:spMkLst>
+            <pc:docMk/>
+            <pc:sldMk cId="0" sldId="265"/>
+            <ac:spMk id="13" creationId="{9DECDBF4-02B6-4BB4-B65B-B8107AD6A9E8}"/>
+          </ac:spMkLst>
+        </pc:spChg>
+        <pc:graphicFrameChg chg="add mod">
+          <ac:chgData name="耀泉 马" userId="19e30af8d5659de2" providerId="LiveId" clId="{C3594856-CEDA-5129-B2AF-7962E3CA4CA3}" dt="2026-03-21T20:43:58.717" v="3569" actId="20577"/>
+          <ac:graphicFrameMkLst>
+            <pc:docMk/>
+            <pc:sldMk cId="0" sldId="265"/>
+            <ac:graphicFrameMk id="5" creationId="{8229F03F-070E-65BB-A314-B6D801640DE9}"/>
+          </ac:graphicFrameMkLst>
+        </pc:graphicFrameChg>
       </pc:sldChg>
       <pc:sldChg chg="addSp delSp modSp add mod modAnim">
         <pc:chgData name="耀泉 马" userId="19e30af8d5659de2" providerId="LiveId" clId="{C3594856-CEDA-5129-B2AF-7962E3CA4CA3}" dt="2026-03-21T17:49:38.641" v="3335" actId="692"/>
@@ -2174,6 +2240,84 @@
           </ac:cxnSpMkLst>
         </pc:cxnChg>
       </pc:sldChg>
+      <pc:sldChg chg="addSp delSp modSp add mod setBg delDesignElem">
+        <pc:chgData name="耀泉 马" userId="19e30af8d5659de2" providerId="LiveId" clId="{C3594856-CEDA-5129-B2AF-7962E3CA4CA3}" dt="2026-03-21T20:42:45.077" v="3550" actId="1076"/>
+        <pc:sldMkLst>
+          <pc:docMk/>
+          <pc:sldMk cId="350239924" sldId="273"/>
+        </pc:sldMkLst>
+        <pc:spChg chg="add">
+          <ac:chgData name="耀泉 马" userId="19e30af8d5659de2" providerId="LiveId" clId="{C3594856-CEDA-5129-B2AF-7962E3CA4CA3}" dt="2026-03-21T20:42:05.475" v="3545" actId="26606"/>
+          <ac:spMkLst>
+            <pc:docMk/>
+            <pc:sldMk cId="350239924" sldId="273"/>
+            <ac:spMk id="6" creationId="{A4AC5506-6312-4701-8D3C-40187889A947}"/>
+          </ac:spMkLst>
+        </pc:spChg>
+        <pc:spChg chg="del">
+          <ac:chgData name="耀泉 马" userId="19e30af8d5659de2" providerId="LiveId" clId="{C3594856-CEDA-5129-B2AF-7962E3CA4CA3}" dt="2026-03-21T20:41:55.322" v="3544"/>
+          <ac:spMkLst>
+            <pc:docMk/>
+            <pc:sldMk cId="350239924" sldId="273"/>
+            <ac:spMk id="9" creationId="{47B08BE7-4113-CFD4-6149-0F7CD87686DB}"/>
+          </ac:spMkLst>
+        </pc:spChg>
+        <pc:picChg chg="add mod">
+          <ac:chgData name="耀泉 马" userId="19e30af8d5659de2" providerId="LiveId" clId="{C3594856-CEDA-5129-B2AF-7962E3CA4CA3}" dt="2026-03-21T20:42:45.077" v="3550" actId="1076"/>
+          <ac:picMkLst>
+            <pc:docMk/>
+            <pc:sldMk cId="350239924" sldId="273"/>
+            <ac:picMk id="3" creationId="{25BE9F14-AAAC-F3B5-9722-4E0629D91F9E}"/>
+          </ac:picMkLst>
+        </pc:picChg>
+        <pc:picChg chg="del">
+          <ac:chgData name="耀泉 马" userId="19e30af8d5659de2" providerId="LiveId" clId="{C3594856-CEDA-5129-B2AF-7962E3CA4CA3}" dt="2026-03-21T20:42:39.087" v="3546" actId="478"/>
+          <ac:picMkLst>
+            <pc:docMk/>
+            <pc:sldMk cId="350239924" sldId="273"/>
+            <ac:picMk id="4" creationId="{9CD23B94-81C0-D80E-DD4A-CE2F3487F73A}"/>
+          </ac:picMkLst>
+        </pc:picChg>
+      </pc:sldChg>
+      <pc:sldChg chg="addSp delSp modSp add mod setBg delDesignElem">
+        <pc:chgData name="耀泉 马" userId="19e30af8d5659de2" providerId="LiveId" clId="{C3594856-CEDA-5129-B2AF-7962E3CA4CA3}" dt="2026-03-21T20:43:30.782" v="3557" actId="1076"/>
+        <pc:sldMkLst>
+          <pc:docMk/>
+          <pc:sldMk cId="2818536614" sldId="274"/>
+        </pc:sldMkLst>
+        <pc:spChg chg="del">
+          <ac:chgData name="耀泉 马" userId="19e30af8d5659de2" providerId="LiveId" clId="{C3594856-CEDA-5129-B2AF-7962E3CA4CA3}" dt="2026-03-21T20:42:51.165" v="3552"/>
+          <ac:spMkLst>
+            <pc:docMk/>
+            <pc:sldMk cId="2818536614" sldId="274"/>
+            <ac:spMk id="6" creationId="{4D2B9041-1F8D-23EC-0579-37950B9604E9}"/>
+          </ac:spMkLst>
+        </pc:spChg>
+        <pc:spChg chg="add">
+          <ac:chgData name="耀泉 马" userId="19e30af8d5659de2" providerId="LiveId" clId="{C3594856-CEDA-5129-B2AF-7962E3CA4CA3}" dt="2026-03-21T20:42:59.449" v="3553" actId="26606"/>
+          <ac:spMkLst>
+            <pc:docMk/>
+            <pc:sldMk cId="2818536614" sldId="274"/>
+            <ac:spMk id="8" creationId="{A4AC5506-6312-4701-8D3C-40187889A947}"/>
+          </ac:spMkLst>
+        </pc:spChg>
+        <pc:picChg chg="del mod">
+          <ac:chgData name="耀泉 马" userId="19e30af8d5659de2" providerId="LiveId" clId="{C3594856-CEDA-5129-B2AF-7962E3CA4CA3}" dt="2026-03-21T20:43:26.586" v="3554" actId="478"/>
+          <ac:picMkLst>
+            <pc:docMk/>
+            <pc:sldMk cId="2818536614" sldId="274"/>
+            <ac:picMk id="3" creationId="{7F668C18-4893-9C0F-92E9-9372E309CEED}"/>
+          </ac:picMkLst>
+        </pc:picChg>
+        <pc:picChg chg="add mod">
+          <ac:chgData name="耀泉 马" userId="19e30af8d5659de2" providerId="LiveId" clId="{C3594856-CEDA-5129-B2AF-7962E3CA4CA3}" dt="2026-03-21T20:43:30.782" v="3557" actId="1076"/>
+          <ac:picMkLst>
+            <pc:docMk/>
+            <pc:sldMk cId="2818536614" sldId="274"/>
+            <ac:picMk id="4" creationId="{32C908D8-FD4A-23AD-FF3A-C520FE2AF206}"/>
+          </ac:picMkLst>
+        </pc:picChg>
+      </pc:sldChg>
     </pc:docChg>
   </pc:docChgLst>
 </pc:chgInfo>
@@ -4656,6 +4800,927 @@
     <dgm:txLinClrLst/>
     <dgm:txFillClrLst meth="repeat">
       <a:schemeClr val="tx1"/>
+    </dgm:txFillClrLst>
+    <dgm:txEffectClrLst/>
+  </dgm:styleLbl>
+</dgm:colorsDef>
+</file>
+
+<file path=ppt/diagrams/colors4.xml><?xml version="1.0" encoding="utf-8"?>
+<dgm:colorsDef xmlns:dgm="http://schemas.openxmlformats.org/drawingml/2006/diagram" xmlns:a="http://schemas.openxmlformats.org/drawingml/2006/main" uniqueId="urn:microsoft.com/office/officeart/2018/5/colors/Iconchunking_neutralicontext_colorful1">
+  <dgm:title val=""/>
+  <dgm:desc val=""/>
+  <dgm:catLst>
+    <dgm:cat type="colorful" pri="10100"/>
+  </dgm:catLst>
+  <dgm:styleLbl name="node0">
+    <dgm:fillClrLst meth="repeat">
+      <a:schemeClr val="accent1"/>
+    </dgm:fillClrLst>
+    <dgm:linClrLst meth="repeat">
+      <a:schemeClr val="lt1"/>
+    </dgm:linClrLst>
+    <dgm:effectClrLst/>
+    <dgm:txLinClrLst/>
+    <dgm:txFillClrLst/>
+    <dgm:txEffectClrLst/>
+  </dgm:styleLbl>
+  <dgm:styleLbl name="node1">
+    <dgm:fillClrLst meth="repeat">
+      <a:schemeClr val="bg1"/>
+    </dgm:fillClrLst>
+    <dgm:linClrLst meth="repeat">
+      <a:schemeClr val="lt1">
+        <a:alpha val="0"/>
+      </a:schemeClr>
+    </dgm:linClrLst>
+    <dgm:effectClrLst/>
+    <dgm:txLinClrLst/>
+    <dgm:txFillClrLst meth="repeat">
+      <a:schemeClr val="dk1"/>
+    </dgm:txFillClrLst>
+    <dgm:txEffectClrLst/>
+  </dgm:styleLbl>
+  <dgm:styleLbl name="alignNode1">
+    <dgm:fillClrLst meth="repeat">
+      <a:schemeClr val="accent2"/>
+      <a:schemeClr val="accent3"/>
+      <a:schemeClr val="accent4"/>
+      <a:schemeClr val="accent5"/>
+      <a:schemeClr val="accent6"/>
+    </dgm:fillClrLst>
+    <dgm:linClrLst meth="repeat">
+      <a:schemeClr val="accent2"/>
+      <a:schemeClr val="accent3"/>
+      <a:schemeClr val="accent4"/>
+      <a:schemeClr val="accent5"/>
+      <a:schemeClr val="accent6"/>
+    </dgm:linClrLst>
+    <dgm:effectClrLst/>
+    <dgm:txLinClrLst/>
+    <dgm:txFillClrLst/>
+    <dgm:txEffectClrLst/>
+  </dgm:styleLbl>
+  <dgm:styleLbl name="lnNode1">
+    <dgm:fillClrLst meth="repeat">
+      <a:schemeClr val="accent2"/>
+      <a:schemeClr val="accent3"/>
+      <a:schemeClr val="accent4"/>
+      <a:schemeClr val="accent5"/>
+      <a:schemeClr val="accent6"/>
+    </dgm:fillClrLst>
+    <dgm:linClrLst meth="repeat">
+      <a:schemeClr val="lt1"/>
+    </dgm:linClrLst>
+    <dgm:effectClrLst/>
+    <dgm:txLinClrLst/>
+    <dgm:txFillClrLst/>
+    <dgm:txEffectClrLst/>
+  </dgm:styleLbl>
+  <dgm:styleLbl name="vennNode1">
+    <dgm:fillClrLst meth="repeat">
+      <a:schemeClr val="accent2">
+        <a:alpha val="50000"/>
+      </a:schemeClr>
+      <a:schemeClr val="accent3">
+        <a:alpha val="50000"/>
+      </a:schemeClr>
+      <a:schemeClr val="accent4">
+        <a:alpha val="50000"/>
+      </a:schemeClr>
+      <a:schemeClr val="accent5">
+        <a:alpha val="50000"/>
+      </a:schemeClr>
+      <a:schemeClr val="accent6">
+        <a:alpha val="50000"/>
+      </a:schemeClr>
+    </dgm:fillClrLst>
+    <dgm:linClrLst meth="repeat">
+      <a:schemeClr val="lt1"/>
+    </dgm:linClrLst>
+    <dgm:effectClrLst/>
+    <dgm:txLinClrLst/>
+    <dgm:txFillClrLst/>
+    <dgm:txEffectClrLst/>
+  </dgm:styleLbl>
+  <dgm:styleLbl name="node2">
+    <dgm:fillClrLst>
+      <a:schemeClr val="accent2"/>
+    </dgm:fillClrLst>
+    <dgm:linClrLst meth="repeat">
+      <a:schemeClr val="lt1"/>
+    </dgm:linClrLst>
+    <dgm:effectClrLst/>
+    <dgm:txLinClrLst/>
+    <dgm:txFillClrLst/>
+    <dgm:txEffectClrLst/>
+  </dgm:styleLbl>
+  <dgm:styleLbl name="node3">
+    <dgm:fillClrLst>
+      <a:schemeClr val="accent3"/>
+    </dgm:fillClrLst>
+    <dgm:linClrLst meth="repeat">
+      <a:schemeClr val="lt1"/>
+    </dgm:linClrLst>
+    <dgm:effectClrLst/>
+    <dgm:txLinClrLst/>
+    <dgm:txFillClrLst/>
+    <dgm:txEffectClrLst/>
+  </dgm:styleLbl>
+  <dgm:styleLbl name="node4">
+    <dgm:fillClrLst>
+      <a:schemeClr val="accent4"/>
+    </dgm:fillClrLst>
+    <dgm:linClrLst meth="repeat">
+      <a:schemeClr val="lt1"/>
+    </dgm:linClrLst>
+    <dgm:effectClrLst/>
+    <dgm:txLinClrLst/>
+    <dgm:txFillClrLst/>
+    <dgm:txEffectClrLst/>
+  </dgm:styleLbl>
+  <dgm:styleLbl name="fgImgPlace1">
+    <dgm:fillClrLst meth="repeat">
+      <a:schemeClr val="accent2">
+        <a:tint val="50000"/>
+      </a:schemeClr>
+      <a:schemeClr val="accent3">
+        <a:tint val="50000"/>
+      </a:schemeClr>
+      <a:schemeClr val="accent4">
+        <a:tint val="50000"/>
+      </a:schemeClr>
+      <a:schemeClr val="accent5">
+        <a:tint val="50000"/>
+      </a:schemeClr>
+      <a:schemeClr val="accent6">
+        <a:tint val="50000"/>
+      </a:schemeClr>
+    </dgm:fillClrLst>
+    <dgm:linClrLst meth="repeat">
+      <a:schemeClr val="lt1"/>
+    </dgm:linClrLst>
+    <dgm:effectClrLst/>
+    <dgm:txLinClrLst/>
+    <dgm:txFillClrLst meth="repeat">
+      <a:schemeClr val="lt1"/>
+    </dgm:txFillClrLst>
+    <dgm:txEffectClrLst/>
+  </dgm:styleLbl>
+  <dgm:styleLbl name="alignImgPlace1">
+    <dgm:fillClrLst>
+      <a:schemeClr val="accent1">
+        <a:tint val="50000"/>
+      </a:schemeClr>
+      <a:schemeClr val="accent2">
+        <a:tint val="20000"/>
+      </a:schemeClr>
+    </dgm:fillClrLst>
+    <dgm:linClrLst meth="repeat">
+      <a:schemeClr val="lt1"/>
+    </dgm:linClrLst>
+    <dgm:effectClrLst/>
+    <dgm:txLinClrLst/>
+    <dgm:txFillClrLst meth="repeat">
+      <a:schemeClr val="lt1"/>
+    </dgm:txFillClrLst>
+    <dgm:txEffectClrLst/>
+  </dgm:styleLbl>
+  <dgm:styleLbl name="bgImgPlace1">
+    <dgm:fillClrLst>
+      <a:schemeClr val="accent1">
+        <a:tint val="50000"/>
+      </a:schemeClr>
+      <a:schemeClr val="accent2">
+        <a:tint val="20000"/>
+      </a:schemeClr>
+    </dgm:fillClrLst>
+    <dgm:linClrLst meth="repeat">
+      <a:schemeClr val="lt1"/>
+    </dgm:linClrLst>
+    <dgm:effectClrLst/>
+    <dgm:txLinClrLst/>
+    <dgm:txFillClrLst meth="repeat">
+      <a:schemeClr val="lt1"/>
+    </dgm:txFillClrLst>
+    <dgm:txEffectClrLst/>
+  </dgm:styleLbl>
+  <dgm:styleLbl name="sibTrans2D1">
+    <dgm:fillClrLst meth="repeat">
+      <a:schemeClr val="accent2"/>
+      <a:schemeClr val="accent3"/>
+      <a:schemeClr val="accent4"/>
+      <a:schemeClr val="accent5"/>
+      <a:schemeClr val="accent6"/>
+    </dgm:fillClrLst>
+    <dgm:linClrLst meth="cycle">
+      <a:schemeClr val="lt1"/>
+    </dgm:linClrLst>
+    <dgm:effectClrLst/>
+    <dgm:txLinClrLst/>
+    <dgm:txFillClrLst/>
+    <dgm:txEffectClrLst/>
+  </dgm:styleLbl>
+  <dgm:styleLbl name="fgSibTrans2D1">
+    <dgm:fillClrLst meth="repeat">
+      <a:schemeClr val="accent2"/>
+      <a:schemeClr val="accent3"/>
+      <a:schemeClr val="accent4"/>
+      <a:schemeClr val="accent5"/>
+      <a:schemeClr val="accent6"/>
+    </dgm:fillClrLst>
+    <dgm:linClrLst meth="cycle">
+      <a:schemeClr val="lt1"/>
+    </dgm:linClrLst>
+    <dgm:effectClrLst/>
+    <dgm:txLinClrLst/>
+    <dgm:txFillClrLst meth="repeat">
+      <a:schemeClr val="lt1"/>
+    </dgm:txFillClrLst>
+    <dgm:txEffectClrLst/>
+  </dgm:styleLbl>
+  <dgm:styleLbl name="bgSibTrans2D1">
+    <dgm:fillClrLst meth="repeat">
+      <a:schemeClr val="accent2"/>
+      <a:schemeClr val="accent3"/>
+      <a:schemeClr val="accent4"/>
+      <a:schemeClr val="accent5"/>
+      <a:schemeClr val="accent6"/>
+    </dgm:fillClrLst>
+    <dgm:linClrLst meth="cycle">
+      <a:schemeClr val="lt1"/>
+    </dgm:linClrLst>
+    <dgm:effectClrLst/>
+    <dgm:txLinClrLst/>
+    <dgm:txFillClrLst meth="repeat">
+      <a:schemeClr val="lt1"/>
+    </dgm:txFillClrLst>
+    <dgm:txEffectClrLst/>
+  </dgm:styleLbl>
+  <dgm:styleLbl name="sibTrans1D1">
+    <dgm:fillClrLst meth="repeat">
+      <a:schemeClr val="accent2"/>
+      <a:schemeClr val="accent3"/>
+      <a:schemeClr val="accent4"/>
+      <a:schemeClr val="accent5"/>
+      <a:schemeClr val="accent6"/>
+    </dgm:fillClrLst>
+    <dgm:linClrLst meth="repeat">
+      <a:schemeClr val="accent2"/>
+      <a:schemeClr val="accent3"/>
+      <a:schemeClr val="accent4"/>
+      <a:schemeClr val="accent5"/>
+      <a:schemeClr val="accent6"/>
+    </dgm:linClrLst>
+    <dgm:effectClrLst/>
+    <dgm:txLinClrLst/>
+    <dgm:txFillClrLst meth="repeat">
+      <a:schemeClr val="tx1"/>
+    </dgm:txFillClrLst>
+    <dgm:txEffectClrLst/>
+  </dgm:styleLbl>
+  <dgm:styleLbl name="callout">
+    <dgm:fillClrLst meth="repeat">
+      <a:schemeClr val="accent2"/>
+    </dgm:fillClrLst>
+    <dgm:linClrLst meth="repeat">
+      <a:schemeClr val="accent2">
+        <a:tint val="50000"/>
+      </a:schemeClr>
+    </dgm:linClrLst>
+    <dgm:effectClrLst/>
+    <dgm:txLinClrLst/>
+    <dgm:txFillClrLst meth="repeat">
+      <a:schemeClr val="tx1"/>
+    </dgm:txFillClrLst>
+    <dgm:txEffectClrLst/>
+  </dgm:styleLbl>
+  <dgm:styleLbl name="asst0">
+    <dgm:fillClrLst meth="repeat">
+      <a:schemeClr val="accent1"/>
+    </dgm:fillClrLst>
+    <dgm:linClrLst meth="repeat">
+      <a:schemeClr val="lt1"/>
+    </dgm:linClrLst>
+    <dgm:effectClrLst/>
+    <dgm:txLinClrLst/>
+    <dgm:txFillClrLst/>
+    <dgm:txEffectClrLst/>
+  </dgm:styleLbl>
+  <dgm:styleLbl name="asst1">
+    <dgm:fillClrLst meth="repeat">
+      <a:schemeClr val="accent2"/>
+    </dgm:fillClrLst>
+    <dgm:linClrLst meth="repeat">
+      <a:schemeClr val="lt1"/>
+    </dgm:linClrLst>
+    <dgm:effectClrLst/>
+    <dgm:txLinClrLst/>
+    <dgm:txFillClrLst/>
+    <dgm:txEffectClrLst/>
+  </dgm:styleLbl>
+  <dgm:styleLbl name="asst2">
+    <dgm:fillClrLst>
+      <a:schemeClr val="accent3"/>
+    </dgm:fillClrLst>
+    <dgm:linClrLst meth="repeat">
+      <a:schemeClr val="lt1"/>
+    </dgm:linClrLst>
+    <dgm:effectClrLst/>
+    <dgm:txLinClrLst/>
+    <dgm:txFillClrLst/>
+    <dgm:txEffectClrLst/>
+  </dgm:styleLbl>
+  <dgm:styleLbl name="asst3">
+    <dgm:fillClrLst>
+      <a:schemeClr val="accent4"/>
+    </dgm:fillClrLst>
+    <dgm:linClrLst meth="repeat">
+      <a:schemeClr val="lt1"/>
+    </dgm:linClrLst>
+    <dgm:effectClrLst/>
+    <dgm:txLinClrLst/>
+    <dgm:txFillClrLst/>
+    <dgm:txEffectClrLst/>
+  </dgm:styleLbl>
+  <dgm:styleLbl name="asst4">
+    <dgm:fillClrLst>
+      <a:schemeClr val="accent5"/>
+    </dgm:fillClrLst>
+    <dgm:linClrLst meth="repeat">
+      <a:schemeClr val="lt1"/>
+    </dgm:linClrLst>
+    <dgm:effectClrLst/>
+    <dgm:txLinClrLst/>
+    <dgm:txFillClrLst/>
+    <dgm:txEffectClrLst/>
+  </dgm:styleLbl>
+  <dgm:styleLbl name="parChTrans2D1">
+    <dgm:fillClrLst meth="repeat">
+      <a:schemeClr val="accent2"/>
+    </dgm:fillClrLst>
+    <dgm:linClrLst meth="repeat">
+      <a:schemeClr val="lt1"/>
+    </dgm:linClrLst>
+    <dgm:effectClrLst/>
+    <dgm:txLinClrLst/>
+    <dgm:txFillClrLst meth="repeat">
+      <a:schemeClr val="lt1"/>
+    </dgm:txFillClrLst>
+    <dgm:txEffectClrLst/>
+  </dgm:styleLbl>
+  <dgm:styleLbl name="parChTrans2D2">
+    <dgm:fillClrLst meth="repeat">
+      <a:schemeClr val="accent3"/>
+    </dgm:fillClrLst>
+    <dgm:linClrLst meth="repeat">
+      <a:schemeClr val="lt1"/>
+    </dgm:linClrLst>
+    <dgm:effectClrLst/>
+    <dgm:txLinClrLst/>
+    <dgm:txFillClrLst/>
+    <dgm:txEffectClrLst/>
+  </dgm:styleLbl>
+  <dgm:styleLbl name="parChTrans2D3">
+    <dgm:fillClrLst meth="repeat">
+      <a:schemeClr val="accent4"/>
+    </dgm:fillClrLst>
+    <dgm:linClrLst meth="repeat">
+      <a:schemeClr val="lt1"/>
+    </dgm:linClrLst>
+    <dgm:effectClrLst/>
+    <dgm:txLinClrLst/>
+    <dgm:txFillClrLst/>
+    <dgm:txEffectClrLst/>
+  </dgm:styleLbl>
+  <dgm:styleLbl name="parChTrans2D4">
+    <dgm:fillClrLst meth="repeat">
+      <a:schemeClr val="accent5"/>
+    </dgm:fillClrLst>
+    <dgm:linClrLst meth="repeat">
+      <a:schemeClr val="lt1"/>
+    </dgm:linClrLst>
+    <dgm:effectClrLst/>
+    <dgm:txLinClrLst/>
+    <dgm:txFillClrLst meth="repeat">
+      <a:schemeClr val="lt1"/>
+    </dgm:txFillClrLst>
+    <dgm:txEffectClrLst/>
+  </dgm:styleLbl>
+  <dgm:styleLbl name="parChTrans1D1">
+    <dgm:fillClrLst meth="repeat">
+      <a:schemeClr val="accent2"/>
+    </dgm:fillClrLst>
+    <dgm:linClrLst meth="repeat">
+      <a:schemeClr val="accent1"/>
+    </dgm:linClrLst>
+    <dgm:effectClrLst/>
+    <dgm:txLinClrLst/>
+    <dgm:txFillClrLst meth="repeat">
+      <a:schemeClr val="tx1"/>
+    </dgm:txFillClrLst>
+    <dgm:txEffectClrLst/>
+  </dgm:styleLbl>
+  <dgm:styleLbl name="parChTrans1D2">
+    <dgm:fillClrLst meth="repeat">
+      <a:schemeClr val="accent3">
+        <a:tint val="90000"/>
+      </a:schemeClr>
+    </dgm:fillClrLst>
+    <dgm:linClrLst meth="repeat">
+      <a:schemeClr val="accent2"/>
+    </dgm:linClrLst>
+    <dgm:effectClrLst/>
+    <dgm:txLinClrLst/>
+    <dgm:txFillClrLst meth="repeat">
+      <a:schemeClr val="tx1"/>
+    </dgm:txFillClrLst>
+    <dgm:txEffectClrLst/>
+  </dgm:styleLbl>
+  <dgm:styleLbl name="parChTrans1D3">
+    <dgm:fillClrLst meth="repeat">
+      <a:schemeClr val="accent4">
+        <a:tint val="70000"/>
+      </a:schemeClr>
+    </dgm:fillClrLst>
+    <dgm:linClrLst meth="repeat">
+      <a:schemeClr val="accent3"/>
+    </dgm:linClrLst>
+    <dgm:effectClrLst/>
+    <dgm:txLinClrLst/>
+    <dgm:txFillClrLst meth="repeat">
+      <a:schemeClr val="tx1"/>
+    </dgm:txFillClrLst>
+    <dgm:txEffectClrLst/>
+  </dgm:styleLbl>
+  <dgm:styleLbl name="parChTrans1D4">
+    <dgm:fillClrLst meth="repeat">
+      <a:schemeClr val="accent5">
+        <a:tint val="50000"/>
+      </a:schemeClr>
+    </dgm:fillClrLst>
+    <dgm:linClrLst meth="repeat">
+      <a:schemeClr val="accent4"/>
+    </dgm:linClrLst>
+    <dgm:effectClrLst/>
+    <dgm:txLinClrLst/>
+    <dgm:txFillClrLst meth="repeat">
+      <a:schemeClr val="tx1"/>
+    </dgm:txFillClrLst>
+    <dgm:txEffectClrLst/>
+  </dgm:styleLbl>
+  <dgm:styleLbl name="fgAcc1">
+    <dgm:fillClrLst meth="repeat">
+      <a:schemeClr val="lt1">
+        <a:alpha val="90000"/>
+      </a:schemeClr>
+    </dgm:fillClrLst>
+    <dgm:linClrLst meth="repeat">
+      <a:schemeClr val="accent2"/>
+      <a:schemeClr val="accent3"/>
+      <a:schemeClr val="accent4"/>
+      <a:schemeClr val="accent5"/>
+      <a:schemeClr val="accent6"/>
+    </dgm:linClrLst>
+    <dgm:effectClrLst/>
+    <dgm:txLinClrLst/>
+    <dgm:txFillClrLst meth="repeat">
+      <a:schemeClr val="dk1"/>
+    </dgm:txFillClrLst>
+    <dgm:txEffectClrLst/>
+  </dgm:styleLbl>
+  <dgm:styleLbl name="conFgAcc1">
+    <dgm:fillClrLst meth="repeat">
+      <a:schemeClr val="lt1">
+        <a:alpha val="90000"/>
+      </a:schemeClr>
+    </dgm:fillClrLst>
+    <dgm:linClrLst meth="repeat">
+      <a:schemeClr val="accent2"/>
+      <a:schemeClr val="accent3"/>
+      <a:schemeClr val="accent4"/>
+      <a:schemeClr val="accent5"/>
+      <a:schemeClr val="accent6"/>
+    </dgm:linClrLst>
+    <dgm:effectClrLst/>
+    <dgm:txLinClrLst/>
+    <dgm:txFillClrLst meth="repeat">
+      <a:schemeClr val="dk1"/>
+    </dgm:txFillClrLst>
+    <dgm:txEffectClrLst/>
+  </dgm:styleLbl>
+  <dgm:styleLbl name="alignAcc1">
+    <dgm:fillClrLst meth="repeat">
+      <a:schemeClr val="lt1">
+        <a:alpha val="90000"/>
+      </a:schemeClr>
+    </dgm:fillClrLst>
+    <dgm:linClrLst meth="repeat">
+      <a:schemeClr val="accent2"/>
+      <a:schemeClr val="accent3"/>
+      <a:schemeClr val="accent4"/>
+      <a:schemeClr val="accent5"/>
+      <a:schemeClr val="accent6"/>
+    </dgm:linClrLst>
+    <dgm:effectClrLst/>
+    <dgm:txLinClrLst/>
+    <dgm:txFillClrLst meth="repeat">
+      <a:schemeClr val="dk1"/>
+    </dgm:txFillClrLst>
+    <dgm:txEffectClrLst/>
+  </dgm:styleLbl>
+  <dgm:styleLbl name="trAlignAcc1">
+    <dgm:fillClrLst meth="repeat">
+      <a:schemeClr val="lt1">
+        <a:alpha val="40000"/>
+      </a:schemeClr>
+    </dgm:fillClrLst>
+    <dgm:linClrLst meth="repeat">
+      <a:schemeClr val="accent1"/>
+    </dgm:linClrLst>
+    <dgm:effectClrLst/>
+    <dgm:txLinClrLst/>
+    <dgm:txFillClrLst meth="repeat">
+      <a:schemeClr val="dk1"/>
+    </dgm:txFillClrLst>
+    <dgm:txEffectClrLst/>
+  </dgm:styleLbl>
+  <dgm:styleLbl name="bgAcc1">
+    <dgm:fillClrLst meth="repeat">
+      <a:schemeClr val="lt1">
+        <a:alpha val="90000"/>
+      </a:schemeClr>
+    </dgm:fillClrLst>
+    <dgm:linClrLst meth="repeat">
+      <a:schemeClr val="accent2"/>
+      <a:schemeClr val="accent3"/>
+      <a:schemeClr val="accent4"/>
+      <a:schemeClr val="accent5"/>
+      <a:schemeClr val="accent6"/>
+    </dgm:linClrLst>
+    <dgm:effectClrLst/>
+    <dgm:txLinClrLst/>
+    <dgm:txFillClrLst meth="repeat">
+      <a:schemeClr val="dk1"/>
+    </dgm:txFillClrLst>
+    <dgm:txEffectClrLst/>
+  </dgm:styleLbl>
+  <dgm:styleLbl name="solidFgAcc1">
+    <dgm:fillClrLst meth="repeat">
+      <a:schemeClr val="lt1"/>
+    </dgm:fillClrLst>
+    <dgm:linClrLst meth="repeat">
+      <a:schemeClr val="accent2"/>
+      <a:schemeClr val="accent3"/>
+      <a:schemeClr val="accent4"/>
+      <a:schemeClr val="accent5"/>
+      <a:schemeClr val="accent6"/>
+    </dgm:linClrLst>
+    <dgm:effectClrLst/>
+    <dgm:txLinClrLst/>
+    <dgm:txFillClrLst meth="repeat">
+      <a:schemeClr val="dk1"/>
+    </dgm:txFillClrLst>
+    <dgm:txEffectClrLst/>
+  </dgm:styleLbl>
+  <dgm:styleLbl name="solidAlignAcc1">
+    <dgm:fillClrLst meth="repeat">
+      <a:schemeClr val="lt1"/>
+    </dgm:fillClrLst>
+    <dgm:linClrLst meth="repeat">
+      <a:schemeClr val="accent2"/>
+      <a:schemeClr val="accent3"/>
+      <a:schemeClr val="accent4"/>
+      <a:schemeClr val="accent5"/>
+      <a:schemeClr val="accent6"/>
+    </dgm:linClrLst>
+    <dgm:effectClrLst/>
+    <dgm:txLinClrLst/>
+    <dgm:txFillClrLst meth="repeat">
+      <a:schemeClr val="dk1"/>
+    </dgm:txFillClrLst>
+    <dgm:txEffectClrLst/>
+  </dgm:styleLbl>
+  <dgm:styleLbl name="solidBgAcc1">
+    <dgm:fillClrLst meth="repeat">
+      <a:schemeClr val="lt1"/>
+    </dgm:fillClrLst>
+    <dgm:linClrLst meth="repeat">
+      <a:schemeClr val="accent2"/>
+      <a:schemeClr val="accent3"/>
+      <a:schemeClr val="accent4"/>
+      <a:schemeClr val="accent5"/>
+      <a:schemeClr val="accent6"/>
+    </dgm:linClrLst>
+    <dgm:effectClrLst/>
+    <dgm:txLinClrLst/>
+    <dgm:txFillClrLst meth="repeat">
+      <a:schemeClr val="dk1"/>
+    </dgm:txFillClrLst>
+    <dgm:txEffectClrLst/>
+  </dgm:styleLbl>
+  <dgm:styleLbl name="fgAccFollowNode1">
+    <dgm:fillClrLst meth="repeat">
+      <a:schemeClr val="accent2">
+        <a:tint val="40000"/>
+        <a:alpha val="90000"/>
+      </a:schemeClr>
+      <a:schemeClr val="accent3">
+        <a:tint val="40000"/>
+        <a:alpha val="90000"/>
+      </a:schemeClr>
+      <a:schemeClr val="accent4">
+        <a:tint val="40000"/>
+        <a:alpha val="90000"/>
+      </a:schemeClr>
+      <a:schemeClr val="accent5">
+        <a:tint val="40000"/>
+        <a:alpha val="90000"/>
+      </a:schemeClr>
+      <a:schemeClr val="accent6">
+        <a:tint val="40000"/>
+        <a:alpha val="90000"/>
+      </a:schemeClr>
+    </dgm:fillClrLst>
+    <dgm:linClrLst meth="repeat">
+      <a:schemeClr val="accent2">
+        <a:tint val="40000"/>
+        <a:alpha val="90000"/>
+      </a:schemeClr>
+      <a:schemeClr val="accent3">
+        <a:tint val="40000"/>
+        <a:alpha val="90000"/>
+      </a:schemeClr>
+      <a:schemeClr val="accent4">
+        <a:tint val="40000"/>
+        <a:alpha val="90000"/>
+      </a:schemeClr>
+      <a:schemeClr val="accent5">
+        <a:tint val="40000"/>
+        <a:alpha val="90000"/>
+      </a:schemeClr>
+      <a:schemeClr val="accent6">
+        <a:tint val="40000"/>
+        <a:alpha val="90000"/>
+      </a:schemeClr>
+    </dgm:linClrLst>
+    <dgm:effectClrLst/>
+    <dgm:txLinClrLst/>
+    <dgm:txFillClrLst meth="repeat">
+      <a:schemeClr val="dk1"/>
+    </dgm:txFillClrLst>
+    <dgm:txEffectClrLst/>
+  </dgm:styleLbl>
+  <dgm:styleLbl name="alignAccFollowNode1">
+    <dgm:fillClrLst meth="repeat">
+      <a:schemeClr val="accent2">
+        <a:tint val="40000"/>
+        <a:alpha val="90000"/>
+      </a:schemeClr>
+      <a:schemeClr val="accent3">
+        <a:tint val="40000"/>
+        <a:alpha val="90000"/>
+      </a:schemeClr>
+      <a:schemeClr val="accent4">
+        <a:tint val="40000"/>
+        <a:alpha val="90000"/>
+      </a:schemeClr>
+      <a:schemeClr val="accent5">
+        <a:tint val="40000"/>
+        <a:alpha val="90000"/>
+      </a:schemeClr>
+      <a:schemeClr val="accent6">
+        <a:tint val="40000"/>
+        <a:alpha val="90000"/>
+      </a:schemeClr>
+    </dgm:fillClrLst>
+    <dgm:linClrLst meth="repeat">
+      <a:schemeClr val="accent2">
+        <a:tint val="40000"/>
+        <a:alpha val="90000"/>
+      </a:schemeClr>
+      <a:schemeClr val="accent3">
+        <a:tint val="40000"/>
+        <a:alpha val="90000"/>
+      </a:schemeClr>
+      <a:schemeClr val="accent4">
+        <a:tint val="40000"/>
+        <a:alpha val="90000"/>
+      </a:schemeClr>
+      <a:schemeClr val="accent5">
+        <a:tint val="40000"/>
+        <a:alpha val="90000"/>
+      </a:schemeClr>
+      <a:schemeClr val="accent6">
+        <a:tint val="40000"/>
+        <a:alpha val="90000"/>
+      </a:schemeClr>
+    </dgm:linClrLst>
+    <dgm:effectClrLst/>
+    <dgm:txLinClrLst/>
+    <dgm:txFillClrLst meth="repeat">
+      <a:schemeClr val="dk1"/>
+    </dgm:txFillClrLst>
+    <dgm:txEffectClrLst/>
+  </dgm:styleLbl>
+  <dgm:styleLbl name="bgAccFollowNode1">
+    <dgm:fillClrLst meth="repeat">
+      <a:schemeClr val="accent2">
+        <a:tint val="40000"/>
+        <a:alpha val="90000"/>
+      </a:schemeClr>
+      <a:schemeClr val="accent3">
+        <a:tint val="40000"/>
+        <a:alpha val="90000"/>
+      </a:schemeClr>
+      <a:schemeClr val="accent4">
+        <a:tint val="40000"/>
+        <a:alpha val="90000"/>
+      </a:schemeClr>
+      <a:schemeClr val="accent5">
+        <a:tint val="40000"/>
+        <a:alpha val="90000"/>
+      </a:schemeClr>
+      <a:schemeClr val="accent6">
+        <a:tint val="40000"/>
+        <a:alpha val="90000"/>
+      </a:schemeClr>
+    </dgm:fillClrLst>
+    <dgm:linClrLst meth="repeat">
+      <a:schemeClr val="accent2">
+        <a:tint val="40000"/>
+        <a:alpha val="90000"/>
+      </a:schemeClr>
+      <a:schemeClr val="accent3">
+        <a:tint val="40000"/>
+        <a:alpha val="90000"/>
+      </a:schemeClr>
+      <a:schemeClr val="accent4">
+        <a:tint val="40000"/>
+        <a:alpha val="90000"/>
+      </a:schemeClr>
+      <a:schemeClr val="accent5">
+        <a:tint val="40000"/>
+        <a:alpha val="90000"/>
+      </a:schemeClr>
+      <a:schemeClr val="accent6">
+        <a:tint val="40000"/>
+        <a:alpha val="90000"/>
+      </a:schemeClr>
+    </dgm:linClrLst>
+    <dgm:effectClrLst/>
+    <dgm:txLinClrLst/>
+    <dgm:txFillClrLst meth="repeat">
+      <a:schemeClr val="dk1"/>
+    </dgm:txFillClrLst>
+    <dgm:txEffectClrLst/>
+  </dgm:styleLbl>
+  <dgm:styleLbl name="fgAcc0">
+    <dgm:fillClrLst meth="repeat">
+      <a:schemeClr val="lt1">
+        <a:alpha val="90000"/>
+      </a:schemeClr>
+    </dgm:fillClrLst>
+    <dgm:linClrLst>
+      <a:schemeClr val="accent1"/>
+    </dgm:linClrLst>
+    <dgm:effectClrLst/>
+    <dgm:txLinClrLst/>
+    <dgm:txFillClrLst meth="repeat">
+      <a:schemeClr val="dk1"/>
+    </dgm:txFillClrLst>
+    <dgm:txEffectClrLst/>
+  </dgm:styleLbl>
+  <dgm:styleLbl name="fgAcc2">
+    <dgm:fillClrLst meth="repeat">
+      <a:schemeClr val="lt1">
+        <a:alpha val="90000"/>
+      </a:schemeClr>
+    </dgm:fillClrLst>
+    <dgm:linClrLst>
+      <a:schemeClr val="accent2"/>
+    </dgm:linClrLst>
+    <dgm:effectClrLst/>
+    <dgm:txLinClrLst/>
+    <dgm:txFillClrLst meth="repeat">
+      <a:schemeClr val="dk1"/>
+    </dgm:txFillClrLst>
+    <dgm:txEffectClrLst/>
+  </dgm:styleLbl>
+  <dgm:styleLbl name="fgAcc3">
+    <dgm:fillClrLst meth="repeat">
+      <a:schemeClr val="lt1">
+        <a:alpha val="90000"/>
+      </a:schemeClr>
+    </dgm:fillClrLst>
+    <dgm:linClrLst>
+      <a:schemeClr val="accent3"/>
+    </dgm:linClrLst>
+    <dgm:effectClrLst/>
+    <dgm:txLinClrLst/>
+    <dgm:txFillClrLst meth="repeat">
+      <a:schemeClr val="dk1"/>
+    </dgm:txFillClrLst>
+    <dgm:txEffectClrLst/>
+  </dgm:styleLbl>
+  <dgm:styleLbl name="fgAcc4">
+    <dgm:fillClrLst meth="repeat">
+      <a:schemeClr val="lt1">
+        <a:alpha val="90000"/>
+      </a:schemeClr>
+    </dgm:fillClrLst>
+    <dgm:linClrLst>
+      <a:schemeClr val="accent4"/>
+    </dgm:linClrLst>
+    <dgm:effectClrLst/>
+    <dgm:txLinClrLst/>
+    <dgm:txFillClrLst meth="repeat">
+      <a:schemeClr val="dk1"/>
+    </dgm:txFillClrLst>
+    <dgm:txEffectClrLst/>
+  </dgm:styleLbl>
+  <dgm:styleLbl name="bgShp">
+    <dgm:fillClrLst meth="repeat">
+      <a:schemeClr val="accent2"/>
+      <a:schemeClr val="accent3"/>
+      <a:schemeClr val="accent4"/>
+      <a:schemeClr val="accent5"/>
+      <a:schemeClr val="accent6"/>
+    </dgm:fillClrLst>
+    <dgm:linClrLst meth="repeat">
+      <a:schemeClr val="lt1">
+        <a:alpha val="0"/>
+      </a:schemeClr>
+    </dgm:linClrLst>
+    <dgm:effectClrLst/>
+    <dgm:txLinClrLst/>
+    <dgm:txFillClrLst/>
+    <dgm:txEffectClrLst/>
+  </dgm:styleLbl>
+  <dgm:styleLbl name="dkBgShp">
+    <dgm:fillClrLst meth="repeat">
+      <a:schemeClr val="accent2">
+        <a:shade val="90000"/>
+      </a:schemeClr>
+    </dgm:fillClrLst>
+    <dgm:linClrLst meth="repeat">
+      <a:schemeClr val="dk1"/>
+    </dgm:linClrLst>
+    <dgm:effectClrLst/>
+    <dgm:txLinClrLst/>
+    <dgm:txFillClrLst meth="repeat">
+      <a:schemeClr val="lt1"/>
+    </dgm:txFillClrLst>
+    <dgm:txEffectClrLst/>
+  </dgm:styleLbl>
+  <dgm:styleLbl name="trBgShp">
+    <dgm:fillClrLst meth="repeat">
+      <a:schemeClr val="accent1">
+        <a:tint val="50000"/>
+        <a:alpha val="40000"/>
+      </a:schemeClr>
+    </dgm:fillClrLst>
+    <dgm:linClrLst meth="repeat">
+      <a:schemeClr val="accent2"/>
+    </dgm:linClrLst>
+    <dgm:effectClrLst/>
+    <dgm:txLinClrLst/>
+    <dgm:txFillClrLst meth="repeat">
+      <a:schemeClr val="lt1"/>
+    </dgm:txFillClrLst>
+    <dgm:txEffectClrLst/>
+  </dgm:styleLbl>
+  <dgm:styleLbl name="fgShp">
+    <dgm:fillClrLst meth="repeat">
+      <a:schemeClr val="accent2">
+        <a:tint val="40000"/>
+      </a:schemeClr>
+    </dgm:fillClrLst>
+    <dgm:linClrLst meth="repeat">
+      <a:schemeClr val="lt1"/>
+    </dgm:linClrLst>
+    <dgm:effectClrLst/>
+    <dgm:txLinClrLst/>
+    <dgm:txFillClrLst meth="repeat">
+      <a:schemeClr val="dk1"/>
+    </dgm:txFillClrLst>
+    <dgm:txEffectClrLst/>
+  </dgm:styleLbl>
+  <dgm:styleLbl name="revTx">
+    <dgm:fillClrLst meth="repeat">
+      <a:schemeClr val="lt1">
+        <a:alpha val="0"/>
+      </a:schemeClr>
+    </dgm:fillClrLst>
+    <dgm:linClrLst meth="repeat">
+      <a:schemeClr val="dk1">
+        <a:alpha val="0"/>
+      </a:schemeClr>
+    </dgm:linClrLst>
+    <dgm:effectClrLst/>
+    <dgm:txLinClrLst/>
+    <dgm:txFillClrLst meth="repeat">
+      <a:schemeClr val="bg1"/>
     </dgm:txFillClrLst>
     <dgm:txEffectClrLst/>
   </dgm:styleLbl>
@@ -5575,6 +6640,446 @@
   <dgm:extLst>
     <a:ext uri="http://schemas.microsoft.com/office/drawing/2008/diagram">
       <dsp:dataModelExt xmlns:dsp="http://schemas.microsoft.com/office/drawing/2008/diagram" relId="rId6" minVer="http://schemas.openxmlformats.org/drawingml/2006/diagram"/>
+    </a:ext>
+  </dgm:extLst>
+</dgm:dataModel>
+</file>
+
+<file path=ppt/diagrams/data4.xml><?xml version="1.0" encoding="utf-8"?>
+<dgm:dataModel xmlns:dgm="http://schemas.openxmlformats.org/drawingml/2006/diagram" xmlns:a="http://schemas.openxmlformats.org/drawingml/2006/main">
+  <dgm:ptLst>
+    <dgm:pt modelId="{0509E7B3-079C-41FA-BD65-DE38A38DC459}" type="doc">
+      <dgm:prSet loTypeId="urn:microsoft.com/office/officeart/2018/2/layout/IconVerticalSolidList" loCatId="icon" qsTypeId="urn:microsoft.com/office/officeart/2005/8/quickstyle/simple1" qsCatId="simple" csTypeId="urn:microsoft.com/office/officeart/2018/5/colors/Iconchunking_neutralicontext_colorful1" csCatId="colorful" phldr="1"/>
+      <dgm:spPr/>
+      <dgm:t>
+        <a:bodyPr/>
+        <a:lstStyle/>
+        <a:p>
+          <a:endParaRPr lang="en-US"/>
+        </a:p>
+      </dgm:t>
+    </dgm:pt>
+    <dgm:pt modelId="{6C01B371-272E-46B1-9056-01850AA5F5F1}">
+      <dgm:prSet/>
+      <dgm:spPr/>
+      <dgm:t>
+        <a:bodyPr/>
+        <a:lstStyle/>
+        <a:p>
+          <a:r>
+            <a:rPr lang="en-GB" dirty="0"/>
+            <a:t>Feature reduction techniques, including PCA, </a:t>
+          </a:r>
+          <a:r>
+            <a:rPr lang="en-GB" dirty="0" err="1"/>
+            <a:t>AutoEncoder</a:t>
+          </a:r>
+          <a:r>
+            <a:rPr lang="en-GB" dirty="0"/>
+            <a:t>, generally lead to a decrease in model performance, particularly in terms of accuracy and F1 score.</a:t>
+          </a:r>
+          <a:endParaRPr lang="en-US" dirty="0"/>
+        </a:p>
+      </dgm:t>
+    </dgm:pt>
+    <dgm:pt modelId="{C2236C7E-2A1C-4413-AC08-D4FA2674993C}" type="parTrans" cxnId="{2B95627D-FC7A-468E-BC2B-1902223D83A5}">
+      <dgm:prSet/>
+      <dgm:spPr/>
+      <dgm:t>
+        <a:bodyPr/>
+        <a:lstStyle/>
+        <a:p>
+          <a:endParaRPr lang="en-US"/>
+        </a:p>
+      </dgm:t>
+    </dgm:pt>
+    <dgm:pt modelId="{C96F95ED-D73C-4A91-B178-FE0E13419EA5}" type="sibTrans" cxnId="{2B95627D-FC7A-468E-BC2B-1902223D83A5}">
+      <dgm:prSet/>
+      <dgm:spPr/>
+      <dgm:t>
+        <a:bodyPr/>
+        <a:lstStyle/>
+        <a:p>
+          <a:endParaRPr lang="en-US"/>
+        </a:p>
+      </dgm:t>
+    </dgm:pt>
+    <dgm:pt modelId="{33D176D9-92CB-4E8E-B745-2A02B4C7CEBE}">
+      <dgm:prSet/>
+      <dgm:spPr/>
+      <dgm:t>
+        <a:bodyPr/>
+        <a:lstStyle/>
+        <a:p>
+          <a:r>
+            <a:rPr lang="en-GB" dirty="0"/>
+            <a:t>If</a:t>
+          </a:r>
+          <a:r>
+            <a:rPr lang="zh-CN" dirty="0"/>
+            <a:t> </a:t>
+          </a:r>
+          <a:r>
+            <a:rPr lang="en-GB" dirty="0"/>
+            <a:t>a certain degree of performance degradation is acceptable, more aggressive dimensionality reduction can be applied to significantly reduce feature size and computational cost.</a:t>
+          </a:r>
+          <a:endParaRPr lang="en-US" dirty="0"/>
+        </a:p>
+      </dgm:t>
+    </dgm:pt>
+    <dgm:pt modelId="{8167A301-4BBC-49AB-9E7C-BB0B757D9B24}" type="parTrans" cxnId="{9218B108-E577-49B0-9C0F-DE1FDFE15E83}">
+      <dgm:prSet/>
+      <dgm:spPr/>
+      <dgm:t>
+        <a:bodyPr/>
+        <a:lstStyle/>
+        <a:p>
+          <a:endParaRPr lang="en-US"/>
+        </a:p>
+      </dgm:t>
+    </dgm:pt>
+    <dgm:pt modelId="{59AC3FCC-86BE-45A7-8004-B7E72EF7A6C2}" type="sibTrans" cxnId="{9218B108-E577-49B0-9C0F-DE1FDFE15E83}">
+      <dgm:prSet/>
+      <dgm:spPr/>
+      <dgm:t>
+        <a:bodyPr/>
+        <a:lstStyle/>
+        <a:p>
+          <a:endParaRPr lang="en-US"/>
+        </a:p>
+      </dgm:t>
+    </dgm:pt>
+    <dgm:pt modelId="{DD6F7A4C-D8C6-464A-9378-C0F2D9EDC8A0}">
+      <dgm:prSet/>
+      <dgm:spPr/>
+      <dgm:t>
+        <a:bodyPr/>
+        <a:lstStyle/>
+        <a:p>
+          <a:r>
+            <a:rPr lang="en-GB"/>
+            <a:t>ResNeXt introduces high CPU overhead when applied to low-dimensional flow-level data, without improving accuracy or F1 score, making it unsuitable for deployment on edge devices. In contrast, PCA and AutoEncoder show no significant resource bottlenecks and are more suitable for edge-based IDS.</a:t>
+          </a:r>
+          <a:endParaRPr lang="en-US"/>
+        </a:p>
+      </dgm:t>
+    </dgm:pt>
+    <dgm:pt modelId="{FE4C140A-A898-4ED0-B114-459E053CE701}" type="parTrans" cxnId="{233439FD-CC01-4B63-85EA-1434B42C23BA}">
+      <dgm:prSet/>
+      <dgm:spPr/>
+      <dgm:t>
+        <a:bodyPr/>
+        <a:lstStyle/>
+        <a:p>
+          <a:endParaRPr lang="en-US"/>
+        </a:p>
+      </dgm:t>
+    </dgm:pt>
+    <dgm:pt modelId="{7F630590-6EB7-4DD7-9E39-1BF1548D29F2}" type="sibTrans" cxnId="{233439FD-CC01-4B63-85EA-1434B42C23BA}">
+      <dgm:prSet/>
+      <dgm:spPr/>
+      <dgm:t>
+        <a:bodyPr/>
+        <a:lstStyle/>
+        <a:p>
+          <a:endParaRPr lang="en-US"/>
+        </a:p>
+      </dgm:t>
+    </dgm:pt>
+    <dgm:pt modelId="{B4C6CB0E-67F5-4965-8270-9D8203C5F71A}">
+      <dgm:prSet/>
+      <dgm:spPr/>
+      <dgm:t>
+        <a:bodyPr/>
+        <a:lstStyle/>
+        <a:p>
+          <a:r>
+            <a:rPr lang="en-GB"/>
+            <a:t>Feature reduction reduces performance but improves efficiency; PCA and AutoEncoder are edge-friendly, while ResNeXt is computationally expensive and ineffective for low-dimensional data.</a:t>
+          </a:r>
+          <a:endParaRPr lang="en-US"/>
+        </a:p>
+      </dgm:t>
+    </dgm:pt>
+    <dgm:pt modelId="{A33EA111-F655-4444-A541-BC090C7BC1F6}" type="parTrans" cxnId="{A7F419D8-D2A0-4D1C-9A54-F92607C3F734}">
+      <dgm:prSet/>
+      <dgm:spPr/>
+      <dgm:t>
+        <a:bodyPr/>
+        <a:lstStyle/>
+        <a:p>
+          <a:endParaRPr lang="en-US"/>
+        </a:p>
+      </dgm:t>
+    </dgm:pt>
+    <dgm:pt modelId="{460AB618-9480-4A58-B29D-EF819ACC12E9}" type="sibTrans" cxnId="{A7F419D8-D2A0-4D1C-9A54-F92607C3F734}">
+      <dgm:prSet/>
+      <dgm:spPr/>
+      <dgm:t>
+        <a:bodyPr/>
+        <a:lstStyle/>
+        <a:p>
+          <a:endParaRPr lang="en-US"/>
+        </a:p>
+      </dgm:t>
+    </dgm:pt>
+    <dgm:pt modelId="{2952F401-2612-4806-B4E8-2AA51D44616C}" type="pres">
+      <dgm:prSet presAssocID="{0509E7B3-079C-41FA-BD65-DE38A38DC459}" presName="root" presStyleCnt="0">
+        <dgm:presLayoutVars>
+          <dgm:dir/>
+          <dgm:resizeHandles val="exact"/>
+        </dgm:presLayoutVars>
+      </dgm:prSet>
+      <dgm:spPr/>
+    </dgm:pt>
+    <dgm:pt modelId="{455BDFD6-FBAE-468C-B00D-92C8952B9CD4}" type="pres">
+      <dgm:prSet presAssocID="{6C01B371-272E-46B1-9056-01850AA5F5F1}" presName="compNode" presStyleCnt="0"/>
+      <dgm:spPr/>
+    </dgm:pt>
+    <dgm:pt modelId="{72968954-DE26-4C17-96EF-E48DD42A9430}" type="pres">
+      <dgm:prSet presAssocID="{6C01B371-272E-46B1-9056-01850AA5F5F1}" presName="bgRect" presStyleLbl="bgShp" presStyleIdx="0" presStyleCnt="4"/>
+      <dgm:spPr/>
+    </dgm:pt>
+    <dgm:pt modelId="{3BE2EC3C-E37D-4B6B-8CE6-2E5C07FAFC2B}" type="pres">
+      <dgm:prSet presAssocID="{6C01B371-272E-46B1-9056-01850AA5F5F1}" presName="iconRect" presStyleLbl="node1" presStyleIdx="0" presStyleCnt="4"/>
+      <dgm:spPr>
+        <a:blipFill>
+          <a:blip xmlns:r="http://schemas.openxmlformats.org/officeDocument/2006/relationships">
+            <a:extLst>
+              <a:ext uri="{28A0092B-C50C-407E-A947-70E740481C1C}">
+                <a14:useLocalDpi xmlns:a14="http://schemas.microsoft.com/office/drawing/2010/main" val="0"/>
+              </a:ext>
+              <a:ext uri="{96DAC541-7B7A-43D3-8B79-37D633B846F1}">
+                <asvg:svgBlip xmlns:asvg="http://schemas.microsoft.com/office/drawing/2016/SVG/main" r:embed="rId1"/>
+              </a:ext>
+            </a:extLst>
+          </a:blip>
+          <a:stretch>
+            <a:fillRect/>
+          </a:stretch>
+        </a:blipFill>
+        <a:ln>
+          <a:noFill/>
+        </a:ln>
+      </dgm:spPr>
+      <dgm:extLst>
+        <a:ext uri="{E40237B7-FDA0-4F09-8148-C483321AD2D9}">
+          <dgm14:cNvPr xmlns:dgm14="http://schemas.microsoft.com/office/drawing/2010/diagram" id="0" name="" descr="Branching Diagram"/>
+        </a:ext>
+      </dgm:extLst>
+    </dgm:pt>
+    <dgm:pt modelId="{7F542A8F-D0F4-42C6-B2DD-9D8671F97ACD}" type="pres">
+      <dgm:prSet presAssocID="{6C01B371-272E-46B1-9056-01850AA5F5F1}" presName="spaceRect" presStyleCnt="0"/>
+      <dgm:spPr/>
+    </dgm:pt>
+    <dgm:pt modelId="{DD9611CE-201A-4FB8-9005-5C611C691615}" type="pres">
+      <dgm:prSet presAssocID="{6C01B371-272E-46B1-9056-01850AA5F5F1}" presName="parTx" presStyleLbl="revTx" presStyleIdx="0" presStyleCnt="4">
+        <dgm:presLayoutVars>
+          <dgm:chMax val="0"/>
+          <dgm:chPref val="0"/>
+        </dgm:presLayoutVars>
+      </dgm:prSet>
+      <dgm:spPr/>
+    </dgm:pt>
+    <dgm:pt modelId="{EE99FFA4-BF94-493F-82F8-631D7CADAB1C}" type="pres">
+      <dgm:prSet presAssocID="{C96F95ED-D73C-4A91-B178-FE0E13419EA5}" presName="sibTrans" presStyleCnt="0"/>
+      <dgm:spPr/>
+    </dgm:pt>
+    <dgm:pt modelId="{37D67F16-B9F1-41F2-A195-448293B493A8}" type="pres">
+      <dgm:prSet presAssocID="{33D176D9-92CB-4E8E-B745-2A02B4C7CEBE}" presName="compNode" presStyleCnt="0"/>
+      <dgm:spPr/>
+    </dgm:pt>
+    <dgm:pt modelId="{7D7B6B63-E17E-4C7B-960E-0E4E680C401F}" type="pres">
+      <dgm:prSet presAssocID="{33D176D9-92CB-4E8E-B745-2A02B4C7CEBE}" presName="bgRect" presStyleLbl="bgShp" presStyleIdx="1" presStyleCnt="4"/>
+      <dgm:spPr/>
+    </dgm:pt>
+    <dgm:pt modelId="{7A491E4D-D7D9-47F0-B258-C776B64A9D17}" type="pres">
+      <dgm:prSet presAssocID="{33D176D9-92CB-4E8E-B745-2A02B4C7CEBE}" presName="iconRect" presStyleLbl="node1" presStyleIdx="1" presStyleCnt="4"/>
+      <dgm:spPr>
+        <a:blipFill>
+          <a:blip xmlns:r="http://schemas.openxmlformats.org/officeDocument/2006/relationships">
+            <a:extLst>
+              <a:ext uri="{28A0092B-C50C-407E-A947-70E740481C1C}">
+                <a14:useLocalDpi xmlns:a14="http://schemas.microsoft.com/office/drawing/2010/main" val="0"/>
+              </a:ext>
+              <a:ext uri="{96DAC541-7B7A-43D3-8B79-37D633B846F1}">
+                <asvg:svgBlip xmlns:asvg="http://schemas.microsoft.com/office/drawing/2016/SVG/main" r:embed="rId2"/>
+              </a:ext>
+            </a:extLst>
+          </a:blip>
+          <a:stretch>
+            <a:fillRect/>
+          </a:stretch>
+        </a:blipFill>
+        <a:ln>
+          <a:noFill/>
+        </a:ln>
+      </dgm:spPr>
+      <dgm:extLst>
+        <a:ext uri="{E40237B7-FDA0-4F09-8148-C483321AD2D9}">
+          <dgm14:cNvPr xmlns:dgm14="http://schemas.microsoft.com/office/drawing/2010/diagram" id="0" name="" descr="Speed Bump"/>
+        </a:ext>
+      </dgm:extLst>
+    </dgm:pt>
+    <dgm:pt modelId="{A2A53907-D5B9-4E58-929B-82B0721455F6}" type="pres">
+      <dgm:prSet presAssocID="{33D176D9-92CB-4E8E-B745-2A02B4C7CEBE}" presName="spaceRect" presStyleCnt="0"/>
+      <dgm:spPr/>
+    </dgm:pt>
+    <dgm:pt modelId="{4BD72CD7-94F7-46A3-A4EB-66B07FA78D22}" type="pres">
+      <dgm:prSet presAssocID="{33D176D9-92CB-4E8E-B745-2A02B4C7CEBE}" presName="parTx" presStyleLbl="revTx" presStyleIdx="1" presStyleCnt="4">
+        <dgm:presLayoutVars>
+          <dgm:chMax val="0"/>
+          <dgm:chPref val="0"/>
+        </dgm:presLayoutVars>
+      </dgm:prSet>
+      <dgm:spPr/>
+    </dgm:pt>
+    <dgm:pt modelId="{B0D9BADF-7F73-4512-A365-8CBC650C9B7C}" type="pres">
+      <dgm:prSet presAssocID="{59AC3FCC-86BE-45A7-8004-B7E72EF7A6C2}" presName="sibTrans" presStyleCnt="0"/>
+      <dgm:spPr/>
+    </dgm:pt>
+    <dgm:pt modelId="{3C04544D-F763-43CE-847D-C250D5A13A77}" type="pres">
+      <dgm:prSet presAssocID="{DD6F7A4C-D8C6-464A-9378-C0F2D9EDC8A0}" presName="compNode" presStyleCnt="0"/>
+      <dgm:spPr/>
+    </dgm:pt>
+    <dgm:pt modelId="{0097AA3F-F4F5-45BD-92D5-6CADAA1CF95B}" type="pres">
+      <dgm:prSet presAssocID="{DD6F7A4C-D8C6-464A-9378-C0F2D9EDC8A0}" presName="bgRect" presStyleLbl="bgShp" presStyleIdx="2" presStyleCnt="4"/>
+      <dgm:spPr/>
+    </dgm:pt>
+    <dgm:pt modelId="{02E2FF33-9FF8-4CA4-BB7E-AF19AFB912A8}" type="pres">
+      <dgm:prSet presAssocID="{DD6F7A4C-D8C6-464A-9378-C0F2D9EDC8A0}" presName="iconRect" presStyleLbl="node1" presStyleIdx="2" presStyleCnt="4"/>
+      <dgm:spPr>
+        <a:blipFill>
+          <a:blip xmlns:r="http://schemas.openxmlformats.org/officeDocument/2006/relationships">
+            <a:extLst>
+              <a:ext uri="{28A0092B-C50C-407E-A947-70E740481C1C}">
+                <a14:useLocalDpi xmlns:a14="http://schemas.microsoft.com/office/drawing/2010/main" val="0"/>
+              </a:ext>
+              <a:ext uri="{96DAC541-7B7A-43D3-8B79-37D633B846F1}">
+                <asvg:svgBlip xmlns:asvg="http://schemas.microsoft.com/office/drawing/2016/SVG/main" r:embed="rId3"/>
+              </a:ext>
+            </a:extLst>
+          </a:blip>
+          <a:stretch>
+            <a:fillRect/>
+          </a:stretch>
+        </a:blipFill>
+        <a:ln>
+          <a:noFill/>
+        </a:ln>
+      </dgm:spPr>
+      <dgm:extLst>
+        <a:ext uri="{E40237B7-FDA0-4F09-8148-C483321AD2D9}">
+          <dgm14:cNvPr xmlns:dgm14="http://schemas.microsoft.com/office/drawing/2010/diagram" id="0" name="" descr="Processor"/>
+        </a:ext>
+      </dgm:extLst>
+    </dgm:pt>
+    <dgm:pt modelId="{2B91FDD1-0EAA-49E1-8F3F-B7BC044C515A}" type="pres">
+      <dgm:prSet presAssocID="{DD6F7A4C-D8C6-464A-9378-C0F2D9EDC8A0}" presName="spaceRect" presStyleCnt="0"/>
+      <dgm:spPr/>
+    </dgm:pt>
+    <dgm:pt modelId="{E5163663-6809-4479-937C-CC4F9D8F7750}" type="pres">
+      <dgm:prSet presAssocID="{DD6F7A4C-D8C6-464A-9378-C0F2D9EDC8A0}" presName="parTx" presStyleLbl="revTx" presStyleIdx="2" presStyleCnt="4">
+        <dgm:presLayoutVars>
+          <dgm:chMax val="0"/>
+          <dgm:chPref val="0"/>
+        </dgm:presLayoutVars>
+      </dgm:prSet>
+      <dgm:spPr/>
+    </dgm:pt>
+    <dgm:pt modelId="{529D4391-9351-4486-881E-17DF90736A4B}" type="pres">
+      <dgm:prSet presAssocID="{7F630590-6EB7-4DD7-9E39-1BF1548D29F2}" presName="sibTrans" presStyleCnt="0"/>
+      <dgm:spPr/>
+    </dgm:pt>
+    <dgm:pt modelId="{AA5CFE7C-6206-4318-996C-524133CB0AE3}" type="pres">
+      <dgm:prSet presAssocID="{B4C6CB0E-67F5-4965-8270-9D8203C5F71A}" presName="compNode" presStyleCnt="0"/>
+      <dgm:spPr/>
+    </dgm:pt>
+    <dgm:pt modelId="{671B6B7F-2D5E-4E26-9D69-A6A717BCB534}" type="pres">
+      <dgm:prSet presAssocID="{B4C6CB0E-67F5-4965-8270-9D8203C5F71A}" presName="bgRect" presStyleLbl="bgShp" presStyleIdx="3" presStyleCnt="4"/>
+      <dgm:spPr/>
+    </dgm:pt>
+    <dgm:pt modelId="{9E6D3103-3E6B-4FB2-BB90-807133CEE95C}" type="pres">
+      <dgm:prSet presAssocID="{B4C6CB0E-67F5-4965-8270-9D8203C5F71A}" presName="iconRect" presStyleLbl="node1" presStyleIdx="3" presStyleCnt="4"/>
+      <dgm:spPr>
+        <a:blipFill>
+          <a:blip xmlns:r="http://schemas.openxmlformats.org/officeDocument/2006/relationships">
+            <a:extLst>
+              <a:ext uri="{28A0092B-C50C-407E-A947-70E740481C1C}">
+                <a14:useLocalDpi xmlns:a14="http://schemas.microsoft.com/office/drawing/2010/main" val="0"/>
+              </a:ext>
+              <a:ext uri="{96DAC541-7B7A-43D3-8B79-37D633B846F1}">
+                <asvg:svgBlip xmlns:asvg="http://schemas.microsoft.com/office/drawing/2016/SVG/main" r:embed="rId4"/>
+              </a:ext>
+            </a:extLst>
+          </a:blip>
+          <a:stretch>
+            <a:fillRect/>
+          </a:stretch>
+        </a:blipFill>
+        <a:ln>
+          <a:noFill/>
+        </a:ln>
+      </dgm:spPr>
+      <dgm:extLst>
+        <a:ext uri="{E40237B7-FDA0-4F09-8148-C483321AD2D9}">
+          <dgm14:cNvPr xmlns:dgm14="http://schemas.microsoft.com/office/drawing/2010/diagram" id="0" name="" descr="Web Design"/>
+        </a:ext>
+      </dgm:extLst>
+    </dgm:pt>
+    <dgm:pt modelId="{ADEFC1CD-2040-41F9-BFF1-1179592AF9BD}" type="pres">
+      <dgm:prSet presAssocID="{B4C6CB0E-67F5-4965-8270-9D8203C5F71A}" presName="spaceRect" presStyleCnt="0"/>
+      <dgm:spPr/>
+    </dgm:pt>
+    <dgm:pt modelId="{64FE9260-829A-4D46-A3AE-B696D600B6E9}" type="pres">
+      <dgm:prSet presAssocID="{B4C6CB0E-67F5-4965-8270-9D8203C5F71A}" presName="parTx" presStyleLbl="revTx" presStyleIdx="3" presStyleCnt="4">
+        <dgm:presLayoutVars>
+          <dgm:chMax val="0"/>
+          <dgm:chPref val="0"/>
+        </dgm:presLayoutVars>
+      </dgm:prSet>
+      <dgm:spPr/>
+    </dgm:pt>
+  </dgm:ptLst>
+  <dgm:cxnLst>
+    <dgm:cxn modelId="{9218B108-E577-49B0-9C0F-DE1FDFE15E83}" srcId="{0509E7B3-079C-41FA-BD65-DE38A38DC459}" destId="{33D176D9-92CB-4E8E-B745-2A02B4C7CEBE}" srcOrd="1" destOrd="0" parTransId="{8167A301-4BBC-49AB-9E7C-BB0B757D9B24}" sibTransId="{59AC3FCC-86BE-45A7-8004-B7E72EF7A6C2}"/>
+    <dgm:cxn modelId="{2731C256-6ABE-4627-9F9D-BFF3ECAE1262}" type="presOf" srcId="{33D176D9-92CB-4E8E-B745-2A02B4C7CEBE}" destId="{4BD72CD7-94F7-46A3-A4EB-66B07FA78D22}" srcOrd="0" destOrd="0" presId="urn:microsoft.com/office/officeart/2018/2/layout/IconVerticalSolidList"/>
+    <dgm:cxn modelId="{D2504B78-8999-49E1-BA49-8E045A672469}" type="presOf" srcId="{6C01B371-272E-46B1-9056-01850AA5F5F1}" destId="{DD9611CE-201A-4FB8-9005-5C611C691615}" srcOrd="0" destOrd="0" presId="urn:microsoft.com/office/officeart/2018/2/layout/IconVerticalSolidList"/>
+    <dgm:cxn modelId="{FACBA37C-0DD8-44BB-83B0-7217E9BAB387}" type="presOf" srcId="{0509E7B3-079C-41FA-BD65-DE38A38DC459}" destId="{2952F401-2612-4806-B4E8-2AA51D44616C}" srcOrd="0" destOrd="0" presId="urn:microsoft.com/office/officeart/2018/2/layout/IconVerticalSolidList"/>
+    <dgm:cxn modelId="{2B95627D-FC7A-468E-BC2B-1902223D83A5}" srcId="{0509E7B3-079C-41FA-BD65-DE38A38DC459}" destId="{6C01B371-272E-46B1-9056-01850AA5F5F1}" srcOrd="0" destOrd="0" parTransId="{C2236C7E-2A1C-4413-AC08-D4FA2674993C}" sibTransId="{C96F95ED-D73C-4A91-B178-FE0E13419EA5}"/>
+    <dgm:cxn modelId="{8F637F7D-D02F-4023-85A7-741AB6A3BF43}" type="presOf" srcId="{DD6F7A4C-D8C6-464A-9378-C0F2D9EDC8A0}" destId="{E5163663-6809-4479-937C-CC4F9D8F7750}" srcOrd="0" destOrd="0" presId="urn:microsoft.com/office/officeart/2018/2/layout/IconVerticalSolidList"/>
+    <dgm:cxn modelId="{A7F419D8-D2A0-4D1C-9A54-F92607C3F734}" srcId="{0509E7B3-079C-41FA-BD65-DE38A38DC459}" destId="{B4C6CB0E-67F5-4965-8270-9D8203C5F71A}" srcOrd="3" destOrd="0" parTransId="{A33EA111-F655-4444-A541-BC090C7BC1F6}" sibTransId="{460AB618-9480-4A58-B29D-EF819ACC12E9}"/>
+    <dgm:cxn modelId="{620256EA-A6DE-487C-8433-4EB55408F0D0}" type="presOf" srcId="{B4C6CB0E-67F5-4965-8270-9D8203C5F71A}" destId="{64FE9260-829A-4D46-A3AE-B696D600B6E9}" srcOrd="0" destOrd="0" presId="urn:microsoft.com/office/officeart/2018/2/layout/IconVerticalSolidList"/>
+    <dgm:cxn modelId="{233439FD-CC01-4B63-85EA-1434B42C23BA}" srcId="{0509E7B3-079C-41FA-BD65-DE38A38DC459}" destId="{DD6F7A4C-D8C6-464A-9378-C0F2D9EDC8A0}" srcOrd="2" destOrd="0" parTransId="{FE4C140A-A898-4ED0-B114-459E053CE701}" sibTransId="{7F630590-6EB7-4DD7-9E39-1BF1548D29F2}"/>
+    <dgm:cxn modelId="{83BDD33D-27D3-4A03-A40A-942A091F6B43}" type="presParOf" srcId="{2952F401-2612-4806-B4E8-2AA51D44616C}" destId="{455BDFD6-FBAE-468C-B00D-92C8952B9CD4}" srcOrd="0" destOrd="0" presId="urn:microsoft.com/office/officeart/2018/2/layout/IconVerticalSolidList"/>
+    <dgm:cxn modelId="{CE2C99DE-9B95-43AD-A42F-8AA980706E73}" type="presParOf" srcId="{455BDFD6-FBAE-468C-B00D-92C8952B9CD4}" destId="{72968954-DE26-4C17-96EF-E48DD42A9430}" srcOrd="0" destOrd="0" presId="urn:microsoft.com/office/officeart/2018/2/layout/IconVerticalSolidList"/>
+    <dgm:cxn modelId="{41D4F43A-F1B9-49CD-94CE-CB25134C2C9E}" type="presParOf" srcId="{455BDFD6-FBAE-468C-B00D-92C8952B9CD4}" destId="{3BE2EC3C-E37D-4B6B-8CE6-2E5C07FAFC2B}" srcOrd="1" destOrd="0" presId="urn:microsoft.com/office/officeart/2018/2/layout/IconVerticalSolidList"/>
+    <dgm:cxn modelId="{650B4A62-6F82-4667-84A3-18AE0CD04149}" type="presParOf" srcId="{455BDFD6-FBAE-468C-B00D-92C8952B9CD4}" destId="{7F542A8F-D0F4-42C6-B2DD-9D8671F97ACD}" srcOrd="2" destOrd="0" presId="urn:microsoft.com/office/officeart/2018/2/layout/IconVerticalSolidList"/>
+    <dgm:cxn modelId="{45DE16FA-A56B-4DAC-B298-47EB3F9A204C}" type="presParOf" srcId="{455BDFD6-FBAE-468C-B00D-92C8952B9CD4}" destId="{DD9611CE-201A-4FB8-9005-5C611C691615}" srcOrd="3" destOrd="0" presId="urn:microsoft.com/office/officeart/2018/2/layout/IconVerticalSolidList"/>
+    <dgm:cxn modelId="{C4D8C795-45E2-414E-9DCD-B3336200759C}" type="presParOf" srcId="{2952F401-2612-4806-B4E8-2AA51D44616C}" destId="{EE99FFA4-BF94-493F-82F8-631D7CADAB1C}" srcOrd="1" destOrd="0" presId="urn:microsoft.com/office/officeart/2018/2/layout/IconVerticalSolidList"/>
+    <dgm:cxn modelId="{9506C72F-E285-4705-AC48-C354DEB90FCE}" type="presParOf" srcId="{2952F401-2612-4806-B4E8-2AA51D44616C}" destId="{37D67F16-B9F1-41F2-A195-448293B493A8}" srcOrd="2" destOrd="0" presId="urn:microsoft.com/office/officeart/2018/2/layout/IconVerticalSolidList"/>
+    <dgm:cxn modelId="{F099F039-45FE-48A9-9E91-D5503C078A20}" type="presParOf" srcId="{37D67F16-B9F1-41F2-A195-448293B493A8}" destId="{7D7B6B63-E17E-4C7B-960E-0E4E680C401F}" srcOrd="0" destOrd="0" presId="urn:microsoft.com/office/officeart/2018/2/layout/IconVerticalSolidList"/>
+    <dgm:cxn modelId="{264780D6-FF01-4558-A83D-E46AB0E8DE18}" type="presParOf" srcId="{37D67F16-B9F1-41F2-A195-448293B493A8}" destId="{7A491E4D-D7D9-47F0-B258-C776B64A9D17}" srcOrd="1" destOrd="0" presId="urn:microsoft.com/office/officeart/2018/2/layout/IconVerticalSolidList"/>
+    <dgm:cxn modelId="{93AC4458-4647-45A7-8177-53C933C059B7}" type="presParOf" srcId="{37D67F16-B9F1-41F2-A195-448293B493A8}" destId="{A2A53907-D5B9-4E58-929B-82B0721455F6}" srcOrd="2" destOrd="0" presId="urn:microsoft.com/office/officeart/2018/2/layout/IconVerticalSolidList"/>
+    <dgm:cxn modelId="{F5C2379F-EA63-48E4-8111-104C79264666}" type="presParOf" srcId="{37D67F16-B9F1-41F2-A195-448293B493A8}" destId="{4BD72CD7-94F7-46A3-A4EB-66B07FA78D22}" srcOrd="3" destOrd="0" presId="urn:microsoft.com/office/officeart/2018/2/layout/IconVerticalSolidList"/>
+    <dgm:cxn modelId="{E5D61EFA-954E-4D55-ABA8-898C850AE377}" type="presParOf" srcId="{2952F401-2612-4806-B4E8-2AA51D44616C}" destId="{B0D9BADF-7F73-4512-A365-8CBC650C9B7C}" srcOrd="3" destOrd="0" presId="urn:microsoft.com/office/officeart/2018/2/layout/IconVerticalSolidList"/>
+    <dgm:cxn modelId="{F47D9BF4-FE36-4FD8-A452-45CEF63547CC}" type="presParOf" srcId="{2952F401-2612-4806-B4E8-2AA51D44616C}" destId="{3C04544D-F763-43CE-847D-C250D5A13A77}" srcOrd="4" destOrd="0" presId="urn:microsoft.com/office/officeart/2018/2/layout/IconVerticalSolidList"/>
+    <dgm:cxn modelId="{652E78EF-0E1D-485E-8234-B17612EEEE33}" type="presParOf" srcId="{3C04544D-F763-43CE-847D-C250D5A13A77}" destId="{0097AA3F-F4F5-45BD-92D5-6CADAA1CF95B}" srcOrd="0" destOrd="0" presId="urn:microsoft.com/office/officeart/2018/2/layout/IconVerticalSolidList"/>
+    <dgm:cxn modelId="{0F457ED0-071C-4E28-87E0-0323FBFB60DB}" type="presParOf" srcId="{3C04544D-F763-43CE-847D-C250D5A13A77}" destId="{02E2FF33-9FF8-4CA4-BB7E-AF19AFB912A8}" srcOrd="1" destOrd="0" presId="urn:microsoft.com/office/officeart/2018/2/layout/IconVerticalSolidList"/>
+    <dgm:cxn modelId="{26F5FBED-8485-429F-9A59-96B7CE3F91B9}" type="presParOf" srcId="{3C04544D-F763-43CE-847D-C250D5A13A77}" destId="{2B91FDD1-0EAA-49E1-8F3F-B7BC044C515A}" srcOrd="2" destOrd="0" presId="urn:microsoft.com/office/officeart/2018/2/layout/IconVerticalSolidList"/>
+    <dgm:cxn modelId="{8724EE13-211F-4E06-B4F9-DBD5D56DC822}" type="presParOf" srcId="{3C04544D-F763-43CE-847D-C250D5A13A77}" destId="{E5163663-6809-4479-937C-CC4F9D8F7750}" srcOrd="3" destOrd="0" presId="urn:microsoft.com/office/officeart/2018/2/layout/IconVerticalSolidList"/>
+    <dgm:cxn modelId="{66B0C32C-14C4-49F8-B0FD-4B6F3078CF44}" type="presParOf" srcId="{2952F401-2612-4806-B4E8-2AA51D44616C}" destId="{529D4391-9351-4486-881E-17DF90736A4B}" srcOrd="5" destOrd="0" presId="urn:microsoft.com/office/officeart/2018/2/layout/IconVerticalSolidList"/>
+    <dgm:cxn modelId="{EF8090E7-D261-4B12-BE7C-D7C31E2C3F22}" type="presParOf" srcId="{2952F401-2612-4806-B4E8-2AA51D44616C}" destId="{AA5CFE7C-6206-4318-996C-524133CB0AE3}" srcOrd="6" destOrd="0" presId="urn:microsoft.com/office/officeart/2018/2/layout/IconVerticalSolidList"/>
+    <dgm:cxn modelId="{A1329D90-B630-4A14-8204-3899DC009AFF}" type="presParOf" srcId="{AA5CFE7C-6206-4318-996C-524133CB0AE3}" destId="{671B6B7F-2D5E-4E26-9D69-A6A717BCB534}" srcOrd="0" destOrd="0" presId="urn:microsoft.com/office/officeart/2018/2/layout/IconVerticalSolidList"/>
+    <dgm:cxn modelId="{3B8C7BF7-E5C7-4D99-9053-832ECDB37501}" type="presParOf" srcId="{AA5CFE7C-6206-4318-996C-524133CB0AE3}" destId="{9E6D3103-3E6B-4FB2-BB90-807133CEE95C}" srcOrd="1" destOrd="0" presId="urn:microsoft.com/office/officeart/2018/2/layout/IconVerticalSolidList"/>
+    <dgm:cxn modelId="{FA6D443E-20A1-4312-9851-9BF37E74C9A8}" type="presParOf" srcId="{AA5CFE7C-6206-4318-996C-524133CB0AE3}" destId="{ADEFC1CD-2040-41F9-BFF1-1179592AF9BD}" srcOrd="2" destOrd="0" presId="urn:microsoft.com/office/officeart/2018/2/layout/IconVerticalSolidList"/>
+    <dgm:cxn modelId="{59177B4C-C9A1-409A-9033-74F3B727359C}" type="presParOf" srcId="{AA5CFE7C-6206-4318-996C-524133CB0AE3}" destId="{64FE9260-829A-4D46-A3AE-B696D600B6E9}" srcOrd="3" destOrd="0" presId="urn:microsoft.com/office/officeart/2018/2/layout/IconVerticalSolidList"/>
+  </dgm:cxnLst>
+  <dgm:bg/>
+  <dgm:whole/>
+  <dgm:extLst>
+    <a:ext uri="http://schemas.microsoft.com/office/drawing/2008/diagram">
+      <dsp:dataModelExt xmlns:dsp="http://schemas.microsoft.com/office/drawing/2008/diagram" relId="rId7" minVer="http://schemas.openxmlformats.org/drawingml/2006/diagram"/>
     </a:ext>
   </dgm:extLst>
 </dgm:dataModel>
@@ -7399,6 +8904,638 @@
 </dsp:drawing>
 </file>
 
+<file path=ppt/diagrams/drawing4.xml><?xml version="1.0" encoding="utf-8"?>
+<dsp:drawing xmlns:dgm="http://schemas.openxmlformats.org/drawingml/2006/diagram" xmlns:dsp="http://schemas.microsoft.com/office/drawing/2008/diagram" xmlns:a="http://schemas.openxmlformats.org/drawingml/2006/main">
+  <dsp:spTree>
+    <dsp:nvGrpSpPr>
+      <dsp:cNvPr id="0" name=""/>
+      <dsp:cNvGrpSpPr/>
+    </dsp:nvGrpSpPr>
+    <dsp:grpSpPr/>
+    <dsp:sp modelId="{72968954-DE26-4C17-96EF-E48DD42A9430}">
+      <dsp:nvSpPr>
+        <dsp:cNvPr id="0" name=""/>
+        <dsp:cNvSpPr/>
+      </dsp:nvSpPr>
+      <dsp:spPr>
+        <a:xfrm>
+          <a:off x="0" y="3934"/>
+          <a:ext cx="7886700" cy="837226"/>
+        </a:xfrm>
+        <a:prstGeom prst="roundRect">
+          <a:avLst>
+            <a:gd name="adj" fmla="val 10000"/>
+          </a:avLst>
+        </a:prstGeom>
+        <a:solidFill>
+          <a:schemeClr val="accent2">
+            <a:hueOff val="0"/>
+            <a:satOff val="0"/>
+            <a:lumOff val="0"/>
+            <a:alphaOff val="0"/>
+          </a:schemeClr>
+        </a:solidFill>
+        <a:ln>
+          <a:noFill/>
+        </a:ln>
+        <a:effectLst/>
+      </dsp:spPr>
+      <dsp:style>
+        <a:lnRef idx="0">
+          <a:scrgbClr r="0" g="0" b="0"/>
+        </a:lnRef>
+        <a:fillRef idx="1">
+          <a:scrgbClr r="0" g="0" b="0"/>
+        </a:fillRef>
+        <a:effectRef idx="0">
+          <a:scrgbClr r="0" g="0" b="0"/>
+        </a:effectRef>
+        <a:fontRef idx="minor"/>
+      </dsp:style>
+    </dsp:sp>
+    <dsp:sp modelId="{3BE2EC3C-E37D-4B6B-8CE6-2E5C07FAFC2B}">
+      <dsp:nvSpPr>
+        <dsp:cNvPr id="0" name=""/>
+        <dsp:cNvSpPr/>
+      </dsp:nvSpPr>
+      <dsp:spPr>
+        <a:xfrm>
+          <a:off x="253261" y="192310"/>
+          <a:ext cx="460924" cy="460474"/>
+        </a:xfrm>
+        <a:prstGeom prst="rect">
+          <a:avLst/>
+        </a:prstGeom>
+        <a:blipFill>
+          <a:blip xmlns:r="http://schemas.openxmlformats.org/officeDocument/2006/relationships">
+            <a:extLst>
+              <a:ext uri="{28A0092B-C50C-407E-A947-70E740481C1C}">
+                <a14:useLocalDpi xmlns:a14="http://schemas.microsoft.com/office/drawing/2010/main" val="0"/>
+              </a:ext>
+              <a:ext uri="{96DAC541-7B7A-43D3-8B79-37D633B846F1}">
+                <asvg:svgBlip xmlns:asvg="http://schemas.microsoft.com/office/drawing/2016/SVG/main" r:embed="rId1"/>
+              </a:ext>
+            </a:extLst>
+          </a:blip>
+          <a:stretch>
+            <a:fillRect/>
+          </a:stretch>
+        </a:blipFill>
+        <a:ln w="25400" cap="flat" cmpd="sng" algn="ctr">
+          <a:noFill/>
+          <a:prstDash val="solid"/>
+        </a:ln>
+        <a:effectLst/>
+      </dsp:spPr>
+      <dsp:style>
+        <a:lnRef idx="2">
+          <a:scrgbClr r="0" g="0" b="0"/>
+        </a:lnRef>
+        <a:fillRef idx="1">
+          <a:scrgbClr r="0" g="0" b="0"/>
+        </a:fillRef>
+        <a:effectRef idx="0">
+          <a:scrgbClr r="0" g="0" b="0"/>
+        </a:effectRef>
+        <a:fontRef idx="minor">
+          <a:schemeClr val="lt1"/>
+        </a:fontRef>
+      </dsp:style>
+    </dsp:sp>
+    <dsp:sp modelId="{DD9611CE-201A-4FB8-9005-5C611C691615}">
+      <dsp:nvSpPr>
+        <dsp:cNvPr id="0" name=""/>
+        <dsp:cNvSpPr/>
+      </dsp:nvSpPr>
+      <dsp:spPr>
+        <a:xfrm>
+          <a:off x="967447" y="3934"/>
+          <a:ext cx="6875546" cy="915716"/>
+        </a:xfrm>
+        <a:prstGeom prst="rect">
+          <a:avLst/>
+        </a:prstGeom>
+        <a:noFill/>
+        <a:ln>
+          <a:noFill/>
+        </a:ln>
+        <a:effectLst/>
+      </dsp:spPr>
+      <dsp:style>
+        <a:lnRef idx="0">
+          <a:scrgbClr r="0" g="0" b="0"/>
+        </a:lnRef>
+        <a:fillRef idx="0">
+          <a:scrgbClr r="0" g="0" b="0"/>
+        </a:fillRef>
+        <a:effectRef idx="0">
+          <a:scrgbClr r="0" g="0" b="0"/>
+        </a:effectRef>
+        <a:fontRef idx="minor"/>
+      </dsp:style>
+      <dsp:txBody>
+        <a:bodyPr spcFirstLastPara="0" vert="horz" wrap="square" lIns="96913" tIns="96913" rIns="96913" bIns="96913" numCol="1" spcCol="1270" anchor="ctr" anchorCtr="0">
+          <a:noAutofit/>
+        </a:bodyPr>
+        <a:lstStyle/>
+        <a:p>
+          <a:pPr marL="0" lvl="0" indent="0" algn="l" defTabSz="622300">
+            <a:lnSpc>
+              <a:spcPct val="90000"/>
+            </a:lnSpc>
+            <a:spcBef>
+              <a:spcPct val="0"/>
+            </a:spcBef>
+            <a:spcAft>
+              <a:spcPct val="35000"/>
+            </a:spcAft>
+            <a:buNone/>
+          </a:pPr>
+          <a:r>
+            <a:rPr lang="en-GB" sz="1400" kern="1200" dirty="0"/>
+            <a:t>Feature reduction techniques, including PCA, </a:t>
+          </a:r>
+          <a:r>
+            <a:rPr lang="en-GB" sz="1400" kern="1200" dirty="0" err="1"/>
+            <a:t>AutoEncoder</a:t>
+          </a:r>
+          <a:r>
+            <a:rPr lang="en-GB" sz="1400" kern="1200" dirty="0"/>
+            <a:t>, generally lead to a decrease in model performance, particularly in terms of accuracy and F1 score.</a:t>
+          </a:r>
+          <a:endParaRPr lang="en-US" sz="1400" kern="1200" dirty="0"/>
+        </a:p>
+      </dsp:txBody>
+      <dsp:txXfrm>
+        <a:off x="967447" y="3934"/>
+        <a:ext cx="6875546" cy="915716"/>
+      </dsp:txXfrm>
+    </dsp:sp>
+    <dsp:sp modelId="{7D7B6B63-E17E-4C7B-960E-0E4E680C401F}">
+      <dsp:nvSpPr>
+        <dsp:cNvPr id="0" name=""/>
+        <dsp:cNvSpPr/>
+      </dsp:nvSpPr>
+      <dsp:spPr>
+        <a:xfrm>
+          <a:off x="0" y="1148580"/>
+          <a:ext cx="7886700" cy="837226"/>
+        </a:xfrm>
+        <a:prstGeom prst="roundRect">
+          <a:avLst>
+            <a:gd name="adj" fmla="val 10000"/>
+          </a:avLst>
+        </a:prstGeom>
+        <a:solidFill>
+          <a:schemeClr val="accent3">
+            <a:hueOff val="0"/>
+            <a:satOff val="0"/>
+            <a:lumOff val="0"/>
+            <a:alphaOff val="0"/>
+          </a:schemeClr>
+        </a:solidFill>
+        <a:ln>
+          <a:noFill/>
+        </a:ln>
+        <a:effectLst/>
+      </dsp:spPr>
+      <dsp:style>
+        <a:lnRef idx="0">
+          <a:scrgbClr r="0" g="0" b="0"/>
+        </a:lnRef>
+        <a:fillRef idx="1">
+          <a:scrgbClr r="0" g="0" b="0"/>
+        </a:fillRef>
+        <a:effectRef idx="0">
+          <a:scrgbClr r="0" g="0" b="0"/>
+        </a:effectRef>
+        <a:fontRef idx="minor"/>
+      </dsp:style>
+    </dsp:sp>
+    <dsp:sp modelId="{7A491E4D-D7D9-47F0-B258-C776B64A9D17}">
+      <dsp:nvSpPr>
+        <dsp:cNvPr id="0" name=""/>
+        <dsp:cNvSpPr/>
+      </dsp:nvSpPr>
+      <dsp:spPr>
+        <a:xfrm>
+          <a:off x="253261" y="1336956"/>
+          <a:ext cx="460924" cy="460474"/>
+        </a:xfrm>
+        <a:prstGeom prst="rect">
+          <a:avLst/>
+        </a:prstGeom>
+        <a:blipFill>
+          <a:blip xmlns:r="http://schemas.openxmlformats.org/officeDocument/2006/relationships">
+            <a:extLst>
+              <a:ext uri="{28A0092B-C50C-407E-A947-70E740481C1C}">
+                <a14:useLocalDpi xmlns:a14="http://schemas.microsoft.com/office/drawing/2010/main" val="0"/>
+              </a:ext>
+              <a:ext uri="{96DAC541-7B7A-43D3-8B79-37D633B846F1}">
+                <asvg:svgBlip xmlns:asvg="http://schemas.microsoft.com/office/drawing/2016/SVG/main" r:embed="rId2"/>
+              </a:ext>
+            </a:extLst>
+          </a:blip>
+          <a:stretch>
+            <a:fillRect/>
+          </a:stretch>
+        </a:blipFill>
+        <a:ln w="25400" cap="flat" cmpd="sng" algn="ctr">
+          <a:noFill/>
+          <a:prstDash val="solid"/>
+        </a:ln>
+        <a:effectLst/>
+      </dsp:spPr>
+      <dsp:style>
+        <a:lnRef idx="2">
+          <a:scrgbClr r="0" g="0" b="0"/>
+        </a:lnRef>
+        <a:fillRef idx="1">
+          <a:scrgbClr r="0" g="0" b="0"/>
+        </a:fillRef>
+        <a:effectRef idx="0">
+          <a:scrgbClr r="0" g="0" b="0"/>
+        </a:effectRef>
+        <a:fontRef idx="minor">
+          <a:schemeClr val="lt1"/>
+        </a:fontRef>
+      </dsp:style>
+    </dsp:sp>
+    <dsp:sp modelId="{4BD72CD7-94F7-46A3-A4EB-66B07FA78D22}">
+      <dsp:nvSpPr>
+        <dsp:cNvPr id="0" name=""/>
+        <dsp:cNvSpPr/>
+      </dsp:nvSpPr>
+      <dsp:spPr>
+        <a:xfrm>
+          <a:off x="967447" y="1148580"/>
+          <a:ext cx="6875546" cy="915716"/>
+        </a:xfrm>
+        <a:prstGeom prst="rect">
+          <a:avLst/>
+        </a:prstGeom>
+        <a:noFill/>
+        <a:ln>
+          <a:noFill/>
+        </a:ln>
+        <a:effectLst/>
+      </dsp:spPr>
+      <dsp:style>
+        <a:lnRef idx="0">
+          <a:scrgbClr r="0" g="0" b="0"/>
+        </a:lnRef>
+        <a:fillRef idx="0">
+          <a:scrgbClr r="0" g="0" b="0"/>
+        </a:fillRef>
+        <a:effectRef idx="0">
+          <a:scrgbClr r="0" g="0" b="0"/>
+        </a:effectRef>
+        <a:fontRef idx="minor"/>
+      </dsp:style>
+      <dsp:txBody>
+        <a:bodyPr spcFirstLastPara="0" vert="horz" wrap="square" lIns="96913" tIns="96913" rIns="96913" bIns="96913" numCol="1" spcCol="1270" anchor="ctr" anchorCtr="0">
+          <a:noAutofit/>
+        </a:bodyPr>
+        <a:lstStyle/>
+        <a:p>
+          <a:pPr marL="0" lvl="0" indent="0" algn="l" defTabSz="622300">
+            <a:lnSpc>
+              <a:spcPct val="90000"/>
+            </a:lnSpc>
+            <a:spcBef>
+              <a:spcPct val="0"/>
+            </a:spcBef>
+            <a:spcAft>
+              <a:spcPct val="35000"/>
+            </a:spcAft>
+            <a:buNone/>
+          </a:pPr>
+          <a:r>
+            <a:rPr lang="en-GB" sz="1400" kern="1200" dirty="0"/>
+            <a:t>If</a:t>
+          </a:r>
+          <a:r>
+            <a:rPr lang="zh-CN" sz="1400" kern="1200" dirty="0"/>
+            <a:t> </a:t>
+          </a:r>
+          <a:r>
+            <a:rPr lang="en-GB" sz="1400" kern="1200" dirty="0"/>
+            <a:t>a certain degree of performance degradation is acceptable, more aggressive dimensionality reduction can be applied to significantly reduce feature size and computational cost.</a:t>
+          </a:r>
+          <a:endParaRPr lang="en-US" sz="1400" kern="1200" dirty="0"/>
+        </a:p>
+      </dsp:txBody>
+      <dsp:txXfrm>
+        <a:off x="967447" y="1148580"/>
+        <a:ext cx="6875546" cy="915716"/>
+      </dsp:txXfrm>
+    </dsp:sp>
+    <dsp:sp modelId="{0097AA3F-F4F5-45BD-92D5-6CADAA1CF95B}">
+      <dsp:nvSpPr>
+        <dsp:cNvPr id="0" name=""/>
+        <dsp:cNvSpPr/>
+      </dsp:nvSpPr>
+      <dsp:spPr>
+        <a:xfrm>
+          <a:off x="0" y="2293226"/>
+          <a:ext cx="7886700" cy="837226"/>
+        </a:xfrm>
+        <a:prstGeom prst="roundRect">
+          <a:avLst>
+            <a:gd name="adj" fmla="val 10000"/>
+          </a:avLst>
+        </a:prstGeom>
+        <a:solidFill>
+          <a:schemeClr val="accent4">
+            <a:hueOff val="0"/>
+            <a:satOff val="0"/>
+            <a:lumOff val="0"/>
+            <a:alphaOff val="0"/>
+          </a:schemeClr>
+        </a:solidFill>
+        <a:ln>
+          <a:noFill/>
+        </a:ln>
+        <a:effectLst/>
+      </dsp:spPr>
+      <dsp:style>
+        <a:lnRef idx="0">
+          <a:scrgbClr r="0" g="0" b="0"/>
+        </a:lnRef>
+        <a:fillRef idx="1">
+          <a:scrgbClr r="0" g="0" b="0"/>
+        </a:fillRef>
+        <a:effectRef idx="0">
+          <a:scrgbClr r="0" g="0" b="0"/>
+        </a:effectRef>
+        <a:fontRef idx="minor"/>
+      </dsp:style>
+    </dsp:sp>
+    <dsp:sp modelId="{02E2FF33-9FF8-4CA4-BB7E-AF19AFB912A8}">
+      <dsp:nvSpPr>
+        <dsp:cNvPr id="0" name=""/>
+        <dsp:cNvSpPr/>
+      </dsp:nvSpPr>
+      <dsp:spPr>
+        <a:xfrm>
+          <a:off x="253261" y="2481602"/>
+          <a:ext cx="460924" cy="460474"/>
+        </a:xfrm>
+        <a:prstGeom prst="rect">
+          <a:avLst/>
+        </a:prstGeom>
+        <a:blipFill>
+          <a:blip xmlns:r="http://schemas.openxmlformats.org/officeDocument/2006/relationships">
+            <a:extLst>
+              <a:ext uri="{28A0092B-C50C-407E-A947-70E740481C1C}">
+                <a14:useLocalDpi xmlns:a14="http://schemas.microsoft.com/office/drawing/2010/main" val="0"/>
+              </a:ext>
+              <a:ext uri="{96DAC541-7B7A-43D3-8B79-37D633B846F1}">
+                <asvg:svgBlip xmlns:asvg="http://schemas.microsoft.com/office/drawing/2016/SVG/main" r:embed="rId3"/>
+              </a:ext>
+            </a:extLst>
+          </a:blip>
+          <a:stretch>
+            <a:fillRect/>
+          </a:stretch>
+        </a:blipFill>
+        <a:ln w="25400" cap="flat" cmpd="sng" algn="ctr">
+          <a:noFill/>
+          <a:prstDash val="solid"/>
+        </a:ln>
+        <a:effectLst/>
+      </dsp:spPr>
+      <dsp:style>
+        <a:lnRef idx="2">
+          <a:scrgbClr r="0" g="0" b="0"/>
+        </a:lnRef>
+        <a:fillRef idx="1">
+          <a:scrgbClr r="0" g="0" b="0"/>
+        </a:fillRef>
+        <a:effectRef idx="0">
+          <a:scrgbClr r="0" g="0" b="0"/>
+        </a:effectRef>
+        <a:fontRef idx="minor">
+          <a:schemeClr val="lt1"/>
+        </a:fontRef>
+      </dsp:style>
+    </dsp:sp>
+    <dsp:sp modelId="{E5163663-6809-4479-937C-CC4F9D8F7750}">
+      <dsp:nvSpPr>
+        <dsp:cNvPr id="0" name=""/>
+        <dsp:cNvSpPr/>
+      </dsp:nvSpPr>
+      <dsp:spPr>
+        <a:xfrm>
+          <a:off x="967447" y="2293226"/>
+          <a:ext cx="6875546" cy="915716"/>
+        </a:xfrm>
+        <a:prstGeom prst="rect">
+          <a:avLst/>
+        </a:prstGeom>
+        <a:noFill/>
+        <a:ln>
+          <a:noFill/>
+        </a:ln>
+        <a:effectLst/>
+      </dsp:spPr>
+      <dsp:style>
+        <a:lnRef idx="0">
+          <a:scrgbClr r="0" g="0" b="0"/>
+        </a:lnRef>
+        <a:fillRef idx="0">
+          <a:scrgbClr r="0" g="0" b="0"/>
+        </a:fillRef>
+        <a:effectRef idx="0">
+          <a:scrgbClr r="0" g="0" b="0"/>
+        </a:effectRef>
+        <a:fontRef idx="minor"/>
+      </dsp:style>
+      <dsp:txBody>
+        <a:bodyPr spcFirstLastPara="0" vert="horz" wrap="square" lIns="96913" tIns="96913" rIns="96913" bIns="96913" numCol="1" spcCol="1270" anchor="ctr" anchorCtr="0">
+          <a:noAutofit/>
+        </a:bodyPr>
+        <a:lstStyle/>
+        <a:p>
+          <a:pPr marL="0" lvl="0" indent="0" algn="l" defTabSz="622300">
+            <a:lnSpc>
+              <a:spcPct val="90000"/>
+            </a:lnSpc>
+            <a:spcBef>
+              <a:spcPct val="0"/>
+            </a:spcBef>
+            <a:spcAft>
+              <a:spcPct val="35000"/>
+            </a:spcAft>
+            <a:buNone/>
+          </a:pPr>
+          <a:r>
+            <a:rPr lang="en-GB" sz="1400" kern="1200"/>
+            <a:t>ResNeXt introduces high CPU overhead when applied to low-dimensional flow-level data, without improving accuracy or F1 score, making it unsuitable for deployment on edge devices. In contrast, PCA and AutoEncoder show no significant resource bottlenecks and are more suitable for edge-based IDS.</a:t>
+          </a:r>
+          <a:endParaRPr lang="en-US" sz="1400" kern="1200"/>
+        </a:p>
+      </dsp:txBody>
+      <dsp:txXfrm>
+        <a:off x="967447" y="2293226"/>
+        <a:ext cx="6875546" cy="915716"/>
+      </dsp:txXfrm>
+    </dsp:sp>
+    <dsp:sp modelId="{671B6B7F-2D5E-4E26-9D69-A6A717BCB534}">
+      <dsp:nvSpPr>
+        <dsp:cNvPr id="0" name=""/>
+        <dsp:cNvSpPr/>
+      </dsp:nvSpPr>
+      <dsp:spPr>
+        <a:xfrm>
+          <a:off x="0" y="3437872"/>
+          <a:ext cx="7886700" cy="837226"/>
+        </a:xfrm>
+        <a:prstGeom prst="roundRect">
+          <a:avLst>
+            <a:gd name="adj" fmla="val 10000"/>
+          </a:avLst>
+        </a:prstGeom>
+        <a:solidFill>
+          <a:schemeClr val="accent5">
+            <a:hueOff val="0"/>
+            <a:satOff val="0"/>
+            <a:lumOff val="0"/>
+            <a:alphaOff val="0"/>
+          </a:schemeClr>
+        </a:solidFill>
+        <a:ln>
+          <a:noFill/>
+        </a:ln>
+        <a:effectLst/>
+      </dsp:spPr>
+      <dsp:style>
+        <a:lnRef idx="0">
+          <a:scrgbClr r="0" g="0" b="0"/>
+        </a:lnRef>
+        <a:fillRef idx="1">
+          <a:scrgbClr r="0" g="0" b="0"/>
+        </a:fillRef>
+        <a:effectRef idx="0">
+          <a:scrgbClr r="0" g="0" b="0"/>
+        </a:effectRef>
+        <a:fontRef idx="minor"/>
+      </dsp:style>
+    </dsp:sp>
+    <dsp:sp modelId="{9E6D3103-3E6B-4FB2-BB90-807133CEE95C}">
+      <dsp:nvSpPr>
+        <dsp:cNvPr id="0" name=""/>
+        <dsp:cNvSpPr/>
+      </dsp:nvSpPr>
+      <dsp:spPr>
+        <a:xfrm>
+          <a:off x="253261" y="3626248"/>
+          <a:ext cx="460924" cy="460474"/>
+        </a:xfrm>
+        <a:prstGeom prst="rect">
+          <a:avLst/>
+        </a:prstGeom>
+        <a:blipFill>
+          <a:blip xmlns:r="http://schemas.openxmlformats.org/officeDocument/2006/relationships">
+            <a:extLst>
+              <a:ext uri="{28A0092B-C50C-407E-A947-70E740481C1C}">
+                <a14:useLocalDpi xmlns:a14="http://schemas.microsoft.com/office/drawing/2010/main" val="0"/>
+              </a:ext>
+              <a:ext uri="{96DAC541-7B7A-43D3-8B79-37D633B846F1}">
+                <asvg:svgBlip xmlns:asvg="http://schemas.microsoft.com/office/drawing/2016/SVG/main" r:embed="rId4"/>
+              </a:ext>
+            </a:extLst>
+          </a:blip>
+          <a:stretch>
+            <a:fillRect/>
+          </a:stretch>
+        </a:blipFill>
+        <a:ln w="25400" cap="flat" cmpd="sng" algn="ctr">
+          <a:noFill/>
+          <a:prstDash val="solid"/>
+        </a:ln>
+        <a:effectLst/>
+      </dsp:spPr>
+      <dsp:style>
+        <a:lnRef idx="2">
+          <a:scrgbClr r="0" g="0" b="0"/>
+        </a:lnRef>
+        <a:fillRef idx="1">
+          <a:scrgbClr r="0" g="0" b="0"/>
+        </a:fillRef>
+        <a:effectRef idx="0">
+          <a:scrgbClr r="0" g="0" b="0"/>
+        </a:effectRef>
+        <a:fontRef idx="minor">
+          <a:schemeClr val="lt1"/>
+        </a:fontRef>
+      </dsp:style>
+    </dsp:sp>
+    <dsp:sp modelId="{64FE9260-829A-4D46-A3AE-B696D600B6E9}">
+      <dsp:nvSpPr>
+        <dsp:cNvPr id="0" name=""/>
+        <dsp:cNvSpPr/>
+      </dsp:nvSpPr>
+      <dsp:spPr>
+        <a:xfrm>
+          <a:off x="967447" y="3437872"/>
+          <a:ext cx="6875546" cy="915716"/>
+        </a:xfrm>
+        <a:prstGeom prst="rect">
+          <a:avLst/>
+        </a:prstGeom>
+        <a:noFill/>
+        <a:ln>
+          <a:noFill/>
+        </a:ln>
+        <a:effectLst/>
+      </dsp:spPr>
+      <dsp:style>
+        <a:lnRef idx="0">
+          <a:scrgbClr r="0" g="0" b="0"/>
+        </a:lnRef>
+        <a:fillRef idx="0">
+          <a:scrgbClr r="0" g="0" b="0"/>
+        </a:fillRef>
+        <a:effectRef idx="0">
+          <a:scrgbClr r="0" g="0" b="0"/>
+        </a:effectRef>
+        <a:fontRef idx="minor"/>
+      </dsp:style>
+      <dsp:txBody>
+        <a:bodyPr spcFirstLastPara="0" vert="horz" wrap="square" lIns="96913" tIns="96913" rIns="96913" bIns="96913" numCol="1" spcCol="1270" anchor="ctr" anchorCtr="0">
+          <a:noAutofit/>
+        </a:bodyPr>
+        <a:lstStyle/>
+        <a:p>
+          <a:pPr marL="0" lvl="0" indent="0" algn="l" defTabSz="622300">
+            <a:lnSpc>
+              <a:spcPct val="90000"/>
+            </a:lnSpc>
+            <a:spcBef>
+              <a:spcPct val="0"/>
+            </a:spcBef>
+            <a:spcAft>
+              <a:spcPct val="35000"/>
+            </a:spcAft>
+            <a:buNone/>
+          </a:pPr>
+          <a:r>
+            <a:rPr lang="en-GB" sz="1400" kern="1200"/>
+            <a:t>Feature reduction reduces performance but improves efficiency; PCA and AutoEncoder are edge-friendly, while ResNeXt is computationally expensive and ineffective for low-dimensional data.</a:t>
+          </a:r>
+          <a:endParaRPr lang="en-US" sz="1400" kern="1200"/>
+        </a:p>
+      </dsp:txBody>
+      <dsp:txXfrm>
+        <a:off x="967447" y="3437872"/>
+        <a:ext cx="6875546" cy="915716"/>
+      </dsp:txXfrm>
+    </dsp:sp>
+  </dsp:spTree>
+</dsp:drawing>
+</file>
+
 <file path=ppt/diagrams/layout1.xml><?xml version="1.0" encoding="utf-8"?>
 <dgm:layoutDef xmlns:dgm="http://schemas.openxmlformats.org/drawingml/2006/diagram" xmlns:a="http://schemas.openxmlformats.org/drawingml/2006/main" uniqueId="urn:microsoft.com/office/officeart/2016/7/layout/RepeatingBendingProcessNew">
   <dgm:title val="Repeating Bending Process New"/>
@@ -8224,6 +10361,300 @@
 </dgm:layoutDef>
 </file>
 
+<file path=ppt/diagrams/layout4.xml><?xml version="1.0" encoding="utf-8"?>
+<dgm:layoutDef xmlns:dgm="http://schemas.openxmlformats.org/drawingml/2006/diagram" xmlns:a="http://schemas.openxmlformats.org/drawingml/2006/main" uniqueId="urn:microsoft.com/office/officeart/2018/2/layout/IconVerticalSolidList">
+  <dgm:title val="Icon Vertical Solid List"/>
+  <dgm:desc val="Use to show a series of visuals from top to bottom with Level 1 or Level 1 and Level 2 text grouped in a shape. Works best with icons or small pictures with lengthier descriptions."/>
+  <dgm:catLst>
+    <dgm:cat type="icon" pri="500"/>
+  </dgm:catLst>
+  <dgm:sampData useDef="1">
+    <dgm:dataModel>
+      <dgm:ptLst/>
+      <dgm:bg/>
+      <dgm:whole/>
+    </dgm:dataModel>
+  </dgm:sampData>
+  <dgm:styleData useDef="1">
+    <dgm:dataModel>
+      <dgm:ptLst/>
+      <dgm:bg/>
+      <dgm:whole/>
+    </dgm:dataModel>
+  </dgm:styleData>
+  <dgm:clrData useDef="1">
+    <dgm:dataModel>
+      <dgm:ptLst/>
+      <dgm:bg/>
+      <dgm:whole/>
+    </dgm:dataModel>
+  </dgm:clrData>
+  <dgm:layoutNode name="root">
+    <dgm:varLst>
+      <dgm:dir/>
+      <dgm:resizeHandles val="exact"/>
+    </dgm:varLst>
+    <dgm:choose name="Name0">
+      <dgm:if name="Name1" axis="self" func="var" arg="dir" op="equ" val="norm">
+        <dgm:alg type="lin">
+          <dgm:param type="linDir" val="fromT"/>
+          <dgm:param type="nodeHorzAlign" val="l"/>
+        </dgm:alg>
+      </dgm:if>
+      <dgm:else name="Name2">
+        <dgm:alg type="lin">
+          <dgm:param type="linDir" val="fromT"/>
+          <dgm:param type="nodeHorzAlign" val="r"/>
+        </dgm:alg>
+      </dgm:else>
+    </dgm:choose>
+    <dgm:shape xmlns:r="http://schemas.openxmlformats.org/officeDocument/2006/relationships" r:blip="">
+      <dgm:adjLst/>
+    </dgm:shape>
+    <dgm:presOf/>
+    <dgm:choose name="Name3">
+      <dgm:if name="Name4" axis="ch" ptType="node" func="cnt" op="lte" val="3">
+        <dgm:constrLst>
+          <dgm:constr type="h" for="ch" forName="compNode" refType="h" fact="0.3"/>
+          <dgm:constr type="w" for="ch" forName="compNode" refType="w"/>
+          <dgm:constr type="h" for="ch" forName="sibTrans" refType="h" refFor="ch" refForName="compNode" fact="0.25"/>
+          <dgm:constr type="primFontSz" for="des" forName="parTx" val="25"/>
+          <dgm:constr type="primFontSz" for="des" forName="desTx" refType="primFontSz" refFor="des" refForName="parTx" op="lte" fact="0.75"/>
+          <dgm:constr type="h" for="des" forName="compNode" op="equ"/>
+          <dgm:constr type="h" for="des" forName="bgRect" op="equ"/>
+          <dgm:constr type="h" for="des" forName="iconRect" op="equ"/>
+          <dgm:constr type="w" for="des" forName="iconRect" op="equ"/>
+          <dgm:constr type="h" for="des" forName="spaceRect" op="equ"/>
+          <dgm:constr type="h" for="des" forName="parTx" op="equ"/>
+          <dgm:constr type="h" for="des" forName="desTx" op="equ"/>
+        </dgm:constrLst>
+      </dgm:if>
+      <dgm:if name="Name5" axis="ch" ptType="node" func="cnt" op="lte" val="4">
+        <dgm:constrLst>
+          <dgm:constr type="h" for="ch" forName="compNode" refType="h" fact="0.3"/>
+          <dgm:constr type="w" for="ch" forName="compNode" refType="w"/>
+          <dgm:constr type="h" for="ch" forName="sibTrans" refType="h" refFor="ch" refForName="compNode" fact="0.25"/>
+          <dgm:constr type="primFontSz" for="des" forName="parTx" val="22"/>
+          <dgm:constr type="primFontSz" for="des" forName="desTx" refType="primFontSz" refFor="des" refForName="parTx" op="lte" fact="0.75"/>
+          <dgm:constr type="h" for="des" forName="compNode" op="equ"/>
+          <dgm:constr type="h" for="des" forName="bgRect" op="equ"/>
+          <dgm:constr type="h" for="des" forName="iconRect" op="equ"/>
+          <dgm:constr type="w" for="des" forName="iconRect" op="equ"/>
+          <dgm:constr type="h" for="des" forName="spaceRect" op="equ"/>
+          <dgm:constr type="h" for="des" forName="parTx" op="equ"/>
+          <dgm:constr type="h" for="des" forName="desTx" op="equ"/>
+        </dgm:constrLst>
+      </dgm:if>
+      <dgm:if name="Name6" axis="ch" ptType="node" func="cnt" op="lte" val="6">
+        <dgm:constrLst>
+          <dgm:constr type="h" for="ch" forName="compNode" refType="h" fact="0.3"/>
+          <dgm:constr type="w" for="ch" forName="compNode" refType="w"/>
+          <dgm:constr type="h" for="ch" forName="sibTrans" refType="h" refFor="ch" refForName="compNode" fact="0.25"/>
+          <dgm:constr type="primFontSz" for="des" forName="parTx" val="19"/>
+          <dgm:constr type="primFontSz" for="des" forName="desTx" refType="primFontSz" refFor="des" refForName="parTx" op="lte" fact="0.75"/>
+          <dgm:constr type="h" for="des" forName="compNode" op="equ"/>
+          <dgm:constr type="h" for="des" forName="bgRect" op="equ"/>
+          <dgm:constr type="h" for="des" forName="iconRect" op="equ"/>
+          <dgm:constr type="w" for="des" forName="iconRect" op="equ"/>
+          <dgm:constr type="h" for="des" forName="spaceRect" op="equ"/>
+          <dgm:constr type="h" for="des" forName="parTx" op="equ"/>
+          <dgm:constr type="h" for="des" forName="desTx" op="equ"/>
+        </dgm:constrLst>
+      </dgm:if>
+      <dgm:else name="Name7">
+        <dgm:constrLst>
+          <dgm:constr type="h" for="ch" forName="compNode" refType="h" fact="0.3"/>
+          <dgm:constr type="w" for="ch" forName="compNode" refType="w"/>
+          <dgm:constr type="h" for="ch" forName="sibTrans" refType="h" refFor="ch" refForName="compNode" fact="0.25"/>
+          <dgm:constr type="primFontSz" for="des" forName="parTx" val="16"/>
+          <dgm:constr type="primFontSz" for="des" forName="desTx" refType="primFontSz" refFor="des" refForName="parTx" op="lte" fact="0.75"/>
+          <dgm:constr type="h" for="des" forName="compNode" op="equ"/>
+          <dgm:constr type="h" for="des" forName="bgRect" op="equ"/>
+          <dgm:constr type="h" for="des" forName="iconRect" op="equ"/>
+          <dgm:constr type="w" for="des" forName="iconRect" op="equ"/>
+          <dgm:constr type="h" for="des" forName="spaceRect" op="equ"/>
+          <dgm:constr type="h" for="des" forName="parTx" op="equ"/>
+          <dgm:constr type="h" for="des" forName="desTx" op="equ"/>
+        </dgm:constrLst>
+      </dgm:else>
+    </dgm:choose>
+    <dgm:ruleLst>
+      <dgm:rule type="h" for="ch" forName="compNode" val="0" fact="NaN" max="NaN"/>
+    </dgm:ruleLst>
+    <dgm:forEach name="Name8" axis="ch" ptType="node">
+      <dgm:layoutNode name="compNode">
+        <dgm:alg type="composite"/>
+        <dgm:shape xmlns:r="http://schemas.openxmlformats.org/officeDocument/2006/relationships" r:blip="">
+          <dgm:adjLst/>
+        </dgm:shape>
+        <dgm:presOf axis="self"/>
+        <dgm:choose name="Name9">
+          <dgm:if name="Name10" axis="ch" ptType="node" func="cnt" op="gte" val="1">
+            <dgm:constrLst>
+              <dgm:constr type="w" for="ch" forName="bgRect" refType="w"/>
+              <dgm:constr type="h" for="ch" forName="bgRect" refType="h"/>
+              <dgm:constr type="l" for="ch" forName="bgRect"/>
+              <dgm:constr type="t" for="ch" forName="bgRect"/>
+              <dgm:constr type="h" for="ch" forName="iconRect" refType="h" fact="0.55"/>
+              <dgm:constr type="w" for="ch" forName="iconRect" refType="h" refFor="ch" refForName="iconRect"/>
+              <dgm:constr type="l" for="ch" forName="iconRect" refType="h" refFor="ch" refForName="iconRect" fact="0.55"/>
+              <dgm:constr type="ctrY" for="ch" forName="iconRect" refType="ctrY" refFor="ch" refForName="bgRect"/>
+              <dgm:constr type="w" for="ch" forName="spaceRect" refType="l" refFor="ch" refForName="iconRect"/>
+              <dgm:constr type="h" for="ch" forName="spaceRect" refType="h"/>
+              <dgm:constr type="l" for="ch" forName="spaceRect" refType="r" refFor="ch" refForName="iconRect"/>
+              <dgm:constr type="t" for="ch" forName="spaceRect"/>
+              <dgm:constr type="w" for="ch" forName="parTx" refType="w" fact="0.45"/>
+              <dgm:constr type="h" for="ch" forName="parTx" refType="h"/>
+              <dgm:constr type="l" for="ch" forName="parTx" refType="r" refFor="ch" refForName="spaceRect"/>
+              <dgm:constr type="t" for="ch" forName="parTx"/>
+              <dgm:constr type="h" for="ch" forName="desTx" refType="h"/>
+              <dgm:constr type="l" for="ch" forName="desTx" refType="r" refFor="ch" refForName="parTx"/>
+              <dgm:constr type="t" for="ch" forName="desTx"/>
+            </dgm:constrLst>
+          </dgm:if>
+          <dgm:else name="Name11">
+            <dgm:constrLst>
+              <dgm:constr type="w" for="ch" forName="bgRect" refType="w"/>
+              <dgm:constr type="h" for="ch" forName="bgRect" refType="h"/>
+              <dgm:constr type="l" for="ch" forName="bgRect"/>
+              <dgm:constr type="t" for="ch" forName="bgRect"/>
+              <dgm:constr type="h" for="ch" forName="iconRect" refType="h" fact="0.55"/>
+              <dgm:constr type="w" for="ch" forName="iconRect" refType="h" refFor="ch" refForName="iconRect"/>
+              <dgm:constr type="l" for="ch" forName="iconRect" refType="h" refFor="ch" refForName="iconRect" fact="0.55"/>
+              <dgm:constr type="ctrY" for="ch" forName="iconRect" refType="ctrY" refFor="ch" refForName="bgRect"/>
+              <dgm:constr type="w" for="ch" forName="spaceRect" refType="l" refFor="ch" refForName="iconRect"/>
+              <dgm:constr type="h" for="ch" forName="spaceRect" refType="h"/>
+              <dgm:constr type="l" for="ch" forName="spaceRect" refType="r" refFor="ch" refForName="iconRect"/>
+              <dgm:constr type="t" for="ch" forName="spaceRect"/>
+              <dgm:constr type="h" for="ch" forName="parTx" refType="h"/>
+              <dgm:constr type="l" for="ch" forName="parTx" refType="r" refFor="ch" refForName="spaceRect"/>
+              <dgm:constr type="t" for="ch" forName="parTx"/>
+            </dgm:constrLst>
+          </dgm:else>
+        </dgm:choose>
+        <dgm:ruleLst>
+          <dgm:rule type="h" val="INF" fact="NaN" max="NaN"/>
+        </dgm:ruleLst>
+        <dgm:layoutNode name="bgRect" styleLbl="bgShp">
+          <dgm:alg type="sp"/>
+          <dgm:shape xmlns:r="http://schemas.openxmlformats.org/officeDocument/2006/relationships" type="roundRect" r:blip="">
+            <dgm:adjLst>
+              <dgm:adj idx="1" val="0.1"/>
+            </dgm:adjLst>
+          </dgm:shape>
+          <dgm:presOf/>
+          <dgm:constrLst/>
+          <dgm:ruleLst/>
+        </dgm:layoutNode>
+        <dgm:layoutNode name="iconRect" styleLbl="node1">
+          <dgm:alg type="sp"/>
+          <dgm:shape xmlns:r="http://schemas.openxmlformats.org/officeDocument/2006/relationships" type="rect" r:blip="" blipPhldr="1">
+            <dgm:adjLst/>
+          </dgm:shape>
+          <dgm:presOf/>
+          <dgm:constrLst/>
+          <dgm:ruleLst/>
+        </dgm:layoutNode>
+        <dgm:layoutNode name="spaceRect">
+          <dgm:alg type="sp"/>
+          <dgm:shape xmlns:r="http://schemas.openxmlformats.org/officeDocument/2006/relationships" r:blip="">
+            <dgm:adjLst/>
+          </dgm:shape>
+          <dgm:presOf/>
+          <dgm:constrLst/>
+          <dgm:ruleLst/>
+        </dgm:layoutNode>
+        <dgm:layoutNode name="parTx" styleLbl="revTx">
+          <dgm:varLst>
+            <dgm:chMax val="0"/>
+            <dgm:chPref val="0"/>
+          </dgm:varLst>
+          <dgm:alg type="tx">
+            <dgm:param type="txAnchorVert" val="mid"/>
+            <dgm:param type="parTxLTRAlign" val="l"/>
+            <dgm:param type="shpTxLTRAlignCh" val="l"/>
+            <dgm:param type="parTxRTLAlign" val="r"/>
+            <dgm:param type="shpTxRTLAlignCh" val="r"/>
+          </dgm:alg>
+          <dgm:shape xmlns:r="http://schemas.openxmlformats.org/officeDocument/2006/relationships" type="rect" r:blip="">
+            <dgm:adjLst/>
+          </dgm:shape>
+          <dgm:presOf axis="self" ptType="node"/>
+          <dgm:constrLst>
+            <dgm:constr type="lMarg" refType="h" fact="0.3"/>
+            <dgm:constr type="rMarg" refType="h" fact="0.3"/>
+            <dgm:constr type="tMarg" refType="h" fact="0.3"/>
+            <dgm:constr type="bMarg" refType="h" fact="0.3"/>
+          </dgm:constrLst>
+          <dgm:ruleLst>
+            <dgm:rule type="primFontSz" val="14" fact="NaN" max="NaN"/>
+            <dgm:rule type="h" val="INF" fact="NaN" max="NaN"/>
+          </dgm:ruleLst>
+        </dgm:layoutNode>
+        <dgm:choose name="Name12">
+          <dgm:if name="Name13" axis="ch" ptType="node" func="cnt" op="gte" val="1">
+            <dgm:layoutNode name="desTx" styleLbl="revTx">
+              <dgm:varLst/>
+              <dgm:alg type="tx">
+                <dgm:param type="txAnchorVertCh" val="mid"/>
+                <dgm:param type="parTxLTRAlign" val="l"/>
+                <dgm:param type="shpTxLTRAlignCh" val="l"/>
+                <dgm:param type="parTxRTLAlign" val="r"/>
+                <dgm:param type="shpTxRTLAlignCh" val="r"/>
+                <dgm:param type="stBulletLvl" val="0"/>
+              </dgm:alg>
+              <dgm:shape xmlns:r="http://schemas.openxmlformats.org/officeDocument/2006/relationships" type="rect" r:blip="">
+                <dgm:adjLst/>
+              </dgm:shape>
+              <dgm:presOf axis="des" ptType="node"/>
+              <dgm:constrLst>
+                <dgm:constr type="primFontSz" val="18"/>
+                <dgm:constr type="secFontSz" refType="primFontSz"/>
+                <dgm:constr type="lMarg" refType="h" fact="0.3"/>
+                <dgm:constr type="rMarg" refType="h" fact="0.3"/>
+                <dgm:constr type="tMarg" refType="h" fact="0.3"/>
+                <dgm:constr type="bMarg" refType="h" fact="0.3"/>
+              </dgm:constrLst>
+              <dgm:ruleLst>
+                <dgm:rule type="primFontSz" val="11" fact="NaN" max="NaN"/>
+              </dgm:ruleLst>
+            </dgm:layoutNode>
+          </dgm:if>
+          <dgm:else name="Name14"/>
+        </dgm:choose>
+      </dgm:layoutNode>
+      <dgm:forEach name="Name15" axis="followSib" ptType="sibTrans" cnt="1">
+        <dgm:layoutNode name="sibTrans">
+          <dgm:alg type="sp"/>
+          <dgm:shape xmlns:r="http://schemas.openxmlformats.org/officeDocument/2006/relationships" r:blip="">
+            <dgm:adjLst/>
+          </dgm:shape>
+          <dgm:presOf axis="self"/>
+          <dgm:constrLst/>
+          <dgm:ruleLst/>
+        </dgm:layoutNode>
+      </dgm:forEach>
+    </dgm:forEach>
+  </dgm:layoutNode>
+  <dgm:extLst>
+    <a:ext uri="{68A01E43-0DF5-4B5B-8FA6-DAF915123BFB}">
+      <dgm1612:lstStyle xmlns:dgm1612="http://schemas.microsoft.com/office/drawing/2016/12/diagram">
+        <a:lvl1pPr>
+          <a:lnSpc>
+            <a:spcPct val="100000"/>
+          </a:lnSpc>
+        </a:lvl1pPr>
+        <a:lvl2pPr>
+          <a:lnSpc>
+            <a:spcPct val="100000"/>
+          </a:lnSpc>
+        </a:lvl2pPr>
+      </dgm1612:lstStyle>
+    </a:ext>
+  </dgm:extLst>
+</dgm:layoutDef>
+</file>
+
 <file path=ppt/diagrams/quickStyle1.xml><?xml version="1.0" encoding="utf-8"?>
 <dgm:styleDef xmlns:dgm="http://schemas.openxmlformats.org/drawingml/2006/diagram" xmlns:a="http://schemas.openxmlformats.org/drawingml/2006/main" uniqueId="urn:microsoft.com/office/officeart/2005/8/quickstyle/simple1">
   <dgm:title val=""/>
@@ -11298,6 +13729,1040 @@
         <a:scrgbClr r="0" g="0" b="0"/>
       </a:fillRef>
       <a:effectRef idx="2">
+        <a:scrgbClr r="0" g="0" b="0"/>
+      </a:effectRef>
+      <a:fontRef idx="minor"/>
+    </dgm:style>
+  </dgm:styleLbl>
+  <dgm:styleLbl name="revTx">
+    <dgm:scene3d>
+      <a:camera prst="orthographicFront"/>
+      <a:lightRig rig="threePt" dir="t"/>
+    </dgm:scene3d>
+    <dgm:sp3d/>
+    <dgm:txPr/>
+    <dgm:style>
+      <a:lnRef idx="0">
+        <a:scrgbClr r="0" g="0" b="0"/>
+      </a:lnRef>
+      <a:fillRef idx="0">
+        <a:scrgbClr r="0" g="0" b="0"/>
+      </a:fillRef>
+      <a:effectRef idx="0">
+        <a:scrgbClr r="0" g="0" b="0"/>
+      </a:effectRef>
+      <a:fontRef idx="minor"/>
+    </dgm:style>
+  </dgm:styleLbl>
+</dgm:styleDef>
+</file>
+
+<file path=ppt/diagrams/quickStyle4.xml><?xml version="1.0" encoding="utf-8"?>
+<dgm:styleDef xmlns:dgm="http://schemas.openxmlformats.org/drawingml/2006/diagram" xmlns:a="http://schemas.openxmlformats.org/drawingml/2006/main" uniqueId="urn:microsoft.com/office/officeart/2005/8/quickstyle/simple1">
+  <dgm:title val=""/>
+  <dgm:desc val=""/>
+  <dgm:catLst>
+    <dgm:cat type="simple" pri="10100"/>
+  </dgm:catLst>
+  <dgm:scene3d>
+    <a:camera prst="orthographicFront"/>
+    <a:lightRig rig="threePt" dir="t"/>
+  </dgm:scene3d>
+  <dgm:styleLbl name="node0">
+    <dgm:scene3d>
+      <a:camera prst="orthographicFront"/>
+      <a:lightRig rig="threePt" dir="t"/>
+    </dgm:scene3d>
+    <dgm:sp3d/>
+    <dgm:txPr/>
+    <dgm:style>
+      <a:lnRef idx="2">
+        <a:scrgbClr r="0" g="0" b="0"/>
+      </a:lnRef>
+      <a:fillRef idx="1">
+        <a:scrgbClr r="0" g="0" b="0"/>
+      </a:fillRef>
+      <a:effectRef idx="0">
+        <a:scrgbClr r="0" g="0" b="0"/>
+      </a:effectRef>
+      <a:fontRef idx="minor">
+        <a:schemeClr val="lt1"/>
+      </a:fontRef>
+    </dgm:style>
+  </dgm:styleLbl>
+  <dgm:styleLbl name="lnNode1">
+    <dgm:scene3d>
+      <a:camera prst="orthographicFront"/>
+      <a:lightRig rig="threePt" dir="t"/>
+    </dgm:scene3d>
+    <dgm:sp3d/>
+    <dgm:txPr/>
+    <dgm:style>
+      <a:lnRef idx="2">
+        <a:scrgbClr r="0" g="0" b="0"/>
+      </a:lnRef>
+      <a:fillRef idx="1">
+        <a:scrgbClr r="0" g="0" b="0"/>
+      </a:fillRef>
+      <a:effectRef idx="0">
+        <a:scrgbClr r="0" g="0" b="0"/>
+      </a:effectRef>
+      <a:fontRef idx="minor">
+        <a:schemeClr val="lt1"/>
+      </a:fontRef>
+    </dgm:style>
+  </dgm:styleLbl>
+  <dgm:styleLbl name="vennNode1">
+    <dgm:scene3d>
+      <a:camera prst="orthographicFront"/>
+      <a:lightRig rig="threePt" dir="t"/>
+    </dgm:scene3d>
+    <dgm:sp3d/>
+    <dgm:txPr/>
+    <dgm:style>
+      <a:lnRef idx="2">
+        <a:scrgbClr r="0" g="0" b="0"/>
+      </a:lnRef>
+      <a:fillRef idx="1">
+        <a:scrgbClr r="0" g="0" b="0"/>
+      </a:fillRef>
+      <a:effectRef idx="0">
+        <a:scrgbClr r="0" g="0" b="0"/>
+      </a:effectRef>
+      <a:fontRef idx="minor">
+        <a:schemeClr val="tx1"/>
+      </a:fontRef>
+    </dgm:style>
+  </dgm:styleLbl>
+  <dgm:styleLbl name="alignNode1">
+    <dgm:scene3d>
+      <a:camera prst="orthographicFront"/>
+      <a:lightRig rig="threePt" dir="t"/>
+    </dgm:scene3d>
+    <dgm:sp3d/>
+    <dgm:txPr/>
+    <dgm:style>
+      <a:lnRef idx="2">
+        <a:scrgbClr r="0" g="0" b="0"/>
+      </a:lnRef>
+      <a:fillRef idx="1">
+        <a:scrgbClr r="0" g="0" b="0"/>
+      </a:fillRef>
+      <a:effectRef idx="0">
+        <a:scrgbClr r="0" g="0" b="0"/>
+      </a:effectRef>
+      <a:fontRef idx="minor">
+        <a:schemeClr val="lt1"/>
+      </a:fontRef>
+    </dgm:style>
+  </dgm:styleLbl>
+  <dgm:styleLbl name="node1">
+    <dgm:scene3d>
+      <a:camera prst="orthographicFront"/>
+      <a:lightRig rig="threePt" dir="t"/>
+    </dgm:scene3d>
+    <dgm:sp3d/>
+    <dgm:txPr/>
+    <dgm:style>
+      <a:lnRef idx="2">
+        <a:scrgbClr r="0" g="0" b="0"/>
+      </a:lnRef>
+      <a:fillRef idx="1">
+        <a:scrgbClr r="0" g="0" b="0"/>
+      </a:fillRef>
+      <a:effectRef idx="0">
+        <a:scrgbClr r="0" g="0" b="0"/>
+      </a:effectRef>
+      <a:fontRef idx="minor">
+        <a:schemeClr val="lt1"/>
+      </a:fontRef>
+    </dgm:style>
+  </dgm:styleLbl>
+  <dgm:styleLbl name="node2">
+    <dgm:scene3d>
+      <a:camera prst="orthographicFront"/>
+      <a:lightRig rig="threePt" dir="t"/>
+    </dgm:scene3d>
+    <dgm:sp3d/>
+    <dgm:txPr/>
+    <dgm:style>
+      <a:lnRef idx="2">
+        <a:scrgbClr r="0" g="0" b="0"/>
+      </a:lnRef>
+      <a:fillRef idx="1">
+        <a:scrgbClr r="0" g="0" b="0"/>
+      </a:fillRef>
+      <a:effectRef idx="0">
+        <a:scrgbClr r="0" g="0" b="0"/>
+      </a:effectRef>
+      <a:fontRef idx="minor">
+        <a:schemeClr val="lt1"/>
+      </a:fontRef>
+    </dgm:style>
+  </dgm:styleLbl>
+  <dgm:styleLbl name="node3">
+    <dgm:scene3d>
+      <a:camera prst="orthographicFront"/>
+      <a:lightRig rig="threePt" dir="t"/>
+    </dgm:scene3d>
+    <dgm:sp3d/>
+    <dgm:txPr/>
+    <dgm:style>
+      <a:lnRef idx="2">
+        <a:scrgbClr r="0" g="0" b="0"/>
+      </a:lnRef>
+      <a:fillRef idx="1">
+        <a:scrgbClr r="0" g="0" b="0"/>
+      </a:fillRef>
+      <a:effectRef idx="0">
+        <a:scrgbClr r="0" g="0" b="0"/>
+      </a:effectRef>
+      <a:fontRef idx="minor">
+        <a:schemeClr val="lt1"/>
+      </a:fontRef>
+    </dgm:style>
+  </dgm:styleLbl>
+  <dgm:styleLbl name="node4">
+    <dgm:scene3d>
+      <a:camera prst="orthographicFront"/>
+      <a:lightRig rig="threePt" dir="t"/>
+    </dgm:scene3d>
+    <dgm:sp3d/>
+    <dgm:txPr/>
+    <dgm:style>
+      <a:lnRef idx="2">
+        <a:scrgbClr r="0" g="0" b="0"/>
+      </a:lnRef>
+      <a:fillRef idx="1">
+        <a:scrgbClr r="0" g="0" b="0"/>
+      </a:fillRef>
+      <a:effectRef idx="0">
+        <a:scrgbClr r="0" g="0" b="0"/>
+      </a:effectRef>
+      <a:fontRef idx="minor">
+        <a:schemeClr val="lt1"/>
+      </a:fontRef>
+    </dgm:style>
+  </dgm:styleLbl>
+  <dgm:styleLbl name="fgImgPlace1">
+    <dgm:scene3d>
+      <a:camera prst="orthographicFront"/>
+      <a:lightRig rig="threePt" dir="t"/>
+    </dgm:scene3d>
+    <dgm:sp3d/>
+    <dgm:txPr/>
+    <dgm:style>
+      <a:lnRef idx="2">
+        <a:scrgbClr r="0" g="0" b="0"/>
+      </a:lnRef>
+      <a:fillRef idx="1">
+        <a:scrgbClr r="0" g="0" b="0"/>
+      </a:fillRef>
+      <a:effectRef idx="0">
+        <a:scrgbClr r="0" g="0" b="0"/>
+      </a:effectRef>
+      <a:fontRef idx="minor"/>
+    </dgm:style>
+  </dgm:styleLbl>
+  <dgm:styleLbl name="alignImgPlace1">
+    <dgm:scene3d>
+      <a:camera prst="orthographicFront"/>
+      <a:lightRig rig="threePt" dir="t"/>
+    </dgm:scene3d>
+    <dgm:sp3d/>
+    <dgm:txPr/>
+    <dgm:style>
+      <a:lnRef idx="2">
+        <a:scrgbClr r="0" g="0" b="0"/>
+      </a:lnRef>
+      <a:fillRef idx="1">
+        <a:scrgbClr r="0" g="0" b="0"/>
+      </a:fillRef>
+      <a:effectRef idx="0">
+        <a:scrgbClr r="0" g="0" b="0"/>
+      </a:effectRef>
+      <a:fontRef idx="minor"/>
+    </dgm:style>
+  </dgm:styleLbl>
+  <dgm:styleLbl name="bgImgPlace1">
+    <dgm:scene3d>
+      <a:camera prst="orthographicFront"/>
+      <a:lightRig rig="threePt" dir="t"/>
+    </dgm:scene3d>
+    <dgm:sp3d/>
+    <dgm:txPr/>
+    <dgm:style>
+      <a:lnRef idx="2">
+        <a:scrgbClr r="0" g="0" b="0"/>
+      </a:lnRef>
+      <a:fillRef idx="1">
+        <a:scrgbClr r="0" g="0" b="0"/>
+      </a:fillRef>
+      <a:effectRef idx="0">
+        <a:scrgbClr r="0" g="0" b="0"/>
+      </a:effectRef>
+      <a:fontRef idx="minor"/>
+    </dgm:style>
+  </dgm:styleLbl>
+  <dgm:styleLbl name="sibTrans2D1">
+    <dgm:scene3d>
+      <a:camera prst="orthographicFront"/>
+      <a:lightRig rig="threePt" dir="t"/>
+    </dgm:scene3d>
+    <dgm:sp3d/>
+    <dgm:txPr/>
+    <dgm:style>
+      <a:lnRef idx="0">
+        <a:scrgbClr r="0" g="0" b="0"/>
+      </a:lnRef>
+      <a:fillRef idx="1">
+        <a:scrgbClr r="0" g="0" b="0"/>
+      </a:fillRef>
+      <a:effectRef idx="0">
+        <a:scrgbClr r="0" g="0" b="0"/>
+      </a:effectRef>
+      <a:fontRef idx="minor">
+        <a:schemeClr val="lt1"/>
+      </a:fontRef>
+    </dgm:style>
+  </dgm:styleLbl>
+  <dgm:styleLbl name="fgSibTrans2D1">
+    <dgm:scene3d>
+      <a:camera prst="orthographicFront"/>
+      <a:lightRig rig="threePt" dir="t"/>
+    </dgm:scene3d>
+    <dgm:sp3d/>
+    <dgm:txPr/>
+    <dgm:style>
+      <a:lnRef idx="0">
+        <a:scrgbClr r="0" g="0" b="0"/>
+      </a:lnRef>
+      <a:fillRef idx="1">
+        <a:scrgbClr r="0" g="0" b="0"/>
+      </a:fillRef>
+      <a:effectRef idx="0">
+        <a:scrgbClr r="0" g="0" b="0"/>
+      </a:effectRef>
+      <a:fontRef idx="minor">
+        <a:schemeClr val="lt1"/>
+      </a:fontRef>
+    </dgm:style>
+  </dgm:styleLbl>
+  <dgm:styleLbl name="bgSibTrans2D1">
+    <dgm:scene3d>
+      <a:camera prst="orthographicFront"/>
+      <a:lightRig rig="threePt" dir="t"/>
+    </dgm:scene3d>
+    <dgm:sp3d/>
+    <dgm:txPr/>
+    <dgm:style>
+      <a:lnRef idx="0">
+        <a:scrgbClr r="0" g="0" b="0"/>
+      </a:lnRef>
+      <a:fillRef idx="1">
+        <a:scrgbClr r="0" g="0" b="0"/>
+      </a:fillRef>
+      <a:effectRef idx="0">
+        <a:scrgbClr r="0" g="0" b="0"/>
+      </a:effectRef>
+      <a:fontRef idx="minor">
+        <a:schemeClr val="lt1"/>
+      </a:fontRef>
+    </dgm:style>
+  </dgm:styleLbl>
+  <dgm:styleLbl name="sibTrans1D1">
+    <dgm:scene3d>
+      <a:camera prst="orthographicFront"/>
+      <a:lightRig rig="threePt" dir="t"/>
+    </dgm:scene3d>
+    <dgm:sp3d/>
+    <dgm:txPr/>
+    <dgm:style>
+      <a:lnRef idx="1">
+        <a:scrgbClr r="0" g="0" b="0"/>
+      </a:lnRef>
+      <a:fillRef idx="0">
+        <a:scrgbClr r="0" g="0" b="0"/>
+      </a:fillRef>
+      <a:effectRef idx="0">
+        <a:scrgbClr r="0" g="0" b="0"/>
+      </a:effectRef>
+      <a:fontRef idx="minor"/>
+    </dgm:style>
+  </dgm:styleLbl>
+  <dgm:styleLbl name="callout">
+    <dgm:scene3d>
+      <a:camera prst="orthographicFront"/>
+      <a:lightRig rig="threePt" dir="t"/>
+    </dgm:scene3d>
+    <dgm:sp3d/>
+    <dgm:txPr/>
+    <dgm:style>
+      <a:lnRef idx="2">
+        <a:scrgbClr r="0" g="0" b="0"/>
+      </a:lnRef>
+      <a:fillRef idx="1">
+        <a:scrgbClr r="0" g="0" b="0"/>
+      </a:fillRef>
+      <a:effectRef idx="0">
+        <a:scrgbClr r="0" g="0" b="0"/>
+      </a:effectRef>
+      <a:fontRef idx="minor"/>
+    </dgm:style>
+  </dgm:styleLbl>
+  <dgm:styleLbl name="asst0">
+    <dgm:scene3d>
+      <a:camera prst="orthographicFront"/>
+      <a:lightRig rig="threePt" dir="t"/>
+    </dgm:scene3d>
+    <dgm:sp3d/>
+    <dgm:txPr/>
+    <dgm:style>
+      <a:lnRef idx="2">
+        <a:scrgbClr r="0" g="0" b="0"/>
+      </a:lnRef>
+      <a:fillRef idx="1">
+        <a:scrgbClr r="0" g="0" b="0"/>
+      </a:fillRef>
+      <a:effectRef idx="0">
+        <a:scrgbClr r="0" g="0" b="0"/>
+      </a:effectRef>
+      <a:fontRef idx="minor">
+        <a:schemeClr val="lt1"/>
+      </a:fontRef>
+    </dgm:style>
+  </dgm:styleLbl>
+  <dgm:styleLbl name="asst1">
+    <dgm:scene3d>
+      <a:camera prst="orthographicFront"/>
+      <a:lightRig rig="threePt" dir="t"/>
+    </dgm:scene3d>
+    <dgm:sp3d/>
+    <dgm:txPr/>
+    <dgm:style>
+      <a:lnRef idx="2">
+        <a:scrgbClr r="0" g="0" b="0"/>
+      </a:lnRef>
+      <a:fillRef idx="1">
+        <a:scrgbClr r="0" g="0" b="0"/>
+      </a:fillRef>
+      <a:effectRef idx="0">
+        <a:scrgbClr r="0" g="0" b="0"/>
+      </a:effectRef>
+      <a:fontRef idx="minor">
+        <a:schemeClr val="lt1"/>
+      </a:fontRef>
+    </dgm:style>
+  </dgm:styleLbl>
+  <dgm:styleLbl name="asst2">
+    <dgm:scene3d>
+      <a:camera prst="orthographicFront"/>
+      <a:lightRig rig="threePt" dir="t"/>
+    </dgm:scene3d>
+    <dgm:sp3d/>
+    <dgm:txPr/>
+    <dgm:style>
+      <a:lnRef idx="2">
+        <a:scrgbClr r="0" g="0" b="0"/>
+      </a:lnRef>
+      <a:fillRef idx="1">
+        <a:scrgbClr r="0" g="0" b="0"/>
+      </a:fillRef>
+      <a:effectRef idx="0">
+        <a:scrgbClr r="0" g="0" b="0"/>
+      </a:effectRef>
+      <a:fontRef idx="minor">
+        <a:schemeClr val="lt1"/>
+      </a:fontRef>
+    </dgm:style>
+  </dgm:styleLbl>
+  <dgm:styleLbl name="asst3">
+    <dgm:scene3d>
+      <a:camera prst="orthographicFront"/>
+      <a:lightRig rig="threePt" dir="t"/>
+    </dgm:scene3d>
+    <dgm:sp3d/>
+    <dgm:txPr/>
+    <dgm:style>
+      <a:lnRef idx="2">
+        <a:scrgbClr r="0" g="0" b="0"/>
+      </a:lnRef>
+      <a:fillRef idx="1">
+        <a:scrgbClr r="0" g="0" b="0"/>
+      </a:fillRef>
+      <a:effectRef idx="0">
+        <a:scrgbClr r="0" g="0" b="0"/>
+      </a:effectRef>
+      <a:fontRef idx="minor">
+        <a:schemeClr val="lt1"/>
+      </a:fontRef>
+    </dgm:style>
+  </dgm:styleLbl>
+  <dgm:styleLbl name="asst4">
+    <dgm:scene3d>
+      <a:camera prst="orthographicFront"/>
+      <a:lightRig rig="threePt" dir="t"/>
+    </dgm:scene3d>
+    <dgm:sp3d/>
+    <dgm:txPr/>
+    <dgm:style>
+      <a:lnRef idx="2">
+        <a:scrgbClr r="0" g="0" b="0"/>
+      </a:lnRef>
+      <a:fillRef idx="1">
+        <a:scrgbClr r="0" g="0" b="0"/>
+      </a:fillRef>
+      <a:effectRef idx="0">
+        <a:scrgbClr r="0" g="0" b="0"/>
+      </a:effectRef>
+      <a:fontRef idx="minor">
+        <a:schemeClr val="lt1"/>
+      </a:fontRef>
+    </dgm:style>
+  </dgm:styleLbl>
+  <dgm:styleLbl name="parChTrans2D1">
+    <dgm:scene3d>
+      <a:camera prst="orthographicFront"/>
+      <a:lightRig rig="threePt" dir="t"/>
+    </dgm:scene3d>
+    <dgm:sp3d/>
+    <dgm:txPr/>
+    <dgm:style>
+      <a:lnRef idx="2">
+        <a:scrgbClr r="0" g="0" b="0"/>
+      </a:lnRef>
+      <a:fillRef idx="1">
+        <a:scrgbClr r="0" g="0" b="0"/>
+      </a:fillRef>
+      <a:effectRef idx="0">
+        <a:scrgbClr r="0" g="0" b="0"/>
+      </a:effectRef>
+      <a:fontRef idx="minor">
+        <a:schemeClr val="lt1"/>
+      </a:fontRef>
+    </dgm:style>
+  </dgm:styleLbl>
+  <dgm:styleLbl name="parChTrans2D2">
+    <dgm:scene3d>
+      <a:camera prst="orthographicFront"/>
+      <a:lightRig rig="threePt" dir="t"/>
+    </dgm:scene3d>
+    <dgm:sp3d/>
+    <dgm:txPr/>
+    <dgm:style>
+      <a:lnRef idx="2">
+        <a:scrgbClr r="0" g="0" b="0"/>
+      </a:lnRef>
+      <a:fillRef idx="1">
+        <a:scrgbClr r="0" g="0" b="0"/>
+      </a:fillRef>
+      <a:effectRef idx="0">
+        <a:scrgbClr r="0" g="0" b="0"/>
+      </a:effectRef>
+      <a:fontRef idx="minor">
+        <a:schemeClr val="lt1"/>
+      </a:fontRef>
+    </dgm:style>
+  </dgm:styleLbl>
+  <dgm:styleLbl name="parChTrans2D3">
+    <dgm:scene3d>
+      <a:camera prst="orthographicFront"/>
+      <a:lightRig rig="threePt" dir="t"/>
+    </dgm:scene3d>
+    <dgm:sp3d/>
+    <dgm:txPr/>
+    <dgm:style>
+      <a:lnRef idx="2">
+        <a:scrgbClr r="0" g="0" b="0"/>
+      </a:lnRef>
+      <a:fillRef idx="1">
+        <a:scrgbClr r="0" g="0" b="0"/>
+      </a:fillRef>
+      <a:effectRef idx="0">
+        <a:scrgbClr r="0" g="0" b="0"/>
+      </a:effectRef>
+      <a:fontRef idx="minor">
+        <a:schemeClr val="lt1"/>
+      </a:fontRef>
+    </dgm:style>
+  </dgm:styleLbl>
+  <dgm:styleLbl name="parChTrans2D4">
+    <dgm:scene3d>
+      <a:camera prst="orthographicFront"/>
+      <a:lightRig rig="threePt" dir="t"/>
+    </dgm:scene3d>
+    <dgm:sp3d/>
+    <dgm:txPr/>
+    <dgm:style>
+      <a:lnRef idx="2">
+        <a:scrgbClr r="0" g="0" b="0"/>
+      </a:lnRef>
+      <a:fillRef idx="1">
+        <a:scrgbClr r="0" g="0" b="0"/>
+      </a:fillRef>
+      <a:effectRef idx="0">
+        <a:scrgbClr r="0" g="0" b="0"/>
+      </a:effectRef>
+      <a:fontRef idx="minor">
+        <a:schemeClr val="lt1"/>
+      </a:fontRef>
+    </dgm:style>
+  </dgm:styleLbl>
+  <dgm:styleLbl name="parChTrans1D1">
+    <dgm:scene3d>
+      <a:camera prst="orthographicFront"/>
+      <a:lightRig rig="threePt" dir="t"/>
+    </dgm:scene3d>
+    <dgm:sp3d/>
+    <dgm:txPr/>
+    <dgm:style>
+      <a:lnRef idx="2">
+        <a:scrgbClr r="0" g="0" b="0"/>
+      </a:lnRef>
+      <a:fillRef idx="0">
+        <a:scrgbClr r="0" g="0" b="0"/>
+      </a:fillRef>
+      <a:effectRef idx="0">
+        <a:scrgbClr r="0" g="0" b="0"/>
+      </a:effectRef>
+      <a:fontRef idx="minor"/>
+    </dgm:style>
+  </dgm:styleLbl>
+  <dgm:styleLbl name="parChTrans1D2">
+    <dgm:scene3d>
+      <a:camera prst="orthographicFront"/>
+      <a:lightRig rig="threePt" dir="t"/>
+    </dgm:scene3d>
+    <dgm:sp3d/>
+    <dgm:txPr/>
+    <dgm:style>
+      <a:lnRef idx="2">
+        <a:scrgbClr r="0" g="0" b="0"/>
+      </a:lnRef>
+      <a:fillRef idx="0">
+        <a:scrgbClr r="0" g="0" b="0"/>
+      </a:fillRef>
+      <a:effectRef idx="0">
+        <a:scrgbClr r="0" g="0" b="0"/>
+      </a:effectRef>
+      <a:fontRef idx="minor"/>
+    </dgm:style>
+  </dgm:styleLbl>
+  <dgm:styleLbl name="parChTrans1D3">
+    <dgm:scene3d>
+      <a:camera prst="orthographicFront"/>
+      <a:lightRig rig="threePt" dir="t"/>
+    </dgm:scene3d>
+    <dgm:sp3d/>
+    <dgm:txPr/>
+    <dgm:style>
+      <a:lnRef idx="2">
+        <a:scrgbClr r="0" g="0" b="0"/>
+      </a:lnRef>
+      <a:fillRef idx="0">
+        <a:scrgbClr r="0" g="0" b="0"/>
+      </a:fillRef>
+      <a:effectRef idx="0">
+        <a:scrgbClr r="0" g="0" b="0"/>
+      </a:effectRef>
+      <a:fontRef idx="minor"/>
+    </dgm:style>
+  </dgm:styleLbl>
+  <dgm:styleLbl name="parChTrans1D4">
+    <dgm:scene3d>
+      <a:camera prst="orthographicFront"/>
+      <a:lightRig rig="threePt" dir="t"/>
+    </dgm:scene3d>
+    <dgm:sp3d/>
+    <dgm:txPr/>
+    <dgm:style>
+      <a:lnRef idx="2">
+        <a:scrgbClr r="0" g="0" b="0"/>
+      </a:lnRef>
+      <a:fillRef idx="0">
+        <a:scrgbClr r="0" g="0" b="0"/>
+      </a:fillRef>
+      <a:effectRef idx="0">
+        <a:scrgbClr r="0" g="0" b="0"/>
+      </a:effectRef>
+      <a:fontRef idx="minor"/>
+    </dgm:style>
+  </dgm:styleLbl>
+  <dgm:styleLbl name="fgAcc1">
+    <dgm:scene3d>
+      <a:camera prst="orthographicFront"/>
+      <a:lightRig rig="threePt" dir="t"/>
+    </dgm:scene3d>
+    <dgm:sp3d/>
+    <dgm:txPr/>
+    <dgm:style>
+      <a:lnRef idx="2">
+        <a:scrgbClr r="0" g="0" b="0"/>
+      </a:lnRef>
+      <a:fillRef idx="1">
+        <a:scrgbClr r="0" g="0" b="0"/>
+      </a:fillRef>
+      <a:effectRef idx="0">
+        <a:scrgbClr r="0" g="0" b="0"/>
+      </a:effectRef>
+      <a:fontRef idx="minor"/>
+    </dgm:style>
+  </dgm:styleLbl>
+  <dgm:styleLbl name="conFgAcc1">
+    <dgm:scene3d>
+      <a:camera prst="orthographicFront"/>
+      <a:lightRig rig="threePt" dir="t"/>
+    </dgm:scene3d>
+    <dgm:sp3d/>
+    <dgm:txPr/>
+    <dgm:style>
+      <a:lnRef idx="2">
+        <a:scrgbClr r="0" g="0" b="0"/>
+      </a:lnRef>
+      <a:fillRef idx="1">
+        <a:scrgbClr r="0" g="0" b="0"/>
+      </a:fillRef>
+      <a:effectRef idx="0">
+        <a:scrgbClr r="0" g="0" b="0"/>
+      </a:effectRef>
+      <a:fontRef idx="minor"/>
+    </dgm:style>
+  </dgm:styleLbl>
+  <dgm:styleLbl name="alignAcc1">
+    <dgm:scene3d>
+      <a:camera prst="orthographicFront"/>
+      <a:lightRig rig="threePt" dir="t"/>
+    </dgm:scene3d>
+    <dgm:sp3d/>
+    <dgm:txPr/>
+    <dgm:style>
+      <a:lnRef idx="2">
+        <a:scrgbClr r="0" g="0" b="0"/>
+      </a:lnRef>
+      <a:fillRef idx="1">
+        <a:scrgbClr r="0" g="0" b="0"/>
+      </a:fillRef>
+      <a:effectRef idx="0">
+        <a:scrgbClr r="0" g="0" b="0"/>
+      </a:effectRef>
+      <a:fontRef idx="minor"/>
+    </dgm:style>
+  </dgm:styleLbl>
+  <dgm:styleLbl name="trAlignAcc1">
+    <dgm:scene3d>
+      <a:camera prst="orthographicFront"/>
+      <a:lightRig rig="threePt" dir="t"/>
+    </dgm:scene3d>
+    <dgm:sp3d/>
+    <dgm:txPr/>
+    <dgm:style>
+      <a:lnRef idx="1">
+        <a:scrgbClr r="0" g="0" b="0"/>
+      </a:lnRef>
+      <a:fillRef idx="1">
+        <a:scrgbClr r="0" g="0" b="0"/>
+      </a:fillRef>
+      <a:effectRef idx="0">
+        <a:scrgbClr r="0" g="0" b="0"/>
+      </a:effectRef>
+      <a:fontRef idx="minor"/>
+    </dgm:style>
+  </dgm:styleLbl>
+  <dgm:styleLbl name="bgAcc1">
+    <dgm:scene3d>
+      <a:camera prst="orthographicFront"/>
+      <a:lightRig rig="threePt" dir="t"/>
+    </dgm:scene3d>
+    <dgm:sp3d/>
+    <dgm:txPr/>
+    <dgm:style>
+      <a:lnRef idx="2">
+        <a:scrgbClr r="0" g="0" b="0"/>
+      </a:lnRef>
+      <a:fillRef idx="1">
+        <a:scrgbClr r="0" g="0" b="0"/>
+      </a:fillRef>
+      <a:effectRef idx="0">
+        <a:scrgbClr r="0" g="0" b="0"/>
+      </a:effectRef>
+      <a:fontRef idx="minor"/>
+    </dgm:style>
+  </dgm:styleLbl>
+  <dgm:styleLbl name="solidFgAcc1">
+    <dgm:scene3d>
+      <a:camera prst="orthographicFront"/>
+      <a:lightRig rig="threePt" dir="t"/>
+    </dgm:scene3d>
+    <dgm:sp3d/>
+    <dgm:txPr/>
+    <dgm:style>
+      <a:lnRef idx="2">
+        <a:scrgbClr r="0" g="0" b="0"/>
+      </a:lnRef>
+      <a:fillRef idx="1">
+        <a:scrgbClr r="0" g="0" b="0"/>
+      </a:fillRef>
+      <a:effectRef idx="0">
+        <a:scrgbClr r="0" g="0" b="0"/>
+      </a:effectRef>
+      <a:fontRef idx="minor"/>
+    </dgm:style>
+  </dgm:styleLbl>
+  <dgm:styleLbl name="solidAlignAcc1">
+    <dgm:scene3d>
+      <a:camera prst="orthographicFront"/>
+      <a:lightRig rig="threePt" dir="t"/>
+    </dgm:scene3d>
+    <dgm:sp3d/>
+    <dgm:txPr/>
+    <dgm:style>
+      <a:lnRef idx="2">
+        <a:scrgbClr r="0" g="0" b="0"/>
+      </a:lnRef>
+      <a:fillRef idx="1">
+        <a:scrgbClr r="0" g="0" b="0"/>
+      </a:fillRef>
+      <a:effectRef idx="0">
+        <a:scrgbClr r="0" g="0" b="0"/>
+      </a:effectRef>
+      <a:fontRef idx="minor"/>
+    </dgm:style>
+  </dgm:styleLbl>
+  <dgm:styleLbl name="solidBgAcc1">
+    <dgm:scene3d>
+      <a:camera prst="orthographicFront"/>
+      <a:lightRig rig="threePt" dir="t"/>
+    </dgm:scene3d>
+    <dgm:sp3d/>
+    <dgm:txPr/>
+    <dgm:style>
+      <a:lnRef idx="2">
+        <a:scrgbClr r="0" g="0" b="0"/>
+      </a:lnRef>
+      <a:fillRef idx="1">
+        <a:scrgbClr r="0" g="0" b="0"/>
+      </a:fillRef>
+      <a:effectRef idx="0">
+        <a:scrgbClr r="0" g="0" b="0"/>
+      </a:effectRef>
+      <a:fontRef idx="minor"/>
+    </dgm:style>
+  </dgm:styleLbl>
+  <dgm:styleLbl name="fgAccFollowNode1">
+    <dgm:scene3d>
+      <a:camera prst="orthographicFront"/>
+      <a:lightRig rig="threePt" dir="t"/>
+    </dgm:scene3d>
+    <dgm:sp3d/>
+    <dgm:txPr/>
+    <dgm:style>
+      <a:lnRef idx="2">
+        <a:scrgbClr r="0" g="0" b="0"/>
+      </a:lnRef>
+      <a:fillRef idx="1">
+        <a:scrgbClr r="0" g="0" b="0"/>
+      </a:fillRef>
+      <a:effectRef idx="0">
+        <a:scrgbClr r="0" g="0" b="0"/>
+      </a:effectRef>
+      <a:fontRef idx="minor"/>
+    </dgm:style>
+  </dgm:styleLbl>
+  <dgm:styleLbl name="alignAccFollowNode1">
+    <dgm:scene3d>
+      <a:camera prst="orthographicFront"/>
+      <a:lightRig rig="threePt" dir="t"/>
+    </dgm:scene3d>
+    <dgm:sp3d/>
+    <dgm:txPr/>
+    <dgm:style>
+      <a:lnRef idx="2">
+        <a:scrgbClr r="0" g="0" b="0"/>
+      </a:lnRef>
+      <a:fillRef idx="1">
+        <a:scrgbClr r="0" g="0" b="0"/>
+      </a:fillRef>
+      <a:effectRef idx="0">
+        <a:scrgbClr r="0" g="0" b="0"/>
+      </a:effectRef>
+      <a:fontRef idx="minor"/>
+    </dgm:style>
+  </dgm:styleLbl>
+  <dgm:styleLbl name="bgAccFollowNode1">
+    <dgm:scene3d>
+      <a:camera prst="orthographicFront"/>
+      <a:lightRig rig="threePt" dir="t"/>
+    </dgm:scene3d>
+    <dgm:sp3d/>
+    <dgm:txPr/>
+    <dgm:style>
+      <a:lnRef idx="2">
+        <a:scrgbClr r="0" g="0" b="0"/>
+      </a:lnRef>
+      <a:fillRef idx="1">
+        <a:scrgbClr r="0" g="0" b="0"/>
+      </a:fillRef>
+      <a:effectRef idx="0">
+        <a:scrgbClr r="0" g="0" b="0"/>
+      </a:effectRef>
+      <a:fontRef idx="minor"/>
+    </dgm:style>
+  </dgm:styleLbl>
+  <dgm:styleLbl name="fgAcc0">
+    <dgm:scene3d>
+      <a:camera prst="orthographicFront"/>
+      <a:lightRig rig="threePt" dir="t"/>
+    </dgm:scene3d>
+    <dgm:sp3d/>
+    <dgm:txPr/>
+    <dgm:style>
+      <a:lnRef idx="2">
+        <a:scrgbClr r="0" g="0" b="0"/>
+      </a:lnRef>
+      <a:fillRef idx="1">
+        <a:scrgbClr r="0" g="0" b="0"/>
+      </a:fillRef>
+      <a:effectRef idx="0">
+        <a:scrgbClr r="0" g="0" b="0"/>
+      </a:effectRef>
+      <a:fontRef idx="minor"/>
+    </dgm:style>
+  </dgm:styleLbl>
+  <dgm:styleLbl name="fgAcc2">
+    <dgm:scene3d>
+      <a:camera prst="orthographicFront"/>
+      <a:lightRig rig="threePt" dir="t"/>
+    </dgm:scene3d>
+    <dgm:sp3d/>
+    <dgm:txPr/>
+    <dgm:style>
+      <a:lnRef idx="2">
+        <a:scrgbClr r="0" g="0" b="0"/>
+      </a:lnRef>
+      <a:fillRef idx="1">
+        <a:scrgbClr r="0" g="0" b="0"/>
+      </a:fillRef>
+      <a:effectRef idx="0">
+        <a:scrgbClr r="0" g="0" b="0"/>
+      </a:effectRef>
+      <a:fontRef idx="minor"/>
+    </dgm:style>
+  </dgm:styleLbl>
+  <dgm:styleLbl name="fgAcc3">
+    <dgm:scene3d>
+      <a:camera prst="orthographicFront"/>
+      <a:lightRig rig="threePt" dir="t"/>
+    </dgm:scene3d>
+    <dgm:sp3d/>
+    <dgm:txPr/>
+    <dgm:style>
+      <a:lnRef idx="2">
+        <a:scrgbClr r="0" g="0" b="0"/>
+      </a:lnRef>
+      <a:fillRef idx="1">
+        <a:scrgbClr r="0" g="0" b="0"/>
+      </a:fillRef>
+      <a:effectRef idx="0">
+        <a:scrgbClr r="0" g="0" b="0"/>
+      </a:effectRef>
+      <a:fontRef idx="minor"/>
+    </dgm:style>
+  </dgm:styleLbl>
+  <dgm:styleLbl name="fgAcc4">
+    <dgm:scene3d>
+      <a:camera prst="orthographicFront"/>
+      <a:lightRig rig="threePt" dir="t"/>
+    </dgm:scene3d>
+    <dgm:sp3d/>
+    <dgm:txPr/>
+    <dgm:style>
+      <a:lnRef idx="2">
+        <a:scrgbClr r="0" g="0" b="0"/>
+      </a:lnRef>
+      <a:fillRef idx="1">
+        <a:scrgbClr r="0" g="0" b="0"/>
+      </a:fillRef>
+      <a:effectRef idx="0">
+        <a:scrgbClr r="0" g="0" b="0"/>
+      </a:effectRef>
+      <a:fontRef idx="minor"/>
+    </dgm:style>
+  </dgm:styleLbl>
+  <dgm:styleLbl name="bgShp">
+    <dgm:scene3d>
+      <a:camera prst="orthographicFront"/>
+      <a:lightRig rig="threePt" dir="t"/>
+    </dgm:scene3d>
+    <dgm:sp3d/>
+    <dgm:txPr/>
+    <dgm:style>
+      <a:lnRef idx="0">
+        <a:scrgbClr r="0" g="0" b="0"/>
+      </a:lnRef>
+      <a:fillRef idx="1">
+        <a:scrgbClr r="0" g="0" b="0"/>
+      </a:fillRef>
+      <a:effectRef idx="0">
+        <a:scrgbClr r="0" g="0" b="0"/>
+      </a:effectRef>
+      <a:fontRef idx="minor"/>
+    </dgm:style>
+  </dgm:styleLbl>
+  <dgm:styleLbl name="dkBgShp">
+    <dgm:scene3d>
+      <a:camera prst="orthographicFront"/>
+      <a:lightRig rig="threePt" dir="t"/>
+    </dgm:scene3d>
+    <dgm:sp3d/>
+    <dgm:txPr/>
+    <dgm:style>
+      <a:lnRef idx="0">
+        <a:scrgbClr r="0" g="0" b="0"/>
+      </a:lnRef>
+      <a:fillRef idx="1">
+        <a:scrgbClr r="0" g="0" b="0"/>
+      </a:fillRef>
+      <a:effectRef idx="0">
+        <a:scrgbClr r="0" g="0" b="0"/>
+      </a:effectRef>
+      <a:fontRef idx="minor"/>
+    </dgm:style>
+  </dgm:styleLbl>
+  <dgm:styleLbl name="trBgShp">
+    <dgm:scene3d>
+      <a:camera prst="orthographicFront"/>
+      <a:lightRig rig="threePt" dir="t"/>
+    </dgm:scene3d>
+    <dgm:sp3d/>
+    <dgm:txPr/>
+    <dgm:style>
+      <a:lnRef idx="0">
+        <a:scrgbClr r="0" g="0" b="0"/>
+      </a:lnRef>
+      <a:fillRef idx="1">
+        <a:scrgbClr r="0" g="0" b="0"/>
+      </a:fillRef>
+      <a:effectRef idx="0">
+        <a:scrgbClr r="0" g="0" b="0"/>
+      </a:effectRef>
+      <a:fontRef idx="minor"/>
+    </dgm:style>
+  </dgm:styleLbl>
+  <dgm:styleLbl name="fgShp">
+    <dgm:scene3d>
+      <a:camera prst="orthographicFront"/>
+      <a:lightRig rig="threePt" dir="t"/>
+    </dgm:scene3d>
+    <dgm:sp3d/>
+    <dgm:txPr/>
+    <dgm:style>
+      <a:lnRef idx="2">
+        <a:scrgbClr r="0" g="0" b="0"/>
+      </a:lnRef>
+      <a:fillRef idx="1">
+        <a:scrgbClr r="0" g="0" b="0"/>
+      </a:fillRef>
+      <a:effectRef idx="0">
         <a:scrgbClr r="0" g="0" b="0"/>
       </a:effectRef>
       <a:fontRef idx="minor"/>
@@ -12358,6 +15823,90 @@
     <p:extLst>
       <p:ext uri="{BB962C8B-B14F-4D97-AF65-F5344CB8AC3E}">
         <p14:creationId xmlns:p14="http://schemas.microsoft.com/office/powerpoint/2010/main" val="1022987678"/>
+      </p:ext>
+    </p:extLst>
+  </p:cSld>
+  <p:clrMapOvr>
+    <a:masterClrMapping/>
+  </p:clrMapOvr>
+</p:notes>
+</file>
+
+<file path=ppt/notesSlides/notesSlide5.xml><?xml version="1.0" encoding="utf-8"?>
+<p:notes xmlns:a="http://schemas.openxmlformats.org/drawingml/2006/main" xmlns:r="http://schemas.openxmlformats.org/officeDocument/2006/relationships" xmlns:p="http://schemas.openxmlformats.org/presentationml/2006/main">
+  <p:cSld>
+    <p:spTree>
+      <p:nvGrpSpPr>
+        <p:cNvPr id="1" name=""/>
+        <p:cNvGrpSpPr/>
+        <p:nvPr/>
+      </p:nvGrpSpPr>
+      <p:grpSpPr>
+        <a:xfrm>
+          <a:off x="0" y="0"/>
+          <a:ext cx="0" cy="0"/>
+          <a:chOff x="0" y="0"/>
+          <a:chExt cx="0" cy="0"/>
+        </a:xfrm>
+      </p:grpSpPr>
+      <p:sp>
+        <p:nvSpPr>
+          <p:cNvPr id="2" name="Slide Image Placeholder 1"/>
+          <p:cNvSpPr>
+            <a:spLocks noGrp="1" noRot="1" noChangeAspect="1"/>
+          </p:cNvSpPr>
+          <p:nvPr>
+            <p:ph type="sldImg"/>
+          </p:nvPr>
+        </p:nvSpPr>
+        <p:spPr/>
+      </p:sp>
+      <p:sp>
+        <p:nvSpPr>
+          <p:cNvPr id="3" name="Notes Placeholder 2"/>
+          <p:cNvSpPr>
+            <a:spLocks noGrp="1"/>
+          </p:cNvSpPr>
+          <p:nvPr>
+            <p:ph type="body" idx="1"/>
+          </p:nvPr>
+        </p:nvSpPr>
+        <p:spPr/>
+        <p:txBody>
+          <a:bodyPr/>
+          <a:lstStyle/>
+          <a:p>
+            <a:endParaRPr lang="en-US" dirty="0"/>
+          </a:p>
+        </p:txBody>
+      </p:sp>
+      <p:sp>
+        <p:nvSpPr>
+          <p:cNvPr id="4" name="Slide Number Placeholder 3"/>
+          <p:cNvSpPr>
+            <a:spLocks noGrp="1"/>
+          </p:cNvSpPr>
+          <p:nvPr>
+            <p:ph type="sldNum" sz="quarter" idx="5"/>
+          </p:nvPr>
+        </p:nvSpPr>
+        <p:spPr/>
+        <p:txBody>
+          <a:bodyPr/>
+          <a:lstStyle/>
+          <a:p>
+            <a:fld id="{EDEF46E4-EE54-564F-BFBC-E1DA32DE0BEF}" type="slidenum">
+              <a:rPr lang="en-US" smtClean="0"/>
+              <a:t>12</a:t>
+            </a:fld>
+            <a:endParaRPr lang="en-US"/>
+          </a:p>
+        </p:txBody>
+      </p:sp>
+    </p:spTree>
+    <p:extLst>
+      <p:ext uri="{BB962C8B-B14F-4D97-AF65-F5344CB8AC3E}">
+        <p14:creationId xmlns:p14="http://schemas.microsoft.com/office/powerpoint/2010/main" val="2684792558"/>
       </p:ext>
     </p:extLst>
   </p:cSld>
@@ -15970,6 +19519,382 @@
 <file path=ppt/slides/slide10.xml><?xml version="1.0" encoding="utf-8"?>
 <p:sld xmlns:a="http://schemas.openxmlformats.org/drawingml/2006/main" xmlns:r="http://schemas.openxmlformats.org/officeDocument/2006/relationships" xmlns:p="http://schemas.openxmlformats.org/presentationml/2006/main">
   <p:cSld>
+    <p:bg>
+      <p:bgPr>
+        <a:solidFill>
+          <a:schemeClr val="bg1"/>
+        </a:solidFill>
+        <a:effectLst/>
+      </p:bgPr>
+    </p:bg>
+    <p:spTree>
+      <p:nvGrpSpPr>
+        <p:cNvPr id="1" name="">
+          <a:extLst>
+            <a:ext uri="{FF2B5EF4-FFF2-40B4-BE49-F238E27FC236}">
+              <a16:creationId xmlns:a16="http://schemas.microsoft.com/office/drawing/2014/main" id="{A725C967-FB18-C74B-FE86-5A42C3A0E1D7}"/>
+            </a:ext>
+          </a:extLst>
+        </p:cNvPr>
+        <p:cNvGrpSpPr/>
+        <p:nvPr/>
+      </p:nvGrpSpPr>
+      <p:grpSpPr>
+        <a:xfrm>
+          <a:off x="0" y="0"/>
+          <a:ext cx="0" cy="0"/>
+          <a:chOff x="0" y="0"/>
+          <a:chExt cx="0" cy="0"/>
+        </a:xfrm>
+      </p:grpSpPr>
+      <p:sp>
+        <p:nvSpPr>
+          <p:cNvPr id="6" name="Rectangle 5">
+            <a:extLst>
+              <a:ext uri="{FF2B5EF4-FFF2-40B4-BE49-F238E27FC236}">
+                <a16:creationId xmlns:a16="http://schemas.microsoft.com/office/drawing/2014/main" id="{A4AC5506-6312-4701-8D3C-40187889A947}"/>
+              </a:ext>
+              <a:ext uri="{C183D7F6-B498-43B3-948B-1728B52AA6E4}">
+                <adec:decorative xmlns:adec="http://schemas.microsoft.com/office/drawing/2017/decorative" val="1"/>
+              </a:ext>
+            </a:extLst>
+          </p:cNvPr>
+          <p:cNvSpPr>
+            <a:spLocks noGrp="1" noRot="1" noChangeAspect="1" noMove="1" noResize="1" noEditPoints="1" noAdjustHandles="1" noChangeArrowheads="1" noChangeShapeType="1" noTextEdit="1"/>
+          </p:cNvSpPr>
+          <p:nvPr>
+            <p:extLst>
+              <p:ext uri="{386F3935-93C4-4BCD-93E2-E3B085C9AB24}">
+                <p16:designElem xmlns:p16="http://schemas.microsoft.com/office/powerpoint/2015/main" val="1"/>
+              </p:ext>
+            </p:extLst>
+          </p:nvPr>
+        </p:nvSpPr>
+        <p:spPr>
+          <a:xfrm>
+            <a:off x="0" y="651752"/>
+            <a:ext cx="9144000" cy="736551"/>
+          </a:xfrm>
+          <a:prstGeom prst="rect">
+            <a:avLst/>
+          </a:prstGeom>
+          <a:solidFill>
+            <a:schemeClr val="tx1"/>
+          </a:solidFill>
+          <a:ln>
+            <a:noFill/>
+          </a:ln>
+        </p:spPr>
+        <p:style>
+          <a:lnRef idx="2">
+            <a:schemeClr val="accent1">
+              <a:shade val="50000"/>
+            </a:schemeClr>
+          </a:lnRef>
+          <a:fillRef idx="1">
+            <a:schemeClr val="accent1"/>
+          </a:fillRef>
+          <a:effectRef idx="0">
+            <a:schemeClr val="accent1"/>
+          </a:effectRef>
+          <a:fontRef idx="minor">
+            <a:schemeClr val="lt1"/>
+          </a:fontRef>
+        </p:style>
+        <p:txBody>
+          <a:bodyPr rtlCol="0" anchor="ctr"/>
+          <a:lstStyle/>
+          <a:p>
+            <a:pPr algn="ctr"/>
+            <a:endParaRPr lang="en-US"/>
+          </a:p>
+        </p:txBody>
+      </p:sp>
+      <p:sp>
+        <p:nvSpPr>
+          <p:cNvPr id="2" name="Title 1">
+            <a:extLst>
+              <a:ext uri="{FF2B5EF4-FFF2-40B4-BE49-F238E27FC236}">
+                <a16:creationId xmlns:a16="http://schemas.microsoft.com/office/drawing/2014/main" id="{FE1BC7AD-C24C-85D6-CEF2-EA35DCBA076A}"/>
+              </a:ext>
+            </a:extLst>
+          </p:cNvPr>
+          <p:cNvSpPr>
+            <a:spLocks noGrp="1"/>
+          </p:cNvSpPr>
+          <p:nvPr>
+            <p:ph type="title"/>
+          </p:nvPr>
+        </p:nvSpPr>
+        <p:spPr>
+          <a:xfrm>
+            <a:off x="417399" y="643467"/>
+            <a:ext cx="8408193" cy="744836"/>
+          </a:xfrm>
+        </p:spPr>
+        <p:txBody>
+          <a:bodyPr vert="horz" lIns="91440" tIns="45720" rIns="91440" bIns="45720" rtlCol="0" anchor="ctr">
+            <a:normAutofit/>
+          </a:bodyPr>
+          <a:lstStyle/>
+          <a:p>
+            <a:pPr defTabSz="914400">
+              <a:lnSpc>
+                <a:spcPct val="90000"/>
+              </a:lnSpc>
+            </a:pPr>
+            <a:r>
+              <a:rPr lang="en-US" sz="2800" kern="1200" dirty="0">
+                <a:solidFill>
+                  <a:schemeClr val="bg1"/>
+                </a:solidFill>
+                <a:latin typeface="+mj-lt"/>
+                <a:ea typeface="+mj-ea"/>
+                <a:cs typeface="+mj-cs"/>
+              </a:rPr>
+              <a:t>Results: Detection Performance</a:t>
+            </a:r>
+          </a:p>
+        </p:txBody>
+      </p:sp>
+      <p:pic>
+        <p:nvPicPr>
+          <p:cNvPr id="3" name="Picture 2">
+            <a:extLst>
+              <a:ext uri="{FF2B5EF4-FFF2-40B4-BE49-F238E27FC236}">
+                <a16:creationId xmlns:a16="http://schemas.microsoft.com/office/drawing/2014/main" id="{25BE9F14-AAAC-F3B5-9722-4E0629D91F9E}"/>
+              </a:ext>
+            </a:extLst>
+          </p:cNvPr>
+          <p:cNvPicPr>
+            <a:picLocks noChangeAspect="1"/>
+          </p:cNvPicPr>
+          <p:nvPr/>
+        </p:nvPicPr>
+        <p:blipFill>
+          <a:blip r:embed="rId2"/>
+          <a:stretch>
+            <a:fillRect/>
+          </a:stretch>
+        </p:blipFill>
+        <p:spPr>
+          <a:xfrm>
+            <a:off x="1095607" y="1509711"/>
+            <a:ext cx="6952785" cy="4844154"/>
+          </a:xfrm>
+          <a:prstGeom prst="rect">
+            <a:avLst/>
+          </a:prstGeom>
+        </p:spPr>
+      </p:pic>
+    </p:spTree>
+    <p:extLst>
+      <p:ext uri="{BB962C8B-B14F-4D97-AF65-F5344CB8AC3E}">
+        <p14:creationId xmlns:p14="http://schemas.microsoft.com/office/powerpoint/2010/main" val="350239924"/>
+      </p:ext>
+    </p:extLst>
+  </p:cSld>
+  <p:clrMapOvr>
+    <a:masterClrMapping/>
+  </p:clrMapOvr>
+</p:sld>
+</file>
+
+<file path=ppt/slides/slide11.xml><?xml version="1.0" encoding="utf-8"?>
+<p:sld xmlns:a="http://schemas.openxmlformats.org/drawingml/2006/main" xmlns:r="http://schemas.openxmlformats.org/officeDocument/2006/relationships" xmlns:p="http://schemas.openxmlformats.org/presentationml/2006/main">
+  <p:cSld>
+    <p:bg>
+      <p:bgPr>
+        <a:solidFill>
+          <a:schemeClr val="bg1"/>
+        </a:solidFill>
+        <a:effectLst/>
+      </p:bgPr>
+    </p:bg>
+    <p:spTree>
+      <p:nvGrpSpPr>
+        <p:cNvPr id="1" name="">
+          <a:extLst>
+            <a:ext uri="{FF2B5EF4-FFF2-40B4-BE49-F238E27FC236}">
+              <a16:creationId xmlns:a16="http://schemas.microsoft.com/office/drawing/2014/main" id="{7BB5486A-2C7D-4CB3-E309-21FF9897FBB1}"/>
+            </a:ext>
+          </a:extLst>
+        </p:cNvPr>
+        <p:cNvGrpSpPr/>
+        <p:nvPr/>
+      </p:nvGrpSpPr>
+      <p:grpSpPr>
+        <a:xfrm>
+          <a:off x="0" y="0"/>
+          <a:ext cx="0" cy="0"/>
+          <a:chOff x="0" y="0"/>
+          <a:chExt cx="0" cy="0"/>
+        </a:xfrm>
+      </p:grpSpPr>
+      <p:sp>
+        <p:nvSpPr>
+          <p:cNvPr id="8" name="Rectangle 7">
+            <a:extLst>
+              <a:ext uri="{FF2B5EF4-FFF2-40B4-BE49-F238E27FC236}">
+                <a16:creationId xmlns:a16="http://schemas.microsoft.com/office/drawing/2014/main" id="{A4AC5506-6312-4701-8D3C-40187889A947}"/>
+              </a:ext>
+              <a:ext uri="{C183D7F6-B498-43B3-948B-1728B52AA6E4}">
+                <adec:decorative xmlns:adec="http://schemas.microsoft.com/office/drawing/2017/decorative" val="1"/>
+              </a:ext>
+            </a:extLst>
+          </p:cNvPr>
+          <p:cNvSpPr>
+            <a:spLocks noGrp="1" noRot="1" noChangeAspect="1" noMove="1" noResize="1" noEditPoints="1" noAdjustHandles="1" noChangeArrowheads="1" noChangeShapeType="1" noTextEdit="1"/>
+          </p:cNvSpPr>
+          <p:nvPr>
+            <p:extLst>
+              <p:ext uri="{386F3935-93C4-4BCD-93E2-E3B085C9AB24}">
+                <p16:designElem xmlns:p16="http://schemas.microsoft.com/office/powerpoint/2015/main" val="1"/>
+              </p:ext>
+            </p:extLst>
+          </p:nvPr>
+        </p:nvSpPr>
+        <p:spPr>
+          <a:xfrm>
+            <a:off x="0" y="651752"/>
+            <a:ext cx="9144000" cy="736551"/>
+          </a:xfrm>
+          <a:prstGeom prst="rect">
+            <a:avLst/>
+          </a:prstGeom>
+          <a:solidFill>
+            <a:schemeClr val="tx1"/>
+          </a:solidFill>
+          <a:ln>
+            <a:noFill/>
+          </a:ln>
+        </p:spPr>
+        <p:style>
+          <a:lnRef idx="2">
+            <a:schemeClr val="accent1">
+              <a:shade val="50000"/>
+            </a:schemeClr>
+          </a:lnRef>
+          <a:fillRef idx="1">
+            <a:schemeClr val="accent1"/>
+          </a:fillRef>
+          <a:effectRef idx="0">
+            <a:schemeClr val="accent1"/>
+          </a:effectRef>
+          <a:fontRef idx="minor">
+            <a:schemeClr val="lt1"/>
+          </a:fontRef>
+        </p:style>
+        <p:txBody>
+          <a:bodyPr rtlCol="0" anchor="ctr"/>
+          <a:lstStyle/>
+          <a:p>
+            <a:pPr algn="ctr"/>
+            <a:endParaRPr lang="en-US"/>
+          </a:p>
+        </p:txBody>
+      </p:sp>
+      <p:sp>
+        <p:nvSpPr>
+          <p:cNvPr id="2" name="Title 1">
+            <a:extLst>
+              <a:ext uri="{FF2B5EF4-FFF2-40B4-BE49-F238E27FC236}">
+                <a16:creationId xmlns:a16="http://schemas.microsoft.com/office/drawing/2014/main" id="{E887A502-E9A3-22A2-1607-CC766198F6B0}"/>
+              </a:ext>
+            </a:extLst>
+          </p:cNvPr>
+          <p:cNvSpPr>
+            <a:spLocks noGrp="1"/>
+          </p:cNvSpPr>
+          <p:nvPr>
+            <p:ph type="title"/>
+          </p:nvPr>
+        </p:nvSpPr>
+        <p:spPr>
+          <a:xfrm>
+            <a:off x="417399" y="643467"/>
+            <a:ext cx="8408193" cy="744836"/>
+          </a:xfrm>
+        </p:spPr>
+        <p:txBody>
+          <a:bodyPr vert="horz" lIns="91440" tIns="45720" rIns="91440" bIns="45720" rtlCol="0" anchor="ctr">
+            <a:normAutofit/>
+          </a:bodyPr>
+          <a:lstStyle/>
+          <a:p>
+            <a:pPr defTabSz="914400">
+              <a:lnSpc>
+                <a:spcPct val="90000"/>
+              </a:lnSpc>
+            </a:pPr>
+            <a:r>
+              <a:rPr lang="en-US" sz="2800" kern="1200" dirty="0">
+                <a:solidFill>
+                  <a:schemeClr val="bg1"/>
+                </a:solidFill>
+                <a:latin typeface="+mj-lt"/>
+                <a:ea typeface="+mj-ea"/>
+                <a:cs typeface="+mj-cs"/>
+              </a:rPr>
+              <a:t>Results: Detection Performance</a:t>
+            </a:r>
+          </a:p>
+        </p:txBody>
+      </p:sp>
+      <p:pic>
+        <p:nvPicPr>
+          <p:cNvPr id="4" name="Picture 3">
+            <a:extLst>
+              <a:ext uri="{FF2B5EF4-FFF2-40B4-BE49-F238E27FC236}">
+                <a16:creationId xmlns:a16="http://schemas.microsoft.com/office/drawing/2014/main" id="{32C908D8-FD4A-23AD-FF3A-C520FE2AF206}"/>
+              </a:ext>
+            </a:extLst>
+          </p:cNvPr>
+          <p:cNvPicPr>
+            <a:picLocks noChangeAspect="1"/>
+          </p:cNvPicPr>
+          <p:nvPr/>
+        </p:nvPicPr>
+        <p:blipFill>
+          <a:blip r:embed="rId2"/>
+          <a:stretch>
+            <a:fillRect/>
+          </a:stretch>
+        </p:blipFill>
+        <p:spPr>
+          <a:xfrm>
+            <a:off x="1279602" y="1515378"/>
+            <a:ext cx="6584795" cy="4587767"/>
+          </a:xfrm>
+          <a:prstGeom prst="rect">
+            <a:avLst/>
+          </a:prstGeom>
+        </p:spPr>
+      </p:pic>
+    </p:spTree>
+    <p:extLst>
+      <p:ext uri="{BB962C8B-B14F-4D97-AF65-F5344CB8AC3E}">
+        <p14:creationId xmlns:p14="http://schemas.microsoft.com/office/powerpoint/2010/main" val="2818536614"/>
+      </p:ext>
+    </p:extLst>
+  </p:cSld>
+  <p:clrMapOvr>
+    <a:masterClrMapping/>
+  </p:clrMapOvr>
+</p:sld>
+</file>
+
+<file path=ppt/slides/slide12.xml><?xml version="1.0" encoding="utf-8"?>
+<p:sld xmlns:a="http://schemas.openxmlformats.org/drawingml/2006/main" xmlns:r="http://schemas.openxmlformats.org/officeDocument/2006/relationships" xmlns:p="http://schemas.openxmlformats.org/presentationml/2006/main">
+  <p:cSld>
+    <p:bg>
+      <p:bgPr>
+        <a:solidFill>
+          <a:schemeClr val="bg1"/>
+        </a:solidFill>
+        <a:effectLst/>
+      </p:bgPr>
+    </p:bg>
     <p:spTree>
       <p:nvGrpSpPr>
         <p:cNvPr id="1" name=""/>
@@ -15984,6 +19909,66 @@
           <a:chExt cx="0" cy="0"/>
         </a:xfrm>
       </p:grpSpPr>
+      <p:sp useBgFill="1">
+        <p:nvSpPr>
+          <p:cNvPr id="9" name="Rectangle 8">
+            <a:extLst>
+              <a:ext uri="{FF2B5EF4-FFF2-40B4-BE49-F238E27FC236}">
+                <a16:creationId xmlns:a16="http://schemas.microsoft.com/office/drawing/2014/main" id="{53B021B3-DE93-4AB7-8A18-CF5F1CED88B8}"/>
+              </a:ext>
+              <a:ext uri="{C183D7F6-B498-43B3-948B-1728B52AA6E4}">
+                <adec:decorative xmlns:adec="http://schemas.microsoft.com/office/drawing/2017/decorative" val="1"/>
+              </a:ext>
+            </a:extLst>
+          </p:cNvPr>
+          <p:cNvSpPr>
+            <a:spLocks noGrp="1" noRot="1" noChangeAspect="1" noMove="1" noResize="1" noEditPoints="1" noAdjustHandles="1" noChangeArrowheads="1" noChangeShapeType="1" noTextEdit="1"/>
+          </p:cNvSpPr>
+          <p:nvPr>
+            <p:extLst>
+              <p:ext uri="{386F3935-93C4-4BCD-93E2-E3B085C9AB24}">
+                <p16:designElem xmlns:p16="http://schemas.microsoft.com/office/powerpoint/2015/main" val="1"/>
+              </p:ext>
+            </p:extLst>
+          </p:nvPr>
+        </p:nvSpPr>
+        <p:spPr>
+          <a:xfrm>
+            <a:off x="0" y="0"/>
+            <a:ext cx="9144000" cy="6858000"/>
+          </a:xfrm>
+          <a:prstGeom prst="rect">
+            <a:avLst/>
+          </a:prstGeom>
+          <a:ln>
+            <a:noFill/>
+          </a:ln>
+        </p:spPr>
+        <p:style>
+          <a:lnRef idx="2">
+            <a:schemeClr val="accent1">
+              <a:shade val="50000"/>
+            </a:schemeClr>
+          </a:lnRef>
+          <a:fillRef idx="1">
+            <a:schemeClr val="accent1"/>
+          </a:fillRef>
+          <a:effectRef idx="0">
+            <a:schemeClr val="accent1"/>
+          </a:effectRef>
+          <a:fontRef idx="minor">
+            <a:schemeClr val="lt1"/>
+          </a:fontRef>
+        </p:style>
+        <p:txBody>
+          <a:bodyPr rtlCol="0" anchor="ctr"/>
+          <a:lstStyle/>
+          <a:p>
+            <a:pPr algn="ctr"/>
+            <a:endParaRPr lang="en-US"/>
+          </a:p>
+        </p:txBody>
+      </p:sp>
       <p:sp>
         <p:nvSpPr>
           <p:cNvPr id="2" name="Title 1"/>
@@ -15994,9 +19979,16 @@
             <p:ph type="title"/>
           </p:nvPr>
         </p:nvSpPr>
-        <p:spPr/>
+        <p:spPr>
+          <a:xfrm>
+            <a:off x="630936" y="256032"/>
+            <a:ext cx="7879842" cy="1014984"/>
+          </a:xfrm>
+        </p:spPr>
         <p:txBody>
-          <a:bodyPr/>
+          <a:bodyPr anchor="b">
+            <a:normAutofit/>
+          </a:bodyPr>
           <a:lstStyle/>
           <a:p>
             <a:r>
@@ -16007,104 +19999,172 @@
       </p:sp>
       <p:sp>
         <p:nvSpPr>
-          <p:cNvPr id="3" name="Content Placeholder 2"/>
+          <p:cNvPr id="11" name="Rectangle 10">
+            <a:extLst>
+              <a:ext uri="{FF2B5EF4-FFF2-40B4-BE49-F238E27FC236}">
+                <a16:creationId xmlns:a16="http://schemas.microsoft.com/office/drawing/2014/main" id="{52D502E5-F6B4-4D58-B4AE-FC466FF15EE8}"/>
+              </a:ext>
+              <a:ext uri="{C183D7F6-B498-43B3-948B-1728B52AA6E4}">
+                <adec:decorative xmlns:adec="http://schemas.microsoft.com/office/drawing/2017/decorative" val="1"/>
+              </a:ext>
+            </a:extLst>
+          </p:cNvPr>
           <p:cNvSpPr>
-            <a:spLocks noGrp="1"/>
+            <a:spLocks noGrp="1" noRot="1" noChangeAspect="1" noMove="1" noResize="1" noEditPoints="1" noAdjustHandles="1" noChangeArrowheads="1" noChangeShapeType="1" noTextEdit="1"/>
           </p:cNvSpPr>
           <p:nvPr>
-            <p:ph idx="1"/>
+            <p:extLst>
+              <p:ext uri="{386F3935-93C4-4BCD-93E2-E3B085C9AB24}">
+                <p16:designElem xmlns:p16="http://schemas.microsoft.com/office/powerpoint/2015/main" val="1"/>
+              </p:ext>
+            </p:extLst>
           </p:nvPr>
         </p:nvSpPr>
-        <p:spPr/>
+        <p:spPr>
+          <a:xfrm>
+            <a:off x="649464" y="1634502"/>
+            <a:ext cx="7838694" cy="18288"/>
+          </a:xfrm>
+          <a:prstGeom prst="rect">
+            <a:avLst/>
+          </a:prstGeom>
+          <a:solidFill>
+            <a:srgbClr val="D5D5D5"/>
+          </a:solidFill>
+          <a:ln w="3175">
+            <a:noFill/>
+          </a:ln>
+          <a:effectLst/>
+        </p:spPr>
+        <p:style>
+          <a:lnRef idx="2">
+            <a:schemeClr val="accent1">
+              <a:shade val="50000"/>
+            </a:schemeClr>
+          </a:lnRef>
+          <a:fillRef idx="1">
+            <a:schemeClr val="accent1"/>
+          </a:fillRef>
+          <a:effectRef idx="0">
+            <a:schemeClr val="accent1"/>
+          </a:effectRef>
+          <a:fontRef idx="minor">
+            <a:schemeClr val="lt1"/>
+          </a:fontRef>
+        </p:style>
         <p:txBody>
-          <a:bodyPr>
-            <a:normAutofit fontScale="70000" lnSpcReduction="20000"/>
-          </a:bodyPr>
+          <a:bodyPr rtlCol="0" anchor="ctr"/>
           <a:lstStyle/>
           <a:p>
-            <a:r>
-              <a:rPr lang="en-GB"/>
-              <a:t>Feature reduction techniques, including PCA, </a:t>
-            </a:r>
-            <a:r>
-              <a:rPr lang="en-GB" err="1"/>
-              <a:t>AutoEncoder</a:t>
-            </a:r>
-            <a:r>
-              <a:rPr lang="en-GB"/>
-              <a:t>, and </a:t>
-            </a:r>
-            <a:r>
-              <a:rPr lang="en-GB" err="1"/>
-              <a:t>ResNeXt</a:t>
-            </a:r>
-            <a:r>
-              <a:rPr lang="en-GB"/>
-              <a:t>, generally lead to a decrease in model performance, particularly in terms of accuracy and F1 score.</a:t>
-            </a:r>
-          </a:p>
-          <a:p>
-            <a:r>
-              <a:rPr lang="en-GB"/>
-              <a:t>If</a:t>
-            </a:r>
-            <a:r>
-              <a:rPr lang="zh-CN" altLang="en-US"/>
-              <a:t> </a:t>
-            </a:r>
-            <a:r>
-              <a:rPr lang="en-GB"/>
-              <a:t>a certain degree of performance degradation is acceptable, more aggressive dimensionality reduction can be applied to significantly reduce feature size and computational cost.</a:t>
-            </a:r>
-          </a:p>
-          <a:p>
-            <a:r>
-              <a:rPr lang="en-GB" err="1"/>
-              <a:t>ResNeXt</a:t>
-            </a:r>
-            <a:r>
-              <a:rPr lang="en-GB"/>
-              <a:t> introduces high CPU overhead when applied to low-dimensional flow-level data, without improving accuracy or F1 score, making it unsuitable for deployment on edge devices. In contrast, PCA and </a:t>
-            </a:r>
-            <a:r>
-              <a:rPr lang="en-GB" err="1"/>
-              <a:t>AutoEncoder</a:t>
-            </a:r>
-            <a:r>
-              <a:rPr lang="en-GB"/>
-              <a:t> show no significant resource bottlenecks and are more suitable for edge-based IDS.</a:t>
-            </a:r>
-          </a:p>
-          <a:p>
-            <a:r>
-              <a:rPr lang="en-GB"/>
-              <a:t>Feature reduction reduces performance but improves efficiency; PCA and </a:t>
-            </a:r>
-            <a:r>
-              <a:rPr lang="en-GB" err="1"/>
-              <a:t>AutoEncoder</a:t>
-            </a:r>
-            <a:r>
-              <a:rPr lang="en-GB"/>
-              <a:t> are edge-friendly, while </a:t>
-            </a:r>
-            <a:r>
-              <a:rPr lang="en-GB" err="1"/>
-              <a:t>ResNeXt</a:t>
-            </a:r>
-            <a:r>
-              <a:rPr lang="en-GB"/>
-              <a:t> is computationally expensive and ineffective for low-dimensional data.</a:t>
-            </a:r>
-          </a:p>
-          <a:p>
-            <a:endParaRPr lang="en-GB"/>
-          </a:p>
-          <a:p>
-            <a:endParaRPr lang="en-GB"/>
+            <a:pPr algn="ctr"/>
+            <a:endParaRPr lang="en-US">
+              <a:solidFill>
+                <a:prstClr val="white"/>
+              </a:solidFill>
+              <a:latin typeface="Calibri" panose="020F0502020204030204"/>
+            </a:endParaRPr>
           </a:p>
         </p:txBody>
       </p:sp>
+      <p:sp>
+        <p:nvSpPr>
+          <p:cNvPr id="13" name="Rectangle 12">
+            <a:extLst>
+              <a:ext uri="{FF2B5EF4-FFF2-40B4-BE49-F238E27FC236}">
+                <a16:creationId xmlns:a16="http://schemas.microsoft.com/office/drawing/2014/main" id="{9DECDBF4-02B6-4BB4-B65B-B8107AD6A9E8}"/>
+              </a:ext>
+              <a:ext uri="{C183D7F6-B498-43B3-948B-1728B52AA6E4}">
+                <adec:decorative xmlns:adec="http://schemas.microsoft.com/office/drawing/2017/decorative" val="1"/>
+              </a:ext>
+            </a:extLst>
+          </p:cNvPr>
+          <p:cNvSpPr>
+            <a:spLocks noGrp="1" noRot="1" noChangeAspect="1" noMove="1" noResize="1" noEditPoints="1" noAdjustHandles="1" noChangeArrowheads="1" noChangeShapeType="1" noTextEdit="1"/>
+          </p:cNvSpPr>
+          <p:nvPr>
+            <p:extLst>
+              <p:ext uri="{386F3935-93C4-4BCD-93E2-E3B085C9AB24}">
+                <p16:designElem xmlns:p16="http://schemas.microsoft.com/office/powerpoint/2015/main" val="1"/>
+              </p:ext>
+            </p:extLst>
+          </p:nvPr>
+        </p:nvSpPr>
+        <p:spPr>
+          <a:xfrm flipV="1">
+            <a:off x="630936" y="1538176"/>
+            <a:ext cx="1405092" cy="109814"/>
+          </a:xfrm>
+          <a:prstGeom prst="rect">
+            <a:avLst/>
+          </a:prstGeom>
+          <a:solidFill>
+            <a:schemeClr val="accent2"/>
+          </a:solidFill>
+          <a:ln>
+            <a:noFill/>
+          </a:ln>
+        </p:spPr>
+        <p:style>
+          <a:lnRef idx="2">
+            <a:schemeClr val="accent1">
+              <a:shade val="50000"/>
+            </a:schemeClr>
+          </a:lnRef>
+          <a:fillRef idx="1">
+            <a:schemeClr val="accent1"/>
+          </a:fillRef>
+          <a:effectRef idx="0">
+            <a:schemeClr val="accent1"/>
+          </a:effectRef>
+          <a:fontRef idx="minor">
+            <a:schemeClr val="lt1"/>
+          </a:fontRef>
+        </p:style>
+        <p:txBody>
+          <a:bodyPr rtlCol="0" anchor="ctr"/>
+          <a:lstStyle/>
+          <a:p>
+            <a:pPr algn="ctr"/>
+            <a:endParaRPr lang="en-US">
+              <a:solidFill>
+                <a:prstClr val="white"/>
+              </a:solidFill>
+              <a:latin typeface="Calibri" panose="020F0502020204030204"/>
+            </a:endParaRPr>
+          </a:p>
+        </p:txBody>
+      </p:sp>
+      <p:graphicFrame>
+        <p:nvGraphicFramePr>
+          <p:cNvPr id="5" name="Content Placeholder 2">
+            <a:extLst>
+              <a:ext uri="{FF2B5EF4-FFF2-40B4-BE49-F238E27FC236}">
+                <a16:creationId xmlns:a16="http://schemas.microsoft.com/office/drawing/2014/main" id="{8229F03F-070E-65BB-A314-B6D801640DE9}"/>
+              </a:ext>
+            </a:extLst>
+          </p:cNvPr>
+          <p:cNvGraphicFramePr>
+            <a:graphicFrameLocks noGrp="1"/>
+          </p:cNvGraphicFramePr>
+          <p:nvPr>
+            <p:ph idx="1"/>
+            <p:extLst>
+              <p:ext uri="{D42A27DB-BD31-4B8C-83A1-F6EECF244321}">
+                <p14:modId xmlns:p14="http://schemas.microsoft.com/office/powerpoint/2010/main" val="3464032770"/>
+              </p:ext>
+            </p:extLst>
+          </p:nvPr>
+        </p:nvGraphicFramePr>
+        <p:xfrm>
+          <a:off x="628650" y="1926266"/>
+          <a:ext cx="7886700" cy="4357524"/>
+        </p:xfrm>
+        <a:graphic>
+          <a:graphicData uri="http://schemas.openxmlformats.org/drawingml/2006/diagram">
+            <dgm:relIds xmlns:dgm="http://schemas.openxmlformats.org/drawingml/2006/diagram" xmlns:r="http://schemas.openxmlformats.org/officeDocument/2006/relationships" r:dm="rId3" r:lo="rId4" r:qs="rId5" r:cs="rId6"/>
+          </a:graphicData>
+        </a:graphic>
+      </p:graphicFrame>
     </p:spTree>
   </p:cSld>
   <p:clrMapOvr>
@@ -16113,7 +20173,7 @@
 </p:sld>
 </file>
 
-<file path=ppt/slides/slide11.xml><?xml version="1.0" encoding="utf-8"?>
+<file path=ppt/slides/slide13.xml><?xml version="1.0" encoding="utf-8"?>
 <p:sld xmlns:a="http://schemas.openxmlformats.org/drawingml/2006/main" xmlns:r="http://schemas.openxmlformats.org/officeDocument/2006/relationships" xmlns:p="http://schemas.openxmlformats.org/presentationml/2006/main">
   <p:cSld>
     <p:spTree>
@@ -32610,7 +36670,7 @@
         <p:spPr>
           <a:xfrm>
             <a:off x="457200" y="4430486"/>
-            <a:ext cx="5137266" cy="2585323"/>
+            <a:ext cx="5137266" cy="2031325"/>
           </a:xfrm>
           <a:prstGeom prst="rect">
             <a:avLst/>
@@ -32692,8 +36752,14 @@
             </a:pPr>
             <a:r>
               <a:rPr lang="en-GB" dirty="0"/>
-              <a:t>Autoencoder / </a:t>
+              <a:t>Autoencoder</a:t>
             </a:r>
+          </a:p>
+          <a:p>
+            <a:pPr marL="742950" lvl="1" indent="-285750">
+              <a:buFont typeface="Arial" panose="020B0604020202020204" pitchFamily="34" charset="0"/>
+              <a:buChar char="•"/>
+            </a:pPr>
             <a:r>
               <a:rPr lang="en-GB" dirty="0" err="1"/>
               <a:t>ResNeXt</a:t>
@@ -32706,19 +36772,14 @@
               <a:rPr lang="en-GB" dirty="0"/>
               <a:t> (deep representation)</a:t>
             </a:r>
+            <a:endParaRPr lang="en-US" dirty="0"/>
           </a:p>
           <a:p>
             <a:pPr marL="742950" lvl="1" indent="-285750">
               <a:buFont typeface="Arial" panose="020B0604020202020204" pitchFamily="34" charset="0"/>
               <a:buChar char="•"/>
             </a:pPr>
-            <a:r>
-              <a:rPr lang="en-GB" dirty="0"/>
-              <a:t>Goal: reduce features while preserving information</a:t>
-            </a:r>
-          </a:p>
-          <a:p>
-            <a:endParaRPr lang="en-US" dirty="0"/>
+            <a:endParaRPr lang="en-GB" dirty="0"/>
           </a:p>
         </p:txBody>
       </p:sp>
@@ -33190,6 +37251,14 @@
 <file path=ppt/slides/slide9.xml><?xml version="1.0" encoding="utf-8"?>
 <p:sld xmlns:a="http://schemas.openxmlformats.org/drawingml/2006/main" xmlns:r="http://schemas.openxmlformats.org/officeDocument/2006/relationships" xmlns:p="http://schemas.openxmlformats.org/presentationml/2006/main">
   <p:cSld>
+    <p:bg>
+      <p:bgPr>
+        <a:solidFill>
+          <a:schemeClr val="bg1"/>
+        </a:solidFill>
+        <a:effectLst/>
+      </p:bgPr>
+    </p:bg>
     <p:spTree>
       <p:nvGrpSpPr>
         <p:cNvPr id="1" name=""/>
@@ -33206,6 +37275,69 @@
       </p:grpSpPr>
       <p:sp>
         <p:nvSpPr>
+          <p:cNvPr id="9" name="Rectangle 8">
+            <a:extLst>
+              <a:ext uri="{FF2B5EF4-FFF2-40B4-BE49-F238E27FC236}">
+                <a16:creationId xmlns:a16="http://schemas.microsoft.com/office/drawing/2014/main" id="{A4AC5506-6312-4701-8D3C-40187889A947}"/>
+              </a:ext>
+              <a:ext uri="{C183D7F6-B498-43B3-948B-1728B52AA6E4}">
+                <adec:decorative xmlns:adec="http://schemas.microsoft.com/office/drawing/2017/decorative" val="1"/>
+              </a:ext>
+            </a:extLst>
+          </p:cNvPr>
+          <p:cNvSpPr>
+            <a:spLocks noGrp="1" noRot="1" noChangeAspect="1" noMove="1" noResize="1" noEditPoints="1" noAdjustHandles="1" noChangeArrowheads="1" noChangeShapeType="1" noTextEdit="1"/>
+          </p:cNvSpPr>
+          <p:nvPr>
+            <p:extLst>
+              <p:ext uri="{386F3935-93C4-4BCD-93E2-E3B085C9AB24}">
+                <p16:designElem xmlns:p16="http://schemas.microsoft.com/office/powerpoint/2015/main" val="1"/>
+              </p:ext>
+            </p:extLst>
+          </p:nvPr>
+        </p:nvSpPr>
+        <p:spPr>
+          <a:xfrm>
+            <a:off x="0" y="651752"/>
+            <a:ext cx="9144000" cy="736551"/>
+          </a:xfrm>
+          <a:prstGeom prst="rect">
+            <a:avLst/>
+          </a:prstGeom>
+          <a:solidFill>
+            <a:schemeClr val="tx1"/>
+          </a:solidFill>
+          <a:ln>
+            <a:noFill/>
+          </a:ln>
+        </p:spPr>
+        <p:style>
+          <a:lnRef idx="2">
+            <a:schemeClr val="accent1">
+              <a:shade val="50000"/>
+            </a:schemeClr>
+          </a:lnRef>
+          <a:fillRef idx="1">
+            <a:schemeClr val="accent1"/>
+          </a:fillRef>
+          <a:effectRef idx="0">
+            <a:schemeClr val="accent1"/>
+          </a:effectRef>
+          <a:fontRef idx="minor">
+            <a:schemeClr val="lt1"/>
+          </a:fontRef>
+        </p:style>
+        <p:txBody>
+          <a:bodyPr rtlCol="0" anchor="ctr"/>
+          <a:lstStyle/>
+          <a:p>
+            <a:pPr algn="ctr"/>
+            <a:endParaRPr lang="en-US"/>
+          </a:p>
+        </p:txBody>
+      </p:sp>
+      <p:sp>
+        <p:nvSpPr>
           <p:cNvPr id="2" name="Title 1"/>
           <p:cNvSpPr>
             <a:spLocks noGrp="1"/>
@@ -33214,51 +37346,67 @@
             <p:ph type="title"/>
           </p:nvPr>
         </p:nvSpPr>
-        <p:spPr/>
+        <p:spPr>
+          <a:xfrm>
+            <a:off x="417399" y="643467"/>
+            <a:ext cx="8408193" cy="744836"/>
+          </a:xfrm>
+        </p:spPr>
         <p:txBody>
-          <a:bodyPr/>
+          <a:bodyPr vert="horz" lIns="91440" tIns="45720" rIns="91440" bIns="45720" rtlCol="0" anchor="ctr">
+            <a:normAutofit/>
+          </a:bodyPr>
           <a:lstStyle/>
           <a:p>
+            <a:pPr defTabSz="914400">
+              <a:lnSpc>
+                <a:spcPct val="90000"/>
+              </a:lnSpc>
+            </a:pPr>
             <a:r>
+              <a:rPr lang="en-US" sz="2800" kern="1200" dirty="0">
+                <a:solidFill>
+                  <a:schemeClr val="bg1"/>
+                </a:solidFill>
+                <a:latin typeface="+mj-lt"/>
+                <a:ea typeface="+mj-ea"/>
+                <a:cs typeface="+mj-cs"/>
+              </a:rPr>
               <a:t>Results: Detection Performance</a:t>
             </a:r>
           </a:p>
         </p:txBody>
       </p:sp>
-      <p:sp>
-        <p:nvSpPr>
-          <p:cNvPr id="3" name="Content Placeholder 2"/>
-          <p:cNvSpPr>
-            <a:spLocks noGrp="1"/>
-          </p:cNvSpPr>
-          <p:nvPr>
-            <p:ph idx="1"/>
-          </p:nvPr>
-        </p:nvSpPr>
-        <p:spPr/>
-        <p:txBody>
-          <a:bodyPr/>
-          <a:lstStyle/>
-          <a:p>
-            <a:r>
-              <a:rPr lang="en-GB"/>
-              <a:t>Compare FS, PCA, Autoencoder</a:t>
-            </a:r>
-          </a:p>
-          <a:p>
-            <a:r>
-              <a:rPr lang="en-GB"/>
-              <a:t>Accuracy / Precision / Recall results</a:t>
-            </a:r>
-          </a:p>
-          <a:p>
-            <a:r>
-              <a:rPr lang="en-GB"/>
-              <a:t>Performance differences observed</a:t>
-            </a:r>
-          </a:p>
-        </p:txBody>
-      </p:sp>
+      <p:pic>
+        <p:nvPicPr>
+          <p:cNvPr id="4" name="Picture 3">
+            <a:extLst>
+              <a:ext uri="{FF2B5EF4-FFF2-40B4-BE49-F238E27FC236}">
+                <a16:creationId xmlns:a16="http://schemas.microsoft.com/office/drawing/2014/main" id="{DAA2CFB1-11FC-6602-E404-BCF9B9E77477}"/>
+              </a:ext>
+            </a:extLst>
+          </p:cNvPr>
+          <p:cNvPicPr>
+            <a:picLocks noChangeAspect="1"/>
+          </p:cNvPicPr>
+          <p:nvPr/>
+        </p:nvPicPr>
+        <p:blipFill>
+          <a:blip r:embed="rId2"/>
+          <a:stretch>
+            <a:fillRect/>
+          </a:stretch>
+        </p:blipFill>
+        <p:spPr>
+          <a:xfrm>
+            <a:off x="1044507" y="1555867"/>
+            <a:ext cx="7153975" cy="4989898"/>
+          </a:xfrm>
+          <a:prstGeom prst="rect">
+            <a:avLst/>
+          </a:prstGeom>
+        </p:spPr>
+      </p:pic>
     </p:spTree>
   </p:cSld>
   <p:clrMapOvr>

--- a/Presentation/IoMT_IDS_Presentation.pptx
+++ b/Presentation/IoMT_IDS_Presentation.pptx
@@ -146,6 +146,35 @@
     <p1510:client id="{14D8A4EF-6160-364B-9056-62E80023A26D}" v="59" dt="2026-03-22T19:27:25.402"/>
   </p1510:revLst>
 </p1510:revInfo>
+</file>
+
+<file path=ppt/changesInfos/changesInfo1.xml><?xml version="1.0" encoding="utf-8"?>
+<pc:chgInfo xmlns:a="http://schemas.openxmlformats.org/drawingml/2006/main" xmlns:r="http://schemas.openxmlformats.org/officeDocument/2006/relationships" xmlns:ac="http://schemas.microsoft.com/office/drawing/2013/main/command" xmlns:pc="http://schemas.microsoft.com/office/powerpoint/2013/main/command">
+  <pc:docChgLst>
+    <pc:chgData name="耀泉 马" userId="19e30af8d5659de2" providerId="LiveId" clId="{C3594856-CEDA-5129-B2AF-7962E3CA4CA3}"/>
+    <pc:docChg chg="modSld">
+      <pc:chgData name="耀泉 马" userId="19e30af8d5659de2" providerId="LiveId" clId="{C3594856-CEDA-5129-B2AF-7962E3CA4CA3}" dt="2026-03-22T20:38:44.309" v="0" actId="14100"/>
+      <pc:docMkLst>
+        <pc:docMk/>
+      </pc:docMkLst>
+      <pc:sldChg chg="modSp mod">
+        <pc:chgData name="耀泉 马" userId="19e30af8d5659de2" providerId="LiveId" clId="{C3594856-CEDA-5129-B2AF-7962E3CA4CA3}" dt="2026-03-22T20:38:44.309" v="0" actId="14100"/>
+        <pc:sldMkLst>
+          <pc:docMk/>
+          <pc:sldMk cId="814386939" sldId="268"/>
+        </pc:sldMkLst>
+        <pc:spChg chg="mod">
+          <ac:chgData name="耀泉 马" userId="19e30af8d5659de2" providerId="LiveId" clId="{C3594856-CEDA-5129-B2AF-7962E3CA4CA3}" dt="2026-03-22T20:38:44.309" v="0" actId="14100"/>
+          <ac:spMkLst>
+            <pc:docMk/>
+            <pc:sldMk cId="814386939" sldId="268"/>
+            <ac:spMk id="33" creationId="{B8F9C0DF-9C3A-1217-442A-C22496842740}"/>
+          </ac:spMkLst>
+        </pc:spChg>
+      </pc:sldChg>
+    </pc:docChg>
+  </pc:docChgLst>
+</pc:chgInfo>
 </file>
 
 <file path=ppt/notesMasters/notesMaster1.xml><?xml version="1.0" encoding="utf-8"?>
@@ -47374,8 +47403,8 @@
         </p:nvSpPr>
         <p:spPr>
           <a:xfrm>
-            <a:off x="2597968" y="2531495"/>
-            <a:ext cx="303718" cy="369332"/>
+            <a:off x="2569029" y="2380118"/>
+            <a:ext cx="332657" cy="369332"/>
           </a:xfrm>
           <a:prstGeom prst="rect">
             <a:avLst/>
@@ -47389,10 +47418,10 @@
           <a:lstStyle/>
           <a:p>
             <a:r>
-              <a:rPr lang="en-US" altLang="zh-CN"/>
+              <a:rPr lang="en-US" altLang="zh-CN" dirty="0"/>
               <a:t>4</a:t>
             </a:r>
-            <a:endParaRPr lang="en-US"/>
+            <a:endParaRPr lang="en-US" dirty="0"/>
           </a:p>
         </p:txBody>
       </p:sp>

--- a/Presentation/IoMT_IDS_Presentation.pptx
+++ b/Presentation/IoMT_IDS_Presentation.pptx
@@ -143,7 +143,7 @@
 <file path=ppt/revisionInfo.xml><?xml version="1.0" encoding="utf-8"?>
 <p1510:revInfo xmlns:a="http://schemas.openxmlformats.org/drawingml/2006/main" xmlns:r="http://schemas.openxmlformats.org/officeDocument/2006/relationships" xmlns:p1510="http://schemas.microsoft.com/office/powerpoint/2015/10/main">
   <p1510:revLst>
-    <p1510:client id="{14D8A4EF-6160-364B-9056-62E80023A26D}" v="59" dt="2026-03-22T19:27:25.402"/>
+    <p1510:client id="{7BF04AB4-6846-4849-A1B8-6A167A3B7532}" v="20" dt="2026-05-01T20:36:33.518"/>
   </p1510:revLst>
 </p1510:revInfo>
 </file>
@@ -152,25 +152,160 @@
 <pc:chgInfo xmlns:a="http://schemas.openxmlformats.org/drawingml/2006/main" xmlns:r="http://schemas.openxmlformats.org/officeDocument/2006/relationships" xmlns:ac="http://schemas.microsoft.com/office/drawing/2013/main/command" xmlns:pc="http://schemas.microsoft.com/office/powerpoint/2013/main/command">
   <pc:docChgLst>
     <pc:chgData name="耀泉 马" userId="19e30af8d5659de2" providerId="LiveId" clId="{C3594856-CEDA-5129-B2AF-7962E3CA4CA3}"/>
-    <pc:docChg chg="modSld">
-      <pc:chgData name="耀泉 马" userId="19e30af8d5659de2" providerId="LiveId" clId="{C3594856-CEDA-5129-B2AF-7962E3CA4CA3}" dt="2026-03-22T20:38:44.309" v="0" actId="14100"/>
+    <pc:docChg chg="undo custSel addSld delSld modSld">
+      <pc:chgData name="耀泉 马" userId="19e30af8d5659de2" providerId="LiveId" clId="{C3594856-CEDA-5129-B2AF-7962E3CA4CA3}" dt="2026-05-01T20:36:33.518" v="392" actId="165"/>
       <pc:docMkLst>
         <pc:docMk/>
       </pc:docMkLst>
-      <pc:sldChg chg="modSp mod">
-        <pc:chgData name="耀泉 马" userId="19e30af8d5659de2" providerId="LiveId" clId="{C3594856-CEDA-5129-B2AF-7962E3CA4CA3}" dt="2026-03-22T20:38:44.309" v="0" actId="14100"/>
+      <pc:sldChg chg="addSp delSp modSp">
+        <pc:chgData name="耀泉 马" userId="19e30af8d5659de2" providerId="LiveId" clId="{C3594856-CEDA-5129-B2AF-7962E3CA4CA3}" dt="2026-05-01T20:36:33.518" v="392" actId="165"/>
         <pc:sldMkLst>
           <pc:docMk/>
-          <pc:sldMk cId="814386939" sldId="268"/>
+          <pc:sldMk cId="2133037477" sldId="271"/>
         </pc:sldMkLst>
         <pc:spChg chg="mod">
-          <ac:chgData name="耀泉 马" userId="19e30af8d5659de2" providerId="LiveId" clId="{C3594856-CEDA-5129-B2AF-7962E3CA4CA3}" dt="2026-03-22T20:38:44.309" v="0" actId="14100"/>
+          <ac:chgData name="耀泉 马" userId="19e30af8d5659de2" providerId="LiveId" clId="{C3594856-CEDA-5129-B2AF-7962E3CA4CA3}" dt="2026-05-01T20:36:24.298" v="391" actId="165"/>
           <ac:spMkLst>
             <pc:docMk/>
-            <pc:sldMk cId="814386939" sldId="268"/>
-            <ac:spMk id="33" creationId="{B8F9C0DF-9C3A-1217-442A-C22496842740}"/>
+            <pc:sldMk cId="2133037477" sldId="271"/>
+            <ac:spMk id="265" creationId="{1660F756-0147-63D6-229F-BB51E9CB0EFE}"/>
           </ac:spMkLst>
         </pc:spChg>
+        <pc:spChg chg="mod topLvl">
+          <ac:chgData name="耀泉 马" userId="19e30af8d5659de2" providerId="LiveId" clId="{C3594856-CEDA-5129-B2AF-7962E3CA4CA3}" dt="2026-05-01T20:36:24.298" v="391" actId="165"/>
+          <ac:spMkLst>
+            <pc:docMk/>
+            <pc:sldMk cId="2133037477" sldId="271"/>
+            <ac:spMk id="330" creationId="{40C5A6FE-FB89-2F94-CBD7-AD364035DAE6}"/>
+          </ac:spMkLst>
+        </pc:spChg>
+        <pc:spChg chg="mod">
+          <ac:chgData name="耀泉 马" userId="19e30af8d5659de2" providerId="LiveId" clId="{C3594856-CEDA-5129-B2AF-7962E3CA4CA3}" dt="2026-05-01T20:36:24.298" v="391" actId="165"/>
+          <ac:spMkLst>
+            <pc:docMk/>
+            <pc:sldMk cId="2133037477" sldId="271"/>
+            <ac:spMk id="366" creationId="{524C087E-4AAD-2DA6-0E15-61B83FF9FC0E}"/>
+          </ac:spMkLst>
+        </pc:spChg>
+        <pc:spChg chg="mod">
+          <ac:chgData name="耀泉 马" userId="19e30af8d5659de2" providerId="LiveId" clId="{C3594856-CEDA-5129-B2AF-7962E3CA4CA3}" dt="2026-05-01T20:36:24.298" v="391" actId="165"/>
+          <ac:spMkLst>
+            <pc:docMk/>
+            <pc:sldMk cId="2133037477" sldId="271"/>
+            <ac:spMk id="367" creationId="{C18C0FF9-A642-8CC7-2429-B2A2AEC5AD70}"/>
+          </ac:spMkLst>
+        </pc:spChg>
+        <pc:spChg chg="mod">
+          <ac:chgData name="耀泉 马" userId="19e30af8d5659de2" providerId="LiveId" clId="{C3594856-CEDA-5129-B2AF-7962E3CA4CA3}" dt="2026-05-01T20:36:24.298" v="391" actId="165"/>
+          <ac:spMkLst>
+            <pc:docMk/>
+            <pc:sldMk cId="2133037477" sldId="271"/>
+            <ac:spMk id="390" creationId="{7ABE0191-982A-8172-BEBD-021C40F1BCBC}"/>
+          </ac:spMkLst>
+        </pc:spChg>
+        <pc:spChg chg="mod">
+          <ac:chgData name="耀泉 马" userId="19e30af8d5659de2" providerId="LiveId" clId="{C3594856-CEDA-5129-B2AF-7962E3CA4CA3}" dt="2026-05-01T20:36:24.298" v="391" actId="165"/>
+          <ac:spMkLst>
+            <pc:docMk/>
+            <pc:sldMk cId="2133037477" sldId="271"/>
+            <ac:spMk id="413" creationId="{E4A614CF-6A68-A150-8F7B-37707CECF613}"/>
+          </ac:spMkLst>
+        </pc:spChg>
+        <pc:spChg chg="mod">
+          <ac:chgData name="耀泉 马" userId="19e30af8d5659de2" providerId="LiveId" clId="{C3594856-CEDA-5129-B2AF-7962E3CA4CA3}" dt="2026-05-01T20:36:24.298" v="391" actId="165"/>
+          <ac:spMkLst>
+            <pc:docMk/>
+            <pc:sldMk cId="2133037477" sldId="271"/>
+            <ac:spMk id="439" creationId="{4355B7CD-94E9-3F3D-B078-78875FFB79A3}"/>
+          </ac:spMkLst>
+        </pc:spChg>
+        <pc:spChg chg="mod">
+          <ac:chgData name="耀泉 马" userId="19e30af8d5659de2" providerId="LiveId" clId="{C3594856-CEDA-5129-B2AF-7962E3CA4CA3}" dt="2026-05-01T20:36:24.298" v="391" actId="165"/>
+          <ac:spMkLst>
+            <pc:docMk/>
+            <pc:sldMk cId="2133037477" sldId="271"/>
+            <ac:spMk id="440" creationId="{9BE493E2-2106-63BA-9ECE-CC88005D93B1}"/>
+          </ac:spMkLst>
+        </pc:spChg>
+        <pc:spChg chg="mod">
+          <ac:chgData name="耀泉 马" userId="19e30af8d5659de2" providerId="LiveId" clId="{C3594856-CEDA-5129-B2AF-7962E3CA4CA3}" dt="2026-05-01T20:36:24.298" v="391" actId="165"/>
+          <ac:spMkLst>
+            <pc:docMk/>
+            <pc:sldMk cId="2133037477" sldId="271"/>
+            <ac:spMk id="475" creationId="{1CA403CA-58EE-74F8-FFEB-CBE535A803BE}"/>
+          </ac:spMkLst>
+        </pc:spChg>
+        <pc:spChg chg="mod">
+          <ac:chgData name="耀泉 马" userId="19e30af8d5659de2" providerId="LiveId" clId="{C3594856-CEDA-5129-B2AF-7962E3CA4CA3}" dt="2026-05-01T20:36:33.518" v="392" actId="165"/>
+          <ac:spMkLst>
+            <pc:docMk/>
+            <pc:sldMk cId="2133037477" sldId="271"/>
+            <ac:spMk id="502" creationId="{7C1418D1-D99D-C247-FBB1-7F9354E035E1}"/>
+          </ac:spMkLst>
+        </pc:spChg>
+        <pc:spChg chg="mod">
+          <ac:chgData name="耀泉 马" userId="19e30af8d5659de2" providerId="LiveId" clId="{C3594856-CEDA-5129-B2AF-7962E3CA4CA3}" dt="2026-05-01T20:36:33.518" v="392" actId="165"/>
+          <ac:spMkLst>
+            <pc:docMk/>
+            <pc:sldMk cId="2133037477" sldId="271"/>
+            <ac:spMk id="503" creationId="{6BE3E2B5-358C-EC7E-3225-CA27A74B80FA}"/>
+          </ac:spMkLst>
+        </pc:spChg>
+        <pc:spChg chg="mod topLvl">
+          <ac:chgData name="耀泉 马" userId="19e30af8d5659de2" providerId="LiveId" clId="{C3594856-CEDA-5129-B2AF-7962E3CA4CA3}" dt="2026-05-01T20:36:24.298" v="391" actId="165"/>
+          <ac:spMkLst>
+            <pc:docMk/>
+            <pc:sldMk cId="2133037477" sldId="271"/>
+            <ac:spMk id="565" creationId="{5F06E0B9-783A-984A-F532-1DCDAA0710C5}"/>
+          </ac:spMkLst>
+        </pc:spChg>
+        <pc:grpChg chg="mod topLvl">
+          <ac:chgData name="耀泉 马" userId="19e30af8d5659de2" providerId="LiveId" clId="{C3594856-CEDA-5129-B2AF-7962E3CA4CA3}" dt="2026-05-01T20:36:33.518" v="392" actId="165"/>
+          <ac:grpSpMkLst>
+            <pc:docMk/>
+            <pc:sldMk cId="2133037477" sldId="271"/>
+            <ac:grpSpMk id="553" creationId="{594AF955-C2CB-B7CE-50FA-8370B1E24B96}"/>
+          </ac:grpSpMkLst>
+        </pc:grpChg>
+        <pc:grpChg chg="mod topLvl">
+          <ac:chgData name="耀泉 马" userId="19e30af8d5659de2" providerId="LiveId" clId="{C3594856-CEDA-5129-B2AF-7962E3CA4CA3}" dt="2026-05-01T20:36:33.518" v="392" actId="165"/>
+          <ac:grpSpMkLst>
+            <pc:docMk/>
+            <pc:sldMk cId="2133037477" sldId="271"/>
+            <ac:grpSpMk id="554" creationId="{D2087604-FE28-2FA5-AC91-9D1B5F496399}"/>
+          </ac:grpSpMkLst>
+        </pc:grpChg>
+        <pc:grpChg chg="del">
+          <ac:chgData name="耀泉 马" userId="19e30af8d5659de2" providerId="LiveId" clId="{C3594856-CEDA-5129-B2AF-7962E3CA4CA3}" dt="2026-05-01T20:36:33.518" v="392" actId="165"/>
+          <ac:grpSpMkLst>
+            <pc:docMk/>
+            <pc:sldMk cId="2133037477" sldId="271"/>
+            <ac:grpSpMk id="555" creationId="{7D9A83F2-55D2-C718-E229-B788BD6DB0BD}"/>
+          </ac:grpSpMkLst>
+        </pc:grpChg>
+        <pc:picChg chg="mod">
+          <ac:chgData name="耀泉 马" userId="19e30af8d5659de2" providerId="LiveId" clId="{C3594856-CEDA-5129-B2AF-7962E3CA4CA3}" dt="2026-05-01T20:36:33.518" v="392" actId="165"/>
+          <ac:picMkLst>
+            <pc:docMk/>
+            <pc:sldMk cId="2133037477" sldId="271"/>
+            <ac:picMk id="498" creationId="{004FA189-652D-4B6E-E4CF-70EA48FE712C}"/>
+          </ac:picMkLst>
+        </pc:picChg>
+        <pc:picChg chg="mod">
+          <ac:chgData name="耀泉 马" userId="19e30af8d5659de2" providerId="LiveId" clId="{C3594856-CEDA-5129-B2AF-7962E3CA4CA3}" dt="2026-05-01T20:36:33.518" v="392" actId="165"/>
+          <ac:picMkLst>
+            <pc:docMk/>
+            <pc:sldMk cId="2133037477" sldId="271"/>
+            <ac:picMk id="499" creationId="{AED2AA6F-8413-6F77-F0DA-9FF1B127549E}"/>
+          </ac:picMkLst>
+        </pc:picChg>
+      </pc:sldChg>
+      <pc:sldChg chg="modNotesTx">
+        <pc:chgData name="耀泉 马" userId="19e30af8d5659de2" providerId="LiveId" clId="{C3594856-CEDA-5129-B2AF-7962E3CA4CA3}" dt="2026-04-02T08:55:39.832" v="390" actId="20577"/>
+        <pc:sldMkLst>
+          <pc:docMk/>
+          <pc:sldMk cId="2818536614" sldId="274"/>
+        </pc:sldMkLst>
       </pc:sldChg>
     </pc:docChg>
   </pc:docChgLst>
@@ -259,7 +394,7 @@
           <a:p>
             <a:fld id="{26149304-4996-5048-AF8D-AE7FCF302DAE}" type="datetimeFigureOut">
               <a:rPr lang="en-US" smtClean="0"/>
-              <a:t>3/22/26</a:t>
+              <a:t>5/1/26</a:t>
             </a:fld>
             <a:endParaRPr lang="en-US"/>
           </a:p>
@@ -716,7 +851,7 @@
           <a:lstStyle/>
           <a:p>
             <a:r>
-              <a:rPr lang="en-GB" sz="1200" kern="1200" dirty="0">
+              <a:rPr lang="en-GB" sz="1200" b="1" kern="1200" dirty="0">
                 <a:solidFill>
                   <a:schemeClr val="tx1"/>
                 </a:solidFill>
@@ -728,7 +863,7 @@
               <a:t>In this section, we evaluate the computational cost using CPU</a:t>
             </a:r>
             <a:r>
-              <a:rPr lang="zh-CN" altLang="en-US" sz="1200" kern="1200" dirty="0">
+              <a:rPr lang="zh-CN" altLang="en-US" sz="1200" b="1" kern="1200" dirty="0">
                 <a:solidFill>
                   <a:schemeClr val="tx1"/>
                 </a:solidFill>
@@ -740,7 +875,7 @@
               <a:t> </a:t>
             </a:r>
             <a:r>
-              <a:rPr lang="en-US" altLang="zh-CN" sz="1200" kern="1200" dirty="0">
+              <a:rPr lang="en-US" altLang="zh-CN" sz="1200" b="1" kern="1200" dirty="0">
                 <a:solidFill>
                   <a:schemeClr val="tx1"/>
                 </a:solidFill>
@@ -752,7 +887,7 @@
               <a:t>and</a:t>
             </a:r>
             <a:r>
-              <a:rPr lang="zh-CN" altLang="en-US" sz="1200" kern="1200" dirty="0">
+              <a:rPr lang="zh-CN" altLang="en-US" sz="1200" b="1" kern="1200" dirty="0">
                 <a:solidFill>
                   <a:schemeClr val="tx1"/>
                 </a:solidFill>
@@ -764,7 +899,7 @@
               <a:t> </a:t>
             </a:r>
             <a:r>
-              <a:rPr lang="en-US" altLang="zh-CN" sz="1200" kern="1200" dirty="0">
+              <a:rPr lang="en-US" altLang="zh-CN" sz="1200" b="1" kern="1200" dirty="0">
                 <a:solidFill>
                   <a:schemeClr val="tx1"/>
                 </a:solidFill>
@@ -775,7 +910,7 @@
               </a:rPr>
               <a:t>memory.</a:t>
             </a:r>
-            <a:endParaRPr lang="en-GB" sz="1200" kern="1200" dirty="0">
+            <a:endParaRPr lang="en-GB" sz="1200" b="1" kern="1200" dirty="0">
               <a:solidFill>
                 <a:schemeClr val="tx1"/>
               </a:solidFill>
@@ -787,7 +922,7 @@
           </a:p>
           <a:p>
             <a:br>
-              <a:rPr lang="en-GB" sz="1200" kern="1200" dirty="0">
+              <a:rPr lang="en-GB" sz="1200" b="1" kern="1200" dirty="0">
                 <a:solidFill>
                   <a:schemeClr val="tx1"/>
                 </a:solidFill>
@@ -797,7 +932,7 @@
                 <a:cs typeface="+mn-cs"/>
               </a:rPr>
             </a:br>
-            <a:endParaRPr lang="en-GB" sz="1200" kern="1200" dirty="0">
+            <a:endParaRPr lang="en-GB" sz="1200" b="1" kern="1200" dirty="0">
               <a:solidFill>
                 <a:schemeClr val="tx1"/>
               </a:solidFill>
@@ -809,7 +944,7 @@
           </a:p>
           <a:p>
             <a:r>
-              <a:rPr lang="en-GB" sz="1200" kern="1200" dirty="0">
+              <a:rPr lang="en-GB" sz="1200" b="1" kern="1200" dirty="0">
                 <a:solidFill>
                   <a:schemeClr val="tx1"/>
                 </a:solidFill>
@@ -821,7 +956,7 @@
               <a:t>From the CPU usage, we can see that </a:t>
             </a:r>
             <a:r>
-              <a:rPr lang="en-GB" sz="1200" kern="1200" dirty="0" err="1">
+              <a:rPr lang="en-GB" sz="1200" b="1" kern="1200" dirty="0" err="1">
                 <a:solidFill>
                   <a:schemeClr val="tx1"/>
                 </a:solidFill>
@@ -833,7 +968,7 @@
               <a:t>ResNeXt</a:t>
             </a:r>
             <a:r>
-              <a:rPr lang="en-GB" sz="1200" kern="1200" dirty="0">
+              <a:rPr lang="en-GB" sz="1200" b="1" kern="1200" dirty="0">
                 <a:solidFill>
                   <a:schemeClr val="tx1"/>
                 </a:solidFill>
@@ -847,7 +982,7 @@
           </a:p>
           <a:p>
             <a:br>
-              <a:rPr lang="en-GB" sz="1200" kern="1200" dirty="0">
+              <a:rPr lang="en-GB" sz="1200" b="1" kern="1200" dirty="0">
                 <a:solidFill>
                   <a:schemeClr val="tx1"/>
                 </a:solidFill>
@@ -857,7 +992,7 @@
                 <a:cs typeface="+mn-cs"/>
               </a:rPr>
             </a:br>
-            <a:endParaRPr lang="en-GB" sz="1200" kern="1200" dirty="0">
+            <a:endParaRPr lang="en-GB" sz="1200" b="1" kern="1200" dirty="0">
               <a:solidFill>
                 <a:schemeClr val="tx1"/>
               </a:solidFill>
@@ -869,7 +1004,7 @@
           </a:p>
           <a:p>
             <a:r>
-              <a:rPr lang="en-GB" sz="1200" kern="1200" dirty="0">
+              <a:rPr lang="en-GB" sz="1200" b="1" kern="1200" dirty="0">
                 <a:solidFill>
                   <a:schemeClr val="tx1"/>
                 </a:solidFill>
@@ -878,12 +1013,48 @@
                 <a:ea typeface="+mn-ea"/>
                 <a:cs typeface="+mn-cs"/>
               </a:rPr>
-              <a:t>For memory usage, the results are not completely stable because Python memory management can introduce fluctuations. However, overall, the memory increase during inference is relatively small, generally below 10 MB.</a:t>
+              <a:t>For memory usage, the results are not completely stable because of Python memory management. </a:t>
+            </a:r>
+            <a:r>
+              <a:rPr lang="en-GB" sz="1200" b="0" kern="1200" dirty="0">
+                <a:solidFill>
+                  <a:schemeClr val="tx1"/>
+                </a:solidFill>
+                <a:effectLst/>
+                <a:latin typeface="+mn-lt"/>
+                <a:ea typeface="+mn-ea"/>
+                <a:cs typeface="+mn-cs"/>
+              </a:rPr>
+              <a:t>However, the overall increase during inference is small, usually below </a:t>
+            </a:r>
+            <a:r>
+              <a:rPr lang="en-US" altLang="zh-CN" sz="1200" b="0" kern="1200" dirty="0">
+                <a:solidFill>
+                  <a:schemeClr val="tx1"/>
+                </a:solidFill>
+                <a:effectLst/>
+                <a:latin typeface="+mn-lt"/>
+                <a:ea typeface="+mn-ea"/>
+                <a:cs typeface="+mn-cs"/>
+              </a:rPr>
+              <a:t>2</a:t>
+            </a:r>
+            <a:r>
+              <a:rPr lang="en-GB" sz="1200" b="0" kern="1200" dirty="0">
+                <a:solidFill>
+                  <a:schemeClr val="tx1"/>
+                </a:solidFill>
+                <a:effectLst/>
+                <a:latin typeface="+mn-lt"/>
+                <a:ea typeface="+mn-ea"/>
+                <a:cs typeface="+mn-cs"/>
+              </a:rPr>
+              <a:t>0 MB.</a:t>
             </a:r>
           </a:p>
           <a:p>
             <a:br>
-              <a:rPr lang="en-GB" sz="1200" kern="1200" dirty="0">
+              <a:rPr lang="en-GB" sz="1200" b="1" kern="1200" dirty="0">
                 <a:solidFill>
                   <a:schemeClr val="tx1"/>
                 </a:solidFill>
@@ -893,7 +1064,7 @@
                 <a:cs typeface="+mn-cs"/>
               </a:rPr>
             </a:br>
-            <a:endParaRPr lang="en-GB" sz="1200" kern="1200" dirty="0">
+            <a:endParaRPr lang="en-GB" sz="1200" b="1" kern="1200" dirty="0">
               <a:solidFill>
                 <a:schemeClr val="tx1"/>
               </a:solidFill>
@@ -905,7 +1076,7 @@
           </a:p>
           <a:p>
             <a:r>
-              <a:rPr lang="en-GB" sz="1200" kern="1200" dirty="0">
+              <a:rPr lang="en-GB" sz="1200" b="1" kern="1200" dirty="0">
                 <a:solidFill>
                   <a:schemeClr val="tx1"/>
                 </a:solidFill>
@@ -917,7 +1088,7 @@
               <a:t>When we consider both CPU time and memory usage together, </a:t>
             </a:r>
             <a:r>
-              <a:rPr lang="en-GB" sz="1200" kern="1200" dirty="0" err="1">
+              <a:rPr lang="en-GB" sz="1200" b="1" kern="1200" dirty="0" err="1">
                 <a:solidFill>
                   <a:schemeClr val="tx1"/>
                 </a:solidFill>
@@ -929,7 +1100,7 @@
               <a:t>ResNeXt</a:t>
             </a:r>
             <a:r>
-              <a:rPr lang="en-GB" sz="1200" kern="1200" dirty="0">
+              <a:rPr lang="en-GB" sz="1200" b="1" kern="1200" dirty="0">
                 <a:solidFill>
                   <a:schemeClr val="tx1"/>
                 </a:solidFill>
@@ -998,7 +1169,7 @@
                 <a:ea typeface="+mn-ea"/>
                 <a:cs typeface="+mn-cs"/>
               </a:rPr>
-              <a:t>, and DNN have much lower overhead and are more efficient for edge-based IDS.</a:t>
+              <a:t>, and DNN have much lower overhead and are more efficient.</a:t>
             </a:r>
           </a:p>
           <a:p>
@@ -1090,7 +1261,7 @@
           <a:lstStyle/>
           <a:p>
             <a:r>
-              <a:rPr lang="en-GB" sz="1200" kern="1200" dirty="0">
+              <a:rPr lang="en-GB" sz="1200" b="1" kern="1200" dirty="0">
                 <a:solidFill>
                   <a:schemeClr val="tx1"/>
                 </a:solidFill>
@@ -1104,7 +1275,7 @@
           </a:p>
           <a:p>
             <a:br>
-              <a:rPr lang="en-GB" sz="1200" kern="1200" dirty="0">
+              <a:rPr lang="en-GB" sz="1200" b="1" kern="1200" dirty="0">
                 <a:solidFill>
                   <a:schemeClr val="tx1"/>
                 </a:solidFill>
@@ -1114,7 +1285,7 @@
                 <a:cs typeface="+mn-cs"/>
               </a:rPr>
             </a:br>
-            <a:endParaRPr lang="en-GB" sz="1200" kern="1200" dirty="0">
+            <a:endParaRPr lang="en-GB" sz="1200" b="1" kern="1200" dirty="0">
               <a:solidFill>
                 <a:schemeClr val="tx1"/>
               </a:solidFill>
@@ -1126,7 +1297,7 @@
           </a:p>
           <a:p>
             <a:r>
-              <a:rPr lang="en-GB" sz="1200" kern="1200" dirty="0">
+              <a:rPr lang="en-GB" sz="1200" b="1" kern="1200" dirty="0">
                 <a:solidFill>
                   <a:schemeClr val="tx1"/>
                 </a:solidFill>
@@ -1138,7 +1309,7 @@
               <a:t>For </a:t>
             </a:r>
             <a:r>
-              <a:rPr lang="en-GB" sz="1200" kern="1200" dirty="0" err="1">
+              <a:rPr lang="en-GB" sz="1200" b="1" kern="1200" dirty="0" err="1">
                 <a:solidFill>
                   <a:schemeClr val="tx1"/>
                 </a:solidFill>
@@ -1150,7 +1321,7 @@
               <a:t>AutoEncoder</a:t>
             </a:r>
             <a:r>
-              <a:rPr lang="en-GB" sz="1200" kern="1200" dirty="0">
+              <a:rPr lang="en-GB" sz="1200" b="1" kern="1200" dirty="0">
                 <a:solidFill>
                   <a:schemeClr val="tx1"/>
                 </a:solidFill>
@@ -1159,10 +1330,10 @@
                 <a:ea typeface="+mn-ea"/>
                 <a:cs typeface="+mn-cs"/>
               </a:rPr>
-              <a:t>, DNN, and PCA, the total latency is relatively low, generally between 60 and 150 milliseconds. Among them, DNN and </a:t>
+              <a:t>, DNN, and PCA, the total latency is relatively low, generally between 60 and </a:t>
             </a:r>
             <a:r>
-              <a:rPr lang="en-GB" sz="1200" kern="1200" dirty="0" err="1">
+              <a:rPr lang="en-US" altLang="zh-CN" sz="1200" b="1" kern="1200" dirty="0">
                 <a:solidFill>
                   <a:schemeClr val="tx1"/>
                 </a:solidFill>
@@ -1171,10 +1342,10 @@
                 <a:ea typeface="+mn-ea"/>
                 <a:cs typeface="+mn-cs"/>
               </a:rPr>
-              <a:t>AutoEncoder</a:t>
+              <a:t>180</a:t>
             </a:r>
             <a:r>
-              <a:rPr lang="en-GB" sz="1200" kern="1200" dirty="0">
+              <a:rPr lang="en-GB" sz="1200" b="1" kern="1200" dirty="0">
                 <a:solidFill>
                   <a:schemeClr val="tx1"/>
                 </a:solidFill>
@@ -1183,22 +1354,11 @@
                 <a:ea typeface="+mn-ea"/>
                 <a:cs typeface="+mn-cs"/>
               </a:rPr>
-              <a:t> show stable performance across different feature dimensions.</a:t>
+              <a:t> nanoseconds. </a:t>
             </a:r>
           </a:p>
           <a:p>
-            <a:br>
-              <a:rPr lang="en-GB" sz="1200" kern="1200" dirty="0">
-                <a:solidFill>
-                  <a:schemeClr val="tx1"/>
-                </a:solidFill>
-                <a:effectLst/>
-                <a:latin typeface="+mn-lt"/>
-                <a:ea typeface="+mn-ea"/>
-                <a:cs typeface="+mn-cs"/>
-              </a:rPr>
-            </a:br>
-            <a:endParaRPr lang="en-GB" sz="1200" kern="1200" dirty="0">
+            <a:endParaRPr lang="en-GB" sz="1200" b="1" kern="1200" dirty="0">
               <a:solidFill>
                 <a:schemeClr val="tx1"/>
               </a:solidFill>
@@ -1210,7 +1370,7 @@
           </a:p>
           <a:p>
             <a:r>
-              <a:rPr lang="en-GB" sz="1200" kern="1200" dirty="0">
+              <a:rPr lang="en-GB" sz="1200" b="1" kern="1200" dirty="0">
                 <a:solidFill>
                   <a:schemeClr val="tx1"/>
                 </a:solidFill>
@@ -1222,7 +1382,7 @@
               <a:t>However, for </a:t>
             </a:r>
             <a:r>
-              <a:rPr lang="en-GB" sz="1200" kern="1200" dirty="0" err="1">
+              <a:rPr lang="en-GB" sz="1200" b="1" kern="1200" dirty="0" err="1">
                 <a:solidFill>
                   <a:schemeClr val="tx1"/>
                 </a:solidFill>
@@ -1234,7 +1394,7 @@
               <a:t>ResNeXt</a:t>
             </a:r>
             <a:r>
-              <a:rPr lang="en-GB" sz="1200" kern="1200" dirty="0">
+              <a:rPr lang="en-GB" sz="1200" b="1" kern="1200" dirty="0">
                 <a:solidFill>
                   <a:schemeClr val="tx1"/>
                 </a:solidFill>
@@ -1303,7 +1463,67 @@
                 <a:ea typeface="+mn-ea"/>
                 <a:cs typeface="+mn-cs"/>
               </a:rPr>
-              <a:t> can extract complex features, its computational cost is too high for real-time applications.</a:t>
+              <a:t> can extract complex features, its computational cost is too high for</a:t>
+            </a:r>
+            <a:r>
+              <a:rPr lang="zh-CN" altLang="en-US" sz="1200" kern="1200" dirty="0">
+                <a:solidFill>
+                  <a:schemeClr val="tx1"/>
+                </a:solidFill>
+                <a:effectLst/>
+                <a:latin typeface="+mn-lt"/>
+                <a:ea typeface="+mn-ea"/>
+                <a:cs typeface="+mn-cs"/>
+              </a:rPr>
+              <a:t> </a:t>
+            </a:r>
+            <a:r>
+              <a:rPr lang="en-US" altLang="zh-CN" sz="1200" kern="1200" dirty="0">
+                <a:solidFill>
+                  <a:schemeClr val="tx1"/>
+                </a:solidFill>
+                <a:effectLst/>
+                <a:latin typeface="+mn-lt"/>
+                <a:ea typeface="+mn-ea"/>
+                <a:cs typeface="+mn-cs"/>
+              </a:rPr>
+              <a:t>edge</a:t>
+            </a:r>
+            <a:r>
+              <a:rPr lang="zh-CN" altLang="en-US" sz="1200" kern="1200" dirty="0">
+                <a:solidFill>
+                  <a:schemeClr val="tx1"/>
+                </a:solidFill>
+                <a:effectLst/>
+                <a:latin typeface="+mn-lt"/>
+                <a:ea typeface="+mn-ea"/>
+                <a:cs typeface="+mn-cs"/>
+              </a:rPr>
+              <a:t> </a:t>
+            </a:r>
+            <a:r>
+              <a:rPr lang="en-US" altLang="zh-CN" sz="1200" kern="1200" dirty="0">
+                <a:solidFill>
+                  <a:schemeClr val="tx1"/>
+                </a:solidFill>
+                <a:effectLst/>
+                <a:latin typeface="+mn-lt"/>
+                <a:ea typeface="+mn-ea"/>
+                <a:cs typeface="+mn-cs"/>
+              </a:rPr>
+              <a:t>device</a:t>
+            </a:r>
+            <a:r>
+              <a:rPr lang="en-GB" sz="1200" kern="1200" dirty="0">
+                <a:solidFill>
+                  <a:schemeClr val="tx1"/>
+                </a:solidFill>
+                <a:effectLst/>
+                <a:latin typeface="+mn-lt"/>
+                <a:ea typeface="+mn-ea"/>
+                <a:cs typeface="+mn-cs"/>
+              </a:rPr>
+              <a:t>.</a:t>
             </a:r>
           </a:p>
           <a:p>
@@ -1327,47 +1547,6 @@
               <a:ea typeface="+mn-ea"/>
               <a:cs typeface="+mn-cs"/>
             </a:endParaRPr>
-          </a:p>
-          <a:p>
-            <a:r>
-              <a:rPr lang="en-GB" sz="1200" kern="1200" dirty="0">
-                <a:solidFill>
-                  <a:schemeClr val="tx1"/>
-                </a:solidFill>
-                <a:effectLst/>
-                <a:latin typeface="+mn-lt"/>
-                <a:ea typeface="+mn-ea"/>
-                <a:cs typeface="+mn-cs"/>
-              </a:rPr>
-              <a:t>In contrast, PCA, </a:t>
-            </a:r>
-            <a:r>
-              <a:rPr lang="en-GB" sz="1200" kern="1200" dirty="0" err="1">
-                <a:solidFill>
-                  <a:schemeClr val="tx1"/>
-                </a:solidFill>
-                <a:effectLst/>
-                <a:latin typeface="+mn-lt"/>
-                <a:ea typeface="+mn-ea"/>
-                <a:cs typeface="+mn-cs"/>
-              </a:rPr>
-              <a:t>AutoEncoder</a:t>
-            </a:r>
-            <a:r>
-              <a:rPr lang="en-GB" sz="1200" kern="1200" dirty="0">
-                <a:solidFill>
-                  <a:schemeClr val="tx1"/>
-                </a:solidFill>
-                <a:effectLst/>
-                <a:latin typeface="+mn-lt"/>
-                <a:ea typeface="+mn-ea"/>
-                <a:cs typeface="+mn-cs"/>
-              </a:rPr>
-              <a:t>, and DNN provide much lower latency and are more suitable for edge-based intrusion detection systems.</a:t>
-            </a:r>
-          </a:p>
-          <a:p>
-            <a:endParaRPr lang="en-US" dirty="0"/>
           </a:p>
         </p:txBody>
       </p:sp>
@@ -2311,8 +2490,29 @@
                 <a:ea typeface="+mn-ea"/>
                 <a:cs typeface="+mn-cs"/>
               </a:rPr>
-              <a:t>In our implementation, we conduct experiments on an ARM platform to simulate a realistic edge environment. So, we do not use GPU acceleration or MPS, and all computations are performed on CPU.</a:t>
+              <a:t>In our implementation, we conduct experiments on an ARM platform to simulate a realistic edge environment. So, we do not use GPU acceleration or MPS</a:t>
             </a:r>
+            <a:r>
+              <a:rPr lang="en-US" altLang="zh-CN" sz="1200" kern="1200" dirty="0">
+                <a:solidFill>
+                  <a:schemeClr val="tx1"/>
+                </a:solidFill>
+                <a:effectLst/>
+                <a:latin typeface="+mn-lt"/>
+                <a:ea typeface="+mn-ea"/>
+                <a:cs typeface="+mn-cs"/>
+              </a:rPr>
+              <a:t>.</a:t>
+            </a:r>
+            <a:endParaRPr lang="en-GB" sz="1200" kern="1200" dirty="0">
+              <a:solidFill>
+                <a:schemeClr val="tx1"/>
+              </a:solidFill>
+              <a:effectLst/>
+              <a:latin typeface="+mn-lt"/>
+              <a:ea typeface="+mn-ea"/>
+              <a:cs typeface="+mn-cs"/>
+            </a:endParaRPr>
           </a:p>
           <a:p>
             <a:r>
@@ -2330,9 +2530,9 @@
           </a:p>
           <a:p>
             <a:r>
-              <a:rPr lang="en-GB" sz="1200" kern="1200" dirty="0">
+              <a:rPr lang="en-GB" sz="1200" b="1" kern="1200" dirty="0">
                 <a:solidFill>
-                  <a:schemeClr val="tx1"/>
+                  <a:srgbClr val="FF0000"/>
                 </a:solidFill>
                 <a:effectLst/>
                 <a:latin typeface="+mn-lt"/>
@@ -2415,7 +2615,7 @@
                 <a:ea typeface="+mn-ea"/>
                 <a:cs typeface="+mn-cs"/>
               </a:rPr>
-              <a:t>, and transmit the processed features to the cloud.</a:t>
+              <a:t>, and transmit the features to the cloud.</a:t>
             </a:r>
           </a:p>
           <a:p>
@@ -2443,7 +2643,31 @@
                 <a:ea typeface="+mn-ea"/>
                 <a:cs typeface="+mn-cs"/>
               </a:rPr>
-              <a:t>On the cloud side, the received data is reshaped based on metadata and then split into training and testing datasets. The data is then fed into a classification model for training and evaluation.</a:t>
+              <a:t>On the cloud side, the received data is reshaped based on metadata and then split into training and testing datasets. The data is then fed into a ML</a:t>
+            </a:r>
+            <a:r>
+              <a:rPr lang="en-US" altLang="zh-CN" sz="1200" kern="1200" dirty="0">
+                <a:solidFill>
+                  <a:schemeClr val="tx1"/>
+                </a:solidFill>
+                <a:effectLst/>
+                <a:latin typeface="+mn-lt"/>
+                <a:ea typeface="+mn-ea"/>
+                <a:cs typeface="+mn-cs"/>
+              </a:rPr>
+              <a:t>/DL</a:t>
+            </a:r>
+            <a:r>
+              <a:rPr lang="en-GB" sz="1200" kern="1200" dirty="0">
+                <a:solidFill>
+                  <a:schemeClr val="tx1"/>
+                </a:solidFill>
+                <a:effectLst/>
+                <a:latin typeface="+mn-lt"/>
+                <a:ea typeface="+mn-ea"/>
+                <a:cs typeface="+mn-cs"/>
+              </a:rPr>
+              <a:t> model for training and classification.</a:t>
             </a:r>
           </a:p>
           <a:p>
@@ -2457,7 +2681,7 @@
                 <a:ea typeface="+mn-ea"/>
                 <a:cs typeface="+mn-cs"/>
               </a:rPr>
-              <a:t>  </a:t>
+              <a:t> </a:t>
             </a:r>
           </a:p>
           <a:p>
@@ -2607,7 +2831,7 @@
                 <a:ea typeface="+mn-ea"/>
                 <a:cs typeface="+mn-cs"/>
               </a:rPr>
-              <a:t> dataset, which is a recent dataset designed for edge-based IoT environments(publish in 2022). It contains realistic network traffic and includes labelled data for both normal and attack behaviours, making it suitable for evaluating intrusion detection systems. In addition, the data is provided at the flow level, which aligns well with our system design.</a:t>
+              <a:t> dataset, which is a recent dataset designed for edge-based IoT environments(publish in 2022). It contains realistic network traffic and includes labelled data for both normal and attack behaviours. In addition, the data is provided at the flow level, which aligns well with our system design.</a:t>
             </a:r>
           </a:p>
           <a:p>
@@ -2632,7 +2856,7 @@
                 <a:ea typeface="+mn-ea"/>
                 <a:cs typeface="+mn-cs"/>
               </a:rPr>
-              <a:t>For feature reduction, we investigate several approaches. First, we apply feature selection methods based on feature value ranges and their importance for prediction, in order to remove redundant or less informative features. Then, we use PCA and </a:t>
+              <a:t>For feature reduction, we investigate several approaches. First, we use PCA and an </a:t>
             </a:r>
             <a:r>
               <a:rPr lang="en-GB" sz="1200" kern="1200" dirty="0" err="1">
@@ -2656,10 +2880,68 @@
                 <a:ea typeface="+mn-ea"/>
                 <a:cs typeface="+mn-cs"/>
               </a:rPr>
-              <a:t> as a traditional dimensionality reduction technique to project the data into a lower-dimensional space. Finally, we explore deep learning-based methods, including ResNeXt1D, and DNN to learn more complex feature representations.</a:t>
+              <a:t> as traditional dimensionality reduction techniques to project the data into a lower-dimensional space. Second, we explore</a:t>
             </a:r>
-          </a:p>
-          <a:p>
+            <a:r>
+              <a:rPr lang="zh-CN" altLang="en-US" sz="1200" kern="1200" dirty="0">
+                <a:solidFill>
+                  <a:schemeClr val="tx1"/>
+                </a:solidFill>
+                <a:effectLst/>
+                <a:latin typeface="+mn-lt"/>
+                <a:ea typeface="+mn-ea"/>
+                <a:cs typeface="+mn-cs"/>
+              </a:rPr>
+              <a:t> </a:t>
+            </a:r>
+            <a:r>
+              <a:rPr lang="en-US" altLang="zh-CN" sz="1200" kern="1200" dirty="0">
+                <a:solidFill>
+                  <a:schemeClr val="tx1"/>
+                </a:solidFill>
+                <a:effectLst/>
+                <a:latin typeface="+mn-lt"/>
+                <a:ea typeface="+mn-ea"/>
+                <a:cs typeface="+mn-cs"/>
+              </a:rPr>
+              <a:t>other</a:t>
+            </a:r>
+            <a:r>
+              <a:rPr lang="zh-CN" altLang="en-US" sz="1200" kern="1200" dirty="0">
+                <a:solidFill>
+                  <a:schemeClr val="tx1"/>
+                </a:solidFill>
+                <a:effectLst/>
+                <a:latin typeface="+mn-lt"/>
+                <a:ea typeface="+mn-ea"/>
+                <a:cs typeface="+mn-cs"/>
+              </a:rPr>
+              <a:t> </a:t>
+            </a:r>
+            <a:r>
+              <a:rPr lang="en-GB" sz="1200" kern="1200" dirty="0">
+                <a:solidFill>
+                  <a:schemeClr val="tx1"/>
+                </a:solidFill>
+                <a:effectLst/>
+                <a:latin typeface="+mn-lt"/>
+                <a:ea typeface="+mn-ea"/>
+                <a:cs typeface="+mn-cs"/>
+              </a:rPr>
+              <a:t>deep learning-based methods, including ResNeXt1D, and DNN</a:t>
+            </a:r>
+            <a:r>
+              <a:rPr lang="en-US" altLang="zh-CN" sz="1200" kern="1200" dirty="0">
+                <a:solidFill>
+                  <a:schemeClr val="tx1"/>
+                </a:solidFill>
+                <a:effectLst/>
+                <a:latin typeface="+mn-lt"/>
+                <a:ea typeface="+mn-ea"/>
+                <a:cs typeface="+mn-cs"/>
+              </a:rPr>
+              <a:t>.</a:t>
+            </a:r>
             <a:r>
               <a:rPr lang="en-GB" sz="1200" kern="1200" dirty="0">
                 <a:solidFill>
@@ -2802,7 +3084,7 @@
           <a:lstStyle/>
           <a:p>
             <a:r>
-              <a:rPr lang="en-GB" sz="1200" kern="1200" dirty="0">
+              <a:rPr lang="en-GB" sz="1200" b="1" kern="1200" dirty="0">
                 <a:solidFill>
                   <a:schemeClr val="tx1"/>
                 </a:solidFill>
@@ -2815,7 +3097,7 @@
             </a:r>
           </a:p>
           <a:p>
-            <a:endParaRPr lang="en-GB" sz="1200" kern="1200" dirty="0">
+            <a:endParaRPr lang="en-GB" sz="1200" b="1" kern="1200" dirty="0">
               <a:solidFill>
                 <a:schemeClr val="tx1"/>
               </a:solidFill>
@@ -2827,7 +3109,7 @@
           </a:p>
           <a:p>
             <a:r>
-              <a:rPr lang="en-GB" sz="1200" kern="1200" dirty="0">
+              <a:rPr lang="en-GB" sz="1200" b="1" kern="1200" dirty="0">
                 <a:solidFill>
                   <a:schemeClr val="tx1"/>
                 </a:solidFill>
@@ -2839,7 +3121,7 @@
               <a:t>Since</a:t>
             </a:r>
             <a:r>
-              <a:rPr lang="zh-CN" altLang="en-US" sz="1200" kern="1200" dirty="0">
+              <a:rPr lang="zh-CN" altLang="en-US" sz="1200" b="1" kern="1200" dirty="0">
                 <a:solidFill>
                   <a:schemeClr val="tx1"/>
                 </a:solidFill>
@@ -2851,7 +3133,7 @@
               <a:t> </a:t>
             </a:r>
             <a:r>
-              <a:rPr lang="en-US" altLang="zh-CN" sz="1200" kern="1200" dirty="0" err="1">
+              <a:rPr lang="en-US" altLang="zh-CN" sz="1200" b="1" kern="1200" dirty="0" err="1">
                 <a:solidFill>
                   <a:schemeClr val="tx1"/>
                 </a:solidFill>
@@ -2863,7 +3145,7 @@
               <a:t>ResNeXt</a:t>
             </a:r>
             <a:r>
-              <a:rPr lang="en-US" altLang="zh-CN" sz="1200" kern="1200" dirty="0">
+              <a:rPr lang="en-US" altLang="zh-CN" sz="1200" b="1" kern="1200" dirty="0">
                 <a:solidFill>
                   <a:schemeClr val="tx1"/>
                 </a:solidFill>
@@ -2875,7 +3157,7 @@
               <a:t> is</a:t>
             </a:r>
             <a:r>
-              <a:rPr lang="zh-CN" altLang="en-US" sz="1200" kern="1200" dirty="0">
+              <a:rPr lang="zh-CN" altLang="en-US" sz="1200" b="1" kern="1200" dirty="0">
                 <a:solidFill>
                   <a:schemeClr val="tx1"/>
                 </a:solidFill>
@@ -2887,7 +3169,7 @@
               <a:t> </a:t>
             </a:r>
             <a:r>
-              <a:rPr lang="en-US" altLang="zh-CN" sz="1200" kern="1200" dirty="0">
+              <a:rPr lang="en-US" altLang="zh-CN" sz="1200" b="1" kern="1200" dirty="0">
                 <a:solidFill>
                   <a:schemeClr val="tx1"/>
                 </a:solidFill>
@@ -2899,7 +3181,7 @@
               <a:t>not suitable for Flow-level data, </a:t>
             </a:r>
             <a:br>
-              <a:rPr lang="en-GB" sz="1200" kern="1200" dirty="0">
+              <a:rPr lang="en-GB" sz="1200" b="1" kern="1200" dirty="0">
                 <a:solidFill>
                   <a:schemeClr val="tx1"/>
                 </a:solidFill>
@@ -2909,7 +3191,7 @@
                 <a:cs typeface="+mn-cs"/>
               </a:rPr>
             </a:br>
-            <a:endParaRPr lang="en-GB" sz="1200" kern="1200" dirty="0">
+            <a:endParaRPr lang="en-GB" sz="1200" b="1" kern="1200" dirty="0">
               <a:solidFill>
                 <a:schemeClr val="tx1"/>
               </a:solidFill>
@@ -2921,7 +3203,7 @@
           </a:p>
           <a:p>
             <a:r>
-              <a:rPr lang="en-GB" sz="1200" kern="1200" dirty="0">
+              <a:rPr lang="en-GB" sz="1200" b="1" kern="1200" dirty="0">
                 <a:solidFill>
                   <a:schemeClr val="tx1"/>
                 </a:solidFill>
@@ -2933,7 +3215,7 @@
               <a:t>For ResNeXt1D, we first reshape the input data from a tabular format into a 1D format. Then, the data is passed through a stem layer, which includes convolution, batch normalisation, </a:t>
             </a:r>
             <a:r>
-              <a:rPr lang="en-GB" sz="1200" kern="1200" dirty="0" err="1">
+              <a:rPr lang="en-GB" sz="1200" b="1" kern="1200" dirty="0" err="1">
                 <a:solidFill>
                   <a:schemeClr val="tx1"/>
                 </a:solidFill>
@@ -2945,7 +3227,7 @@
               <a:t>ReLU</a:t>
             </a:r>
             <a:r>
-              <a:rPr lang="en-GB" sz="1200" kern="1200" dirty="0">
+              <a:rPr lang="en-GB" sz="1200" b="1" kern="1200" dirty="0">
                 <a:solidFill>
                   <a:schemeClr val="tx1"/>
                 </a:solidFill>
@@ -2957,7 +3239,7 @@
               <a:t>, and max pooling. This step helps extract basic features</a:t>
             </a:r>
             <a:r>
-              <a:rPr lang="en-US" altLang="zh-CN" sz="1200" kern="1200" dirty="0">
+              <a:rPr lang="en-US" altLang="zh-CN" sz="1200" b="1" kern="1200" dirty="0">
                 <a:solidFill>
                   <a:schemeClr val="tx1"/>
                 </a:solidFill>
@@ -2971,7 +3253,7 @@
           </a:p>
           <a:p>
             <a:br>
-              <a:rPr lang="en-GB" sz="1200" kern="1200" dirty="0">
+              <a:rPr lang="en-GB" sz="1200" b="1" kern="1200" dirty="0">
                 <a:solidFill>
                   <a:schemeClr val="tx1"/>
                 </a:solidFill>
@@ -2981,7 +3263,7 @@
                 <a:cs typeface="+mn-cs"/>
               </a:rPr>
             </a:br>
-            <a:endParaRPr lang="en-GB" sz="1200" kern="1200" dirty="0">
+            <a:endParaRPr lang="en-GB" sz="1200" b="1" kern="1200" dirty="0">
               <a:solidFill>
                 <a:schemeClr val="tx1"/>
               </a:solidFill>
@@ -2993,7 +3275,7 @@
           </a:p>
           <a:p>
             <a:r>
-              <a:rPr lang="en-GB" sz="1200" kern="1200" dirty="0">
+              <a:rPr lang="en-GB" sz="1200" b="1" kern="1200" dirty="0">
                 <a:solidFill>
                   <a:schemeClr val="tx1"/>
                 </a:solidFill>
@@ -3005,7 +3287,7 @@
               <a:t>After that, the data goes through several </a:t>
             </a:r>
             <a:r>
-              <a:rPr lang="en-GB" sz="1200" kern="1200" dirty="0" err="1">
+              <a:rPr lang="en-GB" sz="1200" b="1" kern="1200" dirty="0" err="1">
                 <a:solidFill>
                   <a:schemeClr val="tx1"/>
                 </a:solidFill>
@@ -3017,7 +3299,7 @@
               <a:t>ResNeXt</a:t>
             </a:r>
             <a:r>
-              <a:rPr lang="en-GB" sz="1200" kern="1200" dirty="0">
+              <a:rPr lang="en-GB" sz="1200" b="1" kern="1200" dirty="0">
                 <a:solidFill>
                   <a:schemeClr val="tx1"/>
                 </a:solidFill>
@@ -3031,7 +3313,7 @@
           </a:p>
           <a:p>
             <a:br>
-              <a:rPr lang="en-GB" sz="1200" kern="1200" dirty="0">
+              <a:rPr lang="en-GB" sz="1200" b="1" kern="1200" dirty="0">
                 <a:solidFill>
                   <a:schemeClr val="tx1"/>
                 </a:solidFill>
@@ -3041,7 +3323,7 @@
                 <a:cs typeface="+mn-cs"/>
               </a:rPr>
             </a:br>
-            <a:endParaRPr lang="en-GB" sz="1200" kern="1200" dirty="0">
+            <a:endParaRPr lang="en-GB" sz="1200" b="1" kern="1200" dirty="0">
               <a:solidFill>
                 <a:schemeClr val="tx1"/>
               </a:solidFill>
@@ -3053,7 +3335,7 @@
           </a:p>
           <a:p>
             <a:r>
-              <a:rPr lang="en-GB" sz="1200" kern="1200" dirty="0">
+              <a:rPr lang="en-GB" sz="1200" b="1" kern="1200" dirty="0">
                 <a:solidFill>
                   <a:schemeClr val="tx1"/>
                 </a:solidFill>
@@ -3065,7 +3347,7 @@
               <a:t>For the DNN method, the input data is directly passed through fully connected layers with </a:t>
             </a:r>
             <a:r>
-              <a:rPr lang="en-GB" sz="1200" kern="1200" dirty="0" err="1">
+              <a:rPr lang="en-GB" sz="1200" b="1" kern="1200" dirty="0" err="1">
                 <a:solidFill>
                   <a:schemeClr val="tx1"/>
                 </a:solidFill>
@@ -3077,7 +3359,7 @@
               <a:t>ReLU</a:t>
             </a:r>
             <a:r>
-              <a:rPr lang="en-GB" sz="1200" kern="1200" dirty="0">
+              <a:rPr lang="en-GB" sz="1200" b="1" kern="1200" dirty="0">
                 <a:solidFill>
                   <a:schemeClr val="tx1"/>
                 </a:solidFill>
@@ -3086,7 +3368,43 @@
                 <a:ea typeface="+mn-ea"/>
                 <a:cs typeface="+mn-cs"/>
               </a:rPr>
-              <a:t> activation. The model gradually reduces the feature size and produces a compact embedding.</a:t>
+              <a:t> activation. The model gradually reduces the feature size and produces a </a:t>
+            </a:r>
+            <a:r>
+              <a:rPr lang="en-US" altLang="zh-CN" sz="1200" b="1" kern="1200" dirty="0">
+                <a:solidFill>
+                  <a:schemeClr val="tx1"/>
+                </a:solidFill>
+                <a:effectLst/>
+                <a:latin typeface="+mn-lt"/>
+                <a:ea typeface="+mn-ea"/>
+                <a:cs typeface="+mn-cs"/>
+              </a:rPr>
+              <a:t>fixed-size</a:t>
+            </a:r>
+            <a:r>
+              <a:rPr lang="zh-CN" altLang="en-US" sz="1200" b="1" kern="1200" dirty="0">
+                <a:solidFill>
+                  <a:schemeClr val="tx1"/>
+                </a:solidFill>
+                <a:effectLst/>
+                <a:latin typeface="+mn-lt"/>
+                <a:ea typeface="+mn-ea"/>
+                <a:cs typeface="+mn-cs"/>
+              </a:rPr>
+              <a:t> </a:t>
+            </a:r>
+            <a:r>
+              <a:rPr lang="en-GB" sz="1200" b="1" kern="1200" dirty="0">
+                <a:solidFill>
+                  <a:schemeClr val="tx1"/>
+                </a:solidFill>
+                <a:effectLst/>
+                <a:latin typeface="+mn-lt"/>
+                <a:ea typeface="+mn-ea"/>
+                <a:cs typeface="+mn-cs"/>
+              </a:rPr>
+              <a:t>embedding.</a:t>
             </a:r>
           </a:p>
           <a:p>
@@ -3217,7 +3535,7 @@
           <a:lstStyle/>
           <a:p>
             <a:r>
-              <a:rPr lang="en-GB" sz="1200" kern="1200" dirty="0">
+              <a:rPr lang="en-GB" sz="1200" b="1" kern="1200" dirty="0">
                 <a:solidFill>
                   <a:schemeClr val="tx1"/>
                 </a:solidFill>
@@ -3226,326 +3544,11 @@
                 <a:ea typeface="+mn-ea"/>
                 <a:cs typeface="+mn-cs"/>
               </a:rPr>
-              <a:t>In this section, we evaluate the detection performance using accuracy and F1 score across different feature dimensions.</a:t>
+              <a:t>In this section, we evaluate detection performance using accuracy and F1 score across different feature dimensions.</a:t>
             </a:r>
           </a:p>
           <a:p>
-            <a:pPr marL="0" marR="0" lvl="0" indent="0" algn="l" defTabSz="914400" rtl="0" eaLnBrk="1" fontAlgn="auto" latinLnBrk="0" hangingPunct="1">
-              <a:lnSpc>
-                <a:spcPct val="100000"/>
-              </a:lnSpc>
-              <a:spcBef>
-                <a:spcPts val="0"/>
-              </a:spcBef>
-              <a:spcAft>
-                <a:spcPts val="0"/>
-              </a:spcAft>
-              <a:buClrTx/>
-              <a:buSzTx/>
-              <a:buFontTx/>
-              <a:buNone/>
-              <a:tabLst/>
-              <a:defRPr/>
-            </a:pPr>
-            <a:br>
-              <a:rPr lang="en-GB" sz="1200" kern="1200" dirty="0">
-                <a:solidFill>
-                  <a:schemeClr val="tx1"/>
-                </a:solidFill>
-                <a:effectLst/>
-                <a:latin typeface="+mn-lt"/>
-                <a:ea typeface="+mn-ea"/>
-                <a:cs typeface="+mn-cs"/>
-              </a:rPr>
-            </a:br>
-            <a:r>
-              <a:rPr lang="en-GB" sz="1200" kern="1200" dirty="0">
-                <a:solidFill>
-                  <a:schemeClr val="tx1"/>
-                </a:solidFill>
-                <a:effectLst/>
-                <a:latin typeface="+mn-lt"/>
-                <a:ea typeface="+mn-ea"/>
-                <a:cs typeface="+mn-cs"/>
-              </a:rPr>
-              <a:t>After</a:t>
-            </a:r>
-            <a:r>
-              <a:rPr lang="zh-CN" altLang="en-US" sz="1200" kern="1200" dirty="0">
-                <a:solidFill>
-                  <a:schemeClr val="tx1"/>
-                </a:solidFill>
-                <a:effectLst/>
-                <a:latin typeface="+mn-lt"/>
-                <a:ea typeface="+mn-ea"/>
-                <a:cs typeface="+mn-cs"/>
-              </a:rPr>
-              <a:t> </a:t>
-            </a:r>
-            <a:r>
-              <a:rPr lang="en-GB" sz="1200" kern="1200" dirty="0">
-                <a:solidFill>
-                  <a:schemeClr val="tx1"/>
-                </a:solidFill>
-                <a:effectLst/>
-                <a:latin typeface="+mn-lt"/>
-                <a:ea typeface="+mn-ea"/>
-                <a:cs typeface="+mn-cs"/>
-              </a:rPr>
-              <a:t>Feature selection remains</a:t>
-            </a:r>
-            <a:r>
-              <a:rPr lang="zh-CN" altLang="en-US" sz="1200" kern="1200" dirty="0">
-                <a:solidFill>
-                  <a:schemeClr val="tx1"/>
-                </a:solidFill>
-                <a:effectLst/>
-                <a:latin typeface="+mn-lt"/>
-                <a:ea typeface="+mn-ea"/>
-                <a:cs typeface="+mn-cs"/>
-              </a:rPr>
-              <a:t> </a:t>
-            </a:r>
-            <a:r>
-              <a:rPr lang="en-US" altLang="zh-CN" sz="1200" kern="1200" dirty="0">
-                <a:solidFill>
-                  <a:schemeClr val="tx1"/>
-                </a:solidFill>
-                <a:effectLst/>
-                <a:latin typeface="+mn-lt"/>
-                <a:ea typeface="+mn-ea"/>
-                <a:cs typeface="+mn-cs"/>
-              </a:rPr>
-              <a:t>52</a:t>
-            </a:r>
-            <a:r>
-              <a:rPr lang="zh-CN" altLang="en-US" sz="1200" kern="1200" dirty="0">
-                <a:solidFill>
-                  <a:schemeClr val="tx1"/>
-                </a:solidFill>
-                <a:effectLst/>
-                <a:latin typeface="+mn-lt"/>
-                <a:ea typeface="+mn-ea"/>
-                <a:cs typeface="+mn-cs"/>
-              </a:rPr>
-              <a:t> </a:t>
-            </a:r>
-            <a:r>
-              <a:rPr lang="en-US" altLang="zh-CN" sz="1200" kern="1200" dirty="0">
-                <a:solidFill>
-                  <a:schemeClr val="tx1"/>
-                </a:solidFill>
-                <a:effectLst/>
-                <a:latin typeface="+mn-lt"/>
-                <a:ea typeface="+mn-ea"/>
-                <a:cs typeface="+mn-cs"/>
-              </a:rPr>
-              <a:t>features</a:t>
-            </a:r>
-            <a:r>
-              <a:rPr lang="zh-CN" altLang="en-US" sz="1200" kern="1200" dirty="0">
-                <a:solidFill>
-                  <a:schemeClr val="tx1"/>
-                </a:solidFill>
-                <a:effectLst/>
-                <a:latin typeface="+mn-lt"/>
-                <a:ea typeface="+mn-ea"/>
-                <a:cs typeface="+mn-cs"/>
-              </a:rPr>
-              <a:t> </a:t>
-            </a:r>
-            <a:r>
-              <a:rPr lang="en-US" altLang="zh-CN" sz="1200" kern="1200" dirty="0">
-                <a:solidFill>
-                  <a:schemeClr val="tx1"/>
-                </a:solidFill>
-                <a:effectLst/>
-                <a:latin typeface="+mn-lt"/>
-                <a:ea typeface="+mn-ea"/>
-                <a:cs typeface="+mn-cs"/>
-              </a:rPr>
-              <a:t>and</a:t>
-            </a:r>
-            <a:r>
-              <a:rPr lang="zh-CN" altLang="en-US" sz="1200" kern="1200" dirty="0">
-                <a:solidFill>
-                  <a:schemeClr val="tx1"/>
-                </a:solidFill>
-                <a:effectLst/>
-                <a:latin typeface="+mn-lt"/>
-                <a:ea typeface="+mn-ea"/>
-                <a:cs typeface="+mn-cs"/>
-              </a:rPr>
-              <a:t> </a:t>
-            </a:r>
-            <a:r>
-              <a:rPr lang="en-US" altLang="zh-CN" sz="1200" kern="1200" dirty="0">
-                <a:solidFill>
-                  <a:schemeClr val="tx1"/>
-                </a:solidFill>
-                <a:effectLst/>
-                <a:latin typeface="+mn-lt"/>
-                <a:ea typeface="+mn-ea"/>
-                <a:cs typeface="+mn-cs"/>
-              </a:rPr>
-              <a:t>achieves</a:t>
-            </a:r>
-            <a:r>
-              <a:rPr lang="zh-CN" altLang="en-US" sz="1200" kern="1200" dirty="0">
-                <a:solidFill>
-                  <a:schemeClr val="tx1"/>
-                </a:solidFill>
-                <a:effectLst/>
-                <a:latin typeface="+mn-lt"/>
-                <a:ea typeface="+mn-ea"/>
-                <a:cs typeface="+mn-cs"/>
-              </a:rPr>
-              <a:t> </a:t>
-            </a:r>
-            <a:r>
-              <a:rPr lang="en-US" altLang="zh-CN" sz="1200" kern="1200" dirty="0">
-                <a:solidFill>
-                  <a:schemeClr val="tx1"/>
-                </a:solidFill>
-                <a:effectLst/>
-                <a:latin typeface="+mn-lt"/>
-                <a:ea typeface="+mn-ea"/>
-                <a:cs typeface="+mn-cs"/>
-              </a:rPr>
-              <a:t>accuracy</a:t>
-            </a:r>
-            <a:r>
-              <a:rPr lang="zh-CN" altLang="en-US" sz="1200" kern="1200" dirty="0">
-                <a:solidFill>
-                  <a:schemeClr val="tx1"/>
-                </a:solidFill>
-                <a:effectLst/>
-                <a:latin typeface="+mn-lt"/>
-                <a:ea typeface="+mn-ea"/>
-                <a:cs typeface="+mn-cs"/>
-              </a:rPr>
-              <a:t> </a:t>
-            </a:r>
-            <a:r>
-              <a:rPr lang="en-US" altLang="zh-CN" sz="1200" kern="1200" dirty="0">
-                <a:solidFill>
-                  <a:schemeClr val="tx1"/>
-                </a:solidFill>
-                <a:effectLst/>
-                <a:latin typeface="+mn-lt"/>
-                <a:ea typeface="+mn-ea"/>
-                <a:cs typeface="+mn-cs"/>
-              </a:rPr>
-              <a:t>and</a:t>
-            </a:r>
-            <a:r>
-              <a:rPr lang="zh-CN" altLang="en-US" sz="1200" kern="1200" dirty="0">
-                <a:solidFill>
-                  <a:schemeClr val="tx1"/>
-                </a:solidFill>
-                <a:effectLst/>
-                <a:latin typeface="+mn-lt"/>
-                <a:ea typeface="+mn-ea"/>
-                <a:cs typeface="+mn-cs"/>
-              </a:rPr>
-              <a:t> </a:t>
-            </a:r>
-            <a:r>
-              <a:rPr lang="en-US" altLang="zh-CN" sz="1200" kern="1200" dirty="0">
-                <a:solidFill>
-                  <a:schemeClr val="tx1"/>
-                </a:solidFill>
-                <a:effectLst/>
-                <a:latin typeface="+mn-lt"/>
-                <a:ea typeface="+mn-ea"/>
-                <a:cs typeface="+mn-cs"/>
-              </a:rPr>
-              <a:t>F1</a:t>
-            </a:r>
-            <a:r>
-              <a:rPr lang="zh-CN" altLang="en-US" sz="1200" kern="1200" dirty="0">
-                <a:solidFill>
-                  <a:schemeClr val="tx1"/>
-                </a:solidFill>
-                <a:effectLst/>
-                <a:latin typeface="+mn-lt"/>
-                <a:ea typeface="+mn-ea"/>
-                <a:cs typeface="+mn-cs"/>
-              </a:rPr>
-              <a:t> </a:t>
-            </a:r>
-            <a:r>
-              <a:rPr lang="en-US" altLang="zh-CN" sz="1200" kern="1200" dirty="0">
-                <a:solidFill>
-                  <a:schemeClr val="tx1"/>
-                </a:solidFill>
-                <a:effectLst/>
-                <a:latin typeface="+mn-lt"/>
-                <a:ea typeface="+mn-ea"/>
-                <a:cs typeface="+mn-cs"/>
-              </a:rPr>
-              <a:t>score</a:t>
-            </a:r>
-            <a:r>
-              <a:rPr lang="zh-CN" altLang="en-US" sz="1200" kern="1200" dirty="0">
-                <a:solidFill>
-                  <a:schemeClr val="tx1"/>
-                </a:solidFill>
-                <a:effectLst/>
-                <a:latin typeface="+mn-lt"/>
-                <a:ea typeface="+mn-ea"/>
-                <a:cs typeface="+mn-cs"/>
-              </a:rPr>
-              <a:t> </a:t>
-            </a:r>
-            <a:r>
-              <a:rPr lang="en-US" altLang="zh-CN" sz="1200" kern="1200" dirty="0" err="1">
-                <a:solidFill>
-                  <a:schemeClr val="tx1"/>
-                </a:solidFill>
-                <a:effectLst/>
-                <a:latin typeface="+mn-lt"/>
-                <a:ea typeface="+mn-ea"/>
-                <a:cs typeface="+mn-cs"/>
-              </a:rPr>
-              <a:t>approximetly</a:t>
-            </a:r>
-            <a:r>
-              <a:rPr lang="zh-CN" altLang="en-US" sz="1200" kern="1200" dirty="0">
-                <a:solidFill>
-                  <a:schemeClr val="tx1"/>
-                </a:solidFill>
-                <a:effectLst/>
-                <a:latin typeface="+mn-lt"/>
-                <a:ea typeface="+mn-ea"/>
-                <a:cs typeface="+mn-cs"/>
-              </a:rPr>
-              <a:t> </a:t>
-            </a:r>
-            <a:r>
-              <a:rPr lang="en-US" altLang="zh-CN" sz="1200" kern="1200" dirty="0">
-                <a:solidFill>
-                  <a:schemeClr val="tx1"/>
-                </a:solidFill>
-                <a:effectLst/>
-                <a:latin typeface="+mn-lt"/>
-                <a:ea typeface="+mn-ea"/>
-                <a:cs typeface="+mn-cs"/>
-              </a:rPr>
-              <a:t>96%</a:t>
-            </a:r>
-            <a:endParaRPr lang="en-GB" sz="1200" kern="1200" dirty="0">
-              <a:solidFill>
-                <a:schemeClr val="tx1"/>
-              </a:solidFill>
-              <a:effectLst/>
-              <a:latin typeface="+mn-lt"/>
-              <a:ea typeface="+mn-ea"/>
-              <a:cs typeface="+mn-cs"/>
-            </a:endParaRPr>
-          </a:p>
-          <a:p>
-            <a:endParaRPr lang="en-GB" sz="1200" kern="1200" dirty="0">
+            <a:endParaRPr lang="en-GB" sz="1200" b="1" kern="1200" dirty="0">
               <a:solidFill>
                 <a:schemeClr val="tx1"/>
               </a:solidFill>
@@ -3557,7 +3560,7 @@
           </a:p>
           <a:p>
             <a:r>
-              <a:rPr lang="en-GB" sz="1200" kern="1200" dirty="0">
+              <a:rPr lang="en-GB" sz="1200" b="1" kern="1200" dirty="0">
                 <a:solidFill>
                   <a:schemeClr val="tx1"/>
                 </a:solidFill>
@@ -3566,10 +3569,12 @@
                 <a:ea typeface="+mn-ea"/>
                 <a:cs typeface="+mn-cs"/>
               </a:rPr>
-              <a:t>From the results, we can see that the DNN model consistently achieves the best performance, with accuracy and F1 score close to 99%.</a:t>
+              <a:t>After feature selection, we retain 52 features and achieve around 96% accuracy and F1 score.</a:t>
             </a:r>
+          </a:p>
+          <a:p>
             <a:br>
-              <a:rPr lang="en-GB" sz="1200" kern="1200" dirty="0">
+              <a:rPr lang="en-GB" sz="1200" b="1" kern="1200" dirty="0">
                 <a:solidFill>
                   <a:schemeClr val="tx1"/>
                 </a:solidFill>
@@ -3579,7 +3584,7 @@
                 <a:cs typeface="+mn-cs"/>
               </a:rPr>
             </a:br>
-            <a:endParaRPr lang="en-GB" sz="1200" kern="1200" dirty="0">
+            <a:endParaRPr lang="en-GB" sz="1200" b="1" kern="1200" dirty="0">
               <a:solidFill>
                 <a:schemeClr val="tx1"/>
               </a:solidFill>
@@ -3591,7 +3596,43 @@
           </a:p>
           <a:p>
             <a:r>
-              <a:rPr lang="en-GB" sz="1200" kern="1200" dirty="0" err="1">
+              <a:rPr lang="en-GB" sz="1200" b="1" kern="1200" dirty="0">
+                <a:solidFill>
+                  <a:schemeClr val="tx1"/>
+                </a:solidFill>
+                <a:effectLst/>
+                <a:latin typeface="+mn-lt"/>
+                <a:ea typeface="+mn-ea"/>
+                <a:cs typeface="+mn-cs"/>
+              </a:rPr>
+              <a:t>The DNN model consistently achieves the best performance, with results close to 99%.</a:t>
+            </a:r>
+          </a:p>
+          <a:p>
+            <a:br>
+              <a:rPr lang="en-GB" sz="1200" b="1" kern="1200" dirty="0">
+                <a:solidFill>
+                  <a:schemeClr val="tx1"/>
+                </a:solidFill>
+                <a:effectLst/>
+                <a:latin typeface="+mn-lt"/>
+                <a:ea typeface="+mn-ea"/>
+                <a:cs typeface="+mn-cs"/>
+              </a:rPr>
+            </a:br>
+            <a:endParaRPr lang="en-GB" sz="1200" b="1" kern="1200" dirty="0">
+              <a:solidFill>
+                <a:schemeClr val="tx1"/>
+              </a:solidFill>
+              <a:effectLst/>
+              <a:latin typeface="+mn-lt"/>
+              <a:ea typeface="+mn-ea"/>
+              <a:cs typeface="+mn-cs"/>
+            </a:endParaRPr>
+          </a:p>
+          <a:p>
+            <a:r>
+              <a:rPr lang="en-GB" sz="1200" b="1" kern="1200" dirty="0" err="1">
                 <a:solidFill>
                   <a:schemeClr val="tx1"/>
                 </a:solidFill>
@@ -3603,7 +3644,7 @@
               <a:t>ResNeXt</a:t>
             </a:r>
             <a:r>
-              <a:rPr lang="en-GB" sz="1200" kern="1200" dirty="0">
+              <a:rPr lang="en-GB" sz="1200" b="1" kern="1200" dirty="0">
                 <a:solidFill>
                   <a:schemeClr val="tx1"/>
                 </a:solidFill>
@@ -3612,7 +3653,67 @@
                 <a:ea typeface="+mn-ea"/>
                 <a:cs typeface="+mn-cs"/>
               </a:rPr>
-              <a:t> also performs well, but it does not show clear improvement compared to DNN, especially considering its higher computational cost.</a:t>
+              <a:t> performs well, but it does not show clear improvement compared to DNN, while having higher computational cost.</a:t>
+            </a:r>
+          </a:p>
+          <a:p>
+            <a:br>
+              <a:rPr lang="en-GB" sz="1200" b="1" kern="1200" dirty="0">
+                <a:solidFill>
+                  <a:schemeClr val="tx1"/>
+                </a:solidFill>
+                <a:effectLst/>
+                <a:latin typeface="+mn-lt"/>
+                <a:ea typeface="+mn-ea"/>
+                <a:cs typeface="+mn-cs"/>
+              </a:rPr>
+            </a:br>
+            <a:endParaRPr lang="en-GB" sz="1200" b="1" kern="1200" dirty="0">
+              <a:solidFill>
+                <a:schemeClr val="tx1"/>
+              </a:solidFill>
+              <a:effectLst/>
+              <a:latin typeface="+mn-lt"/>
+              <a:ea typeface="+mn-ea"/>
+              <a:cs typeface="+mn-cs"/>
+            </a:endParaRPr>
+          </a:p>
+          <a:p>
+            <a:r>
+              <a:rPr lang="en-GB" sz="1200" b="1" kern="1200" dirty="0">
+                <a:solidFill>
+                  <a:schemeClr val="tx1"/>
+                </a:solidFill>
+                <a:effectLst/>
+                <a:latin typeface="+mn-lt"/>
+                <a:ea typeface="+mn-ea"/>
+                <a:cs typeface="+mn-cs"/>
+              </a:rPr>
+              <a:t>For PCA and </a:t>
+            </a:r>
+            <a:r>
+              <a:rPr lang="en-GB" sz="1200" b="1" kern="1200" dirty="0" err="1">
+                <a:solidFill>
+                  <a:schemeClr val="tx1"/>
+                </a:solidFill>
+                <a:effectLst/>
+                <a:latin typeface="+mn-lt"/>
+                <a:ea typeface="+mn-ea"/>
+                <a:cs typeface="+mn-cs"/>
+              </a:rPr>
+              <a:t>AutoEncoder</a:t>
+            </a:r>
+            <a:r>
+              <a:rPr lang="en-GB" sz="1200" b="1" kern="1200" dirty="0">
+                <a:solidFill>
+                  <a:schemeClr val="tx1"/>
+                </a:solidFill>
+                <a:effectLst/>
+                <a:latin typeface="+mn-lt"/>
+                <a:ea typeface="+mn-ea"/>
+                <a:cs typeface="+mn-cs"/>
+              </a:rPr>
+              <a:t>, performance is lower at small dimensions and improves as dimension increases, indicating information loss.</a:t>
             </a:r>
           </a:p>
           <a:p>
@@ -3648,93 +3749,8 @@
                 <a:ea typeface="+mn-ea"/>
                 <a:cs typeface="+mn-cs"/>
               </a:rPr>
-              <a:t>For PCA and </a:t>
+              <a:t>Overall, DNN is more effective for low-dimensional flow-level data.</a:t>
             </a:r>
-            <a:r>
-              <a:rPr lang="en-GB" sz="1200" kern="1200" dirty="0" err="1">
-                <a:solidFill>
-                  <a:schemeClr val="tx1"/>
-                </a:solidFill>
-                <a:effectLst/>
-                <a:latin typeface="+mn-lt"/>
-                <a:ea typeface="+mn-ea"/>
-                <a:cs typeface="+mn-cs"/>
-              </a:rPr>
-              <a:t>AutoEncoder</a:t>
-            </a:r>
-            <a:r>
-              <a:rPr lang="en-GB" sz="1200" kern="1200" dirty="0">
-                <a:solidFill>
-                  <a:schemeClr val="tx1"/>
-                </a:solidFill>
-                <a:effectLst/>
-                <a:latin typeface="+mn-lt"/>
-                <a:ea typeface="+mn-ea"/>
-                <a:cs typeface="+mn-cs"/>
-              </a:rPr>
-              <a:t>, the performance is lower when the feature dimension is small, and gradually improves as the dimension increases. This means that some important information is lost during dimensionality reduction.</a:t>
-            </a:r>
-          </a:p>
-          <a:p>
-            <a:br>
-              <a:rPr lang="en-GB" sz="1200" kern="1200" dirty="0">
-                <a:solidFill>
-                  <a:schemeClr val="tx1"/>
-                </a:solidFill>
-                <a:effectLst/>
-                <a:latin typeface="+mn-lt"/>
-                <a:ea typeface="+mn-ea"/>
-                <a:cs typeface="+mn-cs"/>
-              </a:rPr>
-            </a:br>
-            <a:endParaRPr lang="en-GB" sz="1200" kern="1200" dirty="0">
-              <a:solidFill>
-                <a:schemeClr val="tx1"/>
-              </a:solidFill>
-              <a:effectLst/>
-              <a:latin typeface="+mn-lt"/>
-              <a:ea typeface="+mn-ea"/>
-              <a:cs typeface="+mn-cs"/>
-            </a:endParaRPr>
-          </a:p>
-          <a:p>
-            <a:br>
-              <a:rPr lang="en-GB" sz="1200" kern="1200" dirty="0">
-                <a:solidFill>
-                  <a:schemeClr val="tx1"/>
-                </a:solidFill>
-                <a:effectLst/>
-                <a:latin typeface="+mn-lt"/>
-                <a:ea typeface="+mn-ea"/>
-                <a:cs typeface="+mn-cs"/>
-              </a:rPr>
-            </a:br>
-            <a:endParaRPr lang="en-GB" sz="1200" kern="1200" dirty="0">
-              <a:solidFill>
-                <a:schemeClr val="tx1"/>
-              </a:solidFill>
-              <a:effectLst/>
-              <a:latin typeface="+mn-lt"/>
-              <a:ea typeface="+mn-ea"/>
-              <a:cs typeface="+mn-cs"/>
-            </a:endParaRPr>
-          </a:p>
-          <a:p>
-            <a:r>
-              <a:rPr lang="en-GB" sz="1200" kern="1200" dirty="0">
-                <a:solidFill>
-                  <a:schemeClr val="tx1"/>
-                </a:solidFill>
-                <a:effectLst/>
-                <a:latin typeface="+mn-lt"/>
-                <a:ea typeface="+mn-ea"/>
-                <a:cs typeface="+mn-cs"/>
-              </a:rPr>
-              <a:t>Overall, these results show that for low-dimensional flow-level data, a simple DNN model is sufficient and more effective than more complex models.</a:t>
-            </a:r>
-          </a:p>
-          <a:p>
-            <a:endParaRPr lang="en-US" dirty="0"/>
           </a:p>
         </p:txBody>
       </p:sp>
@@ -3953,7 +3969,7 @@
           <a:p>
             <a:fld id="{5BCAD085-E8A6-8845-BD4E-CB4CCA059FC4}" type="datetimeFigureOut">
               <a:rPr lang="en-US" smtClean="0"/>
-              <a:t>3/22/26</a:t>
+              <a:t>5/1/26</a:t>
             </a:fld>
             <a:endParaRPr lang="en-US"/>
           </a:p>
@@ -4121,7 +4137,7 @@
           <a:p>
             <a:fld id="{5BCAD085-E8A6-8845-BD4E-CB4CCA059FC4}" type="datetimeFigureOut">
               <a:rPr lang="en-US" smtClean="0"/>
-              <a:t>3/22/26</a:t>
+              <a:t>5/1/26</a:t>
             </a:fld>
             <a:endParaRPr lang="en-US"/>
           </a:p>
@@ -4299,7 +4315,7 @@
           <a:p>
             <a:fld id="{5BCAD085-E8A6-8845-BD4E-CB4CCA059FC4}" type="datetimeFigureOut">
               <a:rPr lang="en-US" smtClean="0"/>
-              <a:t>3/22/26</a:t>
+              <a:t>5/1/26</a:t>
             </a:fld>
             <a:endParaRPr lang="en-US"/>
           </a:p>
@@ -4539,7 +4555,7 @@
           <a:p>
             <a:fld id="{5BCAD085-E8A6-8845-BD4E-CB4CCA059FC4}" type="datetimeFigureOut">
               <a:rPr lang="en-US" smtClean="0"/>
-              <a:t>3/22/26</a:t>
+              <a:t>5/1/26</a:t>
             </a:fld>
             <a:endParaRPr lang="en-US"/>
           </a:p>
@@ -4707,7 +4723,7 @@
           <a:p>
             <a:fld id="{5BCAD085-E8A6-8845-BD4E-CB4CCA059FC4}" type="datetimeFigureOut">
               <a:rPr lang="en-US" smtClean="0"/>
-              <a:t>3/22/26</a:t>
+              <a:t>5/1/26</a:t>
             </a:fld>
             <a:endParaRPr lang="en-US"/>
           </a:p>
@@ -4952,7 +4968,7 @@
           <a:p>
             <a:fld id="{5BCAD085-E8A6-8845-BD4E-CB4CCA059FC4}" type="datetimeFigureOut">
               <a:rPr lang="en-US" smtClean="0"/>
-              <a:t>3/22/26</a:t>
+              <a:t>5/1/26</a:t>
             </a:fld>
             <a:endParaRPr lang="en-US"/>
           </a:p>
@@ -5237,7 +5253,7 @@
           <a:p>
             <a:fld id="{5BCAD085-E8A6-8845-BD4E-CB4CCA059FC4}" type="datetimeFigureOut">
               <a:rPr lang="en-US" smtClean="0"/>
-              <a:t>3/22/26</a:t>
+              <a:t>5/1/26</a:t>
             </a:fld>
             <a:endParaRPr lang="en-US"/>
           </a:p>
@@ -5656,7 +5672,7 @@
           <a:p>
             <a:fld id="{5BCAD085-E8A6-8845-BD4E-CB4CCA059FC4}" type="datetimeFigureOut">
               <a:rPr lang="en-US" smtClean="0"/>
-              <a:t>3/22/26</a:t>
+              <a:t>5/1/26</a:t>
             </a:fld>
             <a:endParaRPr lang="en-US"/>
           </a:p>
@@ -5773,7 +5789,7 @@
           <a:p>
             <a:fld id="{5BCAD085-E8A6-8845-BD4E-CB4CCA059FC4}" type="datetimeFigureOut">
               <a:rPr lang="en-US" smtClean="0"/>
-              <a:t>3/22/26</a:t>
+              <a:t>5/1/26</a:t>
             </a:fld>
             <a:endParaRPr lang="en-US"/>
           </a:p>
@@ -5868,7 +5884,7 @@
           <a:p>
             <a:fld id="{5BCAD085-E8A6-8845-BD4E-CB4CCA059FC4}" type="datetimeFigureOut">
               <a:rPr lang="en-US" smtClean="0"/>
-              <a:t>3/22/26</a:t>
+              <a:t>5/1/26</a:t>
             </a:fld>
             <a:endParaRPr lang="en-US"/>
           </a:p>
@@ -6143,7 +6159,7 @@
           <a:p>
             <a:fld id="{5BCAD085-E8A6-8845-BD4E-CB4CCA059FC4}" type="datetimeFigureOut">
               <a:rPr lang="en-US" smtClean="0"/>
-              <a:t>3/22/26</a:t>
+              <a:t>5/1/26</a:t>
             </a:fld>
             <a:endParaRPr lang="en-US"/>
           </a:p>
@@ -6311,7 +6327,7 @@
           <a:p>
             <a:fld id="{5BCAD085-E8A6-8845-BD4E-CB4CCA059FC4}" type="datetimeFigureOut">
               <a:rPr lang="en-US" smtClean="0"/>
-              <a:t>3/22/26</a:t>
+              <a:t>5/1/26</a:t>
             </a:fld>
             <a:endParaRPr lang="en-US"/>
           </a:p>
@@ -6563,7 +6579,7 @@
           <a:p>
             <a:fld id="{5BCAD085-E8A6-8845-BD4E-CB4CCA059FC4}" type="datetimeFigureOut">
               <a:rPr lang="en-US" smtClean="0"/>
-              <a:t>3/22/26</a:t>
+              <a:t>5/1/26</a:t>
             </a:fld>
             <a:endParaRPr lang="en-US"/>
           </a:p>
@@ -6731,7 +6747,7 @@
           <a:p>
             <a:fld id="{5BCAD085-E8A6-8845-BD4E-CB4CCA059FC4}" type="datetimeFigureOut">
               <a:rPr lang="en-US" smtClean="0"/>
-              <a:t>3/22/26</a:t>
+              <a:t>5/1/26</a:t>
             </a:fld>
             <a:endParaRPr lang="en-US"/>
           </a:p>
@@ -6909,7 +6925,7 @@
           <a:p>
             <a:fld id="{5BCAD085-E8A6-8845-BD4E-CB4CCA059FC4}" type="datetimeFigureOut">
               <a:rPr lang="en-US" smtClean="0"/>
-              <a:t>3/22/26</a:t>
+              <a:t>5/1/26</a:t>
             </a:fld>
             <a:endParaRPr lang="en-US"/>
           </a:p>
@@ -7010,7 +7026,7 @@
           <a:p>
             <a:fld id="{A50ECBEB-8597-4EA4-9D29-E1D7025CFAA0}" type="datetime1">
               <a:rPr lang="zh-CN" altLang="en-US" smtClean="0"/>
-              <a:t>2026/3/22</a:t>
+              <a:t>2026/5/1</a:t>
             </a:fld>
             <a:endParaRPr lang="zh-CN" altLang="en-US"/>
           </a:p>
@@ -7297,7 +7313,7 @@
           <a:p>
             <a:fld id="{5BCAD085-E8A6-8845-BD4E-CB4CCA059FC4}" type="datetimeFigureOut">
               <a:rPr lang="en-US" smtClean="0"/>
-              <a:t>3/22/26</a:t>
+              <a:t>5/1/26</a:t>
             </a:fld>
             <a:endParaRPr lang="en-US"/>
           </a:p>
@@ -7582,7 +7598,7 @@
           <a:p>
             <a:fld id="{5BCAD085-E8A6-8845-BD4E-CB4CCA059FC4}" type="datetimeFigureOut">
               <a:rPr lang="en-US" smtClean="0"/>
-              <a:t>3/22/26</a:t>
+              <a:t>5/1/26</a:t>
             </a:fld>
             <a:endParaRPr lang="en-US"/>
           </a:p>
@@ -8001,7 +8017,7 @@
           <a:p>
             <a:fld id="{5BCAD085-E8A6-8845-BD4E-CB4CCA059FC4}" type="datetimeFigureOut">
               <a:rPr lang="en-US" smtClean="0"/>
-              <a:t>3/22/26</a:t>
+              <a:t>5/1/26</a:t>
             </a:fld>
             <a:endParaRPr lang="en-US"/>
           </a:p>
@@ -8118,7 +8134,7 @@
           <a:p>
             <a:fld id="{5BCAD085-E8A6-8845-BD4E-CB4CCA059FC4}" type="datetimeFigureOut">
               <a:rPr lang="en-US" smtClean="0"/>
-              <a:t>3/22/26</a:t>
+              <a:t>5/1/26</a:t>
             </a:fld>
             <a:endParaRPr lang="en-US"/>
           </a:p>
@@ -8213,7 +8229,7 @@
           <a:p>
             <a:fld id="{5BCAD085-E8A6-8845-BD4E-CB4CCA059FC4}" type="datetimeFigureOut">
               <a:rPr lang="en-US" smtClean="0"/>
-              <a:t>3/22/26</a:t>
+              <a:t>5/1/26</a:t>
             </a:fld>
             <a:endParaRPr lang="en-US"/>
           </a:p>
@@ -8488,7 +8504,7 @@
           <a:p>
             <a:fld id="{5BCAD085-E8A6-8845-BD4E-CB4CCA059FC4}" type="datetimeFigureOut">
               <a:rPr lang="en-US" smtClean="0"/>
-              <a:t>3/22/26</a:t>
+              <a:t>5/1/26</a:t>
             </a:fld>
             <a:endParaRPr lang="en-US"/>
           </a:p>
@@ -8740,7 +8756,7 @@
           <a:p>
             <a:fld id="{5BCAD085-E8A6-8845-BD4E-CB4CCA059FC4}" type="datetimeFigureOut">
               <a:rPr lang="en-US" smtClean="0"/>
-              <a:t>3/22/26</a:t>
+              <a:t>5/1/26</a:t>
             </a:fld>
             <a:endParaRPr lang="en-US"/>
           </a:p>
@@ -8951,7 +8967,7 @@
           <a:p>
             <a:fld id="{5BCAD085-E8A6-8845-BD4E-CB4CCA059FC4}" type="datetimeFigureOut">
               <a:rPr lang="en-US" smtClean="0"/>
-              <a:t>3/22/26</a:t>
+              <a:t>5/1/26</a:t>
             </a:fld>
             <a:endParaRPr lang="en-US"/>
           </a:p>
@@ -9459,7 +9475,7 @@
           <a:p>
             <a:fld id="{5BCAD085-E8A6-8845-BD4E-CB4CCA059FC4}" type="datetimeFigureOut">
               <a:rPr lang="en-US" smtClean="0"/>
-              <a:t>3/22/26</a:t>
+              <a:t>5/1/26</a:t>
             </a:fld>
             <a:endParaRPr lang="en-US"/>
           </a:p>
@@ -11596,7 +11612,11 @@
             </a:r>
             <a:r>
               <a:rPr lang="en-US" sz="1400" dirty="0"/>
-              <a:t>, and DNN are more efficient for edge-based IDS.</a:t>
+              <a:t>, and DNN are more efficient</a:t>
+            </a:r>
+            <a:r>
+              <a:rPr lang="en-US" altLang="zh-CN" sz="1400" dirty="0"/>
+              <a:t>.</a:t>
             </a:r>
           </a:p>
           <a:p>
@@ -11657,7 +11677,19 @@
             </a:r>
             <a:r>
               <a:rPr lang="en-US" sz="1400" dirty="0"/>
-              <a:t>, to test whether our features work well with different models.</a:t>
+              <a:t>, to test whether our features</a:t>
+            </a:r>
+            <a:r>
+              <a:rPr lang="zh-CN" altLang="en-US" sz="1400" dirty="0"/>
+              <a:t> </a:t>
+            </a:r>
+            <a:r>
+              <a:rPr lang="en-US" altLang="zh-CN" sz="1400" dirty="0"/>
+              <a:t>embedding</a:t>
+            </a:r>
+            <a:r>
+              <a:rPr lang="en-US" sz="1400" dirty="0"/>
+              <a:t> work well with different models.</a:t>
             </a:r>
             <a:endParaRPr lang="en-US" altLang="zh-CN" sz="1400" dirty="0"/>
           </a:p>
@@ -11674,7 +11706,7 @@
             </a:pPr>
             <a:r>
               <a:rPr lang="en-US" sz="1400" dirty="0"/>
-              <a:t>Move beyond flow-level classification by incorporating temporal and multi-flow detection, to better reflect real-world DDoS detection scenarios.</a:t>
+              <a:t>Move beyond flow-level classification by incorporating multi-flow detection, to better reflect real-world DDoS detection scenarios.</a:t>
             </a:r>
             <a:endParaRPr lang="en-US" altLang="zh-CN" sz="1400" dirty="0"/>
           </a:p>
@@ -33095,6 +33127,41 @@
           <a:chExt cx="0" cy="0"/>
         </a:xfrm>
       </p:grpSpPr>
+      <p:sp>
+        <p:nvSpPr>
+          <p:cNvPr id="2" name="Title 1">
+            <a:extLst>
+              <a:ext uri="{FF2B5EF4-FFF2-40B4-BE49-F238E27FC236}">
+                <a16:creationId xmlns:a16="http://schemas.microsoft.com/office/drawing/2014/main" id="{793227C8-30AE-AE14-CC4F-B01D4565D7EB}"/>
+              </a:ext>
+            </a:extLst>
+          </p:cNvPr>
+          <p:cNvSpPr>
+            <a:spLocks noGrp="1"/>
+          </p:cNvSpPr>
+          <p:nvPr>
+            <p:ph type="title"/>
+          </p:nvPr>
+        </p:nvSpPr>
+        <p:spPr>
+          <a:xfrm>
+            <a:off x="141654" y="-23446"/>
+            <a:ext cx="8229600" cy="751255"/>
+          </a:xfrm>
+        </p:spPr>
+        <p:txBody>
+          <a:bodyPr>
+            <a:normAutofit/>
+          </a:bodyPr>
+          <a:lstStyle/>
+          <a:p>
+            <a:r>
+              <a:rPr sz="3600"/>
+              <a:t>Methodology: System Overview</a:t>
+            </a:r>
+          </a:p>
+        </p:txBody>
+      </p:sp>
       <p:pic>
         <p:nvPicPr>
           <p:cNvPr id="497" name="Picture 496">
@@ -41605,41 +41672,6 @@
           </p:txBody>
         </p:sp>
       </p:grpSp>
-      <p:sp>
-        <p:nvSpPr>
-          <p:cNvPr id="2" name="Title 1">
-            <a:extLst>
-              <a:ext uri="{FF2B5EF4-FFF2-40B4-BE49-F238E27FC236}">
-                <a16:creationId xmlns:a16="http://schemas.microsoft.com/office/drawing/2014/main" id="{793227C8-30AE-AE14-CC4F-B01D4565D7EB}"/>
-              </a:ext>
-            </a:extLst>
-          </p:cNvPr>
-          <p:cNvSpPr>
-            <a:spLocks noGrp="1"/>
-          </p:cNvSpPr>
-          <p:nvPr>
-            <p:ph type="title"/>
-          </p:nvPr>
-        </p:nvSpPr>
-        <p:spPr>
-          <a:xfrm>
-            <a:off x="141654" y="-23446"/>
-            <a:ext cx="8229600" cy="751255"/>
-          </a:xfrm>
-        </p:spPr>
-        <p:txBody>
-          <a:bodyPr>
-            <a:normAutofit/>
-          </a:bodyPr>
-          <a:lstStyle/>
-          <a:p>
-            <a:r>
-              <a:rPr sz="3600"/>
-              <a:t>Methodology: System Overview</a:t>
-            </a:r>
-          </a:p>
-        </p:txBody>
-      </p:sp>
       <p:sp>
         <p:nvSpPr>
           <p:cNvPr id="18" name="Rectangle 17">
@@ -42255,10 +42287,10 @@
       </p:pic>
       <p:grpSp>
         <p:nvGrpSpPr>
-          <p:cNvPr id="555" name="Group 554">
+          <p:cNvPr id="553" name="Group 552">
             <a:extLst>
               <a:ext uri="{FF2B5EF4-FFF2-40B4-BE49-F238E27FC236}">
-                <a16:creationId xmlns:a16="http://schemas.microsoft.com/office/drawing/2014/main" id="{7D9A83F2-55D2-C718-E229-B788BD6DB0BD}"/>
+                <a16:creationId xmlns:a16="http://schemas.microsoft.com/office/drawing/2014/main" id="{594AF955-C2CB-B7CE-50FA-8370B1E24B96}"/>
               </a:ext>
             </a:extLst>
           </p:cNvPr>
@@ -42268,194 +42300,173 @@
         <p:grpSpPr>
           <a:xfrm>
             <a:off x="2102091" y="820093"/>
-            <a:ext cx="1941093" cy="911883"/>
+            <a:ext cx="1738873" cy="663333"/>
             <a:chOff x="2094534" y="1830266"/>
-            <a:chExt cx="1941093" cy="911883"/>
+            <a:chExt cx="1738873" cy="663333"/>
           </a:xfrm>
         </p:grpSpPr>
-        <p:grpSp>
-          <p:nvGrpSpPr>
-            <p:cNvPr id="553" name="Group 552">
+        <p:pic>
+          <p:nvPicPr>
+            <p:cNvPr id="498" name="Picture 497">
               <a:extLst>
                 <a:ext uri="{FF2B5EF4-FFF2-40B4-BE49-F238E27FC236}">
-                  <a16:creationId xmlns:a16="http://schemas.microsoft.com/office/drawing/2014/main" id="{594AF955-C2CB-B7CE-50FA-8370B1E24B96}"/>
+                  <a16:creationId xmlns:a16="http://schemas.microsoft.com/office/drawing/2014/main" id="{004FA189-652D-4B6E-E4CF-70EA48FE712C}"/>
                 </a:ext>
               </a:extLst>
             </p:cNvPr>
-            <p:cNvGrpSpPr/>
+            <p:cNvPicPr>
+              <a:picLocks noChangeAspect="1"/>
+            </p:cNvPicPr>
             <p:nvPr/>
-          </p:nvGrpSpPr>
-          <p:grpSpPr>
+          </p:nvPicPr>
+          <p:blipFill>
+            <a:blip r:embed="rId12"/>
+            <a:stretch>
+              <a:fillRect/>
+            </a:stretch>
+          </p:blipFill>
+          <p:spPr>
             <a:xfrm>
-              <a:off x="2094534" y="1830266"/>
-              <a:ext cx="1738873" cy="663333"/>
-              <a:chOff x="2094534" y="1830266"/>
-              <a:chExt cx="1738873" cy="663333"/>
+              <a:off x="3229666" y="1880280"/>
+              <a:ext cx="603741" cy="603741"/>
             </a:xfrm>
-          </p:grpSpPr>
-          <p:pic>
-            <p:nvPicPr>
-              <p:cNvPr id="498" name="Picture 497">
-                <a:extLst>
-                  <a:ext uri="{FF2B5EF4-FFF2-40B4-BE49-F238E27FC236}">
-                    <a16:creationId xmlns:a16="http://schemas.microsoft.com/office/drawing/2014/main" id="{004FA189-652D-4B6E-E4CF-70EA48FE712C}"/>
-                  </a:ext>
-                </a:extLst>
-              </p:cNvPr>
-              <p:cNvPicPr>
-                <a:picLocks noChangeAspect="1"/>
-              </p:cNvPicPr>
-              <p:nvPr/>
-            </p:nvPicPr>
-            <p:blipFill>
-              <a:blip r:embed="rId12"/>
-              <a:stretch>
-                <a:fillRect/>
-              </a:stretch>
-            </p:blipFill>
-            <p:spPr>
-              <a:xfrm>
-                <a:off x="3229666" y="1880280"/>
-                <a:ext cx="603741" cy="603741"/>
-              </a:xfrm>
-              <a:prstGeom prst="rect">
-                <a:avLst/>
-              </a:prstGeom>
-            </p:spPr>
-          </p:pic>
-          <p:pic>
-            <p:nvPicPr>
-              <p:cNvPr id="499" name="Picture 498">
-                <a:extLst>
-                  <a:ext uri="{FF2B5EF4-FFF2-40B4-BE49-F238E27FC236}">
-                    <a16:creationId xmlns:a16="http://schemas.microsoft.com/office/drawing/2014/main" id="{AED2AA6F-8413-6F77-F0DA-9FF1B127549E}"/>
-                  </a:ext>
-                </a:extLst>
-              </p:cNvPr>
-              <p:cNvPicPr>
-                <a:picLocks noChangeAspect="1"/>
-              </p:cNvPicPr>
-              <p:nvPr/>
-            </p:nvPicPr>
-            <p:blipFill>
-              <a:blip r:embed="rId13"/>
-              <a:stretch>
-                <a:fillRect/>
-              </a:stretch>
-            </p:blipFill>
-            <p:spPr>
-              <a:xfrm>
-                <a:off x="2094534" y="1830266"/>
-                <a:ext cx="843077" cy="663333"/>
-              </a:xfrm>
-              <a:prstGeom prst="rect">
-                <a:avLst/>
-              </a:prstGeom>
-            </p:spPr>
-          </p:pic>
-        </p:grpSp>
-        <p:grpSp>
-          <p:nvGrpSpPr>
-            <p:cNvPr id="554" name="Group 553">
+            <a:prstGeom prst="rect">
+              <a:avLst/>
+            </a:prstGeom>
+          </p:spPr>
+        </p:pic>
+        <p:pic>
+          <p:nvPicPr>
+            <p:cNvPr id="499" name="Picture 498">
               <a:extLst>
                 <a:ext uri="{FF2B5EF4-FFF2-40B4-BE49-F238E27FC236}">
-                  <a16:creationId xmlns:a16="http://schemas.microsoft.com/office/drawing/2014/main" id="{D2087604-FE28-2FA5-AC91-9D1B5F496399}"/>
+                  <a16:creationId xmlns:a16="http://schemas.microsoft.com/office/drawing/2014/main" id="{AED2AA6F-8413-6F77-F0DA-9FF1B127549E}"/>
                 </a:ext>
               </a:extLst>
             </p:cNvPr>
-            <p:cNvGrpSpPr/>
+            <p:cNvPicPr>
+              <a:picLocks noChangeAspect="1"/>
+            </p:cNvPicPr>
             <p:nvPr/>
-          </p:nvGrpSpPr>
-          <p:grpSpPr>
+          </p:nvPicPr>
+          <p:blipFill>
+            <a:blip r:embed="rId13"/>
+            <a:stretch>
+              <a:fillRect/>
+            </a:stretch>
+          </p:blipFill>
+          <p:spPr>
             <a:xfrm>
-              <a:off x="2203235" y="2458854"/>
-              <a:ext cx="1832392" cy="283295"/>
-              <a:chOff x="2203235" y="2458854"/>
-              <a:chExt cx="1832392" cy="283295"/>
+              <a:off x="2094534" y="1830266"/>
+              <a:ext cx="843077" cy="663333"/>
             </a:xfrm>
-          </p:grpSpPr>
-          <p:sp>
-            <p:nvSpPr>
-              <p:cNvPr id="502" name="TextBox 501">
-                <a:extLst>
-                  <a:ext uri="{FF2B5EF4-FFF2-40B4-BE49-F238E27FC236}">
-                    <a16:creationId xmlns:a16="http://schemas.microsoft.com/office/drawing/2014/main" id="{7C1418D1-D99D-C247-FBB1-7F9354E035E1}"/>
-                  </a:ext>
-                </a:extLst>
-              </p:cNvPr>
-              <p:cNvSpPr txBox="1"/>
-              <p:nvPr/>
-            </p:nvSpPr>
-            <p:spPr>
-              <a:xfrm>
-                <a:off x="2203235" y="2465150"/>
-                <a:ext cx="689086" cy="276999"/>
-              </a:xfrm>
-              <a:prstGeom prst="rect">
-                <a:avLst/>
-              </a:prstGeom>
-              <a:noFill/>
-            </p:spPr>
-            <p:txBody>
-              <a:bodyPr wrap="square" rtlCol="0">
-                <a:spAutoFit/>
-              </a:bodyPr>
-              <a:lstStyle/>
-              <a:p>
-                <a:pPr algn="ctr"/>
-                <a:r>
-                  <a:rPr lang="en-US" sz="1200"/>
-                  <a:t>Firewall</a:t>
-                </a:r>
-              </a:p>
-            </p:txBody>
-          </p:sp>
-          <p:sp>
-            <p:nvSpPr>
-              <p:cNvPr id="503" name="TextBox 502">
-                <a:extLst>
-                  <a:ext uri="{FF2B5EF4-FFF2-40B4-BE49-F238E27FC236}">
-                    <a16:creationId xmlns:a16="http://schemas.microsoft.com/office/drawing/2014/main" id="{6BE3E2B5-358C-EC7E-3225-CA27A74B80FA}"/>
-                  </a:ext>
-                </a:extLst>
-              </p:cNvPr>
-              <p:cNvSpPr txBox="1"/>
-              <p:nvPr/>
-            </p:nvSpPr>
-            <p:spPr>
-              <a:xfrm>
-                <a:off x="3027444" y="2458854"/>
-                <a:ext cx="1008183" cy="276999"/>
-              </a:xfrm>
-              <a:prstGeom prst="rect">
-                <a:avLst/>
-              </a:prstGeom>
-              <a:noFill/>
-            </p:spPr>
-            <p:txBody>
-              <a:bodyPr wrap="square" rtlCol="0">
-                <a:spAutoFit/>
-              </a:bodyPr>
-              <a:lstStyle/>
-              <a:p>
-                <a:pPr algn="ctr"/>
-                <a:r>
-                  <a:rPr lang="en-US" sz="1200"/>
-                  <a:t>Load</a:t>
-                </a:r>
-                <a:r>
-                  <a:rPr lang="zh-CN" altLang="en-US" sz="1200"/>
-                  <a:t> </a:t>
-                </a:r>
-                <a:r>
-                  <a:rPr lang="en-US" altLang="zh-CN" sz="1200"/>
-                  <a:t>Balance</a:t>
-                </a:r>
-                <a:endParaRPr lang="en-US" sz="1200"/>
-              </a:p>
-            </p:txBody>
-          </p:sp>
-        </p:grpSp>
+            <a:prstGeom prst="rect">
+              <a:avLst/>
+            </a:prstGeom>
+          </p:spPr>
+        </p:pic>
+      </p:grpSp>
+      <p:grpSp>
+        <p:nvGrpSpPr>
+          <p:cNvPr id="554" name="Group 553">
+            <a:extLst>
+              <a:ext uri="{FF2B5EF4-FFF2-40B4-BE49-F238E27FC236}">
+                <a16:creationId xmlns:a16="http://schemas.microsoft.com/office/drawing/2014/main" id="{D2087604-FE28-2FA5-AC91-9D1B5F496399}"/>
+              </a:ext>
+            </a:extLst>
+          </p:cNvPr>
+          <p:cNvGrpSpPr/>
+          <p:nvPr/>
+        </p:nvGrpSpPr>
+        <p:grpSpPr>
+          <a:xfrm>
+            <a:off x="2210792" y="1448681"/>
+            <a:ext cx="1832392" cy="283295"/>
+            <a:chOff x="2203235" y="2458854"/>
+            <a:chExt cx="1832392" cy="283295"/>
+          </a:xfrm>
+        </p:grpSpPr>
+        <p:sp>
+          <p:nvSpPr>
+            <p:cNvPr id="502" name="TextBox 501">
+              <a:extLst>
+                <a:ext uri="{FF2B5EF4-FFF2-40B4-BE49-F238E27FC236}">
+                  <a16:creationId xmlns:a16="http://schemas.microsoft.com/office/drawing/2014/main" id="{7C1418D1-D99D-C247-FBB1-7F9354E035E1}"/>
+                </a:ext>
+              </a:extLst>
+            </p:cNvPr>
+            <p:cNvSpPr txBox="1"/>
+            <p:nvPr/>
+          </p:nvSpPr>
+          <p:spPr>
+            <a:xfrm>
+              <a:off x="2203235" y="2465150"/>
+              <a:ext cx="689086" cy="276999"/>
+            </a:xfrm>
+            <a:prstGeom prst="rect">
+              <a:avLst/>
+            </a:prstGeom>
+            <a:noFill/>
+          </p:spPr>
+          <p:txBody>
+            <a:bodyPr wrap="square" rtlCol="0">
+              <a:spAutoFit/>
+            </a:bodyPr>
+            <a:lstStyle/>
+            <a:p>
+              <a:pPr algn="ctr"/>
+              <a:r>
+                <a:rPr lang="en-US" sz="1200"/>
+                <a:t>Firewall</a:t>
+              </a:r>
+            </a:p>
+          </p:txBody>
+        </p:sp>
+        <p:sp>
+          <p:nvSpPr>
+            <p:cNvPr id="503" name="TextBox 502">
+              <a:extLst>
+                <a:ext uri="{FF2B5EF4-FFF2-40B4-BE49-F238E27FC236}">
+                  <a16:creationId xmlns:a16="http://schemas.microsoft.com/office/drawing/2014/main" id="{6BE3E2B5-358C-EC7E-3225-CA27A74B80FA}"/>
+                </a:ext>
+              </a:extLst>
+            </p:cNvPr>
+            <p:cNvSpPr txBox="1"/>
+            <p:nvPr/>
+          </p:nvSpPr>
+          <p:spPr>
+            <a:xfrm>
+              <a:off x="3027444" y="2458854"/>
+              <a:ext cx="1008183" cy="276999"/>
+            </a:xfrm>
+            <a:prstGeom prst="rect">
+              <a:avLst/>
+            </a:prstGeom>
+            <a:noFill/>
+          </p:spPr>
+          <p:txBody>
+            <a:bodyPr wrap="square" rtlCol="0">
+              <a:spAutoFit/>
+            </a:bodyPr>
+            <a:lstStyle/>
+            <a:p>
+              <a:pPr algn="ctr"/>
+              <a:r>
+                <a:rPr lang="en-US" sz="1200"/>
+                <a:t>Load</a:t>
+              </a:r>
+              <a:r>
+                <a:rPr lang="zh-CN" altLang="en-US" sz="1200"/>
+                <a:t> </a:t>
+              </a:r>
+              <a:r>
+                <a:rPr lang="en-US" altLang="zh-CN" sz="1200"/>
+                <a:t>Balance</a:t>
+              </a:r>
+              <a:endParaRPr lang="en-US" sz="1200"/>
+            </a:p>
+          </p:txBody>
+        </p:sp>
       </p:grpSp>
       <p:pic>
         <p:nvPicPr>
@@ -43622,212 +43633,6 @@
       </p:grpSpPr>
       <p:sp>
         <p:nvSpPr>
-          <p:cNvPr id="9" name="Rectangle 8">
-            <a:extLst>
-              <a:ext uri="{FF2B5EF4-FFF2-40B4-BE49-F238E27FC236}">
-                <a16:creationId xmlns:a16="http://schemas.microsoft.com/office/drawing/2014/main" id="{16727677-89B0-8CFD-39B7-288A3FDBB57D}"/>
-              </a:ext>
-            </a:extLst>
-          </p:cNvPr>
-          <p:cNvSpPr/>
-          <p:nvPr/>
-        </p:nvSpPr>
-        <p:spPr>
-          <a:xfrm>
-            <a:off x="4997038" y="1131158"/>
-            <a:ext cx="2272894" cy="5598875"/>
-          </a:xfrm>
-          <a:prstGeom prst="rect">
-            <a:avLst/>
-          </a:prstGeom>
-          <a:solidFill>
-            <a:schemeClr val="accent3">
-              <a:lumMod val="60000"/>
-              <a:lumOff val="40000"/>
-              <a:alpha val="50000"/>
-            </a:schemeClr>
-          </a:solidFill>
-          <a:ln w="12700" cap="flat">
-            <a:solidFill>
-              <a:schemeClr val="accent1">
-                <a:shade val="95000"/>
-                <a:satMod val="105000"/>
-              </a:schemeClr>
-            </a:solidFill>
-            <a:prstDash val="dash"/>
-            <a:round/>
-            <a:extLst>
-              <a:ext uri="{C807C97D-BFC1-408E-A445-0C87EB9F89A2}">
-                <ask:lineSketchStyleProps xmlns:ask="http://schemas.microsoft.com/office/drawing/2018/sketchyshapes" sd="1219033472">
-                  <a:custGeom>
-                    <a:avLst/>
-                    <a:gdLst>
-                      <a:gd name="csX0" fmla="*/ 0 w 2272894"/>
-                      <a:gd name="csY0" fmla="*/ 0 h 5459907"/>
-                      <a:gd name="csX1" fmla="*/ 2272894 w 2272894"/>
-                      <a:gd name="csY1" fmla="*/ 0 h 5459907"/>
-                      <a:gd name="csX2" fmla="*/ 2272894 w 2272894"/>
-                      <a:gd name="csY2" fmla="*/ 5459907 h 5459907"/>
-                      <a:gd name="csX3" fmla="*/ 0 w 2272894"/>
-                      <a:gd name="csY3" fmla="*/ 5459907 h 5459907"/>
-                      <a:gd name="csX4" fmla="*/ 0 w 2272894"/>
-                      <a:gd name="csY4" fmla="*/ 0 h 5459907"/>
-                    </a:gdLst>
-                    <a:ahLst/>
-                    <a:cxnLst>
-                      <a:cxn ang="0">
-                        <a:pos x="csX0" y="csY0"/>
-                      </a:cxn>
-                      <a:cxn ang="0">
-                        <a:pos x="csX1" y="csY1"/>
-                      </a:cxn>
-                      <a:cxn ang="0">
-                        <a:pos x="csX2" y="csY2"/>
-                      </a:cxn>
-                      <a:cxn ang="0">
-                        <a:pos x="csX3" y="csY3"/>
-                      </a:cxn>
-                      <a:cxn ang="0">
-                        <a:pos x="csX4" y="csY4"/>
-                      </a:cxn>
-                    </a:cxnLst>
-                    <a:rect l="l" t="t" r="r" b="b"/>
-                    <a:pathLst>
-                      <a:path w="2272894" h="5459907" fill="none" extrusionOk="0">
-                        <a:moveTo>
-                          <a:pt x="0" y="0"/>
-                        </a:moveTo>
-                        <a:cubicBezTo>
-                          <a:pt x="246963" y="-49533"/>
-                          <a:pt x="1730072" y="-14809"/>
-                          <a:pt x="2272894" y="0"/>
-                        </a:cubicBezTo>
-                        <a:cubicBezTo>
-                          <a:pt x="2360533" y="2338663"/>
-                          <a:pt x="2200215" y="4176473"/>
-                          <a:pt x="2272894" y="5459907"/>
-                        </a:cubicBezTo>
-                        <a:cubicBezTo>
-                          <a:pt x="1517392" y="5411676"/>
-                          <a:pt x="689315" y="5544362"/>
-                          <a:pt x="0" y="5459907"/>
-                        </a:cubicBezTo>
-                        <a:cubicBezTo>
-                          <a:pt x="-38581" y="2766092"/>
-                          <a:pt x="63341" y="1068132"/>
-                          <a:pt x="0" y="0"/>
-                        </a:cubicBezTo>
-                        <a:close/>
-                      </a:path>
-                      <a:path w="2272894" h="5459907" stroke="0" extrusionOk="0">
-                        <a:moveTo>
-                          <a:pt x="0" y="0"/>
-                        </a:moveTo>
-                        <a:cubicBezTo>
-                          <a:pt x="1036537" y="118645"/>
-                          <a:pt x="1713750" y="116012"/>
-                          <a:pt x="2272894" y="0"/>
-                        </a:cubicBezTo>
-                        <a:cubicBezTo>
-                          <a:pt x="2140012" y="799698"/>
-                          <a:pt x="2357845" y="4086530"/>
-                          <a:pt x="2272894" y="5459907"/>
-                        </a:cubicBezTo>
-                        <a:cubicBezTo>
-                          <a:pt x="1934076" y="5594507"/>
-                          <a:pt x="974238" y="5302711"/>
-                          <a:pt x="0" y="5459907"/>
-                        </a:cubicBezTo>
-                        <a:cubicBezTo>
-                          <a:pt x="-20187" y="4095132"/>
-                          <a:pt x="-152480" y="2529508"/>
-                          <a:pt x="0" y="0"/>
-                        </a:cubicBezTo>
-                        <a:close/>
-                      </a:path>
-                    </a:pathLst>
-                  </a:custGeom>
-                  <ask:type>
-                    <ask:lineSketchNone/>
-                  </ask:type>
-                </ask:lineSketchStyleProps>
-              </a:ext>
-            </a:extLst>
-          </a:ln>
-        </p:spPr>
-        <p:style>
-          <a:lnRef idx="1">
-            <a:schemeClr val="accent1"/>
-          </a:lnRef>
-          <a:fillRef idx="3">
-            <a:schemeClr val="accent1"/>
-          </a:fillRef>
-          <a:effectRef idx="2">
-            <a:schemeClr val="accent1"/>
-          </a:effectRef>
-          <a:fontRef idx="minor">
-            <a:schemeClr val="lt1"/>
-          </a:fontRef>
-        </p:style>
-        <p:txBody>
-          <a:bodyPr rtlCol="0" anchor="ctr"/>
-          <a:lstStyle/>
-          <a:p>
-            <a:pPr algn="ctr"/>
-            <a:endParaRPr lang="en-US"/>
-          </a:p>
-        </p:txBody>
-      </p:sp>
-      <p:sp>
-        <p:nvSpPr>
-          <p:cNvPr id="3" name="Rectangle 2">
-            <a:extLst>
-              <a:ext uri="{FF2B5EF4-FFF2-40B4-BE49-F238E27FC236}">
-                <a16:creationId xmlns:a16="http://schemas.microsoft.com/office/drawing/2014/main" id="{D8F36B1E-4421-62CA-E09E-DFAE03ECBDBB}"/>
-              </a:ext>
-            </a:extLst>
-          </p:cNvPr>
-          <p:cNvSpPr/>
-          <p:nvPr/>
-        </p:nvSpPr>
-        <p:spPr>
-          <a:xfrm>
-            <a:off x="457200" y="4364211"/>
-            <a:ext cx="7140659" cy="2210760"/>
-          </a:xfrm>
-          <a:prstGeom prst="rect">
-            <a:avLst/>
-          </a:prstGeom>
-          <a:noFill/>
-          <a:ln>
-            <a:prstDash val="dash"/>
-          </a:ln>
-        </p:spPr>
-        <p:style>
-          <a:lnRef idx="1">
-            <a:schemeClr val="accent1"/>
-          </a:lnRef>
-          <a:fillRef idx="3">
-            <a:schemeClr val="accent1"/>
-          </a:fillRef>
-          <a:effectRef idx="2">
-            <a:schemeClr val="accent1"/>
-          </a:effectRef>
-          <a:fontRef idx="minor">
-            <a:schemeClr val="lt1"/>
-          </a:fontRef>
-        </p:style>
-        <p:txBody>
-          <a:bodyPr rtlCol="0" anchor="ctr"/>
-          <a:lstStyle/>
-          <a:p>
-            <a:pPr algn="ctr"/>
-            <a:endParaRPr lang="en-US"/>
-          </a:p>
-        </p:txBody>
-      </p:sp>
-      <p:sp>
-        <p:nvSpPr>
           <p:cNvPr id="2" name="Title 1">
             <a:extLst>
               <a:ext uri="{FF2B5EF4-FFF2-40B4-BE49-F238E27FC236}">
@@ -43866,2214 +43671,12 @@
           </a:p>
         </p:txBody>
       </p:sp>
-      <p:sp>
-        <p:nvSpPr>
-          <p:cNvPr id="6" name="Can 5">
+      <p:grpSp>
+        <p:nvGrpSpPr>
+          <p:cNvPr id="54" name="Group 53">
             <a:extLst>
               <a:ext uri="{FF2B5EF4-FFF2-40B4-BE49-F238E27FC236}">
-                <a16:creationId xmlns:a16="http://schemas.microsoft.com/office/drawing/2014/main" id="{951E455F-C561-6E58-CC8E-0C4FC5F238BF}"/>
-              </a:ext>
-            </a:extLst>
-          </p:cNvPr>
-          <p:cNvSpPr/>
-          <p:nvPr/>
-        </p:nvSpPr>
-        <p:spPr>
-          <a:xfrm>
-            <a:off x="885385" y="5000423"/>
-            <a:ext cx="1018903" cy="1143000"/>
-          </a:xfrm>
-          <a:prstGeom prst="can">
-            <a:avLst/>
-          </a:prstGeom>
-          <a:solidFill>
-            <a:schemeClr val="tx2">
-              <a:lumMod val="40000"/>
-              <a:lumOff val="60000"/>
-            </a:schemeClr>
-          </a:solidFill>
-        </p:spPr>
-        <p:style>
-          <a:lnRef idx="1">
-            <a:schemeClr val="accent1"/>
-          </a:lnRef>
-          <a:fillRef idx="3">
-            <a:schemeClr val="accent1"/>
-          </a:fillRef>
-          <a:effectRef idx="2">
-            <a:schemeClr val="accent1"/>
-          </a:effectRef>
-          <a:fontRef idx="minor">
-            <a:schemeClr val="lt1"/>
-          </a:fontRef>
-        </p:style>
-        <p:txBody>
-          <a:bodyPr rtlCol="0" anchor="ctr"/>
-          <a:lstStyle/>
-          <a:p>
-            <a:pPr algn="ctr"/>
-            <a:r>
-              <a:rPr lang="en-US" err="1"/>
-              <a:t>DataSet</a:t>
-            </a:r>
-            <a:endParaRPr lang="en-US"/>
-          </a:p>
-        </p:txBody>
-      </p:sp>
-      <p:cxnSp>
-        <p:nvCxnSpPr>
-          <p:cNvPr id="8" name="Straight Arrow Connector 7">
-            <a:extLst>
-              <a:ext uri="{FF2B5EF4-FFF2-40B4-BE49-F238E27FC236}">
-                <a16:creationId xmlns:a16="http://schemas.microsoft.com/office/drawing/2014/main" id="{FB96A4DD-1145-4C3E-1DBD-CC982FF21C79}"/>
-              </a:ext>
-            </a:extLst>
-          </p:cNvPr>
-          <p:cNvCxnSpPr>
-            <a:cxnSpLocks/>
-            <a:endCxn id="31" idx="1"/>
-          </p:cNvCxnSpPr>
-          <p:nvPr/>
-        </p:nvCxnSpPr>
-        <p:spPr>
-          <a:xfrm>
-            <a:off x="1803929" y="5586074"/>
-            <a:ext cx="881742" cy="1460"/>
-          </a:xfrm>
-          <a:prstGeom prst="straightConnector1">
-            <a:avLst/>
-          </a:prstGeom>
-          <a:ln>
-            <a:tailEnd type="triangle"/>
-          </a:ln>
-        </p:spPr>
-        <p:style>
-          <a:lnRef idx="2">
-            <a:schemeClr val="accent1"/>
-          </a:lnRef>
-          <a:fillRef idx="0">
-            <a:schemeClr val="accent1"/>
-          </a:fillRef>
-          <a:effectRef idx="1">
-            <a:schemeClr val="accent1"/>
-          </a:effectRef>
-          <a:fontRef idx="minor">
-            <a:schemeClr val="tx1"/>
-          </a:fontRef>
-        </p:style>
-      </p:cxnSp>
-      <p:sp>
-        <p:nvSpPr>
-          <p:cNvPr id="16" name="Rounded Rectangle 15">
-            <a:extLst>
-              <a:ext uri="{FF2B5EF4-FFF2-40B4-BE49-F238E27FC236}">
-                <a16:creationId xmlns:a16="http://schemas.microsoft.com/office/drawing/2014/main" id="{D1390177-FBD9-8F4F-EDA5-30DFBCE23645}"/>
-              </a:ext>
-            </a:extLst>
-          </p:cNvPr>
-          <p:cNvSpPr/>
-          <p:nvPr/>
-        </p:nvSpPr>
-        <p:spPr>
-          <a:xfrm>
-            <a:off x="5183066" y="4724670"/>
-            <a:ext cx="1815738" cy="1717021"/>
-          </a:xfrm>
-          <a:prstGeom prst="roundRect">
-            <a:avLst/>
-          </a:prstGeom>
-          <a:noFill/>
-          <a:ln>
-            <a:prstDash val="lgDash"/>
-          </a:ln>
-        </p:spPr>
-        <p:style>
-          <a:lnRef idx="1">
-            <a:schemeClr val="accent1"/>
-          </a:lnRef>
-          <a:fillRef idx="3">
-            <a:schemeClr val="accent1"/>
-          </a:fillRef>
-          <a:effectRef idx="2">
-            <a:schemeClr val="accent1"/>
-          </a:effectRef>
-          <a:fontRef idx="minor">
-            <a:schemeClr val="lt1"/>
-          </a:fontRef>
-        </p:style>
-        <p:txBody>
-          <a:bodyPr rtlCol="0" anchor="t" anchorCtr="0"/>
-          <a:lstStyle/>
-          <a:p>
-            <a:pPr algn="ctr"/>
-            <a:r>
-              <a:rPr lang="en-GB" sz="1200">
-                <a:solidFill>
-                  <a:schemeClr val="tx1"/>
-                </a:solidFill>
-              </a:rPr>
-              <a:t>Feature</a:t>
-            </a:r>
-            <a:r>
-              <a:rPr lang="zh-CN" altLang="en-US" sz="1200">
-                <a:solidFill>
-                  <a:schemeClr val="tx1"/>
-                </a:solidFill>
-              </a:rPr>
-              <a:t> </a:t>
-            </a:r>
-            <a:r>
-              <a:rPr lang="en-US" altLang="zh-CN" sz="1200">
-                <a:solidFill>
-                  <a:schemeClr val="tx1"/>
-                </a:solidFill>
-              </a:rPr>
-              <a:t>extraction</a:t>
-            </a:r>
-            <a:endParaRPr lang="en-US" sz="1200">
-              <a:solidFill>
-                <a:schemeClr val="tx1"/>
-              </a:solidFill>
-            </a:endParaRPr>
-          </a:p>
-        </p:txBody>
-      </p:sp>
-      <p:cxnSp>
-        <p:nvCxnSpPr>
-          <p:cNvPr id="17" name="Straight Arrow Connector 16">
-            <a:extLst>
-              <a:ext uri="{FF2B5EF4-FFF2-40B4-BE49-F238E27FC236}">
-                <a16:creationId xmlns:a16="http://schemas.microsoft.com/office/drawing/2014/main" id="{2CB87647-8814-233A-C933-61DE9775BEDC}"/>
-              </a:ext>
-            </a:extLst>
-          </p:cNvPr>
-          <p:cNvCxnSpPr>
-            <a:cxnSpLocks/>
-            <a:stCxn id="31" idx="3"/>
-            <a:endCxn id="16" idx="1"/>
-          </p:cNvCxnSpPr>
-          <p:nvPr/>
-        </p:nvCxnSpPr>
-        <p:spPr>
-          <a:xfrm flipV="1">
-            <a:off x="4501409" y="5583181"/>
-            <a:ext cx="681657" cy="4353"/>
-          </a:xfrm>
-          <a:prstGeom prst="straightConnector1">
-            <a:avLst/>
-          </a:prstGeom>
-          <a:ln>
-            <a:tailEnd type="triangle"/>
-          </a:ln>
-        </p:spPr>
-        <p:style>
-          <a:lnRef idx="2">
-            <a:schemeClr val="accent1"/>
-          </a:lnRef>
-          <a:fillRef idx="0">
-            <a:schemeClr val="accent1"/>
-          </a:fillRef>
-          <a:effectRef idx="1">
-            <a:schemeClr val="accent1"/>
-          </a:effectRef>
-          <a:fontRef idx="minor">
-            <a:schemeClr val="tx1"/>
-          </a:fontRef>
-        </p:style>
-      </p:cxnSp>
-      <p:sp>
-        <p:nvSpPr>
-          <p:cNvPr id="29" name="TextBox 28">
-            <a:extLst>
-              <a:ext uri="{FF2B5EF4-FFF2-40B4-BE49-F238E27FC236}">
-                <a16:creationId xmlns:a16="http://schemas.microsoft.com/office/drawing/2014/main" id="{C481748B-DFA3-5040-1741-08C0E6A1CBC3}"/>
-              </a:ext>
-            </a:extLst>
-          </p:cNvPr>
-          <p:cNvSpPr txBox="1"/>
-          <p:nvPr/>
-        </p:nvSpPr>
-        <p:spPr>
-          <a:xfrm>
-            <a:off x="5156939" y="6070854"/>
-            <a:ext cx="1898470" cy="276999"/>
-          </a:xfrm>
-          <a:prstGeom prst="rect">
-            <a:avLst/>
-          </a:prstGeom>
-          <a:noFill/>
-        </p:spPr>
-        <p:txBody>
-          <a:bodyPr wrap="square" rtlCol="0">
-            <a:spAutoFit/>
-          </a:bodyPr>
-          <a:lstStyle/>
-          <a:p>
-            <a:r>
-              <a:rPr lang="en-US" sz="1200"/>
-              <a:t>PCA, </a:t>
-            </a:r>
-            <a:r>
-              <a:rPr lang="en-US" sz="1200" err="1"/>
-              <a:t>AutoEncoder</a:t>
-            </a:r>
-            <a:r>
-              <a:rPr lang="en-US" sz="1200"/>
-              <a:t>, </a:t>
-            </a:r>
-            <a:r>
-              <a:rPr lang="en-US" sz="1200" err="1"/>
-              <a:t>ResNeXt</a:t>
-            </a:r>
-            <a:endParaRPr lang="en-US" sz="1200"/>
-          </a:p>
-        </p:txBody>
-      </p:sp>
-      <p:sp>
-        <p:nvSpPr>
-          <p:cNvPr id="31" name="Rounded Rectangle 30">
-            <a:extLst>
-              <a:ext uri="{FF2B5EF4-FFF2-40B4-BE49-F238E27FC236}">
-                <a16:creationId xmlns:a16="http://schemas.microsoft.com/office/drawing/2014/main" id="{4C4BE4F8-8409-9639-A500-F83409FCFFA7}"/>
-              </a:ext>
-            </a:extLst>
-          </p:cNvPr>
-          <p:cNvSpPr/>
-          <p:nvPr/>
-        </p:nvSpPr>
-        <p:spPr>
-          <a:xfrm>
-            <a:off x="2685671" y="4729023"/>
-            <a:ext cx="1815738" cy="1717021"/>
-          </a:xfrm>
-          <a:prstGeom prst="roundRect">
-            <a:avLst/>
-          </a:prstGeom>
-          <a:noFill/>
-          <a:ln>
-            <a:prstDash val="lgDash"/>
-          </a:ln>
-        </p:spPr>
-        <p:style>
-          <a:lnRef idx="1">
-            <a:schemeClr val="accent1"/>
-          </a:lnRef>
-          <a:fillRef idx="3">
-            <a:schemeClr val="accent1"/>
-          </a:fillRef>
-          <a:effectRef idx="2">
-            <a:schemeClr val="accent1"/>
-          </a:effectRef>
-          <a:fontRef idx="minor">
-            <a:schemeClr val="lt1"/>
-          </a:fontRef>
-        </p:style>
-        <p:txBody>
-          <a:bodyPr rtlCol="0" anchor="t" anchorCtr="0"/>
-          <a:lstStyle/>
-          <a:p>
-            <a:pPr algn="ctr"/>
-            <a:r>
-              <a:rPr lang="en-US" sz="1200">
-                <a:solidFill>
-                  <a:schemeClr val="tx1"/>
-                </a:solidFill>
-              </a:rPr>
-              <a:t>Feature Selection</a:t>
-            </a:r>
-          </a:p>
-        </p:txBody>
-      </p:sp>
-      <p:sp>
-        <p:nvSpPr>
-          <p:cNvPr id="34" name="Oval 33">
-            <a:extLst>
-              <a:ext uri="{FF2B5EF4-FFF2-40B4-BE49-F238E27FC236}">
-                <a16:creationId xmlns:a16="http://schemas.microsoft.com/office/drawing/2014/main" id="{898E5945-17AE-5FBB-BC98-0FD633DC2CAC}"/>
-              </a:ext>
-            </a:extLst>
-          </p:cNvPr>
-          <p:cNvSpPr/>
-          <p:nvPr/>
-        </p:nvSpPr>
-        <p:spPr>
-          <a:xfrm>
-            <a:off x="2796705" y="5130148"/>
-            <a:ext cx="243840" cy="200297"/>
-          </a:xfrm>
-          <a:prstGeom prst="ellipse">
-            <a:avLst/>
-          </a:prstGeom>
-          <a:solidFill>
-            <a:schemeClr val="bg1">
-              <a:lumMod val="50000"/>
-            </a:schemeClr>
-          </a:solidFill>
-        </p:spPr>
-        <p:style>
-          <a:lnRef idx="1">
-            <a:schemeClr val="accent1"/>
-          </a:lnRef>
-          <a:fillRef idx="3">
-            <a:schemeClr val="accent1"/>
-          </a:fillRef>
-          <a:effectRef idx="2">
-            <a:schemeClr val="accent1"/>
-          </a:effectRef>
-          <a:fontRef idx="minor">
-            <a:schemeClr val="lt1"/>
-          </a:fontRef>
-        </p:style>
-        <p:txBody>
-          <a:bodyPr rtlCol="0" anchor="ctr"/>
-          <a:lstStyle/>
-          <a:p>
-            <a:pPr algn="ctr"/>
-            <a:endParaRPr lang="en-US"/>
-          </a:p>
-        </p:txBody>
-      </p:sp>
-      <p:sp>
-        <p:nvSpPr>
-          <p:cNvPr id="35" name="Oval 34">
-            <a:extLst>
-              <a:ext uri="{FF2B5EF4-FFF2-40B4-BE49-F238E27FC236}">
-                <a16:creationId xmlns:a16="http://schemas.microsoft.com/office/drawing/2014/main" id="{BD4FE70E-F51F-727A-A874-33B8D4973ACE}"/>
-              </a:ext>
-            </a:extLst>
-          </p:cNvPr>
-          <p:cNvSpPr/>
-          <p:nvPr/>
-        </p:nvSpPr>
-        <p:spPr>
-          <a:xfrm>
-            <a:off x="3114569" y="5130148"/>
-            <a:ext cx="243840" cy="200297"/>
-          </a:xfrm>
-          <a:prstGeom prst="ellipse">
-            <a:avLst/>
-          </a:prstGeom>
-          <a:solidFill>
-            <a:schemeClr val="bg1">
-              <a:lumMod val="50000"/>
-            </a:schemeClr>
-          </a:solidFill>
-        </p:spPr>
-        <p:style>
-          <a:lnRef idx="1">
-            <a:schemeClr val="accent1"/>
-          </a:lnRef>
-          <a:fillRef idx="3">
-            <a:schemeClr val="accent1"/>
-          </a:fillRef>
-          <a:effectRef idx="2">
-            <a:schemeClr val="accent1"/>
-          </a:effectRef>
-          <a:fontRef idx="minor">
-            <a:schemeClr val="lt1"/>
-          </a:fontRef>
-        </p:style>
-        <p:txBody>
-          <a:bodyPr rtlCol="0" anchor="ctr"/>
-          <a:lstStyle/>
-          <a:p>
-            <a:pPr algn="ctr"/>
-            <a:endParaRPr lang="en-US"/>
-          </a:p>
-        </p:txBody>
-      </p:sp>
-      <p:sp>
-        <p:nvSpPr>
-          <p:cNvPr id="36" name="Oval 35">
-            <a:extLst>
-              <a:ext uri="{FF2B5EF4-FFF2-40B4-BE49-F238E27FC236}">
-                <a16:creationId xmlns:a16="http://schemas.microsoft.com/office/drawing/2014/main" id="{8E465672-FFCF-BCE1-F9B8-C0A0E6B71185}"/>
-              </a:ext>
-            </a:extLst>
-          </p:cNvPr>
-          <p:cNvSpPr/>
-          <p:nvPr/>
-        </p:nvSpPr>
-        <p:spPr>
-          <a:xfrm>
-            <a:off x="3458557" y="5130148"/>
-            <a:ext cx="243840" cy="200297"/>
-          </a:xfrm>
-          <a:prstGeom prst="ellipse">
-            <a:avLst/>
-          </a:prstGeom>
-          <a:solidFill>
-            <a:schemeClr val="bg1">
-              <a:lumMod val="50000"/>
-            </a:schemeClr>
-          </a:solidFill>
-        </p:spPr>
-        <p:style>
-          <a:lnRef idx="1">
-            <a:schemeClr val="accent1"/>
-          </a:lnRef>
-          <a:fillRef idx="3">
-            <a:schemeClr val="accent1"/>
-          </a:fillRef>
-          <a:effectRef idx="2">
-            <a:schemeClr val="accent1"/>
-          </a:effectRef>
-          <a:fontRef idx="minor">
-            <a:schemeClr val="lt1"/>
-          </a:fontRef>
-        </p:style>
-        <p:txBody>
-          <a:bodyPr rtlCol="0" anchor="ctr"/>
-          <a:lstStyle/>
-          <a:p>
-            <a:pPr algn="ctr"/>
-            <a:endParaRPr lang="en-US"/>
-          </a:p>
-        </p:txBody>
-      </p:sp>
-      <p:sp>
-        <p:nvSpPr>
-          <p:cNvPr id="37" name="Oval 36">
-            <a:extLst>
-              <a:ext uri="{FF2B5EF4-FFF2-40B4-BE49-F238E27FC236}">
-                <a16:creationId xmlns:a16="http://schemas.microsoft.com/office/drawing/2014/main" id="{2FE35625-CA79-A0B6-4996-D4741B89A479}"/>
-              </a:ext>
-            </a:extLst>
-          </p:cNvPr>
-          <p:cNvSpPr/>
-          <p:nvPr/>
-        </p:nvSpPr>
-        <p:spPr>
-          <a:xfrm>
-            <a:off x="3809075" y="5130147"/>
-            <a:ext cx="243840" cy="200297"/>
-          </a:xfrm>
-          <a:prstGeom prst="ellipse">
-            <a:avLst/>
-          </a:prstGeom>
-          <a:solidFill>
-            <a:schemeClr val="bg1">
-              <a:lumMod val="50000"/>
-            </a:schemeClr>
-          </a:solidFill>
-        </p:spPr>
-        <p:style>
-          <a:lnRef idx="1">
-            <a:schemeClr val="accent1"/>
-          </a:lnRef>
-          <a:fillRef idx="3">
-            <a:schemeClr val="accent1"/>
-          </a:fillRef>
-          <a:effectRef idx="2">
-            <a:schemeClr val="accent1"/>
-          </a:effectRef>
-          <a:fontRef idx="minor">
-            <a:schemeClr val="lt1"/>
-          </a:fontRef>
-        </p:style>
-        <p:txBody>
-          <a:bodyPr rtlCol="0" anchor="ctr"/>
-          <a:lstStyle/>
-          <a:p>
-            <a:pPr algn="ctr"/>
-            <a:endParaRPr lang="en-US"/>
-          </a:p>
-        </p:txBody>
-      </p:sp>
-      <p:sp>
-        <p:nvSpPr>
-          <p:cNvPr id="38" name="Oval 37">
-            <a:extLst>
-              <a:ext uri="{FF2B5EF4-FFF2-40B4-BE49-F238E27FC236}">
-                <a16:creationId xmlns:a16="http://schemas.microsoft.com/office/drawing/2014/main" id="{CB2106DB-534B-A3C8-74B6-F9ADB9D133FF}"/>
-              </a:ext>
-            </a:extLst>
-          </p:cNvPr>
-          <p:cNvSpPr/>
-          <p:nvPr/>
-        </p:nvSpPr>
-        <p:spPr>
-          <a:xfrm>
-            <a:off x="4140001" y="5130146"/>
-            <a:ext cx="243840" cy="200297"/>
-          </a:xfrm>
-          <a:prstGeom prst="ellipse">
-            <a:avLst/>
-          </a:prstGeom>
-          <a:solidFill>
-            <a:schemeClr val="bg1">
-              <a:lumMod val="50000"/>
-            </a:schemeClr>
-          </a:solidFill>
-        </p:spPr>
-        <p:style>
-          <a:lnRef idx="1">
-            <a:schemeClr val="accent1"/>
-          </a:lnRef>
-          <a:fillRef idx="3">
-            <a:schemeClr val="accent1"/>
-          </a:fillRef>
-          <a:effectRef idx="2">
-            <a:schemeClr val="accent1"/>
-          </a:effectRef>
-          <a:fontRef idx="minor">
-            <a:schemeClr val="lt1"/>
-          </a:fontRef>
-        </p:style>
-        <p:txBody>
-          <a:bodyPr rtlCol="0" anchor="ctr"/>
-          <a:lstStyle/>
-          <a:p>
-            <a:pPr algn="ctr"/>
-            <a:endParaRPr lang="en-US"/>
-          </a:p>
-        </p:txBody>
-      </p:sp>
-      <p:sp>
-        <p:nvSpPr>
-          <p:cNvPr id="40" name="Multiply 39">
-            <a:extLst>
-              <a:ext uri="{FF2B5EF4-FFF2-40B4-BE49-F238E27FC236}">
-                <a16:creationId xmlns:a16="http://schemas.microsoft.com/office/drawing/2014/main" id="{20DAA727-43B6-B948-17C0-65167B768785}"/>
-              </a:ext>
-            </a:extLst>
-          </p:cNvPr>
-          <p:cNvSpPr/>
-          <p:nvPr/>
-        </p:nvSpPr>
-        <p:spPr>
-          <a:xfrm>
-            <a:off x="3068851" y="5051951"/>
-            <a:ext cx="341808" cy="374468"/>
-          </a:xfrm>
-          <a:prstGeom prst="mathMultiply">
-            <a:avLst/>
-          </a:prstGeom>
-          <a:solidFill>
-            <a:srgbClr val="FF0000"/>
-          </a:solidFill>
-        </p:spPr>
-        <p:style>
-          <a:lnRef idx="1">
-            <a:schemeClr val="accent1"/>
-          </a:lnRef>
-          <a:fillRef idx="3">
-            <a:schemeClr val="accent1"/>
-          </a:fillRef>
-          <a:effectRef idx="2">
-            <a:schemeClr val="accent1"/>
-          </a:effectRef>
-          <a:fontRef idx="minor">
-            <a:schemeClr val="lt1"/>
-          </a:fontRef>
-        </p:style>
-        <p:txBody>
-          <a:bodyPr rtlCol="0" anchor="ctr"/>
-          <a:lstStyle/>
-          <a:p>
-            <a:pPr algn="ctr"/>
-            <a:endParaRPr lang="en-US"/>
-          </a:p>
-        </p:txBody>
-      </p:sp>
-      <p:sp>
-        <p:nvSpPr>
-          <p:cNvPr id="41" name="Multiply 40">
-            <a:extLst>
-              <a:ext uri="{FF2B5EF4-FFF2-40B4-BE49-F238E27FC236}">
-                <a16:creationId xmlns:a16="http://schemas.microsoft.com/office/drawing/2014/main" id="{E8ACCC30-8847-DDF5-0E99-0273CCFD743E}"/>
-              </a:ext>
-            </a:extLst>
-          </p:cNvPr>
-          <p:cNvSpPr/>
-          <p:nvPr/>
-        </p:nvSpPr>
-        <p:spPr>
-          <a:xfrm>
-            <a:off x="3763360" y="5059209"/>
-            <a:ext cx="341808" cy="374468"/>
-          </a:xfrm>
-          <a:prstGeom prst="mathMultiply">
-            <a:avLst/>
-          </a:prstGeom>
-          <a:solidFill>
-            <a:srgbClr val="FF0000"/>
-          </a:solidFill>
-        </p:spPr>
-        <p:style>
-          <a:lnRef idx="1">
-            <a:schemeClr val="accent1"/>
-          </a:lnRef>
-          <a:fillRef idx="3">
-            <a:schemeClr val="accent1"/>
-          </a:fillRef>
-          <a:effectRef idx="2">
-            <a:schemeClr val="accent1"/>
-          </a:effectRef>
-          <a:fontRef idx="minor">
-            <a:schemeClr val="lt1"/>
-          </a:fontRef>
-        </p:style>
-        <p:txBody>
-          <a:bodyPr rtlCol="0" anchor="ctr"/>
-          <a:lstStyle/>
-          <a:p>
-            <a:pPr algn="ctr"/>
-            <a:endParaRPr lang="en-US"/>
-          </a:p>
-        </p:txBody>
-      </p:sp>
-      <p:sp>
-        <p:nvSpPr>
-          <p:cNvPr id="45" name="TextBox 44">
-            <a:extLst>
-              <a:ext uri="{FF2B5EF4-FFF2-40B4-BE49-F238E27FC236}">
-                <a16:creationId xmlns:a16="http://schemas.microsoft.com/office/drawing/2014/main" id="{770BE998-DE42-AC75-3931-827DAE46A753}"/>
-              </a:ext>
-            </a:extLst>
-          </p:cNvPr>
-          <p:cNvSpPr txBox="1"/>
-          <p:nvPr/>
-        </p:nvSpPr>
-        <p:spPr>
-          <a:xfrm>
-            <a:off x="2986021" y="5392424"/>
-            <a:ext cx="1201419" cy="292388"/>
-          </a:xfrm>
-          <a:prstGeom prst="rect">
-            <a:avLst/>
-          </a:prstGeom>
-          <a:noFill/>
-        </p:spPr>
-        <p:txBody>
-          <a:bodyPr wrap="none" rtlCol="0">
-            <a:spAutoFit/>
-          </a:bodyPr>
-          <a:lstStyle/>
-          <a:p>
-            <a:r>
-              <a:rPr lang="en-US" sz="1300">
-                <a:ea typeface="SimSun" panose="02010600030101010101" pitchFamily="2" charset="-122"/>
-              </a:rPr>
-              <a:t>Feature</a:t>
-            </a:r>
-            <a:r>
-              <a:rPr lang="zh-CN" altLang="en-US" sz="1300">
-                <a:ea typeface="SimSun" panose="02010600030101010101" pitchFamily="2" charset="-122"/>
-              </a:rPr>
-              <a:t> </a:t>
-            </a:r>
-            <a:r>
-              <a:rPr lang="en-US" altLang="zh-CN" sz="1300">
-                <a:ea typeface="SimSun" panose="02010600030101010101" pitchFamily="2" charset="-122"/>
-              </a:rPr>
-              <a:t>scaling</a:t>
-            </a:r>
-            <a:endParaRPr lang="en-US" sz="1300">
-              <a:ea typeface="SimSun" panose="02010600030101010101" pitchFamily="2" charset="-122"/>
-            </a:endParaRPr>
-          </a:p>
-        </p:txBody>
-      </p:sp>
-      <p:pic>
-        <p:nvPicPr>
-          <p:cNvPr id="47" name="Picture 46">
-            <a:extLst>
-              <a:ext uri="{FF2B5EF4-FFF2-40B4-BE49-F238E27FC236}">
-                <a16:creationId xmlns:a16="http://schemas.microsoft.com/office/drawing/2014/main" id="{21949BEA-0A35-9974-7DA4-7DA769B30521}"/>
-              </a:ext>
-            </a:extLst>
-          </p:cNvPr>
-          <p:cNvPicPr>
-            <a:picLocks noChangeAspect="1"/>
-          </p:cNvPicPr>
-          <p:nvPr/>
-        </p:nvPicPr>
-        <p:blipFill>
-          <a:blip r:embed="rId3"/>
-          <a:stretch>
-            <a:fillRect/>
-          </a:stretch>
-        </p:blipFill>
-        <p:spPr>
-          <a:xfrm>
-            <a:off x="2796705" y="5675867"/>
-            <a:ext cx="1610407" cy="635356"/>
-          </a:xfrm>
-          <a:prstGeom prst="rect">
-            <a:avLst/>
-          </a:prstGeom>
-        </p:spPr>
-      </p:pic>
-      <p:sp>
-        <p:nvSpPr>
-          <p:cNvPr id="51" name="Rounded Rectangle 50">
-            <a:extLst>
-              <a:ext uri="{FF2B5EF4-FFF2-40B4-BE49-F238E27FC236}">
-                <a16:creationId xmlns:a16="http://schemas.microsoft.com/office/drawing/2014/main" id="{C104F36B-F534-4203-4C3B-1A7267A0950D}"/>
-              </a:ext>
-            </a:extLst>
-          </p:cNvPr>
-          <p:cNvSpPr/>
-          <p:nvPr/>
-        </p:nvSpPr>
-        <p:spPr>
-          <a:xfrm>
-            <a:off x="3259990" y="1818761"/>
-            <a:ext cx="1614198" cy="1601833"/>
-          </a:xfrm>
-          <a:prstGeom prst="roundRect">
-            <a:avLst/>
-          </a:prstGeom>
-          <a:noFill/>
-          <a:ln>
-            <a:prstDash val="lgDash"/>
-          </a:ln>
-        </p:spPr>
-        <p:style>
-          <a:lnRef idx="1">
-            <a:schemeClr val="accent1"/>
-          </a:lnRef>
-          <a:fillRef idx="3">
-            <a:schemeClr val="accent1"/>
-          </a:fillRef>
-          <a:effectRef idx="2">
-            <a:schemeClr val="accent1"/>
-          </a:effectRef>
-          <a:fontRef idx="minor">
-            <a:schemeClr val="lt1"/>
-          </a:fontRef>
-        </p:style>
-        <p:txBody>
-          <a:bodyPr rtlCol="0" anchor="t" anchorCtr="0"/>
-          <a:lstStyle/>
-          <a:p>
-            <a:pPr algn="ctr"/>
-            <a:r>
-              <a:rPr lang="en-US" sz="1200" err="1">
-                <a:solidFill>
-                  <a:schemeClr val="tx1"/>
-                </a:solidFill>
-              </a:rPr>
-              <a:t>Classifer</a:t>
-            </a:r>
-            <a:r>
-              <a:rPr lang="zh-CN" altLang="en-US" sz="1200">
-                <a:solidFill>
-                  <a:schemeClr val="tx1"/>
-                </a:solidFill>
-              </a:rPr>
-              <a:t>  </a:t>
-            </a:r>
-            <a:r>
-              <a:rPr lang="en-US" altLang="zh-CN" sz="1200">
-                <a:solidFill>
-                  <a:schemeClr val="tx1"/>
-                </a:solidFill>
-              </a:rPr>
-              <a:t>Model</a:t>
-            </a:r>
-            <a:endParaRPr lang="en-US" sz="1200">
-              <a:solidFill>
-                <a:schemeClr val="tx1"/>
-              </a:solidFill>
-            </a:endParaRPr>
-          </a:p>
-        </p:txBody>
-      </p:sp>
-      <p:sp>
-        <p:nvSpPr>
-          <p:cNvPr id="52" name="Rounded Rectangle 51">
-            <a:extLst>
-              <a:ext uri="{FF2B5EF4-FFF2-40B4-BE49-F238E27FC236}">
-                <a16:creationId xmlns:a16="http://schemas.microsoft.com/office/drawing/2014/main" id="{8B8FC5B0-A1F5-D5BD-3910-5A2F09AEB404}"/>
-              </a:ext>
-            </a:extLst>
-          </p:cNvPr>
-          <p:cNvSpPr/>
-          <p:nvPr/>
-        </p:nvSpPr>
-        <p:spPr>
-          <a:xfrm>
-            <a:off x="754743" y="1818761"/>
-            <a:ext cx="1582795" cy="1610239"/>
-          </a:xfrm>
-          <a:prstGeom prst="roundRect">
-            <a:avLst/>
-          </a:prstGeom>
-          <a:noFill/>
-          <a:ln>
-            <a:prstDash val="lgDash"/>
-          </a:ln>
-        </p:spPr>
-        <p:style>
-          <a:lnRef idx="1">
-            <a:schemeClr val="accent1"/>
-          </a:lnRef>
-          <a:fillRef idx="3">
-            <a:schemeClr val="accent1"/>
-          </a:fillRef>
-          <a:effectRef idx="2">
-            <a:schemeClr val="accent1"/>
-          </a:effectRef>
-          <a:fontRef idx="minor">
-            <a:schemeClr val="lt1"/>
-          </a:fontRef>
-        </p:style>
-        <p:txBody>
-          <a:bodyPr rtlCol="0" anchor="t" anchorCtr="0"/>
-          <a:lstStyle/>
-          <a:p>
-            <a:pPr algn="ctr"/>
-            <a:r>
-              <a:rPr lang="en-US" altLang="zh-CN" sz="1200">
-                <a:solidFill>
-                  <a:schemeClr val="tx1"/>
-                </a:solidFill>
-              </a:rPr>
-              <a:t>Feature Encoding</a:t>
-            </a:r>
-          </a:p>
-        </p:txBody>
-      </p:sp>
-      <p:cxnSp>
-        <p:nvCxnSpPr>
-          <p:cNvPr id="56" name="Elbow Connector 55">
-            <a:extLst>
-              <a:ext uri="{FF2B5EF4-FFF2-40B4-BE49-F238E27FC236}">
-                <a16:creationId xmlns:a16="http://schemas.microsoft.com/office/drawing/2014/main" id="{E454A758-71CA-2BDE-0059-C54C08D00CD7}"/>
-              </a:ext>
-            </a:extLst>
-          </p:cNvPr>
-          <p:cNvCxnSpPr>
-            <a:cxnSpLocks/>
-            <a:stCxn id="16" idx="0"/>
-            <a:endCxn id="52" idx="2"/>
-          </p:cNvCxnSpPr>
-          <p:nvPr/>
-        </p:nvCxnSpPr>
-        <p:spPr>
-          <a:xfrm rot="16200000" flipV="1">
-            <a:off x="3170703" y="1804438"/>
-            <a:ext cx="1295670" cy="4544794"/>
-          </a:xfrm>
-          <a:prstGeom prst="bentConnector3">
-            <a:avLst/>
-          </a:prstGeom>
-          <a:ln>
-            <a:headEnd type="none"/>
-            <a:tailEnd type="triangle"/>
-          </a:ln>
-        </p:spPr>
-        <p:style>
-          <a:lnRef idx="2">
-            <a:schemeClr val="accent1"/>
-          </a:lnRef>
-          <a:fillRef idx="0">
-            <a:schemeClr val="accent1"/>
-          </a:fillRef>
-          <a:effectRef idx="1">
-            <a:schemeClr val="accent1"/>
-          </a:effectRef>
-          <a:fontRef idx="minor">
-            <a:schemeClr val="tx1"/>
-          </a:fontRef>
-        </p:style>
-      </p:cxnSp>
-      <p:sp>
-        <p:nvSpPr>
-          <p:cNvPr id="57" name="Right Arrow 56">
-            <a:extLst>
-              <a:ext uri="{FF2B5EF4-FFF2-40B4-BE49-F238E27FC236}">
-                <a16:creationId xmlns:a16="http://schemas.microsoft.com/office/drawing/2014/main" id="{4102F10F-61FB-ACF1-672C-97A8402E3AFB}"/>
-              </a:ext>
-            </a:extLst>
-          </p:cNvPr>
-          <p:cNvSpPr/>
-          <p:nvPr/>
-        </p:nvSpPr>
-        <p:spPr>
-          <a:xfrm>
-            <a:off x="6364514" y="4071257"/>
-            <a:ext cx="1560286" cy="214793"/>
-          </a:xfrm>
-          <a:prstGeom prst="rightArrow">
-            <a:avLst/>
-          </a:prstGeom>
-          <a:ln>
-            <a:solidFill>
-              <a:schemeClr val="tx2">
-                <a:lumMod val="75000"/>
-                <a:alpha val="50000"/>
-              </a:schemeClr>
-            </a:solidFill>
-            <a:prstDash val="sysDash"/>
-          </a:ln>
-        </p:spPr>
-        <p:style>
-          <a:lnRef idx="2">
-            <a:schemeClr val="dk1"/>
-          </a:lnRef>
-          <a:fillRef idx="1">
-            <a:schemeClr val="lt1"/>
-          </a:fillRef>
-          <a:effectRef idx="0">
-            <a:schemeClr val="dk1"/>
-          </a:effectRef>
-          <a:fontRef idx="minor">
-            <a:schemeClr val="dk1"/>
-          </a:fontRef>
-        </p:style>
-        <p:txBody>
-          <a:bodyPr rtlCol="0" anchor="ctr"/>
-          <a:lstStyle/>
-          <a:p>
-            <a:pPr algn="ctr"/>
-            <a:endParaRPr lang="en-US"/>
-          </a:p>
-        </p:txBody>
-      </p:sp>
-      <p:sp>
-        <p:nvSpPr>
-          <p:cNvPr id="58" name="Right Arrow 57">
-            <a:extLst>
-              <a:ext uri="{FF2B5EF4-FFF2-40B4-BE49-F238E27FC236}">
-                <a16:creationId xmlns:a16="http://schemas.microsoft.com/office/drawing/2014/main" id="{6EE0CBBE-B553-FAB0-5A8E-9FFE28521536}"/>
-              </a:ext>
-            </a:extLst>
-          </p:cNvPr>
-          <p:cNvSpPr/>
-          <p:nvPr/>
-        </p:nvSpPr>
-        <p:spPr>
-          <a:xfrm>
-            <a:off x="7127979" y="2512280"/>
-            <a:ext cx="796821" cy="214793"/>
-          </a:xfrm>
-          <a:prstGeom prst="rightArrow">
-            <a:avLst/>
-          </a:prstGeom>
-          <a:ln>
-            <a:solidFill>
-              <a:schemeClr val="tx2">
-                <a:lumMod val="75000"/>
-                <a:alpha val="50000"/>
-              </a:schemeClr>
-            </a:solidFill>
-            <a:prstDash val="sysDash"/>
-          </a:ln>
-        </p:spPr>
-        <p:style>
-          <a:lnRef idx="2">
-            <a:schemeClr val="dk1"/>
-          </a:lnRef>
-          <a:fillRef idx="1">
-            <a:schemeClr val="lt1"/>
-          </a:fillRef>
-          <a:effectRef idx="0">
-            <a:schemeClr val="dk1"/>
-          </a:effectRef>
-          <a:fontRef idx="minor">
-            <a:schemeClr val="dk1"/>
-          </a:fontRef>
-        </p:style>
-        <p:txBody>
-          <a:bodyPr rtlCol="0" anchor="ctr"/>
-          <a:lstStyle/>
-          <a:p>
-            <a:pPr algn="ctr"/>
-            <a:endParaRPr lang="en-US"/>
-          </a:p>
-        </p:txBody>
-      </p:sp>
-      <p:sp>
-        <p:nvSpPr>
-          <p:cNvPr id="61" name="Can 60">
-            <a:extLst>
-              <a:ext uri="{FF2B5EF4-FFF2-40B4-BE49-F238E27FC236}">
-                <a16:creationId xmlns:a16="http://schemas.microsoft.com/office/drawing/2014/main" id="{EF3E311E-249D-8AE8-40EB-C4B8841E7274}"/>
-              </a:ext>
-            </a:extLst>
-          </p:cNvPr>
-          <p:cNvSpPr/>
-          <p:nvPr/>
-        </p:nvSpPr>
-        <p:spPr>
-          <a:xfrm>
-            <a:off x="5599624" y="1973898"/>
-            <a:ext cx="1264196" cy="1295671"/>
-          </a:xfrm>
-          <a:prstGeom prst="can">
-            <a:avLst/>
-          </a:prstGeom>
-          <a:solidFill>
-            <a:schemeClr val="tx2">
-              <a:lumMod val="40000"/>
-              <a:lumOff val="60000"/>
-            </a:schemeClr>
-          </a:solidFill>
-        </p:spPr>
-        <p:style>
-          <a:lnRef idx="1">
-            <a:schemeClr val="accent1"/>
-          </a:lnRef>
-          <a:fillRef idx="3">
-            <a:schemeClr val="accent1"/>
-          </a:fillRef>
-          <a:effectRef idx="2">
-            <a:schemeClr val="accent1"/>
-          </a:effectRef>
-          <a:fontRef idx="minor">
-            <a:schemeClr val="lt1"/>
-          </a:fontRef>
-        </p:style>
-        <p:txBody>
-          <a:bodyPr rtlCol="0" anchor="ctr"/>
-          <a:lstStyle/>
-          <a:p>
-            <a:pPr algn="ctr"/>
-            <a:r>
-              <a:rPr lang="en-US" altLang="zh-CN" sz="1600"/>
-              <a:t>Classification</a:t>
-            </a:r>
-            <a:r>
-              <a:rPr lang="zh-CN" altLang="en-US" sz="1600"/>
-              <a:t> </a:t>
-            </a:r>
-            <a:r>
-              <a:rPr lang="en-US" altLang="zh-CN" sz="1600"/>
-              <a:t>result</a:t>
-            </a:r>
-            <a:endParaRPr lang="en-US" sz="1600"/>
-          </a:p>
-        </p:txBody>
-      </p:sp>
-      <p:cxnSp>
-        <p:nvCxnSpPr>
-          <p:cNvPr id="64" name="Straight Arrow Connector 63">
-            <a:extLst>
-              <a:ext uri="{FF2B5EF4-FFF2-40B4-BE49-F238E27FC236}">
-                <a16:creationId xmlns:a16="http://schemas.microsoft.com/office/drawing/2014/main" id="{097E2E20-F783-3FBA-F095-1120DB9F8B47}"/>
-              </a:ext>
-            </a:extLst>
-          </p:cNvPr>
-          <p:cNvCxnSpPr>
-            <a:cxnSpLocks/>
-          </p:cNvCxnSpPr>
-          <p:nvPr/>
-        </p:nvCxnSpPr>
-        <p:spPr>
-          <a:xfrm>
-            <a:off x="2337538" y="2220686"/>
-            <a:ext cx="944739" cy="0"/>
-          </a:xfrm>
-          <a:prstGeom prst="straightConnector1">
-            <a:avLst/>
-          </a:prstGeom>
-          <a:ln>
-            <a:tailEnd type="triangle"/>
-          </a:ln>
-        </p:spPr>
-        <p:style>
-          <a:lnRef idx="2">
-            <a:schemeClr val="accent1"/>
-          </a:lnRef>
-          <a:fillRef idx="0">
-            <a:schemeClr val="accent1"/>
-          </a:fillRef>
-          <a:effectRef idx="1">
-            <a:schemeClr val="accent1"/>
-          </a:effectRef>
-          <a:fontRef idx="minor">
-            <a:schemeClr val="tx1"/>
-          </a:fontRef>
-        </p:style>
-      </p:cxnSp>
-      <p:cxnSp>
-        <p:nvCxnSpPr>
-          <p:cNvPr id="66" name="Straight Arrow Connector 65">
-            <a:extLst>
-              <a:ext uri="{FF2B5EF4-FFF2-40B4-BE49-F238E27FC236}">
-                <a16:creationId xmlns:a16="http://schemas.microsoft.com/office/drawing/2014/main" id="{064E9001-AEBD-CC4E-EEA8-630A81455DDF}"/>
-              </a:ext>
-            </a:extLst>
-          </p:cNvPr>
-          <p:cNvCxnSpPr>
-            <a:cxnSpLocks/>
-          </p:cNvCxnSpPr>
-          <p:nvPr/>
-        </p:nvCxnSpPr>
-        <p:spPr>
-          <a:xfrm>
-            <a:off x="2337538" y="2844800"/>
-            <a:ext cx="922452" cy="0"/>
-          </a:xfrm>
-          <a:prstGeom prst="straightConnector1">
-            <a:avLst/>
-          </a:prstGeom>
-          <a:ln>
-            <a:tailEnd type="triangle"/>
-          </a:ln>
-        </p:spPr>
-        <p:style>
-          <a:lnRef idx="2">
-            <a:schemeClr val="accent1"/>
-          </a:lnRef>
-          <a:fillRef idx="0">
-            <a:schemeClr val="accent1"/>
-          </a:fillRef>
-          <a:effectRef idx="1">
-            <a:schemeClr val="accent1"/>
-          </a:effectRef>
-          <a:fontRef idx="minor">
-            <a:schemeClr val="tx1"/>
-          </a:fontRef>
-        </p:style>
-      </p:cxnSp>
-      <p:sp>
-        <p:nvSpPr>
-          <p:cNvPr id="68" name="Rectangle 67">
-            <a:extLst>
-              <a:ext uri="{FF2B5EF4-FFF2-40B4-BE49-F238E27FC236}">
-                <a16:creationId xmlns:a16="http://schemas.microsoft.com/office/drawing/2014/main" id="{0C82C30F-DB6C-8563-EE0F-95A70A254AB1}"/>
-              </a:ext>
-            </a:extLst>
-          </p:cNvPr>
-          <p:cNvSpPr/>
-          <p:nvPr/>
-        </p:nvSpPr>
-        <p:spPr>
-          <a:xfrm>
-            <a:off x="2641600" y="1806170"/>
-            <a:ext cx="517350" cy="132612"/>
-          </a:xfrm>
-          <a:prstGeom prst="rect">
-            <a:avLst/>
-          </a:prstGeom>
-          <a:ln>
-            <a:solidFill>
-              <a:schemeClr val="accent2">
-                <a:lumMod val="75000"/>
-                <a:alpha val="50000"/>
-              </a:schemeClr>
-            </a:solidFill>
-            <a:prstDash val="sysDash"/>
-          </a:ln>
-        </p:spPr>
-        <p:style>
-          <a:lnRef idx="2">
-            <a:schemeClr val="dk1"/>
-          </a:lnRef>
-          <a:fillRef idx="1">
-            <a:schemeClr val="lt1"/>
-          </a:fillRef>
-          <a:effectRef idx="0">
-            <a:schemeClr val="dk1"/>
-          </a:effectRef>
-          <a:fontRef idx="minor">
-            <a:schemeClr val="dk1"/>
-          </a:fontRef>
-        </p:style>
-        <p:txBody>
-          <a:bodyPr rtlCol="0" anchor="ctr"/>
-          <a:lstStyle/>
-          <a:p>
-            <a:pPr algn="ctr"/>
-            <a:r>
-              <a:rPr lang="en-US" altLang="zh-CN" sz="800">
-                <a:ln w="0"/>
-                <a:solidFill>
-                  <a:schemeClr val="tx1"/>
-                </a:solidFill>
-                <a:effectLst>
-                  <a:outerShdw blurRad="38100" dist="19050" dir="2700000" algn="tl" rotWithShape="0">
-                    <a:schemeClr val="dk1">
-                      <a:alpha val="40000"/>
-                    </a:schemeClr>
-                  </a:outerShdw>
-                </a:effectLst>
-              </a:rPr>
-              <a:t>attack</a:t>
-            </a:r>
-            <a:endParaRPr lang="en-US" sz="800">
-              <a:ln w="0"/>
-              <a:solidFill>
-                <a:schemeClr val="tx1"/>
-              </a:solidFill>
-              <a:effectLst>
-                <a:outerShdw blurRad="38100" dist="19050" dir="2700000" algn="tl" rotWithShape="0">
-                  <a:schemeClr val="dk1">
-                    <a:alpha val="40000"/>
-                  </a:schemeClr>
-                </a:outerShdw>
-              </a:effectLst>
-            </a:endParaRPr>
-          </a:p>
-        </p:txBody>
-      </p:sp>
-      <p:sp>
-        <p:nvSpPr>
-          <p:cNvPr id="69" name="Rectangle 68">
-            <a:extLst>
-              <a:ext uri="{FF2B5EF4-FFF2-40B4-BE49-F238E27FC236}">
-                <a16:creationId xmlns:a16="http://schemas.microsoft.com/office/drawing/2014/main" id="{29B6B052-7ABF-86FB-50DC-081D1374EB08}"/>
-              </a:ext>
-            </a:extLst>
-          </p:cNvPr>
-          <p:cNvSpPr/>
-          <p:nvPr/>
-        </p:nvSpPr>
-        <p:spPr>
-          <a:xfrm>
-            <a:off x="2573926" y="1884016"/>
-            <a:ext cx="517350" cy="132612"/>
-          </a:xfrm>
-          <a:prstGeom prst="rect">
-            <a:avLst/>
-          </a:prstGeom>
-          <a:ln>
-            <a:solidFill>
-              <a:schemeClr val="accent2">
-                <a:lumMod val="75000"/>
-                <a:alpha val="50000"/>
-              </a:schemeClr>
-            </a:solidFill>
-            <a:prstDash val="sysDash"/>
-          </a:ln>
-        </p:spPr>
-        <p:style>
-          <a:lnRef idx="2">
-            <a:schemeClr val="dk1"/>
-          </a:lnRef>
-          <a:fillRef idx="1">
-            <a:schemeClr val="lt1"/>
-          </a:fillRef>
-          <a:effectRef idx="0">
-            <a:schemeClr val="dk1"/>
-          </a:effectRef>
-          <a:fontRef idx="minor">
-            <a:schemeClr val="dk1"/>
-          </a:fontRef>
-        </p:style>
-        <p:txBody>
-          <a:bodyPr rtlCol="0" anchor="ctr"/>
-          <a:lstStyle/>
-          <a:p>
-            <a:pPr algn="ctr"/>
-            <a:r>
-              <a:rPr lang="en-US" altLang="zh-CN" sz="800">
-                <a:ln w="0"/>
-                <a:solidFill>
-                  <a:schemeClr val="tx1"/>
-                </a:solidFill>
-                <a:effectLst>
-                  <a:outerShdw blurRad="38100" dist="19050" dir="2700000" algn="tl" rotWithShape="0">
-                    <a:schemeClr val="dk1">
-                      <a:alpha val="40000"/>
-                    </a:schemeClr>
-                  </a:outerShdw>
-                </a:effectLst>
-              </a:rPr>
-              <a:t>attack</a:t>
-            </a:r>
-            <a:endParaRPr lang="en-US" sz="800">
-              <a:ln w="0"/>
-              <a:solidFill>
-                <a:schemeClr val="tx1"/>
-              </a:solidFill>
-              <a:effectLst>
-                <a:outerShdw blurRad="38100" dist="19050" dir="2700000" algn="tl" rotWithShape="0">
-                  <a:schemeClr val="dk1">
-                    <a:alpha val="40000"/>
-                  </a:schemeClr>
-                </a:outerShdw>
-              </a:effectLst>
-            </a:endParaRPr>
-          </a:p>
-        </p:txBody>
-      </p:sp>
-      <p:sp>
-        <p:nvSpPr>
-          <p:cNvPr id="70" name="Rectangle 69">
-            <a:extLst>
-              <a:ext uri="{FF2B5EF4-FFF2-40B4-BE49-F238E27FC236}">
-                <a16:creationId xmlns:a16="http://schemas.microsoft.com/office/drawing/2014/main" id="{CF703202-FE4F-CA62-0EF6-FF8049605C7A}"/>
-              </a:ext>
-            </a:extLst>
-          </p:cNvPr>
-          <p:cNvSpPr/>
-          <p:nvPr/>
-        </p:nvSpPr>
-        <p:spPr>
-          <a:xfrm>
-            <a:off x="2506252" y="1972097"/>
-            <a:ext cx="517350" cy="132612"/>
-          </a:xfrm>
-          <a:prstGeom prst="rect">
-            <a:avLst/>
-          </a:prstGeom>
-          <a:ln>
-            <a:solidFill>
-              <a:schemeClr val="accent2">
-                <a:lumMod val="75000"/>
-                <a:alpha val="50000"/>
-              </a:schemeClr>
-            </a:solidFill>
-            <a:prstDash val="sysDash"/>
-          </a:ln>
-        </p:spPr>
-        <p:style>
-          <a:lnRef idx="2">
-            <a:schemeClr val="dk1"/>
-          </a:lnRef>
-          <a:fillRef idx="1">
-            <a:schemeClr val="lt1"/>
-          </a:fillRef>
-          <a:effectRef idx="0">
-            <a:schemeClr val="dk1"/>
-          </a:effectRef>
-          <a:fontRef idx="minor">
-            <a:schemeClr val="dk1"/>
-          </a:fontRef>
-        </p:style>
-        <p:txBody>
-          <a:bodyPr rtlCol="0" anchor="ctr"/>
-          <a:lstStyle/>
-          <a:p>
-            <a:pPr algn="ctr"/>
-            <a:r>
-              <a:rPr lang="en-US" altLang="zh-CN" sz="800">
-                <a:ln w="0"/>
-                <a:solidFill>
-                  <a:schemeClr val="tx1"/>
-                </a:solidFill>
-                <a:effectLst>
-                  <a:outerShdw blurRad="38100" dist="19050" dir="2700000" algn="tl" rotWithShape="0">
-                    <a:schemeClr val="dk1">
-                      <a:alpha val="40000"/>
-                    </a:schemeClr>
-                  </a:outerShdw>
-                </a:effectLst>
-              </a:rPr>
-              <a:t>attack</a:t>
-            </a:r>
-            <a:endParaRPr lang="en-US" sz="800">
-              <a:ln w="0"/>
-              <a:solidFill>
-                <a:schemeClr val="tx1"/>
-              </a:solidFill>
-              <a:effectLst>
-                <a:outerShdw blurRad="38100" dist="19050" dir="2700000" algn="tl" rotWithShape="0">
-                  <a:schemeClr val="dk1">
-                    <a:alpha val="40000"/>
-                  </a:schemeClr>
-                </a:outerShdw>
-              </a:effectLst>
-            </a:endParaRPr>
-          </a:p>
-        </p:txBody>
-      </p:sp>
-      <p:sp>
-        <p:nvSpPr>
-          <p:cNvPr id="71" name="Rectangle 70">
-            <a:extLst>
-              <a:ext uri="{FF2B5EF4-FFF2-40B4-BE49-F238E27FC236}">
-                <a16:creationId xmlns:a16="http://schemas.microsoft.com/office/drawing/2014/main" id="{BB23A304-3133-FFFC-BA77-35B0AB9925F7}"/>
-              </a:ext>
-            </a:extLst>
-          </p:cNvPr>
-          <p:cNvSpPr/>
-          <p:nvPr/>
-        </p:nvSpPr>
-        <p:spPr>
-          <a:xfrm>
-            <a:off x="2764927" y="1740989"/>
-            <a:ext cx="517350" cy="132612"/>
-          </a:xfrm>
-          <a:prstGeom prst="rect">
-            <a:avLst/>
-          </a:prstGeom>
-          <a:ln>
-            <a:solidFill>
-              <a:schemeClr val="accent3">
-                <a:lumMod val="75000"/>
-                <a:alpha val="50000"/>
-              </a:schemeClr>
-            </a:solidFill>
-            <a:prstDash val="sysDash"/>
-          </a:ln>
-        </p:spPr>
-        <p:style>
-          <a:lnRef idx="2">
-            <a:schemeClr val="dk1"/>
-          </a:lnRef>
-          <a:fillRef idx="1">
-            <a:schemeClr val="lt1"/>
-          </a:fillRef>
-          <a:effectRef idx="0">
-            <a:schemeClr val="dk1"/>
-          </a:effectRef>
-          <a:fontRef idx="minor">
-            <a:schemeClr val="dk1"/>
-          </a:fontRef>
-        </p:style>
-        <p:txBody>
-          <a:bodyPr rtlCol="0" anchor="ctr"/>
-          <a:lstStyle/>
-          <a:p>
-            <a:pPr algn="ctr"/>
-            <a:r>
-              <a:rPr lang="en-US" altLang="zh-CN" sz="800">
-                <a:ln w="0"/>
-                <a:solidFill>
-                  <a:schemeClr val="tx1"/>
-                </a:solidFill>
-                <a:effectLst>
-                  <a:outerShdw blurRad="38100" dist="19050" dir="2700000" algn="tl" rotWithShape="0">
-                    <a:schemeClr val="dk1">
-                      <a:alpha val="40000"/>
-                    </a:schemeClr>
-                  </a:outerShdw>
-                </a:effectLst>
-              </a:rPr>
-              <a:t>normal</a:t>
-            </a:r>
-            <a:endParaRPr lang="en-US" sz="800">
-              <a:ln w="0"/>
-              <a:solidFill>
-                <a:schemeClr val="tx1"/>
-              </a:solidFill>
-              <a:effectLst>
-                <a:outerShdw blurRad="38100" dist="19050" dir="2700000" algn="tl" rotWithShape="0">
-                  <a:schemeClr val="dk1">
-                    <a:alpha val="40000"/>
-                  </a:schemeClr>
-                </a:outerShdw>
-              </a:effectLst>
-            </a:endParaRPr>
-          </a:p>
-        </p:txBody>
-      </p:sp>
-      <p:sp>
-        <p:nvSpPr>
-          <p:cNvPr id="72" name="TextBox 71">
-            <a:extLst>
-              <a:ext uri="{FF2B5EF4-FFF2-40B4-BE49-F238E27FC236}">
-                <a16:creationId xmlns:a16="http://schemas.microsoft.com/office/drawing/2014/main" id="{E4E5F51E-54AE-A4DA-44E3-3B28801864C1}"/>
-              </a:ext>
-            </a:extLst>
-          </p:cNvPr>
-          <p:cNvSpPr txBox="1"/>
-          <p:nvPr/>
-        </p:nvSpPr>
-        <p:spPr>
-          <a:xfrm>
-            <a:off x="2641600" y="2868438"/>
-            <a:ext cx="652698" cy="246221"/>
-          </a:xfrm>
-          <a:prstGeom prst="rect">
-            <a:avLst/>
-          </a:prstGeom>
-          <a:noFill/>
-        </p:spPr>
-        <p:txBody>
-          <a:bodyPr wrap="square" rtlCol="0">
-            <a:spAutoFit/>
-          </a:bodyPr>
-          <a:lstStyle/>
-          <a:p>
-            <a:r>
-              <a:rPr lang="en-US" sz="1000"/>
-              <a:t>Test</a:t>
-            </a:r>
-          </a:p>
-        </p:txBody>
-      </p:sp>
-      <p:sp>
-        <p:nvSpPr>
-          <p:cNvPr id="73" name="TextBox 72">
-            <a:extLst>
-              <a:ext uri="{FF2B5EF4-FFF2-40B4-BE49-F238E27FC236}">
-                <a16:creationId xmlns:a16="http://schemas.microsoft.com/office/drawing/2014/main" id="{58C31ACD-ACA6-096C-05E0-6A8CDCEDE838}"/>
-              </a:ext>
-            </a:extLst>
-          </p:cNvPr>
-          <p:cNvSpPr txBox="1"/>
-          <p:nvPr/>
-        </p:nvSpPr>
-        <p:spPr>
-          <a:xfrm>
-            <a:off x="2621514" y="2244926"/>
-            <a:ext cx="652698" cy="246221"/>
-          </a:xfrm>
-          <a:prstGeom prst="rect">
-            <a:avLst/>
-          </a:prstGeom>
-          <a:noFill/>
-        </p:spPr>
-        <p:txBody>
-          <a:bodyPr wrap="square" rtlCol="0">
-            <a:spAutoFit/>
-          </a:bodyPr>
-          <a:lstStyle/>
-          <a:p>
-            <a:r>
-              <a:rPr lang="en-US" sz="1000"/>
-              <a:t>Train</a:t>
-            </a:r>
-          </a:p>
-        </p:txBody>
-      </p:sp>
-      <p:sp>
-        <p:nvSpPr>
-          <p:cNvPr id="74" name="TextBox 73">
-            <a:extLst>
-              <a:ext uri="{FF2B5EF4-FFF2-40B4-BE49-F238E27FC236}">
-                <a16:creationId xmlns:a16="http://schemas.microsoft.com/office/drawing/2014/main" id="{85A42BEC-E9EF-9C69-762A-A4EE23D7D400}"/>
-              </a:ext>
-            </a:extLst>
-          </p:cNvPr>
-          <p:cNvSpPr txBox="1"/>
-          <p:nvPr/>
-        </p:nvSpPr>
-        <p:spPr>
-          <a:xfrm>
-            <a:off x="8055429" y="3976914"/>
-            <a:ext cx="957942" cy="523220"/>
-          </a:xfrm>
-          <a:prstGeom prst="rect">
-            <a:avLst/>
-          </a:prstGeom>
-          <a:noFill/>
-        </p:spPr>
-        <p:txBody>
-          <a:bodyPr wrap="square" rtlCol="0">
-            <a:spAutoFit/>
-          </a:bodyPr>
-          <a:lstStyle/>
-          <a:p>
-            <a:r>
-              <a:rPr lang="en-US" sz="1400"/>
-              <a:t>Network</a:t>
-            </a:r>
-            <a:r>
-              <a:rPr lang="zh-CN" altLang="en-US" sz="1400"/>
-              <a:t> </a:t>
-            </a:r>
-            <a:r>
-              <a:rPr lang="en-US" altLang="zh-CN" sz="1400"/>
-              <a:t>traffic</a:t>
-            </a:r>
-            <a:endParaRPr lang="en-US" sz="1400"/>
-          </a:p>
-        </p:txBody>
-      </p:sp>
-      <p:cxnSp>
-        <p:nvCxnSpPr>
-          <p:cNvPr id="76" name="Straight Arrow Connector 75">
-            <a:extLst>
-              <a:ext uri="{FF2B5EF4-FFF2-40B4-BE49-F238E27FC236}">
-                <a16:creationId xmlns:a16="http://schemas.microsoft.com/office/drawing/2014/main" id="{10389F9C-4598-137B-4745-F71A0E0830AC}"/>
-              </a:ext>
-            </a:extLst>
-          </p:cNvPr>
-          <p:cNvCxnSpPr>
-            <a:cxnSpLocks/>
-            <a:stCxn id="51" idx="3"/>
-            <a:endCxn id="61" idx="2"/>
-          </p:cNvCxnSpPr>
-          <p:nvPr/>
-        </p:nvCxnSpPr>
-        <p:spPr>
-          <a:xfrm>
-            <a:off x="4874188" y="2619678"/>
-            <a:ext cx="725436" cy="2056"/>
-          </a:xfrm>
-          <a:prstGeom prst="straightConnector1">
-            <a:avLst/>
-          </a:prstGeom>
-          <a:ln>
-            <a:tailEnd type="triangle"/>
-          </a:ln>
-        </p:spPr>
-        <p:style>
-          <a:lnRef idx="2">
-            <a:schemeClr val="accent1"/>
-          </a:lnRef>
-          <a:fillRef idx="0">
-            <a:schemeClr val="accent1"/>
-          </a:fillRef>
-          <a:effectRef idx="1">
-            <a:schemeClr val="accent1"/>
-          </a:effectRef>
-          <a:fontRef idx="minor">
-            <a:schemeClr val="tx1"/>
-          </a:fontRef>
-        </p:style>
-      </p:cxnSp>
-      <p:sp>
-        <p:nvSpPr>
-          <p:cNvPr id="77" name="Right Arrow 76">
-            <a:extLst>
-              <a:ext uri="{FF2B5EF4-FFF2-40B4-BE49-F238E27FC236}">
-                <a16:creationId xmlns:a16="http://schemas.microsoft.com/office/drawing/2014/main" id="{BAF0A316-76DD-478D-567B-A5050D8F6F37}"/>
-              </a:ext>
-            </a:extLst>
-          </p:cNvPr>
-          <p:cNvSpPr/>
-          <p:nvPr/>
-        </p:nvSpPr>
-        <p:spPr>
-          <a:xfrm>
-            <a:off x="7284231" y="5402806"/>
-            <a:ext cx="796821" cy="214793"/>
-          </a:xfrm>
-          <a:prstGeom prst="rightArrow">
-            <a:avLst/>
-          </a:prstGeom>
-          <a:ln>
-            <a:solidFill>
-              <a:schemeClr val="tx2">
-                <a:lumMod val="75000"/>
-                <a:alpha val="50000"/>
-              </a:schemeClr>
-            </a:solidFill>
-            <a:prstDash val="sysDash"/>
-          </a:ln>
-        </p:spPr>
-        <p:style>
-          <a:lnRef idx="2">
-            <a:schemeClr val="dk1"/>
-          </a:lnRef>
-          <a:fillRef idx="1">
-            <a:schemeClr val="lt1"/>
-          </a:fillRef>
-          <a:effectRef idx="0">
-            <a:schemeClr val="dk1"/>
-          </a:effectRef>
-          <a:fontRef idx="minor">
-            <a:schemeClr val="dk1"/>
-          </a:fontRef>
-        </p:style>
-        <p:txBody>
-          <a:bodyPr rtlCol="0" anchor="ctr"/>
-          <a:lstStyle/>
-          <a:p>
-            <a:pPr algn="ctr"/>
-            <a:endParaRPr lang="en-US"/>
-          </a:p>
-        </p:txBody>
-      </p:sp>
-      <p:sp>
-        <p:nvSpPr>
-          <p:cNvPr id="78" name="TextBox 77">
-            <a:extLst>
-              <a:ext uri="{FF2B5EF4-FFF2-40B4-BE49-F238E27FC236}">
-                <a16:creationId xmlns:a16="http://schemas.microsoft.com/office/drawing/2014/main" id="{CFCC8544-DE2C-F5C4-BC42-B00DD8CE1FD7}"/>
-              </a:ext>
-            </a:extLst>
-          </p:cNvPr>
-          <p:cNvSpPr txBox="1"/>
-          <p:nvPr/>
-        </p:nvSpPr>
-        <p:spPr>
-          <a:xfrm>
-            <a:off x="8055429" y="5130146"/>
-            <a:ext cx="1146629" cy="738664"/>
-          </a:xfrm>
-          <a:prstGeom prst="rect">
-            <a:avLst/>
-          </a:prstGeom>
-          <a:noFill/>
-        </p:spPr>
-        <p:txBody>
-          <a:bodyPr wrap="square" rtlCol="0">
-            <a:spAutoFit/>
-          </a:bodyPr>
-          <a:lstStyle/>
-          <a:p>
-            <a:r>
-              <a:rPr lang="en-US" sz="1400"/>
-              <a:t>CPU</a:t>
-            </a:r>
-          </a:p>
-          <a:p>
-            <a:endParaRPr lang="en-US" sz="1400"/>
-          </a:p>
-          <a:p>
-            <a:r>
-              <a:rPr lang="en-US" sz="1400"/>
-              <a:t>Memory</a:t>
-            </a:r>
-          </a:p>
-        </p:txBody>
-      </p:sp>
-      <p:sp>
-        <p:nvSpPr>
-          <p:cNvPr id="79" name="TextBox 78">
-            <a:extLst>
-              <a:ext uri="{FF2B5EF4-FFF2-40B4-BE49-F238E27FC236}">
-                <a16:creationId xmlns:a16="http://schemas.microsoft.com/office/drawing/2014/main" id="{40FEA40F-045D-3818-232F-1989D72E2D17}"/>
-              </a:ext>
-            </a:extLst>
-          </p:cNvPr>
-          <p:cNvSpPr txBox="1"/>
-          <p:nvPr/>
-        </p:nvSpPr>
-        <p:spPr>
-          <a:xfrm>
-            <a:off x="7997371" y="2262349"/>
-            <a:ext cx="957942" cy="738664"/>
-          </a:xfrm>
-          <a:prstGeom prst="rect">
-            <a:avLst/>
-          </a:prstGeom>
-          <a:noFill/>
-        </p:spPr>
-        <p:txBody>
-          <a:bodyPr wrap="square" rtlCol="0">
-            <a:spAutoFit/>
-          </a:bodyPr>
-          <a:lstStyle/>
-          <a:p>
-            <a:r>
-              <a:rPr lang="en-GB" sz="1400"/>
-              <a:t>Accuracy</a:t>
-            </a:r>
-          </a:p>
-          <a:p>
-            <a:endParaRPr lang="en-GB" sz="1400"/>
-          </a:p>
-          <a:p>
-            <a:r>
-              <a:rPr lang="en-GB" sz="1400"/>
-              <a:t>F</a:t>
-            </a:r>
-            <a:r>
-              <a:rPr lang="en-US" altLang="zh-CN" sz="1400"/>
-              <a:t>1</a:t>
-            </a:r>
-            <a:r>
-              <a:rPr lang="zh-CN" altLang="en-US" sz="1400"/>
-              <a:t> </a:t>
-            </a:r>
-            <a:r>
-              <a:rPr lang="en-US" altLang="zh-CN" sz="1400"/>
-              <a:t>score</a:t>
-            </a:r>
-            <a:endParaRPr lang="en-US" sz="1400"/>
-          </a:p>
-        </p:txBody>
-      </p:sp>
-      <p:pic>
-        <p:nvPicPr>
-          <p:cNvPr id="80" name="Picture 79">
-            <a:extLst>
-              <a:ext uri="{FF2B5EF4-FFF2-40B4-BE49-F238E27FC236}">
-                <a16:creationId xmlns:a16="http://schemas.microsoft.com/office/drawing/2014/main" id="{6488728A-F82B-5347-ACAE-568692FF907D}"/>
-              </a:ext>
-            </a:extLst>
-          </p:cNvPr>
-          <p:cNvPicPr>
-            <a:picLocks noChangeAspect="1"/>
-          </p:cNvPicPr>
-          <p:nvPr/>
-        </p:nvPicPr>
-        <p:blipFill>
-          <a:blip r:embed="rId4"/>
-          <a:stretch>
-            <a:fillRect/>
-          </a:stretch>
-        </p:blipFill>
-        <p:spPr>
-          <a:xfrm>
-            <a:off x="3336848" y="2970214"/>
-            <a:ext cx="1501822" cy="351825"/>
-          </a:xfrm>
-          <a:prstGeom prst="rect">
-            <a:avLst/>
-          </a:prstGeom>
-        </p:spPr>
-      </p:pic>
-      <p:pic>
-        <p:nvPicPr>
-          <p:cNvPr id="81" name="Picture 80">
-            <a:extLst>
-              <a:ext uri="{FF2B5EF4-FFF2-40B4-BE49-F238E27FC236}">
-                <a16:creationId xmlns:a16="http://schemas.microsoft.com/office/drawing/2014/main" id="{C0550D18-DE3C-F599-E431-5240A0F0D7A9}"/>
-              </a:ext>
-            </a:extLst>
-          </p:cNvPr>
-          <p:cNvPicPr>
-            <a:picLocks noChangeAspect="1"/>
-          </p:cNvPicPr>
-          <p:nvPr/>
-        </p:nvPicPr>
-        <p:blipFill>
-          <a:blip r:embed="rId5"/>
-          <a:stretch>
-            <a:fillRect/>
-          </a:stretch>
-        </p:blipFill>
-        <p:spPr>
-          <a:xfrm>
-            <a:off x="3536028" y="2251668"/>
-            <a:ext cx="1060982" cy="519720"/>
-          </a:xfrm>
-          <a:prstGeom prst="rect">
-            <a:avLst/>
-          </a:prstGeom>
-        </p:spPr>
-      </p:pic>
-      <p:sp>
-        <p:nvSpPr>
-          <p:cNvPr id="4" name="Rectangle 3">
-            <a:extLst>
-              <a:ext uri="{FF2B5EF4-FFF2-40B4-BE49-F238E27FC236}">
-                <a16:creationId xmlns:a16="http://schemas.microsoft.com/office/drawing/2014/main" id="{7C9932A4-32D4-F522-A763-3EB6F836FB90}"/>
-              </a:ext>
-            </a:extLst>
-          </p:cNvPr>
-          <p:cNvSpPr/>
-          <p:nvPr/>
-        </p:nvSpPr>
-        <p:spPr>
-          <a:xfrm>
-            <a:off x="355252" y="1270466"/>
-            <a:ext cx="7140659" cy="2357664"/>
-          </a:xfrm>
-          <a:prstGeom prst="rect">
-            <a:avLst/>
-          </a:prstGeom>
-          <a:noFill/>
-          <a:ln>
-            <a:prstDash val="dash"/>
-          </a:ln>
-        </p:spPr>
-        <p:style>
-          <a:lnRef idx="1">
-            <a:schemeClr val="accent1"/>
-          </a:lnRef>
-          <a:fillRef idx="3">
-            <a:schemeClr val="accent1"/>
-          </a:fillRef>
-          <a:effectRef idx="2">
-            <a:schemeClr val="accent1"/>
-          </a:effectRef>
-          <a:fontRef idx="minor">
-            <a:schemeClr val="lt1"/>
-          </a:fontRef>
-        </p:style>
-        <p:txBody>
-          <a:bodyPr rtlCol="0" anchor="ctr"/>
-          <a:lstStyle/>
-          <a:p>
-            <a:pPr algn="ctr"/>
-            <a:endParaRPr lang="en-US"/>
-          </a:p>
-        </p:txBody>
-      </p:sp>
-      <p:sp>
-        <p:nvSpPr>
-          <p:cNvPr id="5" name="TextBox 4">
-            <a:extLst>
-              <a:ext uri="{FF2B5EF4-FFF2-40B4-BE49-F238E27FC236}">
-                <a16:creationId xmlns:a16="http://schemas.microsoft.com/office/drawing/2014/main" id="{1770629D-73C8-A0CD-A17F-762F9D35451E}"/>
-              </a:ext>
-            </a:extLst>
-          </p:cNvPr>
-          <p:cNvSpPr txBox="1"/>
-          <p:nvPr/>
-        </p:nvSpPr>
-        <p:spPr>
-          <a:xfrm>
-            <a:off x="449758" y="4364211"/>
-            <a:ext cx="2124168" cy="369332"/>
-          </a:xfrm>
-          <a:prstGeom prst="rect">
-            <a:avLst/>
-          </a:prstGeom>
-          <a:noFill/>
-        </p:spPr>
-        <p:txBody>
-          <a:bodyPr wrap="square" rtlCol="0">
-            <a:spAutoFit/>
-          </a:bodyPr>
-          <a:lstStyle/>
-          <a:p>
-            <a:r>
-              <a:rPr lang="en-US"/>
-              <a:t>Edge</a:t>
-            </a:r>
-            <a:r>
-              <a:rPr lang="zh-CN" altLang="en-US"/>
-              <a:t> </a:t>
-            </a:r>
-            <a:r>
-              <a:rPr lang="en-GB"/>
-              <a:t>Simulation</a:t>
-            </a:r>
-            <a:endParaRPr lang="en-US"/>
-          </a:p>
-        </p:txBody>
-      </p:sp>
-      <p:sp>
-        <p:nvSpPr>
-          <p:cNvPr id="7" name="TextBox 6">
-            <a:extLst>
-              <a:ext uri="{FF2B5EF4-FFF2-40B4-BE49-F238E27FC236}">
-                <a16:creationId xmlns:a16="http://schemas.microsoft.com/office/drawing/2014/main" id="{854755DE-752C-BCAE-3133-763CFEF59332}"/>
-              </a:ext>
-            </a:extLst>
-          </p:cNvPr>
-          <p:cNvSpPr txBox="1"/>
-          <p:nvPr/>
-        </p:nvSpPr>
-        <p:spPr>
-          <a:xfrm>
-            <a:off x="355252" y="1272445"/>
-            <a:ext cx="2124168" cy="369332"/>
-          </a:xfrm>
-          <a:prstGeom prst="rect">
-            <a:avLst/>
-          </a:prstGeom>
-          <a:noFill/>
-        </p:spPr>
-        <p:txBody>
-          <a:bodyPr wrap="square" rtlCol="0">
-            <a:spAutoFit/>
-          </a:bodyPr>
-          <a:lstStyle/>
-          <a:p>
-            <a:r>
-              <a:rPr lang="en-GB"/>
-              <a:t>Cloud Simulation</a:t>
-            </a:r>
-          </a:p>
-        </p:txBody>
-      </p:sp>
-      <p:pic>
-        <p:nvPicPr>
-          <p:cNvPr id="10" name="Picture 9">
-            <a:extLst>
-              <a:ext uri="{FF2B5EF4-FFF2-40B4-BE49-F238E27FC236}">
-                <a16:creationId xmlns:a16="http://schemas.microsoft.com/office/drawing/2014/main" id="{96811831-89C9-59F0-2294-9692BCB60E51}"/>
-              </a:ext>
-            </a:extLst>
-          </p:cNvPr>
-          <p:cNvPicPr>
-            <a:picLocks noChangeAspect="1"/>
-          </p:cNvPicPr>
-          <p:nvPr/>
-        </p:nvPicPr>
-        <p:blipFill>
-          <a:blip r:embed="rId6"/>
-          <a:stretch>
-            <a:fillRect/>
-          </a:stretch>
-        </p:blipFill>
-        <p:spPr>
-          <a:xfrm>
-            <a:off x="885385" y="2220686"/>
-            <a:ext cx="1290317" cy="398992"/>
-          </a:xfrm>
-          <a:prstGeom prst="rect">
-            <a:avLst/>
-          </a:prstGeom>
-        </p:spPr>
-      </p:pic>
-      <p:sp>
-        <p:nvSpPr>
-          <p:cNvPr id="13" name="Down Arrow 12">
-            <a:extLst>
-              <a:ext uri="{FF2B5EF4-FFF2-40B4-BE49-F238E27FC236}">
-                <a16:creationId xmlns:a16="http://schemas.microsoft.com/office/drawing/2014/main" id="{5930CA17-7B55-A33A-0F68-6DBBD0F0BD7E}"/>
-              </a:ext>
-            </a:extLst>
-          </p:cNvPr>
-          <p:cNvSpPr/>
-          <p:nvPr/>
-        </p:nvSpPr>
-        <p:spPr>
-          <a:xfrm>
-            <a:off x="1435100" y="2619678"/>
-            <a:ext cx="212989" cy="248760"/>
-          </a:xfrm>
-          <a:prstGeom prst="downArrow">
-            <a:avLst/>
-          </a:prstGeom>
-          <a:gradFill flip="none" rotWithShape="1">
-            <a:gsLst>
-              <a:gs pos="0">
-                <a:schemeClr val="accent5">
-                  <a:lumMod val="5000"/>
-                  <a:lumOff val="95000"/>
-                </a:schemeClr>
-              </a:gs>
-              <a:gs pos="74000">
-                <a:schemeClr val="accent5">
-                  <a:lumMod val="45000"/>
-                  <a:lumOff val="55000"/>
-                </a:schemeClr>
-              </a:gs>
-              <a:gs pos="83000">
-                <a:schemeClr val="accent5">
-                  <a:lumMod val="45000"/>
-                  <a:lumOff val="55000"/>
-                </a:schemeClr>
-              </a:gs>
-              <a:gs pos="100000">
-                <a:schemeClr val="accent5">
-                  <a:lumMod val="30000"/>
-                  <a:lumOff val="70000"/>
-                </a:schemeClr>
-              </a:gs>
-            </a:gsLst>
-            <a:lin ang="5400000" scaled="1"/>
-            <a:tileRect/>
-          </a:gradFill>
-        </p:spPr>
-        <p:style>
-          <a:lnRef idx="1">
-            <a:schemeClr val="accent1"/>
-          </a:lnRef>
-          <a:fillRef idx="3">
-            <a:schemeClr val="accent1"/>
-          </a:fillRef>
-          <a:effectRef idx="2">
-            <a:schemeClr val="accent1"/>
-          </a:effectRef>
-          <a:fontRef idx="minor">
-            <a:schemeClr val="lt1"/>
-          </a:fontRef>
-        </p:style>
-        <p:txBody>
-          <a:bodyPr rtlCol="0" anchor="ctr"/>
-          <a:lstStyle/>
-          <a:p>
-            <a:pPr algn="ctr"/>
-            <a:endParaRPr lang="en-US"/>
-          </a:p>
-        </p:txBody>
-      </p:sp>
-      <p:sp>
-        <p:nvSpPr>
-          <p:cNvPr id="12" name="Rounded Rectangle 11">
-            <a:extLst>
-              <a:ext uri="{FF2B5EF4-FFF2-40B4-BE49-F238E27FC236}">
-                <a16:creationId xmlns:a16="http://schemas.microsoft.com/office/drawing/2014/main" id="{705DE116-2B12-7A1F-1998-18F0A82996FE}"/>
-              </a:ext>
-            </a:extLst>
-          </p:cNvPr>
-          <p:cNvSpPr/>
-          <p:nvPr/>
-        </p:nvSpPr>
-        <p:spPr>
-          <a:xfrm>
-            <a:off x="1714499" y="2946598"/>
-            <a:ext cx="461203" cy="349855"/>
-          </a:xfrm>
-          <a:prstGeom prst="roundRect">
-            <a:avLst>
-              <a:gd name="adj" fmla="val 0"/>
-            </a:avLst>
-          </a:prstGeom>
-          <a:solidFill>
-            <a:schemeClr val="accent6">
-              <a:lumMod val="60000"/>
-              <a:lumOff val="40000"/>
-            </a:schemeClr>
-          </a:solidFill>
-        </p:spPr>
-        <p:style>
-          <a:lnRef idx="1">
-            <a:schemeClr val="accent1"/>
-          </a:lnRef>
-          <a:fillRef idx="3">
-            <a:schemeClr val="accent1"/>
-          </a:fillRef>
-          <a:effectRef idx="2">
-            <a:schemeClr val="accent1"/>
-          </a:effectRef>
-          <a:fontRef idx="minor">
-            <a:schemeClr val="lt1"/>
-          </a:fontRef>
-        </p:style>
-        <p:txBody>
-          <a:bodyPr vert="horz" rtlCol="0" anchor="ctr"/>
-          <a:lstStyle/>
-          <a:p>
-            <a:pPr algn="ctr"/>
-            <a:r>
-              <a:rPr lang="en-US" sz="1200">
-                <a:solidFill>
-                  <a:schemeClr val="bg1"/>
-                </a:solidFill>
-              </a:rPr>
-              <a:t>Test</a:t>
-            </a:r>
-          </a:p>
-        </p:txBody>
-      </p:sp>
-      <p:sp>
-        <p:nvSpPr>
-          <p:cNvPr id="14" name="Rectangle 13">
-            <a:extLst>
-              <a:ext uri="{FF2B5EF4-FFF2-40B4-BE49-F238E27FC236}">
-                <a16:creationId xmlns:a16="http://schemas.microsoft.com/office/drawing/2014/main" id="{0D87838E-0C28-3EFD-E282-AEC8F5C97DFF}"/>
-              </a:ext>
-            </a:extLst>
-          </p:cNvPr>
-          <p:cNvSpPr/>
-          <p:nvPr/>
-        </p:nvSpPr>
-        <p:spPr>
-          <a:xfrm>
-            <a:off x="885384" y="2948595"/>
-            <a:ext cx="829115" cy="345803"/>
-          </a:xfrm>
-          <a:prstGeom prst="rect">
-            <a:avLst/>
-          </a:prstGeom>
-          <a:solidFill>
-            <a:schemeClr val="tx2">
-              <a:lumMod val="40000"/>
-              <a:lumOff val="60000"/>
-            </a:schemeClr>
-          </a:solidFill>
-        </p:spPr>
-        <p:style>
-          <a:lnRef idx="1">
-            <a:schemeClr val="accent1"/>
-          </a:lnRef>
-          <a:fillRef idx="3">
-            <a:schemeClr val="accent1"/>
-          </a:fillRef>
-          <a:effectRef idx="2">
-            <a:schemeClr val="accent1"/>
-          </a:effectRef>
-          <a:fontRef idx="minor">
-            <a:schemeClr val="lt1"/>
-          </a:fontRef>
-        </p:style>
-        <p:txBody>
-          <a:bodyPr rtlCol="0" anchor="ctr"/>
-          <a:lstStyle/>
-          <a:p>
-            <a:pPr algn="ctr"/>
-            <a:r>
-              <a:rPr lang="en-US" sz="1400"/>
-              <a:t>Train</a:t>
-            </a:r>
-          </a:p>
-        </p:txBody>
-      </p:sp>
-      <p:grpSp>
-        <p:nvGrpSpPr>
-          <p:cNvPr id="116" name="Group 115">
-            <a:extLst>
-              <a:ext uri="{FF2B5EF4-FFF2-40B4-BE49-F238E27FC236}">
-                <a16:creationId xmlns:a16="http://schemas.microsoft.com/office/drawing/2014/main" id="{3DD13C83-1060-62D8-BA3C-30E3B2934AA8}"/>
+                <a16:creationId xmlns:a16="http://schemas.microsoft.com/office/drawing/2014/main" id="{803D12D4-E9E8-13D3-78A8-C517610997CF}"/>
               </a:ext>
             </a:extLst>
           </p:cNvPr>
@@ -46082,58 +43685,18 @@
         </p:nvGrpSpPr>
         <p:grpSpPr>
           <a:xfrm>
-            <a:off x="5468493" y="5268518"/>
-            <a:ext cx="1270409" cy="797135"/>
-            <a:chOff x="5468493" y="5268518"/>
-            <a:chExt cx="1270409" cy="797135"/>
+            <a:off x="355252" y="1131158"/>
+            <a:ext cx="8846806" cy="5748613"/>
+            <a:chOff x="355252" y="1131158"/>
+            <a:chExt cx="8846806" cy="5748613"/>
           </a:xfrm>
         </p:grpSpPr>
-        <p:cxnSp>
-          <p:nvCxnSpPr>
-            <p:cNvPr id="88" name="Straight Connector 87">
+        <p:sp>
+          <p:nvSpPr>
+            <p:cNvPr id="49" name="Rectangle 48">
               <a:extLst>
                 <a:ext uri="{FF2B5EF4-FFF2-40B4-BE49-F238E27FC236}">
-                  <a16:creationId xmlns:a16="http://schemas.microsoft.com/office/drawing/2014/main" id="{DCB826BE-F844-691B-358F-0C553F9A8DAC}"/>
-                </a:ext>
-              </a:extLst>
-            </p:cNvPr>
-            <p:cNvCxnSpPr>
-              <a:cxnSpLocks/>
-              <a:stCxn id="20" idx="0"/>
-              <a:endCxn id="21" idx="4"/>
-            </p:cNvCxnSpPr>
-            <p:nvPr/>
-          </p:nvCxnSpPr>
-          <p:spPr>
-            <a:xfrm flipV="1">
-              <a:off x="5787363" y="5476404"/>
-              <a:ext cx="829619" cy="111214"/>
-            </a:xfrm>
-            <a:prstGeom prst="line">
-              <a:avLst/>
-            </a:prstGeom>
-          </p:spPr>
-          <p:style>
-            <a:lnRef idx="2">
-              <a:schemeClr val="accent1"/>
-            </a:lnRef>
-            <a:fillRef idx="0">
-              <a:schemeClr val="accent1"/>
-            </a:fillRef>
-            <a:effectRef idx="1">
-              <a:schemeClr val="accent1"/>
-            </a:effectRef>
-            <a:fontRef idx="minor">
-              <a:schemeClr val="tx1"/>
-            </a:fontRef>
-          </p:style>
-        </p:cxnSp>
-        <p:sp>
-          <p:nvSpPr>
-            <p:cNvPr id="15" name="Oval 14">
-              <a:extLst>
-                <a:ext uri="{FF2B5EF4-FFF2-40B4-BE49-F238E27FC236}">
-                  <a16:creationId xmlns:a16="http://schemas.microsoft.com/office/drawing/2014/main" id="{A94C761C-48AB-DD60-DA19-85A886820E18}"/>
+                  <a16:creationId xmlns:a16="http://schemas.microsoft.com/office/drawing/2014/main" id="{4BDE2185-1D7C-2173-B6E9-4C02C06E3822}"/>
                 </a:ext>
               </a:extLst>
             </p:cNvPr>
@@ -46142,17 +43705,16 @@
           </p:nvSpPr>
           <p:spPr>
             <a:xfrm>
-              <a:off x="5468493" y="5268518"/>
-              <a:ext cx="243840" cy="200297"/>
+              <a:off x="762000" y="4669011"/>
+              <a:ext cx="7140659" cy="2210760"/>
             </a:xfrm>
-            <a:prstGeom prst="ellipse">
+            <a:prstGeom prst="rect">
               <a:avLst/>
             </a:prstGeom>
-            <a:solidFill>
-              <a:schemeClr val="bg1">
-                <a:lumMod val="50000"/>
-              </a:schemeClr>
-            </a:solidFill>
+            <a:noFill/>
+            <a:ln>
+              <a:prstDash val="dash"/>
+            </a:ln>
           </p:spPr>
           <p:style>
             <a:lnRef idx="1">
@@ -46179,10 +43741,10 @@
         </p:sp>
         <p:sp>
           <p:nvSpPr>
-            <p:cNvPr id="18" name="Oval 17">
+            <p:cNvPr id="48" name="Rectangle 47">
               <a:extLst>
                 <a:ext uri="{FF2B5EF4-FFF2-40B4-BE49-F238E27FC236}">
-                  <a16:creationId xmlns:a16="http://schemas.microsoft.com/office/drawing/2014/main" id="{A207669A-2F18-74DE-EF98-15D460676C8E}"/>
+                  <a16:creationId xmlns:a16="http://schemas.microsoft.com/office/drawing/2014/main" id="{DE24F43A-73ED-D53A-EC4F-D736A8CFBE80}"/>
                 </a:ext>
               </a:extLst>
             </p:cNvPr>
@@ -46191,17 +43753,18 @@
           </p:nvSpPr>
           <p:spPr>
             <a:xfrm>
-              <a:off x="5826106" y="5276107"/>
-              <a:ext cx="243840" cy="200297"/>
+              <a:off x="609600" y="4516611"/>
+              <a:ext cx="7140659" cy="2210760"/>
             </a:xfrm>
-            <a:prstGeom prst="ellipse">
+            <a:prstGeom prst="rect">
               <a:avLst/>
             </a:prstGeom>
             <a:solidFill>
-              <a:schemeClr val="bg1">
-                <a:lumMod val="50000"/>
-              </a:schemeClr>
+              <a:schemeClr val="bg1"/>
             </a:solidFill>
+            <a:ln>
+              <a:prstDash val="dash"/>
+            </a:ln>
           </p:spPr>
           <p:style>
             <a:lnRef idx="1">
@@ -46228,10 +43791,10 @@
         </p:sp>
         <p:sp>
           <p:nvSpPr>
-            <p:cNvPr id="19" name="Oval 18">
+            <p:cNvPr id="3" name="Rectangle 2">
               <a:extLst>
                 <a:ext uri="{FF2B5EF4-FFF2-40B4-BE49-F238E27FC236}">
-                  <a16:creationId xmlns:a16="http://schemas.microsoft.com/office/drawing/2014/main" id="{FA77EB64-8719-EF87-D29C-CA05EF81617A}"/>
+                  <a16:creationId xmlns:a16="http://schemas.microsoft.com/office/drawing/2014/main" id="{D8F36B1E-4421-62CA-E09E-DFAE03ECBDBB}"/>
                 </a:ext>
               </a:extLst>
             </p:cNvPr>
@@ -46240,17 +43803,18 @@
           </p:nvSpPr>
           <p:spPr>
             <a:xfrm>
-              <a:off x="6162510" y="5276905"/>
-              <a:ext cx="243840" cy="200297"/>
+              <a:off x="457200" y="4364211"/>
+              <a:ext cx="7140659" cy="2210760"/>
             </a:xfrm>
-            <a:prstGeom prst="ellipse">
+            <a:prstGeom prst="rect">
               <a:avLst/>
             </a:prstGeom>
             <a:solidFill>
-              <a:schemeClr val="bg1">
-                <a:lumMod val="50000"/>
-              </a:schemeClr>
+              <a:schemeClr val="bg1"/>
             </a:solidFill>
+            <a:ln>
+              <a:prstDash val="dash"/>
+            </a:ln>
           </p:spPr>
           <p:style>
             <a:lnRef idx="1">
@@ -46277,10 +43841,10 @@
         </p:sp>
         <p:sp>
           <p:nvSpPr>
-            <p:cNvPr id="20" name="Oval 19">
+            <p:cNvPr id="6" name="Can 5">
               <a:extLst>
                 <a:ext uri="{FF2B5EF4-FFF2-40B4-BE49-F238E27FC236}">
-                  <a16:creationId xmlns:a16="http://schemas.microsoft.com/office/drawing/2014/main" id="{81CD0A4C-F4B8-B425-C0FD-908F17355677}"/>
+                  <a16:creationId xmlns:a16="http://schemas.microsoft.com/office/drawing/2014/main" id="{951E455F-C561-6E58-CC8E-0C4FC5F238BF}"/>
                 </a:ext>
               </a:extLst>
             </p:cNvPr>
@@ -46289,7 +43853,325 @@
           </p:nvSpPr>
           <p:spPr>
             <a:xfrm>
-              <a:off x="5665443" y="5587618"/>
+              <a:off x="885385" y="5000423"/>
+              <a:ext cx="1018903" cy="1143000"/>
+            </a:xfrm>
+            <a:prstGeom prst="can">
+              <a:avLst/>
+            </a:prstGeom>
+            <a:solidFill>
+              <a:schemeClr val="tx2">
+                <a:lumMod val="40000"/>
+                <a:lumOff val="60000"/>
+              </a:schemeClr>
+            </a:solidFill>
+          </p:spPr>
+          <p:style>
+            <a:lnRef idx="1">
+              <a:schemeClr val="accent1"/>
+            </a:lnRef>
+            <a:fillRef idx="3">
+              <a:schemeClr val="accent1"/>
+            </a:fillRef>
+            <a:effectRef idx="2">
+              <a:schemeClr val="accent1"/>
+            </a:effectRef>
+            <a:fontRef idx="minor">
+              <a:schemeClr val="lt1"/>
+            </a:fontRef>
+          </p:style>
+          <p:txBody>
+            <a:bodyPr rtlCol="0" anchor="ctr"/>
+            <a:lstStyle/>
+            <a:p>
+              <a:pPr algn="ctr"/>
+              <a:r>
+                <a:rPr lang="en-US" err="1"/>
+                <a:t>DataSet</a:t>
+              </a:r>
+              <a:endParaRPr lang="en-US"/>
+            </a:p>
+          </p:txBody>
+        </p:sp>
+        <p:cxnSp>
+          <p:nvCxnSpPr>
+            <p:cNvPr id="8" name="Straight Arrow Connector 7">
+              <a:extLst>
+                <a:ext uri="{FF2B5EF4-FFF2-40B4-BE49-F238E27FC236}">
+                  <a16:creationId xmlns:a16="http://schemas.microsoft.com/office/drawing/2014/main" id="{FB96A4DD-1145-4C3E-1DBD-CC982FF21C79}"/>
+                </a:ext>
+              </a:extLst>
+            </p:cNvPr>
+            <p:cNvCxnSpPr>
+              <a:cxnSpLocks/>
+              <a:endCxn id="31" idx="1"/>
+            </p:cNvCxnSpPr>
+            <p:nvPr/>
+          </p:nvCxnSpPr>
+          <p:spPr>
+            <a:xfrm>
+              <a:off x="1803929" y="5586074"/>
+              <a:ext cx="881742" cy="1460"/>
+            </a:xfrm>
+            <a:prstGeom prst="straightConnector1">
+              <a:avLst/>
+            </a:prstGeom>
+            <a:ln>
+              <a:tailEnd type="triangle"/>
+            </a:ln>
+          </p:spPr>
+          <p:style>
+            <a:lnRef idx="2">
+              <a:schemeClr val="accent1"/>
+            </a:lnRef>
+            <a:fillRef idx="0">
+              <a:schemeClr val="accent1"/>
+            </a:fillRef>
+            <a:effectRef idx="1">
+              <a:schemeClr val="accent1"/>
+            </a:effectRef>
+            <a:fontRef idx="minor">
+              <a:schemeClr val="tx1"/>
+            </a:fontRef>
+          </p:style>
+        </p:cxnSp>
+        <p:sp>
+          <p:nvSpPr>
+            <p:cNvPr id="16" name="Rounded Rectangle 15">
+              <a:extLst>
+                <a:ext uri="{FF2B5EF4-FFF2-40B4-BE49-F238E27FC236}">
+                  <a16:creationId xmlns:a16="http://schemas.microsoft.com/office/drawing/2014/main" id="{D1390177-FBD9-8F4F-EDA5-30DFBCE23645}"/>
+                </a:ext>
+              </a:extLst>
+            </p:cNvPr>
+            <p:cNvSpPr/>
+            <p:nvPr/>
+          </p:nvSpPr>
+          <p:spPr>
+            <a:xfrm>
+              <a:off x="5183066" y="4724670"/>
+              <a:ext cx="1815738" cy="1717021"/>
+            </a:xfrm>
+            <a:prstGeom prst="roundRect">
+              <a:avLst/>
+            </a:prstGeom>
+            <a:noFill/>
+            <a:ln>
+              <a:prstDash val="lgDash"/>
+            </a:ln>
+          </p:spPr>
+          <p:style>
+            <a:lnRef idx="1">
+              <a:schemeClr val="accent1"/>
+            </a:lnRef>
+            <a:fillRef idx="3">
+              <a:schemeClr val="accent1"/>
+            </a:fillRef>
+            <a:effectRef idx="2">
+              <a:schemeClr val="accent1"/>
+            </a:effectRef>
+            <a:fontRef idx="minor">
+              <a:schemeClr val="lt1"/>
+            </a:fontRef>
+          </p:style>
+          <p:txBody>
+            <a:bodyPr rtlCol="0" anchor="t" anchorCtr="0"/>
+            <a:lstStyle/>
+            <a:p>
+              <a:pPr algn="ctr"/>
+              <a:r>
+                <a:rPr lang="en-GB" sz="1200">
+                  <a:solidFill>
+                    <a:schemeClr val="tx1"/>
+                  </a:solidFill>
+                </a:rPr>
+                <a:t>Feature</a:t>
+              </a:r>
+              <a:r>
+                <a:rPr lang="zh-CN" altLang="en-US" sz="1200">
+                  <a:solidFill>
+                    <a:schemeClr val="tx1"/>
+                  </a:solidFill>
+                </a:rPr>
+                <a:t> </a:t>
+              </a:r>
+              <a:r>
+                <a:rPr lang="en-US" altLang="zh-CN" sz="1200">
+                  <a:solidFill>
+                    <a:schemeClr val="tx1"/>
+                  </a:solidFill>
+                </a:rPr>
+                <a:t>extraction</a:t>
+              </a:r>
+              <a:endParaRPr lang="en-US" sz="1200">
+                <a:solidFill>
+                  <a:schemeClr val="tx1"/>
+                </a:solidFill>
+              </a:endParaRPr>
+            </a:p>
+          </p:txBody>
+        </p:sp>
+        <p:cxnSp>
+          <p:nvCxnSpPr>
+            <p:cNvPr id="17" name="Straight Arrow Connector 16">
+              <a:extLst>
+                <a:ext uri="{FF2B5EF4-FFF2-40B4-BE49-F238E27FC236}">
+                  <a16:creationId xmlns:a16="http://schemas.microsoft.com/office/drawing/2014/main" id="{2CB87647-8814-233A-C933-61DE9775BEDC}"/>
+                </a:ext>
+              </a:extLst>
+            </p:cNvPr>
+            <p:cNvCxnSpPr>
+              <a:cxnSpLocks/>
+              <a:stCxn id="31" idx="3"/>
+              <a:endCxn id="16" idx="1"/>
+            </p:cNvCxnSpPr>
+            <p:nvPr/>
+          </p:nvCxnSpPr>
+          <p:spPr>
+            <a:xfrm flipV="1">
+              <a:off x="4501409" y="5583181"/>
+              <a:ext cx="681657" cy="4353"/>
+            </a:xfrm>
+            <a:prstGeom prst="straightConnector1">
+              <a:avLst/>
+            </a:prstGeom>
+            <a:ln>
+              <a:tailEnd type="triangle"/>
+            </a:ln>
+          </p:spPr>
+          <p:style>
+            <a:lnRef idx="2">
+              <a:schemeClr val="accent1"/>
+            </a:lnRef>
+            <a:fillRef idx="0">
+              <a:schemeClr val="accent1"/>
+            </a:fillRef>
+            <a:effectRef idx="1">
+              <a:schemeClr val="accent1"/>
+            </a:effectRef>
+            <a:fontRef idx="minor">
+              <a:schemeClr val="tx1"/>
+            </a:fontRef>
+          </p:style>
+        </p:cxnSp>
+        <p:sp>
+          <p:nvSpPr>
+            <p:cNvPr id="29" name="TextBox 28">
+              <a:extLst>
+                <a:ext uri="{FF2B5EF4-FFF2-40B4-BE49-F238E27FC236}">
+                  <a16:creationId xmlns:a16="http://schemas.microsoft.com/office/drawing/2014/main" id="{C481748B-DFA3-5040-1741-08C0E6A1CBC3}"/>
+                </a:ext>
+              </a:extLst>
+            </p:cNvPr>
+            <p:cNvSpPr txBox="1"/>
+            <p:nvPr/>
+          </p:nvSpPr>
+          <p:spPr>
+            <a:xfrm>
+              <a:off x="5156939" y="6070854"/>
+              <a:ext cx="1898470" cy="276999"/>
+            </a:xfrm>
+            <a:prstGeom prst="rect">
+              <a:avLst/>
+            </a:prstGeom>
+            <a:noFill/>
+          </p:spPr>
+          <p:txBody>
+            <a:bodyPr wrap="square" rtlCol="0">
+              <a:spAutoFit/>
+            </a:bodyPr>
+            <a:lstStyle/>
+            <a:p>
+              <a:r>
+                <a:rPr lang="en-US" sz="1200"/>
+                <a:t>PCA, </a:t>
+              </a:r>
+              <a:r>
+                <a:rPr lang="en-US" sz="1200" err="1"/>
+                <a:t>AutoEncoder</a:t>
+              </a:r>
+              <a:r>
+                <a:rPr lang="en-US" sz="1200"/>
+                <a:t>, </a:t>
+              </a:r>
+              <a:r>
+                <a:rPr lang="en-US" sz="1200" err="1"/>
+                <a:t>ResNeXt</a:t>
+              </a:r>
+              <a:endParaRPr lang="en-US" sz="1200"/>
+            </a:p>
+          </p:txBody>
+        </p:sp>
+        <p:sp>
+          <p:nvSpPr>
+            <p:cNvPr id="31" name="Rounded Rectangle 30">
+              <a:extLst>
+                <a:ext uri="{FF2B5EF4-FFF2-40B4-BE49-F238E27FC236}">
+                  <a16:creationId xmlns:a16="http://schemas.microsoft.com/office/drawing/2014/main" id="{4C4BE4F8-8409-9639-A500-F83409FCFFA7}"/>
+                </a:ext>
+              </a:extLst>
+            </p:cNvPr>
+            <p:cNvSpPr/>
+            <p:nvPr/>
+          </p:nvSpPr>
+          <p:spPr>
+            <a:xfrm>
+              <a:off x="2685671" y="4729023"/>
+              <a:ext cx="1815738" cy="1717021"/>
+            </a:xfrm>
+            <a:prstGeom prst="roundRect">
+              <a:avLst/>
+            </a:prstGeom>
+            <a:noFill/>
+            <a:ln>
+              <a:prstDash val="lgDash"/>
+            </a:ln>
+          </p:spPr>
+          <p:style>
+            <a:lnRef idx="1">
+              <a:schemeClr val="accent1"/>
+            </a:lnRef>
+            <a:fillRef idx="3">
+              <a:schemeClr val="accent1"/>
+            </a:fillRef>
+            <a:effectRef idx="2">
+              <a:schemeClr val="accent1"/>
+            </a:effectRef>
+            <a:fontRef idx="minor">
+              <a:schemeClr val="lt1"/>
+            </a:fontRef>
+          </p:style>
+          <p:txBody>
+            <a:bodyPr rtlCol="0" anchor="t" anchorCtr="0"/>
+            <a:lstStyle/>
+            <a:p>
+              <a:pPr algn="ctr"/>
+              <a:r>
+                <a:rPr lang="en-US" sz="1200">
+                  <a:solidFill>
+                    <a:schemeClr val="tx1"/>
+                  </a:solidFill>
+                </a:rPr>
+                <a:t>Feature Selection</a:t>
+              </a:r>
+            </a:p>
+          </p:txBody>
+        </p:sp>
+        <p:sp>
+          <p:nvSpPr>
+            <p:cNvPr id="34" name="Oval 33">
+              <a:extLst>
+                <a:ext uri="{FF2B5EF4-FFF2-40B4-BE49-F238E27FC236}">
+                  <a16:creationId xmlns:a16="http://schemas.microsoft.com/office/drawing/2014/main" id="{898E5945-17AE-5FBB-BC98-0FD633DC2CAC}"/>
+                </a:ext>
+              </a:extLst>
+            </p:cNvPr>
+            <p:cNvSpPr/>
+            <p:nvPr/>
+          </p:nvSpPr>
+          <p:spPr>
+            <a:xfrm>
+              <a:off x="2796705" y="5130148"/>
               <a:ext cx="243840" cy="200297"/>
             </a:xfrm>
             <a:prstGeom prst="ellipse">
@@ -46326,10 +44208,10 @@
         </p:sp>
         <p:sp>
           <p:nvSpPr>
-            <p:cNvPr id="21" name="Oval 20">
+            <p:cNvPr id="35" name="Oval 34">
               <a:extLst>
                 <a:ext uri="{FF2B5EF4-FFF2-40B4-BE49-F238E27FC236}">
-                  <a16:creationId xmlns:a16="http://schemas.microsoft.com/office/drawing/2014/main" id="{D88078BA-E23F-CDEB-61D2-2CD4EE7C9732}"/>
+                  <a16:creationId xmlns:a16="http://schemas.microsoft.com/office/drawing/2014/main" id="{BD4FE70E-F51F-727A-A874-33B8D4973ACE}"/>
                 </a:ext>
               </a:extLst>
             </p:cNvPr>
@@ -46338,7 +44220,7 @@
           </p:nvSpPr>
           <p:spPr>
             <a:xfrm>
-              <a:off x="6495062" y="5276107"/>
+              <a:off x="3114569" y="5130148"/>
               <a:ext cx="243840" cy="200297"/>
             </a:xfrm>
             <a:prstGeom prst="ellipse">
@@ -46375,10 +44257,10 @@
         </p:sp>
         <p:sp>
           <p:nvSpPr>
-            <p:cNvPr id="22" name="Oval 21">
+            <p:cNvPr id="36" name="Oval 35">
               <a:extLst>
                 <a:ext uri="{FF2B5EF4-FFF2-40B4-BE49-F238E27FC236}">
-                  <a16:creationId xmlns:a16="http://schemas.microsoft.com/office/drawing/2014/main" id="{08CA9175-388D-6099-2700-905D3E649905}"/>
+                  <a16:creationId xmlns:a16="http://schemas.microsoft.com/office/drawing/2014/main" id="{8E465672-FFCF-BCE1-F9B8-C0A0E6B71185}"/>
                 </a:ext>
               </a:extLst>
             </p:cNvPr>
@@ -46387,7 +44269,7 @@
           </p:nvSpPr>
           <p:spPr>
             <a:xfrm>
-              <a:off x="5992877" y="5586898"/>
+              <a:off x="3458557" y="5130148"/>
               <a:ext cx="243840" cy="200297"/>
             </a:xfrm>
             <a:prstGeom prst="ellipse">
@@ -46424,10 +44306,10 @@
         </p:sp>
         <p:sp>
           <p:nvSpPr>
-            <p:cNvPr id="23" name="Oval 22">
+            <p:cNvPr id="37" name="Oval 36">
               <a:extLst>
                 <a:ext uri="{FF2B5EF4-FFF2-40B4-BE49-F238E27FC236}">
-                  <a16:creationId xmlns:a16="http://schemas.microsoft.com/office/drawing/2014/main" id="{F7A06578-1DEB-DC17-DAC1-2D3445941FF9}"/>
+                  <a16:creationId xmlns:a16="http://schemas.microsoft.com/office/drawing/2014/main" id="{2FE35625-CA79-A0B6-4996-D4741B89A479}"/>
                 </a:ext>
               </a:extLst>
             </p:cNvPr>
@@ -46436,7 +44318,7 @@
           </p:nvSpPr>
           <p:spPr>
             <a:xfrm>
-              <a:off x="6317798" y="5586898"/>
+              <a:off x="3809075" y="5130147"/>
               <a:ext cx="243840" cy="200297"/>
             </a:xfrm>
             <a:prstGeom prst="ellipse">
@@ -46473,10 +44355,10 @@
         </p:sp>
         <p:sp>
           <p:nvSpPr>
-            <p:cNvPr id="24" name="Oval 23">
+            <p:cNvPr id="38" name="Oval 37">
               <a:extLst>
                 <a:ext uri="{FF2B5EF4-FFF2-40B4-BE49-F238E27FC236}">
-                  <a16:creationId xmlns:a16="http://schemas.microsoft.com/office/drawing/2014/main" id="{17FEF3B6-DEA5-06E3-2898-C204D1ABD2D4}"/>
+                  <a16:creationId xmlns:a16="http://schemas.microsoft.com/office/drawing/2014/main" id="{CB2106DB-534B-A3C8-74B6-F9ADB9D133FF}"/>
                 </a:ext>
               </a:extLst>
             </p:cNvPr>
@@ -46485,7 +44367,7 @@
           </p:nvSpPr>
           <p:spPr>
             <a:xfrm>
-              <a:off x="5826106" y="5865356"/>
+              <a:off x="4140001" y="5130146"/>
               <a:ext cx="243840" cy="200297"/>
             </a:xfrm>
             <a:prstGeom prst="ellipse">
@@ -46522,10 +44404,10 @@
         </p:sp>
         <p:sp>
           <p:nvSpPr>
-            <p:cNvPr id="25" name="Oval 24">
+            <p:cNvPr id="40" name="Multiply 39">
               <a:extLst>
                 <a:ext uri="{FF2B5EF4-FFF2-40B4-BE49-F238E27FC236}">
-                  <a16:creationId xmlns:a16="http://schemas.microsoft.com/office/drawing/2014/main" id="{286839BE-7C81-1D01-3152-F17330EDCCF5}"/>
+                  <a16:creationId xmlns:a16="http://schemas.microsoft.com/office/drawing/2014/main" id="{20DAA727-43B6-B948-17C0-65167B768785}"/>
                 </a:ext>
               </a:extLst>
             </p:cNvPr>
@@ -46534,16 +44416,14 @@
           </p:nvSpPr>
           <p:spPr>
             <a:xfrm>
-              <a:off x="6151027" y="5865356"/>
-              <a:ext cx="243840" cy="200297"/>
+              <a:off x="3068851" y="5051951"/>
+              <a:ext cx="341808" cy="374468"/>
             </a:xfrm>
-            <a:prstGeom prst="ellipse">
+            <a:prstGeom prst="mathMultiply">
               <a:avLst/>
             </a:prstGeom>
             <a:solidFill>
-              <a:schemeClr val="bg1">
-                <a:lumMod val="50000"/>
-              </a:schemeClr>
+              <a:srgbClr val="FF0000"/>
             </a:solidFill>
           </p:spPr>
           <p:style>
@@ -46569,28 +44449,503 @@
             </a:p>
           </p:txBody>
         </p:sp>
+        <p:sp>
+          <p:nvSpPr>
+            <p:cNvPr id="41" name="Multiply 40">
+              <a:extLst>
+                <a:ext uri="{FF2B5EF4-FFF2-40B4-BE49-F238E27FC236}">
+                  <a16:creationId xmlns:a16="http://schemas.microsoft.com/office/drawing/2014/main" id="{E8ACCC30-8847-DDF5-0E99-0273CCFD743E}"/>
+                </a:ext>
+              </a:extLst>
+            </p:cNvPr>
+            <p:cNvSpPr/>
+            <p:nvPr/>
+          </p:nvSpPr>
+          <p:spPr>
+            <a:xfrm>
+              <a:off x="3763360" y="5059209"/>
+              <a:ext cx="341808" cy="374468"/>
+            </a:xfrm>
+            <a:prstGeom prst="mathMultiply">
+              <a:avLst/>
+            </a:prstGeom>
+            <a:solidFill>
+              <a:srgbClr val="FF0000"/>
+            </a:solidFill>
+          </p:spPr>
+          <p:style>
+            <a:lnRef idx="1">
+              <a:schemeClr val="accent1"/>
+            </a:lnRef>
+            <a:fillRef idx="3">
+              <a:schemeClr val="accent1"/>
+            </a:fillRef>
+            <a:effectRef idx="2">
+              <a:schemeClr val="accent1"/>
+            </a:effectRef>
+            <a:fontRef idx="minor">
+              <a:schemeClr val="lt1"/>
+            </a:fontRef>
+          </p:style>
+          <p:txBody>
+            <a:bodyPr rtlCol="0" anchor="ctr"/>
+            <a:lstStyle/>
+            <a:p>
+              <a:pPr algn="ctr"/>
+              <a:endParaRPr lang="en-US"/>
+            </a:p>
+          </p:txBody>
+        </p:sp>
+        <p:sp>
+          <p:nvSpPr>
+            <p:cNvPr id="45" name="TextBox 44">
+              <a:extLst>
+                <a:ext uri="{FF2B5EF4-FFF2-40B4-BE49-F238E27FC236}">
+                  <a16:creationId xmlns:a16="http://schemas.microsoft.com/office/drawing/2014/main" id="{770BE998-DE42-AC75-3931-827DAE46A753}"/>
+                </a:ext>
+              </a:extLst>
+            </p:cNvPr>
+            <p:cNvSpPr txBox="1"/>
+            <p:nvPr/>
+          </p:nvSpPr>
+          <p:spPr>
+            <a:xfrm>
+              <a:off x="2986021" y="5392424"/>
+              <a:ext cx="1201419" cy="292388"/>
+            </a:xfrm>
+            <a:prstGeom prst="rect">
+              <a:avLst/>
+            </a:prstGeom>
+            <a:noFill/>
+          </p:spPr>
+          <p:txBody>
+            <a:bodyPr wrap="none" rtlCol="0">
+              <a:spAutoFit/>
+            </a:bodyPr>
+            <a:lstStyle/>
+            <a:p>
+              <a:r>
+                <a:rPr lang="en-US" sz="1300">
+                  <a:ea typeface="SimSun" panose="02010600030101010101" pitchFamily="2" charset="-122"/>
+                </a:rPr>
+                <a:t>Feature</a:t>
+              </a:r>
+              <a:r>
+                <a:rPr lang="zh-CN" altLang="en-US" sz="1300">
+                  <a:ea typeface="SimSun" panose="02010600030101010101" pitchFamily="2" charset="-122"/>
+                </a:rPr>
+                <a:t> </a:t>
+              </a:r>
+              <a:r>
+                <a:rPr lang="en-US" altLang="zh-CN" sz="1300">
+                  <a:ea typeface="SimSun" panose="02010600030101010101" pitchFamily="2" charset="-122"/>
+                </a:rPr>
+                <a:t>scaling</a:t>
+              </a:r>
+              <a:endParaRPr lang="en-US" sz="1300">
+                <a:ea typeface="SimSun" panose="02010600030101010101" pitchFamily="2" charset="-122"/>
+              </a:endParaRPr>
+            </a:p>
+          </p:txBody>
+        </p:sp>
+        <p:pic>
+          <p:nvPicPr>
+            <p:cNvPr id="47" name="Picture 46">
+              <a:extLst>
+                <a:ext uri="{FF2B5EF4-FFF2-40B4-BE49-F238E27FC236}">
+                  <a16:creationId xmlns:a16="http://schemas.microsoft.com/office/drawing/2014/main" id="{21949BEA-0A35-9974-7DA4-7DA769B30521}"/>
+                </a:ext>
+              </a:extLst>
+            </p:cNvPr>
+            <p:cNvPicPr>
+              <a:picLocks noChangeAspect="1"/>
+            </p:cNvPicPr>
+            <p:nvPr/>
+          </p:nvPicPr>
+          <p:blipFill>
+            <a:blip r:embed="rId3"/>
+            <a:stretch>
+              <a:fillRect/>
+            </a:stretch>
+          </p:blipFill>
+          <p:spPr>
+            <a:xfrm>
+              <a:off x="2796705" y="5675867"/>
+              <a:ext cx="1610407" cy="635356"/>
+            </a:xfrm>
+            <a:prstGeom prst="rect">
+              <a:avLst/>
+            </a:prstGeom>
+          </p:spPr>
+        </p:pic>
+        <p:sp>
+          <p:nvSpPr>
+            <p:cNvPr id="51" name="Rounded Rectangle 50">
+              <a:extLst>
+                <a:ext uri="{FF2B5EF4-FFF2-40B4-BE49-F238E27FC236}">
+                  <a16:creationId xmlns:a16="http://schemas.microsoft.com/office/drawing/2014/main" id="{C104F36B-F534-4203-4C3B-1A7267A0950D}"/>
+                </a:ext>
+              </a:extLst>
+            </p:cNvPr>
+            <p:cNvSpPr/>
+            <p:nvPr/>
+          </p:nvSpPr>
+          <p:spPr>
+            <a:xfrm>
+              <a:off x="3259990" y="1818761"/>
+              <a:ext cx="1614198" cy="1601833"/>
+            </a:xfrm>
+            <a:prstGeom prst="roundRect">
+              <a:avLst/>
+            </a:prstGeom>
+            <a:noFill/>
+            <a:ln>
+              <a:prstDash val="lgDash"/>
+            </a:ln>
+          </p:spPr>
+          <p:style>
+            <a:lnRef idx="1">
+              <a:schemeClr val="accent1"/>
+            </a:lnRef>
+            <a:fillRef idx="3">
+              <a:schemeClr val="accent1"/>
+            </a:fillRef>
+            <a:effectRef idx="2">
+              <a:schemeClr val="accent1"/>
+            </a:effectRef>
+            <a:fontRef idx="minor">
+              <a:schemeClr val="lt1"/>
+            </a:fontRef>
+          </p:style>
+          <p:txBody>
+            <a:bodyPr rtlCol="0" anchor="t" anchorCtr="0"/>
+            <a:lstStyle/>
+            <a:p>
+              <a:pPr algn="ctr"/>
+              <a:r>
+                <a:rPr lang="en-US" sz="1200" err="1">
+                  <a:solidFill>
+                    <a:schemeClr val="tx1"/>
+                  </a:solidFill>
+                </a:rPr>
+                <a:t>Classifer</a:t>
+              </a:r>
+              <a:r>
+                <a:rPr lang="zh-CN" altLang="en-US" sz="1200">
+                  <a:solidFill>
+                    <a:schemeClr val="tx1"/>
+                  </a:solidFill>
+                </a:rPr>
+                <a:t>  </a:t>
+              </a:r>
+              <a:r>
+                <a:rPr lang="en-US" altLang="zh-CN" sz="1200">
+                  <a:solidFill>
+                    <a:schemeClr val="tx1"/>
+                  </a:solidFill>
+                </a:rPr>
+                <a:t>Model</a:t>
+              </a:r>
+              <a:endParaRPr lang="en-US" sz="1200">
+                <a:solidFill>
+                  <a:schemeClr val="tx1"/>
+                </a:solidFill>
+              </a:endParaRPr>
+            </a:p>
+          </p:txBody>
+        </p:sp>
+        <p:sp>
+          <p:nvSpPr>
+            <p:cNvPr id="52" name="Rounded Rectangle 51">
+              <a:extLst>
+                <a:ext uri="{FF2B5EF4-FFF2-40B4-BE49-F238E27FC236}">
+                  <a16:creationId xmlns:a16="http://schemas.microsoft.com/office/drawing/2014/main" id="{8B8FC5B0-A1F5-D5BD-3910-5A2F09AEB404}"/>
+                </a:ext>
+              </a:extLst>
+            </p:cNvPr>
+            <p:cNvSpPr/>
+            <p:nvPr/>
+          </p:nvSpPr>
+          <p:spPr>
+            <a:xfrm>
+              <a:off x="754743" y="1818761"/>
+              <a:ext cx="1582795" cy="1610239"/>
+            </a:xfrm>
+            <a:prstGeom prst="roundRect">
+              <a:avLst/>
+            </a:prstGeom>
+            <a:noFill/>
+            <a:ln>
+              <a:prstDash val="lgDash"/>
+            </a:ln>
+          </p:spPr>
+          <p:style>
+            <a:lnRef idx="1">
+              <a:schemeClr val="accent1"/>
+            </a:lnRef>
+            <a:fillRef idx="3">
+              <a:schemeClr val="accent1"/>
+            </a:fillRef>
+            <a:effectRef idx="2">
+              <a:schemeClr val="accent1"/>
+            </a:effectRef>
+            <a:fontRef idx="minor">
+              <a:schemeClr val="lt1"/>
+            </a:fontRef>
+          </p:style>
+          <p:txBody>
+            <a:bodyPr rtlCol="0" anchor="t" anchorCtr="0"/>
+            <a:lstStyle/>
+            <a:p>
+              <a:pPr algn="ctr"/>
+              <a:r>
+                <a:rPr lang="en-US" altLang="zh-CN" sz="1200">
+                  <a:solidFill>
+                    <a:schemeClr val="tx1"/>
+                  </a:solidFill>
+                </a:rPr>
+                <a:t>Feature Encoding</a:t>
+              </a:r>
+            </a:p>
+          </p:txBody>
+        </p:sp>
         <p:cxnSp>
           <p:nvCxnSpPr>
-            <p:cNvPr id="28" name="Straight Connector 27">
+            <p:cNvPr id="56" name="Elbow Connector 55">
               <a:extLst>
                 <a:ext uri="{FF2B5EF4-FFF2-40B4-BE49-F238E27FC236}">
-                  <a16:creationId xmlns:a16="http://schemas.microsoft.com/office/drawing/2014/main" id="{34DDCD68-8F02-A359-8621-B05D8EE44064}"/>
+                  <a16:creationId xmlns:a16="http://schemas.microsoft.com/office/drawing/2014/main" id="{E454A758-71CA-2BDE-0059-C54C08D00CD7}"/>
                 </a:ext>
               </a:extLst>
             </p:cNvPr>
             <p:cNvCxnSpPr>
-              <a:endCxn id="20" idx="0"/>
+              <a:cxnSpLocks/>
+              <a:stCxn id="16" idx="0"/>
+              <a:endCxn id="52" idx="2"/>
+            </p:cNvCxnSpPr>
+            <p:nvPr/>
+          </p:nvCxnSpPr>
+          <p:spPr>
+            <a:xfrm rot="16200000" flipV="1">
+              <a:off x="3170703" y="1804438"/>
+              <a:ext cx="1295670" cy="4544794"/>
+            </a:xfrm>
+            <a:prstGeom prst="bentConnector3">
+              <a:avLst/>
+            </a:prstGeom>
+            <a:ln>
+              <a:headEnd type="none"/>
+              <a:tailEnd type="triangle"/>
+            </a:ln>
+          </p:spPr>
+          <p:style>
+            <a:lnRef idx="2">
+              <a:schemeClr val="accent1"/>
+            </a:lnRef>
+            <a:fillRef idx="0">
+              <a:schemeClr val="accent1"/>
+            </a:fillRef>
+            <a:effectRef idx="1">
+              <a:schemeClr val="accent1"/>
+            </a:effectRef>
+            <a:fontRef idx="minor">
+              <a:schemeClr val="tx1"/>
+            </a:fontRef>
+          </p:style>
+        </p:cxnSp>
+        <p:sp>
+          <p:nvSpPr>
+            <p:cNvPr id="57" name="Right Arrow 56">
+              <a:extLst>
+                <a:ext uri="{FF2B5EF4-FFF2-40B4-BE49-F238E27FC236}">
+                  <a16:creationId xmlns:a16="http://schemas.microsoft.com/office/drawing/2014/main" id="{4102F10F-61FB-ACF1-672C-97A8402E3AFB}"/>
+                </a:ext>
+              </a:extLst>
+            </p:cNvPr>
+            <p:cNvSpPr/>
+            <p:nvPr/>
+          </p:nvSpPr>
+          <p:spPr>
+            <a:xfrm>
+              <a:off x="6364514" y="4071257"/>
+              <a:ext cx="1560286" cy="214793"/>
+            </a:xfrm>
+            <a:prstGeom prst="rightArrow">
+              <a:avLst/>
+            </a:prstGeom>
+            <a:ln>
+              <a:solidFill>
+                <a:schemeClr val="tx2">
+                  <a:lumMod val="75000"/>
+                  <a:alpha val="50000"/>
+                </a:schemeClr>
+              </a:solidFill>
+              <a:prstDash val="sysDash"/>
+            </a:ln>
+          </p:spPr>
+          <p:style>
+            <a:lnRef idx="2">
+              <a:schemeClr val="dk1"/>
+            </a:lnRef>
+            <a:fillRef idx="1">
+              <a:schemeClr val="lt1"/>
+            </a:fillRef>
+            <a:effectRef idx="0">
+              <a:schemeClr val="dk1"/>
+            </a:effectRef>
+            <a:fontRef idx="minor">
+              <a:schemeClr val="dk1"/>
+            </a:fontRef>
+          </p:style>
+          <p:txBody>
+            <a:bodyPr rtlCol="0" anchor="ctr"/>
+            <a:lstStyle/>
+            <a:p>
+              <a:pPr algn="ctr"/>
+              <a:endParaRPr lang="en-US"/>
+            </a:p>
+          </p:txBody>
+        </p:sp>
+        <p:sp>
+          <p:nvSpPr>
+            <p:cNvPr id="58" name="Right Arrow 57">
+              <a:extLst>
+                <a:ext uri="{FF2B5EF4-FFF2-40B4-BE49-F238E27FC236}">
+                  <a16:creationId xmlns:a16="http://schemas.microsoft.com/office/drawing/2014/main" id="{6EE0CBBE-B553-FAB0-5A8E-9FFE28521536}"/>
+                </a:ext>
+              </a:extLst>
+            </p:cNvPr>
+            <p:cNvSpPr/>
+            <p:nvPr/>
+          </p:nvSpPr>
+          <p:spPr>
+            <a:xfrm>
+              <a:off x="7127979" y="2512280"/>
+              <a:ext cx="796821" cy="214793"/>
+            </a:xfrm>
+            <a:prstGeom prst="rightArrow">
+              <a:avLst/>
+            </a:prstGeom>
+            <a:ln>
+              <a:solidFill>
+                <a:schemeClr val="tx2">
+                  <a:lumMod val="75000"/>
+                  <a:alpha val="50000"/>
+                </a:schemeClr>
+              </a:solidFill>
+              <a:prstDash val="sysDash"/>
+            </a:ln>
+          </p:spPr>
+          <p:style>
+            <a:lnRef idx="2">
+              <a:schemeClr val="dk1"/>
+            </a:lnRef>
+            <a:fillRef idx="1">
+              <a:schemeClr val="lt1"/>
+            </a:fillRef>
+            <a:effectRef idx="0">
+              <a:schemeClr val="dk1"/>
+            </a:effectRef>
+            <a:fontRef idx="minor">
+              <a:schemeClr val="dk1"/>
+            </a:fontRef>
+          </p:style>
+          <p:txBody>
+            <a:bodyPr rtlCol="0" anchor="ctr"/>
+            <a:lstStyle/>
+            <a:p>
+              <a:pPr algn="ctr"/>
+              <a:endParaRPr lang="en-US"/>
+            </a:p>
+          </p:txBody>
+        </p:sp>
+        <p:sp>
+          <p:nvSpPr>
+            <p:cNvPr id="61" name="Can 60">
+              <a:extLst>
+                <a:ext uri="{FF2B5EF4-FFF2-40B4-BE49-F238E27FC236}">
+                  <a16:creationId xmlns:a16="http://schemas.microsoft.com/office/drawing/2014/main" id="{EF3E311E-249D-8AE8-40EB-C4B8841E7274}"/>
+                </a:ext>
+              </a:extLst>
+            </p:cNvPr>
+            <p:cNvSpPr/>
+            <p:nvPr/>
+          </p:nvSpPr>
+          <p:spPr>
+            <a:xfrm>
+              <a:off x="5599624" y="1973898"/>
+              <a:ext cx="1264196" cy="1295671"/>
+            </a:xfrm>
+            <a:prstGeom prst="can">
+              <a:avLst/>
+            </a:prstGeom>
+            <a:solidFill>
+              <a:schemeClr val="tx2">
+                <a:lumMod val="40000"/>
+                <a:lumOff val="60000"/>
+              </a:schemeClr>
+            </a:solidFill>
+          </p:spPr>
+          <p:style>
+            <a:lnRef idx="1">
+              <a:schemeClr val="accent1"/>
+            </a:lnRef>
+            <a:fillRef idx="3">
+              <a:schemeClr val="accent1"/>
+            </a:fillRef>
+            <a:effectRef idx="2">
+              <a:schemeClr val="accent1"/>
+            </a:effectRef>
+            <a:fontRef idx="minor">
+              <a:schemeClr val="lt1"/>
+            </a:fontRef>
+          </p:style>
+          <p:txBody>
+            <a:bodyPr rtlCol="0" anchor="ctr"/>
+            <a:lstStyle/>
+            <a:p>
+              <a:pPr algn="ctr"/>
+              <a:r>
+                <a:rPr lang="en-US" altLang="zh-CN" sz="1600"/>
+                <a:t>Classification</a:t>
+              </a:r>
+              <a:r>
+                <a:rPr lang="zh-CN" altLang="en-US" sz="1600"/>
+                <a:t> </a:t>
+              </a:r>
+              <a:r>
+                <a:rPr lang="en-US" altLang="zh-CN" sz="1600"/>
+                <a:t>result</a:t>
+              </a:r>
+              <a:endParaRPr lang="en-US" sz="1600"/>
+            </a:p>
+          </p:txBody>
+        </p:sp>
+        <p:cxnSp>
+          <p:nvCxnSpPr>
+            <p:cNvPr id="64" name="Straight Arrow Connector 63">
+              <a:extLst>
+                <a:ext uri="{FF2B5EF4-FFF2-40B4-BE49-F238E27FC236}">
+                  <a16:creationId xmlns:a16="http://schemas.microsoft.com/office/drawing/2014/main" id="{097E2E20-F783-3FBA-F095-1120DB9F8B47}"/>
+                </a:ext>
+              </a:extLst>
+            </p:cNvPr>
+            <p:cNvCxnSpPr>
+              <a:cxnSpLocks/>
             </p:cNvCxnSpPr>
             <p:nvPr/>
           </p:nvCxnSpPr>
           <p:spPr>
             <a:xfrm>
-              <a:off x="5599624" y="5476404"/>
-              <a:ext cx="187739" cy="111214"/>
+              <a:off x="2337538" y="2220686"/>
+              <a:ext cx="944739" cy="0"/>
             </a:xfrm>
-            <a:prstGeom prst="line">
+            <a:prstGeom prst="straightConnector1">
               <a:avLst/>
             </a:prstGeom>
+            <a:ln>
+              <a:tailEnd type="triangle"/>
+            </a:ln>
           </p:spPr>
           <p:style>
             <a:lnRef idx="2">
@@ -46609,27 +44964,29 @@
         </p:cxnSp>
         <p:cxnSp>
           <p:nvCxnSpPr>
-            <p:cNvPr id="32" name="Straight Connector 31">
+            <p:cNvPr id="66" name="Straight Arrow Connector 65">
               <a:extLst>
                 <a:ext uri="{FF2B5EF4-FFF2-40B4-BE49-F238E27FC236}">
-                  <a16:creationId xmlns:a16="http://schemas.microsoft.com/office/drawing/2014/main" id="{B0A9F970-7426-4426-6B02-369409561D22}"/>
+                  <a16:creationId xmlns:a16="http://schemas.microsoft.com/office/drawing/2014/main" id="{064E9001-AEBD-CC4E-EEA8-630A81455DDF}"/>
                 </a:ext>
               </a:extLst>
             </p:cNvPr>
             <p:cNvCxnSpPr>
-              <a:stCxn id="18" idx="4"/>
-              <a:endCxn id="20" idx="0"/>
+              <a:cxnSpLocks/>
             </p:cNvCxnSpPr>
             <p:nvPr/>
           </p:nvCxnSpPr>
           <p:spPr>
-            <a:xfrm flipH="1">
-              <a:off x="5787363" y="5476404"/>
-              <a:ext cx="160663" cy="111214"/>
+            <a:xfrm>
+              <a:off x="2337538" y="2844800"/>
+              <a:ext cx="922452" cy="0"/>
             </a:xfrm>
-            <a:prstGeom prst="line">
+            <a:prstGeom prst="straightConnector1">
               <a:avLst/>
             </a:prstGeom>
+            <a:ln>
+              <a:tailEnd type="triangle"/>
+            </a:ln>
           </p:spPr>
           <p:style>
             <a:lnRef idx="2">
@@ -46646,29 +45003,471 @@
             </a:fontRef>
           </p:style>
         </p:cxnSp>
+        <p:sp>
+          <p:nvSpPr>
+            <p:cNvPr id="68" name="Rectangle 67">
+              <a:extLst>
+                <a:ext uri="{FF2B5EF4-FFF2-40B4-BE49-F238E27FC236}">
+                  <a16:creationId xmlns:a16="http://schemas.microsoft.com/office/drawing/2014/main" id="{0C82C30F-DB6C-8563-EE0F-95A70A254AB1}"/>
+                </a:ext>
+              </a:extLst>
+            </p:cNvPr>
+            <p:cNvSpPr/>
+            <p:nvPr/>
+          </p:nvSpPr>
+          <p:spPr>
+            <a:xfrm>
+              <a:off x="2641600" y="1806170"/>
+              <a:ext cx="517350" cy="132612"/>
+            </a:xfrm>
+            <a:prstGeom prst="rect">
+              <a:avLst/>
+            </a:prstGeom>
+            <a:ln>
+              <a:solidFill>
+                <a:schemeClr val="accent2">
+                  <a:lumMod val="75000"/>
+                  <a:alpha val="50000"/>
+                </a:schemeClr>
+              </a:solidFill>
+              <a:prstDash val="sysDash"/>
+            </a:ln>
+          </p:spPr>
+          <p:style>
+            <a:lnRef idx="2">
+              <a:schemeClr val="dk1"/>
+            </a:lnRef>
+            <a:fillRef idx="1">
+              <a:schemeClr val="lt1"/>
+            </a:fillRef>
+            <a:effectRef idx="0">
+              <a:schemeClr val="dk1"/>
+            </a:effectRef>
+            <a:fontRef idx="minor">
+              <a:schemeClr val="dk1"/>
+            </a:fontRef>
+          </p:style>
+          <p:txBody>
+            <a:bodyPr rtlCol="0" anchor="ctr"/>
+            <a:lstStyle/>
+            <a:p>
+              <a:pPr algn="ctr"/>
+              <a:r>
+                <a:rPr lang="en-US" altLang="zh-CN" sz="800">
+                  <a:ln w="0"/>
+                  <a:solidFill>
+                    <a:schemeClr val="tx1"/>
+                  </a:solidFill>
+                  <a:effectLst>
+                    <a:outerShdw blurRad="38100" dist="19050" dir="2700000" algn="tl" rotWithShape="0">
+                      <a:schemeClr val="dk1">
+                        <a:alpha val="40000"/>
+                      </a:schemeClr>
+                    </a:outerShdw>
+                  </a:effectLst>
+                </a:rPr>
+                <a:t>attack</a:t>
+              </a:r>
+              <a:endParaRPr lang="en-US" sz="800">
+                <a:ln w="0"/>
+                <a:solidFill>
+                  <a:schemeClr val="tx1"/>
+                </a:solidFill>
+                <a:effectLst>
+                  <a:outerShdw blurRad="38100" dist="19050" dir="2700000" algn="tl" rotWithShape="0">
+                    <a:schemeClr val="dk1">
+                      <a:alpha val="40000"/>
+                    </a:schemeClr>
+                  </a:outerShdw>
+                </a:effectLst>
+              </a:endParaRPr>
+            </a:p>
+          </p:txBody>
+        </p:sp>
+        <p:sp>
+          <p:nvSpPr>
+            <p:cNvPr id="69" name="Rectangle 68">
+              <a:extLst>
+                <a:ext uri="{FF2B5EF4-FFF2-40B4-BE49-F238E27FC236}">
+                  <a16:creationId xmlns:a16="http://schemas.microsoft.com/office/drawing/2014/main" id="{29B6B052-7ABF-86FB-50DC-081D1374EB08}"/>
+                </a:ext>
+              </a:extLst>
+            </p:cNvPr>
+            <p:cNvSpPr/>
+            <p:nvPr/>
+          </p:nvSpPr>
+          <p:spPr>
+            <a:xfrm>
+              <a:off x="2573926" y="1884016"/>
+              <a:ext cx="517350" cy="132612"/>
+            </a:xfrm>
+            <a:prstGeom prst="rect">
+              <a:avLst/>
+            </a:prstGeom>
+            <a:ln>
+              <a:solidFill>
+                <a:schemeClr val="accent2">
+                  <a:lumMod val="75000"/>
+                  <a:alpha val="50000"/>
+                </a:schemeClr>
+              </a:solidFill>
+              <a:prstDash val="sysDash"/>
+            </a:ln>
+          </p:spPr>
+          <p:style>
+            <a:lnRef idx="2">
+              <a:schemeClr val="dk1"/>
+            </a:lnRef>
+            <a:fillRef idx="1">
+              <a:schemeClr val="lt1"/>
+            </a:fillRef>
+            <a:effectRef idx="0">
+              <a:schemeClr val="dk1"/>
+            </a:effectRef>
+            <a:fontRef idx="minor">
+              <a:schemeClr val="dk1"/>
+            </a:fontRef>
+          </p:style>
+          <p:txBody>
+            <a:bodyPr rtlCol="0" anchor="ctr"/>
+            <a:lstStyle/>
+            <a:p>
+              <a:pPr algn="ctr"/>
+              <a:r>
+                <a:rPr lang="en-US" altLang="zh-CN" sz="800">
+                  <a:ln w="0"/>
+                  <a:solidFill>
+                    <a:schemeClr val="tx1"/>
+                  </a:solidFill>
+                  <a:effectLst>
+                    <a:outerShdw blurRad="38100" dist="19050" dir="2700000" algn="tl" rotWithShape="0">
+                      <a:schemeClr val="dk1">
+                        <a:alpha val="40000"/>
+                      </a:schemeClr>
+                    </a:outerShdw>
+                  </a:effectLst>
+                </a:rPr>
+                <a:t>attack</a:t>
+              </a:r>
+              <a:endParaRPr lang="en-US" sz="800">
+                <a:ln w="0"/>
+                <a:solidFill>
+                  <a:schemeClr val="tx1"/>
+                </a:solidFill>
+                <a:effectLst>
+                  <a:outerShdw blurRad="38100" dist="19050" dir="2700000" algn="tl" rotWithShape="0">
+                    <a:schemeClr val="dk1">
+                      <a:alpha val="40000"/>
+                    </a:schemeClr>
+                  </a:outerShdw>
+                </a:effectLst>
+              </a:endParaRPr>
+            </a:p>
+          </p:txBody>
+        </p:sp>
+        <p:sp>
+          <p:nvSpPr>
+            <p:cNvPr id="70" name="Rectangle 69">
+              <a:extLst>
+                <a:ext uri="{FF2B5EF4-FFF2-40B4-BE49-F238E27FC236}">
+                  <a16:creationId xmlns:a16="http://schemas.microsoft.com/office/drawing/2014/main" id="{CF703202-FE4F-CA62-0EF6-FF8049605C7A}"/>
+                </a:ext>
+              </a:extLst>
+            </p:cNvPr>
+            <p:cNvSpPr/>
+            <p:nvPr/>
+          </p:nvSpPr>
+          <p:spPr>
+            <a:xfrm>
+              <a:off x="2506252" y="1972097"/>
+              <a:ext cx="517350" cy="132612"/>
+            </a:xfrm>
+            <a:prstGeom prst="rect">
+              <a:avLst/>
+            </a:prstGeom>
+            <a:ln>
+              <a:solidFill>
+                <a:schemeClr val="accent2">
+                  <a:lumMod val="75000"/>
+                  <a:alpha val="50000"/>
+                </a:schemeClr>
+              </a:solidFill>
+              <a:prstDash val="sysDash"/>
+            </a:ln>
+          </p:spPr>
+          <p:style>
+            <a:lnRef idx="2">
+              <a:schemeClr val="dk1"/>
+            </a:lnRef>
+            <a:fillRef idx="1">
+              <a:schemeClr val="lt1"/>
+            </a:fillRef>
+            <a:effectRef idx="0">
+              <a:schemeClr val="dk1"/>
+            </a:effectRef>
+            <a:fontRef idx="minor">
+              <a:schemeClr val="dk1"/>
+            </a:fontRef>
+          </p:style>
+          <p:txBody>
+            <a:bodyPr rtlCol="0" anchor="ctr"/>
+            <a:lstStyle/>
+            <a:p>
+              <a:pPr algn="ctr"/>
+              <a:r>
+                <a:rPr lang="en-US" altLang="zh-CN" sz="800">
+                  <a:ln w="0"/>
+                  <a:solidFill>
+                    <a:schemeClr val="tx1"/>
+                  </a:solidFill>
+                  <a:effectLst>
+                    <a:outerShdw blurRad="38100" dist="19050" dir="2700000" algn="tl" rotWithShape="0">
+                      <a:schemeClr val="dk1">
+                        <a:alpha val="40000"/>
+                      </a:schemeClr>
+                    </a:outerShdw>
+                  </a:effectLst>
+                </a:rPr>
+                <a:t>attack</a:t>
+              </a:r>
+              <a:endParaRPr lang="en-US" sz="800">
+                <a:ln w="0"/>
+                <a:solidFill>
+                  <a:schemeClr val="tx1"/>
+                </a:solidFill>
+                <a:effectLst>
+                  <a:outerShdw blurRad="38100" dist="19050" dir="2700000" algn="tl" rotWithShape="0">
+                    <a:schemeClr val="dk1">
+                      <a:alpha val="40000"/>
+                    </a:schemeClr>
+                  </a:outerShdw>
+                </a:effectLst>
+              </a:endParaRPr>
+            </a:p>
+          </p:txBody>
+        </p:sp>
+        <p:sp>
+          <p:nvSpPr>
+            <p:cNvPr id="71" name="Rectangle 70">
+              <a:extLst>
+                <a:ext uri="{FF2B5EF4-FFF2-40B4-BE49-F238E27FC236}">
+                  <a16:creationId xmlns:a16="http://schemas.microsoft.com/office/drawing/2014/main" id="{BB23A304-3133-FFFC-BA77-35B0AB9925F7}"/>
+                </a:ext>
+              </a:extLst>
+            </p:cNvPr>
+            <p:cNvSpPr/>
+            <p:nvPr/>
+          </p:nvSpPr>
+          <p:spPr>
+            <a:xfrm>
+              <a:off x="2764927" y="1740989"/>
+              <a:ext cx="517350" cy="132612"/>
+            </a:xfrm>
+            <a:prstGeom prst="rect">
+              <a:avLst/>
+            </a:prstGeom>
+            <a:ln>
+              <a:solidFill>
+                <a:schemeClr val="accent3">
+                  <a:lumMod val="75000"/>
+                  <a:alpha val="50000"/>
+                </a:schemeClr>
+              </a:solidFill>
+              <a:prstDash val="sysDash"/>
+            </a:ln>
+          </p:spPr>
+          <p:style>
+            <a:lnRef idx="2">
+              <a:schemeClr val="dk1"/>
+            </a:lnRef>
+            <a:fillRef idx="1">
+              <a:schemeClr val="lt1"/>
+            </a:fillRef>
+            <a:effectRef idx="0">
+              <a:schemeClr val="dk1"/>
+            </a:effectRef>
+            <a:fontRef idx="minor">
+              <a:schemeClr val="dk1"/>
+            </a:fontRef>
+          </p:style>
+          <p:txBody>
+            <a:bodyPr rtlCol="0" anchor="ctr"/>
+            <a:lstStyle/>
+            <a:p>
+              <a:pPr algn="ctr"/>
+              <a:r>
+                <a:rPr lang="en-US" altLang="zh-CN" sz="800">
+                  <a:ln w="0"/>
+                  <a:solidFill>
+                    <a:schemeClr val="tx1"/>
+                  </a:solidFill>
+                  <a:effectLst>
+                    <a:outerShdw blurRad="38100" dist="19050" dir="2700000" algn="tl" rotWithShape="0">
+                      <a:schemeClr val="dk1">
+                        <a:alpha val="40000"/>
+                      </a:schemeClr>
+                    </a:outerShdw>
+                  </a:effectLst>
+                </a:rPr>
+                <a:t>normal</a:t>
+              </a:r>
+              <a:endParaRPr lang="en-US" sz="800">
+                <a:ln w="0"/>
+                <a:solidFill>
+                  <a:schemeClr val="tx1"/>
+                </a:solidFill>
+                <a:effectLst>
+                  <a:outerShdw blurRad="38100" dist="19050" dir="2700000" algn="tl" rotWithShape="0">
+                    <a:schemeClr val="dk1">
+                      <a:alpha val="40000"/>
+                    </a:schemeClr>
+                  </a:outerShdw>
+                </a:effectLst>
+              </a:endParaRPr>
+            </a:p>
+          </p:txBody>
+        </p:sp>
+        <p:sp>
+          <p:nvSpPr>
+            <p:cNvPr id="72" name="TextBox 71">
+              <a:extLst>
+                <a:ext uri="{FF2B5EF4-FFF2-40B4-BE49-F238E27FC236}">
+                  <a16:creationId xmlns:a16="http://schemas.microsoft.com/office/drawing/2014/main" id="{E4E5F51E-54AE-A4DA-44E3-3B28801864C1}"/>
+                </a:ext>
+              </a:extLst>
+            </p:cNvPr>
+            <p:cNvSpPr txBox="1"/>
+            <p:nvPr/>
+          </p:nvSpPr>
+          <p:spPr>
+            <a:xfrm>
+              <a:off x="2641600" y="2868438"/>
+              <a:ext cx="652698" cy="246221"/>
+            </a:xfrm>
+            <a:prstGeom prst="rect">
+              <a:avLst/>
+            </a:prstGeom>
+            <a:noFill/>
+          </p:spPr>
+          <p:txBody>
+            <a:bodyPr wrap="square" rtlCol="0">
+              <a:spAutoFit/>
+            </a:bodyPr>
+            <a:lstStyle/>
+            <a:p>
+              <a:r>
+                <a:rPr lang="en-US" sz="1000"/>
+                <a:t>Test</a:t>
+              </a:r>
+            </a:p>
+          </p:txBody>
+        </p:sp>
+        <p:sp>
+          <p:nvSpPr>
+            <p:cNvPr id="73" name="TextBox 72">
+              <a:extLst>
+                <a:ext uri="{FF2B5EF4-FFF2-40B4-BE49-F238E27FC236}">
+                  <a16:creationId xmlns:a16="http://schemas.microsoft.com/office/drawing/2014/main" id="{58C31ACD-ACA6-096C-05E0-6A8CDCEDE838}"/>
+                </a:ext>
+              </a:extLst>
+            </p:cNvPr>
+            <p:cNvSpPr txBox="1"/>
+            <p:nvPr/>
+          </p:nvSpPr>
+          <p:spPr>
+            <a:xfrm>
+              <a:off x="2621514" y="2244926"/>
+              <a:ext cx="652698" cy="246221"/>
+            </a:xfrm>
+            <a:prstGeom prst="rect">
+              <a:avLst/>
+            </a:prstGeom>
+            <a:noFill/>
+          </p:spPr>
+          <p:txBody>
+            <a:bodyPr wrap="square" rtlCol="0">
+              <a:spAutoFit/>
+            </a:bodyPr>
+            <a:lstStyle/>
+            <a:p>
+              <a:r>
+                <a:rPr lang="en-US" sz="1000"/>
+                <a:t>Train</a:t>
+              </a:r>
+            </a:p>
+          </p:txBody>
+        </p:sp>
+        <p:sp>
+          <p:nvSpPr>
+            <p:cNvPr id="74" name="TextBox 73">
+              <a:extLst>
+                <a:ext uri="{FF2B5EF4-FFF2-40B4-BE49-F238E27FC236}">
+                  <a16:creationId xmlns:a16="http://schemas.microsoft.com/office/drawing/2014/main" id="{85A42BEC-E9EF-9C69-762A-A4EE23D7D400}"/>
+                </a:ext>
+              </a:extLst>
+            </p:cNvPr>
+            <p:cNvSpPr txBox="1"/>
+            <p:nvPr/>
+          </p:nvSpPr>
+          <p:spPr>
+            <a:xfrm>
+              <a:off x="8055429" y="3976914"/>
+              <a:ext cx="957942" cy="523220"/>
+            </a:xfrm>
+            <a:prstGeom prst="rect">
+              <a:avLst/>
+            </a:prstGeom>
+            <a:noFill/>
+          </p:spPr>
+          <p:txBody>
+            <a:bodyPr wrap="square" rtlCol="0">
+              <a:spAutoFit/>
+            </a:bodyPr>
+            <a:lstStyle/>
+            <a:p>
+              <a:r>
+                <a:rPr lang="en-US" sz="1400" dirty="0"/>
+                <a:t>Network</a:t>
+              </a:r>
+              <a:r>
+                <a:rPr lang="zh-CN" altLang="en-US" sz="1400" dirty="0"/>
+                <a:t> </a:t>
+              </a:r>
+              <a:r>
+                <a:rPr lang="en-US" altLang="zh-CN" sz="1400" dirty="0"/>
+                <a:t>traffic</a:t>
+              </a:r>
+              <a:endParaRPr lang="en-US" sz="1400" dirty="0"/>
+            </a:p>
+          </p:txBody>
+        </p:sp>
         <p:cxnSp>
           <p:nvCxnSpPr>
-            <p:cNvPr id="39" name="Straight Connector 38">
+            <p:cNvPr id="76" name="Straight Arrow Connector 75">
               <a:extLst>
                 <a:ext uri="{FF2B5EF4-FFF2-40B4-BE49-F238E27FC236}">
-                  <a16:creationId xmlns:a16="http://schemas.microsoft.com/office/drawing/2014/main" id="{7BABCC0E-F8FC-0C35-13FF-8123DF0F4204}"/>
+                  <a16:creationId xmlns:a16="http://schemas.microsoft.com/office/drawing/2014/main" id="{10389F9C-4598-137B-4745-F71A0E0830AC}"/>
                 </a:ext>
               </a:extLst>
             </p:cNvPr>
             <p:cNvCxnSpPr>
-              <a:stCxn id="18" idx="4"/>
-              <a:endCxn id="22" idx="0"/>
+              <a:cxnSpLocks/>
+              <a:stCxn id="51" idx="3"/>
+              <a:endCxn id="61" idx="2"/>
             </p:cNvCxnSpPr>
             <p:nvPr/>
           </p:nvCxnSpPr>
           <p:spPr>
             <a:xfrm>
-              <a:off x="5948026" y="5476404"/>
-              <a:ext cx="166771" cy="110494"/>
+              <a:off x="4874188" y="2619678"/>
+              <a:ext cx="725436" cy="2056"/>
             </a:xfrm>
-            <a:prstGeom prst="line">
+            <a:prstGeom prst="straightConnector1">
               <a:avLst/>
             </a:prstGeom>
+            <a:ln>
+              <a:tailEnd type="triangle"/>
+            </a:ln>
           </p:spPr>
           <p:style>
             <a:lnRef idx="2">
@@ -46685,29 +45484,1946 @@
             </a:fontRef>
           </p:style>
         </p:cxnSp>
+        <p:sp>
+          <p:nvSpPr>
+            <p:cNvPr id="77" name="Right Arrow 76">
+              <a:extLst>
+                <a:ext uri="{FF2B5EF4-FFF2-40B4-BE49-F238E27FC236}">
+                  <a16:creationId xmlns:a16="http://schemas.microsoft.com/office/drawing/2014/main" id="{BAF0A316-76DD-478D-567B-A5050D8F6F37}"/>
+                </a:ext>
+              </a:extLst>
+            </p:cNvPr>
+            <p:cNvSpPr/>
+            <p:nvPr/>
+          </p:nvSpPr>
+          <p:spPr>
+            <a:xfrm>
+              <a:off x="7284231" y="5402806"/>
+              <a:ext cx="796821" cy="214793"/>
+            </a:xfrm>
+            <a:prstGeom prst="rightArrow">
+              <a:avLst/>
+            </a:prstGeom>
+            <a:ln>
+              <a:solidFill>
+                <a:schemeClr val="tx2">
+                  <a:lumMod val="75000"/>
+                  <a:alpha val="50000"/>
+                </a:schemeClr>
+              </a:solidFill>
+              <a:prstDash val="sysDash"/>
+            </a:ln>
+          </p:spPr>
+          <p:style>
+            <a:lnRef idx="2">
+              <a:schemeClr val="dk1"/>
+            </a:lnRef>
+            <a:fillRef idx="1">
+              <a:schemeClr val="lt1"/>
+            </a:fillRef>
+            <a:effectRef idx="0">
+              <a:schemeClr val="dk1"/>
+            </a:effectRef>
+            <a:fontRef idx="minor">
+              <a:schemeClr val="dk1"/>
+            </a:fontRef>
+          </p:style>
+          <p:txBody>
+            <a:bodyPr rtlCol="0" anchor="ctr"/>
+            <a:lstStyle/>
+            <a:p>
+              <a:pPr algn="ctr"/>
+              <a:endParaRPr lang="en-US"/>
+            </a:p>
+          </p:txBody>
+        </p:sp>
+        <p:sp>
+          <p:nvSpPr>
+            <p:cNvPr id="78" name="TextBox 77">
+              <a:extLst>
+                <a:ext uri="{FF2B5EF4-FFF2-40B4-BE49-F238E27FC236}">
+                  <a16:creationId xmlns:a16="http://schemas.microsoft.com/office/drawing/2014/main" id="{CFCC8544-DE2C-F5C4-BC42-B00DD8CE1FD7}"/>
+                </a:ext>
+              </a:extLst>
+            </p:cNvPr>
+            <p:cNvSpPr txBox="1"/>
+            <p:nvPr/>
+          </p:nvSpPr>
+          <p:spPr>
+            <a:xfrm>
+              <a:off x="8055429" y="5130146"/>
+              <a:ext cx="1146629" cy="738664"/>
+            </a:xfrm>
+            <a:prstGeom prst="rect">
+              <a:avLst/>
+            </a:prstGeom>
+            <a:noFill/>
+          </p:spPr>
+          <p:txBody>
+            <a:bodyPr wrap="square" rtlCol="0">
+              <a:spAutoFit/>
+            </a:bodyPr>
+            <a:lstStyle/>
+            <a:p>
+              <a:r>
+                <a:rPr lang="en-US" sz="1400" dirty="0"/>
+                <a:t>CPU</a:t>
+              </a:r>
+            </a:p>
+            <a:p>
+              <a:endParaRPr lang="en-US" sz="1400" dirty="0"/>
+            </a:p>
+            <a:p>
+              <a:r>
+                <a:rPr lang="en-US" sz="1400" dirty="0"/>
+                <a:t>Memory</a:t>
+              </a:r>
+            </a:p>
+          </p:txBody>
+        </p:sp>
+        <p:sp>
+          <p:nvSpPr>
+            <p:cNvPr id="79" name="TextBox 78">
+              <a:extLst>
+                <a:ext uri="{FF2B5EF4-FFF2-40B4-BE49-F238E27FC236}">
+                  <a16:creationId xmlns:a16="http://schemas.microsoft.com/office/drawing/2014/main" id="{40FEA40F-045D-3818-232F-1989D72E2D17}"/>
+                </a:ext>
+              </a:extLst>
+            </p:cNvPr>
+            <p:cNvSpPr txBox="1"/>
+            <p:nvPr/>
+          </p:nvSpPr>
+          <p:spPr>
+            <a:xfrm>
+              <a:off x="7997371" y="2262349"/>
+              <a:ext cx="957942" cy="738664"/>
+            </a:xfrm>
+            <a:prstGeom prst="rect">
+              <a:avLst/>
+            </a:prstGeom>
+            <a:noFill/>
+          </p:spPr>
+          <p:txBody>
+            <a:bodyPr wrap="square" rtlCol="0">
+              <a:spAutoFit/>
+            </a:bodyPr>
+            <a:lstStyle/>
+            <a:p>
+              <a:r>
+                <a:rPr lang="en-GB" sz="1400" dirty="0"/>
+                <a:t>Accuracy</a:t>
+              </a:r>
+            </a:p>
+            <a:p>
+              <a:endParaRPr lang="en-GB" sz="1400" dirty="0"/>
+            </a:p>
+            <a:p>
+              <a:r>
+                <a:rPr lang="en-GB" sz="1400" dirty="0"/>
+                <a:t>F</a:t>
+              </a:r>
+              <a:r>
+                <a:rPr lang="en-US" altLang="zh-CN" sz="1400" dirty="0"/>
+                <a:t>1</a:t>
+              </a:r>
+              <a:r>
+                <a:rPr lang="zh-CN" altLang="en-US" sz="1400" dirty="0"/>
+                <a:t> </a:t>
+              </a:r>
+              <a:r>
+                <a:rPr lang="en-US" altLang="zh-CN" sz="1400" dirty="0"/>
+                <a:t>score</a:t>
+              </a:r>
+              <a:endParaRPr lang="en-US" sz="1400" dirty="0"/>
+            </a:p>
+          </p:txBody>
+        </p:sp>
+        <p:pic>
+          <p:nvPicPr>
+            <p:cNvPr id="80" name="Picture 79">
+              <a:extLst>
+                <a:ext uri="{FF2B5EF4-FFF2-40B4-BE49-F238E27FC236}">
+                  <a16:creationId xmlns:a16="http://schemas.microsoft.com/office/drawing/2014/main" id="{6488728A-F82B-5347-ACAE-568692FF907D}"/>
+                </a:ext>
+              </a:extLst>
+            </p:cNvPr>
+            <p:cNvPicPr>
+              <a:picLocks noChangeAspect="1"/>
+            </p:cNvPicPr>
+            <p:nvPr/>
+          </p:nvPicPr>
+          <p:blipFill>
+            <a:blip r:embed="rId4"/>
+            <a:stretch>
+              <a:fillRect/>
+            </a:stretch>
+          </p:blipFill>
+          <p:spPr>
+            <a:xfrm>
+              <a:off x="3336848" y="2970214"/>
+              <a:ext cx="1501822" cy="351825"/>
+            </a:xfrm>
+            <a:prstGeom prst="rect">
+              <a:avLst/>
+            </a:prstGeom>
+          </p:spPr>
+        </p:pic>
+        <p:pic>
+          <p:nvPicPr>
+            <p:cNvPr id="81" name="Picture 80">
+              <a:extLst>
+                <a:ext uri="{FF2B5EF4-FFF2-40B4-BE49-F238E27FC236}">
+                  <a16:creationId xmlns:a16="http://schemas.microsoft.com/office/drawing/2014/main" id="{C0550D18-DE3C-F599-E431-5240A0F0D7A9}"/>
+                </a:ext>
+              </a:extLst>
+            </p:cNvPr>
+            <p:cNvPicPr>
+              <a:picLocks noChangeAspect="1"/>
+            </p:cNvPicPr>
+            <p:nvPr/>
+          </p:nvPicPr>
+          <p:blipFill>
+            <a:blip r:embed="rId5"/>
+            <a:stretch>
+              <a:fillRect/>
+            </a:stretch>
+          </p:blipFill>
+          <p:spPr>
+            <a:xfrm>
+              <a:off x="3536028" y="2251668"/>
+              <a:ext cx="1060982" cy="519720"/>
+            </a:xfrm>
+            <a:prstGeom prst="rect">
+              <a:avLst/>
+            </a:prstGeom>
+          </p:spPr>
+        </p:pic>
+        <p:sp>
+          <p:nvSpPr>
+            <p:cNvPr id="4" name="Rectangle 3">
+              <a:extLst>
+                <a:ext uri="{FF2B5EF4-FFF2-40B4-BE49-F238E27FC236}">
+                  <a16:creationId xmlns:a16="http://schemas.microsoft.com/office/drawing/2014/main" id="{7C9932A4-32D4-F522-A763-3EB6F836FB90}"/>
+                </a:ext>
+              </a:extLst>
+            </p:cNvPr>
+            <p:cNvSpPr/>
+            <p:nvPr/>
+          </p:nvSpPr>
+          <p:spPr>
+            <a:xfrm>
+              <a:off x="355252" y="1270466"/>
+              <a:ext cx="7140659" cy="2357664"/>
+            </a:xfrm>
+            <a:prstGeom prst="rect">
+              <a:avLst/>
+            </a:prstGeom>
+            <a:noFill/>
+            <a:ln>
+              <a:prstDash val="dash"/>
+            </a:ln>
+          </p:spPr>
+          <p:style>
+            <a:lnRef idx="1">
+              <a:schemeClr val="accent1"/>
+            </a:lnRef>
+            <a:fillRef idx="3">
+              <a:schemeClr val="accent1"/>
+            </a:fillRef>
+            <a:effectRef idx="2">
+              <a:schemeClr val="accent1"/>
+            </a:effectRef>
+            <a:fontRef idx="minor">
+              <a:schemeClr val="lt1"/>
+            </a:fontRef>
+          </p:style>
+          <p:txBody>
+            <a:bodyPr rtlCol="0" anchor="ctr"/>
+            <a:lstStyle/>
+            <a:p>
+              <a:pPr algn="ctr"/>
+              <a:endParaRPr lang="en-US"/>
+            </a:p>
+          </p:txBody>
+        </p:sp>
+        <p:sp>
+          <p:nvSpPr>
+            <p:cNvPr id="5" name="TextBox 4">
+              <a:extLst>
+                <a:ext uri="{FF2B5EF4-FFF2-40B4-BE49-F238E27FC236}">
+                  <a16:creationId xmlns:a16="http://schemas.microsoft.com/office/drawing/2014/main" id="{1770629D-73C8-A0CD-A17F-762F9D35451E}"/>
+                </a:ext>
+              </a:extLst>
+            </p:cNvPr>
+            <p:cNvSpPr txBox="1"/>
+            <p:nvPr/>
+          </p:nvSpPr>
+          <p:spPr>
+            <a:xfrm>
+              <a:off x="449758" y="4364211"/>
+              <a:ext cx="2124168" cy="369332"/>
+            </a:xfrm>
+            <a:prstGeom prst="rect">
+              <a:avLst/>
+            </a:prstGeom>
+            <a:noFill/>
+          </p:spPr>
+          <p:txBody>
+            <a:bodyPr wrap="square" rtlCol="0">
+              <a:spAutoFit/>
+            </a:bodyPr>
+            <a:lstStyle/>
+            <a:p>
+              <a:r>
+                <a:rPr lang="en-US" dirty="0"/>
+                <a:t>Edge</a:t>
+              </a:r>
+              <a:r>
+                <a:rPr lang="zh-CN" altLang="en-US" dirty="0"/>
+                <a:t> </a:t>
+              </a:r>
+              <a:r>
+                <a:rPr lang="en-GB" dirty="0"/>
+                <a:t>layer</a:t>
+              </a:r>
+              <a:endParaRPr lang="en-US" dirty="0"/>
+            </a:p>
+          </p:txBody>
+        </p:sp>
+        <p:sp>
+          <p:nvSpPr>
+            <p:cNvPr id="7" name="TextBox 6">
+              <a:extLst>
+                <a:ext uri="{FF2B5EF4-FFF2-40B4-BE49-F238E27FC236}">
+                  <a16:creationId xmlns:a16="http://schemas.microsoft.com/office/drawing/2014/main" id="{854755DE-752C-BCAE-3133-763CFEF59332}"/>
+                </a:ext>
+              </a:extLst>
+            </p:cNvPr>
+            <p:cNvSpPr txBox="1"/>
+            <p:nvPr/>
+          </p:nvSpPr>
+          <p:spPr>
+            <a:xfrm>
+              <a:off x="355252" y="1272445"/>
+              <a:ext cx="2124168" cy="369332"/>
+            </a:xfrm>
+            <a:prstGeom prst="rect">
+              <a:avLst/>
+            </a:prstGeom>
+            <a:noFill/>
+          </p:spPr>
+          <p:txBody>
+            <a:bodyPr wrap="square" rtlCol="0">
+              <a:spAutoFit/>
+            </a:bodyPr>
+            <a:lstStyle/>
+            <a:p>
+              <a:r>
+                <a:rPr lang="en-GB" dirty="0"/>
+                <a:t>Cloud layer</a:t>
+              </a:r>
+            </a:p>
+          </p:txBody>
+        </p:sp>
+        <p:pic>
+          <p:nvPicPr>
+            <p:cNvPr id="10" name="Picture 9">
+              <a:extLst>
+                <a:ext uri="{FF2B5EF4-FFF2-40B4-BE49-F238E27FC236}">
+                  <a16:creationId xmlns:a16="http://schemas.microsoft.com/office/drawing/2014/main" id="{96811831-89C9-59F0-2294-9692BCB60E51}"/>
+                </a:ext>
+              </a:extLst>
+            </p:cNvPr>
+            <p:cNvPicPr>
+              <a:picLocks noChangeAspect="1"/>
+            </p:cNvPicPr>
+            <p:nvPr/>
+          </p:nvPicPr>
+          <p:blipFill>
+            <a:blip r:embed="rId6"/>
+            <a:stretch>
+              <a:fillRect/>
+            </a:stretch>
+          </p:blipFill>
+          <p:spPr>
+            <a:xfrm>
+              <a:off x="885385" y="2220686"/>
+              <a:ext cx="1290317" cy="398992"/>
+            </a:xfrm>
+            <a:prstGeom prst="rect">
+              <a:avLst/>
+            </a:prstGeom>
+          </p:spPr>
+        </p:pic>
+        <p:sp>
+          <p:nvSpPr>
+            <p:cNvPr id="13" name="Down Arrow 12">
+              <a:extLst>
+                <a:ext uri="{FF2B5EF4-FFF2-40B4-BE49-F238E27FC236}">
+                  <a16:creationId xmlns:a16="http://schemas.microsoft.com/office/drawing/2014/main" id="{5930CA17-7B55-A33A-0F68-6DBBD0F0BD7E}"/>
+                </a:ext>
+              </a:extLst>
+            </p:cNvPr>
+            <p:cNvSpPr/>
+            <p:nvPr/>
+          </p:nvSpPr>
+          <p:spPr>
+            <a:xfrm>
+              <a:off x="1435100" y="2619678"/>
+              <a:ext cx="212989" cy="248760"/>
+            </a:xfrm>
+            <a:prstGeom prst="downArrow">
+              <a:avLst/>
+            </a:prstGeom>
+            <a:gradFill flip="none" rotWithShape="1">
+              <a:gsLst>
+                <a:gs pos="0">
+                  <a:schemeClr val="accent5">
+                    <a:lumMod val="5000"/>
+                    <a:lumOff val="95000"/>
+                  </a:schemeClr>
+                </a:gs>
+                <a:gs pos="74000">
+                  <a:schemeClr val="accent5">
+                    <a:lumMod val="45000"/>
+                    <a:lumOff val="55000"/>
+                  </a:schemeClr>
+                </a:gs>
+                <a:gs pos="83000">
+                  <a:schemeClr val="accent5">
+                    <a:lumMod val="45000"/>
+                    <a:lumOff val="55000"/>
+                  </a:schemeClr>
+                </a:gs>
+                <a:gs pos="100000">
+                  <a:schemeClr val="accent5">
+                    <a:lumMod val="30000"/>
+                    <a:lumOff val="70000"/>
+                  </a:schemeClr>
+                </a:gs>
+              </a:gsLst>
+              <a:lin ang="5400000" scaled="1"/>
+              <a:tileRect/>
+            </a:gradFill>
+          </p:spPr>
+          <p:style>
+            <a:lnRef idx="1">
+              <a:schemeClr val="accent1"/>
+            </a:lnRef>
+            <a:fillRef idx="3">
+              <a:schemeClr val="accent1"/>
+            </a:fillRef>
+            <a:effectRef idx="2">
+              <a:schemeClr val="accent1"/>
+            </a:effectRef>
+            <a:fontRef idx="minor">
+              <a:schemeClr val="lt1"/>
+            </a:fontRef>
+          </p:style>
+          <p:txBody>
+            <a:bodyPr rtlCol="0" anchor="ctr"/>
+            <a:lstStyle/>
+            <a:p>
+              <a:pPr algn="ctr"/>
+              <a:endParaRPr lang="en-US"/>
+            </a:p>
+          </p:txBody>
+        </p:sp>
+        <p:sp>
+          <p:nvSpPr>
+            <p:cNvPr id="12" name="Rounded Rectangle 11">
+              <a:extLst>
+                <a:ext uri="{FF2B5EF4-FFF2-40B4-BE49-F238E27FC236}">
+                  <a16:creationId xmlns:a16="http://schemas.microsoft.com/office/drawing/2014/main" id="{705DE116-2B12-7A1F-1998-18F0A82996FE}"/>
+                </a:ext>
+              </a:extLst>
+            </p:cNvPr>
+            <p:cNvSpPr/>
+            <p:nvPr/>
+          </p:nvSpPr>
+          <p:spPr>
+            <a:xfrm>
+              <a:off x="1714499" y="2946598"/>
+              <a:ext cx="461203" cy="349855"/>
+            </a:xfrm>
+            <a:prstGeom prst="roundRect">
+              <a:avLst>
+                <a:gd name="adj" fmla="val 0"/>
+              </a:avLst>
+            </a:prstGeom>
+            <a:solidFill>
+              <a:schemeClr val="accent6">
+                <a:lumMod val="60000"/>
+                <a:lumOff val="40000"/>
+              </a:schemeClr>
+            </a:solidFill>
+          </p:spPr>
+          <p:style>
+            <a:lnRef idx="1">
+              <a:schemeClr val="accent1"/>
+            </a:lnRef>
+            <a:fillRef idx="3">
+              <a:schemeClr val="accent1"/>
+            </a:fillRef>
+            <a:effectRef idx="2">
+              <a:schemeClr val="accent1"/>
+            </a:effectRef>
+            <a:fontRef idx="minor">
+              <a:schemeClr val="lt1"/>
+            </a:fontRef>
+          </p:style>
+          <p:txBody>
+            <a:bodyPr vert="horz" rtlCol="0" anchor="ctr"/>
+            <a:lstStyle/>
+            <a:p>
+              <a:pPr algn="ctr"/>
+              <a:r>
+                <a:rPr lang="en-US" sz="1200">
+                  <a:solidFill>
+                    <a:schemeClr val="bg1"/>
+                  </a:solidFill>
+                </a:rPr>
+                <a:t>Test</a:t>
+              </a:r>
+            </a:p>
+          </p:txBody>
+        </p:sp>
+        <p:sp>
+          <p:nvSpPr>
+            <p:cNvPr id="14" name="Rectangle 13">
+              <a:extLst>
+                <a:ext uri="{FF2B5EF4-FFF2-40B4-BE49-F238E27FC236}">
+                  <a16:creationId xmlns:a16="http://schemas.microsoft.com/office/drawing/2014/main" id="{0D87838E-0C28-3EFD-E282-AEC8F5C97DFF}"/>
+                </a:ext>
+              </a:extLst>
+            </p:cNvPr>
+            <p:cNvSpPr/>
+            <p:nvPr/>
+          </p:nvSpPr>
+          <p:spPr>
+            <a:xfrm>
+              <a:off x="885384" y="2948595"/>
+              <a:ext cx="829115" cy="345803"/>
+            </a:xfrm>
+            <a:prstGeom prst="rect">
+              <a:avLst/>
+            </a:prstGeom>
+            <a:solidFill>
+              <a:schemeClr val="tx2">
+                <a:lumMod val="40000"/>
+                <a:lumOff val="60000"/>
+              </a:schemeClr>
+            </a:solidFill>
+          </p:spPr>
+          <p:style>
+            <a:lnRef idx="1">
+              <a:schemeClr val="accent1"/>
+            </a:lnRef>
+            <a:fillRef idx="3">
+              <a:schemeClr val="accent1"/>
+            </a:fillRef>
+            <a:effectRef idx="2">
+              <a:schemeClr val="accent1"/>
+            </a:effectRef>
+            <a:fontRef idx="minor">
+              <a:schemeClr val="lt1"/>
+            </a:fontRef>
+          </p:style>
+          <p:txBody>
+            <a:bodyPr rtlCol="0" anchor="ctr"/>
+            <a:lstStyle/>
+            <a:p>
+              <a:pPr algn="ctr"/>
+              <a:r>
+                <a:rPr lang="en-US" sz="1400"/>
+                <a:t>Train</a:t>
+              </a:r>
+            </a:p>
+          </p:txBody>
+        </p:sp>
+        <p:grpSp>
+          <p:nvGrpSpPr>
+            <p:cNvPr id="116" name="Group 115">
+              <a:extLst>
+                <a:ext uri="{FF2B5EF4-FFF2-40B4-BE49-F238E27FC236}">
+                  <a16:creationId xmlns:a16="http://schemas.microsoft.com/office/drawing/2014/main" id="{3DD13C83-1060-62D8-BA3C-30E3B2934AA8}"/>
+                </a:ext>
+              </a:extLst>
+            </p:cNvPr>
+            <p:cNvGrpSpPr/>
+            <p:nvPr/>
+          </p:nvGrpSpPr>
+          <p:grpSpPr>
+            <a:xfrm>
+              <a:off x="5468493" y="5268518"/>
+              <a:ext cx="1270409" cy="797135"/>
+              <a:chOff x="5468493" y="5268518"/>
+              <a:chExt cx="1270409" cy="797135"/>
+            </a:xfrm>
+          </p:grpSpPr>
+          <p:cxnSp>
+            <p:nvCxnSpPr>
+              <p:cNvPr id="88" name="Straight Connector 87">
+                <a:extLst>
+                  <a:ext uri="{FF2B5EF4-FFF2-40B4-BE49-F238E27FC236}">
+                    <a16:creationId xmlns:a16="http://schemas.microsoft.com/office/drawing/2014/main" id="{DCB826BE-F844-691B-358F-0C553F9A8DAC}"/>
+                  </a:ext>
+                </a:extLst>
+              </p:cNvPr>
+              <p:cNvCxnSpPr>
+                <a:cxnSpLocks/>
+                <a:stCxn id="20" idx="0"/>
+                <a:endCxn id="21" idx="4"/>
+              </p:cNvCxnSpPr>
+              <p:nvPr/>
+            </p:nvCxnSpPr>
+            <p:spPr>
+              <a:xfrm flipV="1">
+                <a:off x="5787363" y="5476404"/>
+                <a:ext cx="829619" cy="111214"/>
+              </a:xfrm>
+              <a:prstGeom prst="line">
+                <a:avLst/>
+              </a:prstGeom>
+            </p:spPr>
+            <p:style>
+              <a:lnRef idx="2">
+                <a:schemeClr val="accent1"/>
+              </a:lnRef>
+              <a:fillRef idx="0">
+                <a:schemeClr val="accent1"/>
+              </a:fillRef>
+              <a:effectRef idx="1">
+                <a:schemeClr val="accent1"/>
+              </a:effectRef>
+              <a:fontRef idx="minor">
+                <a:schemeClr val="tx1"/>
+              </a:fontRef>
+            </p:style>
+          </p:cxnSp>
+          <p:sp>
+            <p:nvSpPr>
+              <p:cNvPr id="15" name="Oval 14">
+                <a:extLst>
+                  <a:ext uri="{FF2B5EF4-FFF2-40B4-BE49-F238E27FC236}">
+                    <a16:creationId xmlns:a16="http://schemas.microsoft.com/office/drawing/2014/main" id="{A94C761C-48AB-DD60-DA19-85A886820E18}"/>
+                  </a:ext>
+                </a:extLst>
+              </p:cNvPr>
+              <p:cNvSpPr/>
+              <p:nvPr/>
+            </p:nvSpPr>
+            <p:spPr>
+              <a:xfrm>
+                <a:off x="5468493" y="5268518"/>
+                <a:ext cx="243840" cy="200297"/>
+              </a:xfrm>
+              <a:prstGeom prst="ellipse">
+                <a:avLst/>
+              </a:prstGeom>
+              <a:solidFill>
+                <a:schemeClr val="bg1">
+                  <a:lumMod val="50000"/>
+                </a:schemeClr>
+              </a:solidFill>
+            </p:spPr>
+            <p:style>
+              <a:lnRef idx="1">
+                <a:schemeClr val="accent1"/>
+              </a:lnRef>
+              <a:fillRef idx="3">
+                <a:schemeClr val="accent1"/>
+              </a:fillRef>
+              <a:effectRef idx="2">
+                <a:schemeClr val="accent1"/>
+              </a:effectRef>
+              <a:fontRef idx="minor">
+                <a:schemeClr val="lt1"/>
+              </a:fontRef>
+            </p:style>
+            <p:txBody>
+              <a:bodyPr rtlCol="0" anchor="ctr"/>
+              <a:lstStyle/>
+              <a:p>
+                <a:pPr algn="ctr"/>
+                <a:endParaRPr lang="en-US"/>
+              </a:p>
+            </p:txBody>
+          </p:sp>
+          <p:sp>
+            <p:nvSpPr>
+              <p:cNvPr id="18" name="Oval 17">
+                <a:extLst>
+                  <a:ext uri="{FF2B5EF4-FFF2-40B4-BE49-F238E27FC236}">
+                    <a16:creationId xmlns:a16="http://schemas.microsoft.com/office/drawing/2014/main" id="{A207669A-2F18-74DE-EF98-15D460676C8E}"/>
+                  </a:ext>
+                </a:extLst>
+              </p:cNvPr>
+              <p:cNvSpPr/>
+              <p:nvPr/>
+            </p:nvSpPr>
+            <p:spPr>
+              <a:xfrm>
+                <a:off x="5826106" y="5276107"/>
+                <a:ext cx="243840" cy="200297"/>
+              </a:xfrm>
+              <a:prstGeom prst="ellipse">
+                <a:avLst/>
+              </a:prstGeom>
+              <a:solidFill>
+                <a:schemeClr val="bg1">
+                  <a:lumMod val="50000"/>
+                </a:schemeClr>
+              </a:solidFill>
+            </p:spPr>
+            <p:style>
+              <a:lnRef idx="1">
+                <a:schemeClr val="accent1"/>
+              </a:lnRef>
+              <a:fillRef idx="3">
+                <a:schemeClr val="accent1"/>
+              </a:fillRef>
+              <a:effectRef idx="2">
+                <a:schemeClr val="accent1"/>
+              </a:effectRef>
+              <a:fontRef idx="minor">
+                <a:schemeClr val="lt1"/>
+              </a:fontRef>
+            </p:style>
+            <p:txBody>
+              <a:bodyPr rtlCol="0" anchor="ctr"/>
+              <a:lstStyle/>
+              <a:p>
+                <a:pPr algn="ctr"/>
+                <a:endParaRPr lang="en-US"/>
+              </a:p>
+            </p:txBody>
+          </p:sp>
+          <p:sp>
+            <p:nvSpPr>
+              <p:cNvPr id="19" name="Oval 18">
+                <a:extLst>
+                  <a:ext uri="{FF2B5EF4-FFF2-40B4-BE49-F238E27FC236}">
+                    <a16:creationId xmlns:a16="http://schemas.microsoft.com/office/drawing/2014/main" id="{FA77EB64-8719-EF87-D29C-CA05EF81617A}"/>
+                  </a:ext>
+                </a:extLst>
+              </p:cNvPr>
+              <p:cNvSpPr/>
+              <p:nvPr/>
+            </p:nvSpPr>
+            <p:spPr>
+              <a:xfrm>
+                <a:off x="6162510" y="5276905"/>
+                <a:ext cx="243840" cy="200297"/>
+              </a:xfrm>
+              <a:prstGeom prst="ellipse">
+                <a:avLst/>
+              </a:prstGeom>
+              <a:solidFill>
+                <a:schemeClr val="bg1">
+                  <a:lumMod val="50000"/>
+                </a:schemeClr>
+              </a:solidFill>
+            </p:spPr>
+            <p:style>
+              <a:lnRef idx="1">
+                <a:schemeClr val="accent1"/>
+              </a:lnRef>
+              <a:fillRef idx="3">
+                <a:schemeClr val="accent1"/>
+              </a:fillRef>
+              <a:effectRef idx="2">
+                <a:schemeClr val="accent1"/>
+              </a:effectRef>
+              <a:fontRef idx="minor">
+                <a:schemeClr val="lt1"/>
+              </a:fontRef>
+            </p:style>
+            <p:txBody>
+              <a:bodyPr rtlCol="0" anchor="ctr"/>
+              <a:lstStyle/>
+              <a:p>
+                <a:pPr algn="ctr"/>
+                <a:endParaRPr lang="en-US"/>
+              </a:p>
+            </p:txBody>
+          </p:sp>
+          <p:sp>
+            <p:nvSpPr>
+              <p:cNvPr id="20" name="Oval 19">
+                <a:extLst>
+                  <a:ext uri="{FF2B5EF4-FFF2-40B4-BE49-F238E27FC236}">
+                    <a16:creationId xmlns:a16="http://schemas.microsoft.com/office/drawing/2014/main" id="{81CD0A4C-F4B8-B425-C0FD-908F17355677}"/>
+                  </a:ext>
+                </a:extLst>
+              </p:cNvPr>
+              <p:cNvSpPr/>
+              <p:nvPr/>
+            </p:nvSpPr>
+            <p:spPr>
+              <a:xfrm>
+                <a:off x="5665443" y="5587618"/>
+                <a:ext cx="243840" cy="200297"/>
+              </a:xfrm>
+              <a:prstGeom prst="ellipse">
+                <a:avLst/>
+              </a:prstGeom>
+              <a:solidFill>
+                <a:schemeClr val="bg1">
+                  <a:lumMod val="50000"/>
+                </a:schemeClr>
+              </a:solidFill>
+            </p:spPr>
+            <p:style>
+              <a:lnRef idx="1">
+                <a:schemeClr val="accent1"/>
+              </a:lnRef>
+              <a:fillRef idx="3">
+                <a:schemeClr val="accent1"/>
+              </a:fillRef>
+              <a:effectRef idx="2">
+                <a:schemeClr val="accent1"/>
+              </a:effectRef>
+              <a:fontRef idx="minor">
+                <a:schemeClr val="lt1"/>
+              </a:fontRef>
+            </p:style>
+            <p:txBody>
+              <a:bodyPr rtlCol="0" anchor="ctr"/>
+              <a:lstStyle/>
+              <a:p>
+                <a:pPr algn="ctr"/>
+                <a:endParaRPr lang="en-US"/>
+              </a:p>
+            </p:txBody>
+          </p:sp>
+          <p:sp>
+            <p:nvSpPr>
+              <p:cNvPr id="21" name="Oval 20">
+                <a:extLst>
+                  <a:ext uri="{FF2B5EF4-FFF2-40B4-BE49-F238E27FC236}">
+                    <a16:creationId xmlns:a16="http://schemas.microsoft.com/office/drawing/2014/main" id="{D88078BA-E23F-CDEB-61D2-2CD4EE7C9732}"/>
+                  </a:ext>
+                </a:extLst>
+              </p:cNvPr>
+              <p:cNvSpPr/>
+              <p:nvPr/>
+            </p:nvSpPr>
+            <p:spPr>
+              <a:xfrm>
+                <a:off x="6495062" y="5276107"/>
+                <a:ext cx="243840" cy="200297"/>
+              </a:xfrm>
+              <a:prstGeom prst="ellipse">
+                <a:avLst/>
+              </a:prstGeom>
+              <a:solidFill>
+                <a:schemeClr val="bg1">
+                  <a:lumMod val="50000"/>
+                </a:schemeClr>
+              </a:solidFill>
+            </p:spPr>
+            <p:style>
+              <a:lnRef idx="1">
+                <a:schemeClr val="accent1"/>
+              </a:lnRef>
+              <a:fillRef idx="3">
+                <a:schemeClr val="accent1"/>
+              </a:fillRef>
+              <a:effectRef idx="2">
+                <a:schemeClr val="accent1"/>
+              </a:effectRef>
+              <a:fontRef idx="minor">
+                <a:schemeClr val="lt1"/>
+              </a:fontRef>
+            </p:style>
+            <p:txBody>
+              <a:bodyPr rtlCol="0" anchor="ctr"/>
+              <a:lstStyle/>
+              <a:p>
+                <a:pPr algn="ctr"/>
+                <a:endParaRPr lang="en-US"/>
+              </a:p>
+            </p:txBody>
+          </p:sp>
+          <p:sp>
+            <p:nvSpPr>
+              <p:cNvPr id="22" name="Oval 21">
+                <a:extLst>
+                  <a:ext uri="{FF2B5EF4-FFF2-40B4-BE49-F238E27FC236}">
+                    <a16:creationId xmlns:a16="http://schemas.microsoft.com/office/drawing/2014/main" id="{08CA9175-388D-6099-2700-905D3E649905}"/>
+                  </a:ext>
+                </a:extLst>
+              </p:cNvPr>
+              <p:cNvSpPr/>
+              <p:nvPr/>
+            </p:nvSpPr>
+            <p:spPr>
+              <a:xfrm>
+                <a:off x="5992877" y="5586898"/>
+                <a:ext cx="243840" cy="200297"/>
+              </a:xfrm>
+              <a:prstGeom prst="ellipse">
+                <a:avLst/>
+              </a:prstGeom>
+              <a:solidFill>
+                <a:schemeClr val="bg1">
+                  <a:lumMod val="50000"/>
+                </a:schemeClr>
+              </a:solidFill>
+            </p:spPr>
+            <p:style>
+              <a:lnRef idx="1">
+                <a:schemeClr val="accent1"/>
+              </a:lnRef>
+              <a:fillRef idx="3">
+                <a:schemeClr val="accent1"/>
+              </a:fillRef>
+              <a:effectRef idx="2">
+                <a:schemeClr val="accent1"/>
+              </a:effectRef>
+              <a:fontRef idx="minor">
+                <a:schemeClr val="lt1"/>
+              </a:fontRef>
+            </p:style>
+            <p:txBody>
+              <a:bodyPr rtlCol="0" anchor="ctr"/>
+              <a:lstStyle/>
+              <a:p>
+                <a:pPr algn="ctr"/>
+                <a:endParaRPr lang="en-US"/>
+              </a:p>
+            </p:txBody>
+          </p:sp>
+          <p:sp>
+            <p:nvSpPr>
+              <p:cNvPr id="23" name="Oval 22">
+                <a:extLst>
+                  <a:ext uri="{FF2B5EF4-FFF2-40B4-BE49-F238E27FC236}">
+                    <a16:creationId xmlns:a16="http://schemas.microsoft.com/office/drawing/2014/main" id="{F7A06578-1DEB-DC17-DAC1-2D3445941FF9}"/>
+                  </a:ext>
+                </a:extLst>
+              </p:cNvPr>
+              <p:cNvSpPr/>
+              <p:nvPr/>
+            </p:nvSpPr>
+            <p:spPr>
+              <a:xfrm>
+                <a:off x="6317798" y="5586898"/>
+                <a:ext cx="243840" cy="200297"/>
+              </a:xfrm>
+              <a:prstGeom prst="ellipse">
+                <a:avLst/>
+              </a:prstGeom>
+              <a:solidFill>
+                <a:schemeClr val="bg1">
+                  <a:lumMod val="50000"/>
+                </a:schemeClr>
+              </a:solidFill>
+            </p:spPr>
+            <p:style>
+              <a:lnRef idx="1">
+                <a:schemeClr val="accent1"/>
+              </a:lnRef>
+              <a:fillRef idx="3">
+                <a:schemeClr val="accent1"/>
+              </a:fillRef>
+              <a:effectRef idx="2">
+                <a:schemeClr val="accent1"/>
+              </a:effectRef>
+              <a:fontRef idx="minor">
+                <a:schemeClr val="lt1"/>
+              </a:fontRef>
+            </p:style>
+            <p:txBody>
+              <a:bodyPr rtlCol="0" anchor="ctr"/>
+              <a:lstStyle/>
+              <a:p>
+                <a:pPr algn="ctr"/>
+                <a:endParaRPr lang="en-US"/>
+              </a:p>
+            </p:txBody>
+          </p:sp>
+          <p:sp>
+            <p:nvSpPr>
+              <p:cNvPr id="24" name="Oval 23">
+                <a:extLst>
+                  <a:ext uri="{FF2B5EF4-FFF2-40B4-BE49-F238E27FC236}">
+                    <a16:creationId xmlns:a16="http://schemas.microsoft.com/office/drawing/2014/main" id="{17FEF3B6-DEA5-06E3-2898-C204D1ABD2D4}"/>
+                  </a:ext>
+                </a:extLst>
+              </p:cNvPr>
+              <p:cNvSpPr/>
+              <p:nvPr/>
+            </p:nvSpPr>
+            <p:spPr>
+              <a:xfrm>
+                <a:off x="5826106" y="5865356"/>
+                <a:ext cx="243840" cy="200297"/>
+              </a:xfrm>
+              <a:prstGeom prst="ellipse">
+                <a:avLst/>
+              </a:prstGeom>
+              <a:solidFill>
+                <a:schemeClr val="bg1">
+                  <a:lumMod val="50000"/>
+                </a:schemeClr>
+              </a:solidFill>
+            </p:spPr>
+            <p:style>
+              <a:lnRef idx="1">
+                <a:schemeClr val="accent1"/>
+              </a:lnRef>
+              <a:fillRef idx="3">
+                <a:schemeClr val="accent1"/>
+              </a:fillRef>
+              <a:effectRef idx="2">
+                <a:schemeClr val="accent1"/>
+              </a:effectRef>
+              <a:fontRef idx="minor">
+                <a:schemeClr val="lt1"/>
+              </a:fontRef>
+            </p:style>
+            <p:txBody>
+              <a:bodyPr rtlCol="0" anchor="ctr"/>
+              <a:lstStyle/>
+              <a:p>
+                <a:pPr algn="ctr"/>
+                <a:endParaRPr lang="en-US"/>
+              </a:p>
+            </p:txBody>
+          </p:sp>
+          <p:sp>
+            <p:nvSpPr>
+              <p:cNvPr id="25" name="Oval 24">
+                <a:extLst>
+                  <a:ext uri="{FF2B5EF4-FFF2-40B4-BE49-F238E27FC236}">
+                    <a16:creationId xmlns:a16="http://schemas.microsoft.com/office/drawing/2014/main" id="{286839BE-7C81-1D01-3152-F17330EDCCF5}"/>
+                  </a:ext>
+                </a:extLst>
+              </p:cNvPr>
+              <p:cNvSpPr/>
+              <p:nvPr/>
+            </p:nvSpPr>
+            <p:spPr>
+              <a:xfrm>
+                <a:off x="6151027" y="5865356"/>
+                <a:ext cx="243840" cy="200297"/>
+              </a:xfrm>
+              <a:prstGeom prst="ellipse">
+                <a:avLst/>
+              </a:prstGeom>
+              <a:solidFill>
+                <a:schemeClr val="bg1">
+                  <a:lumMod val="50000"/>
+                </a:schemeClr>
+              </a:solidFill>
+            </p:spPr>
+            <p:style>
+              <a:lnRef idx="1">
+                <a:schemeClr val="accent1"/>
+              </a:lnRef>
+              <a:fillRef idx="3">
+                <a:schemeClr val="accent1"/>
+              </a:fillRef>
+              <a:effectRef idx="2">
+                <a:schemeClr val="accent1"/>
+              </a:effectRef>
+              <a:fontRef idx="minor">
+                <a:schemeClr val="lt1"/>
+              </a:fontRef>
+            </p:style>
+            <p:txBody>
+              <a:bodyPr rtlCol="0" anchor="ctr"/>
+              <a:lstStyle/>
+              <a:p>
+                <a:pPr algn="ctr"/>
+                <a:endParaRPr lang="en-US"/>
+              </a:p>
+            </p:txBody>
+          </p:sp>
+          <p:cxnSp>
+            <p:nvCxnSpPr>
+              <p:cNvPr id="28" name="Straight Connector 27">
+                <a:extLst>
+                  <a:ext uri="{FF2B5EF4-FFF2-40B4-BE49-F238E27FC236}">
+                    <a16:creationId xmlns:a16="http://schemas.microsoft.com/office/drawing/2014/main" id="{34DDCD68-8F02-A359-8621-B05D8EE44064}"/>
+                  </a:ext>
+                </a:extLst>
+              </p:cNvPr>
+              <p:cNvCxnSpPr>
+                <a:endCxn id="20" idx="0"/>
+              </p:cNvCxnSpPr>
+              <p:nvPr/>
+            </p:nvCxnSpPr>
+            <p:spPr>
+              <a:xfrm>
+                <a:off x="5599624" y="5476404"/>
+                <a:ext cx="187739" cy="111214"/>
+              </a:xfrm>
+              <a:prstGeom prst="line">
+                <a:avLst/>
+              </a:prstGeom>
+            </p:spPr>
+            <p:style>
+              <a:lnRef idx="2">
+                <a:schemeClr val="accent1"/>
+              </a:lnRef>
+              <a:fillRef idx="0">
+                <a:schemeClr val="accent1"/>
+              </a:fillRef>
+              <a:effectRef idx="1">
+                <a:schemeClr val="accent1"/>
+              </a:effectRef>
+              <a:fontRef idx="minor">
+                <a:schemeClr val="tx1"/>
+              </a:fontRef>
+            </p:style>
+          </p:cxnSp>
+          <p:cxnSp>
+            <p:nvCxnSpPr>
+              <p:cNvPr id="32" name="Straight Connector 31">
+                <a:extLst>
+                  <a:ext uri="{FF2B5EF4-FFF2-40B4-BE49-F238E27FC236}">
+                    <a16:creationId xmlns:a16="http://schemas.microsoft.com/office/drawing/2014/main" id="{B0A9F970-7426-4426-6B02-369409561D22}"/>
+                  </a:ext>
+                </a:extLst>
+              </p:cNvPr>
+              <p:cNvCxnSpPr>
+                <a:stCxn id="18" idx="4"/>
+                <a:endCxn id="20" idx="0"/>
+              </p:cNvCxnSpPr>
+              <p:nvPr/>
+            </p:nvCxnSpPr>
+            <p:spPr>
+              <a:xfrm flipH="1">
+                <a:off x="5787363" y="5476404"/>
+                <a:ext cx="160663" cy="111214"/>
+              </a:xfrm>
+              <a:prstGeom prst="line">
+                <a:avLst/>
+              </a:prstGeom>
+            </p:spPr>
+            <p:style>
+              <a:lnRef idx="2">
+                <a:schemeClr val="accent1"/>
+              </a:lnRef>
+              <a:fillRef idx="0">
+                <a:schemeClr val="accent1"/>
+              </a:fillRef>
+              <a:effectRef idx="1">
+                <a:schemeClr val="accent1"/>
+              </a:effectRef>
+              <a:fontRef idx="minor">
+                <a:schemeClr val="tx1"/>
+              </a:fontRef>
+            </p:style>
+          </p:cxnSp>
+          <p:cxnSp>
+            <p:nvCxnSpPr>
+              <p:cNvPr id="39" name="Straight Connector 38">
+                <a:extLst>
+                  <a:ext uri="{FF2B5EF4-FFF2-40B4-BE49-F238E27FC236}">
+                    <a16:creationId xmlns:a16="http://schemas.microsoft.com/office/drawing/2014/main" id="{7BABCC0E-F8FC-0C35-13FF-8123DF0F4204}"/>
+                  </a:ext>
+                </a:extLst>
+              </p:cNvPr>
+              <p:cNvCxnSpPr>
+                <a:stCxn id="18" idx="4"/>
+                <a:endCxn id="22" idx="0"/>
+              </p:cNvCxnSpPr>
+              <p:nvPr/>
+            </p:nvCxnSpPr>
+            <p:spPr>
+              <a:xfrm>
+                <a:off x="5948026" y="5476404"/>
+                <a:ext cx="166771" cy="110494"/>
+              </a:xfrm>
+              <a:prstGeom prst="line">
+                <a:avLst/>
+              </a:prstGeom>
+            </p:spPr>
+            <p:style>
+              <a:lnRef idx="2">
+                <a:schemeClr val="accent1"/>
+              </a:lnRef>
+              <a:fillRef idx="0">
+                <a:schemeClr val="accent1"/>
+              </a:fillRef>
+              <a:effectRef idx="1">
+                <a:schemeClr val="accent1"/>
+              </a:effectRef>
+              <a:fontRef idx="minor">
+                <a:schemeClr val="tx1"/>
+              </a:fontRef>
+            </p:style>
+          </p:cxnSp>
+          <p:cxnSp>
+            <p:nvCxnSpPr>
+              <p:cNvPr id="43" name="Straight Connector 42">
+                <a:extLst>
+                  <a:ext uri="{FF2B5EF4-FFF2-40B4-BE49-F238E27FC236}">
+                    <a16:creationId xmlns:a16="http://schemas.microsoft.com/office/drawing/2014/main" id="{F65AD1BA-1D61-77BB-3072-54FC94A052AE}"/>
+                  </a:ext>
+                </a:extLst>
+              </p:cNvPr>
+              <p:cNvCxnSpPr>
+                <a:stCxn id="19" idx="4"/>
+                <a:endCxn id="22" idx="0"/>
+              </p:cNvCxnSpPr>
+              <p:nvPr/>
+            </p:nvCxnSpPr>
+            <p:spPr>
+              <a:xfrm flipH="1">
+                <a:off x="6114797" y="5477202"/>
+                <a:ext cx="169633" cy="109696"/>
+              </a:xfrm>
+              <a:prstGeom prst="line">
+                <a:avLst/>
+              </a:prstGeom>
+            </p:spPr>
+            <p:style>
+              <a:lnRef idx="2">
+                <a:schemeClr val="accent1"/>
+              </a:lnRef>
+              <a:fillRef idx="0">
+                <a:schemeClr val="accent1"/>
+              </a:fillRef>
+              <a:effectRef idx="1">
+                <a:schemeClr val="accent1"/>
+              </a:effectRef>
+              <a:fontRef idx="minor">
+                <a:schemeClr val="tx1"/>
+              </a:fontRef>
+            </p:style>
+          </p:cxnSp>
+          <p:cxnSp>
+            <p:nvCxnSpPr>
+              <p:cNvPr id="46" name="Straight Connector 45">
+                <a:extLst>
+                  <a:ext uri="{FF2B5EF4-FFF2-40B4-BE49-F238E27FC236}">
+                    <a16:creationId xmlns:a16="http://schemas.microsoft.com/office/drawing/2014/main" id="{F65A1A90-EECF-1E55-66A6-A58FEB0919FC}"/>
+                  </a:ext>
+                </a:extLst>
+              </p:cNvPr>
+              <p:cNvCxnSpPr>
+                <a:cxnSpLocks/>
+                <a:stCxn id="20" idx="0"/>
+                <a:endCxn id="19" idx="4"/>
+              </p:cNvCxnSpPr>
+              <p:nvPr/>
+            </p:nvCxnSpPr>
+            <p:spPr>
+              <a:xfrm flipV="1">
+                <a:off x="5787363" y="5477202"/>
+                <a:ext cx="497067" cy="110416"/>
+              </a:xfrm>
+              <a:prstGeom prst="line">
+                <a:avLst/>
+              </a:prstGeom>
+            </p:spPr>
+            <p:style>
+              <a:lnRef idx="2">
+                <a:schemeClr val="accent1"/>
+              </a:lnRef>
+              <a:fillRef idx="0">
+                <a:schemeClr val="accent1"/>
+              </a:fillRef>
+              <a:effectRef idx="1">
+                <a:schemeClr val="accent1"/>
+              </a:effectRef>
+              <a:fontRef idx="minor">
+                <a:schemeClr val="tx1"/>
+              </a:fontRef>
+            </p:style>
+          </p:cxnSp>
+          <p:cxnSp>
+            <p:nvCxnSpPr>
+              <p:cNvPr id="50" name="Straight Connector 49">
+                <a:extLst>
+                  <a:ext uri="{FF2B5EF4-FFF2-40B4-BE49-F238E27FC236}">
+                    <a16:creationId xmlns:a16="http://schemas.microsoft.com/office/drawing/2014/main" id="{15661BE8-F387-30BA-EB5E-E92587F30829}"/>
+                  </a:ext>
+                </a:extLst>
+              </p:cNvPr>
+              <p:cNvCxnSpPr>
+                <a:cxnSpLocks/>
+                <a:stCxn id="20" idx="0"/>
+                <a:endCxn id="21" idx="4"/>
+              </p:cNvCxnSpPr>
+              <p:nvPr/>
+            </p:nvCxnSpPr>
+            <p:spPr>
+              <a:xfrm flipV="1">
+                <a:off x="5787363" y="5476404"/>
+                <a:ext cx="829619" cy="111214"/>
+              </a:xfrm>
+              <a:prstGeom prst="line">
+                <a:avLst/>
+              </a:prstGeom>
+            </p:spPr>
+            <p:style>
+              <a:lnRef idx="2">
+                <a:schemeClr val="accent1"/>
+              </a:lnRef>
+              <a:fillRef idx="0">
+                <a:schemeClr val="accent1"/>
+              </a:fillRef>
+              <a:effectRef idx="1">
+                <a:schemeClr val="accent1"/>
+              </a:effectRef>
+              <a:fontRef idx="minor">
+                <a:schemeClr val="tx1"/>
+              </a:fontRef>
+            </p:style>
+          </p:cxnSp>
+          <p:cxnSp>
+            <p:nvCxnSpPr>
+              <p:cNvPr id="55" name="Straight Connector 54">
+                <a:extLst>
+                  <a:ext uri="{FF2B5EF4-FFF2-40B4-BE49-F238E27FC236}">
+                    <a16:creationId xmlns:a16="http://schemas.microsoft.com/office/drawing/2014/main" id="{DFDC7C1B-2E23-B016-C7A0-616CEF14F7E4}"/>
+                  </a:ext>
+                </a:extLst>
+              </p:cNvPr>
+              <p:cNvCxnSpPr>
+                <a:cxnSpLocks/>
+                <a:stCxn id="15" idx="4"/>
+                <a:endCxn id="22" idx="0"/>
+              </p:cNvCxnSpPr>
+              <p:nvPr/>
+            </p:nvCxnSpPr>
+            <p:spPr>
+              <a:xfrm>
+                <a:off x="5590413" y="5468815"/>
+                <a:ext cx="524384" cy="118083"/>
+              </a:xfrm>
+              <a:prstGeom prst="line">
+                <a:avLst/>
+              </a:prstGeom>
+            </p:spPr>
+            <p:style>
+              <a:lnRef idx="2">
+                <a:schemeClr val="accent1"/>
+              </a:lnRef>
+              <a:fillRef idx="0">
+                <a:schemeClr val="accent1"/>
+              </a:fillRef>
+              <a:effectRef idx="1">
+                <a:schemeClr val="accent1"/>
+              </a:effectRef>
+              <a:fontRef idx="minor">
+                <a:schemeClr val="tx1"/>
+              </a:fontRef>
+            </p:style>
+          </p:cxnSp>
+          <p:cxnSp>
+            <p:nvCxnSpPr>
+              <p:cNvPr id="63" name="Straight Connector 62">
+                <a:extLst>
+                  <a:ext uri="{FF2B5EF4-FFF2-40B4-BE49-F238E27FC236}">
+                    <a16:creationId xmlns:a16="http://schemas.microsoft.com/office/drawing/2014/main" id="{BD8FB90B-90FF-C112-5F3C-75A6A528086E}"/>
+                  </a:ext>
+                </a:extLst>
+              </p:cNvPr>
+              <p:cNvCxnSpPr>
+                <a:cxnSpLocks/>
+                <a:stCxn id="23" idx="0"/>
+                <a:endCxn id="19" idx="4"/>
+              </p:cNvCxnSpPr>
+              <p:nvPr/>
+            </p:nvCxnSpPr>
+            <p:spPr>
+              <a:xfrm flipH="1" flipV="1">
+                <a:off x="6284430" y="5477202"/>
+                <a:ext cx="155288" cy="109696"/>
+              </a:xfrm>
+              <a:prstGeom prst="line">
+                <a:avLst/>
+              </a:prstGeom>
+            </p:spPr>
+            <p:style>
+              <a:lnRef idx="2">
+                <a:schemeClr val="accent1"/>
+              </a:lnRef>
+              <a:fillRef idx="0">
+                <a:schemeClr val="accent1"/>
+              </a:fillRef>
+              <a:effectRef idx="1">
+                <a:schemeClr val="accent1"/>
+              </a:effectRef>
+              <a:fontRef idx="minor">
+                <a:schemeClr val="tx1"/>
+              </a:fontRef>
+            </p:style>
+          </p:cxnSp>
+          <p:cxnSp>
+            <p:nvCxnSpPr>
+              <p:cNvPr id="75" name="Straight Connector 74">
+                <a:extLst>
+                  <a:ext uri="{FF2B5EF4-FFF2-40B4-BE49-F238E27FC236}">
+                    <a16:creationId xmlns:a16="http://schemas.microsoft.com/office/drawing/2014/main" id="{65EBE0A5-D893-7320-8BC3-463038D6876F}"/>
+                  </a:ext>
+                </a:extLst>
+              </p:cNvPr>
+              <p:cNvCxnSpPr>
+                <a:cxnSpLocks/>
+                <a:stCxn id="23" idx="0"/>
+                <a:endCxn id="21" idx="4"/>
+              </p:cNvCxnSpPr>
+              <p:nvPr/>
+            </p:nvCxnSpPr>
+            <p:spPr>
+              <a:xfrm flipV="1">
+                <a:off x="6439718" y="5476404"/>
+                <a:ext cx="177264" cy="110494"/>
+              </a:xfrm>
+              <a:prstGeom prst="line">
+                <a:avLst/>
+              </a:prstGeom>
+            </p:spPr>
+            <p:style>
+              <a:lnRef idx="2">
+                <a:schemeClr val="accent1"/>
+              </a:lnRef>
+              <a:fillRef idx="0">
+                <a:schemeClr val="accent1"/>
+              </a:fillRef>
+              <a:effectRef idx="1">
+                <a:schemeClr val="accent1"/>
+              </a:effectRef>
+              <a:fontRef idx="minor">
+                <a:schemeClr val="tx1"/>
+              </a:fontRef>
+            </p:style>
+          </p:cxnSp>
+          <p:cxnSp>
+            <p:nvCxnSpPr>
+              <p:cNvPr id="85" name="Straight Connector 84">
+                <a:extLst>
+                  <a:ext uri="{FF2B5EF4-FFF2-40B4-BE49-F238E27FC236}">
+                    <a16:creationId xmlns:a16="http://schemas.microsoft.com/office/drawing/2014/main" id="{035FA15B-CA74-7178-C274-A0A47B85A06F}"/>
+                  </a:ext>
+                </a:extLst>
+              </p:cNvPr>
+              <p:cNvCxnSpPr>
+                <a:cxnSpLocks/>
+                <a:stCxn id="22" idx="0"/>
+                <a:endCxn id="21" idx="4"/>
+              </p:cNvCxnSpPr>
+              <p:nvPr/>
+            </p:nvCxnSpPr>
+            <p:spPr>
+              <a:xfrm flipV="1">
+                <a:off x="6114797" y="5476404"/>
+                <a:ext cx="502185" cy="110494"/>
+              </a:xfrm>
+              <a:prstGeom prst="line">
+                <a:avLst/>
+              </a:prstGeom>
+            </p:spPr>
+            <p:style>
+              <a:lnRef idx="2">
+                <a:schemeClr val="accent1"/>
+              </a:lnRef>
+              <a:fillRef idx="0">
+                <a:schemeClr val="accent1"/>
+              </a:fillRef>
+              <a:effectRef idx="1">
+                <a:schemeClr val="accent1"/>
+              </a:effectRef>
+              <a:fontRef idx="minor">
+                <a:schemeClr val="tx1"/>
+              </a:fontRef>
+            </p:style>
+          </p:cxnSp>
+          <p:cxnSp>
+            <p:nvCxnSpPr>
+              <p:cNvPr id="92" name="Straight Connector 91">
+                <a:extLst>
+                  <a:ext uri="{FF2B5EF4-FFF2-40B4-BE49-F238E27FC236}">
+                    <a16:creationId xmlns:a16="http://schemas.microsoft.com/office/drawing/2014/main" id="{BB0FD705-8853-E663-707C-C4550C077C53}"/>
+                  </a:ext>
+                </a:extLst>
+              </p:cNvPr>
+              <p:cNvCxnSpPr>
+                <a:cxnSpLocks/>
+                <a:stCxn id="15" idx="4"/>
+                <a:endCxn id="23" idx="0"/>
+              </p:cNvCxnSpPr>
+              <p:nvPr/>
+            </p:nvCxnSpPr>
+            <p:spPr>
+              <a:xfrm>
+                <a:off x="5590413" y="5468815"/>
+                <a:ext cx="849305" cy="118083"/>
+              </a:xfrm>
+              <a:prstGeom prst="line">
+                <a:avLst/>
+              </a:prstGeom>
+            </p:spPr>
+            <p:style>
+              <a:lnRef idx="2">
+                <a:schemeClr val="accent1"/>
+              </a:lnRef>
+              <a:fillRef idx="0">
+                <a:schemeClr val="accent1"/>
+              </a:fillRef>
+              <a:effectRef idx="1">
+                <a:schemeClr val="accent1"/>
+              </a:effectRef>
+              <a:fontRef idx="minor">
+                <a:schemeClr val="tx1"/>
+              </a:fontRef>
+            </p:style>
+          </p:cxnSp>
+          <p:cxnSp>
+            <p:nvCxnSpPr>
+              <p:cNvPr id="96" name="Straight Connector 95">
+                <a:extLst>
+                  <a:ext uri="{FF2B5EF4-FFF2-40B4-BE49-F238E27FC236}">
+                    <a16:creationId xmlns:a16="http://schemas.microsoft.com/office/drawing/2014/main" id="{4D30A4EE-E93D-D63A-80CA-ECAF292146D0}"/>
+                  </a:ext>
+                </a:extLst>
+              </p:cNvPr>
+              <p:cNvCxnSpPr>
+                <a:cxnSpLocks/>
+                <a:stCxn id="24" idx="0"/>
+                <a:endCxn id="20" idx="4"/>
+              </p:cNvCxnSpPr>
+              <p:nvPr/>
+            </p:nvCxnSpPr>
+            <p:spPr>
+              <a:xfrm flipH="1" flipV="1">
+                <a:off x="5787363" y="5787915"/>
+                <a:ext cx="160663" cy="77441"/>
+              </a:xfrm>
+              <a:prstGeom prst="line">
+                <a:avLst/>
+              </a:prstGeom>
+            </p:spPr>
+            <p:style>
+              <a:lnRef idx="2">
+                <a:schemeClr val="accent1"/>
+              </a:lnRef>
+              <a:fillRef idx="0">
+                <a:schemeClr val="accent1"/>
+              </a:fillRef>
+              <a:effectRef idx="1">
+                <a:schemeClr val="accent1"/>
+              </a:effectRef>
+              <a:fontRef idx="minor">
+                <a:schemeClr val="tx1"/>
+              </a:fontRef>
+            </p:style>
+          </p:cxnSp>
+          <p:cxnSp>
+            <p:nvCxnSpPr>
+              <p:cNvPr id="100" name="Straight Connector 99">
+                <a:extLst>
+                  <a:ext uri="{FF2B5EF4-FFF2-40B4-BE49-F238E27FC236}">
+                    <a16:creationId xmlns:a16="http://schemas.microsoft.com/office/drawing/2014/main" id="{A16BA774-7839-397E-4333-76460E6B8CC1}"/>
+                  </a:ext>
+                </a:extLst>
+              </p:cNvPr>
+              <p:cNvCxnSpPr>
+                <a:cxnSpLocks/>
+                <a:stCxn id="25" idx="0"/>
+                <a:endCxn id="20" idx="4"/>
+              </p:cNvCxnSpPr>
+              <p:nvPr/>
+            </p:nvCxnSpPr>
+            <p:spPr>
+              <a:xfrm flipH="1" flipV="1">
+                <a:off x="5787363" y="5787915"/>
+                <a:ext cx="485584" cy="77441"/>
+              </a:xfrm>
+              <a:prstGeom prst="line">
+                <a:avLst/>
+              </a:prstGeom>
+            </p:spPr>
+            <p:style>
+              <a:lnRef idx="2">
+                <a:schemeClr val="accent1"/>
+              </a:lnRef>
+              <a:fillRef idx="0">
+                <a:schemeClr val="accent1"/>
+              </a:fillRef>
+              <a:effectRef idx="1">
+                <a:schemeClr val="accent1"/>
+              </a:effectRef>
+              <a:fontRef idx="minor">
+                <a:schemeClr val="tx1"/>
+              </a:fontRef>
+            </p:style>
+          </p:cxnSp>
+          <p:cxnSp>
+            <p:nvCxnSpPr>
+              <p:cNvPr id="103" name="Straight Connector 102">
+                <a:extLst>
+                  <a:ext uri="{FF2B5EF4-FFF2-40B4-BE49-F238E27FC236}">
+                    <a16:creationId xmlns:a16="http://schemas.microsoft.com/office/drawing/2014/main" id="{37CD8CAE-8DAC-9547-DFD2-91E665ECE7A8}"/>
+                  </a:ext>
+                </a:extLst>
+              </p:cNvPr>
+              <p:cNvCxnSpPr>
+                <a:cxnSpLocks/>
+                <a:stCxn id="24" idx="0"/>
+                <a:endCxn id="22" idx="4"/>
+              </p:cNvCxnSpPr>
+              <p:nvPr/>
+            </p:nvCxnSpPr>
+            <p:spPr>
+              <a:xfrm flipV="1">
+                <a:off x="5948026" y="5787195"/>
+                <a:ext cx="166771" cy="78161"/>
+              </a:xfrm>
+              <a:prstGeom prst="line">
+                <a:avLst/>
+              </a:prstGeom>
+            </p:spPr>
+            <p:style>
+              <a:lnRef idx="2">
+                <a:schemeClr val="accent1"/>
+              </a:lnRef>
+              <a:fillRef idx="0">
+                <a:schemeClr val="accent1"/>
+              </a:fillRef>
+              <a:effectRef idx="1">
+                <a:schemeClr val="accent1"/>
+              </a:effectRef>
+              <a:fontRef idx="minor">
+                <a:schemeClr val="tx1"/>
+              </a:fontRef>
+            </p:style>
+          </p:cxnSp>
+          <p:cxnSp>
+            <p:nvCxnSpPr>
+              <p:cNvPr id="106" name="Straight Connector 105">
+                <a:extLst>
+                  <a:ext uri="{FF2B5EF4-FFF2-40B4-BE49-F238E27FC236}">
+                    <a16:creationId xmlns:a16="http://schemas.microsoft.com/office/drawing/2014/main" id="{3BD99D00-CDB6-5B15-A569-8B0A0CD78BB4}"/>
+                  </a:ext>
+                </a:extLst>
+              </p:cNvPr>
+              <p:cNvCxnSpPr>
+                <a:cxnSpLocks/>
+                <a:stCxn id="25" idx="0"/>
+                <a:endCxn id="23" idx="4"/>
+              </p:cNvCxnSpPr>
+              <p:nvPr/>
+            </p:nvCxnSpPr>
+            <p:spPr>
+              <a:xfrm flipV="1">
+                <a:off x="6272947" y="5787195"/>
+                <a:ext cx="166771" cy="78161"/>
+              </a:xfrm>
+              <a:prstGeom prst="line">
+                <a:avLst/>
+              </a:prstGeom>
+            </p:spPr>
+            <p:style>
+              <a:lnRef idx="2">
+                <a:schemeClr val="accent1"/>
+              </a:lnRef>
+              <a:fillRef idx="0">
+                <a:schemeClr val="accent1"/>
+              </a:fillRef>
+              <a:effectRef idx="1">
+                <a:schemeClr val="accent1"/>
+              </a:effectRef>
+              <a:fontRef idx="minor">
+                <a:schemeClr val="tx1"/>
+              </a:fontRef>
+            </p:style>
+          </p:cxnSp>
+          <p:cxnSp>
+            <p:nvCxnSpPr>
+              <p:cNvPr id="109" name="Straight Connector 108">
+                <a:extLst>
+                  <a:ext uri="{FF2B5EF4-FFF2-40B4-BE49-F238E27FC236}">
+                    <a16:creationId xmlns:a16="http://schemas.microsoft.com/office/drawing/2014/main" id="{8D1F28F6-8428-0750-3B2A-CE1EF3451695}"/>
+                  </a:ext>
+                </a:extLst>
+              </p:cNvPr>
+              <p:cNvCxnSpPr>
+                <a:cxnSpLocks/>
+                <a:stCxn id="25" idx="0"/>
+                <a:endCxn id="22" idx="4"/>
+              </p:cNvCxnSpPr>
+              <p:nvPr/>
+            </p:nvCxnSpPr>
+            <p:spPr>
+              <a:xfrm flipH="1" flipV="1">
+                <a:off x="6114797" y="5787195"/>
+                <a:ext cx="158150" cy="78161"/>
+              </a:xfrm>
+              <a:prstGeom prst="line">
+                <a:avLst/>
+              </a:prstGeom>
+            </p:spPr>
+            <p:style>
+              <a:lnRef idx="2">
+                <a:schemeClr val="accent1"/>
+              </a:lnRef>
+              <a:fillRef idx="0">
+                <a:schemeClr val="accent1"/>
+              </a:fillRef>
+              <a:effectRef idx="1">
+                <a:schemeClr val="accent1"/>
+              </a:effectRef>
+              <a:fontRef idx="minor">
+                <a:schemeClr val="tx1"/>
+              </a:fontRef>
+            </p:style>
+          </p:cxnSp>
+          <p:cxnSp>
+            <p:nvCxnSpPr>
+              <p:cNvPr id="113" name="Straight Connector 112">
+                <a:extLst>
+                  <a:ext uri="{FF2B5EF4-FFF2-40B4-BE49-F238E27FC236}">
+                    <a16:creationId xmlns:a16="http://schemas.microsoft.com/office/drawing/2014/main" id="{3368ACD3-90AD-57E6-B76A-8BCAC0095095}"/>
+                  </a:ext>
+                </a:extLst>
+              </p:cNvPr>
+              <p:cNvCxnSpPr>
+                <a:cxnSpLocks/>
+                <a:stCxn id="24" idx="0"/>
+                <a:endCxn id="23" idx="4"/>
+              </p:cNvCxnSpPr>
+              <p:nvPr/>
+            </p:nvCxnSpPr>
+            <p:spPr>
+              <a:xfrm flipV="1">
+                <a:off x="5948026" y="5787195"/>
+                <a:ext cx="491692" cy="78161"/>
+              </a:xfrm>
+              <a:prstGeom prst="line">
+                <a:avLst/>
+              </a:prstGeom>
+            </p:spPr>
+            <p:style>
+              <a:lnRef idx="2">
+                <a:schemeClr val="accent1"/>
+              </a:lnRef>
+              <a:fillRef idx="0">
+                <a:schemeClr val="accent1"/>
+              </a:fillRef>
+              <a:effectRef idx="1">
+                <a:schemeClr val="accent1"/>
+              </a:effectRef>
+              <a:fontRef idx="minor">
+                <a:schemeClr val="tx1"/>
+              </a:fontRef>
+            </p:style>
+          </p:cxnSp>
+        </p:grpSp>
+        <p:sp>
+          <p:nvSpPr>
+            <p:cNvPr id="11" name="TextBox 10">
+              <a:extLst>
+                <a:ext uri="{FF2B5EF4-FFF2-40B4-BE49-F238E27FC236}">
+                  <a16:creationId xmlns:a16="http://schemas.microsoft.com/office/drawing/2014/main" id="{3F65E67E-0C4B-E7A7-C2AA-F6ADC83D50A6}"/>
+                </a:ext>
+              </a:extLst>
+            </p:cNvPr>
+            <p:cNvSpPr txBox="1"/>
+            <p:nvPr/>
+          </p:nvSpPr>
+          <p:spPr>
+            <a:xfrm>
+              <a:off x="2142249" y="5597628"/>
+              <a:ext cx="303718" cy="369332"/>
+            </a:xfrm>
+            <a:prstGeom prst="rect">
+              <a:avLst/>
+            </a:prstGeom>
+            <a:noFill/>
+          </p:spPr>
+          <p:txBody>
+            <a:bodyPr wrap="square" rtlCol="0">
+              <a:spAutoFit/>
+            </a:bodyPr>
+            <a:lstStyle/>
+            <a:p>
+              <a:r>
+                <a:rPr lang="en-US" altLang="zh-CN"/>
+                <a:t>1</a:t>
+              </a:r>
+              <a:endParaRPr lang="en-US"/>
+            </a:p>
+          </p:txBody>
+        </p:sp>
+        <p:sp>
+          <p:nvSpPr>
+            <p:cNvPr id="26" name="TextBox 25">
+              <a:extLst>
+                <a:ext uri="{FF2B5EF4-FFF2-40B4-BE49-F238E27FC236}">
+                  <a16:creationId xmlns:a16="http://schemas.microsoft.com/office/drawing/2014/main" id="{5A3B2090-F6B4-3581-F8A8-F52D53D6F34F}"/>
+                </a:ext>
+              </a:extLst>
+            </p:cNvPr>
+            <p:cNvSpPr txBox="1"/>
+            <p:nvPr/>
+          </p:nvSpPr>
+          <p:spPr>
+            <a:xfrm>
+              <a:off x="4601431" y="5594113"/>
+              <a:ext cx="303718" cy="369332"/>
+            </a:xfrm>
+            <a:prstGeom prst="rect">
+              <a:avLst/>
+            </a:prstGeom>
+            <a:noFill/>
+          </p:spPr>
+          <p:txBody>
+            <a:bodyPr wrap="square" rtlCol="0">
+              <a:spAutoFit/>
+            </a:bodyPr>
+            <a:lstStyle/>
+            <a:p>
+              <a:r>
+                <a:rPr lang="en-US" altLang="zh-CN"/>
+                <a:t>2</a:t>
+              </a:r>
+              <a:endParaRPr lang="en-US"/>
+            </a:p>
+          </p:txBody>
+        </p:sp>
+        <p:sp>
+          <p:nvSpPr>
+            <p:cNvPr id="27" name="TextBox 26">
+              <a:extLst>
+                <a:ext uri="{FF2B5EF4-FFF2-40B4-BE49-F238E27FC236}">
+                  <a16:creationId xmlns:a16="http://schemas.microsoft.com/office/drawing/2014/main" id="{50D3E9FE-7775-2CFB-20E3-5ECAA03D6AA4}"/>
+                </a:ext>
+              </a:extLst>
+            </p:cNvPr>
+            <p:cNvSpPr txBox="1"/>
+            <p:nvPr/>
+          </p:nvSpPr>
+          <p:spPr>
+            <a:xfrm>
+              <a:off x="1055426" y="3732918"/>
+              <a:ext cx="303718" cy="369332"/>
+            </a:xfrm>
+            <a:prstGeom prst="rect">
+              <a:avLst/>
+            </a:prstGeom>
+            <a:noFill/>
+          </p:spPr>
+          <p:txBody>
+            <a:bodyPr wrap="square" rtlCol="0">
+              <a:spAutoFit/>
+            </a:bodyPr>
+            <a:lstStyle/>
+            <a:p>
+              <a:r>
+                <a:rPr lang="en-US" altLang="zh-CN"/>
+                <a:t>3</a:t>
+              </a:r>
+              <a:endParaRPr lang="en-US"/>
+            </a:p>
+          </p:txBody>
+        </p:sp>
+        <p:sp>
+          <p:nvSpPr>
+            <p:cNvPr id="30" name="TextBox 29">
+              <a:extLst>
+                <a:ext uri="{FF2B5EF4-FFF2-40B4-BE49-F238E27FC236}">
+                  <a16:creationId xmlns:a16="http://schemas.microsoft.com/office/drawing/2014/main" id="{35A90ADA-4ED2-EA0D-C51B-D9962D708F97}"/>
+                </a:ext>
+              </a:extLst>
+            </p:cNvPr>
+            <p:cNvSpPr txBox="1"/>
+            <p:nvPr/>
+          </p:nvSpPr>
+          <p:spPr>
+            <a:xfrm>
+              <a:off x="5110576" y="2805108"/>
+              <a:ext cx="303718" cy="369332"/>
+            </a:xfrm>
+            <a:prstGeom prst="rect">
+              <a:avLst/>
+            </a:prstGeom>
+            <a:noFill/>
+          </p:spPr>
+          <p:txBody>
+            <a:bodyPr wrap="square" rtlCol="0">
+              <a:spAutoFit/>
+            </a:bodyPr>
+            <a:lstStyle/>
+            <a:p>
+              <a:r>
+                <a:rPr lang="en-US" altLang="zh-CN"/>
+                <a:t>5</a:t>
+              </a:r>
+              <a:endParaRPr lang="en-US"/>
+            </a:p>
+          </p:txBody>
+        </p:sp>
+        <p:sp>
+          <p:nvSpPr>
+            <p:cNvPr id="33" name="TextBox 32">
+              <a:extLst>
+                <a:ext uri="{FF2B5EF4-FFF2-40B4-BE49-F238E27FC236}">
+                  <a16:creationId xmlns:a16="http://schemas.microsoft.com/office/drawing/2014/main" id="{B8F9C0DF-9C3A-1217-442A-C22496842740}"/>
+                </a:ext>
+              </a:extLst>
+            </p:cNvPr>
+            <p:cNvSpPr txBox="1"/>
+            <p:nvPr/>
+          </p:nvSpPr>
+          <p:spPr>
+            <a:xfrm>
+              <a:off x="2569029" y="2380118"/>
+              <a:ext cx="332657" cy="369332"/>
+            </a:xfrm>
+            <a:prstGeom prst="rect">
+              <a:avLst/>
+            </a:prstGeom>
+            <a:noFill/>
+          </p:spPr>
+          <p:txBody>
+            <a:bodyPr wrap="square" rtlCol="0">
+              <a:spAutoFit/>
+            </a:bodyPr>
+            <a:lstStyle/>
+            <a:p>
+              <a:r>
+                <a:rPr lang="en-US" altLang="zh-CN" dirty="0"/>
+                <a:t>4</a:t>
+              </a:r>
+              <a:endParaRPr lang="en-US" dirty="0"/>
+            </a:p>
+          </p:txBody>
+        </p:sp>
         <p:cxnSp>
           <p:nvCxnSpPr>
-            <p:cNvPr id="43" name="Straight Connector 42">
+            <p:cNvPr id="44" name="Straight Arrow Connector 43">
               <a:extLst>
                 <a:ext uri="{FF2B5EF4-FFF2-40B4-BE49-F238E27FC236}">
-                  <a16:creationId xmlns:a16="http://schemas.microsoft.com/office/drawing/2014/main" id="{F65AD1BA-1D61-77BB-3072-54FC94A052AE}"/>
+                  <a16:creationId xmlns:a16="http://schemas.microsoft.com/office/drawing/2014/main" id="{AB8106FF-636B-AB03-E5F0-D78D50008D2F}"/>
                 </a:ext>
               </a:extLst>
             </p:cNvPr>
             <p:cNvCxnSpPr>
-              <a:stCxn id="19" idx="4"/>
-              <a:endCxn id="22" idx="0"/>
+              <a:stCxn id="61" idx="3"/>
             </p:cNvCxnSpPr>
             <p:nvPr/>
           </p:nvCxnSpPr>
           <p:spPr>
-            <a:xfrm flipH="1">
-              <a:off x="6114797" y="5477202"/>
-              <a:ext cx="169633" cy="109696"/>
+            <a:xfrm>
+              <a:off x="6231722" y="3269569"/>
+              <a:ext cx="0" cy="1094642"/>
             </a:xfrm>
-            <a:prstGeom prst="line">
+            <a:prstGeom prst="straightConnector1">
               <a:avLst/>
             </a:prstGeom>
+            <a:ln>
+              <a:prstDash val="lgDash"/>
+              <a:tailEnd type="triangle"/>
+            </a:ln>
           </p:spPr>
           <p:style>
             <a:lnRef idx="2">
@@ -46724,749 +47440,200 @@
             </a:fontRef>
           </p:style>
         </p:cxnSp>
-        <p:cxnSp>
-          <p:nvCxnSpPr>
-            <p:cNvPr id="46" name="Straight Connector 45">
+        <p:sp>
+          <p:nvSpPr>
+            <p:cNvPr id="9" name="Rectangle 8">
               <a:extLst>
                 <a:ext uri="{FF2B5EF4-FFF2-40B4-BE49-F238E27FC236}">
-                  <a16:creationId xmlns:a16="http://schemas.microsoft.com/office/drawing/2014/main" id="{F65A1A90-EECF-1E55-66A6-A58FEB0919FC}"/>
+                  <a16:creationId xmlns:a16="http://schemas.microsoft.com/office/drawing/2014/main" id="{16727677-89B0-8CFD-39B7-288A3FDBB57D}"/>
                 </a:ext>
               </a:extLst>
             </p:cNvPr>
-            <p:cNvCxnSpPr>
-              <a:cxnSpLocks/>
-              <a:stCxn id="20" idx="0"/>
-              <a:endCxn id="19" idx="4"/>
-            </p:cNvCxnSpPr>
+            <p:cNvSpPr/>
             <p:nvPr/>
-          </p:nvCxnSpPr>
+          </p:nvSpPr>
           <p:spPr>
-            <a:xfrm flipV="1">
-              <a:off x="5787363" y="5477202"/>
-              <a:ext cx="497067" cy="110416"/>
+            <a:xfrm>
+              <a:off x="4997038" y="1131158"/>
+              <a:ext cx="2272894" cy="5598875"/>
             </a:xfrm>
-            <a:prstGeom prst="line">
+            <a:prstGeom prst="rect">
               <a:avLst/>
             </a:prstGeom>
+            <a:solidFill>
+              <a:schemeClr val="accent3">
+                <a:lumMod val="60000"/>
+                <a:lumOff val="40000"/>
+                <a:alpha val="50000"/>
+              </a:schemeClr>
+            </a:solidFill>
+            <a:ln w="12700" cap="flat">
+              <a:solidFill>
+                <a:schemeClr val="accent1">
+                  <a:shade val="95000"/>
+                  <a:satMod val="105000"/>
+                </a:schemeClr>
+              </a:solidFill>
+              <a:prstDash val="dash"/>
+              <a:round/>
+              <a:extLst>
+                <a:ext uri="{C807C97D-BFC1-408E-A445-0C87EB9F89A2}">
+                  <ask:lineSketchStyleProps xmlns:ask="http://schemas.microsoft.com/office/drawing/2018/sketchyshapes" sd="1219033472">
+                    <a:custGeom>
+                      <a:avLst/>
+                      <a:gdLst>
+                        <a:gd name="csX0" fmla="*/ 0 w 2272894"/>
+                        <a:gd name="csY0" fmla="*/ 0 h 5459907"/>
+                        <a:gd name="csX1" fmla="*/ 2272894 w 2272894"/>
+                        <a:gd name="csY1" fmla="*/ 0 h 5459907"/>
+                        <a:gd name="csX2" fmla="*/ 2272894 w 2272894"/>
+                        <a:gd name="csY2" fmla="*/ 5459907 h 5459907"/>
+                        <a:gd name="csX3" fmla="*/ 0 w 2272894"/>
+                        <a:gd name="csY3" fmla="*/ 5459907 h 5459907"/>
+                        <a:gd name="csX4" fmla="*/ 0 w 2272894"/>
+                        <a:gd name="csY4" fmla="*/ 0 h 5459907"/>
+                      </a:gdLst>
+                      <a:ahLst/>
+                      <a:cxnLst>
+                        <a:cxn ang="0">
+                          <a:pos x="csX0" y="csY0"/>
+                        </a:cxn>
+                        <a:cxn ang="0">
+                          <a:pos x="csX1" y="csY1"/>
+                        </a:cxn>
+                        <a:cxn ang="0">
+                          <a:pos x="csX2" y="csY2"/>
+                        </a:cxn>
+                        <a:cxn ang="0">
+                          <a:pos x="csX3" y="csY3"/>
+                        </a:cxn>
+                        <a:cxn ang="0">
+                          <a:pos x="csX4" y="csY4"/>
+                        </a:cxn>
+                      </a:cxnLst>
+                      <a:rect l="l" t="t" r="r" b="b"/>
+                      <a:pathLst>
+                        <a:path w="2272894" h="5459907" fill="none" extrusionOk="0">
+                          <a:moveTo>
+                            <a:pt x="0" y="0"/>
+                          </a:moveTo>
+                          <a:cubicBezTo>
+                            <a:pt x="246963" y="-49533"/>
+                            <a:pt x="1730072" y="-14809"/>
+                            <a:pt x="2272894" y="0"/>
+                          </a:cubicBezTo>
+                          <a:cubicBezTo>
+                            <a:pt x="2360533" y="2338663"/>
+                            <a:pt x="2200215" y="4176473"/>
+                            <a:pt x="2272894" y="5459907"/>
+                          </a:cubicBezTo>
+                          <a:cubicBezTo>
+                            <a:pt x="1517392" y="5411676"/>
+                            <a:pt x="689315" y="5544362"/>
+                            <a:pt x="0" y="5459907"/>
+                          </a:cubicBezTo>
+                          <a:cubicBezTo>
+                            <a:pt x="-38581" y="2766092"/>
+                            <a:pt x="63341" y="1068132"/>
+                            <a:pt x="0" y="0"/>
+                          </a:cubicBezTo>
+                          <a:close/>
+                        </a:path>
+                        <a:path w="2272894" h="5459907" stroke="0" extrusionOk="0">
+                          <a:moveTo>
+                            <a:pt x="0" y="0"/>
+                          </a:moveTo>
+                          <a:cubicBezTo>
+                            <a:pt x="1036537" y="118645"/>
+                            <a:pt x="1713750" y="116012"/>
+                            <a:pt x="2272894" y="0"/>
+                          </a:cubicBezTo>
+                          <a:cubicBezTo>
+                            <a:pt x="2140012" y="799698"/>
+                            <a:pt x="2357845" y="4086530"/>
+                            <a:pt x="2272894" y="5459907"/>
+                          </a:cubicBezTo>
+                          <a:cubicBezTo>
+                            <a:pt x="1934076" y="5594507"/>
+                            <a:pt x="974238" y="5302711"/>
+                            <a:pt x="0" y="5459907"/>
+                          </a:cubicBezTo>
+                          <a:cubicBezTo>
+                            <a:pt x="-20187" y="4095132"/>
+                            <a:pt x="-152480" y="2529508"/>
+                            <a:pt x="0" y="0"/>
+                          </a:cubicBezTo>
+                          <a:close/>
+                        </a:path>
+                      </a:pathLst>
+                    </a:custGeom>
+                    <ask:type>
+                      <ask:lineSketchNone/>
+                    </ask:type>
+                  </ask:lineSketchStyleProps>
+                </a:ext>
+              </a:extLst>
+            </a:ln>
           </p:spPr>
           <p:style>
-            <a:lnRef idx="2">
+            <a:lnRef idx="1">
               <a:schemeClr val="accent1"/>
             </a:lnRef>
-            <a:fillRef idx="0">
+            <a:fillRef idx="3">
               <a:schemeClr val="accent1"/>
             </a:fillRef>
-            <a:effectRef idx="1">
+            <a:effectRef idx="2">
               <a:schemeClr val="accent1"/>
             </a:effectRef>
             <a:fontRef idx="minor">
-              <a:schemeClr val="tx1"/>
+              <a:schemeClr val="lt1"/>
             </a:fontRef>
           </p:style>
-        </p:cxnSp>
-        <p:cxnSp>
-          <p:nvCxnSpPr>
-            <p:cNvPr id="50" name="Straight Connector 49">
+          <p:txBody>
+            <a:bodyPr rtlCol="0" anchor="ctr"/>
+            <a:lstStyle/>
+            <a:p>
+              <a:pPr algn="ctr"/>
+              <a:endParaRPr lang="en-US"/>
+            </a:p>
+          </p:txBody>
+        </p:sp>
+        <p:sp>
+          <p:nvSpPr>
+            <p:cNvPr id="53" name="TextBox 52">
               <a:extLst>
                 <a:ext uri="{FF2B5EF4-FFF2-40B4-BE49-F238E27FC236}">
-                  <a16:creationId xmlns:a16="http://schemas.microsoft.com/office/drawing/2014/main" id="{15661BE8-F387-30BA-EB5E-E92587F30829}"/>
+                  <a16:creationId xmlns:a16="http://schemas.microsoft.com/office/drawing/2014/main" id="{5091023B-E140-6D25-0505-B829E113AE80}"/>
                 </a:ext>
               </a:extLst>
             </p:cNvPr>
-            <p:cNvCxnSpPr>
-              <a:cxnSpLocks/>
-              <a:stCxn id="20" idx="0"/>
-              <a:endCxn id="21" idx="4"/>
-            </p:cNvCxnSpPr>
+            <p:cNvSpPr txBox="1"/>
             <p:nvPr/>
-          </p:nvCxnSpPr>
+          </p:nvSpPr>
           <p:spPr>
-            <a:xfrm flipV="1">
-              <a:off x="5787363" y="5476404"/>
-              <a:ext cx="829619" cy="111214"/>
+            <a:xfrm>
+              <a:off x="1489774" y="3765824"/>
+              <a:ext cx="3772662" cy="307777"/>
             </a:xfrm>
-            <a:prstGeom prst="line">
+            <a:prstGeom prst="rect">
               <a:avLst/>
             </a:prstGeom>
+            <a:noFill/>
           </p:spPr>
-          <p:style>
-            <a:lnRef idx="2">
-              <a:schemeClr val="accent1"/>
-            </a:lnRef>
-            <a:fillRef idx="0">
-              <a:schemeClr val="accent1"/>
-            </a:fillRef>
-            <a:effectRef idx="1">
-              <a:schemeClr val="accent1"/>
-            </a:effectRef>
-            <a:fontRef idx="minor">
-              <a:schemeClr val="tx1"/>
-            </a:fontRef>
-          </p:style>
-        </p:cxnSp>
-        <p:cxnSp>
-          <p:nvCxnSpPr>
-            <p:cNvPr id="55" name="Straight Connector 54">
-              <a:extLst>
-                <a:ext uri="{FF2B5EF4-FFF2-40B4-BE49-F238E27FC236}">
-                  <a16:creationId xmlns:a16="http://schemas.microsoft.com/office/drawing/2014/main" id="{DFDC7C1B-2E23-B016-C7A0-616CEF14F7E4}"/>
-                </a:ext>
-              </a:extLst>
-            </p:cNvPr>
-            <p:cNvCxnSpPr>
-              <a:cxnSpLocks/>
-              <a:stCxn id="15" idx="4"/>
-              <a:endCxn id="22" idx="0"/>
-            </p:cNvCxnSpPr>
-            <p:nvPr/>
-          </p:nvCxnSpPr>
-          <p:spPr>
-            <a:xfrm>
-              <a:off x="5590413" y="5468815"/>
-              <a:ext cx="524384" cy="118083"/>
-            </a:xfrm>
-            <a:prstGeom prst="line">
-              <a:avLst/>
-            </a:prstGeom>
-          </p:spPr>
-          <p:style>
-            <a:lnRef idx="2">
-              <a:schemeClr val="accent1"/>
-            </a:lnRef>
-            <a:fillRef idx="0">
-              <a:schemeClr val="accent1"/>
-            </a:fillRef>
-            <a:effectRef idx="1">
-              <a:schemeClr val="accent1"/>
-            </a:effectRef>
-            <a:fontRef idx="minor">
-              <a:schemeClr val="tx1"/>
-            </a:fontRef>
-          </p:style>
-        </p:cxnSp>
-        <p:cxnSp>
-          <p:nvCxnSpPr>
-            <p:cNvPr id="63" name="Straight Connector 62">
-              <a:extLst>
-                <a:ext uri="{FF2B5EF4-FFF2-40B4-BE49-F238E27FC236}">
-                  <a16:creationId xmlns:a16="http://schemas.microsoft.com/office/drawing/2014/main" id="{BD8FB90B-90FF-C112-5F3C-75A6A528086E}"/>
-                </a:ext>
-              </a:extLst>
-            </p:cNvPr>
-            <p:cNvCxnSpPr>
-              <a:cxnSpLocks/>
-              <a:stCxn id="23" idx="0"/>
-              <a:endCxn id="19" idx="4"/>
-            </p:cNvCxnSpPr>
-            <p:nvPr/>
-          </p:nvCxnSpPr>
-          <p:spPr>
-            <a:xfrm flipH="1" flipV="1">
-              <a:off x="6284430" y="5477202"/>
-              <a:ext cx="155288" cy="109696"/>
-            </a:xfrm>
-            <a:prstGeom prst="line">
-              <a:avLst/>
-            </a:prstGeom>
-          </p:spPr>
-          <p:style>
-            <a:lnRef idx="2">
-              <a:schemeClr val="accent1"/>
-            </a:lnRef>
-            <a:fillRef idx="0">
-              <a:schemeClr val="accent1"/>
-            </a:fillRef>
-            <a:effectRef idx="1">
-              <a:schemeClr val="accent1"/>
-            </a:effectRef>
-            <a:fontRef idx="minor">
-              <a:schemeClr val="tx1"/>
-            </a:fontRef>
-          </p:style>
-        </p:cxnSp>
-        <p:cxnSp>
-          <p:nvCxnSpPr>
-            <p:cNvPr id="75" name="Straight Connector 74">
-              <a:extLst>
-                <a:ext uri="{FF2B5EF4-FFF2-40B4-BE49-F238E27FC236}">
-                  <a16:creationId xmlns:a16="http://schemas.microsoft.com/office/drawing/2014/main" id="{65EBE0A5-D893-7320-8BC3-463038D6876F}"/>
-                </a:ext>
-              </a:extLst>
-            </p:cNvPr>
-            <p:cNvCxnSpPr>
-              <a:cxnSpLocks/>
-              <a:stCxn id="23" idx="0"/>
-              <a:endCxn id="21" idx="4"/>
-            </p:cNvCxnSpPr>
-            <p:nvPr/>
-          </p:nvCxnSpPr>
-          <p:spPr>
-            <a:xfrm flipV="1">
-              <a:off x="6439718" y="5476404"/>
-              <a:ext cx="177264" cy="110494"/>
-            </a:xfrm>
-            <a:prstGeom prst="line">
-              <a:avLst/>
-            </a:prstGeom>
-          </p:spPr>
-          <p:style>
-            <a:lnRef idx="2">
-              <a:schemeClr val="accent1"/>
-            </a:lnRef>
-            <a:fillRef idx="0">
-              <a:schemeClr val="accent1"/>
-            </a:fillRef>
-            <a:effectRef idx="1">
-              <a:schemeClr val="accent1"/>
-            </a:effectRef>
-            <a:fontRef idx="minor">
-              <a:schemeClr val="tx1"/>
-            </a:fontRef>
-          </p:style>
-        </p:cxnSp>
-        <p:cxnSp>
-          <p:nvCxnSpPr>
-            <p:cNvPr id="85" name="Straight Connector 84">
-              <a:extLst>
-                <a:ext uri="{FF2B5EF4-FFF2-40B4-BE49-F238E27FC236}">
-                  <a16:creationId xmlns:a16="http://schemas.microsoft.com/office/drawing/2014/main" id="{035FA15B-CA74-7178-C274-A0A47B85A06F}"/>
-                </a:ext>
-              </a:extLst>
-            </p:cNvPr>
-            <p:cNvCxnSpPr>
-              <a:cxnSpLocks/>
-              <a:stCxn id="22" idx="0"/>
-              <a:endCxn id="21" idx="4"/>
-            </p:cNvCxnSpPr>
-            <p:nvPr/>
-          </p:nvCxnSpPr>
-          <p:spPr>
-            <a:xfrm flipV="1">
-              <a:off x="6114797" y="5476404"/>
-              <a:ext cx="502185" cy="110494"/>
-            </a:xfrm>
-            <a:prstGeom prst="line">
-              <a:avLst/>
-            </a:prstGeom>
-          </p:spPr>
-          <p:style>
-            <a:lnRef idx="2">
-              <a:schemeClr val="accent1"/>
-            </a:lnRef>
-            <a:fillRef idx="0">
-              <a:schemeClr val="accent1"/>
-            </a:fillRef>
-            <a:effectRef idx="1">
-              <a:schemeClr val="accent1"/>
-            </a:effectRef>
-            <a:fontRef idx="minor">
-              <a:schemeClr val="tx1"/>
-            </a:fontRef>
-          </p:style>
-        </p:cxnSp>
-        <p:cxnSp>
-          <p:nvCxnSpPr>
-            <p:cNvPr id="92" name="Straight Connector 91">
-              <a:extLst>
-                <a:ext uri="{FF2B5EF4-FFF2-40B4-BE49-F238E27FC236}">
-                  <a16:creationId xmlns:a16="http://schemas.microsoft.com/office/drawing/2014/main" id="{BB0FD705-8853-E663-707C-C4550C077C53}"/>
-                </a:ext>
-              </a:extLst>
-            </p:cNvPr>
-            <p:cNvCxnSpPr>
-              <a:cxnSpLocks/>
-              <a:stCxn id="15" idx="4"/>
-              <a:endCxn id="23" idx="0"/>
-            </p:cNvCxnSpPr>
-            <p:nvPr/>
-          </p:nvCxnSpPr>
-          <p:spPr>
-            <a:xfrm>
-              <a:off x="5590413" y="5468815"/>
-              <a:ext cx="849305" cy="118083"/>
-            </a:xfrm>
-            <a:prstGeom prst="line">
-              <a:avLst/>
-            </a:prstGeom>
-          </p:spPr>
-          <p:style>
-            <a:lnRef idx="2">
-              <a:schemeClr val="accent1"/>
-            </a:lnRef>
-            <a:fillRef idx="0">
-              <a:schemeClr val="accent1"/>
-            </a:fillRef>
-            <a:effectRef idx="1">
-              <a:schemeClr val="accent1"/>
-            </a:effectRef>
-            <a:fontRef idx="minor">
-              <a:schemeClr val="tx1"/>
-            </a:fontRef>
-          </p:style>
-        </p:cxnSp>
-        <p:cxnSp>
-          <p:nvCxnSpPr>
-            <p:cNvPr id="96" name="Straight Connector 95">
-              <a:extLst>
-                <a:ext uri="{FF2B5EF4-FFF2-40B4-BE49-F238E27FC236}">
-                  <a16:creationId xmlns:a16="http://schemas.microsoft.com/office/drawing/2014/main" id="{4D30A4EE-E93D-D63A-80CA-ECAF292146D0}"/>
-                </a:ext>
-              </a:extLst>
-            </p:cNvPr>
-            <p:cNvCxnSpPr>
-              <a:cxnSpLocks/>
-              <a:stCxn id="24" idx="0"/>
-              <a:endCxn id="20" idx="4"/>
-            </p:cNvCxnSpPr>
-            <p:nvPr/>
-          </p:nvCxnSpPr>
-          <p:spPr>
-            <a:xfrm flipH="1" flipV="1">
-              <a:off x="5787363" y="5787915"/>
-              <a:ext cx="160663" cy="77441"/>
-            </a:xfrm>
-            <a:prstGeom prst="line">
-              <a:avLst/>
-            </a:prstGeom>
-          </p:spPr>
-          <p:style>
-            <a:lnRef idx="2">
-              <a:schemeClr val="accent1"/>
-            </a:lnRef>
-            <a:fillRef idx="0">
-              <a:schemeClr val="accent1"/>
-            </a:fillRef>
-            <a:effectRef idx="1">
-              <a:schemeClr val="accent1"/>
-            </a:effectRef>
-            <a:fontRef idx="minor">
-              <a:schemeClr val="tx1"/>
-            </a:fontRef>
-          </p:style>
-        </p:cxnSp>
-        <p:cxnSp>
-          <p:nvCxnSpPr>
-            <p:cNvPr id="100" name="Straight Connector 99">
-              <a:extLst>
-                <a:ext uri="{FF2B5EF4-FFF2-40B4-BE49-F238E27FC236}">
-                  <a16:creationId xmlns:a16="http://schemas.microsoft.com/office/drawing/2014/main" id="{A16BA774-7839-397E-4333-76460E6B8CC1}"/>
-                </a:ext>
-              </a:extLst>
-            </p:cNvPr>
-            <p:cNvCxnSpPr>
-              <a:cxnSpLocks/>
-              <a:stCxn id="25" idx="0"/>
-              <a:endCxn id="20" idx="4"/>
-            </p:cNvCxnSpPr>
-            <p:nvPr/>
-          </p:nvCxnSpPr>
-          <p:spPr>
-            <a:xfrm flipH="1" flipV="1">
-              <a:off x="5787363" y="5787915"/>
-              <a:ext cx="485584" cy="77441"/>
-            </a:xfrm>
-            <a:prstGeom prst="line">
-              <a:avLst/>
-            </a:prstGeom>
-          </p:spPr>
-          <p:style>
-            <a:lnRef idx="2">
-              <a:schemeClr val="accent1"/>
-            </a:lnRef>
-            <a:fillRef idx="0">
-              <a:schemeClr val="accent1"/>
-            </a:fillRef>
-            <a:effectRef idx="1">
-              <a:schemeClr val="accent1"/>
-            </a:effectRef>
-            <a:fontRef idx="minor">
-              <a:schemeClr val="tx1"/>
-            </a:fontRef>
-          </p:style>
-        </p:cxnSp>
-        <p:cxnSp>
-          <p:nvCxnSpPr>
-            <p:cNvPr id="103" name="Straight Connector 102">
-              <a:extLst>
-                <a:ext uri="{FF2B5EF4-FFF2-40B4-BE49-F238E27FC236}">
-                  <a16:creationId xmlns:a16="http://schemas.microsoft.com/office/drawing/2014/main" id="{37CD8CAE-8DAC-9547-DFD2-91E665ECE7A8}"/>
-                </a:ext>
-              </a:extLst>
-            </p:cNvPr>
-            <p:cNvCxnSpPr>
-              <a:cxnSpLocks/>
-              <a:stCxn id="24" idx="0"/>
-              <a:endCxn id="22" idx="4"/>
-            </p:cNvCxnSpPr>
-            <p:nvPr/>
-          </p:nvCxnSpPr>
-          <p:spPr>
-            <a:xfrm flipV="1">
-              <a:off x="5948026" y="5787195"/>
-              <a:ext cx="166771" cy="78161"/>
-            </a:xfrm>
-            <a:prstGeom prst="line">
-              <a:avLst/>
-            </a:prstGeom>
-          </p:spPr>
-          <p:style>
-            <a:lnRef idx="2">
-              <a:schemeClr val="accent1"/>
-            </a:lnRef>
-            <a:fillRef idx="0">
-              <a:schemeClr val="accent1"/>
-            </a:fillRef>
-            <a:effectRef idx="1">
-              <a:schemeClr val="accent1"/>
-            </a:effectRef>
-            <a:fontRef idx="minor">
-              <a:schemeClr val="tx1"/>
-            </a:fontRef>
-          </p:style>
-        </p:cxnSp>
-        <p:cxnSp>
-          <p:nvCxnSpPr>
-            <p:cNvPr id="106" name="Straight Connector 105">
-              <a:extLst>
-                <a:ext uri="{FF2B5EF4-FFF2-40B4-BE49-F238E27FC236}">
-                  <a16:creationId xmlns:a16="http://schemas.microsoft.com/office/drawing/2014/main" id="{3BD99D00-CDB6-5B15-A569-8B0A0CD78BB4}"/>
-                </a:ext>
-              </a:extLst>
-            </p:cNvPr>
-            <p:cNvCxnSpPr>
-              <a:cxnSpLocks/>
-              <a:stCxn id="25" idx="0"/>
-              <a:endCxn id="23" idx="4"/>
-            </p:cNvCxnSpPr>
-            <p:nvPr/>
-          </p:nvCxnSpPr>
-          <p:spPr>
-            <a:xfrm flipV="1">
-              <a:off x="6272947" y="5787195"/>
-              <a:ext cx="166771" cy="78161"/>
-            </a:xfrm>
-            <a:prstGeom prst="line">
-              <a:avLst/>
-            </a:prstGeom>
-          </p:spPr>
-          <p:style>
-            <a:lnRef idx="2">
-              <a:schemeClr val="accent1"/>
-            </a:lnRef>
-            <a:fillRef idx="0">
-              <a:schemeClr val="accent1"/>
-            </a:fillRef>
-            <a:effectRef idx="1">
-              <a:schemeClr val="accent1"/>
-            </a:effectRef>
-            <a:fontRef idx="minor">
-              <a:schemeClr val="tx1"/>
-            </a:fontRef>
-          </p:style>
-        </p:cxnSp>
-        <p:cxnSp>
-          <p:nvCxnSpPr>
-            <p:cNvPr id="109" name="Straight Connector 108">
-              <a:extLst>
-                <a:ext uri="{FF2B5EF4-FFF2-40B4-BE49-F238E27FC236}">
-                  <a16:creationId xmlns:a16="http://schemas.microsoft.com/office/drawing/2014/main" id="{8D1F28F6-8428-0750-3B2A-CE1EF3451695}"/>
-                </a:ext>
-              </a:extLst>
-            </p:cNvPr>
-            <p:cNvCxnSpPr>
-              <a:cxnSpLocks/>
-              <a:stCxn id="25" idx="0"/>
-              <a:endCxn id="22" idx="4"/>
-            </p:cNvCxnSpPr>
-            <p:nvPr/>
-          </p:nvCxnSpPr>
-          <p:spPr>
-            <a:xfrm flipH="1" flipV="1">
-              <a:off x="6114797" y="5787195"/>
-              <a:ext cx="158150" cy="78161"/>
-            </a:xfrm>
-            <a:prstGeom prst="line">
-              <a:avLst/>
-            </a:prstGeom>
-          </p:spPr>
-          <p:style>
-            <a:lnRef idx="2">
-              <a:schemeClr val="accent1"/>
-            </a:lnRef>
-            <a:fillRef idx="0">
-              <a:schemeClr val="accent1"/>
-            </a:fillRef>
-            <a:effectRef idx="1">
-              <a:schemeClr val="accent1"/>
-            </a:effectRef>
-            <a:fontRef idx="minor">
-              <a:schemeClr val="tx1"/>
-            </a:fontRef>
-          </p:style>
-        </p:cxnSp>
-        <p:cxnSp>
-          <p:nvCxnSpPr>
-            <p:cNvPr id="113" name="Straight Connector 112">
-              <a:extLst>
-                <a:ext uri="{FF2B5EF4-FFF2-40B4-BE49-F238E27FC236}">
-                  <a16:creationId xmlns:a16="http://schemas.microsoft.com/office/drawing/2014/main" id="{3368ACD3-90AD-57E6-B76A-8BCAC0095095}"/>
-                </a:ext>
-              </a:extLst>
-            </p:cNvPr>
-            <p:cNvCxnSpPr>
-              <a:cxnSpLocks/>
-              <a:stCxn id="24" idx="0"/>
-              <a:endCxn id="23" idx="4"/>
-            </p:cNvCxnSpPr>
-            <p:nvPr/>
-          </p:nvCxnSpPr>
-          <p:spPr>
-            <a:xfrm flipV="1">
-              <a:off x="5948026" y="5787195"/>
-              <a:ext cx="491692" cy="78161"/>
-            </a:xfrm>
-            <a:prstGeom prst="line">
-              <a:avLst/>
-            </a:prstGeom>
-          </p:spPr>
-          <p:style>
-            <a:lnRef idx="2">
-              <a:schemeClr val="accent1"/>
-            </a:lnRef>
-            <a:fillRef idx="0">
-              <a:schemeClr val="accent1"/>
-            </a:fillRef>
-            <a:effectRef idx="1">
-              <a:schemeClr val="accent1"/>
-            </a:effectRef>
-            <a:fontRef idx="minor">
-              <a:schemeClr val="tx1"/>
-            </a:fontRef>
-          </p:style>
-        </p:cxnSp>
+          <p:txBody>
+            <a:bodyPr wrap="square" rtlCol="0">
+              <a:spAutoFit/>
+            </a:bodyPr>
+            <a:lstStyle/>
+            <a:p>
+              <a:r>
+                <a:rPr lang="en-US" sz="1400" dirty="0"/>
+                <a:t>Flow-level, logs, events  embedding| Metadata </a:t>
+              </a:r>
+            </a:p>
+          </p:txBody>
+        </p:sp>
       </p:grpSp>
-      <p:sp>
-        <p:nvSpPr>
-          <p:cNvPr id="11" name="TextBox 10">
-            <a:extLst>
-              <a:ext uri="{FF2B5EF4-FFF2-40B4-BE49-F238E27FC236}">
-                <a16:creationId xmlns:a16="http://schemas.microsoft.com/office/drawing/2014/main" id="{3F65E67E-0C4B-E7A7-C2AA-F6ADC83D50A6}"/>
-              </a:ext>
-            </a:extLst>
-          </p:cNvPr>
-          <p:cNvSpPr txBox="1"/>
-          <p:nvPr/>
-        </p:nvSpPr>
-        <p:spPr>
-          <a:xfrm>
-            <a:off x="2142249" y="5597628"/>
-            <a:ext cx="303718" cy="369332"/>
-          </a:xfrm>
-          <a:prstGeom prst="rect">
-            <a:avLst/>
-          </a:prstGeom>
-          <a:noFill/>
-        </p:spPr>
-        <p:txBody>
-          <a:bodyPr wrap="square" rtlCol="0">
-            <a:spAutoFit/>
-          </a:bodyPr>
-          <a:lstStyle/>
-          <a:p>
-            <a:r>
-              <a:rPr lang="en-US" altLang="zh-CN"/>
-              <a:t>1</a:t>
-            </a:r>
-            <a:endParaRPr lang="en-US"/>
-          </a:p>
-        </p:txBody>
-      </p:sp>
-      <p:sp>
-        <p:nvSpPr>
-          <p:cNvPr id="26" name="TextBox 25">
-            <a:extLst>
-              <a:ext uri="{FF2B5EF4-FFF2-40B4-BE49-F238E27FC236}">
-                <a16:creationId xmlns:a16="http://schemas.microsoft.com/office/drawing/2014/main" id="{5A3B2090-F6B4-3581-F8A8-F52D53D6F34F}"/>
-              </a:ext>
-            </a:extLst>
-          </p:cNvPr>
-          <p:cNvSpPr txBox="1"/>
-          <p:nvPr/>
-        </p:nvSpPr>
-        <p:spPr>
-          <a:xfrm>
-            <a:off x="4601431" y="5594113"/>
-            <a:ext cx="303718" cy="369332"/>
-          </a:xfrm>
-          <a:prstGeom prst="rect">
-            <a:avLst/>
-          </a:prstGeom>
-          <a:noFill/>
-        </p:spPr>
-        <p:txBody>
-          <a:bodyPr wrap="square" rtlCol="0">
-            <a:spAutoFit/>
-          </a:bodyPr>
-          <a:lstStyle/>
-          <a:p>
-            <a:r>
-              <a:rPr lang="en-US" altLang="zh-CN"/>
-              <a:t>2</a:t>
-            </a:r>
-            <a:endParaRPr lang="en-US"/>
-          </a:p>
-        </p:txBody>
-      </p:sp>
-      <p:sp>
-        <p:nvSpPr>
-          <p:cNvPr id="27" name="TextBox 26">
-            <a:extLst>
-              <a:ext uri="{FF2B5EF4-FFF2-40B4-BE49-F238E27FC236}">
-                <a16:creationId xmlns:a16="http://schemas.microsoft.com/office/drawing/2014/main" id="{50D3E9FE-7775-2CFB-20E3-5ECAA03D6AA4}"/>
-              </a:ext>
-            </a:extLst>
-          </p:cNvPr>
-          <p:cNvSpPr txBox="1"/>
-          <p:nvPr/>
-        </p:nvSpPr>
-        <p:spPr>
-          <a:xfrm>
-            <a:off x="1055426" y="3732918"/>
-            <a:ext cx="303718" cy="369332"/>
-          </a:xfrm>
-          <a:prstGeom prst="rect">
-            <a:avLst/>
-          </a:prstGeom>
-          <a:noFill/>
-        </p:spPr>
-        <p:txBody>
-          <a:bodyPr wrap="square" rtlCol="0">
-            <a:spAutoFit/>
-          </a:bodyPr>
-          <a:lstStyle/>
-          <a:p>
-            <a:r>
-              <a:rPr lang="en-US" altLang="zh-CN"/>
-              <a:t>3</a:t>
-            </a:r>
-            <a:endParaRPr lang="en-US"/>
-          </a:p>
-        </p:txBody>
-      </p:sp>
-      <p:sp>
-        <p:nvSpPr>
-          <p:cNvPr id="30" name="TextBox 29">
-            <a:extLst>
-              <a:ext uri="{FF2B5EF4-FFF2-40B4-BE49-F238E27FC236}">
-                <a16:creationId xmlns:a16="http://schemas.microsoft.com/office/drawing/2014/main" id="{35A90ADA-4ED2-EA0D-C51B-D9962D708F97}"/>
-              </a:ext>
-            </a:extLst>
-          </p:cNvPr>
-          <p:cNvSpPr txBox="1"/>
-          <p:nvPr/>
-        </p:nvSpPr>
-        <p:spPr>
-          <a:xfrm>
-            <a:off x="5110576" y="2805108"/>
-            <a:ext cx="303718" cy="369332"/>
-          </a:xfrm>
-          <a:prstGeom prst="rect">
-            <a:avLst/>
-          </a:prstGeom>
-          <a:noFill/>
-        </p:spPr>
-        <p:txBody>
-          <a:bodyPr wrap="square" rtlCol="0">
-            <a:spAutoFit/>
-          </a:bodyPr>
-          <a:lstStyle/>
-          <a:p>
-            <a:r>
-              <a:rPr lang="en-US" altLang="zh-CN"/>
-              <a:t>5</a:t>
-            </a:r>
-            <a:endParaRPr lang="en-US"/>
-          </a:p>
-        </p:txBody>
-      </p:sp>
-      <p:sp>
-        <p:nvSpPr>
-          <p:cNvPr id="33" name="TextBox 32">
-            <a:extLst>
-              <a:ext uri="{FF2B5EF4-FFF2-40B4-BE49-F238E27FC236}">
-                <a16:creationId xmlns:a16="http://schemas.microsoft.com/office/drawing/2014/main" id="{B8F9C0DF-9C3A-1217-442A-C22496842740}"/>
-              </a:ext>
-            </a:extLst>
-          </p:cNvPr>
-          <p:cNvSpPr txBox="1"/>
-          <p:nvPr/>
-        </p:nvSpPr>
-        <p:spPr>
-          <a:xfrm>
-            <a:off x="2569029" y="2380118"/>
-            <a:ext cx="332657" cy="369332"/>
-          </a:xfrm>
-          <a:prstGeom prst="rect">
-            <a:avLst/>
-          </a:prstGeom>
-          <a:noFill/>
-        </p:spPr>
-        <p:txBody>
-          <a:bodyPr wrap="square" rtlCol="0">
-            <a:spAutoFit/>
-          </a:bodyPr>
-          <a:lstStyle/>
-          <a:p>
-            <a:r>
-              <a:rPr lang="en-US" altLang="zh-CN" dirty="0"/>
-              <a:t>4</a:t>
-            </a:r>
-            <a:endParaRPr lang="en-US" dirty="0"/>
-          </a:p>
-        </p:txBody>
-      </p:sp>
-      <p:cxnSp>
-        <p:nvCxnSpPr>
-          <p:cNvPr id="44" name="Straight Arrow Connector 43">
-            <a:extLst>
-              <a:ext uri="{FF2B5EF4-FFF2-40B4-BE49-F238E27FC236}">
-                <a16:creationId xmlns:a16="http://schemas.microsoft.com/office/drawing/2014/main" id="{AB8106FF-636B-AB03-E5F0-D78D50008D2F}"/>
-              </a:ext>
-            </a:extLst>
-          </p:cNvPr>
-          <p:cNvCxnSpPr>
-            <a:stCxn id="61" idx="3"/>
-          </p:cNvCxnSpPr>
-          <p:nvPr/>
-        </p:nvCxnSpPr>
-        <p:spPr>
-          <a:xfrm>
-            <a:off x="6231722" y="3269569"/>
-            <a:ext cx="0" cy="1094642"/>
-          </a:xfrm>
-          <a:prstGeom prst="straightConnector1">
-            <a:avLst/>
-          </a:prstGeom>
-          <a:ln>
-            <a:prstDash val="lgDash"/>
-            <a:tailEnd type="triangle"/>
-          </a:ln>
-        </p:spPr>
-        <p:style>
-          <a:lnRef idx="2">
-            <a:schemeClr val="accent1"/>
-          </a:lnRef>
-          <a:fillRef idx="0">
-            <a:schemeClr val="accent1"/>
-          </a:fillRef>
-          <a:effectRef idx="1">
-            <a:schemeClr val="accent1"/>
-          </a:effectRef>
-          <a:fontRef idx="minor">
-            <a:schemeClr val="tx1"/>
-          </a:fontRef>
-        </p:style>
-      </p:cxnSp>
     </p:spTree>
     <p:extLst>
       <p:ext uri="{BB962C8B-B14F-4D97-AF65-F5344CB8AC3E}">
@@ -47477,92 +47644,6 @@
   <p:clrMapOvr>
     <a:masterClrMapping/>
   </p:clrMapOvr>
-  <p:timing>
-    <p:tnLst>
-      <p:par>
-        <p:cTn id="1" dur="indefinite" restart="never" nodeType="tmRoot">
-          <p:childTnLst>
-            <p:seq concurrent="1" nextAc="seek">
-              <p:cTn id="2" dur="indefinite" nodeType="mainSeq">
-                <p:childTnLst>
-                  <p:par>
-                    <p:cTn id="3" fill="hold">
-                      <p:stCondLst>
-                        <p:cond delay="indefinite"/>
-                      </p:stCondLst>
-                      <p:childTnLst>
-                        <p:par>
-                          <p:cTn id="4" fill="hold">
-                            <p:stCondLst>
-                              <p:cond delay="0"/>
-                            </p:stCondLst>
-                            <p:childTnLst>
-                              <p:par>
-                                <p:cTn id="5" presetID="9" presetClass="entr" presetSubtype="0" fill="hold" grpId="0" nodeType="clickEffect">
-                                  <p:stCondLst>
-                                    <p:cond delay="0"/>
-                                  </p:stCondLst>
-                                  <p:childTnLst>
-                                    <p:set>
-                                      <p:cBhvr>
-                                        <p:cTn id="6" dur="1" fill="hold">
-                                          <p:stCondLst>
-                                            <p:cond delay="0"/>
-                                          </p:stCondLst>
-                                        </p:cTn>
-                                        <p:tgtEl>
-                                          <p:spTgt spid="9"/>
-                                        </p:tgtEl>
-                                        <p:attrNameLst>
-                                          <p:attrName>style.visibility</p:attrName>
-                                        </p:attrNameLst>
-                                      </p:cBhvr>
-                                      <p:to>
-                                        <p:strVal val="visible"/>
-                                      </p:to>
-                                    </p:set>
-                                    <p:animEffect transition="in" filter="dissolve">
-                                      <p:cBhvr>
-                                        <p:cTn id="7" dur="500"/>
-                                        <p:tgtEl>
-                                          <p:spTgt spid="9"/>
-                                        </p:tgtEl>
-                                      </p:cBhvr>
-                                    </p:animEffect>
-                                  </p:childTnLst>
-                                </p:cTn>
-                              </p:par>
-                            </p:childTnLst>
-                          </p:cTn>
-                        </p:par>
-                      </p:childTnLst>
-                    </p:cTn>
-                  </p:par>
-                </p:childTnLst>
-              </p:cTn>
-              <p:prevCondLst>
-                <p:cond evt="onPrev" delay="0">
-                  <p:tgtEl>
-                    <p:sldTgt/>
-                  </p:tgtEl>
-                </p:cond>
-              </p:prevCondLst>
-              <p:nextCondLst>
-                <p:cond evt="onNext" delay="0">
-                  <p:tgtEl>
-                    <p:sldTgt/>
-                  </p:tgtEl>
-                </p:cond>
-              </p:nextCondLst>
-            </p:seq>
-          </p:childTnLst>
-        </p:cTn>
-      </p:par>
-    </p:tnLst>
-    <p:bldLst>
-      <p:bldP spid="9" grpId="0" animBg="1"/>
-    </p:bldLst>
-  </p:timing>
 </p:sld>
 </file>
 
@@ -47783,7 +47864,7 @@
         <p:spPr>
           <a:xfrm>
             <a:off x="457200" y="4430486"/>
-            <a:ext cx="5137266" cy="2031325"/>
+            <a:ext cx="5137266" cy="1754326"/>
           </a:xfrm>
           <a:prstGeom prst="rect">
             <a:avLst/>
@@ -47825,16 +47906,6 @@
               <a:t>Technique</a:t>
             </a:r>
             <a:endParaRPr lang="en-GB" dirty="0"/>
-          </a:p>
-          <a:p>
-            <a:pPr marL="742950" lvl="1" indent="-285750">
-              <a:buFont typeface="Arial" panose="020B0604020202020204" pitchFamily="34" charset="0"/>
-              <a:buChar char="•"/>
-            </a:pPr>
-            <a:r>
-              <a:rPr lang="en-GB" dirty="0"/>
-              <a:t>Feature Selection (manual/statistical)</a:t>
-            </a:r>
           </a:p>
           <a:p>
             <a:pPr marL="742950" lvl="1" indent="-285750">
@@ -47915,7 +47986,7 @@
 </file>
 
 <file path=ppt/slides/slide9.xml><?xml version="1.0" encoding="utf-8"?>
-<p:sld xmlns:a="http://schemas.openxmlformats.org/drawingml/2006/main" xmlns:r="http://schemas.openxmlformats.org/officeDocument/2006/relationships" xmlns:p="http://schemas.openxmlformats.org/presentationml/2006/main" show="0">
+<p:sld xmlns:a="http://schemas.openxmlformats.org/drawingml/2006/main" xmlns:r="http://schemas.openxmlformats.org/officeDocument/2006/relationships" xmlns:p="http://schemas.openxmlformats.org/presentationml/2006/main">
   <p:cSld>
     <p:spTree>
       <p:nvGrpSpPr>
@@ -47968,30 +48039,6 @@
             <a:r>
               <a:rPr sz="2800" dirty="0"/>
               <a:t>Methodology: </a:t>
-            </a:r>
-            <a:r>
-              <a:rPr lang="en-GB" sz="2800" dirty="0"/>
-              <a:t>Data</a:t>
-            </a:r>
-            <a:r>
-              <a:rPr lang="en-US" altLang="zh-CN" sz="2800" dirty="0"/>
-              <a:t>s</a:t>
-            </a:r>
-            <a:r>
-              <a:rPr lang="en-GB" sz="2800" dirty="0"/>
-              <a:t>et</a:t>
-            </a:r>
-            <a:r>
-              <a:rPr lang="zh-CN" altLang="en-US" sz="2800" dirty="0"/>
-              <a:t> </a:t>
-            </a:r>
-            <a:r>
-              <a:rPr lang="en-US" altLang="zh-CN" sz="2800" dirty="0"/>
-              <a:t>&amp;</a:t>
-            </a:r>
-            <a:r>
-              <a:rPr lang="zh-CN" altLang="en-US" sz="2800" dirty="0"/>
-              <a:t> </a:t>
             </a:r>
             <a:r>
               <a:rPr lang="en-GB" sz="2800" dirty="0"/>
